--- a/Linear_Algebra/w5_03_Deep_Learning_with_pytorch.pptx
+++ b/Linear_Algebra/w5_03_Deep_Learning_with_pytorch.pptx
@@ -5,10 +5,10 @@
     <p:sldMasterId id="2147483660" r:id="rId1"/>
   </p:sldMasterIdLst>
   <p:notesMasterIdLst>
-    <p:notesMasterId r:id="rId18"/>
+    <p:notesMasterId r:id="rId21"/>
   </p:notesMasterIdLst>
   <p:handoutMasterIdLst>
-    <p:handoutMasterId r:id="rId19"/>
+    <p:handoutMasterId r:id="rId22"/>
   </p:handoutMasterIdLst>
   <p:sldIdLst>
     <p:sldId id="1074" r:id="rId2"/>
@@ -27,6 +27,9 @@
     <p:sldId id="921" r:id="rId15"/>
     <p:sldId id="1084" r:id="rId16"/>
     <p:sldId id="1083" r:id="rId17"/>
+    <p:sldId id="980" r:id="rId18"/>
+    <p:sldId id="1085" r:id="rId19"/>
+    <p:sldId id="1086" r:id="rId20"/>
   </p:sldIdLst>
   <p:sldSz cx="12192000" cy="6858000"/>
   <p:notesSz cx="6858000" cy="9144000"/>
@@ -149,6 +152,9 @@
             <p14:sldId id="921"/>
             <p14:sldId id="1084"/>
             <p14:sldId id="1083"/>
+            <p14:sldId id="980"/>
+            <p14:sldId id="1085"/>
+            <p14:sldId id="1086"/>
           </p14:sldIdLst>
         </p14:section>
         <p14:section name="자세한 정보" id="{2CC34DB2-6590-42C0-AD4B-A04C6060184E}">
@@ -1326,6 +1332,360 @@
     <p:extLst>
       <p:ext uri="{BB962C8B-B14F-4D97-AF65-F5344CB8AC3E}">
         <p14:creationId xmlns:p14="http://schemas.microsoft.com/office/powerpoint/2010/main" val="3256942886"/>
+      </p:ext>
+    </p:extLst>
+  </p:cSld>
+  <p:clrMapOvr>
+    <a:masterClrMapping/>
+  </p:clrMapOvr>
+</p:notes>
+</file>
+
+<file path=ppt/notesSlides/notesSlide14.xml><?xml version="1.0" encoding="utf-8"?>
+<p:notes xmlns:a="http://schemas.openxmlformats.org/drawingml/2006/main" xmlns:r="http://schemas.openxmlformats.org/officeDocument/2006/relationships" xmlns:p="http://schemas.openxmlformats.org/presentationml/2006/main">
+  <p:cSld>
+    <p:spTree>
+      <p:nvGrpSpPr>
+        <p:cNvPr id="1" name="">
+          <a:extLst>
+            <a:ext uri="{FF2B5EF4-FFF2-40B4-BE49-F238E27FC236}">
+              <a16:creationId xmlns:a16="http://schemas.microsoft.com/office/drawing/2014/main" id="{9B23F987-F2FF-8FE5-C93A-60FA8597FFE8}"/>
+            </a:ext>
+          </a:extLst>
+        </p:cNvPr>
+        <p:cNvGrpSpPr/>
+        <p:nvPr/>
+      </p:nvGrpSpPr>
+      <p:grpSpPr>
+        <a:xfrm>
+          <a:off x="0" y="0"/>
+          <a:ext cx="0" cy="0"/>
+          <a:chOff x="0" y="0"/>
+          <a:chExt cx="0" cy="0"/>
+        </a:xfrm>
+      </p:grpSpPr>
+      <p:sp>
+        <p:nvSpPr>
+          <p:cNvPr id="2" name="슬라이드 이미지 개체 틀 1">
+            <a:extLst>
+              <a:ext uri="{FF2B5EF4-FFF2-40B4-BE49-F238E27FC236}">
+                <a16:creationId xmlns:a16="http://schemas.microsoft.com/office/drawing/2014/main" id="{66FE57C7-7F72-B9F3-D10C-DF821448FC5E}"/>
+              </a:ext>
+            </a:extLst>
+          </p:cNvPr>
+          <p:cNvSpPr>
+            <a:spLocks noGrp="1" noRot="1" noChangeAspect="1"/>
+          </p:cNvSpPr>
+          <p:nvPr>
+            <p:ph type="sldImg"/>
+          </p:nvPr>
+        </p:nvSpPr>
+        <p:spPr/>
+      </p:sp>
+      <p:sp>
+        <p:nvSpPr>
+          <p:cNvPr id="3" name="슬라이드 노트 개체 틀 2">
+            <a:extLst>
+              <a:ext uri="{FF2B5EF4-FFF2-40B4-BE49-F238E27FC236}">
+                <a16:creationId xmlns:a16="http://schemas.microsoft.com/office/drawing/2014/main" id="{82A86459-E845-2D50-AAA1-9332006DD1EA}"/>
+              </a:ext>
+            </a:extLst>
+          </p:cNvPr>
+          <p:cNvSpPr>
+            <a:spLocks noGrp="1"/>
+          </p:cNvSpPr>
+          <p:nvPr>
+            <p:ph type="body" idx="1"/>
+          </p:nvPr>
+        </p:nvSpPr>
+        <p:spPr/>
+        <p:txBody>
+          <a:bodyPr/>
+          <a:lstStyle/>
+          <a:p>
+            <a:endParaRPr lang="ko-KR" altLang="en-US">
+              <a:latin typeface="맑은 고딕" panose="020B0503020000020004" pitchFamily="50" charset="-127"/>
+              <a:ea typeface="맑은 고딕" panose="020B0503020000020004" pitchFamily="50" charset="-127"/>
+            </a:endParaRPr>
+          </a:p>
+        </p:txBody>
+      </p:sp>
+      <p:sp>
+        <p:nvSpPr>
+          <p:cNvPr id="4" name="슬라이드 번호 개체 틀 3">
+            <a:extLst>
+              <a:ext uri="{FF2B5EF4-FFF2-40B4-BE49-F238E27FC236}">
+                <a16:creationId xmlns:a16="http://schemas.microsoft.com/office/drawing/2014/main" id="{CC1FD7CA-87C4-81E5-E6F3-143D2EFEDBA2}"/>
+              </a:ext>
+            </a:extLst>
+          </p:cNvPr>
+          <p:cNvSpPr>
+            <a:spLocks noGrp="1"/>
+          </p:cNvSpPr>
+          <p:nvPr>
+            <p:ph type="sldNum" sz="quarter" idx="5"/>
+          </p:nvPr>
+        </p:nvSpPr>
+        <p:spPr/>
+        <p:txBody>
+          <a:bodyPr/>
+          <a:lstStyle/>
+          <a:p>
+            <a:pPr rtl="0"/>
+            <a:fld id="{DF61EA0F-A667-4B49-8422-0062BC55E249}" type="slidenum">
+              <a:rPr lang="en-US" altLang="ko-KR" smtClean="0">
+                <a:latin typeface="맑은 고딕" panose="020B0503020000020004" pitchFamily="50" charset="-127"/>
+                <a:ea typeface="맑은 고딕" panose="020B0503020000020004" pitchFamily="50" charset="-127"/>
+              </a:rPr>
+              <a:t>17</a:t>
+            </a:fld>
+            <a:endParaRPr lang="ko-KR" altLang="en-US">
+              <a:latin typeface="맑은 고딕" panose="020B0503020000020004" pitchFamily="50" charset="-127"/>
+              <a:ea typeface="맑은 고딕" panose="020B0503020000020004" pitchFamily="50" charset="-127"/>
+            </a:endParaRPr>
+          </a:p>
+        </p:txBody>
+      </p:sp>
+    </p:spTree>
+    <p:extLst>
+      <p:ext uri="{BB962C8B-B14F-4D97-AF65-F5344CB8AC3E}">
+        <p14:creationId xmlns:p14="http://schemas.microsoft.com/office/powerpoint/2010/main" val="1369961128"/>
+      </p:ext>
+    </p:extLst>
+  </p:cSld>
+  <p:clrMapOvr>
+    <a:masterClrMapping/>
+  </p:clrMapOvr>
+</p:notes>
+</file>
+
+<file path=ppt/notesSlides/notesSlide15.xml><?xml version="1.0" encoding="utf-8"?>
+<p:notes xmlns:a="http://schemas.openxmlformats.org/drawingml/2006/main" xmlns:r="http://schemas.openxmlformats.org/officeDocument/2006/relationships" xmlns:p="http://schemas.openxmlformats.org/presentationml/2006/main">
+  <p:cSld>
+    <p:spTree>
+      <p:nvGrpSpPr>
+        <p:cNvPr id="1" name="">
+          <a:extLst>
+            <a:ext uri="{FF2B5EF4-FFF2-40B4-BE49-F238E27FC236}">
+              <a16:creationId xmlns:a16="http://schemas.microsoft.com/office/drawing/2014/main" id="{B917560D-60B5-CBEE-2F03-3A123D207134}"/>
+            </a:ext>
+          </a:extLst>
+        </p:cNvPr>
+        <p:cNvGrpSpPr/>
+        <p:nvPr/>
+      </p:nvGrpSpPr>
+      <p:grpSpPr>
+        <a:xfrm>
+          <a:off x="0" y="0"/>
+          <a:ext cx="0" cy="0"/>
+          <a:chOff x="0" y="0"/>
+          <a:chExt cx="0" cy="0"/>
+        </a:xfrm>
+      </p:grpSpPr>
+      <p:sp>
+        <p:nvSpPr>
+          <p:cNvPr id="2" name="슬라이드 이미지 개체 틀 1">
+            <a:extLst>
+              <a:ext uri="{FF2B5EF4-FFF2-40B4-BE49-F238E27FC236}">
+                <a16:creationId xmlns:a16="http://schemas.microsoft.com/office/drawing/2014/main" id="{101AF83A-0425-14D8-7169-A42513D0E0C9}"/>
+              </a:ext>
+            </a:extLst>
+          </p:cNvPr>
+          <p:cNvSpPr>
+            <a:spLocks noGrp="1" noRot="1" noChangeAspect="1"/>
+          </p:cNvSpPr>
+          <p:nvPr>
+            <p:ph type="sldImg"/>
+          </p:nvPr>
+        </p:nvSpPr>
+        <p:spPr/>
+      </p:sp>
+      <p:sp>
+        <p:nvSpPr>
+          <p:cNvPr id="3" name="슬라이드 노트 개체 틀 2">
+            <a:extLst>
+              <a:ext uri="{FF2B5EF4-FFF2-40B4-BE49-F238E27FC236}">
+                <a16:creationId xmlns:a16="http://schemas.microsoft.com/office/drawing/2014/main" id="{93D1CB96-AE80-F4E7-D3FD-BA86D28B955A}"/>
+              </a:ext>
+            </a:extLst>
+          </p:cNvPr>
+          <p:cNvSpPr>
+            <a:spLocks noGrp="1"/>
+          </p:cNvSpPr>
+          <p:nvPr>
+            <p:ph type="body" idx="1"/>
+          </p:nvPr>
+        </p:nvSpPr>
+        <p:spPr/>
+        <p:txBody>
+          <a:bodyPr/>
+          <a:lstStyle/>
+          <a:p>
+            <a:endParaRPr lang="ko-KR" altLang="en-US">
+              <a:latin typeface="맑은 고딕" panose="020B0503020000020004" pitchFamily="50" charset="-127"/>
+              <a:ea typeface="맑은 고딕" panose="020B0503020000020004" pitchFamily="50" charset="-127"/>
+            </a:endParaRPr>
+          </a:p>
+        </p:txBody>
+      </p:sp>
+      <p:sp>
+        <p:nvSpPr>
+          <p:cNvPr id="4" name="슬라이드 번호 개체 틀 3">
+            <a:extLst>
+              <a:ext uri="{FF2B5EF4-FFF2-40B4-BE49-F238E27FC236}">
+                <a16:creationId xmlns:a16="http://schemas.microsoft.com/office/drawing/2014/main" id="{7A08AF8D-086C-219C-9037-D25A219E2135}"/>
+              </a:ext>
+            </a:extLst>
+          </p:cNvPr>
+          <p:cNvSpPr>
+            <a:spLocks noGrp="1"/>
+          </p:cNvSpPr>
+          <p:nvPr>
+            <p:ph type="sldNum" sz="quarter" idx="5"/>
+          </p:nvPr>
+        </p:nvSpPr>
+        <p:spPr/>
+        <p:txBody>
+          <a:bodyPr/>
+          <a:lstStyle/>
+          <a:p>
+            <a:pPr rtl="0"/>
+            <a:fld id="{DF61EA0F-A667-4B49-8422-0062BC55E249}" type="slidenum">
+              <a:rPr lang="en-US" altLang="ko-KR" smtClean="0">
+                <a:latin typeface="맑은 고딕" panose="020B0503020000020004" pitchFamily="50" charset="-127"/>
+                <a:ea typeface="맑은 고딕" panose="020B0503020000020004" pitchFamily="50" charset="-127"/>
+              </a:rPr>
+              <a:t>18</a:t>
+            </a:fld>
+            <a:endParaRPr lang="ko-KR" altLang="en-US">
+              <a:latin typeface="맑은 고딕" panose="020B0503020000020004" pitchFamily="50" charset="-127"/>
+              <a:ea typeface="맑은 고딕" panose="020B0503020000020004" pitchFamily="50" charset="-127"/>
+            </a:endParaRPr>
+          </a:p>
+        </p:txBody>
+      </p:sp>
+    </p:spTree>
+    <p:extLst>
+      <p:ext uri="{BB962C8B-B14F-4D97-AF65-F5344CB8AC3E}">
+        <p14:creationId xmlns:p14="http://schemas.microsoft.com/office/powerpoint/2010/main" val="1597348809"/>
+      </p:ext>
+    </p:extLst>
+  </p:cSld>
+  <p:clrMapOvr>
+    <a:masterClrMapping/>
+  </p:clrMapOvr>
+</p:notes>
+</file>
+
+<file path=ppt/notesSlides/notesSlide16.xml><?xml version="1.0" encoding="utf-8"?>
+<p:notes xmlns:a="http://schemas.openxmlformats.org/drawingml/2006/main" xmlns:r="http://schemas.openxmlformats.org/officeDocument/2006/relationships" xmlns:p="http://schemas.openxmlformats.org/presentationml/2006/main">
+  <p:cSld>
+    <p:spTree>
+      <p:nvGrpSpPr>
+        <p:cNvPr id="1" name="">
+          <a:extLst>
+            <a:ext uri="{FF2B5EF4-FFF2-40B4-BE49-F238E27FC236}">
+              <a16:creationId xmlns:a16="http://schemas.microsoft.com/office/drawing/2014/main" id="{9600FFF8-5E85-392B-AFBA-C8C2C348186C}"/>
+            </a:ext>
+          </a:extLst>
+        </p:cNvPr>
+        <p:cNvGrpSpPr/>
+        <p:nvPr/>
+      </p:nvGrpSpPr>
+      <p:grpSpPr>
+        <a:xfrm>
+          <a:off x="0" y="0"/>
+          <a:ext cx="0" cy="0"/>
+          <a:chOff x="0" y="0"/>
+          <a:chExt cx="0" cy="0"/>
+        </a:xfrm>
+      </p:grpSpPr>
+      <p:sp>
+        <p:nvSpPr>
+          <p:cNvPr id="2" name="슬라이드 이미지 개체 틀 1">
+            <a:extLst>
+              <a:ext uri="{FF2B5EF4-FFF2-40B4-BE49-F238E27FC236}">
+                <a16:creationId xmlns:a16="http://schemas.microsoft.com/office/drawing/2014/main" id="{C1DC3C4C-7CA5-379A-4D68-CC0877C59193}"/>
+              </a:ext>
+            </a:extLst>
+          </p:cNvPr>
+          <p:cNvSpPr>
+            <a:spLocks noGrp="1" noRot="1" noChangeAspect="1"/>
+          </p:cNvSpPr>
+          <p:nvPr>
+            <p:ph type="sldImg"/>
+          </p:nvPr>
+        </p:nvSpPr>
+        <p:spPr/>
+      </p:sp>
+      <p:sp>
+        <p:nvSpPr>
+          <p:cNvPr id="3" name="슬라이드 노트 개체 틀 2">
+            <a:extLst>
+              <a:ext uri="{FF2B5EF4-FFF2-40B4-BE49-F238E27FC236}">
+                <a16:creationId xmlns:a16="http://schemas.microsoft.com/office/drawing/2014/main" id="{5A31F4A3-BB6C-EAD5-68BA-292377F942CB}"/>
+              </a:ext>
+            </a:extLst>
+          </p:cNvPr>
+          <p:cNvSpPr>
+            <a:spLocks noGrp="1"/>
+          </p:cNvSpPr>
+          <p:nvPr>
+            <p:ph type="body" idx="1"/>
+          </p:nvPr>
+        </p:nvSpPr>
+        <p:spPr/>
+        <p:txBody>
+          <a:bodyPr/>
+          <a:lstStyle/>
+          <a:p>
+            <a:endParaRPr lang="ko-KR" altLang="en-US">
+              <a:latin typeface="맑은 고딕" panose="020B0503020000020004" pitchFamily="50" charset="-127"/>
+              <a:ea typeface="맑은 고딕" panose="020B0503020000020004" pitchFamily="50" charset="-127"/>
+            </a:endParaRPr>
+          </a:p>
+        </p:txBody>
+      </p:sp>
+      <p:sp>
+        <p:nvSpPr>
+          <p:cNvPr id="4" name="슬라이드 번호 개체 틀 3">
+            <a:extLst>
+              <a:ext uri="{FF2B5EF4-FFF2-40B4-BE49-F238E27FC236}">
+                <a16:creationId xmlns:a16="http://schemas.microsoft.com/office/drawing/2014/main" id="{70695D60-306A-8282-2FD7-EE3C28126831}"/>
+              </a:ext>
+            </a:extLst>
+          </p:cNvPr>
+          <p:cNvSpPr>
+            <a:spLocks noGrp="1"/>
+          </p:cNvSpPr>
+          <p:nvPr>
+            <p:ph type="sldNum" sz="quarter" idx="5"/>
+          </p:nvPr>
+        </p:nvSpPr>
+        <p:spPr/>
+        <p:txBody>
+          <a:bodyPr/>
+          <a:lstStyle/>
+          <a:p>
+            <a:pPr rtl="0"/>
+            <a:fld id="{DF61EA0F-A667-4B49-8422-0062BC55E249}" type="slidenum">
+              <a:rPr lang="en-US" altLang="ko-KR" smtClean="0">
+                <a:latin typeface="맑은 고딕" panose="020B0503020000020004" pitchFamily="50" charset="-127"/>
+                <a:ea typeface="맑은 고딕" panose="020B0503020000020004" pitchFamily="50" charset="-127"/>
+              </a:rPr>
+              <a:t>19</a:t>
+            </a:fld>
+            <a:endParaRPr lang="ko-KR" altLang="en-US">
+              <a:latin typeface="맑은 고딕" panose="020B0503020000020004" pitchFamily="50" charset="-127"/>
+              <a:ea typeface="맑은 고딕" panose="020B0503020000020004" pitchFamily="50" charset="-127"/>
+            </a:endParaRPr>
+          </a:p>
+        </p:txBody>
+      </p:sp>
+    </p:spTree>
+    <p:extLst>
+      <p:ext uri="{BB962C8B-B14F-4D97-AF65-F5344CB8AC3E}">
+        <p14:creationId xmlns:p14="http://schemas.microsoft.com/office/powerpoint/2010/main" val="1831474701"/>
       </p:ext>
     </p:extLst>
   </p:cSld>
@@ -9457,6 +9817,1814 @@
 </p:sld>
 </file>
 
+<file path=ppt/slides/slide17.xml><?xml version="1.0" encoding="utf-8"?>
+<p:sld xmlns:a="http://schemas.openxmlformats.org/drawingml/2006/main" xmlns:r="http://schemas.openxmlformats.org/officeDocument/2006/relationships" xmlns:p="http://schemas.openxmlformats.org/presentationml/2006/main">
+  <p:cSld>
+    <p:spTree>
+      <p:nvGrpSpPr>
+        <p:cNvPr id="1" name="">
+          <a:extLst>
+            <a:ext uri="{FF2B5EF4-FFF2-40B4-BE49-F238E27FC236}">
+              <a16:creationId xmlns:a16="http://schemas.microsoft.com/office/drawing/2014/main" id="{B63ECCFD-463F-7127-518A-5DC5407A9CB2}"/>
+            </a:ext>
+          </a:extLst>
+        </p:cNvPr>
+        <p:cNvGrpSpPr/>
+        <p:nvPr/>
+      </p:nvGrpSpPr>
+      <p:grpSpPr>
+        <a:xfrm>
+          <a:off x="0" y="0"/>
+          <a:ext cx="0" cy="0"/>
+          <a:chOff x="0" y="0"/>
+          <a:chExt cx="0" cy="0"/>
+        </a:xfrm>
+      </p:grpSpPr>
+      <p:sp>
+        <p:nvSpPr>
+          <p:cNvPr id="8" name="제목 7">
+            <a:extLst>
+              <a:ext uri="{FF2B5EF4-FFF2-40B4-BE49-F238E27FC236}">
+                <a16:creationId xmlns:a16="http://schemas.microsoft.com/office/drawing/2014/main" id="{99266F11-C291-BAA9-5735-0A5A7CFF4F5C}"/>
+              </a:ext>
+            </a:extLst>
+          </p:cNvPr>
+          <p:cNvSpPr>
+            <a:spLocks noGrp="1"/>
+          </p:cNvSpPr>
+          <p:nvPr>
+            <p:ph type="title"/>
+          </p:nvPr>
+        </p:nvSpPr>
+        <p:spPr>
+          <a:xfrm>
+            <a:off x="521207" y="448056"/>
+            <a:ext cx="8135613" cy="640080"/>
+          </a:xfrm>
+        </p:spPr>
+        <p:txBody>
+          <a:bodyPr rtlCol="0">
+            <a:noAutofit/>
+          </a:bodyPr>
+          <a:lstStyle/>
+          <a:p>
+            <a:pPr rtl="0"/>
+            <a:r>
+              <a:rPr lang="en-US" altLang="ko-KR" dirty="0" err="1">
+                <a:cs typeface="Segoe UI Light" panose="020B0502040204020203" pitchFamily="34" charset="0"/>
+              </a:rPr>
+              <a:t>pytorch</a:t>
+            </a:r>
+            <a:r>
+              <a:rPr lang="ko-KR" altLang="en-US" dirty="0">
+                <a:cs typeface="Segoe UI Light" panose="020B0502040204020203" pitchFamily="34" charset="0"/>
+              </a:rPr>
+              <a:t> </a:t>
+            </a:r>
+            <a:r>
+              <a:rPr lang="en-US" altLang="ko-KR" dirty="0">
+                <a:cs typeface="Segoe UI Light" panose="020B0502040204020203" pitchFamily="34" charset="0"/>
+              </a:rPr>
+              <a:t>tutorial</a:t>
+            </a:r>
+            <a:endParaRPr lang="ko-KR" altLang="en-US" dirty="0">
+              <a:cs typeface="Segoe UI Light" panose="020B0502040204020203" pitchFamily="34" charset="0"/>
+            </a:endParaRPr>
+          </a:p>
+        </p:txBody>
+      </p:sp>
+      <p:sp>
+        <p:nvSpPr>
+          <p:cNvPr id="12" name="슬라이드 번호 개체 틀 11">
+            <a:extLst>
+              <a:ext uri="{FF2B5EF4-FFF2-40B4-BE49-F238E27FC236}">
+                <a16:creationId xmlns:a16="http://schemas.microsoft.com/office/drawing/2014/main" id="{5D2A3FE8-AC2B-31B3-C63B-4CF02B6CB59D}"/>
+              </a:ext>
+            </a:extLst>
+          </p:cNvPr>
+          <p:cNvSpPr>
+            <a:spLocks noGrp="1"/>
+          </p:cNvSpPr>
+          <p:nvPr>
+            <p:ph type="sldNum" sz="quarter" idx="4"/>
+          </p:nvPr>
+        </p:nvSpPr>
+        <p:spPr/>
+        <p:txBody>
+          <a:bodyPr/>
+          <a:lstStyle/>
+          <a:p>
+            <a:fld id="{9860EDB8-5305-433F-BE41-D7A86D811DB3}" type="slidenum">
+              <a:rPr lang="en-US" altLang="ko-KR" noProof="0" smtClean="0"/>
+              <a:pPr/>
+              <a:t>17</a:t>
+            </a:fld>
+            <a:endParaRPr lang="ko-KR" altLang="en-US" noProof="0" dirty="0"/>
+          </a:p>
+        </p:txBody>
+      </p:sp>
+      <p:sp>
+        <p:nvSpPr>
+          <p:cNvPr id="16" name="TextBox 15">
+            <a:extLst>
+              <a:ext uri="{FF2B5EF4-FFF2-40B4-BE49-F238E27FC236}">
+                <a16:creationId xmlns:a16="http://schemas.microsoft.com/office/drawing/2014/main" id="{6DBC71BA-4391-0FA8-6E62-1CDC58F5E7DD}"/>
+              </a:ext>
+            </a:extLst>
+          </p:cNvPr>
+          <p:cNvSpPr txBox="1"/>
+          <p:nvPr/>
+        </p:nvSpPr>
+        <p:spPr>
+          <a:xfrm>
+            <a:off x="950697" y="1402638"/>
+            <a:ext cx="10553194" cy="4770537"/>
+          </a:xfrm>
+          <a:prstGeom prst="rect">
+            <a:avLst/>
+          </a:prstGeom>
+          <a:noFill/>
+        </p:spPr>
+        <p:txBody>
+          <a:bodyPr wrap="square" rtlCol="0">
+            <a:spAutoFit/>
+          </a:bodyPr>
+          <a:lstStyle/>
+          <a:p>
+            <a:pPr marL="342900" indent="-342900">
+              <a:buFont typeface="+mj-lt"/>
+              <a:buAutoNum type="arabicPeriod"/>
+            </a:pPr>
+            <a:r>
+              <a:rPr lang="en-US" altLang="ko-KR" sz="1600" dirty="0">
+                <a:latin typeface="맑은 고딕 Semilight" panose="020B0502040204020203" pitchFamily="50" charset="-127"/>
+                <a:ea typeface="맑은 고딕 Semilight" panose="020B0502040204020203" pitchFamily="50" charset="-127"/>
+                <a:cs typeface="맑은 고딕 Semilight" panose="020B0502040204020203" pitchFamily="50" charset="-127"/>
+              </a:rPr>
+              <a:t>Installation</a:t>
+            </a:r>
+          </a:p>
+          <a:p>
+            <a:pPr marL="342900" indent="-342900">
+              <a:buFont typeface="+mj-lt"/>
+              <a:buAutoNum type="arabicPeriod"/>
+            </a:pPr>
+            <a:r>
+              <a:rPr lang="en-US" altLang="ko-KR" sz="1600" dirty="0">
+                <a:latin typeface="맑은 고딕 Semilight" panose="020B0502040204020203" pitchFamily="50" charset="-127"/>
+                <a:ea typeface="맑은 고딕 Semilight" panose="020B0502040204020203" pitchFamily="50" charset="-127"/>
+                <a:cs typeface="맑은 고딕 Semilight" panose="020B0502040204020203" pitchFamily="50" charset="-127"/>
+              </a:rPr>
+              <a:t>Tensor Basics</a:t>
+            </a:r>
+          </a:p>
+          <a:p>
+            <a:pPr marL="342900" indent="-342900">
+              <a:buFont typeface="+mj-lt"/>
+              <a:buAutoNum type="arabicPeriod"/>
+            </a:pPr>
+            <a:r>
+              <a:rPr lang="en-US" altLang="ko-KR" sz="1600" dirty="0" err="1">
+                <a:latin typeface="맑은 고딕 Semilight" panose="020B0502040204020203" pitchFamily="50" charset="-127"/>
+                <a:ea typeface="맑은 고딕 Semilight" panose="020B0502040204020203" pitchFamily="50" charset="-127"/>
+                <a:cs typeface="맑은 고딕 Semilight" panose="020B0502040204020203" pitchFamily="50" charset="-127"/>
+              </a:rPr>
+              <a:t>Autograd</a:t>
+            </a:r>
+            <a:endParaRPr lang="en-US" altLang="ko-KR" sz="1600" dirty="0">
+              <a:latin typeface="맑은 고딕 Semilight" panose="020B0502040204020203" pitchFamily="50" charset="-127"/>
+              <a:ea typeface="맑은 고딕 Semilight" panose="020B0502040204020203" pitchFamily="50" charset="-127"/>
+              <a:cs typeface="맑은 고딕 Semilight" panose="020B0502040204020203" pitchFamily="50" charset="-127"/>
+            </a:endParaRPr>
+          </a:p>
+          <a:p>
+            <a:pPr marL="342900" indent="-342900">
+              <a:buFont typeface="+mj-lt"/>
+              <a:buAutoNum type="arabicPeriod"/>
+            </a:pPr>
+            <a:r>
+              <a:rPr lang="en-US" altLang="ko-KR" sz="1600" dirty="0">
+                <a:latin typeface="맑은 고딕 Semilight" panose="020B0502040204020203" pitchFamily="50" charset="-127"/>
+                <a:ea typeface="맑은 고딕 Semilight" panose="020B0502040204020203" pitchFamily="50" charset="-127"/>
+                <a:cs typeface="맑은 고딕 Semilight" panose="020B0502040204020203" pitchFamily="50" charset="-127"/>
+              </a:rPr>
+              <a:t>Backpropagation</a:t>
+            </a:r>
+          </a:p>
+          <a:p>
+            <a:pPr marL="342900" indent="-342900">
+              <a:buFont typeface="+mj-lt"/>
+              <a:buAutoNum type="arabicPeriod"/>
+            </a:pPr>
+            <a:r>
+              <a:rPr lang="en-US" altLang="ko-KR" sz="1600" dirty="0">
+                <a:latin typeface="맑은 고딕 Semilight" panose="020B0502040204020203" pitchFamily="50" charset="-127"/>
+                <a:ea typeface="맑은 고딕 Semilight" panose="020B0502040204020203" pitchFamily="50" charset="-127"/>
+                <a:cs typeface="맑은 고딕 Semilight" panose="020B0502040204020203" pitchFamily="50" charset="-127"/>
+              </a:rPr>
+              <a:t>Gradient Descent With </a:t>
+            </a:r>
+            <a:r>
+              <a:rPr lang="en-US" altLang="ko-KR" sz="1600" dirty="0" err="1">
+                <a:latin typeface="맑은 고딕 Semilight" panose="020B0502040204020203" pitchFamily="50" charset="-127"/>
+                <a:ea typeface="맑은 고딕 Semilight" panose="020B0502040204020203" pitchFamily="50" charset="-127"/>
+                <a:cs typeface="맑은 고딕 Semilight" panose="020B0502040204020203" pitchFamily="50" charset="-127"/>
+              </a:rPr>
+              <a:t>Autograd</a:t>
+            </a:r>
+            <a:r>
+              <a:rPr lang="en-US" altLang="ko-KR" sz="1600" dirty="0">
+                <a:latin typeface="맑은 고딕 Semilight" panose="020B0502040204020203" pitchFamily="50" charset="-127"/>
+                <a:ea typeface="맑은 고딕 Semilight" panose="020B0502040204020203" pitchFamily="50" charset="-127"/>
+                <a:cs typeface="맑은 고딕 Semilight" panose="020B0502040204020203" pitchFamily="50" charset="-127"/>
+              </a:rPr>
+              <a:t> and Backpropagation</a:t>
+            </a:r>
+          </a:p>
+          <a:p>
+            <a:pPr marL="342900" indent="-342900">
+              <a:buFont typeface="+mj-lt"/>
+              <a:buAutoNum type="arabicPeriod"/>
+            </a:pPr>
+            <a:r>
+              <a:rPr lang="en-US" altLang="ko-KR" sz="1600" dirty="0">
+                <a:latin typeface="맑은 고딕 Semilight" panose="020B0502040204020203" pitchFamily="50" charset="-127"/>
+                <a:ea typeface="맑은 고딕 Semilight" panose="020B0502040204020203" pitchFamily="50" charset="-127"/>
+                <a:cs typeface="맑은 고딕 Semilight" panose="020B0502040204020203" pitchFamily="50" charset="-127"/>
+              </a:rPr>
+              <a:t>Training Pipeline: Model, Loss, and Optimizer</a:t>
+            </a:r>
+          </a:p>
+          <a:p>
+            <a:pPr marL="342900" indent="-342900">
+              <a:buFont typeface="+mj-lt"/>
+              <a:buAutoNum type="arabicPeriod"/>
+            </a:pPr>
+            <a:r>
+              <a:rPr lang="en-US" altLang="ko-KR" sz="1600" dirty="0">
+                <a:latin typeface="맑은 고딕 Semilight" panose="020B0502040204020203" pitchFamily="50" charset="-127"/>
+                <a:ea typeface="맑은 고딕 Semilight" panose="020B0502040204020203" pitchFamily="50" charset="-127"/>
+                <a:cs typeface="맑은 고딕 Semilight" panose="020B0502040204020203" pitchFamily="50" charset="-127"/>
+              </a:rPr>
+              <a:t>Linear Regression</a:t>
+            </a:r>
+          </a:p>
+          <a:p>
+            <a:pPr marL="342900" indent="-342900">
+              <a:buFont typeface="+mj-lt"/>
+              <a:buAutoNum type="arabicPeriod"/>
+            </a:pPr>
+            <a:r>
+              <a:rPr lang="en-US" altLang="ko-KR" sz="1600" dirty="0">
+                <a:latin typeface="맑은 고딕 Semilight" panose="020B0502040204020203" pitchFamily="50" charset="-127"/>
+                <a:ea typeface="맑은 고딕 Semilight" panose="020B0502040204020203" pitchFamily="50" charset="-127"/>
+                <a:cs typeface="맑은 고딕 Semilight" panose="020B0502040204020203" pitchFamily="50" charset="-127"/>
+              </a:rPr>
+              <a:t>Logistic Regression</a:t>
+            </a:r>
+          </a:p>
+          <a:p>
+            <a:pPr marL="342900" indent="-342900">
+              <a:buFont typeface="+mj-lt"/>
+              <a:buAutoNum type="arabicPeriod"/>
+            </a:pPr>
+            <a:r>
+              <a:rPr lang="en-US" altLang="ko-KR" sz="1600" dirty="0">
+                <a:latin typeface="맑은 고딕 Semilight" panose="020B0502040204020203" pitchFamily="50" charset="-127"/>
+                <a:ea typeface="맑은 고딕 Semilight" panose="020B0502040204020203" pitchFamily="50" charset="-127"/>
+                <a:cs typeface="맑은 고딕 Semilight" panose="020B0502040204020203" pitchFamily="50" charset="-127"/>
+              </a:rPr>
+              <a:t>Dataset and </a:t>
+            </a:r>
+            <a:r>
+              <a:rPr lang="en-US" altLang="ko-KR" sz="1600" dirty="0" err="1">
+                <a:latin typeface="맑은 고딕 Semilight" panose="020B0502040204020203" pitchFamily="50" charset="-127"/>
+                <a:ea typeface="맑은 고딕 Semilight" panose="020B0502040204020203" pitchFamily="50" charset="-127"/>
+                <a:cs typeface="맑은 고딕 Semilight" panose="020B0502040204020203" pitchFamily="50" charset="-127"/>
+              </a:rPr>
+              <a:t>DataLoader</a:t>
+            </a:r>
+            <a:endParaRPr lang="en-US" altLang="ko-KR" sz="1600" dirty="0">
+              <a:latin typeface="맑은 고딕 Semilight" panose="020B0502040204020203" pitchFamily="50" charset="-127"/>
+              <a:ea typeface="맑은 고딕 Semilight" panose="020B0502040204020203" pitchFamily="50" charset="-127"/>
+              <a:cs typeface="맑은 고딕 Semilight" panose="020B0502040204020203" pitchFamily="50" charset="-127"/>
+            </a:endParaRPr>
+          </a:p>
+          <a:p>
+            <a:pPr marL="342900" indent="-342900">
+              <a:buFont typeface="+mj-lt"/>
+              <a:buAutoNum type="arabicPeriod"/>
+            </a:pPr>
+            <a:r>
+              <a:rPr lang="en-US" altLang="ko-KR" sz="1600" dirty="0">
+                <a:latin typeface="맑은 고딕 Semilight" panose="020B0502040204020203" pitchFamily="50" charset="-127"/>
+                <a:ea typeface="맑은 고딕 Semilight" panose="020B0502040204020203" pitchFamily="50" charset="-127"/>
+                <a:cs typeface="맑은 고딕 Semilight" panose="020B0502040204020203" pitchFamily="50" charset="-127"/>
+              </a:rPr>
+              <a:t>Dataset Transforms</a:t>
+            </a:r>
+          </a:p>
+          <a:p>
+            <a:pPr marL="342900" indent="-342900">
+              <a:buFont typeface="+mj-lt"/>
+              <a:buAutoNum type="arabicPeriod"/>
+            </a:pPr>
+            <a:r>
+              <a:rPr lang="en-US" altLang="ko-KR" sz="1600" dirty="0" err="1">
+                <a:latin typeface="맑은 고딕 Semilight" panose="020B0502040204020203" pitchFamily="50" charset="-127"/>
+                <a:ea typeface="맑은 고딕 Semilight" panose="020B0502040204020203" pitchFamily="50" charset="-127"/>
+                <a:cs typeface="맑은 고딕 Semilight" panose="020B0502040204020203" pitchFamily="50" charset="-127"/>
+              </a:rPr>
+              <a:t>Softmax</a:t>
+            </a:r>
+            <a:r>
+              <a:rPr lang="en-US" altLang="ko-KR" sz="1600" dirty="0">
+                <a:latin typeface="맑은 고딕 Semilight" panose="020B0502040204020203" pitchFamily="50" charset="-127"/>
+                <a:ea typeface="맑은 고딕 Semilight" panose="020B0502040204020203" pitchFamily="50" charset="-127"/>
+                <a:cs typeface="맑은 고딕 Semilight" panose="020B0502040204020203" pitchFamily="50" charset="-127"/>
+              </a:rPr>
+              <a:t> And Cross Entropy</a:t>
+            </a:r>
+          </a:p>
+          <a:p>
+            <a:pPr marL="342900" indent="-342900">
+              <a:buFont typeface="+mj-lt"/>
+              <a:buAutoNum type="arabicPeriod"/>
+            </a:pPr>
+            <a:r>
+              <a:rPr lang="en-US" altLang="ko-KR" sz="1600" dirty="0">
+                <a:latin typeface="맑은 고딕 Semilight" panose="020B0502040204020203" pitchFamily="50" charset="-127"/>
+                <a:ea typeface="맑은 고딕 Semilight" panose="020B0502040204020203" pitchFamily="50" charset="-127"/>
+                <a:cs typeface="맑은 고딕 Semilight" panose="020B0502040204020203" pitchFamily="50" charset="-127"/>
+              </a:rPr>
+              <a:t>Activation Functions</a:t>
+            </a:r>
+          </a:p>
+          <a:p>
+            <a:pPr marL="342900" indent="-342900">
+              <a:buFont typeface="+mj-lt"/>
+              <a:buAutoNum type="arabicPeriod"/>
+            </a:pPr>
+            <a:r>
+              <a:rPr lang="en-US" altLang="ko-KR" sz="1600" dirty="0">
+                <a:latin typeface="맑은 고딕 Semilight" panose="020B0502040204020203" pitchFamily="50" charset="-127"/>
+                <a:ea typeface="맑은 고딕 Semilight" panose="020B0502040204020203" pitchFamily="50" charset="-127"/>
+                <a:cs typeface="맑은 고딕 Semilight" panose="020B0502040204020203" pitchFamily="50" charset="-127"/>
+              </a:rPr>
+              <a:t>Feed-Forward Neural Net</a:t>
+            </a:r>
+          </a:p>
+          <a:p>
+            <a:pPr marL="342900" indent="-342900">
+              <a:buFont typeface="+mj-lt"/>
+              <a:buAutoNum type="arabicPeriod"/>
+            </a:pPr>
+            <a:r>
+              <a:rPr lang="en-US" altLang="ko-KR" sz="1600" dirty="0">
+                <a:latin typeface="맑은 고딕 Semilight" panose="020B0502040204020203" pitchFamily="50" charset="-127"/>
+                <a:ea typeface="맑은 고딕 Semilight" panose="020B0502040204020203" pitchFamily="50" charset="-127"/>
+                <a:cs typeface="맑은 고딕 Semilight" panose="020B0502040204020203" pitchFamily="50" charset="-127"/>
+              </a:rPr>
+              <a:t>Convolutional Neural Net (CNN)</a:t>
+            </a:r>
+          </a:p>
+          <a:p>
+            <a:pPr marL="342900" indent="-342900">
+              <a:buFont typeface="+mj-lt"/>
+              <a:buAutoNum type="arabicPeriod"/>
+            </a:pPr>
+            <a:r>
+              <a:rPr lang="en-US" altLang="ko-KR" sz="1600" dirty="0">
+                <a:latin typeface="맑은 고딕 Semilight" panose="020B0502040204020203" pitchFamily="50" charset="-127"/>
+                <a:ea typeface="맑은 고딕 Semilight" panose="020B0502040204020203" pitchFamily="50" charset="-127"/>
+                <a:cs typeface="맑은 고딕 Semilight" panose="020B0502040204020203" pitchFamily="50" charset="-127"/>
+              </a:rPr>
+              <a:t>Transfer Learning</a:t>
+            </a:r>
+          </a:p>
+          <a:p>
+            <a:pPr marL="342900" indent="-342900">
+              <a:buFont typeface="+mj-lt"/>
+              <a:buAutoNum type="arabicPeriod"/>
+            </a:pPr>
+            <a:r>
+              <a:rPr lang="en-US" altLang="ko-KR" sz="1600" dirty="0" err="1">
+                <a:latin typeface="맑은 고딕 Semilight" panose="020B0502040204020203" pitchFamily="50" charset="-127"/>
+                <a:ea typeface="맑은 고딕 Semilight" panose="020B0502040204020203" pitchFamily="50" charset="-127"/>
+                <a:cs typeface="맑은 고딕 Semilight" panose="020B0502040204020203" pitchFamily="50" charset="-127"/>
+              </a:rPr>
+              <a:t>Tensorboard</a:t>
+            </a:r>
+            <a:endParaRPr lang="en-US" altLang="ko-KR" sz="1600" dirty="0">
+              <a:latin typeface="맑은 고딕 Semilight" panose="020B0502040204020203" pitchFamily="50" charset="-127"/>
+              <a:ea typeface="맑은 고딕 Semilight" panose="020B0502040204020203" pitchFamily="50" charset="-127"/>
+              <a:cs typeface="맑은 고딕 Semilight" panose="020B0502040204020203" pitchFamily="50" charset="-127"/>
+            </a:endParaRPr>
+          </a:p>
+          <a:p>
+            <a:pPr marL="342900" indent="-342900">
+              <a:buFont typeface="+mj-lt"/>
+              <a:buAutoNum type="arabicPeriod"/>
+            </a:pPr>
+            <a:r>
+              <a:rPr lang="en-US" altLang="ko-KR" sz="1600" dirty="0">
+                <a:latin typeface="맑은 고딕 Semilight" panose="020B0502040204020203" pitchFamily="50" charset="-127"/>
+                <a:ea typeface="맑은 고딕 Semilight" panose="020B0502040204020203" pitchFamily="50" charset="-127"/>
+                <a:cs typeface="맑은 고딕 Semilight" panose="020B0502040204020203" pitchFamily="50" charset="-127"/>
+              </a:rPr>
+              <a:t>Save and Load Models</a:t>
+            </a:r>
+          </a:p>
+          <a:p>
+            <a:pPr marL="342900" indent="-342900">
+              <a:buFont typeface="+mj-lt"/>
+              <a:buAutoNum type="arabicPeriod"/>
+            </a:pPr>
+            <a:endParaRPr lang="en-US" altLang="ko-KR" sz="1600" dirty="0">
+              <a:latin typeface="맑은 고딕 Semilight" panose="020B0502040204020203" pitchFamily="50" charset="-127"/>
+              <a:ea typeface="맑은 고딕 Semilight" panose="020B0502040204020203" pitchFamily="50" charset="-127"/>
+              <a:cs typeface="맑은 고딕 Semilight" panose="020B0502040204020203" pitchFamily="50" charset="-127"/>
+            </a:endParaRPr>
+          </a:p>
+          <a:p>
+            <a:r>
+              <a:rPr lang="en-US" altLang="ko-KR" sz="1600" dirty="0" err="1">
+                <a:latin typeface="맑은 고딕 Semilight" panose="020B0502040204020203" pitchFamily="50" charset="-127"/>
+                <a:ea typeface="맑은 고딕 Semilight" panose="020B0502040204020203" pitchFamily="50" charset="-127"/>
+                <a:cs typeface="맑은 고딕 Semilight" panose="020B0502040204020203" pitchFamily="50" charset="-127"/>
+                <a:hlinkClick r:id="rId3">
+                  <a:extLst>
+                    <a:ext uri="{A12FA001-AC4F-418D-AE19-62706E023703}">
+                      <ahyp:hlinkClr xmlns:ahyp="http://schemas.microsoft.com/office/drawing/2018/hyperlinkcolor" val="tx"/>
+                    </a:ext>
+                  </a:extLst>
+                </a:hlinkClick>
+              </a:rPr>
+              <a:t>pytorch</a:t>
+            </a:r>
+            <a:endParaRPr lang="en-US" altLang="ko-KR" sz="1600" dirty="0">
+              <a:latin typeface="맑은 고딕 Semilight" panose="020B0502040204020203" pitchFamily="50" charset="-127"/>
+              <a:ea typeface="맑은 고딕 Semilight" panose="020B0502040204020203" pitchFamily="50" charset="-127"/>
+              <a:cs typeface="맑은 고딕 Semilight" panose="020B0502040204020203" pitchFamily="50" charset="-127"/>
+            </a:endParaRPr>
+          </a:p>
+        </p:txBody>
+      </p:sp>
+    </p:spTree>
+    <p:extLst>
+      <p:ext uri="{BB962C8B-B14F-4D97-AF65-F5344CB8AC3E}">
+        <p14:creationId xmlns:p14="http://schemas.microsoft.com/office/powerpoint/2010/main" val="2361090074"/>
+      </p:ext>
+    </p:extLst>
+  </p:cSld>
+  <p:clrMapOvr>
+    <a:masterClrMapping/>
+  </p:clrMapOvr>
+  <mc:AlternateContent xmlns:mc="http://schemas.openxmlformats.org/markup-compatibility/2006" xmlns:p14="http://schemas.microsoft.com/office/powerpoint/2010/main">
+    <mc:Choice Requires="p14">
+      <p:transition p14:dur="10"/>
+    </mc:Choice>
+    <mc:Fallback xmlns="">
+      <p:transition/>
+    </mc:Fallback>
+  </mc:AlternateContent>
+</p:sld>
+</file>
+
+<file path=ppt/slides/slide18.xml><?xml version="1.0" encoding="utf-8"?>
+<p:sld xmlns:a="http://schemas.openxmlformats.org/drawingml/2006/main" xmlns:r="http://schemas.openxmlformats.org/officeDocument/2006/relationships" xmlns:p="http://schemas.openxmlformats.org/presentationml/2006/main">
+  <p:cSld>
+    <p:spTree>
+      <p:nvGrpSpPr>
+        <p:cNvPr id="1" name="">
+          <a:extLst>
+            <a:ext uri="{FF2B5EF4-FFF2-40B4-BE49-F238E27FC236}">
+              <a16:creationId xmlns:a16="http://schemas.microsoft.com/office/drawing/2014/main" id="{C89E7E7B-0F19-1E16-CBC6-51DC89735E91}"/>
+            </a:ext>
+          </a:extLst>
+        </p:cNvPr>
+        <p:cNvGrpSpPr/>
+        <p:nvPr/>
+      </p:nvGrpSpPr>
+      <p:grpSpPr>
+        <a:xfrm>
+          <a:off x="0" y="0"/>
+          <a:ext cx="0" cy="0"/>
+          <a:chOff x="0" y="0"/>
+          <a:chExt cx="0" cy="0"/>
+        </a:xfrm>
+      </p:grpSpPr>
+      <p:sp>
+        <p:nvSpPr>
+          <p:cNvPr id="8" name="제목 7">
+            <a:extLst>
+              <a:ext uri="{FF2B5EF4-FFF2-40B4-BE49-F238E27FC236}">
+                <a16:creationId xmlns:a16="http://schemas.microsoft.com/office/drawing/2014/main" id="{AA2DB6BC-6868-9901-E00D-C3C2AB962A25}"/>
+              </a:ext>
+            </a:extLst>
+          </p:cNvPr>
+          <p:cNvSpPr>
+            <a:spLocks noGrp="1"/>
+          </p:cNvSpPr>
+          <p:nvPr>
+            <p:ph type="title"/>
+          </p:nvPr>
+        </p:nvSpPr>
+        <p:spPr>
+          <a:xfrm>
+            <a:off x="521207" y="448056"/>
+            <a:ext cx="8135613" cy="640080"/>
+          </a:xfrm>
+        </p:spPr>
+        <p:txBody>
+          <a:bodyPr rtlCol="0">
+            <a:noAutofit/>
+          </a:bodyPr>
+          <a:lstStyle/>
+          <a:p>
+            <a:pPr rtl="0"/>
+            <a:r>
+              <a:rPr lang="en-US" altLang="ko-KR" dirty="0" err="1">
+                <a:cs typeface="Segoe UI Light" panose="020B0502040204020203" pitchFamily="34" charset="0"/>
+              </a:rPr>
+              <a:t>pytorch</a:t>
+            </a:r>
+            <a:r>
+              <a:rPr lang="ko-KR" altLang="en-US" dirty="0">
+                <a:cs typeface="Segoe UI Light" panose="020B0502040204020203" pitchFamily="34" charset="0"/>
+              </a:rPr>
+              <a:t> </a:t>
+            </a:r>
+            <a:r>
+              <a:rPr lang="en-US" altLang="ko-KR" dirty="0">
+                <a:cs typeface="Segoe UI Light" panose="020B0502040204020203" pitchFamily="34" charset="0"/>
+              </a:rPr>
+              <a:t>tutorial</a:t>
+            </a:r>
+            <a:endParaRPr lang="ko-KR" altLang="en-US" dirty="0">
+              <a:cs typeface="Segoe UI Light" panose="020B0502040204020203" pitchFamily="34" charset="0"/>
+            </a:endParaRPr>
+          </a:p>
+        </p:txBody>
+      </p:sp>
+      <p:sp>
+        <p:nvSpPr>
+          <p:cNvPr id="12" name="슬라이드 번호 개체 틀 11">
+            <a:extLst>
+              <a:ext uri="{FF2B5EF4-FFF2-40B4-BE49-F238E27FC236}">
+                <a16:creationId xmlns:a16="http://schemas.microsoft.com/office/drawing/2014/main" id="{0C9ECA61-0EEC-A8B4-30D5-AF32553C5183}"/>
+              </a:ext>
+            </a:extLst>
+          </p:cNvPr>
+          <p:cNvSpPr>
+            <a:spLocks noGrp="1"/>
+          </p:cNvSpPr>
+          <p:nvPr>
+            <p:ph type="sldNum" sz="quarter" idx="4"/>
+          </p:nvPr>
+        </p:nvSpPr>
+        <p:spPr/>
+        <p:txBody>
+          <a:bodyPr/>
+          <a:lstStyle/>
+          <a:p>
+            <a:fld id="{9860EDB8-5305-433F-BE41-D7A86D811DB3}" type="slidenum">
+              <a:rPr lang="en-US" altLang="ko-KR" noProof="0" smtClean="0"/>
+              <a:pPr/>
+              <a:t>18</a:t>
+            </a:fld>
+            <a:endParaRPr lang="ko-KR" altLang="en-US" noProof="0" dirty="0"/>
+          </a:p>
+        </p:txBody>
+      </p:sp>
+      <p:sp>
+        <p:nvSpPr>
+          <p:cNvPr id="2" name="TextBox 1">
+            <a:extLst>
+              <a:ext uri="{FF2B5EF4-FFF2-40B4-BE49-F238E27FC236}">
+                <a16:creationId xmlns:a16="http://schemas.microsoft.com/office/drawing/2014/main" id="{19108F93-971A-05E2-4AA8-06CBB655E8DE}"/>
+              </a:ext>
+            </a:extLst>
+          </p:cNvPr>
+          <p:cNvSpPr txBox="1"/>
+          <p:nvPr/>
+        </p:nvSpPr>
+        <p:spPr>
+          <a:xfrm>
+            <a:off x="521207" y="1476375"/>
+            <a:ext cx="3276600" cy="369332"/>
+          </a:xfrm>
+          <a:prstGeom prst="rect">
+            <a:avLst/>
+          </a:prstGeom>
+          <a:noFill/>
+        </p:spPr>
+        <p:txBody>
+          <a:bodyPr wrap="square" rtlCol="0">
+            <a:spAutoFit/>
+          </a:bodyPr>
+          <a:lstStyle/>
+          <a:p>
+            <a:r>
+              <a:rPr lang="en-US" altLang="ko-KR" dirty="0">
+                <a:hlinkClick r:id="rId3"/>
+              </a:rPr>
+              <a:t>https://pytorch.org/</a:t>
+            </a:r>
+            <a:endParaRPr lang="ko-KR" altLang="en-US" dirty="0"/>
+          </a:p>
+        </p:txBody>
+      </p:sp>
+      <p:pic>
+        <p:nvPicPr>
+          <p:cNvPr id="5" name="그림 4">
+            <a:extLst>
+              <a:ext uri="{FF2B5EF4-FFF2-40B4-BE49-F238E27FC236}">
+                <a16:creationId xmlns:a16="http://schemas.microsoft.com/office/drawing/2014/main" id="{894C073D-8DB8-7B88-625B-A1F53826E032}"/>
+              </a:ext>
+            </a:extLst>
+          </p:cNvPr>
+          <p:cNvPicPr>
+            <a:picLocks noChangeAspect="1"/>
+          </p:cNvPicPr>
+          <p:nvPr/>
+        </p:nvPicPr>
+        <p:blipFill>
+          <a:blip r:embed="rId4"/>
+          <a:stretch>
+            <a:fillRect/>
+          </a:stretch>
+        </p:blipFill>
+        <p:spPr>
+          <a:xfrm>
+            <a:off x="1657350" y="2039021"/>
+            <a:ext cx="9248775" cy="3973066"/>
+          </a:xfrm>
+          <a:prstGeom prst="rect">
+            <a:avLst/>
+          </a:prstGeom>
+        </p:spPr>
+      </p:pic>
+    </p:spTree>
+    <p:extLst>
+      <p:ext uri="{BB962C8B-B14F-4D97-AF65-F5344CB8AC3E}">
+        <p14:creationId xmlns:p14="http://schemas.microsoft.com/office/powerpoint/2010/main" val="2708639559"/>
+      </p:ext>
+    </p:extLst>
+  </p:cSld>
+  <p:clrMapOvr>
+    <a:masterClrMapping/>
+  </p:clrMapOvr>
+  <mc:AlternateContent xmlns:mc="http://schemas.openxmlformats.org/markup-compatibility/2006" xmlns:p14="http://schemas.microsoft.com/office/powerpoint/2010/main">
+    <mc:Choice Requires="p14">
+      <p:transition p14:dur="10"/>
+    </mc:Choice>
+    <mc:Fallback xmlns="">
+      <p:transition/>
+    </mc:Fallback>
+  </mc:AlternateContent>
+</p:sld>
+</file>
+
+<file path=ppt/slides/slide19.xml><?xml version="1.0" encoding="utf-8"?>
+<p:sld xmlns:a="http://schemas.openxmlformats.org/drawingml/2006/main" xmlns:r="http://schemas.openxmlformats.org/officeDocument/2006/relationships" xmlns:p="http://schemas.openxmlformats.org/presentationml/2006/main">
+  <p:cSld>
+    <p:spTree>
+      <p:nvGrpSpPr>
+        <p:cNvPr id="1" name="">
+          <a:extLst>
+            <a:ext uri="{FF2B5EF4-FFF2-40B4-BE49-F238E27FC236}">
+              <a16:creationId xmlns:a16="http://schemas.microsoft.com/office/drawing/2014/main" id="{634D3C2E-B549-8ABD-6513-E32258CA67C7}"/>
+            </a:ext>
+          </a:extLst>
+        </p:cNvPr>
+        <p:cNvGrpSpPr/>
+        <p:nvPr/>
+      </p:nvGrpSpPr>
+      <p:grpSpPr>
+        <a:xfrm>
+          <a:off x="0" y="0"/>
+          <a:ext cx="0" cy="0"/>
+          <a:chOff x="0" y="0"/>
+          <a:chExt cx="0" cy="0"/>
+        </a:xfrm>
+      </p:grpSpPr>
+      <p:pic>
+        <p:nvPicPr>
+          <p:cNvPr id="1026" name="Picture 2" descr="convnet">
+            <a:extLst>
+              <a:ext uri="{FF2B5EF4-FFF2-40B4-BE49-F238E27FC236}">
+                <a16:creationId xmlns:a16="http://schemas.microsoft.com/office/drawing/2014/main" id="{0777265A-7A6A-3FD6-6434-AEA4E194B6F6}"/>
+              </a:ext>
+            </a:extLst>
+          </p:cNvPr>
+          <p:cNvPicPr>
+            <a:picLocks noChangeAspect="1" noChangeArrowheads="1"/>
+          </p:cNvPicPr>
+          <p:nvPr/>
+        </p:nvPicPr>
+        <p:blipFill>
+          <a:blip r:embed="rId3">
+            <a:extLst>
+              <a:ext uri="{28A0092B-C50C-407E-A947-70E740481C1C}">
+                <a14:useLocalDpi xmlns:a14="http://schemas.microsoft.com/office/drawing/2010/main" val="0"/>
+              </a:ext>
+            </a:extLst>
+          </a:blip>
+          <a:srcRect/>
+          <a:stretch>
+            <a:fillRect/>
+          </a:stretch>
+        </p:blipFill>
+        <p:spPr bwMode="auto">
+          <a:xfrm>
+            <a:off x="543474" y="4320061"/>
+            <a:ext cx="7589576" cy="2089883"/>
+          </a:xfrm>
+          <a:prstGeom prst="rect">
+            <a:avLst/>
+          </a:prstGeom>
+          <a:noFill/>
+          <a:extLst>
+            <a:ext uri="{909E8E84-426E-40DD-AFC4-6F175D3DCCD1}">
+              <a14:hiddenFill xmlns:a14="http://schemas.microsoft.com/office/drawing/2010/main">
+                <a:solidFill>
+                  <a:srgbClr val="FFFFFF"/>
+                </a:solidFill>
+              </a14:hiddenFill>
+            </a:ext>
+          </a:extLst>
+        </p:spPr>
+      </p:pic>
+      <p:sp>
+        <p:nvSpPr>
+          <p:cNvPr id="8" name="제목 7">
+            <a:extLst>
+              <a:ext uri="{FF2B5EF4-FFF2-40B4-BE49-F238E27FC236}">
+                <a16:creationId xmlns:a16="http://schemas.microsoft.com/office/drawing/2014/main" id="{E8F5DCE0-ADFA-B02E-383D-1B77503DE824}"/>
+              </a:ext>
+            </a:extLst>
+          </p:cNvPr>
+          <p:cNvSpPr>
+            <a:spLocks noGrp="1"/>
+          </p:cNvSpPr>
+          <p:nvPr>
+            <p:ph type="title"/>
+          </p:nvPr>
+        </p:nvSpPr>
+        <p:spPr>
+          <a:xfrm>
+            <a:off x="521207" y="448056"/>
+            <a:ext cx="8135613" cy="640080"/>
+          </a:xfrm>
+        </p:spPr>
+        <p:txBody>
+          <a:bodyPr rtlCol="0">
+            <a:noAutofit/>
+          </a:bodyPr>
+          <a:lstStyle/>
+          <a:p>
+            <a:pPr rtl="0"/>
+            <a:r>
+              <a:rPr lang="en-US" altLang="ko-KR" dirty="0" err="1">
+                <a:cs typeface="Segoe UI Light" panose="020B0502040204020203" pitchFamily="34" charset="0"/>
+              </a:rPr>
+              <a:t>pytorch</a:t>
+            </a:r>
+            <a:r>
+              <a:rPr lang="ko-KR" altLang="en-US" dirty="0">
+                <a:cs typeface="Segoe UI Light" panose="020B0502040204020203" pitchFamily="34" charset="0"/>
+              </a:rPr>
+              <a:t> </a:t>
+            </a:r>
+            <a:r>
+              <a:rPr lang="en-US" altLang="ko-KR" dirty="0">
+                <a:cs typeface="Segoe UI Light" panose="020B0502040204020203" pitchFamily="34" charset="0"/>
+              </a:rPr>
+              <a:t>CNN</a:t>
+            </a:r>
+            <a:endParaRPr lang="ko-KR" altLang="en-US" dirty="0">
+              <a:cs typeface="Segoe UI Light" panose="020B0502040204020203" pitchFamily="34" charset="0"/>
+            </a:endParaRPr>
+          </a:p>
+        </p:txBody>
+      </p:sp>
+      <p:sp>
+        <p:nvSpPr>
+          <p:cNvPr id="12" name="슬라이드 번호 개체 틀 11">
+            <a:extLst>
+              <a:ext uri="{FF2B5EF4-FFF2-40B4-BE49-F238E27FC236}">
+                <a16:creationId xmlns:a16="http://schemas.microsoft.com/office/drawing/2014/main" id="{91B57A73-06F2-6C61-D9C9-8F994A78F104}"/>
+              </a:ext>
+            </a:extLst>
+          </p:cNvPr>
+          <p:cNvSpPr>
+            <a:spLocks noGrp="1"/>
+          </p:cNvSpPr>
+          <p:nvPr>
+            <p:ph type="sldNum" sz="quarter" idx="4"/>
+          </p:nvPr>
+        </p:nvSpPr>
+        <p:spPr/>
+        <p:txBody>
+          <a:bodyPr/>
+          <a:lstStyle/>
+          <a:p>
+            <a:fld id="{9860EDB8-5305-433F-BE41-D7A86D811DB3}" type="slidenum">
+              <a:rPr lang="en-US" altLang="ko-KR" noProof="0" smtClean="0"/>
+              <a:pPr/>
+              <a:t>19</a:t>
+            </a:fld>
+            <a:endParaRPr lang="ko-KR" altLang="en-US" noProof="0" dirty="0"/>
+          </a:p>
+        </p:txBody>
+      </p:sp>
+      <p:sp>
+        <p:nvSpPr>
+          <p:cNvPr id="4" name="TextBox 3">
+            <a:extLst>
+              <a:ext uri="{FF2B5EF4-FFF2-40B4-BE49-F238E27FC236}">
+                <a16:creationId xmlns:a16="http://schemas.microsoft.com/office/drawing/2014/main" id="{FABD4903-68FD-6AC1-0231-6881CAEB4711}"/>
+              </a:ext>
+            </a:extLst>
+          </p:cNvPr>
+          <p:cNvSpPr txBox="1"/>
+          <p:nvPr/>
+        </p:nvSpPr>
+        <p:spPr>
+          <a:xfrm>
+            <a:off x="8133051" y="4320061"/>
+            <a:ext cx="3515476" cy="887615"/>
+          </a:xfrm>
+          <a:prstGeom prst="rect">
+            <a:avLst/>
+          </a:prstGeom>
+          <a:noFill/>
+        </p:spPr>
+        <p:txBody>
+          <a:bodyPr wrap="square">
+            <a:spAutoFit/>
+          </a:bodyPr>
+          <a:lstStyle/>
+          <a:p>
+            <a:pPr>
+              <a:lnSpc>
+                <a:spcPct val="150000"/>
+              </a:lnSpc>
+            </a:pPr>
+            <a:r>
+              <a:rPr lang="en-US" altLang="ko-KR" sz="1200" dirty="0">
+                <a:latin typeface="맑은 고딕 Semilight" panose="020B0502040204020203" pitchFamily="50" charset="-127"/>
+                <a:ea typeface="맑은 고딕 Semilight" panose="020B0502040204020203" pitchFamily="50" charset="-127"/>
+                <a:cs typeface="맑은 고딕 Semilight" panose="020B0502040204020203" pitchFamily="50" charset="-127"/>
+                <a:hlinkClick r:id="rId4"/>
+              </a:rPr>
+              <a:t>LeNet-5 CNN Architecture</a:t>
+            </a:r>
+            <a:r>
+              <a:rPr lang="ko-KR" altLang="en-US" sz="1200" dirty="0">
+                <a:latin typeface="맑은 고딕 Semilight" panose="020B0502040204020203" pitchFamily="50" charset="-127"/>
+                <a:ea typeface="맑은 고딕 Semilight" panose="020B0502040204020203" pitchFamily="50" charset="-127"/>
+                <a:cs typeface="맑은 고딕 Semilight" panose="020B0502040204020203" pitchFamily="50" charset="-127"/>
+              </a:rPr>
+              <a:t> </a:t>
+            </a:r>
+            <a:r>
+              <a:rPr lang="en-US" altLang="ko-KR" sz="1200" dirty="0">
+                <a:latin typeface="맑은 고딕 Semilight" panose="020B0502040204020203" pitchFamily="50" charset="-127"/>
+                <a:ea typeface="맑은 고딕 Semilight" panose="020B0502040204020203" pitchFamily="50" charset="-127"/>
+                <a:cs typeface="맑은 고딕 Semilight" panose="020B0502040204020203" pitchFamily="50" charset="-127"/>
+              </a:rPr>
+              <a:t>(1998, Yann LeCun) : </a:t>
+            </a:r>
+            <a:r>
+              <a:rPr lang="ko-KR" altLang="en-US" sz="1200" dirty="0" err="1">
+                <a:latin typeface="맑은 고딕 Semilight" panose="020B0502040204020203" pitchFamily="50" charset="-127"/>
+                <a:ea typeface="맑은 고딕 Semilight" panose="020B0502040204020203" pitchFamily="50" charset="-127"/>
+                <a:cs typeface="맑은 고딕 Semilight" panose="020B0502040204020203" pitchFamily="50" charset="-127"/>
+              </a:rPr>
+              <a:t>합성곱</a:t>
+            </a:r>
+            <a:r>
+              <a:rPr lang="ko-KR" altLang="en-US" sz="1200" dirty="0">
+                <a:latin typeface="맑은 고딕 Semilight" panose="020B0502040204020203" pitchFamily="50" charset="-127"/>
+                <a:ea typeface="맑은 고딕 Semilight" panose="020B0502040204020203" pitchFamily="50" charset="-127"/>
+                <a:cs typeface="맑은 고딕 Semilight" panose="020B0502040204020203" pitchFamily="50" charset="-127"/>
+              </a:rPr>
+              <a:t> 신경망</a:t>
+            </a:r>
+            <a:r>
+              <a:rPr lang="en-US" altLang="ko-KR" sz="1200" dirty="0">
+                <a:latin typeface="맑은 고딕 Semilight" panose="020B0502040204020203" pitchFamily="50" charset="-127"/>
+                <a:ea typeface="맑은 고딕 Semilight" panose="020B0502040204020203" pitchFamily="50" charset="-127"/>
+                <a:cs typeface="맑은 고딕 Semilight" panose="020B0502040204020203" pitchFamily="50" charset="-127"/>
+              </a:rPr>
+              <a:t>(CNN, Convolutional Neural Network)</a:t>
+            </a:r>
+            <a:r>
+              <a:rPr lang="ko-KR" altLang="en-US" sz="1200" dirty="0">
+                <a:latin typeface="맑은 고딕 Semilight" panose="020B0502040204020203" pitchFamily="50" charset="-127"/>
+                <a:ea typeface="맑은 고딕 Semilight" panose="020B0502040204020203" pitchFamily="50" charset="-127"/>
+                <a:cs typeface="맑은 고딕 Semilight" panose="020B0502040204020203" pitchFamily="50" charset="-127"/>
+              </a:rPr>
+              <a:t> 기초</a:t>
+            </a:r>
+          </a:p>
+        </p:txBody>
+      </p:sp>
+      <p:sp>
+        <p:nvSpPr>
+          <p:cNvPr id="7" name="TextBox 6">
+            <a:extLst>
+              <a:ext uri="{FF2B5EF4-FFF2-40B4-BE49-F238E27FC236}">
+                <a16:creationId xmlns:a16="http://schemas.microsoft.com/office/drawing/2014/main" id="{AD768D08-96D4-5F3E-7FA8-0CC9797823D9}"/>
+              </a:ext>
+            </a:extLst>
+          </p:cNvPr>
+          <p:cNvSpPr txBox="1"/>
+          <p:nvPr/>
+        </p:nvSpPr>
+        <p:spPr>
+          <a:xfrm>
+            <a:off x="568282" y="1294392"/>
+            <a:ext cx="11080244" cy="2636043"/>
+          </a:xfrm>
+          <a:prstGeom prst="rect">
+            <a:avLst/>
+          </a:prstGeom>
+          <a:noFill/>
+        </p:spPr>
+        <p:txBody>
+          <a:bodyPr wrap="square">
+            <a:spAutoFit/>
+          </a:bodyPr>
+          <a:lstStyle/>
+          <a:p>
+            <a:pPr marL="285750" indent="-285750">
+              <a:lnSpc>
+                <a:spcPct val="150000"/>
+              </a:lnSpc>
+              <a:buFont typeface="Wingdings" panose="05000000000000000000" pitchFamily="2" charset="2"/>
+              <a:buChar char="Ø"/>
+            </a:pPr>
+            <a:r>
+              <a:rPr lang="ko-KR" altLang="en-US" sz="1400" dirty="0">
+                <a:latin typeface="맑은 고딕 Semilight" panose="020B0502040204020203" pitchFamily="50" charset="-127"/>
+                <a:ea typeface="맑은 고딕 Semilight" panose="020B0502040204020203" pitchFamily="50" charset="-127"/>
+                <a:cs typeface="맑은 고딕 Semilight" panose="020B0502040204020203" pitchFamily="50" charset="-127"/>
+              </a:rPr>
+              <a:t>INPUT (32x32): 입력 이미지</a:t>
+            </a:r>
+            <a:endParaRPr lang="en-US" altLang="ko-KR" sz="1400" dirty="0">
+              <a:latin typeface="맑은 고딕 Semilight" panose="020B0502040204020203" pitchFamily="50" charset="-127"/>
+              <a:ea typeface="맑은 고딕 Semilight" panose="020B0502040204020203" pitchFamily="50" charset="-127"/>
+              <a:cs typeface="맑은 고딕 Semilight" panose="020B0502040204020203" pitchFamily="50" charset="-127"/>
+            </a:endParaRPr>
+          </a:p>
+          <a:p>
+            <a:pPr marL="285750" indent="-285750">
+              <a:lnSpc>
+                <a:spcPct val="150000"/>
+              </a:lnSpc>
+              <a:buFont typeface="Wingdings" panose="05000000000000000000" pitchFamily="2" charset="2"/>
+              <a:buChar char="Ø"/>
+            </a:pPr>
+            <a:r>
+              <a:rPr lang="en-US" altLang="ko-KR" sz="1400" dirty="0">
+                <a:latin typeface="맑은 고딕 Semilight" panose="020B0502040204020203" pitchFamily="50" charset="-127"/>
+                <a:ea typeface="맑은 고딕 Semilight" panose="020B0502040204020203" pitchFamily="50" charset="-127"/>
+                <a:cs typeface="맑은 고딕 Semilight" panose="020B0502040204020203" pitchFamily="50" charset="-127"/>
+              </a:rPr>
+              <a:t>C1 </a:t>
+            </a:r>
+            <a:r>
+              <a:rPr lang="ko-KR" altLang="en-US" sz="1400" dirty="0">
+                <a:latin typeface="맑은 고딕 Semilight" panose="020B0502040204020203" pitchFamily="50" charset="-127"/>
+                <a:ea typeface="맑은 고딕 Semilight" panose="020B0502040204020203" pitchFamily="50" charset="-127"/>
+                <a:cs typeface="맑은 고딕 Semilight" panose="020B0502040204020203" pitchFamily="50" charset="-127"/>
+              </a:rPr>
+              <a:t>(</a:t>
+            </a:r>
+            <a:r>
+              <a:rPr lang="ko-KR" altLang="en-US" sz="1400" dirty="0" err="1">
+                <a:latin typeface="맑은 고딕 Semilight" panose="020B0502040204020203" pitchFamily="50" charset="-127"/>
+                <a:ea typeface="맑은 고딕 Semilight" panose="020B0502040204020203" pitchFamily="50" charset="-127"/>
+                <a:cs typeface="맑은 고딕 Semilight" panose="020B0502040204020203" pitchFamily="50" charset="-127"/>
+              </a:rPr>
+              <a:t>Convolutions</a:t>
+            </a:r>
+            <a:r>
+              <a:rPr lang="ko-KR" altLang="en-US" sz="1400" dirty="0">
+                <a:latin typeface="맑은 고딕 Semilight" panose="020B0502040204020203" pitchFamily="50" charset="-127"/>
+                <a:ea typeface="맑은 고딕 Semilight" panose="020B0502040204020203" pitchFamily="50" charset="-127"/>
+                <a:cs typeface="맑은 고딕 Semilight" panose="020B0502040204020203" pitchFamily="50" charset="-127"/>
+              </a:rPr>
+              <a:t>): </a:t>
+            </a:r>
+            <a:r>
+              <a:rPr lang="en-US" altLang="ko-KR" sz="1400" dirty="0">
+                <a:latin typeface="맑은 고딕 Semilight" panose="020B0502040204020203" pitchFamily="50" charset="-127"/>
+                <a:ea typeface="맑은 고딕 Semilight" panose="020B0502040204020203" pitchFamily="50" charset="-127"/>
+                <a:cs typeface="맑은 고딕 Semilight" panose="020B0502040204020203" pitchFamily="50" charset="-127"/>
+              </a:rPr>
+              <a:t>(5x</a:t>
+            </a:r>
+            <a:r>
+              <a:rPr lang="ko-KR" altLang="en-US" sz="1400" dirty="0">
+                <a:latin typeface="맑은 고딕 Semilight" panose="020B0502040204020203" pitchFamily="50" charset="-127"/>
+                <a:ea typeface="맑은 고딕 Semilight" panose="020B0502040204020203" pitchFamily="50" charset="-127"/>
+                <a:cs typeface="맑은 고딕 Semilight" panose="020B0502040204020203" pitchFamily="50" charset="-127"/>
+              </a:rPr>
+              <a:t>5</a:t>
+            </a:r>
+            <a:r>
+              <a:rPr lang="en-US" altLang="ko-KR" sz="1400" dirty="0">
+                <a:latin typeface="맑은 고딕 Semilight" panose="020B0502040204020203" pitchFamily="50" charset="-127"/>
+                <a:ea typeface="맑은 고딕 Semilight" panose="020B0502040204020203" pitchFamily="50" charset="-127"/>
+                <a:cs typeface="맑은 고딕 Semilight" panose="020B0502040204020203" pitchFamily="50" charset="-127"/>
+              </a:rPr>
+              <a:t>)</a:t>
+            </a:r>
+            <a:r>
+              <a:rPr lang="ko-KR" altLang="en-US" sz="1400" dirty="0">
+                <a:latin typeface="맑은 고딕 Semilight" panose="020B0502040204020203" pitchFamily="50" charset="-127"/>
+                <a:ea typeface="맑은 고딕 Semilight" panose="020B0502040204020203" pitchFamily="50" charset="-127"/>
+                <a:cs typeface="맑은 고딕 Semilight" panose="020B0502040204020203" pitchFamily="50" charset="-127"/>
+              </a:rPr>
+              <a:t> 크기 필터 6개를 사용하여 이미지 특징(선, 모서리 등)을 추출하여 </a:t>
+            </a:r>
+            <a:r>
+              <a:rPr lang="en-US" altLang="ko-KR" sz="1400" dirty="0">
+                <a:latin typeface="맑은 고딕 Semilight" panose="020B0502040204020203" pitchFamily="50" charset="-127"/>
+                <a:ea typeface="맑은 고딕 Semilight" panose="020B0502040204020203" pitchFamily="50" charset="-127"/>
+                <a:cs typeface="맑은 고딕 Semilight" panose="020B0502040204020203" pitchFamily="50" charset="-127"/>
+              </a:rPr>
+              <a:t>&gt; </a:t>
+            </a:r>
+            <a:r>
+              <a:rPr lang="ko-KR" altLang="en-US" sz="1400" dirty="0">
+                <a:latin typeface="맑은 고딕 Semilight" panose="020B0502040204020203" pitchFamily="50" charset="-127"/>
+                <a:ea typeface="맑은 고딕 Semilight" panose="020B0502040204020203" pitchFamily="50" charset="-127"/>
+                <a:cs typeface="맑은 고딕 Semilight" panose="020B0502040204020203" pitchFamily="50" charset="-127"/>
+              </a:rPr>
+              <a:t>6개 </a:t>
+            </a:r>
+            <a:r>
+              <a:rPr lang="en-US" altLang="ko-KR" sz="1400" dirty="0">
+                <a:latin typeface="맑은 고딕 Semilight" panose="020B0502040204020203" pitchFamily="50" charset="-127"/>
+                <a:ea typeface="맑은 고딕 Semilight" panose="020B0502040204020203" pitchFamily="50" charset="-127"/>
+                <a:cs typeface="맑은 고딕 Semilight" panose="020B0502040204020203" pitchFamily="50" charset="-127"/>
+              </a:rPr>
+              <a:t>(</a:t>
+            </a:r>
+            <a:r>
+              <a:rPr lang="ko-KR" altLang="en-US" sz="1400" dirty="0">
+                <a:latin typeface="맑은 고딕 Semilight" panose="020B0502040204020203" pitchFamily="50" charset="-127"/>
+                <a:ea typeface="맑은 고딕 Semilight" panose="020B0502040204020203" pitchFamily="50" charset="-127"/>
+                <a:cs typeface="맑은 고딕 Semilight" panose="020B0502040204020203" pitchFamily="50" charset="-127"/>
+              </a:rPr>
+              <a:t>28</a:t>
+            </a:r>
+            <a:r>
+              <a:rPr lang="en-US" altLang="ko-KR" sz="1400" dirty="0">
+                <a:latin typeface="맑은 고딕 Semilight" panose="020B0502040204020203" pitchFamily="50" charset="-127"/>
+                <a:ea typeface="맑은 고딕 Semilight" panose="020B0502040204020203" pitchFamily="50" charset="-127"/>
+                <a:cs typeface="맑은 고딕 Semilight" panose="020B0502040204020203" pitchFamily="50" charset="-127"/>
+              </a:rPr>
+              <a:t>x</a:t>
+            </a:r>
+            <a:r>
+              <a:rPr lang="ko-KR" altLang="en-US" sz="1400" dirty="0">
+                <a:latin typeface="맑은 고딕 Semilight" panose="020B0502040204020203" pitchFamily="50" charset="-127"/>
+                <a:ea typeface="맑은 고딕 Semilight" panose="020B0502040204020203" pitchFamily="50" charset="-127"/>
+                <a:cs typeface="맑은 고딕 Semilight" panose="020B0502040204020203" pitchFamily="50" charset="-127"/>
+              </a:rPr>
+              <a:t>28</a:t>
+            </a:r>
+            <a:r>
+              <a:rPr lang="en-US" altLang="ko-KR" sz="1400" dirty="0">
+                <a:latin typeface="맑은 고딕 Semilight" panose="020B0502040204020203" pitchFamily="50" charset="-127"/>
+                <a:ea typeface="맑은 고딕 Semilight" panose="020B0502040204020203" pitchFamily="50" charset="-127"/>
+                <a:cs typeface="맑은 고딕 Semilight" panose="020B0502040204020203" pitchFamily="50" charset="-127"/>
+              </a:rPr>
+              <a:t>) </a:t>
+            </a:r>
+            <a:r>
+              <a:rPr lang="ko-KR" altLang="en-US" sz="1400" dirty="0">
+                <a:latin typeface="맑은 고딕 Semilight" panose="020B0502040204020203" pitchFamily="50" charset="-127"/>
+                <a:ea typeface="맑은 고딕 Semilight" panose="020B0502040204020203" pitchFamily="50" charset="-127"/>
+                <a:cs typeface="맑은 고딕 Semilight" panose="020B0502040204020203" pitchFamily="50" charset="-127"/>
+              </a:rPr>
+              <a:t>피처 맵(</a:t>
+            </a:r>
+            <a:r>
+              <a:rPr lang="ko-KR" altLang="en-US" sz="1400" dirty="0" err="1">
+                <a:latin typeface="맑은 고딕 Semilight" panose="020B0502040204020203" pitchFamily="50" charset="-127"/>
+                <a:ea typeface="맑은 고딕 Semilight" panose="020B0502040204020203" pitchFamily="50" charset="-127"/>
+                <a:cs typeface="맑은 고딕 Semilight" panose="020B0502040204020203" pitchFamily="50" charset="-127"/>
+              </a:rPr>
+              <a:t>Feature</a:t>
+            </a:r>
+            <a:r>
+              <a:rPr lang="ko-KR" altLang="en-US" sz="1400" dirty="0">
+                <a:latin typeface="맑은 고딕 Semilight" panose="020B0502040204020203" pitchFamily="50" charset="-127"/>
+                <a:ea typeface="맑은 고딕 Semilight" panose="020B0502040204020203" pitchFamily="50" charset="-127"/>
+                <a:cs typeface="맑은 고딕 Semilight" panose="020B0502040204020203" pitchFamily="50" charset="-127"/>
+              </a:rPr>
+              <a:t> </a:t>
+            </a:r>
+            <a:r>
+              <a:rPr lang="ko-KR" altLang="en-US" sz="1400" dirty="0" err="1">
+                <a:latin typeface="맑은 고딕 Semilight" panose="020B0502040204020203" pitchFamily="50" charset="-127"/>
+                <a:ea typeface="맑은 고딕 Semilight" panose="020B0502040204020203" pitchFamily="50" charset="-127"/>
+                <a:cs typeface="맑은 고딕 Semilight" panose="020B0502040204020203" pitchFamily="50" charset="-127"/>
+              </a:rPr>
+              <a:t>Map</a:t>
+            </a:r>
+            <a:r>
+              <a:rPr lang="ko-KR" altLang="en-US" sz="1400" dirty="0">
+                <a:latin typeface="맑은 고딕 Semilight" panose="020B0502040204020203" pitchFamily="50" charset="-127"/>
+                <a:ea typeface="맑은 고딕 Semilight" panose="020B0502040204020203" pitchFamily="50" charset="-127"/>
+                <a:cs typeface="맑은 고딕 Semilight" panose="020B0502040204020203" pitchFamily="50" charset="-127"/>
+              </a:rPr>
+              <a:t>) 생성 </a:t>
+            </a:r>
+            <a:endParaRPr lang="en-US" altLang="ko-KR" sz="1400" dirty="0">
+              <a:latin typeface="맑은 고딕 Semilight" panose="020B0502040204020203" pitchFamily="50" charset="-127"/>
+              <a:ea typeface="맑은 고딕 Semilight" panose="020B0502040204020203" pitchFamily="50" charset="-127"/>
+              <a:cs typeface="맑은 고딕 Semilight" panose="020B0502040204020203" pitchFamily="50" charset="-127"/>
+            </a:endParaRPr>
+          </a:p>
+          <a:p>
+            <a:pPr marL="742950" lvl="1" indent="-285750">
+              <a:lnSpc>
+                <a:spcPct val="150000"/>
+              </a:lnSpc>
+              <a:buFont typeface="Wingdings" panose="05000000000000000000" pitchFamily="2" charset="2"/>
+              <a:buChar char="Ø"/>
+            </a:pPr>
+            <a:r>
+              <a:rPr lang="en-US" altLang="ko-KR" sz="1400" dirty="0">
+                <a:latin typeface="맑은 고딕 Semilight" panose="020B0502040204020203" pitchFamily="50" charset="-127"/>
+                <a:ea typeface="맑은 고딕 Semilight" panose="020B0502040204020203" pitchFamily="50" charset="-127"/>
+                <a:cs typeface="맑은 고딕 Semilight" panose="020B0502040204020203" pitchFamily="50" charset="-127"/>
+              </a:rPr>
+              <a:t>S2</a:t>
+            </a:r>
+            <a:r>
+              <a:rPr lang="ko-KR" altLang="en-US" sz="1400" dirty="0">
+                <a:latin typeface="맑은 고딕 Semilight" panose="020B0502040204020203" pitchFamily="50" charset="-127"/>
+                <a:ea typeface="맑은 고딕 Semilight" panose="020B0502040204020203" pitchFamily="50" charset="-127"/>
+                <a:cs typeface="맑은 고딕 Semilight" panose="020B0502040204020203" pitchFamily="50" charset="-127"/>
+              </a:rPr>
+              <a:t>(</a:t>
+            </a:r>
+            <a:r>
+              <a:rPr lang="ko-KR" altLang="en-US" sz="1400" dirty="0" err="1">
+                <a:latin typeface="맑은 고딕 Semilight" panose="020B0502040204020203" pitchFamily="50" charset="-127"/>
+                <a:ea typeface="맑은 고딕 Semilight" panose="020B0502040204020203" pitchFamily="50" charset="-127"/>
+                <a:cs typeface="맑은 고딕 Semilight" panose="020B0502040204020203" pitchFamily="50" charset="-127"/>
+              </a:rPr>
+              <a:t>Subsampling</a:t>
+            </a:r>
+            <a:r>
+              <a:rPr lang="ko-KR" altLang="en-US" sz="1400" dirty="0">
+                <a:latin typeface="맑은 고딕 Semilight" panose="020B0502040204020203" pitchFamily="50" charset="-127"/>
+                <a:ea typeface="맑은 고딕 Semilight" panose="020B0502040204020203" pitchFamily="50" charset="-127"/>
+                <a:cs typeface="맑은 고딕 Semilight" panose="020B0502040204020203" pitchFamily="50" charset="-127"/>
+              </a:rPr>
+              <a:t>/</a:t>
+            </a:r>
+            <a:r>
+              <a:rPr lang="ko-KR" altLang="en-US" sz="1400" dirty="0" err="1">
+                <a:latin typeface="맑은 고딕 Semilight" panose="020B0502040204020203" pitchFamily="50" charset="-127"/>
+                <a:ea typeface="맑은 고딕 Semilight" panose="020B0502040204020203" pitchFamily="50" charset="-127"/>
+                <a:cs typeface="맑은 고딕 Semilight" panose="020B0502040204020203" pitchFamily="50" charset="-127"/>
+              </a:rPr>
+              <a:t>Pooling</a:t>
+            </a:r>
+            <a:r>
+              <a:rPr lang="ko-KR" altLang="en-US" sz="1400" dirty="0">
+                <a:latin typeface="맑은 고딕 Semilight" panose="020B0502040204020203" pitchFamily="50" charset="-127"/>
+                <a:ea typeface="맑은 고딕 Semilight" panose="020B0502040204020203" pitchFamily="50" charset="-127"/>
+                <a:cs typeface="맑은 고딕 Semilight" panose="020B0502040204020203" pitchFamily="50" charset="-127"/>
+              </a:rPr>
+              <a:t>): 해상도를 줄여 </a:t>
+            </a:r>
+            <a:r>
+              <a:rPr lang="ko-KR" altLang="en-US" sz="1400" dirty="0" err="1">
+                <a:latin typeface="맑은 고딕 Semilight" panose="020B0502040204020203" pitchFamily="50" charset="-127"/>
+                <a:ea typeface="맑은 고딕 Semilight" panose="020B0502040204020203" pitchFamily="50" charset="-127"/>
+                <a:cs typeface="맑은 고딕 Semilight" panose="020B0502040204020203" pitchFamily="50" charset="-127"/>
+              </a:rPr>
+              <a:t>계산량을</a:t>
+            </a:r>
+            <a:r>
+              <a:rPr lang="ko-KR" altLang="en-US" sz="1400" dirty="0">
+                <a:latin typeface="맑은 고딕 Semilight" panose="020B0502040204020203" pitchFamily="50" charset="-127"/>
+                <a:ea typeface="맑은 고딕 Semilight" panose="020B0502040204020203" pitchFamily="50" charset="-127"/>
+                <a:cs typeface="맑은 고딕 Semilight" panose="020B0502040204020203" pitchFamily="50" charset="-127"/>
+              </a:rPr>
+              <a:t> 줄이고 핵심 특징만 남김 </a:t>
+            </a:r>
+            <a:r>
+              <a:rPr lang="en-US" altLang="ko-KR" sz="1400" dirty="0">
+                <a:latin typeface="맑은 고딕 Semilight" panose="020B0502040204020203" pitchFamily="50" charset="-127"/>
+                <a:ea typeface="맑은 고딕 Semilight" panose="020B0502040204020203" pitchFamily="50" charset="-127"/>
+                <a:cs typeface="맑은 고딕 Semilight" panose="020B0502040204020203" pitchFamily="50" charset="-127"/>
+              </a:rPr>
+              <a:t>: (</a:t>
+            </a:r>
+            <a:r>
+              <a:rPr lang="ko-KR" altLang="en-US" sz="1400" dirty="0">
+                <a:latin typeface="맑은 고딕 Semilight" panose="020B0502040204020203" pitchFamily="50" charset="-127"/>
+                <a:ea typeface="맑은 고딕 Semilight" panose="020B0502040204020203" pitchFamily="50" charset="-127"/>
+                <a:cs typeface="맑은 고딕 Semilight" panose="020B0502040204020203" pitchFamily="50" charset="-127"/>
+              </a:rPr>
+              <a:t>2</a:t>
+            </a:r>
+            <a:r>
+              <a:rPr lang="en-US" altLang="ko-KR" sz="1400" dirty="0">
+                <a:latin typeface="맑은 고딕 Semilight" panose="020B0502040204020203" pitchFamily="50" charset="-127"/>
+                <a:ea typeface="맑은 고딕 Semilight" panose="020B0502040204020203" pitchFamily="50" charset="-127"/>
+                <a:cs typeface="맑은 고딕 Semilight" panose="020B0502040204020203" pitchFamily="50" charset="-127"/>
+              </a:rPr>
+              <a:t>x2)</a:t>
+            </a:r>
+            <a:r>
+              <a:rPr lang="ko-KR" altLang="en-US" sz="1400" dirty="0">
+                <a:latin typeface="맑은 고딕 Semilight" panose="020B0502040204020203" pitchFamily="50" charset="-127"/>
+                <a:ea typeface="맑은 고딕 Semilight" panose="020B0502040204020203" pitchFamily="50" charset="-127"/>
+                <a:cs typeface="맑은 고딕 Semilight" panose="020B0502040204020203" pitchFamily="50" charset="-127"/>
+              </a:rPr>
+              <a:t> 영역을 하나로 합쳐 크기가 </a:t>
+            </a:r>
+            <a:r>
+              <a:rPr lang="en-US" altLang="ko-KR" sz="1400" dirty="0">
+                <a:latin typeface="맑은 고딕 Semilight" panose="020B0502040204020203" pitchFamily="50" charset="-127"/>
+                <a:ea typeface="맑은 고딕 Semilight" panose="020B0502040204020203" pitchFamily="50" charset="-127"/>
+                <a:cs typeface="맑은 고딕 Semilight" panose="020B0502040204020203" pitchFamily="50" charset="-127"/>
+              </a:rPr>
+              <a:t>(</a:t>
+            </a:r>
+            <a:r>
+              <a:rPr lang="ko-KR" altLang="en-US" sz="1400" dirty="0">
+                <a:latin typeface="맑은 고딕 Semilight" panose="020B0502040204020203" pitchFamily="50" charset="-127"/>
+                <a:ea typeface="맑은 고딕 Semilight" panose="020B0502040204020203" pitchFamily="50" charset="-127"/>
+                <a:cs typeface="맑은 고딕 Semilight" panose="020B0502040204020203" pitchFamily="50" charset="-127"/>
+              </a:rPr>
+              <a:t>14</a:t>
+            </a:r>
+            <a:r>
+              <a:rPr lang="en-US" altLang="ko-KR" sz="1400" dirty="0">
+                <a:latin typeface="맑은 고딕 Semilight" panose="020B0502040204020203" pitchFamily="50" charset="-127"/>
+                <a:ea typeface="맑은 고딕 Semilight" panose="020B0502040204020203" pitchFamily="50" charset="-127"/>
+                <a:cs typeface="맑은 고딕 Semilight" panose="020B0502040204020203" pitchFamily="50" charset="-127"/>
+              </a:rPr>
+              <a:t>x</a:t>
+            </a:r>
+            <a:r>
+              <a:rPr lang="ko-KR" altLang="en-US" sz="1400" dirty="0">
+                <a:latin typeface="맑은 고딕 Semilight" panose="020B0502040204020203" pitchFamily="50" charset="-127"/>
+                <a:ea typeface="맑은 고딕 Semilight" panose="020B0502040204020203" pitchFamily="50" charset="-127"/>
+                <a:cs typeface="맑은 고딕 Semilight" panose="020B0502040204020203" pitchFamily="50" charset="-127"/>
+              </a:rPr>
+              <a:t>14</a:t>
+            </a:r>
+            <a:r>
+              <a:rPr lang="en-US" altLang="ko-KR" sz="1400" dirty="0">
+                <a:latin typeface="맑은 고딕 Semilight" panose="020B0502040204020203" pitchFamily="50" charset="-127"/>
+                <a:ea typeface="맑은 고딕 Semilight" panose="020B0502040204020203" pitchFamily="50" charset="-127"/>
+                <a:cs typeface="맑은 고딕 Semilight" panose="020B0502040204020203" pitchFamily="50" charset="-127"/>
+              </a:rPr>
+              <a:t>)</a:t>
+            </a:r>
+            <a:r>
+              <a:rPr lang="ko-KR" altLang="en-US" sz="1400" dirty="0">
+                <a:latin typeface="맑은 고딕 Semilight" panose="020B0502040204020203" pitchFamily="50" charset="-127"/>
+                <a:ea typeface="맑은 고딕 Semilight" panose="020B0502040204020203" pitchFamily="50" charset="-127"/>
+                <a:cs typeface="맑은 고딕 Semilight" panose="020B0502040204020203" pitchFamily="50" charset="-127"/>
+              </a:rPr>
+              <a:t>로 절반이 됨</a:t>
+            </a:r>
+            <a:endParaRPr lang="en-US" altLang="ko-KR" sz="1400" dirty="0">
+              <a:latin typeface="맑은 고딕 Semilight" panose="020B0502040204020203" pitchFamily="50" charset="-127"/>
+              <a:ea typeface="맑은 고딕 Semilight" panose="020B0502040204020203" pitchFamily="50" charset="-127"/>
+              <a:cs typeface="맑은 고딕 Semilight" panose="020B0502040204020203" pitchFamily="50" charset="-127"/>
+            </a:endParaRPr>
+          </a:p>
+          <a:p>
+            <a:pPr marL="285750" indent="-285750">
+              <a:lnSpc>
+                <a:spcPct val="150000"/>
+              </a:lnSpc>
+              <a:buFont typeface="Wingdings" panose="05000000000000000000" pitchFamily="2" charset="2"/>
+              <a:buChar char="Ø"/>
+            </a:pPr>
+            <a:r>
+              <a:rPr lang="ko-KR" altLang="en-US" sz="1400" dirty="0">
+                <a:latin typeface="맑은 고딕 Semilight" panose="020B0502040204020203" pitchFamily="50" charset="-127"/>
+                <a:ea typeface="맑은 고딕 Semilight" panose="020B0502040204020203" pitchFamily="50" charset="-127"/>
+                <a:cs typeface="맑은 고딕 Semilight" panose="020B0502040204020203" pitchFamily="50" charset="-127"/>
+              </a:rPr>
+              <a:t>C3 (</a:t>
+            </a:r>
+            <a:r>
+              <a:rPr lang="ko-KR" altLang="en-US" sz="1400" dirty="0" err="1">
+                <a:latin typeface="맑은 고딕 Semilight" panose="020B0502040204020203" pitchFamily="50" charset="-127"/>
+                <a:ea typeface="맑은 고딕 Semilight" panose="020B0502040204020203" pitchFamily="50" charset="-127"/>
+                <a:cs typeface="맑은 고딕 Semilight" panose="020B0502040204020203" pitchFamily="50" charset="-127"/>
+              </a:rPr>
+              <a:t>Convolutions</a:t>
+            </a:r>
+            <a:r>
+              <a:rPr lang="ko-KR" altLang="en-US" sz="1400" dirty="0">
+                <a:latin typeface="맑은 고딕 Semilight" panose="020B0502040204020203" pitchFamily="50" charset="-127"/>
+                <a:ea typeface="맑은 고딕 Semilight" panose="020B0502040204020203" pitchFamily="50" charset="-127"/>
+                <a:cs typeface="맑은 고딕 Semilight" panose="020B0502040204020203" pitchFamily="50" charset="-127"/>
+              </a:rPr>
+              <a:t>): </a:t>
+            </a:r>
+            <a:r>
+              <a:rPr lang="en-US" altLang="ko-KR" sz="1400" dirty="0">
+                <a:latin typeface="맑은 고딕 Semilight" panose="020B0502040204020203" pitchFamily="50" charset="-127"/>
+                <a:ea typeface="맑은 고딕 Semilight" panose="020B0502040204020203" pitchFamily="50" charset="-127"/>
+                <a:cs typeface="맑은 고딕 Semilight" panose="020B0502040204020203" pitchFamily="50" charset="-127"/>
+              </a:rPr>
+              <a:t>(</a:t>
+            </a:r>
+            <a:r>
+              <a:rPr lang="ko-KR" altLang="en-US" sz="1400" dirty="0">
+                <a:latin typeface="맑은 고딕 Semilight" panose="020B0502040204020203" pitchFamily="50" charset="-127"/>
+                <a:ea typeface="맑은 고딕 Semilight" panose="020B0502040204020203" pitchFamily="50" charset="-127"/>
+                <a:cs typeface="맑은 고딕 Semilight" panose="020B0502040204020203" pitchFamily="50" charset="-127"/>
+              </a:rPr>
+              <a:t>5</a:t>
+            </a:r>
+            <a:r>
+              <a:rPr lang="en-US" altLang="ko-KR" sz="1400" dirty="0">
+                <a:latin typeface="맑은 고딕 Semilight" panose="020B0502040204020203" pitchFamily="50" charset="-127"/>
+                <a:ea typeface="맑은 고딕 Semilight" panose="020B0502040204020203" pitchFamily="50" charset="-127"/>
+                <a:cs typeface="맑은 고딕 Semilight" panose="020B0502040204020203" pitchFamily="50" charset="-127"/>
+              </a:rPr>
+              <a:t>x</a:t>
+            </a:r>
+            <a:r>
+              <a:rPr lang="ko-KR" altLang="en-US" sz="1400" dirty="0">
+                <a:latin typeface="맑은 고딕 Semilight" panose="020B0502040204020203" pitchFamily="50" charset="-127"/>
+                <a:ea typeface="맑은 고딕 Semilight" panose="020B0502040204020203" pitchFamily="50" charset="-127"/>
+                <a:cs typeface="맑은 고딕 Semilight" panose="020B0502040204020203" pitchFamily="50" charset="-127"/>
+              </a:rPr>
+              <a:t>5</a:t>
+            </a:r>
+            <a:r>
+              <a:rPr lang="en-US" altLang="ko-KR" sz="1400" dirty="0">
+                <a:latin typeface="맑은 고딕 Semilight" panose="020B0502040204020203" pitchFamily="50" charset="-127"/>
+                <a:ea typeface="맑은 고딕 Semilight" panose="020B0502040204020203" pitchFamily="50" charset="-127"/>
+                <a:cs typeface="맑은 고딕 Semilight" panose="020B0502040204020203" pitchFamily="50" charset="-127"/>
+              </a:rPr>
+              <a:t>)</a:t>
+            </a:r>
+            <a:r>
+              <a:rPr lang="ko-KR" altLang="en-US" sz="1400" dirty="0">
+                <a:latin typeface="맑은 고딕 Semilight" panose="020B0502040204020203" pitchFamily="50" charset="-127"/>
+                <a:ea typeface="맑은 고딕 Semilight" panose="020B0502040204020203" pitchFamily="50" charset="-127"/>
+                <a:cs typeface="맑은 고딕 Semilight" panose="020B0502040204020203" pitchFamily="50" charset="-127"/>
+              </a:rPr>
+              <a:t>크기 16개필터를 사용해 패턴을 찾아낸 결과는 </a:t>
+            </a:r>
+            <a:r>
+              <a:rPr lang="en-US" altLang="ko-KR" sz="1400" dirty="0">
+                <a:latin typeface="맑은 고딕 Semilight" panose="020B0502040204020203" pitchFamily="50" charset="-127"/>
+                <a:ea typeface="맑은 고딕 Semilight" panose="020B0502040204020203" pitchFamily="50" charset="-127"/>
+                <a:cs typeface="맑은 고딕 Semilight" panose="020B0502040204020203" pitchFamily="50" charset="-127"/>
+              </a:rPr>
+              <a:t>&gt;</a:t>
+            </a:r>
+            <a:r>
+              <a:rPr lang="ko-KR" altLang="en-US" sz="1400" dirty="0">
+                <a:latin typeface="맑은 고딕 Semilight" panose="020B0502040204020203" pitchFamily="50" charset="-127"/>
+                <a:ea typeface="맑은 고딕 Semilight" panose="020B0502040204020203" pitchFamily="50" charset="-127"/>
+                <a:cs typeface="맑은 고딕 Semilight" panose="020B0502040204020203" pitchFamily="50" charset="-127"/>
+              </a:rPr>
+              <a:t> 16개의 </a:t>
+            </a:r>
+            <a:r>
+              <a:rPr lang="en-US" altLang="ko-KR" sz="1400" dirty="0">
+                <a:latin typeface="맑은 고딕 Semilight" panose="020B0502040204020203" pitchFamily="50" charset="-127"/>
+                <a:ea typeface="맑은 고딕 Semilight" panose="020B0502040204020203" pitchFamily="50" charset="-127"/>
+                <a:cs typeface="맑은 고딕 Semilight" panose="020B0502040204020203" pitchFamily="50" charset="-127"/>
+              </a:rPr>
+              <a:t>(</a:t>
+            </a:r>
+            <a:r>
+              <a:rPr lang="ko-KR" altLang="en-US" sz="1400" dirty="0">
+                <a:latin typeface="맑은 고딕 Semilight" panose="020B0502040204020203" pitchFamily="50" charset="-127"/>
+                <a:ea typeface="맑은 고딕 Semilight" panose="020B0502040204020203" pitchFamily="50" charset="-127"/>
+                <a:cs typeface="맑은 고딕 Semilight" panose="020B0502040204020203" pitchFamily="50" charset="-127"/>
+              </a:rPr>
+              <a:t>10</a:t>
+            </a:r>
+            <a:r>
+              <a:rPr lang="en-US" altLang="ko-KR" sz="1400" dirty="0">
+                <a:latin typeface="맑은 고딕 Semilight" panose="020B0502040204020203" pitchFamily="50" charset="-127"/>
+                <a:ea typeface="맑은 고딕 Semilight" panose="020B0502040204020203" pitchFamily="50" charset="-127"/>
+                <a:cs typeface="맑은 고딕 Semilight" panose="020B0502040204020203" pitchFamily="50" charset="-127"/>
+              </a:rPr>
+              <a:t>x</a:t>
+            </a:r>
+            <a:r>
+              <a:rPr lang="ko-KR" altLang="en-US" sz="1400" dirty="0">
+                <a:latin typeface="맑은 고딕 Semilight" panose="020B0502040204020203" pitchFamily="50" charset="-127"/>
+                <a:ea typeface="맑은 고딕 Semilight" panose="020B0502040204020203" pitchFamily="50" charset="-127"/>
+                <a:cs typeface="맑은 고딕 Semilight" panose="020B0502040204020203" pitchFamily="50" charset="-127"/>
+              </a:rPr>
+              <a:t>10</a:t>
+            </a:r>
+            <a:r>
+              <a:rPr lang="en-US" altLang="ko-KR" sz="1400" dirty="0">
+                <a:latin typeface="맑은 고딕 Semilight" panose="020B0502040204020203" pitchFamily="50" charset="-127"/>
+                <a:ea typeface="맑은 고딕 Semilight" panose="020B0502040204020203" pitchFamily="50" charset="-127"/>
+                <a:cs typeface="맑은 고딕 Semilight" panose="020B0502040204020203" pitchFamily="50" charset="-127"/>
+              </a:rPr>
+              <a:t>)</a:t>
+            </a:r>
+            <a:r>
+              <a:rPr lang="ko-KR" altLang="en-US" sz="1400" dirty="0">
+                <a:latin typeface="맑은 고딕 Semilight" panose="020B0502040204020203" pitchFamily="50" charset="-127"/>
+                <a:ea typeface="맑은 고딕 Semilight" panose="020B0502040204020203" pitchFamily="50" charset="-127"/>
+                <a:cs typeface="맑은 고딕 Semilight" panose="020B0502040204020203" pitchFamily="50" charset="-127"/>
+              </a:rPr>
+              <a:t> 피처 </a:t>
+            </a:r>
+            <a:r>
+              <a:rPr lang="ko-KR" altLang="en-US" sz="1400" dirty="0" err="1">
+                <a:latin typeface="맑은 고딕 Semilight" panose="020B0502040204020203" pitchFamily="50" charset="-127"/>
+                <a:ea typeface="맑은 고딕 Semilight" panose="020B0502040204020203" pitchFamily="50" charset="-127"/>
+                <a:cs typeface="맑은 고딕 Semilight" panose="020B0502040204020203" pitchFamily="50" charset="-127"/>
+              </a:rPr>
+              <a:t>맵이</a:t>
+            </a:r>
+            <a:r>
+              <a:rPr lang="ko-KR" altLang="en-US" sz="1400" dirty="0">
+                <a:latin typeface="맑은 고딕 Semilight" panose="020B0502040204020203" pitchFamily="50" charset="-127"/>
+                <a:ea typeface="맑은 고딕 Semilight" panose="020B0502040204020203" pitchFamily="50" charset="-127"/>
+                <a:cs typeface="맑은 고딕 Semilight" panose="020B0502040204020203" pitchFamily="50" charset="-127"/>
+              </a:rPr>
+              <a:t> 생성 </a:t>
+            </a:r>
+            <a:endParaRPr lang="en-US" altLang="ko-KR" sz="1400" dirty="0">
+              <a:latin typeface="맑은 고딕 Semilight" panose="020B0502040204020203" pitchFamily="50" charset="-127"/>
+              <a:ea typeface="맑은 고딕 Semilight" panose="020B0502040204020203" pitchFamily="50" charset="-127"/>
+              <a:cs typeface="맑은 고딕 Semilight" panose="020B0502040204020203" pitchFamily="50" charset="-127"/>
+            </a:endParaRPr>
+          </a:p>
+          <a:p>
+            <a:pPr marL="742950" lvl="1" indent="-285750">
+              <a:lnSpc>
+                <a:spcPct val="150000"/>
+              </a:lnSpc>
+              <a:buFont typeface="Wingdings" panose="05000000000000000000" pitchFamily="2" charset="2"/>
+              <a:buChar char="Ø"/>
+            </a:pPr>
+            <a:r>
+              <a:rPr lang="ko-KR" altLang="en-US" sz="1400" dirty="0">
+                <a:latin typeface="맑은 고딕 Semilight" panose="020B0502040204020203" pitchFamily="50" charset="-127"/>
+                <a:ea typeface="맑은 고딕 Semilight" panose="020B0502040204020203" pitchFamily="50" charset="-127"/>
+                <a:cs typeface="맑은 고딕 Semilight" panose="020B0502040204020203" pitchFamily="50" charset="-127"/>
+              </a:rPr>
+              <a:t>S4 (</a:t>
+            </a:r>
+            <a:r>
+              <a:rPr lang="ko-KR" altLang="en-US" sz="1400" dirty="0" err="1">
+                <a:latin typeface="맑은 고딕 Semilight" panose="020B0502040204020203" pitchFamily="50" charset="-127"/>
+                <a:ea typeface="맑은 고딕 Semilight" panose="020B0502040204020203" pitchFamily="50" charset="-127"/>
+                <a:cs typeface="맑은 고딕 Semilight" panose="020B0502040204020203" pitchFamily="50" charset="-127"/>
+              </a:rPr>
+              <a:t>Subsampling</a:t>
+            </a:r>
+            <a:r>
+              <a:rPr lang="ko-KR" altLang="en-US" sz="1400" dirty="0">
+                <a:latin typeface="맑은 고딕 Semilight" panose="020B0502040204020203" pitchFamily="50" charset="-127"/>
+                <a:ea typeface="맑은 고딕 Semilight" panose="020B0502040204020203" pitchFamily="50" charset="-127"/>
+                <a:cs typeface="맑은 고딕 Semilight" panose="020B0502040204020203" pitchFamily="50" charset="-127"/>
+              </a:rPr>
+              <a:t>): 16개의 </a:t>
+            </a:r>
+            <a:r>
+              <a:rPr lang="en-US" altLang="ko-KR" sz="1400" dirty="0">
+                <a:latin typeface="맑은 고딕 Semilight" panose="020B0502040204020203" pitchFamily="50" charset="-127"/>
+                <a:ea typeface="맑은 고딕 Semilight" panose="020B0502040204020203" pitchFamily="50" charset="-127"/>
+                <a:cs typeface="맑은 고딕 Semilight" panose="020B0502040204020203" pitchFamily="50" charset="-127"/>
+              </a:rPr>
+              <a:t>(</a:t>
+            </a:r>
+            <a:r>
+              <a:rPr lang="ko-KR" altLang="en-US" sz="1400" dirty="0">
+                <a:latin typeface="맑은 고딕 Semilight" panose="020B0502040204020203" pitchFamily="50" charset="-127"/>
+                <a:ea typeface="맑은 고딕 Semilight" panose="020B0502040204020203" pitchFamily="50" charset="-127"/>
+                <a:cs typeface="맑은 고딕 Semilight" panose="020B0502040204020203" pitchFamily="50" charset="-127"/>
+              </a:rPr>
+              <a:t>5</a:t>
+            </a:r>
+            <a:r>
+              <a:rPr lang="en-US" altLang="ko-KR" sz="1400" dirty="0">
+                <a:latin typeface="맑은 고딕 Semilight" panose="020B0502040204020203" pitchFamily="50" charset="-127"/>
+                <a:ea typeface="맑은 고딕 Semilight" panose="020B0502040204020203" pitchFamily="50" charset="-127"/>
+                <a:cs typeface="맑은 고딕 Semilight" panose="020B0502040204020203" pitchFamily="50" charset="-127"/>
+              </a:rPr>
+              <a:t>x</a:t>
+            </a:r>
+            <a:r>
+              <a:rPr lang="ko-KR" altLang="en-US" sz="1400" dirty="0">
+                <a:latin typeface="맑은 고딕 Semilight" panose="020B0502040204020203" pitchFamily="50" charset="-127"/>
+                <a:ea typeface="맑은 고딕 Semilight" panose="020B0502040204020203" pitchFamily="50" charset="-127"/>
+                <a:cs typeface="맑은 고딕 Semilight" panose="020B0502040204020203" pitchFamily="50" charset="-127"/>
+              </a:rPr>
+              <a:t>5</a:t>
+            </a:r>
+            <a:r>
+              <a:rPr lang="en-US" altLang="ko-KR" sz="1400" dirty="0">
+                <a:latin typeface="맑은 고딕 Semilight" panose="020B0502040204020203" pitchFamily="50" charset="-127"/>
+                <a:ea typeface="맑은 고딕 Semilight" panose="020B0502040204020203" pitchFamily="50" charset="-127"/>
+                <a:cs typeface="맑은 고딕 Semilight" panose="020B0502040204020203" pitchFamily="50" charset="-127"/>
+              </a:rPr>
+              <a:t>)</a:t>
+            </a:r>
+            <a:r>
+              <a:rPr lang="ko-KR" altLang="en-US" sz="1400" dirty="0">
+                <a:latin typeface="맑은 고딕 Semilight" panose="020B0502040204020203" pitchFamily="50" charset="-127"/>
+                <a:ea typeface="맑은 고딕 Semilight" panose="020B0502040204020203" pitchFamily="50" charset="-127"/>
+                <a:cs typeface="맑은 고딕 Semilight" panose="020B0502040204020203" pitchFamily="50" charset="-127"/>
+              </a:rPr>
+              <a:t> 피처 </a:t>
+            </a:r>
+            <a:r>
+              <a:rPr lang="ko-KR" altLang="en-US" sz="1400" dirty="0" err="1">
+                <a:latin typeface="맑은 고딕 Semilight" panose="020B0502040204020203" pitchFamily="50" charset="-127"/>
+                <a:ea typeface="맑은 고딕 Semilight" panose="020B0502040204020203" pitchFamily="50" charset="-127"/>
+                <a:cs typeface="맑은 고딕 Semilight" panose="020B0502040204020203" pitchFamily="50" charset="-127"/>
+              </a:rPr>
+              <a:t>맵이</a:t>
+            </a:r>
+            <a:r>
+              <a:rPr lang="en-US" altLang="ko-KR" sz="1400" dirty="0">
+                <a:latin typeface="맑은 고딕 Semilight" panose="020B0502040204020203" pitchFamily="50" charset="-127"/>
+                <a:ea typeface="맑은 고딕 Semilight" panose="020B0502040204020203" pitchFamily="50" charset="-127"/>
+                <a:cs typeface="맑은 고딕 Semilight" panose="020B0502040204020203" pitchFamily="50" charset="-127"/>
+              </a:rPr>
+              <a:t> </a:t>
+            </a:r>
+            <a:r>
+              <a:rPr lang="ko-KR" altLang="en-US" sz="1400" dirty="0">
+                <a:latin typeface="맑은 고딕 Semilight" panose="020B0502040204020203" pitchFamily="50" charset="-127"/>
+                <a:ea typeface="맑은 고딕 Semilight" panose="020B0502040204020203" pitchFamily="50" charset="-127"/>
+                <a:cs typeface="맑은 고딕 Semilight" panose="020B0502040204020203" pitchFamily="50" charset="-127"/>
+              </a:rPr>
+              <a:t>생성 </a:t>
+            </a:r>
+            <a:endParaRPr lang="en-US" altLang="ko-KR" sz="1400" dirty="0">
+              <a:latin typeface="맑은 고딕 Semilight" panose="020B0502040204020203" pitchFamily="50" charset="-127"/>
+              <a:ea typeface="맑은 고딕 Semilight" panose="020B0502040204020203" pitchFamily="50" charset="-127"/>
+              <a:cs typeface="맑은 고딕 Semilight" panose="020B0502040204020203" pitchFamily="50" charset="-127"/>
+            </a:endParaRPr>
+          </a:p>
+          <a:p>
+            <a:pPr marL="285750" indent="-285750">
+              <a:lnSpc>
+                <a:spcPct val="150000"/>
+              </a:lnSpc>
+              <a:buFont typeface="Wingdings" panose="05000000000000000000" pitchFamily="2" charset="2"/>
+              <a:buChar char="Ø"/>
+            </a:pPr>
+            <a:r>
+              <a:rPr lang="ko-KR" altLang="en-US" sz="1400" dirty="0">
+                <a:latin typeface="맑은 고딕 Semilight" panose="020B0502040204020203" pitchFamily="50" charset="-127"/>
+                <a:ea typeface="맑은 고딕 Semilight" panose="020B0502040204020203" pitchFamily="50" charset="-127"/>
+                <a:cs typeface="맑은 고딕 Semilight" panose="020B0502040204020203" pitchFamily="50" charset="-127"/>
+              </a:rPr>
+              <a:t>F5 &amp; F6 (</a:t>
+            </a:r>
+            <a:r>
+              <a:rPr lang="ko-KR" altLang="en-US" sz="1400" dirty="0" err="1">
+                <a:latin typeface="맑은 고딕 Semilight" panose="020B0502040204020203" pitchFamily="50" charset="-127"/>
+                <a:ea typeface="맑은 고딕 Semilight" panose="020B0502040204020203" pitchFamily="50" charset="-127"/>
+                <a:cs typeface="맑은 고딕 Semilight" panose="020B0502040204020203" pitchFamily="50" charset="-127"/>
+              </a:rPr>
+              <a:t>Full</a:t>
+            </a:r>
+            <a:r>
+              <a:rPr lang="ko-KR" altLang="en-US" sz="1400" dirty="0">
+                <a:latin typeface="맑은 고딕 Semilight" panose="020B0502040204020203" pitchFamily="50" charset="-127"/>
+                <a:ea typeface="맑은 고딕 Semilight" panose="020B0502040204020203" pitchFamily="50" charset="-127"/>
+                <a:cs typeface="맑은 고딕 Semilight" panose="020B0502040204020203" pitchFamily="50" charset="-127"/>
+              </a:rPr>
+              <a:t> </a:t>
+            </a:r>
+            <a:r>
+              <a:rPr lang="ko-KR" altLang="en-US" sz="1400" dirty="0" err="1">
+                <a:latin typeface="맑은 고딕 Semilight" panose="020B0502040204020203" pitchFamily="50" charset="-127"/>
+                <a:ea typeface="맑은 고딕 Semilight" panose="020B0502040204020203" pitchFamily="50" charset="-127"/>
+                <a:cs typeface="맑은 고딕 Semilight" panose="020B0502040204020203" pitchFamily="50" charset="-127"/>
+              </a:rPr>
+              <a:t>Connection</a:t>
+            </a:r>
+            <a:r>
+              <a:rPr lang="ko-KR" altLang="en-US" sz="1400" dirty="0">
+                <a:latin typeface="맑은 고딕 Semilight" panose="020B0502040204020203" pitchFamily="50" charset="-127"/>
+                <a:ea typeface="맑은 고딕 Semilight" panose="020B0502040204020203" pitchFamily="50" charset="-127"/>
+                <a:cs typeface="맑은 고딕 Semilight" panose="020B0502040204020203" pitchFamily="50" charset="-127"/>
+              </a:rPr>
+              <a:t>): 추출된 고차원 특징들을 일렬로 펼쳐서 일반적인 신경망(</a:t>
+            </a:r>
+            <a:r>
+              <a:rPr lang="ko-KR" altLang="en-US" sz="1400" dirty="0" err="1">
+                <a:latin typeface="맑은 고딕 Semilight" panose="020B0502040204020203" pitchFamily="50" charset="-127"/>
+                <a:ea typeface="맑은 고딕 Semilight" panose="020B0502040204020203" pitchFamily="50" charset="-127"/>
+                <a:cs typeface="맑은 고딕 Semilight" panose="020B0502040204020203" pitchFamily="50" charset="-127"/>
+              </a:rPr>
+              <a:t>Dense</a:t>
+            </a:r>
+            <a:r>
+              <a:rPr lang="ko-KR" altLang="en-US" sz="1400" dirty="0">
+                <a:latin typeface="맑은 고딕 Semilight" panose="020B0502040204020203" pitchFamily="50" charset="-127"/>
+                <a:ea typeface="맑은 고딕 Semilight" panose="020B0502040204020203" pitchFamily="50" charset="-127"/>
+                <a:cs typeface="맑은 고딕 Semilight" panose="020B0502040204020203" pitchFamily="50" charset="-127"/>
+              </a:rPr>
+              <a:t> </a:t>
+            </a:r>
+            <a:r>
+              <a:rPr lang="ko-KR" altLang="en-US" sz="1400" dirty="0" err="1">
+                <a:latin typeface="맑은 고딕 Semilight" panose="020B0502040204020203" pitchFamily="50" charset="-127"/>
+                <a:ea typeface="맑은 고딕 Semilight" panose="020B0502040204020203" pitchFamily="50" charset="-127"/>
+                <a:cs typeface="맑은 고딕 Semilight" panose="020B0502040204020203" pitchFamily="50" charset="-127"/>
+              </a:rPr>
+              <a:t>Layer</a:t>
+            </a:r>
+            <a:r>
+              <a:rPr lang="ko-KR" altLang="en-US" sz="1400" dirty="0">
+                <a:latin typeface="맑은 고딕 Semilight" panose="020B0502040204020203" pitchFamily="50" charset="-127"/>
+                <a:ea typeface="맑은 고딕 Semilight" panose="020B0502040204020203" pitchFamily="50" charset="-127"/>
+                <a:cs typeface="맑은 고딕 Semilight" panose="020B0502040204020203" pitchFamily="50" charset="-127"/>
+              </a:rPr>
+              <a:t>)</a:t>
+            </a:r>
+            <a:r>
+              <a:rPr lang="ko-KR" altLang="en-US" sz="1400" dirty="0" err="1">
+                <a:latin typeface="맑은 고딕 Semilight" panose="020B0502040204020203" pitchFamily="50" charset="-127"/>
+                <a:ea typeface="맑은 고딕 Semilight" panose="020B0502040204020203" pitchFamily="50" charset="-127"/>
+                <a:cs typeface="맑은 고딕 Semilight" panose="020B0502040204020203" pitchFamily="50" charset="-127"/>
+              </a:rPr>
+              <a:t>에</a:t>
+            </a:r>
+            <a:r>
+              <a:rPr lang="ko-KR" altLang="en-US" sz="1400" dirty="0">
+                <a:latin typeface="맑은 고딕 Semilight" panose="020B0502040204020203" pitchFamily="50" charset="-127"/>
+                <a:ea typeface="맑은 고딕 Semilight" panose="020B0502040204020203" pitchFamily="50" charset="-127"/>
+                <a:cs typeface="맑은 고딕 Semilight" panose="020B0502040204020203" pitchFamily="50" charset="-127"/>
+              </a:rPr>
+              <a:t> 연결</a:t>
+            </a:r>
+            <a:endParaRPr lang="en-US" altLang="ko-KR" sz="1400" dirty="0">
+              <a:latin typeface="맑은 고딕 Semilight" panose="020B0502040204020203" pitchFamily="50" charset="-127"/>
+              <a:ea typeface="맑은 고딕 Semilight" panose="020B0502040204020203" pitchFamily="50" charset="-127"/>
+              <a:cs typeface="맑은 고딕 Semilight" panose="020B0502040204020203" pitchFamily="50" charset="-127"/>
+            </a:endParaRPr>
+          </a:p>
+          <a:p>
+            <a:pPr marL="742950" lvl="1" indent="-285750">
+              <a:lnSpc>
+                <a:spcPct val="150000"/>
+              </a:lnSpc>
+              <a:buFont typeface="Wingdings" panose="05000000000000000000" pitchFamily="2" charset="2"/>
+              <a:buChar char="Ø"/>
+            </a:pPr>
+            <a:r>
+              <a:rPr lang="ko-KR" altLang="en-US" sz="1400" dirty="0">
+                <a:latin typeface="맑은 고딕 Semilight" panose="020B0502040204020203" pitchFamily="50" charset="-127"/>
+                <a:ea typeface="맑은 고딕 Semilight" panose="020B0502040204020203" pitchFamily="50" charset="-127"/>
+                <a:cs typeface="맑은 고딕 Semilight" panose="020B0502040204020203" pitchFamily="50" charset="-127"/>
+              </a:rPr>
+              <a:t>F5는 120개, F6은 84개의 뉴런으로 구성</a:t>
+            </a:r>
+            <a:endParaRPr lang="en-US" altLang="ko-KR" sz="1400" dirty="0">
+              <a:latin typeface="맑은 고딕 Semilight" panose="020B0502040204020203" pitchFamily="50" charset="-127"/>
+              <a:ea typeface="맑은 고딕 Semilight" panose="020B0502040204020203" pitchFamily="50" charset="-127"/>
+              <a:cs typeface="맑은 고딕 Semilight" panose="020B0502040204020203" pitchFamily="50" charset="-127"/>
+            </a:endParaRPr>
+          </a:p>
+          <a:p>
+            <a:pPr marL="285750" indent="-285750">
+              <a:lnSpc>
+                <a:spcPct val="150000"/>
+              </a:lnSpc>
+              <a:buFont typeface="Wingdings" panose="05000000000000000000" pitchFamily="2" charset="2"/>
+              <a:buChar char="Ø"/>
+            </a:pPr>
+            <a:r>
+              <a:rPr lang="en-US" altLang="ko-KR" sz="1400" dirty="0">
+                <a:latin typeface="맑은 고딕 Semilight" panose="020B0502040204020203" pitchFamily="50" charset="-127"/>
+                <a:ea typeface="맑은 고딕 Semilight" panose="020B0502040204020203" pitchFamily="50" charset="-127"/>
+                <a:cs typeface="맑은 고딕 Semilight" panose="020B0502040204020203" pitchFamily="50" charset="-127"/>
+              </a:rPr>
+              <a:t>O</a:t>
+            </a:r>
+            <a:r>
+              <a:rPr lang="ko-KR" altLang="en-US" sz="1400" dirty="0">
+                <a:latin typeface="맑은 고딕 Semilight" panose="020B0502040204020203" pitchFamily="50" charset="-127"/>
+                <a:ea typeface="맑은 고딕 Semilight" panose="020B0502040204020203" pitchFamily="50" charset="-127"/>
+                <a:cs typeface="맑은 고딕 Semilight" panose="020B0502040204020203" pitchFamily="50" charset="-127"/>
+              </a:rPr>
+              <a:t>UTPUT (</a:t>
+            </a:r>
+            <a:r>
+              <a:rPr lang="en-US" altLang="ko-KR" sz="1400" dirty="0">
+                <a:latin typeface="맑은 고딕 Semilight" panose="020B0502040204020203" pitchFamily="50" charset="-127"/>
+                <a:ea typeface="맑은 고딕 Semilight" panose="020B0502040204020203" pitchFamily="50" charset="-127"/>
+                <a:cs typeface="맑은 고딕 Semilight" panose="020B0502040204020203" pitchFamily="50" charset="-127"/>
+              </a:rPr>
+              <a:t>1x9)</a:t>
+            </a:r>
+            <a:r>
+              <a:rPr lang="ko-KR" altLang="en-US" sz="1400" dirty="0">
+                <a:latin typeface="맑은 고딕 Semilight" panose="020B0502040204020203" pitchFamily="50" charset="-127"/>
+                <a:ea typeface="맑은 고딕 Semilight" panose="020B0502040204020203" pitchFamily="50" charset="-127"/>
+                <a:cs typeface="맑은 고딕 Semilight" panose="020B0502040204020203" pitchFamily="50" charset="-127"/>
+              </a:rPr>
+              <a:t>): 최종 결과물로</a:t>
+            </a:r>
+            <a:r>
+              <a:rPr lang="en-US" altLang="ko-KR" sz="1400" dirty="0">
+                <a:latin typeface="맑은 고딕 Semilight" panose="020B0502040204020203" pitchFamily="50" charset="-127"/>
+                <a:ea typeface="맑은 고딕 Semilight" panose="020B0502040204020203" pitchFamily="50" charset="-127"/>
+                <a:cs typeface="맑은 고딕 Semilight" panose="020B0502040204020203" pitchFamily="50" charset="-127"/>
+              </a:rPr>
+              <a:t> </a:t>
+            </a:r>
+            <a:r>
+              <a:rPr lang="ko-KR" altLang="en-US" sz="1400" dirty="0">
+                <a:latin typeface="맑은 고딕 Semilight" panose="020B0502040204020203" pitchFamily="50" charset="-127"/>
+                <a:ea typeface="맑은 고딕 Semilight" panose="020B0502040204020203" pitchFamily="50" charset="-127"/>
+                <a:cs typeface="맑은 고딕 Semilight" panose="020B0502040204020203" pitchFamily="50" charset="-127"/>
+              </a:rPr>
+              <a:t>숫자 0</a:t>
+            </a:r>
+            <a:r>
+              <a:rPr lang="en-US" altLang="ko-KR" sz="1400" dirty="0">
+                <a:latin typeface="맑은 고딕 Semilight" panose="020B0502040204020203" pitchFamily="50" charset="-127"/>
+                <a:ea typeface="맑은 고딕 Semilight" panose="020B0502040204020203" pitchFamily="50" charset="-127"/>
+                <a:cs typeface="맑은 고딕 Semilight" panose="020B0502040204020203" pitchFamily="50" charset="-127"/>
+              </a:rPr>
+              <a:t>~</a:t>
+            </a:r>
+            <a:r>
+              <a:rPr lang="ko-KR" altLang="en-US" sz="1400" dirty="0">
+                <a:latin typeface="맑은 고딕 Semilight" panose="020B0502040204020203" pitchFamily="50" charset="-127"/>
+                <a:ea typeface="맑은 고딕 Semilight" panose="020B0502040204020203" pitchFamily="50" charset="-127"/>
+                <a:cs typeface="맑은 고딕 Semilight" panose="020B0502040204020203" pitchFamily="50" charset="-127"/>
+              </a:rPr>
+              <a:t>9까</a:t>
+            </a:r>
+            <a:r>
+              <a:rPr lang="en-US" altLang="ko-KR" sz="1400" dirty="0">
+                <a:latin typeface="맑은 고딕 Semilight" panose="020B0502040204020203" pitchFamily="50" charset="-127"/>
+                <a:ea typeface="맑은 고딕 Semilight" panose="020B0502040204020203" pitchFamily="50" charset="-127"/>
+                <a:cs typeface="맑은 고딕 Semilight" panose="020B0502040204020203" pitchFamily="50" charset="-127"/>
+              </a:rPr>
+              <a:t>,  </a:t>
+            </a:r>
+            <a:r>
+              <a:rPr lang="ko-KR" altLang="en-US" sz="1400" dirty="0">
+                <a:latin typeface="맑은 고딕 Semilight" panose="020B0502040204020203" pitchFamily="50" charset="-127"/>
+                <a:ea typeface="맑은 고딕 Semilight" panose="020B0502040204020203" pitchFamily="50" charset="-127"/>
+                <a:cs typeface="맑은 고딕 Semilight" panose="020B0502040204020203" pitchFamily="50" charset="-127"/>
+              </a:rPr>
+              <a:t>10개의 클래스 중 어디에 속하는지 확률을 출력</a:t>
+            </a:r>
+          </a:p>
+        </p:txBody>
+      </p:sp>
+    </p:spTree>
+    <p:extLst>
+      <p:ext uri="{BB962C8B-B14F-4D97-AF65-F5344CB8AC3E}">
+        <p14:creationId xmlns:p14="http://schemas.microsoft.com/office/powerpoint/2010/main" val="1831629588"/>
+      </p:ext>
+    </p:extLst>
+  </p:cSld>
+  <p:clrMapOvr>
+    <a:masterClrMapping/>
+  </p:clrMapOvr>
+  <mc:AlternateContent xmlns:mc="http://schemas.openxmlformats.org/markup-compatibility/2006" xmlns:p14="http://schemas.microsoft.com/office/powerpoint/2010/main">
+    <mc:Choice Requires="p14">
+      <p:transition p14:dur="10"/>
+    </mc:Choice>
+    <mc:Fallback xmlns="">
+      <p:transition/>
+    </mc:Fallback>
+  </mc:AlternateContent>
+</p:sld>
+</file>
+
 <file path=ppt/slides/slide2.xml><?xml version="1.0" encoding="utf-8"?>
 <p:sld xmlns:a="http://schemas.openxmlformats.org/drawingml/2006/main" xmlns:r="http://schemas.openxmlformats.org/officeDocument/2006/relationships" xmlns:p="http://schemas.openxmlformats.org/presentationml/2006/main">
   <p:cSld>

--- a/Linear_Algebra/w5_03_Deep_Learning_with_pytorch.pptx
+++ b/Linear_Algebra/w5_03_Deep_Learning_with_pytorch.pptx
@@ -5,31 +5,40 @@
     <p:sldMasterId id="2147483660" r:id="rId1"/>
   </p:sldMasterIdLst>
   <p:notesMasterIdLst>
-    <p:notesMasterId r:id="rId21"/>
+    <p:notesMasterId r:id="rId30"/>
   </p:notesMasterIdLst>
   <p:handoutMasterIdLst>
-    <p:handoutMasterId r:id="rId22"/>
+    <p:handoutMasterId r:id="rId31"/>
   </p:handoutMasterIdLst>
   <p:sldIdLst>
     <p:sldId id="1074" r:id="rId2"/>
-    <p:sldId id="1069" r:id="rId3"/>
-    <p:sldId id="1068" r:id="rId4"/>
-    <p:sldId id="1075" r:id="rId5"/>
-    <p:sldId id="1072" r:id="rId6"/>
-    <p:sldId id="1073" r:id="rId7"/>
-    <p:sldId id="1076" r:id="rId8"/>
-    <p:sldId id="1077" r:id="rId9"/>
-    <p:sldId id="1078" r:id="rId10"/>
-    <p:sldId id="1079" r:id="rId11"/>
-    <p:sldId id="1080" r:id="rId12"/>
-    <p:sldId id="1081" r:id="rId13"/>
-    <p:sldId id="1082" r:id="rId14"/>
-    <p:sldId id="921" r:id="rId15"/>
-    <p:sldId id="1084" r:id="rId16"/>
-    <p:sldId id="1083" r:id="rId17"/>
-    <p:sldId id="980" r:id="rId18"/>
-    <p:sldId id="1085" r:id="rId19"/>
-    <p:sldId id="1086" r:id="rId20"/>
+    <p:sldId id="1090" r:id="rId3"/>
+    <p:sldId id="1069" r:id="rId4"/>
+    <p:sldId id="1068" r:id="rId5"/>
+    <p:sldId id="1075" r:id="rId6"/>
+    <p:sldId id="1072" r:id="rId7"/>
+    <p:sldId id="1073" r:id="rId8"/>
+    <p:sldId id="1076" r:id="rId9"/>
+    <p:sldId id="1077" r:id="rId10"/>
+    <p:sldId id="1091" r:id="rId11"/>
+    <p:sldId id="1078" r:id="rId12"/>
+    <p:sldId id="1079" r:id="rId13"/>
+    <p:sldId id="1080" r:id="rId14"/>
+    <p:sldId id="1081" r:id="rId15"/>
+    <p:sldId id="1092" r:id="rId16"/>
+    <p:sldId id="1082" r:id="rId17"/>
+    <p:sldId id="921" r:id="rId18"/>
+    <p:sldId id="1093" r:id="rId19"/>
+    <p:sldId id="1084" r:id="rId20"/>
+    <p:sldId id="1083" r:id="rId21"/>
+    <p:sldId id="1094" r:id="rId22"/>
+    <p:sldId id="1089" r:id="rId23"/>
+    <p:sldId id="1085" r:id="rId24"/>
+    <p:sldId id="1095" r:id="rId25"/>
+    <p:sldId id="1086" r:id="rId26"/>
+    <p:sldId id="1096" r:id="rId27"/>
+    <p:sldId id="995" r:id="rId28"/>
+    <p:sldId id="980" r:id="rId29"/>
   </p:sldIdLst>
   <p:sldSz cx="12192000" cy="6858000"/>
   <p:notesSz cx="6858000" cy="9144000"/>
@@ -137,6 +146,7 @@
         <p14:section name="디자인, 모핑, 주석 달기, 공동 작업, 입력하세요" id="{B9B51309-D148-4332-87C2-07BE32FBCA3B}">
           <p14:sldIdLst>
             <p14:sldId id="1074"/>
+            <p14:sldId id="1090"/>
             <p14:sldId id="1069"/>
             <p14:sldId id="1068"/>
             <p14:sldId id="1075"/>
@@ -144,17 +154,25 @@
             <p14:sldId id="1073"/>
             <p14:sldId id="1076"/>
             <p14:sldId id="1077"/>
+            <p14:sldId id="1091"/>
             <p14:sldId id="1078"/>
             <p14:sldId id="1079"/>
             <p14:sldId id="1080"/>
             <p14:sldId id="1081"/>
+            <p14:sldId id="1092"/>
             <p14:sldId id="1082"/>
             <p14:sldId id="921"/>
+            <p14:sldId id="1093"/>
             <p14:sldId id="1084"/>
             <p14:sldId id="1083"/>
+            <p14:sldId id="1094"/>
+            <p14:sldId id="1089"/>
+            <p14:sldId id="1085"/>
+            <p14:sldId id="1095"/>
+            <p14:sldId id="1086"/>
+            <p14:sldId id="1096"/>
+            <p14:sldId id="995"/>
             <p14:sldId id="980"/>
-            <p14:sldId id="1085"/>
-            <p14:sldId id="1086"/>
           </p14:sldIdLst>
         </p14:section>
         <p14:section name="자세한 정보" id="{2CC34DB2-6590-42C0-AD4B-A04C6060184E}">
@@ -279,7 +297,7 @@
                 <a:latin typeface="맑은 고딕" panose="020B0503020000020004" pitchFamily="50" charset="-127"/>
                 <a:ea typeface="맑은 고딕" panose="020B0503020000020004" pitchFamily="50" charset="-127"/>
               </a:rPr>
-              <a:t>2026-05-01</a:t>
+              <a:t>2026-05-02</a:t>
             </a:fld>
             <a:endParaRPr lang="ko-KR" altLang="en-US">
               <a:latin typeface="맑은 고딕" panose="020B0503020000020004" pitchFamily="50" charset="-127"/>
@@ -465,7 +483,7 @@
           <a:p>
             <a:fld id="{43E1C3DD-4A19-441D-907C-380838DB51C4}" type="datetime1">
               <a:rPr lang="ko-KR" altLang="en-US" noProof="0" smtClean="0"/>
-              <a:t>2026-05-01</a:t>
+              <a:t>2026-05-02</a:t>
             </a:fld>
             <a:endParaRPr lang="ko-KR" altLang="en-US" noProof="0"/>
           </a:p>
@@ -877,6 +895,242 @@
         <p:cNvPr id="1" name="">
           <a:extLst>
             <a:ext uri="{FF2B5EF4-FFF2-40B4-BE49-F238E27FC236}">
+              <a16:creationId xmlns:a16="http://schemas.microsoft.com/office/drawing/2014/main" id="{0815034D-BB4E-E78E-991E-5D0999AC1CB0}"/>
+            </a:ext>
+          </a:extLst>
+        </p:cNvPr>
+        <p:cNvGrpSpPr/>
+        <p:nvPr/>
+      </p:nvGrpSpPr>
+      <p:grpSpPr>
+        <a:xfrm>
+          <a:off x="0" y="0"/>
+          <a:ext cx="0" cy="0"/>
+          <a:chOff x="0" y="0"/>
+          <a:chExt cx="0" cy="0"/>
+        </a:xfrm>
+      </p:grpSpPr>
+      <p:sp>
+        <p:nvSpPr>
+          <p:cNvPr id="2" name="슬라이드 이미지 개체 틀 1">
+            <a:extLst>
+              <a:ext uri="{FF2B5EF4-FFF2-40B4-BE49-F238E27FC236}">
+                <a16:creationId xmlns:a16="http://schemas.microsoft.com/office/drawing/2014/main" id="{709604A7-A0C0-A6F3-9891-462F2B3A1BA6}"/>
+              </a:ext>
+            </a:extLst>
+          </p:cNvPr>
+          <p:cNvSpPr>
+            <a:spLocks noGrp="1" noRot="1" noChangeAspect="1"/>
+          </p:cNvSpPr>
+          <p:nvPr>
+            <p:ph type="sldImg"/>
+          </p:nvPr>
+        </p:nvSpPr>
+        <p:spPr/>
+      </p:sp>
+      <p:sp>
+        <p:nvSpPr>
+          <p:cNvPr id="3" name="슬라이드 노트 개체 틀 2">
+            <a:extLst>
+              <a:ext uri="{FF2B5EF4-FFF2-40B4-BE49-F238E27FC236}">
+                <a16:creationId xmlns:a16="http://schemas.microsoft.com/office/drawing/2014/main" id="{3ADBF3F5-5E30-BE83-706C-91689D132E20}"/>
+              </a:ext>
+            </a:extLst>
+          </p:cNvPr>
+          <p:cNvSpPr>
+            <a:spLocks noGrp="1"/>
+          </p:cNvSpPr>
+          <p:nvPr>
+            <p:ph type="body" idx="1"/>
+          </p:nvPr>
+        </p:nvSpPr>
+        <p:spPr/>
+        <p:txBody>
+          <a:bodyPr/>
+          <a:lstStyle/>
+          <a:p>
+            <a:endParaRPr lang="ko-KR" altLang="en-US">
+              <a:latin typeface="맑은 고딕" panose="020B0503020000020004" pitchFamily="50" charset="-127"/>
+              <a:ea typeface="맑은 고딕" panose="020B0503020000020004" pitchFamily="50" charset="-127"/>
+            </a:endParaRPr>
+          </a:p>
+        </p:txBody>
+      </p:sp>
+      <p:sp>
+        <p:nvSpPr>
+          <p:cNvPr id="4" name="슬라이드 번호 개체 틀 3">
+            <a:extLst>
+              <a:ext uri="{FF2B5EF4-FFF2-40B4-BE49-F238E27FC236}">
+                <a16:creationId xmlns:a16="http://schemas.microsoft.com/office/drawing/2014/main" id="{B756841A-7F6C-3EBA-9752-54803DF5D4D4}"/>
+              </a:ext>
+            </a:extLst>
+          </p:cNvPr>
+          <p:cNvSpPr>
+            <a:spLocks noGrp="1"/>
+          </p:cNvSpPr>
+          <p:nvPr>
+            <p:ph type="sldNum" sz="quarter" idx="5"/>
+          </p:nvPr>
+        </p:nvSpPr>
+        <p:spPr/>
+        <p:txBody>
+          <a:bodyPr/>
+          <a:lstStyle/>
+          <a:p>
+            <a:pPr rtl="0"/>
+            <a:fld id="{DF61EA0F-A667-4B49-8422-0062BC55E249}" type="slidenum">
+              <a:rPr lang="en-US" altLang="ko-KR" smtClean="0">
+                <a:latin typeface="맑은 고딕" panose="020B0503020000020004" pitchFamily="50" charset="-127"/>
+                <a:ea typeface="맑은 고딕" panose="020B0503020000020004" pitchFamily="50" charset="-127"/>
+              </a:rPr>
+              <a:t>10</a:t>
+            </a:fld>
+            <a:endParaRPr lang="ko-KR" altLang="en-US">
+              <a:latin typeface="맑은 고딕" panose="020B0503020000020004" pitchFamily="50" charset="-127"/>
+              <a:ea typeface="맑은 고딕" panose="020B0503020000020004" pitchFamily="50" charset="-127"/>
+            </a:endParaRPr>
+          </a:p>
+        </p:txBody>
+      </p:sp>
+    </p:spTree>
+    <p:extLst>
+      <p:ext uri="{BB962C8B-B14F-4D97-AF65-F5344CB8AC3E}">
+        <p14:creationId xmlns:p14="http://schemas.microsoft.com/office/powerpoint/2010/main" val="2935995555"/>
+      </p:ext>
+    </p:extLst>
+  </p:cSld>
+  <p:clrMapOvr>
+    <a:masterClrMapping/>
+  </p:clrMapOvr>
+</p:notes>
+</file>
+
+<file path=ppt/notesSlides/notesSlide11.xml><?xml version="1.0" encoding="utf-8"?>
+<p:notes xmlns:a="http://schemas.openxmlformats.org/drawingml/2006/main" xmlns:r="http://schemas.openxmlformats.org/officeDocument/2006/relationships" xmlns:p="http://schemas.openxmlformats.org/presentationml/2006/main">
+  <p:cSld>
+    <p:spTree>
+      <p:nvGrpSpPr>
+        <p:cNvPr id="1" name="">
+          <a:extLst>
+            <a:ext uri="{FF2B5EF4-FFF2-40B4-BE49-F238E27FC236}">
+              <a16:creationId xmlns:a16="http://schemas.microsoft.com/office/drawing/2014/main" id="{85554E00-A38F-7D23-BA6B-6F457A28A604}"/>
+            </a:ext>
+          </a:extLst>
+        </p:cNvPr>
+        <p:cNvGrpSpPr/>
+        <p:nvPr/>
+      </p:nvGrpSpPr>
+      <p:grpSpPr>
+        <a:xfrm>
+          <a:off x="0" y="0"/>
+          <a:ext cx="0" cy="0"/>
+          <a:chOff x="0" y="0"/>
+          <a:chExt cx="0" cy="0"/>
+        </a:xfrm>
+      </p:grpSpPr>
+      <p:sp>
+        <p:nvSpPr>
+          <p:cNvPr id="2" name="슬라이드 이미지 개체 틀 1">
+            <a:extLst>
+              <a:ext uri="{FF2B5EF4-FFF2-40B4-BE49-F238E27FC236}">
+                <a16:creationId xmlns:a16="http://schemas.microsoft.com/office/drawing/2014/main" id="{AB4BFAD4-9913-AE63-854C-9827F61CDA21}"/>
+              </a:ext>
+            </a:extLst>
+          </p:cNvPr>
+          <p:cNvSpPr>
+            <a:spLocks noGrp="1" noRot="1" noChangeAspect="1"/>
+          </p:cNvSpPr>
+          <p:nvPr>
+            <p:ph type="sldImg"/>
+          </p:nvPr>
+        </p:nvSpPr>
+        <p:spPr/>
+      </p:sp>
+      <p:sp>
+        <p:nvSpPr>
+          <p:cNvPr id="3" name="슬라이드 노트 개체 틀 2">
+            <a:extLst>
+              <a:ext uri="{FF2B5EF4-FFF2-40B4-BE49-F238E27FC236}">
+                <a16:creationId xmlns:a16="http://schemas.microsoft.com/office/drawing/2014/main" id="{55B4563A-4A81-D9E4-9D4F-E57899461472}"/>
+              </a:ext>
+            </a:extLst>
+          </p:cNvPr>
+          <p:cNvSpPr>
+            <a:spLocks noGrp="1"/>
+          </p:cNvSpPr>
+          <p:nvPr>
+            <p:ph type="body" idx="1"/>
+          </p:nvPr>
+        </p:nvSpPr>
+        <p:spPr/>
+        <p:txBody>
+          <a:bodyPr/>
+          <a:lstStyle/>
+          <a:p>
+            <a:endParaRPr lang="ko-KR" altLang="en-US">
+              <a:latin typeface="맑은 고딕" panose="020B0503020000020004" pitchFamily="50" charset="-127"/>
+              <a:ea typeface="맑은 고딕" panose="020B0503020000020004" pitchFamily="50" charset="-127"/>
+            </a:endParaRPr>
+          </a:p>
+        </p:txBody>
+      </p:sp>
+      <p:sp>
+        <p:nvSpPr>
+          <p:cNvPr id="4" name="슬라이드 번호 개체 틀 3">
+            <a:extLst>
+              <a:ext uri="{FF2B5EF4-FFF2-40B4-BE49-F238E27FC236}">
+                <a16:creationId xmlns:a16="http://schemas.microsoft.com/office/drawing/2014/main" id="{763246C0-0489-2897-6A41-AA8D135E25A5}"/>
+              </a:ext>
+            </a:extLst>
+          </p:cNvPr>
+          <p:cNvSpPr>
+            <a:spLocks noGrp="1"/>
+          </p:cNvSpPr>
+          <p:nvPr>
+            <p:ph type="sldNum" sz="quarter" idx="5"/>
+          </p:nvPr>
+        </p:nvSpPr>
+        <p:spPr/>
+        <p:txBody>
+          <a:bodyPr/>
+          <a:lstStyle/>
+          <a:p>
+            <a:pPr rtl="0"/>
+            <a:fld id="{DF61EA0F-A667-4B49-8422-0062BC55E249}" type="slidenum">
+              <a:rPr lang="en-US" altLang="ko-KR" smtClean="0">
+                <a:latin typeface="맑은 고딕" panose="020B0503020000020004" pitchFamily="50" charset="-127"/>
+                <a:ea typeface="맑은 고딕" panose="020B0503020000020004" pitchFamily="50" charset="-127"/>
+              </a:rPr>
+              <a:t>11</a:t>
+            </a:fld>
+            <a:endParaRPr lang="ko-KR" altLang="en-US">
+              <a:latin typeface="맑은 고딕" panose="020B0503020000020004" pitchFamily="50" charset="-127"/>
+              <a:ea typeface="맑은 고딕" panose="020B0503020000020004" pitchFamily="50" charset="-127"/>
+            </a:endParaRPr>
+          </a:p>
+        </p:txBody>
+      </p:sp>
+    </p:spTree>
+    <p:extLst>
+      <p:ext uri="{BB962C8B-B14F-4D97-AF65-F5344CB8AC3E}">
+        <p14:creationId xmlns:p14="http://schemas.microsoft.com/office/powerpoint/2010/main" val="39014564"/>
+      </p:ext>
+    </p:extLst>
+  </p:cSld>
+  <p:clrMapOvr>
+    <a:masterClrMapping/>
+  </p:clrMapOvr>
+</p:notes>
+</file>
+
+<file path=ppt/notesSlides/notesSlide12.xml><?xml version="1.0" encoding="utf-8"?>
+<p:notes xmlns:a="http://schemas.openxmlformats.org/drawingml/2006/main" xmlns:r="http://schemas.openxmlformats.org/officeDocument/2006/relationships" xmlns:p="http://schemas.openxmlformats.org/presentationml/2006/main">
+  <p:cSld>
+    <p:spTree>
+      <p:nvGrpSpPr>
+        <p:cNvPr id="1" name="">
+          <a:extLst>
+            <a:ext uri="{FF2B5EF4-FFF2-40B4-BE49-F238E27FC236}">
               <a16:creationId xmlns:a16="http://schemas.microsoft.com/office/drawing/2014/main" id="{64E255DB-3666-3A06-CA5D-0F562D6FB0F5}"/>
             </a:ext>
           </a:extLst>
@@ -965,7 +1219,7 @@
                 <a:latin typeface="맑은 고딕" panose="020B0503020000020004" pitchFamily="50" charset="-127"/>
                 <a:ea typeface="맑은 고딕" panose="020B0503020000020004" pitchFamily="50" charset="-127"/>
               </a:rPr>
-              <a:t>10</a:t>
+              <a:t>12</a:t>
             </a:fld>
             <a:endParaRPr lang="ko-KR" altLang="en-US">
               <a:latin typeface="맑은 고딕" panose="020B0503020000020004" pitchFamily="50" charset="-127"/>
@@ -987,7 +1241,7 @@
 </p:notes>
 </file>
 
-<file path=ppt/notesSlides/notesSlide11.xml><?xml version="1.0" encoding="utf-8"?>
+<file path=ppt/notesSlides/notesSlide13.xml><?xml version="1.0" encoding="utf-8"?>
 <p:notes xmlns:a="http://schemas.openxmlformats.org/drawingml/2006/main" xmlns:r="http://schemas.openxmlformats.org/officeDocument/2006/relationships" xmlns:p="http://schemas.openxmlformats.org/presentationml/2006/main">
   <p:cSld>
     <p:spTree>
@@ -1083,7 +1337,7 @@
                 <a:latin typeface="맑은 고딕" panose="020B0503020000020004" pitchFamily="50" charset="-127"/>
                 <a:ea typeface="맑은 고딕" panose="020B0503020000020004" pitchFamily="50" charset="-127"/>
               </a:rPr>
-              <a:t>11</a:t>
+              <a:t>13</a:t>
             </a:fld>
             <a:endParaRPr lang="ko-KR" altLang="en-US">
               <a:latin typeface="맑은 고딕" panose="020B0503020000020004" pitchFamily="50" charset="-127"/>
@@ -1105,7 +1359,7 @@
 </p:notes>
 </file>
 
-<file path=ppt/notesSlides/notesSlide12.xml><?xml version="1.0" encoding="utf-8"?>
+<file path=ppt/notesSlides/notesSlide14.xml><?xml version="1.0" encoding="utf-8"?>
 <p:notes xmlns:a="http://schemas.openxmlformats.org/drawingml/2006/main" xmlns:r="http://schemas.openxmlformats.org/officeDocument/2006/relationships" xmlns:p="http://schemas.openxmlformats.org/presentationml/2006/main">
   <p:cSld>
     <p:spTree>
@@ -1201,7 +1455,7 @@
                 <a:latin typeface="맑은 고딕" panose="020B0503020000020004" pitchFamily="50" charset="-127"/>
                 <a:ea typeface="맑은 고딕" panose="020B0503020000020004" pitchFamily="50" charset="-127"/>
               </a:rPr>
-              <a:t>12</a:t>
+              <a:t>14</a:t>
             </a:fld>
             <a:endParaRPr lang="ko-KR" altLang="en-US">
               <a:latin typeface="맑은 고딕" panose="020B0503020000020004" pitchFamily="50" charset="-127"/>
@@ -1223,7 +1477,125 @@
 </p:notes>
 </file>
 
-<file path=ppt/notesSlides/notesSlide13.xml><?xml version="1.0" encoding="utf-8"?>
+<file path=ppt/notesSlides/notesSlide15.xml><?xml version="1.0" encoding="utf-8"?>
+<p:notes xmlns:a="http://schemas.openxmlformats.org/drawingml/2006/main" xmlns:r="http://schemas.openxmlformats.org/officeDocument/2006/relationships" xmlns:p="http://schemas.openxmlformats.org/presentationml/2006/main">
+  <p:cSld>
+    <p:spTree>
+      <p:nvGrpSpPr>
+        <p:cNvPr id="1" name="">
+          <a:extLst>
+            <a:ext uri="{FF2B5EF4-FFF2-40B4-BE49-F238E27FC236}">
+              <a16:creationId xmlns:a16="http://schemas.microsoft.com/office/drawing/2014/main" id="{B274359D-F6C7-1CE6-B40C-7125B5845664}"/>
+            </a:ext>
+          </a:extLst>
+        </p:cNvPr>
+        <p:cNvGrpSpPr/>
+        <p:nvPr/>
+      </p:nvGrpSpPr>
+      <p:grpSpPr>
+        <a:xfrm>
+          <a:off x="0" y="0"/>
+          <a:ext cx="0" cy="0"/>
+          <a:chOff x="0" y="0"/>
+          <a:chExt cx="0" cy="0"/>
+        </a:xfrm>
+      </p:grpSpPr>
+      <p:sp>
+        <p:nvSpPr>
+          <p:cNvPr id="2" name="슬라이드 이미지 개체 틀 1">
+            <a:extLst>
+              <a:ext uri="{FF2B5EF4-FFF2-40B4-BE49-F238E27FC236}">
+                <a16:creationId xmlns:a16="http://schemas.microsoft.com/office/drawing/2014/main" id="{D69EC9C5-DC32-0BF3-5487-B1181602A6D5}"/>
+              </a:ext>
+            </a:extLst>
+          </p:cNvPr>
+          <p:cNvSpPr>
+            <a:spLocks noGrp="1" noRot="1" noChangeAspect="1"/>
+          </p:cNvSpPr>
+          <p:nvPr>
+            <p:ph type="sldImg"/>
+          </p:nvPr>
+        </p:nvSpPr>
+        <p:spPr/>
+      </p:sp>
+      <p:sp>
+        <p:nvSpPr>
+          <p:cNvPr id="3" name="슬라이드 노트 개체 틀 2">
+            <a:extLst>
+              <a:ext uri="{FF2B5EF4-FFF2-40B4-BE49-F238E27FC236}">
+                <a16:creationId xmlns:a16="http://schemas.microsoft.com/office/drawing/2014/main" id="{059D3C6D-B98B-64FF-1E1D-175652B380D2}"/>
+              </a:ext>
+            </a:extLst>
+          </p:cNvPr>
+          <p:cNvSpPr>
+            <a:spLocks noGrp="1"/>
+          </p:cNvSpPr>
+          <p:nvPr>
+            <p:ph type="body" idx="1"/>
+          </p:nvPr>
+        </p:nvSpPr>
+        <p:spPr/>
+        <p:txBody>
+          <a:bodyPr/>
+          <a:lstStyle/>
+          <a:p>
+            <a:endParaRPr lang="ko-KR" altLang="en-US">
+              <a:latin typeface="맑은 고딕" panose="020B0503020000020004" pitchFamily="50" charset="-127"/>
+              <a:ea typeface="맑은 고딕" panose="020B0503020000020004" pitchFamily="50" charset="-127"/>
+            </a:endParaRPr>
+          </a:p>
+        </p:txBody>
+      </p:sp>
+      <p:sp>
+        <p:nvSpPr>
+          <p:cNvPr id="4" name="슬라이드 번호 개체 틀 3">
+            <a:extLst>
+              <a:ext uri="{FF2B5EF4-FFF2-40B4-BE49-F238E27FC236}">
+                <a16:creationId xmlns:a16="http://schemas.microsoft.com/office/drawing/2014/main" id="{7716D0FE-046A-317D-81E1-748E308AF659}"/>
+              </a:ext>
+            </a:extLst>
+          </p:cNvPr>
+          <p:cNvSpPr>
+            <a:spLocks noGrp="1"/>
+          </p:cNvSpPr>
+          <p:nvPr>
+            <p:ph type="sldNum" sz="quarter" idx="5"/>
+          </p:nvPr>
+        </p:nvSpPr>
+        <p:spPr/>
+        <p:txBody>
+          <a:bodyPr/>
+          <a:lstStyle/>
+          <a:p>
+            <a:pPr rtl="0"/>
+            <a:fld id="{DF61EA0F-A667-4B49-8422-0062BC55E249}" type="slidenum">
+              <a:rPr lang="en-US" altLang="ko-KR" smtClean="0">
+                <a:latin typeface="맑은 고딕" panose="020B0503020000020004" pitchFamily="50" charset="-127"/>
+                <a:ea typeface="맑은 고딕" panose="020B0503020000020004" pitchFamily="50" charset="-127"/>
+              </a:rPr>
+              <a:t>15</a:t>
+            </a:fld>
+            <a:endParaRPr lang="ko-KR" altLang="en-US">
+              <a:latin typeface="맑은 고딕" panose="020B0503020000020004" pitchFamily="50" charset="-127"/>
+              <a:ea typeface="맑은 고딕" panose="020B0503020000020004" pitchFamily="50" charset="-127"/>
+            </a:endParaRPr>
+          </a:p>
+        </p:txBody>
+      </p:sp>
+    </p:spTree>
+    <p:extLst>
+      <p:ext uri="{BB962C8B-B14F-4D97-AF65-F5344CB8AC3E}">
+        <p14:creationId xmlns:p14="http://schemas.microsoft.com/office/powerpoint/2010/main" val="1257698960"/>
+      </p:ext>
+    </p:extLst>
+  </p:cSld>
+  <p:clrMapOvr>
+    <a:masterClrMapping/>
+  </p:clrMapOvr>
+</p:notes>
+</file>
+
+<file path=ppt/notesSlides/notesSlide16.xml><?xml version="1.0" encoding="utf-8"?>
 <p:notes xmlns:a="http://schemas.openxmlformats.org/drawingml/2006/main" xmlns:r="http://schemas.openxmlformats.org/officeDocument/2006/relationships" xmlns:p="http://schemas.openxmlformats.org/presentationml/2006/main">
   <p:cSld>
     <p:spTree>
@@ -1319,7 +1691,7 @@
                 <a:latin typeface="맑은 고딕" panose="020B0503020000020004" pitchFamily="50" charset="-127"/>
                 <a:ea typeface="맑은 고딕" panose="020B0503020000020004" pitchFamily="50" charset="-127"/>
               </a:rPr>
-              <a:t>13</a:t>
+              <a:t>16</a:t>
             </a:fld>
             <a:endParaRPr lang="ko-KR" altLang="en-US">
               <a:latin typeface="맑은 고딕" panose="020B0503020000020004" pitchFamily="50" charset="-127"/>
@@ -1341,7 +1713,951 @@
 </p:notes>
 </file>
 
-<file path=ppt/notesSlides/notesSlide14.xml><?xml version="1.0" encoding="utf-8"?>
+<file path=ppt/notesSlides/notesSlide17.xml><?xml version="1.0" encoding="utf-8"?>
+<p:notes xmlns:a="http://schemas.openxmlformats.org/drawingml/2006/main" xmlns:r="http://schemas.openxmlformats.org/officeDocument/2006/relationships" xmlns:p="http://schemas.openxmlformats.org/presentationml/2006/main">
+  <p:cSld>
+    <p:spTree>
+      <p:nvGrpSpPr>
+        <p:cNvPr id="1" name="">
+          <a:extLst>
+            <a:ext uri="{FF2B5EF4-FFF2-40B4-BE49-F238E27FC236}">
+              <a16:creationId xmlns:a16="http://schemas.microsoft.com/office/drawing/2014/main" id="{EFDB5021-AB44-DEEB-94B9-B6F3F747CA9A}"/>
+            </a:ext>
+          </a:extLst>
+        </p:cNvPr>
+        <p:cNvGrpSpPr/>
+        <p:nvPr/>
+      </p:nvGrpSpPr>
+      <p:grpSpPr>
+        <a:xfrm>
+          <a:off x="0" y="0"/>
+          <a:ext cx="0" cy="0"/>
+          <a:chOff x="0" y="0"/>
+          <a:chExt cx="0" cy="0"/>
+        </a:xfrm>
+      </p:grpSpPr>
+      <p:sp>
+        <p:nvSpPr>
+          <p:cNvPr id="2" name="슬라이드 이미지 개체 틀 1">
+            <a:extLst>
+              <a:ext uri="{FF2B5EF4-FFF2-40B4-BE49-F238E27FC236}">
+                <a16:creationId xmlns:a16="http://schemas.microsoft.com/office/drawing/2014/main" id="{3D8C6159-C98D-C902-8D64-0630F086FBA5}"/>
+              </a:ext>
+            </a:extLst>
+          </p:cNvPr>
+          <p:cNvSpPr>
+            <a:spLocks noGrp="1" noRot="1" noChangeAspect="1"/>
+          </p:cNvSpPr>
+          <p:nvPr>
+            <p:ph type="sldImg"/>
+          </p:nvPr>
+        </p:nvSpPr>
+        <p:spPr/>
+      </p:sp>
+      <p:sp>
+        <p:nvSpPr>
+          <p:cNvPr id="3" name="슬라이드 노트 개체 틀 2">
+            <a:extLst>
+              <a:ext uri="{FF2B5EF4-FFF2-40B4-BE49-F238E27FC236}">
+                <a16:creationId xmlns:a16="http://schemas.microsoft.com/office/drawing/2014/main" id="{C5137419-6360-BF69-05E4-48B753AD8E2C}"/>
+              </a:ext>
+            </a:extLst>
+          </p:cNvPr>
+          <p:cNvSpPr>
+            <a:spLocks noGrp="1"/>
+          </p:cNvSpPr>
+          <p:nvPr>
+            <p:ph type="body" idx="1"/>
+          </p:nvPr>
+        </p:nvSpPr>
+        <p:spPr/>
+        <p:txBody>
+          <a:bodyPr/>
+          <a:lstStyle/>
+          <a:p>
+            <a:endParaRPr lang="ko-KR" altLang="en-US">
+              <a:latin typeface="맑은 고딕" panose="020B0503020000020004" pitchFamily="50" charset="-127"/>
+              <a:ea typeface="맑은 고딕" panose="020B0503020000020004" pitchFamily="50" charset="-127"/>
+            </a:endParaRPr>
+          </a:p>
+        </p:txBody>
+      </p:sp>
+      <p:sp>
+        <p:nvSpPr>
+          <p:cNvPr id="4" name="슬라이드 번호 개체 틀 3">
+            <a:extLst>
+              <a:ext uri="{FF2B5EF4-FFF2-40B4-BE49-F238E27FC236}">
+                <a16:creationId xmlns:a16="http://schemas.microsoft.com/office/drawing/2014/main" id="{4138199D-A568-3D6E-0847-9007C7D82629}"/>
+              </a:ext>
+            </a:extLst>
+          </p:cNvPr>
+          <p:cNvSpPr>
+            <a:spLocks noGrp="1"/>
+          </p:cNvSpPr>
+          <p:nvPr>
+            <p:ph type="sldNum" sz="quarter" idx="5"/>
+          </p:nvPr>
+        </p:nvSpPr>
+        <p:spPr/>
+        <p:txBody>
+          <a:bodyPr/>
+          <a:lstStyle/>
+          <a:p>
+            <a:pPr rtl="0"/>
+            <a:fld id="{DF61EA0F-A667-4B49-8422-0062BC55E249}" type="slidenum">
+              <a:rPr lang="en-US" altLang="ko-KR" smtClean="0">
+                <a:latin typeface="맑은 고딕" panose="020B0503020000020004" pitchFamily="50" charset="-127"/>
+                <a:ea typeface="맑은 고딕" panose="020B0503020000020004" pitchFamily="50" charset="-127"/>
+              </a:rPr>
+              <a:t>18</a:t>
+            </a:fld>
+            <a:endParaRPr lang="ko-KR" altLang="en-US">
+              <a:latin typeface="맑은 고딕" panose="020B0503020000020004" pitchFamily="50" charset="-127"/>
+              <a:ea typeface="맑은 고딕" panose="020B0503020000020004" pitchFamily="50" charset="-127"/>
+            </a:endParaRPr>
+          </a:p>
+        </p:txBody>
+      </p:sp>
+    </p:spTree>
+    <p:extLst>
+      <p:ext uri="{BB962C8B-B14F-4D97-AF65-F5344CB8AC3E}">
+        <p14:creationId xmlns:p14="http://schemas.microsoft.com/office/powerpoint/2010/main" val="195356260"/>
+      </p:ext>
+    </p:extLst>
+  </p:cSld>
+  <p:clrMapOvr>
+    <a:masterClrMapping/>
+  </p:clrMapOvr>
+</p:notes>
+</file>
+
+<file path=ppt/notesSlides/notesSlide18.xml><?xml version="1.0" encoding="utf-8"?>
+<p:notes xmlns:a="http://schemas.openxmlformats.org/drawingml/2006/main" xmlns:r="http://schemas.openxmlformats.org/officeDocument/2006/relationships" xmlns:p="http://schemas.openxmlformats.org/presentationml/2006/main">
+  <p:cSld>
+    <p:spTree>
+      <p:nvGrpSpPr>
+        <p:cNvPr id="1" name="">
+          <a:extLst>
+            <a:ext uri="{FF2B5EF4-FFF2-40B4-BE49-F238E27FC236}">
+              <a16:creationId xmlns:a16="http://schemas.microsoft.com/office/drawing/2014/main" id="{35837279-FA95-57FD-B2E0-B2C29D284308}"/>
+            </a:ext>
+          </a:extLst>
+        </p:cNvPr>
+        <p:cNvGrpSpPr/>
+        <p:nvPr/>
+      </p:nvGrpSpPr>
+      <p:grpSpPr>
+        <a:xfrm>
+          <a:off x="0" y="0"/>
+          <a:ext cx="0" cy="0"/>
+          <a:chOff x="0" y="0"/>
+          <a:chExt cx="0" cy="0"/>
+        </a:xfrm>
+      </p:grpSpPr>
+      <p:sp>
+        <p:nvSpPr>
+          <p:cNvPr id="2" name="슬라이드 이미지 개체 틀 1">
+            <a:extLst>
+              <a:ext uri="{FF2B5EF4-FFF2-40B4-BE49-F238E27FC236}">
+                <a16:creationId xmlns:a16="http://schemas.microsoft.com/office/drawing/2014/main" id="{D650D63E-DC71-4D37-5D4F-468F49D2D281}"/>
+              </a:ext>
+            </a:extLst>
+          </p:cNvPr>
+          <p:cNvSpPr>
+            <a:spLocks noGrp="1" noRot="1" noChangeAspect="1"/>
+          </p:cNvSpPr>
+          <p:nvPr>
+            <p:ph type="sldImg"/>
+          </p:nvPr>
+        </p:nvSpPr>
+        <p:spPr/>
+      </p:sp>
+      <p:sp>
+        <p:nvSpPr>
+          <p:cNvPr id="3" name="슬라이드 노트 개체 틀 2">
+            <a:extLst>
+              <a:ext uri="{FF2B5EF4-FFF2-40B4-BE49-F238E27FC236}">
+                <a16:creationId xmlns:a16="http://schemas.microsoft.com/office/drawing/2014/main" id="{BF898BEE-6031-34C6-F089-690D94320558}"/>
+              </a:ext>
+            </a:extLst>
+          </p:cNvPr>
+          <p:cNvSpPr>
+            <a:spLocks noGrp="1"/>
+          </p:cNvSpPr>
+          <p:nvPr>
+            <p:ph type="body" idx="1"/>
+          </p:nvPr>
+        </p:nvSpPr>
+        <p:spPr/>
+        <p:txBody>
+          <a:bodyPr/>
+          <a:lstStyle/>
+          <a:p>
+            <a:endParaRPr lang="ko-KR" altLang="en-US">
+              <a:latin typeface="맑은 고딕" panose="020B0503020000020004" pitchFamily="50" charset="-127"/>
+              <a:ea typeface="맑은 고딕" panose="020B0503020000020004" pitchFamily="50" charset="-127"/>
+            </a:endParaRPr>
+          </a:p>
+        </p:txBody>
+      </p:sp>
+      <p:sp>
+        <p:nvSpPr>
+          <p:cNvPr id="4" name="슬라이드 번호 개체 틀 3">
+            <a:extLst>
+              <a:ext uri="{FF2B5EF4-FFF2-40B4-BE49-F238E27FC236}">
+                <a16:creationId xmlns:a16="http://schemas.microsoft.com/office/drawing/2014/main" id="{9CC5BB30-C1B6-C7CA-4B6D-82E37F000682}"/>
+              </a:ext>
+            </a:extLst>
+          </p:cNvPr>
+          <p:cNvSpPr>
+            <a:spLocks noGrp="1"/>
+          </p:cNvSpPr>
+          <p:nvPr>
+            <p:ph type="sldNum" sz="quarter" idx="5"/>
+          </p:nvPr>
+        </p:nvSpPr>
+        <p:spPr/>
+        <p:txBody>
+          <a:bodyPr/>
+          <a:lstStyle/>
+          <a:p>
+            <a:pPr rtl="0"/>
+            <a:fld id="{DF61EA0F-A667-4B49-8422-0062BC55E249}" type="slidenum">
+              <a:rPr lang="en-US" altLang="ko-KR" smtClean="0">
+                <a:latin typeface="맑은 고딕" panose="020B0503020000020004" pitchFamily="50" charset="-127"/>
+                <a:ea typeface="맑은 고딕" panose="020B0503020000020004" pitchFamily="50" charset="-127"/>
+              </a:rPr>
+              <a:t>21</a:t>
+            </a:fld>
+            <a:endParaRPr lang="ko-KR" altLang="en-US">
+              <a:latin typeface="맑은 고딕" panose="020B0503020000020004" pitchFamily="50" charset="-127"/>
+              <a:ea typeface="맑은 고딕" panose="020B0503020000020004" pitchFamily="50" charset="-127"/>
+            </a:endParaRPr>
+          </a:p>
+        </p:txBody>
+      </p:sp>
+    </p:spTree>
+    <p:extLst>
+      <p:ext uri="{BB962C8B-B14F-4D97-AF65-F5344CB8AC3E}">
+        <p14:creationId xmlns:p14="http://schemas.microsoft.com/office/powerpoint/2010/main" val="2728697898"/>
+      </p:ext>
+    </p:extLst>
+  </p:cSld>
+  <p:clrMapOvr>
+    <a:masterClrMapping/>
+  </p:clrMapOvr>
+</p:notes>
+</file>
+
+<file path=ppt/notesSlides/notesSlide19.xml><?xml version="1.0" encoding="utf-8"?>
+<p:notes xmlns:a="http://schemas.openxmlformats.org/drawingml/2006/main" xmlns:r="http://schemas.openxmlformats.org/officeDocument/2006/relationships" xmlns:p="http://schemas.openxmlformats.org/presentationml/2006/main">
+  <p:cSld>
+    <p:spTree>
+      <p:nvGrpSpPr>
+        <p:cNvPr id="1" name="">
+          <a:extLst>
+            <a:ext uri="{FF2B5EF4-FFF2-40B4-BE49-F238E27FC236}">
+              <a16:creationId xmlns:a16="http://schemas.microsoft.com/office/drawing/2014/main" id="{9238F1B2-C174-E815-D409-0A3F77E5D6B5}"/>
+            </a:ext>
+          </a:extLst>
+        </p:cNvPr>
+        <p:cNvGrpSpPr/>
+        <p:nvPr/>
+      </p:nvGrpSpPr>
+      <p:grpSpPr>
+        <a:xfrm>
+          <a:off x="0" y="0"/>
+          <a:ext cx="0" cy="0"/>
+          <a:chOff x="0" y="0"/>
+          <a:chExt cx="0" cy="0"/>
+        </a:xfrm>
+      </p:grpSpPr>
+      <p:sp>
+        <p:nvSpPr>
+          <p:cNvPr id="2" name="슬라이드 이미지 개체 틀 1">
+            <a:extLst>
+              <a:ext uri="{FF2B5EF4-FFF2-40B4-BE49-F238E27FC236}">
+                <a16:creationId xmlns:a16="http://schemas.microsoft.com/office/drawing/2014/main" id="{A82F3EB6-6D78-86EC-C34E-AC16F68386F3}"/>
+              </a:ext>
+            </a:extLst>
+          </p:cNvPr>
+          <p:cNvSpPr>
+            <a:spLocks noGrp="1" noRot="1" noChangeAspect="1"/>
+          </p:cNvSpPr>
+          <p:nvPr>
+            <p:ph type="sldImg"/>
+          </p:nvPr>
+        </p:nvSpPr>
+        <p:spPr/>
+      </p:sp>
+      <p:sp>
+        <p:nvSpPr>
+          <p:cNvPr id="3" name="슬라이드 노트 개체 틀 2">
+            <a:extLst>
+              <a:ext uri="{FF2B5EF4-FFF2-40B4-BE49-F238E27FC236}">
+                <a16:creationId xmlns:a16="http://schemas.microsoft.com/office/drawing/2014/main" id="{07803FFD-0CAF-439F-9645-8DFDBEEC0C71}"/>
+              </a:ext>
+            </a:extLst>
+          </p:cNvPr>
+          <p:cNvSpPr>
+            <a:spLocks noGrp="1"/>
+          </p:cNvSpPr>
+          <p:nvPr>
+            <p:ph type="body" idx="1"/>
+          </p:nvPr>
+        </p:nvSpPr>
+        <p:spPr/>
+        <p:txBody>
+          <a:bodyPr/>
+          <a:lstStyle/>
+          <a:p>
+            <a:endParaRPr lang="ko-KR" altLang="en-US">
+              <a:latin typeface="맑은 고딕" panose="020B0503020000020004" pitchFamily="50" charset="-127"/>
+              <a:ea typeface="맑은 고딕" panose="020B0503020000020004" pitchFamily="50" charset="-127"/>
+            </a:endParaRPr>
+          </a:p>
+        </p:txBody>
+      </p:sp>
+      <p:sp>
+        <p:nvSpPr>
+          <p:cNvPr id="4" name="슬라이드 번호 개체 틀 3">
+            <a:extLst>
+              <a:ext uri="{FF2B5EF4-FFF2-40B4-BE49-F238E27FC236}">
+                <a16:creationId xmlns:a16="http://schemas.microsoft.com/office/drawing/2014/main" id="{E2B9B655-4B54-32DD-0A1C-BBBE25F5C54D}"/>
+              </a:ext>
+            </a:extLst>
+          </p:cNvPr>
+          <p:cNvSpPr>
+            <a:spLocks noGrp="1"/>
+          </p:cNvSpPr>
+          <p:nvPr>
+            <p:ph type="sldNum" sz="quarter" idx="5"/>
+          </p:nvPr>
+        </p:nvSpPr>
+        <p:spPr/>
+        <p:txBody>
+          <a:bodyPr/>
+          <a:lstStyle/>
+          <a:p>
+            <a:pPr rtl="0"/>
+            <a:fld id="{DF61EA0F-A667-4B49-8422-0062BC55E249}" type="slidenum">
+              <a:rPr lang="en-US" altLang="ko-KR" smtClean="0">
+                <a:latin typeface="맑은 고딕" panose="020B0503020000020004" pitchFamily="50" charset="-127"/>
+                <a:ea typeface="맑은 고딕" panose="020B0503020000020004" pitchFamily="50" charset="-127"/>
+              </a:rPr>
+              <a:t>22</a:t>
+            </a:fld>
+            <a:endParaRPr lang="ko-KR" altLang="en-US">
+              <a:latin typeface="맑은 고딕" panose="020B0503020000020004" pitchFamily="50" charset="-127"/>
+              <a:ea typeface="맑은 고딕" panose="020B0503020000020004" pitchFamily="50" charset="-127"/>
+            </a:endParaRPr>
+          </a:p>
+        </p:txBody>
+      </p:sp>
+    </p:spTree>
+    <p:extLst>
+      <p:ext uri="{BB962C8B-B14F-4D97-AF65-F5344CB8AC3E}">
+        <p14:creationId xmlns:p14="http://schemas.microsoft.com/office/powerpoint/2010/main" val="692413168"/>
+      </p:ext>
+    </p:extLst>
+  </p:cSld>
+  <p:clrMapOvr>
+    <a:masterClrMapping/>
+  </p:clrMapOvr>
+</p:notes>
+</file>
+
+<file path=ppt/notesSlides/notesSlide2.xml><?xml version="1.0" encoding="utf-8"?>
+<p:notes xmlns:a="http://schemas.openxmlformats.org/drawingml/2006/main" xmlns:r="http://schemas.openxmlformats.org/officeDocument/2006/relationships" xmlns:p="http://schemas.openxmlformats.org/presentationml/2006/main">
+  <p:cSld>
+    <p:spTree>
+      <p:nvGrpSpPr>
+        <p:cNvPr id="1" name="">
+          <a:extLst>
+            <a:ext uri="{FF2B5EF4-FFF2-40B4-BE49-F238E27FC236}">
+              <a16:creationId xmlns:a16="http://schemas.microsoft.com/office/drawing/2014/main" id="{5DCBA16C-7C5F-7F4F-12BC-8B126C1F7F85}"/>
+            </a:ext>
+          </a:extLst>
+        </p:cNvPr>
+        <p:cNvGrpSpPr/>
+        <p:nvPr/>
+      </p:nvGrpSpPr>
+      <p:grpSpPr>
+        <a:xfrm>
+          <a:off x="0" y="0"/>
+          <a:ext cx="0" cy="0"/>
+          <a:chOff x="0" y="0"/>
+          <a:chExt cx="0" cy="0"/>
+        </a:xfrm>
+      </p:grpSpPr>
+      <p:sp>
+        <p:nvSpPr>
+          <p:cNvPr id="2" name="슬라이드 이미지 개체 틀 1">
+            <a:extLst>
+              <a:ext uri="{FF2B5EF4-FFF2-40B4-BE49-F238E27FC236}">
+                <a16:creationId xmlns:a16="http://schemas.microsoft.com/office/drawing/2014/main" id="{CA455AD0-E923-51EC-96FB-E20FF8C9528B}"/>
+              </a:ext>
+            </a:extLst>
+          </p:cNvPr>
+          <p:cNvSpPr>
+            <a:spLocks noGrp="1" noRot="1" noChangeAspect="1"/>
+          </p:cNvSpPr>
+          <p:nvPr>
+            <p:ph type="sldImg"/>
+          </p:nvPr>
+        </p:nvSpPr>
+        <p:spPr/>
+      </p:sp>
+      <p:sp>
+        <p:nvSpPr>
+          <p:cNvPr id="3" name="슬라이드 노트 개체 틀 2">
+            <a:extLst>
+              <a:ext uri="{FF2B5EF4-FFF2-40B4-BE49-F238E27FC236}">
+                <a16:creationId xmlns:a16="http://schemas.microsoft.com/office/drawing/2014/main" id="{72574A98-BD48-45F3-C06C-3F56421BDFAF}"/>
+              </a:ext>
+            </a:extLst>
+          </p:cNvPr>
+          <p:cNvSpPr>
+            <a:spLocks noGrp="1"/>
+          </p:cNvSpPr>
+          <p:nvPr>
+            <p:ph type="body" idx="1"/>
+          </p:nvPr>
+        </p:nvSpPr>
+        <p:spPr/>
+        <p:txBody>
+          <a:bodyPr/>
+          <a:lstStyle/>
+          <a:p>
+            <a:endParaRPr lang="ko-KR" altLang="en-US">
+              <a:latin typeface="맑은 고딕" panose="020B0503020000020004" pitchFamily="50" charset="-127"/>
+              <a:ea typeface="맑은 고딕" panose="020B0503020000020004" pitchFamily="50" charset="-127"/>
+            </a:endParaRPr>
+          </a:p>
+        </p:txBody>
+      </p:sp>
+      <p:sp>
+        <p:nvSpPr>
+          <p:cNvPr id="4" name="슬라이드 번호 개체 틀 3">
+            <a:extLst>
+              <a:ext uri="{FF2B5EF4-FFF2-40B4-BE49-F238E27FC236}">
+                <a16:creationId xmlns:a16="http://schemas.microsoft.com/office/drawing/2014/main" id="{3DB01EFB-B895-EFC2-4402-7FB301CBB0FE}"/>
+              </a:ext>
+            </a:extLst>
+          </p:cNvPr>
+          <p:cNvSpPr>
+            <a:spLocks noGrp="1"/>
+          </p:cNvSpPr>
+          <p:nvPr>
+            <p:ph type="sldNum" sz="quarter" idx="5"/>
+          </p:nvPr>
+        </p:nvSpPr>
+        <p:spPr/>
+        <p:txBody>
+          <a:bodyPr/>
+          <a:lstStyle/>
+          <a:p>
+            <a:pPr rtl="0"/>
+            <a:fld id="{DF61EA0F-A667-4B49-8422-0062BC55E249}" type="slidenum">
+              <a:rPr lang="en-US" altLang="ko-KR" smtClean="0">
+                <a:latin typeface="맑은 고딕" panose="020B0503020000020004" pitchFamily="50" charset="-127"/>
+                <a:ea typeface="맑은 고딕" panose="020B0503020000020004" pitchFamily="50" charset="-127"/>
+              </a:rPr>
+              <a:t>2</a:t>
+            </a:fld>
+            <a:endParaRPr lang="ko-KR" altLang="en-US">
+              <a:latin typeface="맑은 고딕" panose="020B0503020000020004" pitchFamily="50" charset="-127"/>
+              <a:ea typeface="맑은 고딕" panose="020B0503020000020004" pitchFamily="50" charset="-127"/>
+            </a:endParaRPr>
+          </a:p>
+        </p:txBody>
+      </p:sp>
+    </p:spTree>
+    <p:extLst>
+      <p:ext uri="{BB962C8B-B14F-4D97-AF65-F5344CB8AC3E}">
+        <p14:creationId xmlns:p14="http://schemas.microsoft.com/office/powerpoint/2010/main" val="2899724362"/>
+      </p:ext>
+    </p:extLst>
+  </p:cSld>
+  <p:clrMapOvr>
+    <a:masterClrMapping/>
+  </p:clrMapOvr>
+</p:notes>
+</file>
+
+<file path=ppt/notesSlides/notesSlide20.xml><?xml version="1.0" encoding="utf-8"?>
+<p:notes xmlns:a="http://schemas.openxmlformats.org/drawingml/2006/main" xmlns:r="http://schemas.openxmlformats.org/officeDocument/2006/relationships" xmlns:p="http://schemas.openxmlformats.org/presentationml/2006/main">
+  <p:cSld>
+    <p:spTree>
+      <p:nvGrpSpPr>
+        <p:cNvPr id="1" name="">
+          <a:extLst>
+            <a:ext uri="{FF2B5EF4-FFF2-40B4-BE49-F238E27FC236}">
+              <a16:creationId xmlns:a16="http://schemas.microsoft.com/office/drawing/2014/main" id="{B917560D-60B5-CBEE-2F03-3A123D207134}"/>
+            </a:ext>
+          </a:extLst>
+        </p:cNvPr>
+        <p:cNvGrpSpPr/>
+        <p:nvPr/>
+      </p:nvGrpSpPr>
+      <p:grpSpPr>
+        <a:xfrm>
+          <a:off x="0" y="0"/>
+          <a:ext cx="0" cy="0"/>
+          <a:chOff x="0" y="0"/>
+          <a:chExt cx="0" cy="0"/>
+        </a:xfrm>
+      </p:grpSpPr>
+      <p:sp>
+        <p:nvSpPr>
+          <p:cNvPr id="2" name="슬라이드 이미지 개체 틀 1">
+            <a:extLst>
+              <a:ext uri="{FF2B5EF4-FFF2-40B4-BE49-F238E27FC236}">
+                <a16:creationId xmlns:a16="http://schemas.microsoft.com/office/drawing/2014/main" id="{101AF83A-0425-14D8-7169-A42513D0E0C9}"/>
+              </a:ext>
+            </a:extLst>
+          </p:cNvPr>
+          <p:cNvSpPr>
+            <a:spLocks noGrp="1" noRot="1" noChangeAspect="1"/>
+          </p:cNvSpPr>
+          <p:nvPr>
+            <p:ph type="sldImg"/>
+          </p:nvPr>
+        </p:nvSpPr>
+        <p:spPr/>
+      </p:sp>
+      <p:sp>
+        <p:nvSpPr>
+          <p:cNvPr id="3" name="슬라이드 노트 개체 틀 2">
+            <a:extLst>
+              <a:ext uri="{FF2B5EF4-FFF2-40B4-BE49-F238E27FC236}">
+                <a16:creationId xmlns:a16="http://schemas.microsoft.com/office/drawing/2014/main" id="{93D1CB96-AE80-F4E7-D3FD-BA86D28B955A}"/>
+              </a:ext>
+            </a:extLst>
+          </p:cNvPr>
+          <p:cNvSpPr>
+            <a:spLocks noGrp="1"/>
+          </p:cNvSpPr>
+          <p:nvPr>
+            <p:ph type="body" idx="1"/>
+          </p:nvPr>
+        </p:nvSpPr>
+        <p:spPr/>
+        <p:txBody>
+          <a:bodyPr/>
+          <a:lstStyle/>
+          <a:p>
+            <a:endParaRPr lang="ko-KR" altLang="en-US">
+              <a:latin typeface="맑은 고딕" panose="020B0503020000020004" pitchFamily="50" charset="-127"/>
+              <a:ea typeface="맑은 고딕" panose="020B0503020000020004" pitchFamily="50" charset="-127"/>
+            </a:endParaRPr>
+          </a:p>
+        </p:txBody>
+      </p:sp>
+      <p:sp>
+        <p:nvSpPr>
+          <p:cNvPr id="4" name="슬라이드 번호 개체 틀 3">
+            <a:extLst>
+              <a:ext uri="{FF2B5EF4-FFF2-40B4-BE49-F238E27FC236}">
+                <a16:creationId xmlns:a16="http://schemas.microsoft.com/office/drawing/2014/main" id="{7A08AF8D-086C-219C-9037-D25A219E2135}"/>
+              </a:ext>
+            </a:extLst>
+          </p:cNvPr>
+          <p:cNvSpPr>
+            <a:spLocks noGrp="1"/>
+          </p:cNvSpPr>
+          <p:nvPr>
+            <p:ph type="sldNum" sz="quarter" idx="5"/>
+          </p:nvPr>
+        </p:nvSpPr>
+        <p:spPr/>
+        <p:txBody>
+          <a:bodyPr/>
+          <a:lstStyle/>
+          <a:p>
+            <a:pPr rtl="0"/>
+            <a:fld id="{DF61EA0F-A667-4B49-8422-0062BC55E249}" type="slidenum">
+              <a:rPr lang="en-US" altLang="ko-KR" smtClean="0">
+                <a:latin typeface="맑은 고딕" panose="020B0503020000020004" pitchFamily="50" charset="-127"/>
+                <a:ea typeface="맑은 고딕" panose="020B0503020000020004" pitchFamily="50" charset="-127"/>
+              </a:rPr>
+              <a:t>23</a:t>
+            </a:fld>
+            <a:endParaRPr lang="ko-KR" altLang="en-US">
+              <a:latin typeface="맑은 고딕" panose="020B0503020000020004" pitchFamily="50" charset="-127"/>
+              <a:ea typeface="맑은 고딕" panose="020B0503020000020004" pitchFamily="50" charset="-127"/>
+            </a:endParaRPr>
+          </a:p>
+        </p:txBody>
+      </p:sp>
+    </p:spTree>
+    <p:extLst>
+      <p:ext uri="{BB962C8B-B14F-4D97-AF65-F5344CB8AC3E}">
+        <p14:creationId xmlns:p14="http://schemas.microsoft.com/office/powerpoint/2010/main" val="1597348809"/>
+      </p:ext>
+    </p:extLst>
+  </p:cSld>
+  <p:clrMapOvr>
+    <a:masterClrMapping/>
+  </p:clrMapOvr>
+</p:notes>
+</file>
+
+<file path=ppt/notesSlides/notesSlide21.xml><?xml version="1.0" encoding="utf-8"?>
+<p:notes xmlns:a="http://schemas.openxmlformats.org/drawingml/2006/main" xmlns:r="http://schemas.openxmlformats.org/officeDocument/2006/relationships" xmlns:p="http://schemas.openxmlformats.org/presentationml/2006/main">
+  <p:cSld>
+    <p:spTree>
+      <p:nvGrpSpPr>
+        <p:cNvPr id="1" name="">
+          <a:extLst>
+            <a:ext uri="{FF2B5EF4-FFF2-40B4-BE49-F238E27FC236}">
+              <a16:creationId xmlns:a16="http://schemas.microsoft.com/office/drawing/2014/main" id="{DB73BB73-7C33-A58C-7D09-96EF1EA838E5}"/>
+            </a:ext>
+          </a:extLst>
+        </p:cNvPr>
+        <p:cNvGrpSpPr/>
+        <p:nvPr/>
+      </p:nvGrpSpPr>
+      <p:grpSpPr>
+        <a:xfrm>
+          <a:off x="0" y="0"/>
+          <a:ext cx="0" cy="0"/>
+          <a:chOff x="0" y="0"/>
+          <a:chExt cx="0" cy="0"/>
+        </a:xfrm>
+      </p:grpSpPr>
+      <p:sp>
+        <p:nvSpPr>
+          <p:cNvPr id="2" name="슬라이드 이미지 개체 틀 1">
+            <a:extLst>
+              <a:ext uri="{FF2B5EF4-FFF2-40B4-BE49-F238E27FC236}">
+                <a16:creationId xmlns:a16="http://schemas.microsoft.com/office/drawing/2014/main" id="{4B2A0A59-C925-3B61-914F-6EE71753AC9E}"/>
+              </a:ext>
+            </a:extLst>
+          </p:cNvPr>
+          <p:cNvSpPr>
+            <a:spLocks noGrp="1" noRot="1" noChangeAspect="1"/>
+          </p:cNvSpPr>
+          <p:nvPr>
+            <p:ph type="sldImg"/>
+          </p:nvPr>
+        </p:nvSpPr>
+        <p:spPr/>
+      </p:sp>
+      <p:sp>
+        <p:nvSpPr>
+          <p:cNvPr id="3" name="슬라이드 노트 개체 틀 2">
+            <a:extLst>
+              <a:ext uri="{FF2B5EF4-FFF2-40B4-BE49-F238E27FC236}">
+                <a16:creationId xmlns:a16="http://schemas.microsoft.com/office/drawing/2014/main" id="{7D7A4A53-0A97-6BAA-CF04-E52C8F382163}"/>
+              </a:ext>
+            </a:extLst>
+          </p:cNvPr>
+          <p:cNvSpPr>
+            <a:spLocks noGrp="1"/>
+          </p:cNvSpPr>
+          <p:nvPr>
+            <p:ph type="body" idx="1"/>
+          </p:nvPr>
+        </p:nvSpPr>
+        <p:spPr/>
+        <p:txBody>
+          <a:bodyPr/>
+          <a:lstStyle/>
+          <a:p>
+            <a:endParaRPr lang="ko-KR" altLang="en-US">
+              <a:latin typeface="맑은 고딕" panose="020B0503020000020004" pitchFamily="50" charset="-127"/>
+              <a:ea typeface="맑은 고딕" panose="020B0503020000020004" pitchFamily="50" charset="-127"/>
+            </a:endParaRPr>
+          </a:p>
+        </p:txBody>
+      </p:sp>
+      <p:sp>
+        <p:nvSpPr>
+          <p:cNvPr id="4" name="슬라이드 번호 개체 틀 3">
+            <a:extLst>
+              <a:ext uri="{FF2B5EF4-FFF2-40B4-BE49-F238E27FC236}">
+                <a16:creationId xmlns:a16="http://schemas.microsoft.com/office/drawing/2014/main" id="{BAB59A14-6567-4667-0E09-927AC96E72AB}"/>
+              </a:ext>
+            </a:extLst>
+          </p:cNvPr>
+          <p:cNvSpPr>
+            <a:spLocks noGrp="1"/>
+          </p:cNvSpPr>
+          <p:nvPr>
+            <p:ph type="sldNum" sz="quarter" idx="5"/>
+          </p:nvPr>
+        </p:nvSpPr>
+        <p:spPr/>
+        <p:txBody>
+          <a:bodyPr/>
+          <a:lstStyle/>
+          <a:p>
+            <a:pPr rtl="0"/>
+            <a:fld id="{DF61EA0F-A667-4B49-8422-0062BC55E249}" type="slidenum">
+              <a:rPr lang="en-US" altLang="ko-KR" smtClean="0">
+                <a:latin typeface="맑은 고딕" panose="020B0503020000020004" pitchFamily="50" charset="-127"/>
+                <a:ea typeface="맑은 고딕" panose="020B0503020000020004" pitchFamily="50" charset="-127"/>
+              </a:rPr>
+              <a:t>24</a:t>
+            </a:fld>
+            <a:endParaRPr lang="ko-KR" altLang="en-US">
+              <a:latin typeface="맑은 고딕" panose="020B0503020000020004" pitchFamily="50" charset="-127"/>
+              <a:ea typeface="맑은 고딕" panose="020B0503020000020004" pitchFamily="50" charset="-127"/>
+            </a:endParaRPr>
+          </a:p>
+        </p:txBody>
+      </p:sp>
+    </p:spTree>
+    <p:extLst>
+      <p:ext uri="{BB962C8B-B14F-4D97-AF65-F5344CB8AC3E}">
+        <p14:creationId xmlns:p14="http://schemas.microsoft.com/office/powerpoint/2010/main" val="264126625"/>
+      </p:ext>
+    </p:extLst>
+  </p:cSld>
+  <p:clrMapOvr>
+    <a:masterClrMapping/>
+  </p:clrMapOvr>
+</p:notes>
+</file>
+
+<file path=ppt/notesSlides/notesSlide22.xml><?xml version="1.0" encoding="utf-8"?>
+<p:notes xmlns:a="http://schemas.openxmlformats.org/drawingml/2006/main" xmlns:r="http://schemas.openxmlformats.org/officeDocument/2006/relationships" xmlns:p="http://schemas.openxmlformats.org/presentationml/2006/main">
+  <p:cSld>
+    <p:spTree>
+      <p:nvGrpSpPr>
+        <p:cNvPr id="1" name="">
+          <a:extLst>
+            <a:ext uri="{FF2B5EF4-FFF2-40B4-BE49-F238E27FC236}">
+              <a16:creationId xmlns:a16="http://schemas.microsoft.com/office/drawing/2014/main" id="{9600FFF8-5E85-392B-AFBA-C8C2C348186C}"/>
+            </a:ext>
+          </a:extLst>
+        </p:cNvPr>
+        <p:cNvGrpSpPr/>
+        <p:nvPr/>
+      </p:nvGrpSpPr>
+      <p:grpSpPr>
+        <a:xfrm>
+          <a:off x="0" y="0"/>
+          <a:ext cx="0" cy="0"/>
+          <a:chOff x="0" y="0"/>
+          <a:chExt cx="0" cy="0"/>
+        </a:xfrm>
+      </p:grpSpPr>
+      <p:sp>
+        <p:nvSpPr>
+          <p:cNvPr id="2" name="슬라이드 이미지 개체 틀 1">
+            <a:extLst>
+              <a:ext uri="{FF2B5EF4-FFF2-40B4-BE49-F238E27FC236}">
+                <a16:creationId xmlns:a16="http://schemas.microsoft.com/office/drawing/2014/main" id="{C1DC3C4C-7CA5-379A-4D68-CC0877C59193}"/>
+              </a:ext>
+            </a:extLst>
+          </p:cNvPr>
+          <p:cNvSpPr>
+            <a:spLocks noGrp="1" noRot="1" noChangeAspect="1"/>
+          </p:cNvSpPr>
+          <p:nvPr>
+            <p:ph type="sldImg"/>
+          </p:nvPr>
+        </p:nvSpPr>
+        <p:spPr/>
+      </p:sp>
+      <p:sp>
+        <p:nvSpPr>
+          <p:cNvPr id="3" name="슬라이드 노트 개체 틀 2">
+            <a:extLst>
+              <a:ext uri="{FF2B5EF4-FFF2-40B4-BE49-F238E27FC236}">
+                <a16:creationId xmlns:a16="http://schemas.microsoft.com/office/drawing/2014/main" id="{5A31F4A3-BB6C-EAD5-68BA-292377F942CB}"/>
+              </a:ext>
+            </a:extLst>
+          </p:cNvPr>
+          <p:cNvSpPr>
+            <a:spLocks noGrp="1"/>
+          </p:cNvSpPr>
+          <p:nvPr>
+            <p:ph type="body" idx="1"/>
+          </p:nvPr>
+        </p:nvSpPr>
+        <p:spPr/>
+        <p:txBody>
+          <a:bodyPr/>
+          <a:lstStyle/>
+          <a:p>
+            <a:endParaRPr lang="ko-KR" altLang="en-US">
+              <a:latin typeface="맑은 고딕" panose="020B0503020000020004" pitchFamily="50" charset="-127"/>
+              <a:ea typeface="맑은 고딕" panose="020B0503020000020004" pitchFamily="50" charset="-127"/>
+            </a:endParaRPr>
+          </a:p>
+        </p:txBody>
+      </p:sp>
+      <p:sp>
+        <p:nvSpPr>
+          <p:cNvPr id="4" name="슬라이드 번호 개체 틀 3">
+            <a:extLst>
+              <a:ext uri="{FF2B5EF4-FFF2-40B4-BE49-F238E27FC236}">
+                <a16:creationId xmlns:a16="http://schemas.microsoft.com/office/drawing/2014/main" id="{70695D60-306A-8282-2FD7-EE3C28126831}"/>
+              </a:ext>
+            </a:extLst>
+          </p:cNvPr>
+          <p:cNvSpPr>
+            <a:spLocks noGrp="1"/>
+          </p:cNvSpPr>
+          <p:nvPr>
+            <p:ph type="sldNum" sz="quarter" idx="5"/>
+          </p:nvPr>
+        </p:nvSpPr>
+        <p:spPr/>
+        <p:txBody>
+          <a:bodyPr/>
+          <a:lstStyle/>
+          <a:p>
+            <a:pPr rtl="0"/>
+            <a:fld id="{DF61EA0F-A667-4B49-8422-0062BC55E249}" type="slidenum">
+              <a:rPr lang="en-US" altLang="ko-KR" smtClean="0">
+                <a:latin typeface="맑은 고딕" panose="020B0503020000020004" pitchFamily="50" charset="-127"/>
+                <a:ea typeface="맑은 고딕" panose="020B0503020000020004" pitchFamily="50" charset="-127"/>
+              </a:rPr>
+              <a:t>25</a:t>
+            </a:fld>
+            <a:endParaRPr lang="ko-KR" altLang="en-US">
+              <a:latin typeface="맑은 고딕" panose="020B0503020000020004" pitchFamily="50" charset="-127"/>
+              <a:ea typeface="맑은 고딕" panose="020B0503020000020004" pitchFamily="50" charset="-127"/>
+            </a:endParaRPr>
+          </a:p>
+        </p:txBody>
+      </p:sp>
+    </p:spTree>
+    <p:extLst>
+      <p:ext uri="{BB962C8B-B14F-4D97-AF65-F5344CB8AC3E}">
+        <p14:creationId xmlns:p14="http://schemas.microsoft.com/office/powerpoint/2010/main" val="1831474701"/>
+      </p:ext>
+    </p:extLst>
+  </p:cSld>
+  <p:clrMapOvr>
+    <a:masterClrMapping/>
+  </p:clrMapOvr>
+</p:notes>
+</file>
+
+<file path=ppt/notesSlides/notesSlide23.xml><?xml version="1.0" encoding="utf-8"?>
+<p:notes xmlns:a="http://schemas.openxmlformats.org/drawingml/2006/main" xmlns:r="http://schemas.openxmlformats.org/officeDocument/2006/relationships" xmlns:p="http://schemas.openxmlformats.org/presentationml/2006/main">
+  <p:cSld>
+    <p:spTree>
+      <p:nvGrpSpPr>
+        <p:cNvPr id="1" name="">
+          <a:extLst>
+            <a:ext uri="{FF2B5EF4-FFF2-40B4-BE49-F238E27FC236}">
+              <a16:creationId xmlns:a16="http://schemas.microsoft.com/office/drawing/2014/main" id="{B94AF64E-E6AC-1B96-7815-1E891C05E945}"/>
+            </a:ext>
+          </a:extLst>
+        </p:cNvPr>
+        <p:cNvGrpSpPr/>
+        <p:nvPr/>
+      </p:nvGrpSpPr>
+      <p:grpSpPr>
+        <a:xfrm>
+          <a:off x="0" y="0"/>
+          <a:ext cx="0" cy="0"/>
+          <a:chOff x="0" y="0"/>
+          <a:chExt cx="0" cy="0"/>
+        </a:xfrm>
+      </p:grpSpPr>
+      <p:sp>
+        <p:nvSpPr>
+          <p:cNvPr id="2" name="슬라이드 이미지 개체 틀 1">
+            <a:extLst>
+              <a:ext uri="{FF2B5EF4-FFF2-40B4-BE49-F238E27FC236}">
+                <a16:creationId xmlns:a16="http://schemas.microsoft.com/office/drawing/2014/main" id="{8BB3B85C-E444-7A38-15EF-08EA748227DA}"/>
+              </a:ext>
+            </a:extLst>
+          </p:cNvPr>
+          <p:cNvSpPr>
+            <a:spLocks noGrp="1" noRot="1" noChangeAspect="1"/>
+          </p:cNvSpPr>
+          <p:nvPr>
+            <p:ph type="sldImg"/>
+          </p:nvPr>
+        </p:nvSpPr>
+        <p:spPr/>
+      </p:sp>
+      <p:sp>
+        <p:nvSpPr>
+          <p:cNvPr id="3" name="슬라이드 노트 개체 틀 2">
+            <a:extLst>
+              <a:ext uri="{FF2B5EF4-FFF2-40B4-BE49-F238E27FC236}">
+                <a16:creationId xmlns:a16="http://schemas.microsoft.com/office/drawing/2014/main" id="{CF0A0D9D-5249-DE1D-E0DE-CE9E40C754AD}"/>
+              </a:ext>
+            </a:extLst>
+          </p:cNvPr>
+          <p:cNvSpPr>
+            <a:spLocks noGrp="1"/>
+          </p:cNvSpPr>
+          <p:nvPr>
+            <p:ph type="body" idx="1"/>
+          </p:nvPr>
+        </p:nvSpPr>
+        <p:spPr/>
+        <p:txBody>
+          <a:bodyPr/>
+          <a:lstStyle/>
+          <a:p>
+            <a:endParaRPr lang="ko-KR" altLang="en-US">
+              <a:latin typeface="맑은 고딕" panose="020B0503020000020004" pitchFamily="50" charset="-127"/>
+              <a:ea typeface="맑은 고딕" panose="020B0503020000020004" pitchFamily="50" charset="-127"/>
+            </a:endParaRPr>
+          </a:p>
+        </p:txBody>
+      </p:sp>
+      <p:sp>
+        <p:nvSpPr>
+          <p:cNvPr id="4" name="슬라이드 번호 개체 틀 3">
+            <a:extLst>
+              <a:ext uri="{FF2B5EF4-FFF2-40B4-BE49-F238E27FC236}">
+                <a16:creationId xmlns:a16="http://schemas.microsoft.com/office/drawing/2014/main" id="{9219EAA1-AD2F-AE22-7763-4DD443204100}"/>
+              </a:ext>
+            </a:extLst>
+          </p:cNvPr>
+          <p:cNvSpPr>
+            <a:spLocks noGrp="1"/>
+          </p:cNvSpPr>
+          <p:nvPr>
+            <p:ph type="sldNum" sz="quarter" idx="5"/>
+          </p:nvPr>
+        </p:nvSpPr>
+        <p:spPr/>
+        <p:txBody>
+          <a:bodyPr/>
+          <a:lstStyle/>
+          <a:p>
+            <a:pPr rtl="0"/>
+            <a:fld id="{DF61EA0F-A667-4B49-8422-0062BC55E249}" type="slidenum">
+              <a:rPr lang="en-US" altLang="ko-KR" smtClean="0">
+                <a:latin typeface="맑은 고딕" panose="020B0503020000020004" pitchFamily="50" charset="-127"/>
+                <a:ea typeface="맑은 고딕" panose="020B0503020000020004" pitchFamily="50" charset="-127"/>
+              </a:rPr>
+              <a:t>26</a:t>
+            </a:fld>
+            <a:endParaRPr lang="ko-KR" altLang="en-US">
+              <a:latin typeface="맑은 고딕" panose="020B0503020000020004" pitchFamily="50" charset="-127"/>
+              <a:ea typeface="맑은 고딕" panose="020B0503020000020004" pitchFamily="50" charset="-127"/>
+            </a:endParaRPr>
+          </a:p>
+        </p:txBody>
+      </p:sp>
+    </p:spTree>
+    <p:extLst>
+      <p:ext uri="{BB962C8B-B14F-4D97-AF65-F5344CB8AC3E}">
+        <p14:creationId xmlns:p14="http://schemas.microsoft.com/office/powerpoint/2010/main" val="4111081393"/>
+      </p:ext>
+    </p:extLst>
+  </p:cSld>
+  <p:clrMapOvr>
+    <a:masterClrMapping/>
+  </p:clrMapOvr>
+</p:notes>
+</file>
+
+<file path=ppt/notesSlides/notesSlide24.xml><?xml version="1.0" encoding="utf-8"?>
 <p:notes xmlns:a="http://schemas.openxmlformats.org/drawingml/2006/main" xmlns:r="http://schemas.openxmlformats.org/officeDocument/2006/relationships" xmlns:p="http://schemas.openxmlformats.org/presentationml/2006/main">
   <p:cSld>
     <p:spTree>
@@ -1437,7 +2753,7 @@
                 <a:latin typeface="맑은 고딕" panose="020B0503020000020004" pitchFamily="50" charset="-127"/>
                 <a:ea typeface="맑은 고딕" panose="020B0503020000020004" pitchFamily="50" charset="-127"/>
               </a:rPr>
-              <a:t>17</a:t>
+              <a:t>28</a:t>
             </a:fld>
             <a:endParaRPr lang="ko-KR" altLang="en-US">
               <a:latin typeface="맑은 고딕" panose="020B0503020000020004" pitchFamily="50" charset="-127"/>
@@ -1449,7 +2765,7 @@
     </p:spTree>
     <p:extLst>
       <p:ext uri="{BB962C8B-B14F-4D97-AF65-F5344CB8AC3E}">
-        <p14:creationId xmlns:p14="http://schemas.microsoft.com/office/powerpoint/2010/main" val="1369961128"/>
+        <p14:creationId xmlns:p14="http://schemas.microsoft.com/office/powerpoint/2010/main" val="3275109548"/>
       </p:ext>
     </p:extLst>
   </p:cSld>
@@ -1459,243 +2775,7 @@
 </p:notes>
 </file>
 
-<file path=ppt/notesSlides/notesSlide15.xml><?xml version="1.0" encoding="utf-8"?>
-<p:notes xmlns:a="http://schemas.openxmlformats.org/drawingml/2006/main" xmlns:r="http://schemas.openxmlformats.org/officeDocument/2006/relationships" xmlns:p="http://schemas.openxmlformats.org/presentationml/2006/main">
-  <p:cSld>
-    <p:spTree>
-      <p:nvGrpSpPr>
-        <p:cNvPr id="1" name="">
-          <a:extLst>
-            <a:ext uri="{FF2B5EF4-FFF2-40B4-BE49-F238E27FC236}">
-              <a16:creationId xmlns:a16="http://schemas.microsoft.com/office/drawing/2014/main" id="{B917560D-60B5-CBEE-2F03-3A123D207134}"/>
-            </a:ext>
-          </a:extLst>
-        </p:cNvPr>
-        <p:cNvGrpSpPr/>
-        <p:nvPr/>
-      </p:nvGrpSpPr>
-      <p:grpSpPr>
-        <a:xfrm>
-          <a:off x="0" y="0"/>
-          <a:ext cx="0" cy="0"/>
-          <a:chOff x="0" y="0"/>
-          <a:chExt cx="0" cy="0"/>
-        </a:xfrm>
-      </p:grpSpPr>
-      <p:sp>
-        <p:nvSpPr>
-          <p:cNvPr id="2" name="슬라이드 이미지 개체 틀 1">
-            <a:extLst>
-              <a:ext uri="{FF2B5EF4-FFF2-40B4-BE49-F238E27FC236}">
-                <a16:creationId xmlns:a16="http://schemas.microsoft.com/office/drawing/2014/main" id="{101AF83A-0425-14D8-7169-A42513D0E0C9}"/>
-              </a:ext>
-            </a:extLst>
-          </p:cNvPr>
-          <p:cNvSpPr>
-            <a:spLocks noGrp="1" noRot="1" noChangeAspect="1"/>
-          </p:cNvSpPr>
-          <p:nvPr>
-            <p:ph type="sldImg"/>
-          </p:nvPr>
-        </p:nvSpPr>
-        <p:spPr/>
-      </p:sp>
-      <p:sp>
-        <p:nvSpPr>
-          <p:cNvPr id="3" name="슬라이드 노트 개체 틀 2">
-            <a:extLst>
-              <a:ext uri="{FF2B5EF4-FFF2-40B4-BE49-F238E27FC236}">
-                <a16:creationId xmlns:a16="http://schemas.microsoft.com/office/drawing/2014/main" id="{93D1CB96-AE80-F4E7-D3FD-BA86D28B955A}"/>
-              </a:ext>
-            </a:extLst>
-          </p:cNvPr>
-          <p:cNvSpPr>
-            <a:spLocks noGrp="1"/>
-          </p:cNvSpPr>
-          <p:nvPr>
-            <p:ph type="body" idx="1"/>
-          </p:nvPr>
-        </p:nvSpPr>
-        <p:spPr/>
-        <p:txBody>
-          <a:bodyPr/>
-          <a:lstStyle/>
-          <a:p>
-            <a:endParaRPr lang="ko-KR" altLang="en-US">
-              <a:latin typeface="맑은 고딕" panose="020B0503020000020004" pitchFamily="50" charset="-127"/>
-              <a:ea typeface="맑은 고딕" panose="020B0503020000020004" pitchFamily="50" charset="-127"/>
-            </a:endParaRPr>
-          </a:p>
-        </p:txBody>
-      </p:sp>
-      <p:sp>
-        <p:nvSpPr>
-          <p:cNvPr id="4" name="슬라이드 번호 개체 틀 3">
-            <a:extLst>
-              <a:ext uri="{FF2B5EF4-FFF2-40B4-BE49-F238E27FC236}">
-                <a16:creationId xmlns:a16="http://schemas.microsoft.com/office/drawing/2014/main" id="{7A08AF8D-086C-219C-9037-D25A219E2135}"/>
-              </a:ext>
-            </a:extLst>
-          </p:cNvPr>
-          <p:cNvSpPr>
-            <a:spLocks noGrp="1"/>
-          </p:cNvSpPr>
-          <p:nvPr>
-            <p:ph type="sldNum" sz="quarter" idx="5"/>
-          </p:nvPr>
-        </p:nvSpPr>
-        <p:spPr/>
-        <p:txBody>
-          <a:bodyPr/>
-          <a:lstStyle/>
-          <a:p>
-            <a:pPr rtl="0"/>
-            <a:fld id="{DF61EA0F-A667-4B49-8422-0062BC55E249}" type="slidenum">
-              <a:rPr lang="en-US" altLang="ko-KR" smtClean="0">
-                <a:latin typeface="맑은 고딕" panose="020B0503020000020004" pitchFamily="50" charset="-127"/>
-                <a:ea typeface="맑은 고딕" panose="020B0503020000020004" pitchFamily="50" charset="-127"/>
-              </a:rPr>
-              <a:t>18</a:t>
-            </a:fld>
-            <a:endParaRPr lang="ko-KR" altLang="en-US">
-              <a:latin typeface="맑은 고딕" panose="020B0503020000020004" pitchFamily="50" charset="-127"/>
-              <a:ea typeface="맑은 고딕" panose="020B0503020000020004" pitchFamily="50" charset="-127"/>
-            </a:endParaRPr>
-          </a:p>
-        </p:txBody>
-      </p:sp>
-    </p:spTree>
-    <p:extLst>
-      <p:ext uri="{BB962C8B-B14F-4D97-AF65-F5344CB8AC3E}">
-        <p14:creationId xmlns:p14="http://schemas.microsoft.com/office/powerpoint/2010/main" val="1597348809"/>
-      </p:ext>
-    </p:extLst>
-  </p:cSld>
-  <p:clrMapOvr>
-    <a:masterClrMapping/>
-  </p:clrMapOvr>
-</p:notes>
-</file>
-
-<file path=ppt/notesSlides/notesSlide16.xml><?xml version="1.0" encoding="utf-8"?>
-<p:notes xmlns:a="http://schemas.openxmlformats.org/drawingml/2006/main" xmlns:r="http://schemas.openxmlformats.org/officeDocument/2006/relationships" xmlns:p="http://schemas.openxmlformats.org/presentationml/2006/main">
-  <p:cSld>
-    <p:spTree>
-      <p:nvGrpSpPr>
-        <p:cNvPr id="1" name="">
-          <a:extLst>
-            <a:ext uri="{FF2B5EF4-FFF2-40B4-BE49-F238E27FC236}">
-              <a16:creationId xmlns:a16="http://schemas.microsoft.com/office/drawing/2014/main" id="{9600FFF8-5E85-392B-AFBA-C8C2C348186C}"/>
-            </a:ext>
-          </a:extLst>
-        </p:cNvPr>
-        <p:cNvGrpSpPr/>
-        <p:nvPr/>
-      </p:nvGrpSpPr>
-      <p:grpSpPr>
-        <a:xfrm>
-          <a:off x="0" y="0"/>
-          <a:ext cx="0" cy="0"/>
-          <a:chOff x="0" y="0"/>
-          <a:chExt cx="0" cy="0"/>
-        </a:xfrm>
-      </p:grpSpPr>
-      <p:sp>
-        <p:nvSpPr>
-          <p:cNvPr id="2" name="슬라이드 이미지 개체 틀 1">
-            <a:extLst>
-              <a:ext uri="{FF2B5EF4-FFF2-40B4-BE49-F238E27FC236}">
-                <a16:creationId xmlns:a16="http://schemas.microsoft.com/office/drawing/2014/main" id="{C1DC3C4C-7CA5-379A-4D68-CC0877C59193}"/>
-              </a:ext>
-            </a:extLst>
-          </p:cNvPr>
-          <p:cNvSpPr>
-            <a:spLocks noGrp="1" noRot="1" noChangeAspect="1"/>
-          </p:cNvSpPr>
-          <p:nvPr>
-            <p:ph type="sldImg"/>
-          </p:nvPr>
-        </p:nvSpPr>
-        <p:spPr/>
-      </p:sp>
-      <p:sp>
-        <p:nvSpPr>
-          <p:cNvPr id="3" name="슬라이드 노트 개체 틀 2">
-            <a:extLst>
-              <a:ext uri="{FF2B5EF4-FFF2-40B4-BE49-F238E27FC236}">
-                <a16:creationId xmlns:a16="http://schemas.microsoft.com/office/drawing/2014/main" id="{5A31F4A3-BB6C-EAD5-68BA-292377F942CB}"/>
-              </a:ext>
-            </a:extLst>
-          </p:cNvPr>
-          <p:cNvSpPr>
-            <a:spLocks noGrp="1"/>
-          </p:cNvSpPr>
-          <p:nvPr>
-            <p:ph type="body" idx="1"/>
-          </p:nvPr>
-        </p:nvSpPr>
-        <p:spPr/>
-        <p:txBody>
-          <a:bodyPr/>
-          <a:lstStyle/>
-          <a:p>
-            <a:endParaRPr lang="ko-KR" altLang="en-US">
-              <a:latin typeface="맑은 고딕" panose="020B0503020000020004" pitchFamily="50" charset="-127"/>
-              <a:ea typeface="맑은 고딕" panose="020B0503020000020004" pitchFamily="50" charset="-127"/>
-            </a:endParaRPr>
-          </a:p>
-        </p:txBody>
-      </p:sp>
-      <p:sp>
-        <p:nvSpPr>
-          <p:cNvPr id="4" name="슬라이드 번호 개체 틀 3">
-            <a:extLst>
-              <a:ext uri="{FF2B5EF4-FFF2-40B4-BE49-F238E27FC236}">
-                <a16:creationId xmlns:a16="http://schemas.microsoft.com/office/drawing/2014/main" id="{70695D60-306A-8282-2FD7-EE3C28126831}"/>
-              </a:ext>
-            </a:extLst>
-          </p:cNvPr>
-          <p:cNvSpPr>
-            <a:spLocks noGrp="1"/>
-          </p:cNvSpPr>
-          <p:nvPr>
-            <p:ph type="sldNum" sz="quarter" idx="5"/>
-          </p:nvPr>
-        </p:nvSpPr>
-        <p:spPr/>
-        <p:txBody>
-          <a:bodyPr/>
-          <a:lstStyle/>
-          <a:p>
-            <a:pPr rtl="0"/>
-            <a:fld id="{DF61EA0F-A667-4B49-8422-0062BC55E249}" type="slidenum">
-              <a:rPr lang="en-US" altLang="ko-KR" smtClean="0">
-                <a:latin typeface="맑은 고딕" panose="020B0503020000020004" pitchFamily="50" charset="-127"/>
-                <a:ea typeface="맑은 고딕" panose="020B0503020000020004" pitchFamily="50" charset="-127"/>
-              </a:rPr>
-              <a:t>19</a:t>
-            </a:fld>
-            <a:endParaRPr lang="ko-KR" altLang="en-US">
-              <a:latin typeface="맑은 고딕" panose="020B0503020000020004" pitchFamily="50" charset="-127"/>
-              <a:ea typeface="맑은 고딕" panose="020B0503020000020004" pitchFamily="50" charset="-127"/>
-            </a:endParaRPr>
-          </a:p>
-        </p:txBody>
-      </p:sp>
-    </p:spTree>
-    <p:extLst>
-      <p:ext uri="{BB962C8B-B14F-4D97-AF65-F5344CB8AC3E}">
-        <p14:creationId xmlns:p14="http://schemas.microsoft.com/office/powerpoint/2010/main" val="1831474701"/>
-      </p:ext>
-    </p:extLst>
-  </p:cSld>
-  <p:clrMapOvr>
-    <a:masterClrMapping/>
-  </p:clrMapOvr>
-</p:notes>
-</file>
-
-<file path=ppt/notesSlides/notesSlide2.xml><?xml version="1.0" encoding="utf-8"?>
+<file path=ppt/notesSlides/notesSlide3.xml><?xml version="1.0" encoding="utf-8"?>
 <p:notes xmlns:a="http://schemas.openxmlformats.org/drawingml/2006/main" xmlns:r="http://schemas.openxmlformats.org/officeDocument/2006/relationships" xmlns:p="http://schemas.openxmlformats.org/presentationml/2006/main">
   <p:cSld>
     <p:spTree>
@@ -1791,7 +2871,7 @@
                 <a:latin typeface="맑은 고딕" panose="020B0503020000020004" pitchFamily="50" charset="-127"/>
                 <a:ea typeface="맑은 고딕" panose="020B0503020000020004" pitchFamily="50" charset="-127"/>
               </a:rPr>
-              <a:t>2</a:t>
+              <a:t>3</a:t>
             </a:fld>
             <a:endParaRPr lang="ko-KR" altLang="en-US">
               <a:latin typeface="맑은 고딕" panose="020B0503020000020004" pitchFamily="50" charset="-127"/>
@@ -1813,7 +2893,7 @@
 </p:notes>
 </file>
 
-<file path=ppt/notesSlides/notesSlide3.xml><?xml version="1.0" encoding="utf-8"?>
+<file path=ppt/notesSlides/notesSlide4.xml><?xml version="1.0" encoding="utf-8"?>
 <p:notes xmlns:a="http://schemas.openxmlformats.org/drawingml/2006/main" xmlns:r="http://schemas.openxmlformats.org/officeDocument/2006/relationships" xmlns:p="http://schemas.openxmlformats.org/presentationml/2006/main">
   <p:cSld>
     <p:spTree>
@@ -1909,7 +2989,7 @@
                 <a:latin typeface="맑은 고딕" panose="020B0503020000020004" pitchFamily="50" charset="-127"/>
                 <a:ea typeface="맑은 고딕" panose="020B0503020000020004" pitchFamily="50" charset="-127"/>
               </a:rPr>
-              <a:t>3</a:t>
+              <a:t>4</a:t>
             </a:fld>
             <a:endParaRPr lang="ko-KR" altLang="en-US">
               <a:latin typeface="맑은 고딕" panose="020B0503020000020004" pitchFamily="50" charset="-127"/>
@@ -1931,7 +3011,7 @@
 </p:notes>
 </file>
 
-<file path=ppt/notesSlides/notesSlide4.xml><?xml version="1.0" encoding="utf-8"?>
+<file path=ppt/notesSlides/notesSlide5.xml><?xml version="1.0" encoding="utf-8"?>
 <p:notes xmlns:a="http://schemas.openxmlformats.org/drawingml/2006/main" xmlns:r="http://schemas.openxmlformats.org/officeDocument/2006/relationships" xmlns:p="http://schemas.openxmlformats.org/presentationml/2006/main">
   <p:cSld>
     <p:spTree>
@@ -2027,7 +3107,7 @@
                 <a:latin typeface="맑은 고딕" panose="020B0503020000020004" pitchFamily="50" charset="-127"/>
                 <a:ea typeface="맑은 고딕" panose="020B0503020000020004" pitchFamily="50" charset="-127"/>
               </a:rPr>
-              <a:t>4</a:t>
+              <a:t>5</a:t>
             </a:fld>
             <a:endParaRPr lang="ko-KR" altLang="en-US">
               <a:latin typeface="맑은 고딕" panose="020B0503020000020004" pitchFamily="50" charset="-127"/>
@@ -2049,7 +3129,7 @@
 </p:notes>
 </file>
 
-<file path=ppt/notesSlides/notesSlide5.xml><?xml version="1.0" encoding="utf-8"?>
+<file path=ppt/notesSlides/notesSlide6.xml><?xml version="1.0" encoding="utf-8"?>
 <p:notes xmlns:a="http://schemas.openxmlformats.org/drawingml/2006/main" xmlns:r="http://schemas.openxmlformats.org/officeDocument/2006/relationships" xmlns:p="http://schemas.openxmlformats.org/presentationml/2006/main">
   <p:cSld>
     <p:spTree>
@@ -2145,7 +3225,7 @@
                 <a:latin typeface="맑은 고딕" panose="020B0503020000020004" pitchFamily="50" charset="-127"/>
                 <a:ea typeface="맑은 고딕" panose="020B0503020000020004" pitchFamily="50" charset="-127"/>
               </a:rPr>
-              <a:t>5</a:t>
+              <a:t>6</a:t>
             </a:fld>
             <a:endParaRPr lang="ko-KR" altLang="en-US">
               <a:latin typeface="맑은 고딕" panose="020B0503020000020004" pitchFamily="50" charset="-127"/>
@@ -2167,7 +3247,7 @@
 </p:notes>
 </file>
 
-<file path=ppt/notesSlides/notesSlide6.xml><?xml version="1.0" encoding="utf-8"?>
+<file path=ppt/notesSlides/notesSlide7.xml><?xml version="1.0" encoding="utf-8"?>
 <p:notes xmlns:a="http://schemas.openxmlformats.org/drawingml/2006/main" xmlns:r="http://schemas.openxmlformats.org/officeDocument/2006/relationships" xmlns:p="http://schemas.openxmlformats.org/presentationml/2006/main">
   <p:cSld>
     <p:spTree>
@@ -2263,7 +3343,7 @@
                 <a:latin typeface="맑은 고딕" panose="020B0503020000020004" pitchFamily="50" charset="-127"/>
                 <a:ea typeface="맑은 고딕" panose="020B0503020000020004" pitchFamily="50" charset="-127"/>
               </a:rPr>
-              <a:t>6</a:t>
+              <a:t>7</a:t>
             </a:fld>
             <a:endParaRPr lang="ko-KR" altLang="en-US">
               <a:latin typeface="맑은 고딕" panose="020B0503020000020004" pitchFamily="50" charset="-127"/>
@@ -2285,7 +3365,7 @@
 </p:notes>
 </file>
 
-<file path=ppt/notesSlides/notesSlide7.xml><?xml version="1.0" encoding="utf-8"?>
+<file path=ppt/notesSlides/notesSlide8.xml><?xml version="1.0" encoding="utf-8"?>
 <p:notes xmlns:a="http://schemas.openxmlformats.org/drawingml/2006/main" xmlns:r="http://schemas.openxmlformats.org/officeDocument/2006/relationships" xmlns:p="http://schemas.openxmlformats.org/presentationml/2006/main">
   <p:cSld>
     <p:spTree>
@@ -2381,7 +3461,7 @@
                 <a:latin typeface="맑은 고딕" panose="020B0503020000020004" pitchFamily="50" charset="-127"/>
                 <a:ea typeface="맑은 고딕" panose="020B0503020000020004" pitchFamily="50" charset="-127"/>
               </a:rPr>
-              <a:t>7</a:t>
+              <a:t>8</a:t>
             </a:fld>
             <a:endParaRPr lang="ko-KR" altLang="en-US">
               <a:latin typeface="맑은 고딕" panose="020B0503020000020004" pitchFamily="50" charset="-127"/>
@@ -2403,7 +3483,7 @@
 </p:notes>
 </file>
 
-<file path=ppt/notesSlides/notesSlide8.xml><?xml version="1.0" encoding="utf-8"?>
+<file path=ppt/notesSlides/notesSlide9.xml><?xml version="1.0" encoding="utf-8"?>
 <p:notes xmlns:a="http://schemas.openxmlformats.org/drawingml/2006/main" xmlns:r="http://schemas.openxmlformats.org/officeDocument/2006/relationships" xmlns:p="http://schemas.openxmlformats.org/presentationml/2006/main">
   <p:cSld>
     <p:spTree>
@@ -2499,7 +3579,7 @@
                 <a:latin typeface="맑은 고딕" panose="020B0503020000020004" pitchFamily="50" charset="-127"/>
                 <a:ea typeface="맑은 고딕" panose="020B0503020000020004" pitchFamily="50" charset="-127"/>
               </a:rPr>
-              <a:t>8</a:t>
+              <a:t>9</a:t>
             </a:fld>
             <a:endParaRPr lang="ko-KR" altLang="en-US">
               <a:latin typeface="맑은 고딕" panose="020B0503020000020004" pitchFamily="50" charset="-127"/>
@@ -2512,124 +3592,6 @@
     <p:extLst>
       <p:ext uri="{BB962C8B-B14F-4D97-AF65-F5344CB8AC3E}">
         <p14:creationId xmlns:p14="http://schemas.microsoft.com/office/powerpoint/2010/main" val="459038399"/>
-      </p:ext>
-    </p:extLst>
-  </p:cSld>
-  <p:clrMapOvr>
-    <a:masterClrMapping/>
-  </p:clrMapOvr>
-</p:notes>
-</file>
-
-<file path=ppt/notesSlides/notesSlide9.xml><?xml version="1.0" encoding="utf-8"?>
-<p:notes xmlns:a="http://schemas.openxmlformats.org/drawingml/2006/main" xmlns:r="http://schemas.openxmlformats.org/officeDocument/2006/relationships" xmlns:p="http://schemas.openxmlformats.org/presentationml/2006/main">
-  <p:cSld>
-    <p:spTree>
-      <p:nvGrpSpPr>
-        <p:cNvPr id="1" name="">
-          <a:extLst>
-            <a:ext uri="{FF2B5EF4-FFF2-40B4-BE49-F238E27FC236}">
-              <a16:creationId xmlns:a16="http://schemas.microsoft.com/office/drawing/2014/main" id="{85554E00-A38F-7D23-BA6B-6F457A28A604}"/>
-            </a:ext>
-          </a:extLst>
-        </p:cNvPr>
-        <p:cNvGrpSpPr/>
-        <p:nvPr/>
-      </p:nvGrpSpPr>
-      <p:grpSpPr>
-        <a:xfrm>
-          <a:off x="0" y="0"/>
-          <a:ext cx="0" cy="0"/>
-          <a:chOff x="0" y="0"/>
-          <a:chExt cx="0" cy="0"/>
-        </a:xfrm>
-      </p:grpSpPr>
-      <p:sp>
-        <p:nvSpPr>
-          <p:cNvPr id="2" name="슬라이드 이미지 개체 틀 1">
-            <a:extLst>
-              <a:ext uri="{FF2B5EF4-FFF2-40B4-BE49-F238E27FC236}">
-                <a16:creationId xmlns:a16="http://schemas.microsoft.com/office/drawing/2014/main" id="{AB4BFAD4-9913-AE63-854C-9827F61CDA21}"/>
-              </a:ext>
-            </a:extLst>
-          </p:cNvPr>
-          <p:cNvSpPr>
-            <a:spLocks noGrp="1" noRot="1" noChangeAspect="1"/>
-          </p:cNvSpPr>
-          <p:nvPr>
-            <p:ph type="sldImg"/>
-          </p:nvPr>
-        </p:nvSpPr>
-        <p:spPr/>
-      </p:sp>
-      <p:sp>
-        <p:nvSpPr>
-          <p:cNvPr id="3" name="슬라이드 노트 개체 틀 2">
-            <a:extLst>
-              <a:ext uri="{FF2B5EF4-FFF2-40B4-BE49-F238E27FC236}">
-                <a16:creationId xmlns:a16="http://schemas.microsoft.com/office/drawing/2014/main" id="{55B4563A-4A81-D9E4-9D4F-E57899461472}"/>
-              </a:ext>
-            </a:extLst>
-          </p:cNvPr>
-          <p:cNvSpPr>
-            <a:spLocks noGrp="1"/>
-          </p:cNvSpPr>
-          <p:nvPr>
-            <p:ph type="body" idx="1"/>
-          </p:nvPr>
-        </p:nvSpPr>
-        <p:spPr/>
-        <p:txBody>
-          <a:bodyPr/>
-          <a:lstStyle/>
-          <a:p>
-            <a:endParaRPr lang="ko-KR" altLang="en-US">
-              <a:latin typeface="맑은 고딕" panose="020B0503020000020004" pitchFamily="50" charset="-127"/>
-              <a:ea typeface="맑은 고딕" panose="020B0503020000020004" pitchFamily="50" charset="-127"/>
-            </a:endParaRPr>
-          </a:p>
-        </p:txBody>
-      </p:sp>
-      <p:sp>
-        <p:nvSpPr>
-          <p:cNvPr id="4" name="슬라이드 번호 개체 틀 3">
-            <a:extLst>
-              <a:ext uri="{FF2B5EF4-FFF2-40B4-BE49-F238E27FC236}">
-                <a16:creationId xmlns:a16="http://schemas.microsoft.com/office/drawing/2014/main" id="{763246C0-0489-2897-6A41-AA8D135E25A5}"/>
-              </a:ext>
-            </a:extLst>
-          </p:cNvPr>
-          <p:cNvSpPr>
-            <a:spLocks noGrp="1"/>
-          </p:cNvSpPr>
-          <p:nvPr>
-            <p:ph type="sldNum" sz="quarter" idx="5"/>
-          </p:nvPr>
-        </p:nvSpPr>
-        <p:spPr/>
-        <p:txBody>
-          <a:bodyPr/>
-          <a:lstStyle/>
-          <a:p>
-            <a:pPr rtl="0"/>
-            <a:fld id="{DF61EA0F-A667-4B49-8422-0062BC55E249}" type="slidenum">
-              <a:rPr lang="en-US" altLang="ko-KR" smtClean="0">
-                <a:latin typeface="맑은 고딕" panose="020B0503020000020004" pitchFamily="50" charset="-127"/>
-                <a:ea typeface="맑은 고딕" panose="020B0503020000020004" pitchFamily="50" charset="-127"/>
-              </a:rPr>
-              <a:t>9</a:t>
-            </a:fld>
-            <a:endParaRPr lang="ko-KR" altLang="en-US">
-              <a:latin typeface="맑은 고딕" panose="020B0503020000020004" pitchFamily="50" charset="-127"/>
-              <a:ea typeface="맑은 고딕" panose="020B0503020000020004" pitchFamily="50" charset="-127"/>
-            </a:endParaRPr>
-          </a:p>
-        </p:txBody>
-      </p:sp>
-    </p:spTree>
-    <p:extLst>
-      <p:ext uri="{BB962C8B-B14F-4D97-AF65-F5344CB8AC3E}">
-        <p14:creationId xmlns:p14="http://schemas.microsoft.com/office/powerpoint/2010/main" val="39014564"/>
       </p:ext>
     </p:extLst>
   </p:cSld>
@@ -3107,7 +4069,7 @@
           <a:p>
             <a:fld id="{990475B5-67CA-4281-BDCA-DA943C3C8EB3}" type="datetime1">
               <a:rPr lang="ko-KR" altLang="en-US" noProof="0" smtClean="0"/>
-              <a:t>2026-05-01</a:t>
+              <a:t>2026-05-02</a:t>
             </a:fld>
             <a:endParaRPr lang="ko-KR" altLang="en-US" noProof="0"/>
           </a:p>
@@ -3761,7 +4723,7 @@
           <a:p>
             <a:fld id="{48A87A34-81AB-432B-8DAE-1953F412C126}" type="datetimeFigureOut">
               <a:rPr lang="en-US" smtClean="0"/>
-              <a:t>5/1/2026</a:t>
+              <a:t>5/2/2026</a:t>
             </a:fld>
             <a:endParaRPr lang="en-US" dirty="0"/>
           </a:p>
@@ -4057,7 +5019,7 @@
           <a:p>
             <a:fld id="{C655C81E-72E7-4D05-94B5-F45B321A525D}" type="datetime1">
               <a:rPr lang="ko-KR" altLang="en-US" noProof="0" smtClean="0"/>
-              <a:t>2026-05-01</a:t>
+              <a:t>2026-05-02</a:t>
             </a:fld>
             <a:endParaRPr lang="ko-KR" altLang="en-US" noProof="0" dirty="0">
               <a:latin typeface="맑은 고딕" panose="020B0503020000020004" pitchFamily="50" charset="-127"/>
@@ -4894,6 +5856,1550 @@
         <p:cNvPr id="1" name="">
           <a:extLst>
             <a:ext uri="{FF2B5EF4-FFF2-40B4-BE49-F238E27FC236}">
+              <a16:creationId xmlns:a16="http://schemas.microsoft.com/office/drawing/2014/main" id="{1ECFFBE9-3F99-0F85-0651-175D2B3192A7}"/>
+            </a:ext>
+          </a:extLst>
+        </p:cNvPr>
+        <p:cNvGrpSpPr/>
+        <p:nvPr/>
+      </p:nvGrpSpPr>
+      <p:grpSpPr>
+        <a:xfrm>
+          <a:off x="0" y="0"/>
+          <a:ext cx="0" cy="0"/>
+          <a:chOff x="0" y="0"/>
+          <a:chExt cx="0" cy="0"/>
+        </a:xfrm>
+      </p:grpSpPr>
+      <p:sp>
+        <p:nvSpPr>
+          <p:cNvPr id="2" name="직사각형 1">
+            <a:extLst>
+              <a:ext uri="{FF2B5EF4-FFF2-40B4-BE49-F238E27FC236}">
+                <a16:creationId xmlns:a16="http://schemas.microsoft.com/office/drawing/2014/main" id="{4CB6BA96-D422-55B8-24AF-E89CBF4E3CE8}"/>
+              </a:ext>
+            </a:extLst>
+          </p:cNvPr>
+          <p:cNvSpPr/>
+          <p:nvPr/>
+        </p:nvSpPr>
+        <p:spPr>
+          <a:xfrm>
+            <a:off x="1571625" y="3714751"/>
+            <a:ext cx="7524750" cy="457200"/>
+          </a:xfrm>
+          <a:prstGeom prst="rect">
+            <a:avLst/>
+          </a:prstGeom>
+          <a:solidFill>
+            <a:schemeClr val="bg1">
+              <a:lumMod val="75000"/>
+            </a:schemeClr>
+          </a:solidFill>
+          <a:ln>
+            <a:noFill/>
+          </a:ln>
+        </p:spPr>
+        <p:style>
+          <a:lnRef idx="2">
+            <a:schemeClr val="accent1">
+              <a:shade val="15000"/>
+            </a:schemeClr>
+          </a:lnRef>
+          <a:fillRef idx="1">
+            <a:schemeClr val="accent1"/>
+          </a:fillRef>
+          <a:effectRef idx="0">
+            <a:schemeClr val="accent1"/>
+          </a:effectRef>
+          <a:fontRef idx="minor">
+            <a:schemeClr val="lt1"/>
+          </a:fontRef>
+        </p:style>
+        <p:txBody>
+          <a:bodyPr rtlCol="0" anchor="ctr"/>
+          <a:lstStyle/>
+          <a:p>
+            <a:pPr algn="ctr"/>
+            <a:endParaRPr lang="ko-KR" altLang="en-US" dirty="0"/>
+          </a:p>
+        </p:txBody>
+      </p:sp>
+      <p:sp>
+        <p:nvSpPr>
+          <p:cNvPr id="8" name="제목 7">
+            <a:extLst>
+              <a:ext uri="{FF2B5EF4-FFF2-40B4-BE49-F238E27FC236}">
+                <a16:creationId xmlns:a16="http://schemas.microsoft.com/office/drawing/2014/main" id="{CFE0ED33-5BAD-5C68-1DE9-02272026707C}"/>
+              </a:ext>
+            </a:extLst>
+          </p:cNvPr>
+          <p:cNvSpPr>
+            <a:spLocks noGrp="1"/>
+          </p:cNvSpPr>
+          <p:nvPr>
+            <p:ph type="title"/>
+          </p:nvPr>
+        </p:nvSpPr>
+        <p:spPr>
+          <a:xfrm>
+            <a:off x="521207" y="448056"/>
+            <a:ext cx="8135613" cy="640080"/>
+          </a:xfrm>
+        </p:spPr>
+        <p:txBody>
+          <a:bodyPr rtlCol="0">
+            <a:noAutofit/>
+          </a:bodyPr>
+          <a:lstStyle/>
+          <a:p>
+            <a:pPr rtl="0"/>
+            <a:r>
+              <a:rPr lang="en-US" altLang="ko-KR" dirty="0">
+                <a:solidFill>
+                  <a:schemeClr val="tx1"/>
+                </a:solidFill>
+                <a:cs typeface="Segoe UI Light" panose="020B0502040204020203" pitchFamily="34" charset="0"/>
+              </a:rPr>
+              <a:t>Contents</a:t>
+            </a:r>
+            <a:endParaRPr lang="ko-KR" altLang="en-US" dirty="0">
+              <a:solidFill>
+                <a:schemeClr val="tx1"/>
+              </a:solidFill>
+              <a:cs typeface="Segoe UI Light" panose="020B0502040204020203" pitchFamily="34" charset="0"/>
+            </a:endParaRPr>
+          </a:p>
+        </p:txBody>
+      </p:sp>
+      <p:sp>
+        <p:nvSpPr>
+          <p:cNvPr id="12" name="슬라이드 번호 개체 틀 11">
+            <a:extLst>
+              <a:ext uri="{FF2B5EF4-FFF2-40B4-BE49-F238E27FC236}">
+                <a16:creationId xmlns:a16="http://schemas.microsoft.com/office/drawing/2014/main" id="{7973D715-C3FC-2897-3760-3CD2BF0305E1}"/>
+              </a:ext>
+            </a:extLst>
+          </p:cNvPr>
+          <p:cNvSpPr>
+            <a:spLocks noGrp="1"/>
+          </p:cNvSpPr>
+          <p:nvPr>
+            <p:ph type="sldNum" sz="quarter" idx="4"/>
+          </p:nvPr>
+        </p:nvSpPr>
+        <p:spPr/>
+        <p:txBody>
+          <a:bodyPr/>
+          <a:lstStyle/>
+          <a:p>
+            <a:fld id="{9860EDB8-5305-433F-BE41-D7A86D811DB3}" type="slidenum">
+              <a:rPr lang="en-US" altLang="ko-KR" noProof="0" smtClean="0"/>
+              <a:pPr/>
+              <a:t>10</a:t>
+            </a:fld>
+            <a:endParaRPr lang="ko-KR" altLang="en-US" noProof="0" dirty="0"/>
+          </a:p>
+        </p:txBody>
+      </p:sp>
+      <p:sp>
+        <p:nvSpPr>
+          <p:cNvPr id="16" name="TextBox 15">
+            <a:extLst>
+              <a:ext uri="{FF2B5EF4-FFF2-40B4-BE49-F238E27FC236}">
+                <a16:creationId xmlns:a16="http://schemas.microsoft.com/office/drawing/2014/main" id="{4170FAA7-3C60-B2DE-DE23-8E37F53BB2EF}"/>
+              </a:ext>
+            </a:extLst>
+          </p:cNvPr>
+          <p:cNvSpPr txBox="1"/>
+          <p:nvPr/>
+        </p:nvSpPr>
+        <p:spPr>
+          <a:xfrm>
+            <a:off x="2477049" y="1345311"/>
+            <a:ext cx="6752676" cy="5123390"/>
+          </a:xfrm>
+          <a:prstGeom prst="rect">
+            <a:avLst/>
+          </a:prstGeom>
+          <a:noFill/>
+        </p:spPr>
+        <p:txBody>
+          <a:bodyPr wrap="square" rtlCol="0">
+            <a:spAutoFit/>
+          </a:bodyPr>
+          <a:lstStyle/>
+          <a:p>
+            <a:pPr marL="342900" indent="-342900">
+              <a:lnSpc>
+                <a:spcPct val="150000"/>
+              </a:lnSpc>
+              <a:buFont typeface="+mj-lt"/>
+              <a:buAutoNum type="arabicPeriod"/>
+            </a:pPr>
+            <a:r>
+              <a:rPr lang="en-US" altLang="ko-KR" sz="2000" b="1" dirty="0">
+                <a:latin typeface="D2Coding" panose="020B0609020101020101" pitchFamily="49" charset="-127"/>
+                <a:ea typeface="D2Coding" panose="020B0609020101020101" pitchFamily="49" charset="-127"/>
+                <a:cs typeface="맑은 고딕 Semilight" panose="020B0502040204020203" pitchFamily="50" charset="-127"/>
+              </a:rPr>
+              <a:t>Tensor</a:t>
+            </a:r>
+          </a:p>
+          <a:p>
+            <a:pPr marL="342900" indent="-342900">
+              <a:lnSpc>
+                <a:spcPct val="150000"/>
+              </a:lnSpc>
+              <a:buFont typeface="+mj-lt"/>
+              <a:buAutoNum type="arabicPeriod"/>
+            </a:pPr>
+            <a:r>
+              <a:rPr lang="en-US" altLang="ko-KR" sz="2000" b="1" dirty="0" err="1">
+                <a:latin typeface="D2Coding" panose="020B0609020101020101" pitchFamily="49" charset="-127"/>
+                <a:ea typeface="D2Coding" panose="020B0609020101020101" pitchFamily="49" charset="-127"/>
+                <a:cs typeface="맑은 고딕 Semilight" panose="020B0502040204020203" pitchFamily="50" charset="-127"/>
+              </a:rPr>
+              <a:t>Autograd</a:t>
+            </a:r>
+            <a:endParaRPr lang="en-US" altLang="ko-KR" sz="2000" b="1" dirty="0">
+              <a:latin typeface="D2Coding" panose="020B0609020101020101" pitchFamily="49" charset="-127"/>
+              <a:ea typeface="D2Coding" panose="020B0609020101020101" pitchFamily="49" charset="-127"/>
+              <a:cs typeface="맑은 고딕 Semilight" panose="020B0502040204020203" pitchFamily="50" charset="-127"/>
+            </a:endParaRPr>
+          </a:p>
+          <a:p>
+            <a:pPr marL="342900" indent="-342900">
+              <a:lnSpc>
+                <a:spcPct val="150000"/>
+              </a:lnSpc>
+              <a:buFont typeface="+mj-lt"/>
+              <a:buAutoNum type="arabicPeriod"/>
+            </a:pPr>
+            <a:r>
+              <a:rPr lang="en-US" altLang="ko-KR" sz="2000" b="1" dirty="0">
+                <a:latin typeface="D2Coding" panose="020B0609020101020101" pitchFamily="49" charset="-127"/>
+                <a:ea typeface="D2Coding" panose="020B0609020101020101" pitchFamily="49" charset="-127"/>
+                <a:cs typeface="맑은 고딕 Semilight" panose="020B0502040204020203" pitchFamily="50" charset="-127"/>
+              </a:rPr>
+              <a:t>Backpropagation</a:t>
+            </a:r>
+          </a:p>
+          <a:p>
+            <a:pPr marL="342900" indent="-342900">
+              <a:lnSpc>
+                <a:spcPct val="150000"/>
+              </a:lnSpc>
+              <a:buFont typeface="+mj-lt"/>
+              <a:buAutoNum type="arabicPeriod"/>
+            </a:pPr>
+            <a:r>
+              <a:rPr lang="en-US" altLang="ko-KR" sz="2000" b="1" dirty="0">
+                <a:latin typeface="D2Coding" panose="020B0609020101020101" pitchFamily="49" charset="-127"/>
+                <a:ea typeface="D2Coding" panose="020B0609020101020101" pitchFamily="49" charset="-127"/>
+                <a:cs typeface="맑은 고딕 Semilight" panose="020B0502040204020203" pitchFamily="50" charset="-127"/>
+              </a:rPr>
+              <a:t>Forward &amp; Backward Pass</a:t>
+            </a:r>
+          </a:p>
+          <a:p>
+            <a:pPr marL="342900" indent="-342900">
+              <a:lnSpc>
+                <a:spcPct val="150000"/>
+              </a:lnSpc>
+              <a:buFont typeface="+mj-lt"/>
+              <a:buAutoNum type="arabicPeriod"/>
+            </a:pPr>
+            <a:r>
+              <a:rPr lang="en-US" altLang="ko-KR" sz="2000" b="1" dirty="0">
+                <a:latin typeface="D2Coding" panose="020B0609020101020101" pitchFamily="49" charset="-127"/>
+                <a:ea typeface="D2Coding" panose="020B0609020101020101" pitchFamily="49" charset="-127"/>
+                <a:cs typeface="맑은 고딕 Semilight" panose="020B0502040204020203" pitchFamily="50" charset="-127"/>
+              </a:rPr>
+              <a:t>Optimizer &amp; Model</a:t>
+            </a:r>
+          </a:p>
+          <a:p>
+            <a:pPr marL="342900" indent="-342900">
+              <a:lnSpc>
+                <a:spcPct val="150000"/>
+              </a:lnSpc>
+              <a:buFont typeface="+mj-lt"/>
+              <a:buAutoNum type="arabicPeriod"/>
+            </a:pPr>
+            <a:r>
+              <a:rPr lang="en-US" altLang="ko-KR" sz="2000" b="1" dirty="0">
+                <a:latin typeface="D2Coding" panose="020B0609020101020101" pitchFamily="49" charset="-127"/>
+                <a:ea typeface="D2Coding" panose="020B0609020101020101" pitchFamily="49" charset="-127"/>
+                <a:cs typeface="맑은 고딕 Semilight" panose="020B0502040204020203" pitchFamily="50" charset="-127"/>
+              </a:rPr>
+              <a:t>Optimizers</a:t>
+            </a:r>
+          </a:p>
+          <a:p>
+            <a:pPr marL="342900" indent="-342900">
+              <a:lnSpc>
+                <a:spcPct val="150000"/>
+              </a:lnSpc>
+              <a:buFont typeface="+mj-lt"/>
+              <a:buAutoNum type="arabicPeriod"/>
+            </a:pPr>
+            <a:r>
+              <a:rPr lang="en-US" altLang="ko-KR" sz="2000" b="1" dirty="0">
+                <a:latin typeface="D2Coding" panose="020B0609020101020101" pitchFamily="49" charset="-127"/>
+                <a:ea typeface="D2Coding" panose="020B0609020101020101" pitchFamily="49" charset="-127"/>
+                <a:cs typeface="맑은 고딕 Semilight" panose="020B0502040204020203" pitchFamily="50" charset="-127"/>
+              </a:rPr>
+              <a:t> Loss Function with L1, L2 regularization</a:t>
+            </a:r>
+          </a:p>
+          <a:p>
+            <a:pPr marL="342900" indent="-342900">
+              <a:lnSpc>
+                <a:spcPct val="150000"/>
+              </a:lnSpc>
+              <a:buFont typeface="+mj-lt"/>
+              <a:buAutoNum type="arabicPeriod"/>
+            </a:pPr>
+            <a:r>
+              <a:rPr lang="en-US" altLang="ko-KR" sz="2000" b="1" dirty="0">
+                <a:latin typeface="D2Coding" panose="020B0609020101020101" pitchFamily="49" charset="-127"/>
+                <a:ea typeface="D2Coding" panose="020B0609020101020101" pitchFamily="49" charset="-127"/>
+                <a:cs typeface="맑은 고딕 Semilight" panose="020B0502040204020203" pitchFamily="50" charset="-127"/>
+              </a:rPr>
+              <a:t> Regularizations</a:t>
+            </a:r>
+          </a:p>
+          <a:p>
+            <a:pPr marL="342900" indent="-342900">
+              <a:lnSpc>
+                <a:spcPct val="150000"/>
+              </a:lnSpc>
+              <a:buFont typeface="+mj-lt"/>
+              <a:buAutoNum type="arabicPeriod"/>
+            </a:pPr>
+            <a:r>
+              <a:rPr lang="en-US" altLang="ko-KR" sz="2000" b="1" dirty="0">
+                <a:latin typeface="D2Coding" panose="020B0609020101020101" pitchFamily="49" charset="-127"/>
+                <a:ea typeface="D2Coding" panose="020B0609020101020101" pitchFamily="49" charset="-127"/>
+                <a:cs typeface="맑은 고딕 Semilight" panose="020B0502040204020203" pitchFamily="50" charset="-127"/>
+              </a:rPr>
+              <a:t> </a:t>
+            </a:r>
+            <a:r>
+              <a:rPr lang="en-US" altLang="ko-KR" sz="2000" b="1" dirty="0" err="1">
+                <a:latin typeface="D2Coding" panose="020B0609020101020101" pitchFamily="49" charset="-127"/>
+                <a:ea typeface="D2Coding" panose="020B0609020101020101" pitchFamily="49" charset="-127"/>
+                <a:cs typeface="맑은 고딕 Semilight" panose="020B0502040204020203" pitchFamily="50" charset="-127"/>
+              </a:rPr>
+              <a:t>Pytorch</a:t>
+            </a:r>
+            <a:r>
+              <a:rPr lang="en-US" altLang="ko-KR" sz="2000" b="1" dirty="0">
+                <a:latin typeface="D2Coding" panose="020B0609020101020101" pitchFamily="49" charset="-127"/>
+                <a:ea typeface="D2Coding" panose="020B0609020101020101" pitchFamily="49" charset="-127"/>
+                <a:cs typeface="맑은 고딕 Semilight" panose="020B0502040204020203" pitchFamily="50" charset="-127"/>
+              </a:rPr>
+              <a:t> with fashion </a:t>
+            </a:r>
+            <a:r>
+              <a:rPr lang="en-US" altLang="ko-KR" sz="2000" b="1" dirty="0" err="1">
+                <a:latin typeface="D2Coding" panose="020B0609020101020101" pitchFamily="49" charset="-127"/>
+                <a:ea typeface="D2Coding" panose="020B0609020101020101" pitchFamily="49" charset="-127"/>
+                <a:cs typeface="맑은 고딕 Semilight" panose="020B0502040204020203" pitchFamily="50" charset="-127"/>
+              </a:rPr>
+              <a:t>mnist</a:t>
+            </a:r>
+            <a:endParaRPr lang="en-US" altLang="ko-KR" sz="2000" b="1" dirty="0">
+              <a:latin typeface="D2Coding" panose="020B0609020101020101" pitchFamily="49" charset="-127"/>
+              <a:ea typeface="D2Coding" panose="020B0609020101020101" pitchFamily="49" charset="-127"/>
+              <a:cs typeface="맑은 고딕 Semilight" panose="020B0502040204020203" pitchFamily="50" charset="-127"/>
+            </a:endParaRPr>
+          </a:p>
+          <a:p>
+            <a:pPr marL="342900" indent="-342900">
+              <a:lnSpc>
+                <a:spcPct val="150000"/>
+              </a:lnSpc>
+              <a:buFont typeface="+mj-lt"/>
+              <a:buAutoNum type="arabicPeriod"/>
+            </a:pPr>
+            <a:r>
+              <a:rPr lang="en-US" altLang="ko-KR" sz="2000" b="1" dirty="0">
+                <a:latin typeface="D2Coding" panose="020B0609020101020101" pitchFamily="49" charset="-127"/>
+                <a:ea typeface="D2Coding" panose="020B0609020101020101" pitchFamily="49" charset="-127"/>
+                <a:cs typeface="맑은 고딕 Semilight" panose="020B0502040204020203" pitchFamily="50" charset="-127"/>
+              </a:rPr>
+              <a:t> Understanding basic CNN</a:t>
+            </a:r>
+          </a:p>
+          <a:p>
+            <a:pPr marL="342900" indent="-342900">
+              <a:lnSpc>
+                <a:spcPct val="150000"/>
+              </a:lnSpc>
+              <a:buFont typeface="+mj-lt"/>
+              <a:buAutoNum type="arabicPeriod"/>
+            </a:pPr>
+            <a:r>
+              <a:rPr lang="en-US" altLang="ko-KR" sz="2000" b="1" dirty="0">
+                <a:latin typeface="D2Coding" panose="020B0609020101020101" pitchFamily="49" charset="-127"/>
+                <a:ea typeface="D2Coding" panose="020B0609020101020101" pitchFamily="49" charset="-127"/>
+                <a:cs typeface="맑은 고딕 Semilight" panose="020B0502040204020203" pitchFamily="50" charset="-127"/>
+              </a:rPr>
+              <a:t> Roadmap to ML &amp; ML</a:t>
+            </a:r>
+          </a:p>
+        </p:txBody>
+      </p:sp>
+    </p:spTree>
+    <p:extLst>
+      <p:ext uri="{BB962C8B-B14F-4D97-AF65-F5344CB8AC3E}">
+        <p14:creationId xmlns:p14="http://schemas.microsoft.com/office/powerpoint/2010/main" val="2282852487"/>
+      </p:ext>
+    </p:extLst>
+  </p:cSld>
+  <p:clrMapOvr>
+    <a:masterClrMapping/>
+  </p:clrMapOvr>
+  <mc:AlternateContent xmlns:mc="http://schemas.openxmlformats.org/markup-compatibility/2006" xmlns:p14="http://schemas.microsoft.com/office/powerpoint/2010/main">
+    <mc:Choice Requires="p14">
+      <p:transition p14:dur="10"/>
+    </mc:Choice>
+    <mc:Fallback xmlns="">
+      <p:transition/>
+    </mc:Fallback>
+  </mc:AlternateContent>
+</p:sld>
+</file>
+
+<file path=ppt/slides/slide11.xml><?xml version="1.0" encoding="utf-8"?>
+<p:sld xmlns:a="http://schemas.openxmlformats.org/drawingml/2006/main" xmlns:r="http://schemas.openxmlformats.org/officeDocument/2006/relationships" xmlns:p="http://schemas.openxmlformats.org/presentationml/2006/main">
+  <p:cSld>
+    <p:spTree>
+      <p:nvGrpSpPr>
+        <p:cNvPr id="1" name="">
+          <a:extLst>
+            <a:ext uri="{FF2B5EF4-FFF2-40B4-BE49-F238E27FC236}">
+              <a16:creationId xmlns:a16="http://schemas.microsoft.com/office/drawing/2014/main" id="{BD7DD655-3BF0-4C09-0B1D-D934CBF8FA31}"/>
+            </a:ext>
+          </a:extLst>
+        </p:cNvPr>
+        <p:cNvGrpSpPr/>
+        <p:nvPr/>
+      </p:nvGrpSpPr>
+      <p:grpSpPr>
+        <a:xfrm>
+          <a:off x="0" y="0"/>
+          <a:ext cx="0" cy="0"/>
+          <a:chOff x="0" y="0"/>
+          <a:chExt cx="0" cy="0"/>
+        </a:xfrm>
+      </p:grpSpPr>
+      <p:sp>
+        <p:nvSpPr>
+          <p:cNvPr id="12" name="슬라이드 번호 개체 틀 11">
+            <a:extLst>
+              <a:ext uri="{FF2B5EF4-FFF2-40B4-BE49-F238E27FC236}">
+                <a16:creationId xmlns:a16="http://schemas.microsoft.com/office/drawing/2014/main" id="{3E92CA1D-10C5-A32D-483B-FE34B16A6F89}"/>
+              </a:ext>
+            </a:extLst>
+          </p:cNvPr>
+          <p:cNvSpPr>
+            <a:spLocks noGrp="1"/>
+          </p:cNvSpPr>
+          <p:nvPr>
+            <p:ph type="sldNum" sz="quarter" idx="4"/>
+          </p:nvPr>
+        </p:nvSpPr>
+        <p:spPr/>
+        <p:txBody>
+          <a:bodyPr/>
+          <a:lstStyle/>
+          <a:p>
+            <a:fld id="{9860EDB8-5305-433F-BE41-D7A86D811DB3}" type="slidenum">
+              <a:rPr lang="en-US" altLang="ko-KR" noProof="0" smtClean="0"/>
+              <a:pPr/>
+              <a:t>11</a:t>
+            </a:fld>
+            <a:endParaRPr lang="ko-KR" altLang="en-US" noProof="0"/>
+          </a:p>
+        </p:txBody>
+      </p:sp>
+      <p:sp>
+        <p:nvSpPr>
+          <p:cNvPr id="9" name="제목 7">
+            <a:extLst>
+              <a:ext uri="{FF2B5EF4-FFF2-40B4-BE49-F238E27FC236}">
+                <a16:creationId xmlns:a16="http://schemas.microsoft.com/office/drawing/2014/main" id="{6F7D973D-804F-BD5B-9801-7FE8ED1828DD}"/>
+              </a:ext>
+            </a:extLst>
+          </p:cNvPr>
+          <p:cNvSpPr>
+            <a:spLocks noGrp="1"/>
+          </p:cNvSpPr>
+          <p:nvPr>
+            <p:ph type="title"/>
+          </p:nvPr>
+        </p:nvSpPr>
+        <p:spPr>
+          <a:xfrm>
+            <a:off x="521206" y="448056"/>
+            <a:ext cx="10432543" cy="640080"/>
+          </a:xfrm>
+        </p:spPr>
+        <p:txBody>
+          <a:bodyPr rtlCol="0">
+            <a:noAutofit/>
+          </a:bodyPr>
+          <a:lstStyle/>
+          <a:p>
+            <a:r>
+              <a:rPr lang="en-US" altLang="ko-KR" b="1" dirty="0">
+                <a:latin typeface="D2Coding" panose="020B0609020101020101" pitchFamily="49" charset="-127"/>
+                <a:ea typeface="D2Coding" panose="020B0609020101020101" pitchFamily="49" charset="-127"/>
+                <a:cs typeface="Segoe UI Light" panose="020B0502040204020203" pitchFamily="34" charset="0"/>
+              </a:rPr>
+              <a:t>Adam</a:t>
+            </a:r>
+            <a:endParaRPr lang="ko-KR" altLang="en-US" b="1" dirty="0">
+              <a:latin typeface="D2Coding" panose="020B0609020101020101" pitchFamily="49" charset="-127"/>
+              <a:ea typeface="D2Coding" panose="020B0609020101020101" pitchFamily="49" charset="-127"/>
+              <a:cs typeface="Segoe UI Light" panose="020B0502040204020203" pitchFamily="34" charset="0"/>
+            </a:endParaRPr>
+          </a:p>
+        </p:txBody>
+      </p:sp>
+      <p:sp>
+        <p:nvSpPr>
+          <p:cNvPr id="4" name="TextBox 3">
+            <a:extLst>
+              <a:ext uri="{FF2B5EF4-FFF2-40B4-BE49-F238E27FC236}">
+                <a16:creationId xmlns:a16="http://schemas.microsoft.com/office/drawing/2014/main" id="{ACE620EF-E9BF-EDFB-0EDB-46AA50F1672C}"/>
+              </a:ext>
+            </a:extLst>
+          </p:cNvPr>
+          <p:cNvSpPr txBox="1"/>
+          <p:nvPr/>
+        </p:nvSpPr>
+        <p:spPr>
+          <a:xfrm>
+            <a:off x="647700" y="1171575"/>
+            <a:ext cx="11000826" cy="1152688"/>
+          </a:xfrm>
+          <a:prstGeom prst="rect">
+            <a:avLst/>
+          </a:prstGeom>
+          <a:noFill/>
+        </p:spPr>
+        <p:txBody>
+          <a:bodyPr wrap="square" rtlCol="0">
+            <a:spAutoFit/>
+          </a:bodyPr>
+          <a:lstStyle/>
+          <a:p>
+            <a:pPr>
+              <a:lnSpc>
+                <a:spcPct val="150000"/>
+              </a:lnSpc>
+            </a:pPr>
+            <a:r>
+              <a:rPr lang="en-US" altLang="ko-KR" sz="1600" dirty="0">
+                <a:latin typeface="맑은 고딕 Semilight" panose="020B0502040204020203" pitchFamily="50" charset="-127"/>
+                <a:ea typeface="맑은 고딕 Semilight" panose="020B0502040204020203" pitchFamily="50" charset="-127"/>
+                <a:cs typeface="맑은 고딕 Semilight" panose="020B0502040204020203" pitchFamily="50" charset="-127"/>
+              </a:rPr>
+              <a:t>Adam(Adaptive Moment Estimation)</a:t>
+            </a:r>
+            <a:r>
+              <a:rPr lang="ko-KR" altLang="en-US" sz="1600" dirty="0">
+                <a:latin typeface="맑은 고딕 Semilight" panose="020B0502040204020203" pitchFamily="50" charset="-127"/>
+                <a:ea typeface="맑은 고딕 Semilight" panose="020B0502040204020203" pitchFamily="50" charset="-127"/>
+                <a:cs typeface="맑은 고딕 Semilight" panose="020B0502040204020203" pitchFamily="50" charset="-127"/>
+              </a:rPr>
+              <a:t>은 현재 </a:t>
+            </a:r>
+            <a:r>
+              <a:rPr lang="ko-KR" altLang="en-US" sz="1600" dirty="0" err="1">
+                <a:latin typeface="맑은 고딕 Semilight" panose="020B0502040204020203" pitchFamily="50" charset="-127"/>
+                <a:ea typeface="맑은 고딕 Semilight" panose="020B0502040204020203" pitchFamily="50" charset="-127"/>
+                <a:cs typeface="맑은 고딕 Semilight" panose="020B0502040204020203" pitchFamily="50" charset="-127"/>
+              </a:rPr>
+              <a:t>딥러닝에서</a:t>
+            </a:r>
+            <a:r>
+              <a:rPr lang="ko-KR" altLang="en-US" sz="1600" dirty="0">
+                <a:latin typeface="맑은 고딕 Semilight" panose="020B0502040204020203" pitchFamily="50" charset="-127"/>
+                <a:ea typeface="맑은 고딕 Semilight" panose="020B0502040204020203" pitchFamily="50" charset="-127"/>
+                <a:cs typeface="맑은 고딕 Semilight" panose="020B0502040204020203" pitchFamily="50" charset="-127"/>
+              </a:rPr>
+              <a:t> 가장 많이 사용되는 최적화 알고리즘</a:t>
+            </a:r>
+            <a:r>
+              <a:rPr lang="en-US" altLang="ko-KR" sz="1600" dirty="0">
+                <a:latin typeface="맑은 고딕 Semilight" panose="020B0502040204020203" pitchFamily="50" charset="-127"/>
+                <a:ea typeface="맑은 고딕 Semilight" panose="020B0502040204020203" pitchFamily="50" charset="-127"/>
+                <a:cs typeface="맑은 고딕 Semilight" panose="020B0502040204020203" pitchFamily="50" charset="-127"/>
+              </a:rPr>
+              <a:t>(Optimizer)</a:t>
+            </a:r>
+            <a:r>
+              <a:rPr lang="ko-KR" altLang="en-US" sz="1600" dirty="0">
+                <a:latin typeface="맑은 고딕 Semilight" panose="020B0502040204020203" pitchFamily="50" charset="-127"/>
+                <a:ea typeface="맑은 고딕 Semilight" panose="020B0502040204020203" pitchFamily="50" charset="-127"/>
+                <a:cs typeface="맑은 고딕 Semilight" panose="020B0502040204020203" pitchFamily="50" charset="-127"/>
+              </a:rPr>
+              <a:t>으로 </a:t>
+            </a:r>
+            <a:r>
+              <a:rPr lang="en-US" altLang="ko-KR" sz="1600" dirty="0">
+                <a:latin typeface="맑은 고딕 Semilight" panose="020B0502040204020203" pitchFamily="50" charset="-127"/>
+                <a:ea typeface="맑은 고딕 Semilight" panose="020B0502040204020203" pitchFamily="50" charset="-127"/>
+                <a:cs typeface="맑은 고딕 Semilight" panose="020B0502040204020203" pitchFamily="50" charset="-127"/>
+              </a:rPr>
+              <a:t>SGD</a:t>
+            </a:r>
+            <a:r>
+              <a:rPr lang="ko-KR" altLang="en-US" sz="1600" dirty="0">
+                <a:latin typeface="맑은 고딕 Semilight" panose="020B0502040204020203" pitchFamily="50" charset="-127"/>
+                <a:ea typeface="맑은 고딕 Semilight" panose="020B0502040204020203" pitchFamily="50" charset="-127"/>
+                <a:cs typeface="맑은 고딕 Semilight" panose="020B0502040204020203" pitchFamily="50" charset="-127"/>
+              </a:rPr>
+              <a:t>가 </a:t>
+            </a:r>
+            <a:r>
+              <a:rPr lang="en-US" altLang="ko-KR" sz="1600" dirty="0">
+                <a:latin typeface="맑은 고딕 Semilight" panose="020B0502040204020203" pitchFamily="50" charset="-127"/>
+                <a:ea typeface="맑은 고딕 Semilight" panose="020B0502040204020203" pitchFamily="50" charset="-127"/>
+                <a:cs typeface="맑은 고딕 Semilight" panose="020B0502040204020203" pitchFamily="50" charset="-127"/>
+              </a:rPr>
+              <a:t>"</a:t>
+            </a:r>
+            <a:r>
+              <a:rPr lang="ko-KR" altLang="en-US" sz="1600" dirty="0">
+                <a:latin typeface="맑은 고딕 Semilight" panose="020B0502040204020203" pitchFamily="50" charset="-127"/>
+                <a:ea typeface="맑은 고딕 Semilight" panose="020B0502040204020203" pitchFamily="50" charset="-127"/>
+                <a:cs typeface="맑은 고딕 Semilight" panose="020B0502040204020203" pitchFamily="50" charset="-127"/>
+              </a:rPr>
+              <a:t>경사를 따라 일정하게 내려가는 산악인</a:t>
+            </a:r>
+            <a:r>
+              <a:rPr lang="en-US" altLang="ko-KR" sz="1600" dirty="0">
+                <a:latin typeface="맑은 고딕 Semilight" panose="020B0502040204020203" pitchFamily="50" charset="-127"/>
+                <a:ea typeface="맑은 고딕 Semilight" panose="020B0502040204020203" pitchFamily="50" charset="-127"/>
+                <a:cs typeface="맑은 고딕 Semilight" panose="020B0502040204020203" pitchFamily="50" charset="-127"/>
+              </a:rPr>
+              <a:t>"</a:t>
+            </a:r>
+            <a:r>
+              <a:rPr lang="ko-KR" altLang="en-US" sz="1600" dirty="0">
+                <a:latin typeface="맑은 고딕 Semilight" panose="020B0502040204020203" pitchFamily="50" charset="-127"/>
+                <a:ea typeface="맑은 고딕 Semilight" panose="020B0502040204020203" pitchFamily="50" charset="-127"/>
+                <a:cs typeface="맑은 고딕 Semilight" panose="020B0502040204020203" pitchFamily="50" charset="-127"/>
+              </a:rPr>
+              <a:t>이라면</a:t>
+            </a:r>
+            <a:r>
+              <a:rPr lang="en-US" altLang="ko-KR" sz="1600" dirty="0">
+                <a:latin typeface="맑은 고딕 Semilight" panose="020B0502040204020203" pitchFamily="50" charset="-127"/>
+                <a:ea typeface="맑은 고딕 Semilight" panose="020B0502040204020203" pitchFamily="50" charset="-127"/>
+                <a:cs typeface="맑은 고딕 Semilight" panose="020B0502040204020203" pitchFamily="50" charset="-127"/>
+              </a:rPr>
+              <a:t>, Adam</a:t>
+            </a:r>
+            <a:r>
+              <a:rPr lang="ko-KR" altLang="en-US" sz="1600" dirty="0">
+                <a:latin typeface="맑은 고딕 Semilight" panose="020B0502040204020203" pitchFamily="50" charset="-127"/>
+                <a:ea typeface="맑은 고딕 Semilight" panose="020B0502040204020203" pitchFamily="50" charset="-127"/>
+                <a:cs typeface="맑은 고딕 Semilight" panose="020B0502040204020203" pitchFamily="50" charset="-127"/>
+              </a:rPr>
+              <a:t>은 </a:t>
+            </a:r>
+            <a:r>
+              <a:rPr lang="en-US" altLang="ko-KR" sz="1600" dirty="0">
+                <a:latin typeface="맑은 고딕 Semilight" panose="020B0502040204020203" pitchFamily="50" charset="-127"/>
+                <a:ea typeface="맑은 고딕 Semilight" panose="020B0502040204020203" pitchFamily="50" charset="-127"/>
+                <a:cs typeface="맑은 고딕 Semilight" panose="020B0502040204020203" pitchFamily="50" charset="-127"/>
+              </a:rPr>
+              <a:t>"</a:t>
+            </a:r>
+            <a:r>
+              <a:rPr lang="ko-KR" altLang="en-US" sz="1600" dirty="0">
+                <a:latin typeface="맑은 고딕 Semilight" panose="020B0502040204020203" pitchFamily="50" charset="-127"/>
+                <a:ea typeface="맑은 고딕 Semilight" panose="020B0502040204020203" pitchFamily="50" charset="-127"/>
+                <a:cs typeface="맑은 고딕 Semilight" panose="020B0502040204020203" pitchFamily="50" charset="-127"/>
+              </a:rPr>
+              <a:t>가속도를 붙여 빠르게 내려가면서도</a:t>
+            </a:r>
+            <a:r>
+              <a:rPr lang="en-US" altLang="ko-KR" sz="1600" dirty="0">
+                <a:latin typeface="맑은 고딕 Semilight" panose="020B0502040204020203" pitchFamily="50" charset="-127"/>
+                <a:ea typeface="맑은 고딕 Semilight" panose="020B0502040204020203" pitchFamily="50" charset="-127"/>
+                <a:cs typeface="맑은 고딕 Semilight" panose="020B0502040204020203" pitchFamily="50" charset="-127"/>
+              </a:rPr>
+              <a:t>, </a:t>
+            </a:r>
+            <a:r>
+              <a:rPr lang="ko-KR" altLang="en-US" sz="1600" dirty="0">
+                <a:latin typeface="맑은 고딕 Semilight" panose="020B0502040204020203" pitchFamily="50" charset="-127"/>
+                <a:ea typeface="맑은 고딕 Semilight" panose="020B0502040204020203" pitchFamily="50" charset="-127"/>
+                <a:cs typeface="맑은 고딕 Semilight" panose="020B0502040204020203" pitchFamily="50" charset="-127"/>
+              </a:rPr>
+              <a:t>지형에 따라 보폭을 조절하는 산악인</a:t>
+            </a:r>
+            <a:r>
+              <a:rPr lang="en-US" altLang="ko-KR" sz="1600" dirty="0">
+                <a:latin typeface="맑은 고딕 Semilight" panose="020B0502040204020203" pitchFamily="50" charset="-127"/>
+                <a:ea typeface="맑은 고딕 Semilight" panose="020B0502040204020203" pitchFamily="50" charset="-127"/>
+                <a:cs typeface="맑은 고딕 Semilight" panose="020B0502040204020203" pitchFamily="50" charset="-127"/>
+              </a:rPr>
+              <a:t>"</a:t>
+            </a:r>
+            <a:endParaRPr lang="ko-KR" altLang="en-US" sz="1600" dirty="0">
+              <a:latin typeface="맑은 고딕 Semilight" panose="020B0502040204020203" pitchFamily="50" charset="-127"/>
+              <a:ea typeface="맑은 고딕 Semilight" panose="020B0502040204020203" pitchFamily="50" charset="-127"/>
+              <a:cs typeface="맑은 고딕 Semilight" panose="020B0502040204020203" pitchFamily="50" charset="-127"/>
+            </a:endParaRPr>
+          </a:p>
+        </p:txBody>
+      </p:sp>
+      <p:sp>
+        <p:nvSpPr>
+          <p:cNvPr id="5" name="TextBox 4">
+            <a:extLst>
+              <a:ext uri="{FF2B5EF4-FFF2-40B4-BE49-F238E27FC236}">
+                <a16:creationId xmlns:a16="http://schemas.microsoft.com/office/drawing/2014/main" id="{952D744E-229E-9680-5FD9-AACFE88AF07F}"/>
+              </a:ext>
+            </a:extLst>
+          </p:cNvPr>
+          <p:cNvSpPr txBox="1"/>
+          <p:nvPr/>
+        </p:nvSpPr>
+        <p:spPr>
+          <a:xfrm>
+            <a:off x="772075" y="2664522"/>
+            <a:ext cx="5495375" cy="3539430"/>
+          </a:xfrm>
+          <a:prstGeom prst="rect">
+            <a:avLst/>
+          </a:prstGeom>
+          <a:solidFill>
+            <a:srgbClr val="76E3FF"/>
+          </a:solidFill>
+        </p:spPr>
+        <p:txBody>
+          <a:bodyPr wrap="square">
+            <a:spAutoFit/>
+          </a:bodyPr>
+          <a:lstStyle/>
+          <a:p>
+            <a:r>
+              <a:rPr lang="en-US" altLang="ko-KR" sz="1400" dirty="0">
+                <a:latin typeface="D2Coding" panose="020B0609020101020101" pitchFamily="49" charset="-127"/>
+                <a:ea typeface="D2Coding" panose="020B0609020101020101" pitchFamily="49" charset="-127"/>
+                <a:cs typeface="맑은 고딕 Semilight" panose="020B0502040204020203" pitchFamily="50" charset="-127"/>
+              </a:rPr>
+              <a:t># Adam</a:t>
+            </a:r>
+            <a:r>
+              <a:rPr lang="ko-KR" altLang="en-US" sz="1400" dirty="0">
+                <a:latin typeface="D2Coding" panose="020B0609020101020101" pitchFamily="49" charset="-127"/>
+                <a:ea typeface="D2Coding" panose="020B0609020101020101" pitchFamily="49" charset="-127"/>
+                <a:cs typeface="맑은 고딕 Semilight" panose="020B0502040204020203" pitchFamily="50" charset="-127"/>
+              </a:rPr>
+              <a:t>의 내부 로직 </a:t>
+            </a:r>
+            <a:r>
+              <a:rPr lang="en-US" altLang="ko-KR" sz="1400" dirty="0">
+                <a:latin typeface="D2Coding" panose="020B0609020101020101" pitchFamily="49" charset="-127"/>
+                <a:ea typeface="D2Coding" panose="020B0609020101020101" pitchFamily="49" charset="-127"/>
+                <a:cs typeface="맑은 고딕 Semilight" panose="020B0502040204020203" pitchFamily="50" charset="-127"/>
+              </a:rPr>
+              <a:t>(</a:t>
+            </a:r>
+            <a:r>
+              <a:rPr lang="ko-KR" altLang="en-US" sz="1400" dirty="0">
+                <a:latin typeface="D2Coding" panose="020B0609020101020101" pitchFamily="49" charset="-127"/>
+                <a:ea typeface="D2Coding" panose="020B0609020101020101" pitchFamily="49" charset="-127"/>
+                <a:cs typeface="맑은 고딕 Semilight" panose="020B0502040204020203" pitchFamily="50" charset="-127"/>
+              </a:rPr>
+              <a:t>개념적 이해</a:t>
+            </a:r>
+            <a:r>
+              <a:rPr lang="en-US" altLang="ko-KR" sz="1400" dirty="0">
+                <a:latin typeface="D2Coding" panose="020B0609020101020101" pitchFamily="49" charset="-127"/>
+                <a:ea typeface="D2Coding" panose="020B0609020101020101" pitchFamily="49" charset="-127"/>
+                <a:cs typeface="맑은 고딕 Semilight" panose="020B0502040204020203" pitchFamily="50" charset="-127"/>
+              </a:rPr>
+              <a:t>)</a:t>
+            </a:r>
+          </a:p>
+          <a:p>
+            <a:r>
+              <a:rPr lang="en-US" altLang="ko-KR" sz="1400" dirty="0">
+                <a:latin typeface="D2Coding" panose="020B0609020101020101" pitchFamily="49" charset="-127"/>
+                <a:ea typeface="D2Coding" panose="020B0609020101020101" pitchFamily="49" charset="-127"/>
+                <a:cs typeface="맑은 고딕 Semilight" panose="020B0502040204020203" pitchFamily="50" charset="-127"/>
+              </a:rPr>
+              <a:t>for epoch in range(epochs):</a:t>
+            </a:r>
+          </a:p>
+          <a:p>
+            <a:r>
+              <a:rPr lang="en-US" altLang="ko-KR" sz="1400" dirty="0">
+                <a:latin typeface="D2Coding" panose="020B0609020101020101" pitchFamily="49" charset="-127"/>
+                <a:ea typeface="D2Coding" panose="020B0609020101020101" pitchFamily="49" charset="-127"/>
+                <a:cs typeface="맑은 고딕 Semilight" panose="020B0502040204020203" pitchFamily="50" charset="-127"/>
+              </a:rPr>
+              <a:t>    for </a:t>
+            </a:r>
+            <a:r>
+              <a:rPr lang="en-US" altLang="ko-KR" sz="1400" dirty="0" err="1">
+                <a:latin typeface="D2Coding" panose="020B0609020101020101" pitchFamily="49" charset="-127"/>
+                <a:ea typeface="D2Coding" panose="020B0609020101020101" pitchFamily="49" charset="-127"/>
+                <a:cs typeface="맑은 고딕 Semilight" panose="020B0502040204020203" pitchFamily="50" charset="-127"/>
+              </a:rPr>
+              <a:t>batch_X</a:t>
+            </a:r>
+            <a:r>
+              <a:rPr lang="en-US" altLang="ko-KR" sz="1400" dirty="0">
+                <a:latin typeface="D2Coding" panose="020B0609020101020101" pitchFamily="49" charset="-127"/>
+                <a:ea typeface="D2Coding" panose="020B0609020101020101" pitchFamily="49" charset="-127"/>
+                <a:cs typeface="맑은 고딕 Semilight" panose="020B0502040204020203" pitchFamily="50" charset="-127"/>
+              </a:rPr>
+              <a:t>, </a:t>
+            </a:r>
+            <a:r>
+              <a:rPr lang="en-US" altLang="ko-KR" sz="1400" dirty="0" err="1">
+                <a:latin typeface="D2Coding" panose="020B0609020101020101" pitchFamily="49" charset="-127"/>
+                <a:ea typeface="D2Coding" panose="020B0609020101020101" pitchFamily="49" charset="-127"/>
+                <a:cs typeface="맑은 고딕 Semilight" panose="020B0502040204020203" pitchFamily="50" charset="-127"/>
+              </a:rPr>
+              <a:t>batch_y</a:t>
+            </a:r>
+            <a:r>
+              <a:rPr lang="en-US" altLang="ko-KR" sz="1400" dirty="0">
+                <a:latin typeface="D2Coding" panose="020B0609020101020101" pitchFamily="49" charset="-127"/>
+                <a:ea typeface="D2Coding" panose="020B0609020101020101" pitchFamily="49" charset="-127"/>
+                <a:cs typeface="맑은 고딕 Semilight" panose="020B0502040204020203" pitchFamily="50" charset="-127"/>
+              </a:rPr>
+              <a:t> in </a:t>
+            </a:r>
+            <a:r>
+              <a:rPr lang="en-US" altLang="ko-KR" sz="1400" dirty="0" err="1">
+                <a:latin typeface="D2Coding" panose="020B0609020101020101" pitchFamily="49" charset="-127"/>
+                <a:ea typeface="D2Coding" panose="020B0609020101020101" pitchFamily="49" charset="-127"/>
+                <a:cs typeface="맑은 고딕 Semilight" panose="020B0502040204020203" pitchFamily="50" charset="-127"/>
+              </a:rPr>
+              <a:t>dataloader</a:t>
+            </a:r>
+            <a:r>
+              <a:rPr lang="en-US" altLang="ko-KR" sz="1400" dirty="0">
+                <a:latin typeface="D2Coding" panose="020B0609020101020101" pitchFamily="49" charset="-127"/>
+                <a:ea typeface="D2Coding" panose="020B0609020101020101" pitchFamily="49" charset="-127"/>
+                <a:cs typeface="맑은 고딕 Semilight" panose="020B0502040204020203" pitchFamily="50" charset="-127"/>
+              </a:rPr>
+              <a:t>:</a:t>
+            </a:r>
+          </a:p>
+          <a:p>
+            <a:r>
+              <a:rPr lang="en-US" altLang="ko-KR" sz="1400" dirty="0">
+                <a:latin typeface="D2Coding" panose="020B0609020101020101" pitchFamily="49" charset="-127"/>
+                <a:ea typeface="D2Coding" panose="020B0609020101020101" pitchFamily="49" charset="-127"/>
+                <a:cs typeface="맑은 고딕 Semilight" panose="020B0502040204020203" pitchFamily="50" charset="-127"/>
+              </a:rPr>
+              <a:t>        # 1. </a:t>
+            </a:r>
+            <a:r>
+              <a:rPr lang="ko-KR" altLang="en-US" sz="1400" dirty="0">
+                <a:latin typeface="D2Coding" panose="020B0609020101020101" pitchFamily="49" charset="-127"/>
+                <a:ea typeface="D2Coding" panose="020B0609020101020101" pitchFamily="49" charset="-127"/>
+                <a:cs typeface="맑은 고딕 Semilight" panose="020B0502040204020203" pitchFamily="50" charset="-127"/>
+              </a:rPr>
+              <a:t>기울기 계산</a:t>
+            </a:r>
+          </a:p>
+          <a:p>
+            <a:r>
+              <a:rPr lang="ko-KR" altLang="en-US" sz="1400" dirty="0">
+                <a:latin typeface="D2Coding" panose="020B0609020101020101" pitchFamily="49" charset="-127"/>
+                <a:ea typeface="D2Coding" panose="020B0609020101020101" pitchFamily="49" charset="-127"/>
+                <a:cs typeface="맑은 고딕 Semilight" panose="020B0502040204020203" pitchFamily="50" charset="-127"/>
+              </a:rPr>
+              <a:t>        </a:t>
+            </a:r>
+            <a:r>
+              <a:rPr lang="en-US" altLang="ko-KR" sz="1400" dirty="0">
+                <a:latin typeface="D2Coding" panose="020B0609020101020101" pitchFamily="49" charset="-127"/>
+                <a:ea typeface="D2Coding" panose="020B0609020101020101" pitchFamily="49" charset="-127"/>
+                <a:cs typeface="맑은 고딕 Semilight" panose="020B0502040204020203" pitchFamily="50" charset="-127"/>
+              </a:rPr>
+              <a:t>gradient = </a:t>
+            </a:r>
+            <a:r>
+              <a:rPr lang="en-US" altLang="ko-KR" sz="1400" dirty="0" err="1">
+                <a:latin typeface="D2Coding" panose="020B0609020101020101" pitchFamily="49" charset="-127"/>
+                <a:ea typeface="D2Coding" panose="020B0609020101020101" pitchFamily="49" charset="-127"/>
+                <a:cs typeface="맑은 고딕 Semilight" panose="020B0502040204020203" pitchFamily="50" charset="-127"/>
+              </a:rPr>
+              <a:t>compute_gradient</a:t>
+            </a:r>
+            <a:r>
+              <a:rPr lang="en-US" altLang="ko-KR" sz="1400" dirty="0">
+                <a:latin typeface="D2Coding" panose="020B0609020101020101" pitchFamily="49" charset="-127"/>
+                <a:ea typeface="D2Coding" panose="020B0609020101020101" pitchFamily="49" charset="-127"/>
+                <a:cs typeface="맑은 고딕 Semilight" panose="020B0502040204020203" pitchFamily="50" charset="-127"/>
+              </a:rPr>
+              <a:t>(</a:t>
+            </a:r>
+            <a:r>
+              <a:rPr lang="en-US" altLang="ko-KR" sz="1400" dirty="0" err="1">
+                <a:latin typeface="D2Coding" panose="020B0609020101020101" pitchFamily="49" charset="-127"/>
+                <a:ea typeface="D2Coding" panose="020B0609020101020101" pitchFamily="49" charset="-127"/>
+                <a:cs typeface="맑은 고딕 Semilight" panose="020B0502040204020203" pitchFamily="50" charset="-127"/>
+              </a:rPr>
+              <a:t>batch_X</a:t>
+            </a:r>
+            <a:r>
+              <a:rPr lang="en-US" altLang="ko-KR" sz="1400" dirty="0">
+                <a:latin typeface="D2Coding" panose="020B0609020101020101" pitchFamily="49" charset="-127"/>
+                <a:ea typeface="D2Coding" panose="020B0609020101020101" pitchFamily="49" charset="-127"/>
+                <a:cs typeface="맑은 고딕 Semilight" panose="020B0502040204020203" pitchFamily="50" charset="-127"/>
+              </a:rPr>
+              <a:t>, </a:t>
+            </a:r>
+            <a:r>
+              <a:rPr lang="en-US" altLang="ko-KR" sz="1400" dirty="0" err="1">
+                <a:latin typeface="D2Coding" panose="020B0609020101020101" pitchFamily="49" charset="-127"/>
+                <a:ea typeface="D2Coding" panose="020B0609020101020101" pitchFamily="49" charset="-127"/>
+                <a:cs typeface="맑은 고딕 Semilight" panose="020B0502040204020203" pitchFamily="50" charset="-127"/>
+              </a:rPr>
+              <a:t>batch_y</a:t>
+            </a:r>
+            <a:r>
+              <a:rPr lang="en-US" altLang="ko-KR" sz="1400" dirty="0">
+                <a:latin typeface="D2Coding" panose="020B0609020101020101" pitchFamily="49" charset="-127"/>
+                <a:ea typeface="D2Coding" panose="020B0609020101020101" pitchFamily="49" charset="-127"/>
+                <a:cs typeface="맑은 고딕 Semilight" panose="020B0502040204020203" pitchFamily="50" charset="-127"/>
+              </a:rPr>
+              <a:t>)</a:t>
+            </a:r>
+          </a:p>
+          <a:p>
+            <a:r>
+              <a:rPr lang="en-US" altLang="ko-KR" sz="1400" dirty="0">
+                <a:latin typeface="D2Coding" panose="020B0609020101020101" pitchFamily="49" charset="-127"/>
+                <a:ea typeface="D2Coding" panose="020B0609020101020101" pitchFamily="49" charset="-127"/>
+                <a:cs typeface="맑은 고딕 Semilight" panose="020B0502040204020203" pitchFamily="50" charset="-127"/>
+              </a:rPr>
+              <a:t>        </a:t>
+            </a:r>
+          </a:p>
+          <a:p>
+            <a:r>
+              <a:rPr lang="en-US" altLang="ko-KR" sz="1400" dirty="0">
+                <a:latin typeface="D2Coding" panose="020B0609020101020101" pitchFamily="49" charset="-127"/>
+                <a:ea typeface="D2Coding" panose="020B0609020101020101" pitchFamily="49" charset="-127"/>
+                <a:cs typeface="맑은 고딕 Semilight" panose="020B0502040204020203" pitchFamily="50" charset="-127"/>
+              </a:rPr>
+              <a:t>        # 2. </a:t>
+            </a:r>
+            <a:r>
+              <a:rPr lang="ko-KR" altLang="en-US" sz="1400" dirty="0">
+                <a:latin typeface="D2Coding" panose="020B0609020101020101" pitchFamily="49" charset="-127"/>
+                <a:ea typeface="D2Coding" panose="020B0609020101020101" pitchFamily="49" charset="-127"/>
+                <a:cs typeface="맑은 고딕 Semilight" panose="020B0502040204020203" pitchFamily="50" charset="-127"/>
+              </a:rPr>
+              <a:t>엔진 </a:t>
+            </a:r>
+            <a:r>
+              <a:rPr lang="en-US" altLang="ko-KR" sz="1400" dirty="0">
+                <a:latin typeface="D2Coding" panose="020B0609020101020101" pitchFamily="49" charset="-127"/>
+                <a:ea typeface="D2Coding" panose="020B0609020101020101" pitchFamily="49" charset="-127"/>
+                <a:cs typeface="맑은 고딕 Semilight" panose="020B0502040204020203" pitchFamily="50" charset="-127"/>
+              </a:rPr>
+              <a:t>1: </a:t>
+            </a:r>
+            <a:r>
+              <a:rPr lang="ko-KR" altLang="en-US" sz="1400" dirty="0">
+                <a:latin typeface="D2Coding" panose="020B0609020101020101" pitchFamily="49" charset="-127"/>
+                <a:ea typeface="D2Coding" panose="020B0609020101020101" pitchFamily="49" charset="-127"/>
+                <a:cs typeface="맑은 고딕 Semilight" panose="020B0502040204020203" pitchFamily="50" charset="-127"/>
+              </a:rPr>
+              <a:t>관성</a:t>
+            </a:r>
+            <a:r>
+              <a:rPr lang="en-US" altLang="ko-KR" sz="1400" dirty="0">
+                <a:latin typeface="D2Coding" panose="020B0609020101020101" pitchFamily="49" charset="-127"/>
+                <a:ea typeface="D2Coding" panose="020B0609020101020101" pitchFamily="49" charset="-127"/>
+                <a:cs typeface="맑은 고딕 Semilight" panose="020B0502040204020203" pitchFamily="50" charset="-127"/>
+              </a:rPr>
+              <a:t>(Momentum) </a:t>
+            </a:r>
+            <a:r>
+              <a:rPr lang="ko-KR" altLang="en-US" sz="1400" dirty="0">
+                <a:latin typeface="D2Coding" panose="020B0609020101020101" pitchFamily="49" charset="-127"/>
+                <a:ea typeface="D2Coding" panose="020B0609020101020101" pitchFamily="49" charset="-127"/>
+                <a:cs typeface="맑은 고딕 Semilight" panose="020B0502040204020203" pitchFamily="50" charset="-127"/>
+              </a:rPr>
+              <a:t>계산 </a:t>
+            </a:r>
+            <a:r>
+              <a:rPr lang="en-US" altLang="ko-KR" sz="1400" dirty="0">
+                <a:latin typeface="D2Coding" panose="020B0609020101020101" pitchFamily="49" charset="-127"/>
+                <a:ea typeface="D2Coding" panose="020B0609020101020101" pitchFamily="49" charset="-127"/>
+                <a:cs typeface="맑은 고딕 Semilight" panose="020B0502040204020203" pitchFamily="50" charset="-127"/>
+              </a:rPr>
+              <a:t>(</a:t>
+            </a:r>
+            <a:r>
+              <a:rPr lang="ko-KR" altLang="en-US" sz="1400" dirty="0">
+                <a:latin typeface="D2Coding" panose="020B0609020101020101" pitchFamily="49" charset="-127"/>
+                <a:ea typeface="D2Coding" panose="020B0609020101020101" pitchFamily="49" charset="-127"/>
+                <a:cs typeface="맑은 고딕 Semilight" panose="020B0502040204020203" pitchFamily="50" charset="-127"/>
+              </a:rPr>
+              <a:t>방향 결정</a:t>
+            </a:r>
+            <a:r>
+              <a:rPr lang="en-US" altLang="ko-KR" sz="1400" dirty="0">
+                <a:latin typeface="D2Coding" panose="020B0609020101020101" pitchFamily="49" charset="-127"/>
+                <a:ea typeface="D2Coding" panose="020B0609020101020101" pitchFamily="49" charset="-127"/>
+                <a:cs typeface="맑은 고딕 Semilight" panose="020B0502040204020203" pitchFamily="50" charset="-127"/>
+              </a:rPr>
+              <a:t>)</a:t>
+            </a:r>
+          </a:p>
+          <a:p>
+            <a:r>
+              <a:rPr lang="en-US" altLang="ko-KR" sz="1400" dirty="0">
+                <a:latin typeface="D2Coding" panose="020B0609020101020101" pitchFamily="49" charset="-127"/>
+                <a:ea typeface="D2Coding" panose="020B0609020101020101" pitchFamily="49" charset="-127"/>
+                <a:cs typeface="맑은 고딕 Semilight" panose="020B0502040204020203" pitchFamily="50" charset="-127"/>
+              </a:rPr>
+              <a:t>        # beta</a:t>
+            </a:r>
+            <a:r>
+              <a:rPr lang="ko-KR" altLang="en-US" sz="1400" dirty="0">
+                <a:latin typeface="D2Coding" panose="020B0609020101020101" pitchFamily="49" charset="-127"/>
+                <a:ea typeface="D2Coding" panose="020B0609020101020101" pitchFamily="49" charset="-127"/>
+                <a:cs typeface="맑은 고딕 Semilight" panose="020B0502040204020203" pitchFamily="50" charset="-127"/>
+              </a:rPr>
+              <a:t> </a:t>
+            </a:r>
+            <a:r>
+              <a:rPr lang="en-US" altLang="ko-KR" sz="1400" dirty="0">
+                <a:latin typeface="D2Coding" panose="020B0609020101020101" pitchFamily="49" charset="-127"/>
+                <a:ea typeface="D2Coding" panose="020B0609020101020101" pitchFamily="49" charset="-127"/>
+                <a:cs typeface="맑은 고딕 Semilight" panose="020B0502040204020203" pitchFamily="50" charset="-127"/>
+              </a:rPr>
+              <a:t>1</a:t>
+            </a:r>
+            <a:r>
+              <a:rPr lang="ko-KR" altLang="en-US" sz="1400" dirty="0">
+                <a:latin typeface="D2Coding" panose="020B0609020101020101" pitchFamily="49" charset="-127"/>
+                <a:ea typeface="D2Coding" panose="020B0609020101020101" pitchFamily="49" charset="-127"/>
+                <a:cs typeface="맑은 고딕 Semilight" panose="020B0502040204020203" pitchFamily="50" charset="-127"/>
+              </a:rPr>
+              <a:t> </a:t>
+            </a:r>
+            <a:r>
+              <a:rPr lang="en-US" altLang="ko-KR" sz="1400" dirty="0">
+                <a:latin typeface="D2Coding" panose="020B0609020101020101" pitchFamily="49" charset="-127"/>
+                <a:ea typeface="D2Coding" panose="020B0609020101020101" pitchFamily="49" charset="-127"/>
+                <a:cs typeface="맑은 고딕 Semilight" panose="020B0502040204020203" pitchFamily="50" charset="-127"/>
+              </a:rPr>
+              <a:t>=</a:t>
+            </a:r>
+            <a:r>
+              <a:rPr lang="ko-KR" altLang="en-US" sz="1400" dirty="0">
+                <a:latin typeface="D2Coding" panose="020B0609020101020101" pitchFamily="49" charset="-127"/>
+                <a:ea typeface="D2Coding" panose="020B0609020101020101" pitchFamily="49" charset="-127"/>
+                <a:cs typeface="맑은 고딕 Semilight" panose="020B0502040204020203" pitchFamily="50" charset="-127"/>
+              </a:rPr>
+              <a:t> </a:t>
+            </a:r>
+            <a:r>
+              <a:rPr lang="ko-KR" altLang="en-US" sz="1400" dirty="0" err="1">
+                <a:latin typeface="D2Coding" panose="020B0609020101020101" pitchFamily="49" charset="-127"/>
+                <a:ea typeface="D2Coding" panose="020B0609020101020101" pitchFamily="49" charset="-127"/>
+                <a:cs typeface="맑은 고딕 Semilight" panose="020B0502040204020203" pitchFamily="50" charset="-127"/>
+              </a:rPr>
+              <a:t>엑세레이터</a:t>
+            </a:r>
+            <a:r>
+              <a:rPr lang="en-US" altLang="ko-KR" sz="1400" dirty="0">
+                <a:latin typeface="D2Coding" panose="020B0609020101020101" pitchFamily="49" charset="-127"/>
+                <a:ea typeface="D2Coding" panose="020B0609020101020101" pitchFamily="49" charset="-127"/>
+                <a:cs typeface="맑은 고딕 Semilight" panose="020B0502040204020203" pitchFamily="50" charset="-127"/>
+              </a:rPr>
+              <a:t>, beta</a:t>
+            </a:r>
+            <a:r>
+              <a:rPr lang="ko-KR" altLang="en-US" sz="1400" dirty="0">
+                <a:latin typeface="D2Coding" panose="020B0609020101020101" pitchFamily="49" charset="-127"/>
+                <a:ea typeface="D2Coding" panose="020B0609020101020101" pitchFamily="49" charset="-127"/>
+                <a:cs typeface="맑은 고딕 Semilight" panose="020B0502040204020203" pitchFamily="50" charset="-127"/>
+              </a:rPr>
+              <a:t> </a:t>
+            </a:r>
+            <a:r>
+              <a:rPr lang="en-US" altLang="ko-KR" sz="1400" dirty="0">
+                <a:latin typeface="D2Coding" panose="020B0609020101020101" pitchFamily="49" charset="-127"/>
+                <a:ea typeface="D2Coding" panose="020B0609020101020101" pitchFamily="49" charset="-127"/>
+                <a:cs typeface="맑은 고딕 Semilight" panose="020B0502040204020203" pitchFamily="50" charset="-127"/>
+              </a:rPr>
+              <a:t>2</a:t>
+            </a:r>
+            <a:r>
+              <a:rPr lang="ko-KR" altLang="en-US" sz="1400" dirty="0">
+                <a:latin typeface="D2Coding" panose="020B0609020101020101" pitchFamily="49" charset="-127"/>
+                <a:ea typeface="D2Coding" panose="020B0609020101020101" pitchFamily="49" charset="-127"/>
+                <a:cs typeface="맑은 고딕 Semilight" panose="020B0502040204020203" pitchFamily="50" charset="-127"/>
+              </a:rPr>
+              <a:t> </a:t>
+            </a:r>
+            <a:r>
+              <a:rPr lang="en-US" altLang="ko-KR" sz="1400" dirty="0">
+                <a:latin typeface="D2Coding" panose="020B0609020101020101" pitchFamily="49" charset="-127"/>
+                <a:ea typeface="D2Coding" panose="020B0609020101020101" pitchFamily="49" charset="-127"/>
+                <a:cs typeface="맑은 고딕 Semilight" panose="020B0502040204020203" pitchFamily="50" charset="-127"/>
+              </a:rPr>
+              <a:t>=</a:t>
+            </a:r>
+            <a:r>
+              <a:rPr lang="ko-KR" altLang="en-US" sz="1400" dirty="0">
+                <a:latin typeface="D2Coding" panose="020B0609020101020101" pitchFamily="49" charset="-127"/>
+                <a:ea typeface="D2Coding" panose="020B0609020101020101" pitchFamily="49" charset="-127"/>
+                <a:cs typeface="맑은 고딕 Semilight" panose="020B0502040204020203" pitchFamily="50" charset="-127"/>
+              </a:rPr>
+              <a:t> 브레이크</a:t>
+            </a:r>
+            <a:endParaRPr lang="en-US" altLang="ko-KR" sz="1400" dirty="0">
+              <a:latin typeface="D2Coding" panose="020B0609020101020101" pitchFamily="49" charset="-127"/>
+              <a:ea typeface="D2Coding" panose="020B0609020101020101" pitchFamily="49" charset="-127"/>
+              <a:cs typeface="맑은 고딕 Semilight" panose="020B0502040204020203" pitchFamily="50" charset="-127"/>
+            </a:endParaRPr>
+          </a:p>
+          <a:p>
+            <a:r>
+              <a:rPr lang="en-US" altLang="ko-KR" sz="1400" dirty="0">
+                <a:latin typeface="D2Coding" panose="020B0609020101020101" pitchFamily="49" charset="-127"/>
+                <a:ea typeface="D2Coding" panose="020B0609020101020101" pitchFamily="49" charset="-127"/>
+                <a:cs typeface="맑은 고딕 Semilight" panose="020B0502040204020203" pitchFamily="50" charset="-127"/>
+              </a:rPr>
+              <a:t>        m = beta1 * m + (1 - beta1) * gradient</a:t>
+            </a:r>
+          </a:p>
+          <a:p>
+            <a:r>
+              <a:rPr lang="en-US" altLang="ko-KR" sz="1400" dirty="0">
+                <a:latin typeface="D2Coding" panose="020B0609020101020101" pitchFamily="49" charset="-127"/>
+                <a:ea typeface="D2Coding" panose="020B0609020101020101" pitchFamily="49" charset="-127"/>
+                <a:cs typeface="맑은 고딕 Semilight" panose="020B0502040204020203" pitchFamily="50" charset="-127"/>
+              </a:rPr>
+              <a:t>        </a:t>
+            </a:r>
+          </a:p>
+          <a:p>
+            <a:r>
+              <a:rPr lang="en-US" altLang="ko-KR" sz="1400" dirty="0">
+                <a:latin typeface="D2Coding" panose="020B0609020101020101" pitchFamily="49" charset="-127"/>
+                <a:ea typeface="D2Coding" panose="020B0609020101020101" pitchFamily="49" charset="-127"/>
+                <a:cs typeface="맑은 고딕 Semilight" panose="020B0502040204020203" pitchFamily="50" charset="-127"/>
+              </a:rPr>
+              <a:t>        # 3. </a:t>
+            </a:r>
+            <a:r>
+              <a:rPr lang="ko-KR" altLang="en-US" sz="1400" dirty="0">
+                <a:latin typeface="D2Coding" panose="020B0609020101020101" pitchFamily="49" charset="-127"/>
+                <a:ea typeface="D2Coding" panose="020B0609020101020101" pitchFamily="49" charset="-127"/>
+                <a:cs typeface="맑은 고딕 Semilight" panose="020B0502040204020203" pitchFamily="50" charset="-127"/>
+              </a:rPr>
+              <a:t>엔진 </a:t>
+            </a:r>
+            <a:r>
+              <a:rPr lang="en-US" altLang="ko-KR" sz="1400" dirty="0">
+                <a:latin typeface="D2Coding" panose="020B0609020101020101" pitchFamily="49" charset="-127"/>
+                <a:ea typeface="D2Coding" panose="020B0609020101020101" pitchFamily="49" charset="-127"/>
+                <a:cs typeface="맑은 고딕 Semilight" panose="020B0502040204020203" pitchFamily="50" charset="-127"/>
+              </a:rPr>
+              <a:t>2: </a:t>
+            </a:r>
+            <a:r>
+              <a:rPr lang="ko-KR" altLang="en-US" sz="1400" dirty="0">
+                <a:latin typeface="D2Coding" panose="020B0609020101020101" pitchFamily="49" charset="-127"/>
+                <a:ea typeface="D2Coding" panose="020B0609020101020101" pitchFamily="49" charset="-127"/>
+                <a:cs typeface="맑은 고딕 Semilight" panose="020B0502040204020203" pitchFamily="50" charset="-127"/>
+              </a:rPr>
+              <a:t>보폭</a:t>
+            </a:r>
+            <a:r>
+              <a:rPr lang="en-US" altLang="ko-KR" sz="1400" dirty="0">
+                <a:latin typeface="D2Coding" panose="020B0609020101020101" pitchFamily="49" charset="-127"/>
+                <a:ea typeface="D2Coding" panose="020B0609020101020101" pitchFamily="49" charset="-127"/>
+                <a:cs typeface="맑은 고딕 Semilight" panose="020B0502040204020203" pitchFamily="50" charset="-127"/>
+              </a:rPr>
+              <a:t>(</a:t>
+            </a:r>
+            <a:r>
+              <a:rPr lang="en-US" altLang="ko-KR" sz="1400" dirty="0" err="1">
+                <a:latin typeface="D2Coding" panose="020B0609020101020101" pitchFamily="49" charset="-127"/>
+                <a:ea typeface="D2Coding" panose="020B0609020101020101" pitchFamily="49" charset="-127"/>
+                <a:cs typeface="맑은 고딕 Semilight" panose="020B0502040204020203" pitchFamily="50" charset="-127"/>
+              </a:rPr>
+              <a:t>RMSProp</a:t>
+            </a:r>
+            <a:r>
+              <a:rPr lang="en-US" altLang="ko-KR" sz="1400" dirty="0">
+                <a:latin typeface="D2Coding" panose="020B0609020101020101" pitchFamily="49" charset="-127"/>
+                <a:ea typeface="D2Coding" panose="020B0609020101020101" pitchFamily="49" charset="-127"/>
+                <a:cs typeface="맑은 고딕 Semilight" panose="020B0502040204020203" pitchFamily="50" charset="-127"/>
+              </a:rPr>
+              <a:t>) </a:t>
+            </a:r>
+            <a:r>
+              <a:rPr lang="ko-KR" altLang="en-US" sz="1400" dirty="0">
+                <a:latin typeface="D2Coding" panose="020B0609020101020101" pitchFamily="49" charset="-127"/>
+                <a:ea typeface="D2Coding" panose="020B0609020101020101" pitchFamily="49" charset="-127"/>
+                <a:cs typeface="맑은 고딕 Semilight" panose="020B0502040204020203" pitchFamily="50" charset="-127"/>
+              </a:rPr>
+              <a:t>조절 </a:t>
+            </a:r>
+            <a:r>
+              <a:rPr lang="en-US" altLang="ko-KR" sz="1400" dirty="0">
+                <a:latin typeface="D2Coding" panose="020B0609020101020101" pitchFamily="49" charset="-127"/>
+                <a:ea typeface="D2Coding" panose="020B0609020101020101" pitchFamily="49" charset="-127"/>
+                <a:cs typeface="맑은 고딕 Semilight" panose="020B0502040204020203" pitchFamily="50" charset="-127"/>
+              </a:rPr>
+              <a:t>(</a:t>
+            </a:r>
+            <a:r>
+              <a:rPr lang="ko-KR" altLang="en-US" sz="1400" dirty="0">
+                <a:latin typeface="D2Coding" panose="020B0609020101020101" pitchFamily="49" charset="-127"/>
+                <a:ea typeface="D2Coding" panose="020B0609020101020101" pitchFamily="49" charset="-127"/>
+                <a:cs typeface="맑은 고딕 Semilight" panose="020B0502040204020203" pitchFamily="50" charset="-127"/>
+              </a:rPr>
+              <a:t>보폭 결정</a:t>
+            </a:r>
+            <a:r>
+              <a:rPr lang="en-US" altLang="ko-KR" sz="1400" dirty="0">
+                <a:latin typeface="D2Coding" panose="020B0609020101020101" pitchFamily="49" charset="-127"/>
+                <a:ea typeface="D2Coding" panose="020B0609020101020101" pitchFamily="49" charset="-127"/>
+                <a:cs typeface="맑은 고딕 Semilight" panose="020B0502040204020203" pitchFamily="50" charset="-127"/>
+              </a:rPr>
+              <a:t>)</a:t>
+            </a:r>
+          </a:p>
+          <a:p>
+            <a:r>
+              <a:rPr lang="en-US" altLang="ko-KR" sz="1400" dirty="0">
+                <a:latin typeface="D2Coding" panose="020B0609020101020101" pitchFamily="49" charset="-127"/>
+                <a:ea typeface="D2Coding" panose="020B0609020101020101" pitchFamily="49" charset="-127"/>
+                <a:cs typeface="맑은 고딕 Semilight" panose="020B0502040204020203" pitchFamily="50" charset="-127"/>
+              </a:rPr>
+              <a:t>        v = beta2 * v + (1 - beta2) * (gradient**2)</a:t>
+            </a:r>
+          </a:p>
+          <a:p>
+            <a:r>
+              <a:rPr lang="en-US" altLang="ko-KR" sz="1400" dirty="0">
+                <a:latin typeface="D2Coding" panose="020B0609020101020101" pitchFamily="49" charset="-127"/>
+                <a:ea typeface="D2Coding" panose="020B0609020101020101" pitchFamily="49" charset="-127"/>
+                <a:cs typeface="맑은 고딕 Semilight" panose="020B0502040204020203" pitchFamily="50" charset="-127"/>
+              </a:rPr>
+              <a:t>        </a:t>
+            </a:r>
+          </a:p>
+          <a:p>
+            <a:r>
+              <a:rPr lang="en-US" altLang="ko-KR" sz="1400" dirty="0">
+                <a:latin typeface="D2Coding" panose="020B0609020101020101" pitchFamily="49" charset="-127"/>
+                <a:ea typeface="D2Coding" panose="020B0609020101020101" pitchFamily="49" charset="-127"/>
+                <a:cs typeface="맑은 고딕 Semilight" panose="020B0502040204020203" pitchFamily="50" charset="-127"/>
+              </a:rPr>
+              <a:t>        # 4. </a:t>
+            </a:r>
+            <a:r>
+              <a:rPr lang="ko-KR" altLang="en-US" sz="1400" dirty="0">
+                <a:latin typeface="D2Coding" panose="020B0609020101020101" pitchFamily="49" charset="-127"/>
+                <a:ea typeface="D2Coding" panose="020B0609020101020101" pitchFamily="49" charset="-127"/>
+                <a:cs typeface="맑은 고딕 Semilight" panose="020B0502040204020203" pitchFamily="50" charset="-127"/>
+              </a:rPr>
+              <a:t>파라미터 업데이트</a:t>
+            </a:r>
+          </a:p>
+          <a:p>
+            <a:r>
+              <a:rPr lang="ko-KR" altLang="en-US" sz="1400" dirty="0">
+                <a:latin typeface="D2Coding" panose="020B0609020101020101" pitchFamily="49" charset="-127"/>
+                <a:ea typeface="D2Coding" panose="020B0609020101020101" pitchFamily="49" charset="-127"/>
+                <a:cs typeface="맑은 고딕 Semilight" panose="020B0502040204020203" pitchFamily="50" charset="-127"/>
+              </a:rPr>
+              <a:t>        </a:t>
+            </a:r>
+            <a:r>
+              <a:rPr lang="en-US" altLang="ko-KR" sz="1400" dirty="0">
+                <a:latin typeface="D2Coding" panose="020B0609020101020101" pitchFamily="49" charset="-127"/>
+                <a:ea typeface="D2Coding" panose="020B0609020101020101" pitchFamily="49" charset="-127"/>
+                <a:cs typeface="맑은 고딕 Semilight" panose="020B0502040204020203" pitchFamily="50" charset="-127"/>
+              </a:rPr>
+              <a:t># </a:t>
+            </a:r>
+            <a:r>
+              <a:rPr lang="ko-KR" altLang="en-US" sz="1400" dirty="0">
+                <a:latin typeface="D2Coding" panose="020B0609020101020101" pitchFamily="49" charset="-127"/>
+                <a:ea typeface="D2Coding" panose="020B0609020101020101" pitchFamily="49" charset="-127"/>
+                <a:cs typeface="맑은 고딕 Semilight" panose="020B0502040204020203" pitchFamily="50" charset="-127"/>
+              </a:rPr>
+              <a:t>방향</a:t>
+            </a:r>
+            <a:r>
+              <a:rPr lang="en-US" altLang="ko-KR" sz="1400" dirty="0">
+                <a:latin typeface="D2Coding" panose="020B0609020101020101" pitchFamily="49" charset="-127"/>
+                <a:ea typeface="D2Coding" panose="020B0609020101020101" pitchFamily="49" charset="-127"/>
+                <a:cs typeface="맑은 고딕 Semilight" panose="020B0502040204020203" pitchFamily="50" charset="-127"/>
+              </a:rPr>
+              <a:t>(m)</a:t>
+            </a:r>
+            <a:r>
+              <a:rPr lang="ko-KR" altLang="en-US" sz="1400" dirty="0">
+                <a:latin typeface="D2Coding" panose="020B0609020101020101" pitchFamily="49" charset="-127"/>
+                <a:ea typeface="D2Coding" panose="020B0609020101020101" pitchFamily="49" charset="-127"/>
+                <a:cs typeface="맑은 고딕 Semilight" panose="020B0502040204020203" pitchFamily="50" charset="-127"/>
+              </a:rPr>
+              <a:t>을 보폭조절장치</a:t>
+            </a:r>
+            <a:r>
+              <a:rPr lang="en-US" altLang="ko-KR" sz="1400" dirty="0">
+                <a:latin typeface="D2Coding" panose="020B0609020101020101" pitchFamily="49" charset="-127"/>
+                <a:ea typeface="D2Coding" panose="020B0609020101020101" pitchFamily="49" charset="-127"/>
+                <a:cs typeface="맑은 고딕 Semilight" panose="020B0502040204020203" pitchFamily="50" charset="-127"/>
+              </a:rPr>
+              <a:t>(root v)</a:t>
+            </a:r>
+            <a:r>
+              <a:rPr lang="ko-KR" altLang="en-US" sz="1400" dirty="0">
+                <a:latin typeface="D2Coding" panose="020B0609020101020101" pitchFamily="49" charset="-127"/>
+                <a:ea typeface="D2Coding" panose="020B0609020101020101" pitchFamily="49" charset="-127"/>
+                <a:cs typeface="맑은 고딕 Semilight" panose="020B0502040204020203" pitchFamily="50" charset="-127"/>
+              </a:rPr>
+              <a:t>로 효율적으로 이동</a:t>
+            </a:r>
+          </a:p>
+          <a:p>
+            <a:r>
+              <a:rPr lang="ko-KR" altLang="en-US" sz="1400" dirty="0">
+                <a:latin typeface="D2Coding" panose="020B0609020101020101" pitchFamily="49" charset="-127"/>
+                <a:ea typeface="D2Coding" panose="020B0609020101020101" pitchFamily="49" charset="-127"/>
+                <a:cs typeface="맑은 고딕 Semilight" panose="020B0502040204020203" pitchFamily="50" charset="-127"/>
+              </a:rPr>
+              <a:t>        </a:t>
+            </a:r>
+            <a:r>
+              <a:rPr lang="en-US" altLang="ko-KR" sz="1400" dirty="0">
+                <a:latin typeface="D2Coding" panose="020B0609020101020101" pitchFamily="49" charset="-127"/>
+                <a:ea typeface="D2Coding" panose="020B0609020101020101" pitchFamily="49" charset="-127"/>
+                <a:cs typeface="맑은 고딕 Semilight" panose="020B0502040204020203" pitchFamily="50" charset="-127"/>
+              </a:rPr>
+              <a:t>W -= </a:t>
+            </a:r>
+            <a:r>
+              <a:rPr lang="en-US" altLang="ko-KR" sz="1400" dirty="0" err="1">
+                <a:latin typeface="D2Coding" panose="020B0609020101020101" pitchFamily="49" charset="-127"/>
+                <a:ea typeface="D2Coding" panose="020B0609020101020101" pitchFamily="49" charset="-127"/>
+                <a:cs typeface="맑은 고딕 Semilight" panose="020B0502040204020203" pitchFamily="50" charset="-127"/>
+              </a:rPr>
+              <a:t>learning_rate</a:t>
+            </a:r>
+            <a:r>
+              <a:rPr lang="en-US" altLang="ko-KR" sz="1400" dirty="0">
+                <a:latin typeface="D2Coding" panose="020B0609020101020101" pitchFamily="49" charset="-127"/>
+                <a:ea typeface="D2Coding" panose="020B0609020101020101" pitchFamily="49" charset="-127"/>
+                <a:cs typeface="맑은 고딕 Semilight" panose="020B0502040204020203" pitchFamily="50" charset="-127"/>
+              </a:rPr>
+              <a:t> * m / (sqrt(v) + epsilon)</a:t>
+            </a:r>
+            <a:endParaRPr lang="ko-KR" altLang="en-US" sz="1400" dirty="0">
+              <a:latin typeface="D2Coding" panose="020B0609020101020101" pitchFamily="49" charset="-127"/>
+              <a:ea typeface="D2Coding" panose="020B0609020101020101" pitchFamily="49" charset="-127"/>
+              <a:cs typeface="맑은 고딕 Semilight" panose="020B0502040204020203" pitchFamily="50" charset="-127"/>
+            </a:endParaRPr>
+          </a:p>
+        </p:txBody>
+      </p:sp>
+      <p:sp>
+        <p:nvSpPr>
+          <p:cNvPr id="6" name="TextBox 5">
+            <a:extLst>
+              <a:ext uri="{FF2B5EF4-FFF2-40B4-BE49-F238E27FC236}">
+                <a16:creationId xmlns:a16="http://schemas.microsoft.com/office/drawing/2014/main" id="{DFE137D4-D843-BF4D-CE09-019D168C2A21}"/>
+              </a:ext>
+            </a:extLst>
+          </p:cNvPr>
+          <p:cNvSpPr txBox="1"/>
+          <p:nvPr/>
+        </p:nvSpPr>
+        <p:spPr>
+          <a:xfrm>
+            <a:off x="6362700" y="2664522"/>
+            <a:ext cx="5410199" cy="705642"/>
+          </a:xfrm>
+          <a:prstGeom prst="rect">
+            <a:avLst/>
+          </a:prstGeom>
+          <a:solidFill>
+            <a:srgbClr val="76E3FF"/>
+          </a:solidFill>
+        </p:spPr>
+        <p:txBody>
+          <a:bodyPr wrap="square">
+            <a:spAutoFit/>
+          </a:bodyPr>
+          <a:lstStyle/>
+          <a:p>
+            <a:pPr>
+              <a:lnSpc>
+                <a:spcPct val="150000"/>
+              </a:lnSpc>
+            </a:pPr>
+            <a:r>
+              <a:rPr lang="en-US" altLang="ko-KR" sz="1400" dirty="0">
+                <a:latin typeface="D2Coding" panose="020B0609020101020101" pitchFamily="49" charset="-127"/>
+                <a:ea typeface="D2Coding" panose="020B0609020101020101" pitchFamily="49" charset="-127"/>
+                <a:cs typeface="맑은 고딕 Semilight" panose="020B0502040204020203" pitchFamily="50" charset="-127"/>
+              </a:rPr>
+              <a:t># SGD </a:t>
+            </a:r>
+            <a:r>
+              <a:rPr lang="ko-KR" altLang="en-US" sz="1400" dirty="0">
+                <a:latin typeface="D2Coding" panose="020B0609020101020101" pitchFamily="49" charset="-127"/>
+                <a:ea typeface="D2Coding" panose="020B0609020101020101" pitchFamily="49" charset="-127"/>
+                <a:cs typeface="맑은 고딕 Semilight" panose="020B0502040204020203" pitchFamily="50" charset="-127"/>
+              </a:rPr>
+              <a:t>대신 </a:t>
+            </a:r>
+            <a:r>
+              <a:rPr lang="en-US" altLang="ko-KR" sz="1400" dirty="0">
+                <a:latin typeface="D2Coding" panose="020B0609020101020101" pitchFamily="49" charset="-127"/>
+                <a:ea typeface="D2Coding" panose="020B0609020101020101" pitchFamily="49" charset="-127"/>
+                <a:cs typeface="맑은 고딕 Semilight" panose="020B0502040204020203" pitchFamily="50" charset="-127"/>
+              </a:rPr>
+              <a:t>Adam </a:t>
+            </a:r>
+            <a:r>
+              <a:rPr lang="ko-KR" altLang="en-US" sz="1400" dirty="0">
+                <a:latin typeface="D2Coding" panose="020B0609020101020101" pitchFamily="49" charset="-127"/>
+                <a:ea typeface="D2Coding" panose="020B0609020101020101" pitchFamily="49" charset="-127"/>
+                <a:cs typeface="맑은 고딕 Semilight" panose="020B0502040204020203" pitchFamily="50" charset="-127"/>
+              </a:rPr>
+              <a:t>사용 </a:t>
+            </a:r>
+            <a:endParaRPr lang="en-US" altLang="ko-KR" sz="1400" dirty="0">
+              <a:latin typeface="D2Coding" panose="020B0609020101020101" pitchFamily="49" charset="-127"/>
+              <a:ea typeface="D2Coding" panose="020B0609020101020101" pitchFamily="49" charset="-127"/>
+              <a:cs typeface="맑은 고딕 Semilight" panose="020B0502040204020203" pitchFamily="50" charset="-127"/>
+            </a:endParaRPr>
+          </a:p>
+          <a:p>
+            <a:pPr>
+              <a:lnSpc>
+                <a:spcPct val="150000"/>
+              </a:lnSpc>
+            </a:pPr>
+            <a:r>
+              <a:rPr lang="en-US" altLang="ko-KR" sz="1400" dirty="0">
+                <a:latin typeface="D2Coding" panose="020B0609020101020101" pitchFamily="49" charset="-127"/>
+                <a:ea typeface="D2Coding" panose="020B0609020101020101" pitchFamily="49" charset="-127"/>
+                <a:cs typeface="맑은 고딕 Semilight" panose="020B0502040204020203" pitchFamily="50" charset="-127"/>
+              </a:rPr>
+              <a:t>optimizer = </a:t>
+            </a:r>
+            <a:r>
+              <a:rPr lang="en-US" altLang="ko-KR" sz="1400" dirty="0" err="1">
+                <a:latin typeface="D2Coding" panose="020B0609020101020101" pitchFamily="49" charset="-127"/>
+                <a:ea typeface="D2Coding" panose="020B0609020101020101" pitchFamily="49" charset="-127"/>
+                <a:cs typeface="맑은 고딕 Semilight" panose="020B0502040204020203" pitchFamily="50" charset="-127"/>
+              </a:rPr>
+              <a:t>torch.optim.Adam</a:t>
+            </a:r>
+            <a:r>
+              <a:rPr lang="en-US" altLang="ko-KR" sz="1400" dirty="0">
+                <a:latin typeface="D2Coding" panose="020B0609020101020101" pitchFamily="49" charset="-127"/>
+                <a:ea typeface="D2Coding" panose="020B0609020101020101" pitchFamily="49" charset="-127"/>
+                <a:cs typeface="맑은 고딕 Semilight" panose="020B0502040204020203" pitchFamily="50" charset="-127"/>
+              </a:rPr>
+              <a:t>(</a:t>
+            </a:r>
+            <a:r>
+              <a:rPr lang="en-US" altLang="ko-KR" sz="1400" dirty="0" err="1">
+                <a:latin typeface="D2Coding" panose="020B0609020101020101" pitchFamily="49" charset="-127"/>
+                <a:ea typeface="D2Coding" panose="020B0609020101020101" pitchFamily="49" charset="-127"/>
+                <a:cs typeface="맑은 고딕 Semilight" panose="020B0502040204020203" pitchFamily="50" charset="-127"/>
+              </a:rPr>
+              <a:t>model.parameters</a:t>
+            </a:r>
+            <a:r>
+              <a:rPr lang="en-US" altLang="ko-KR" sz="1400" dirty="0">
+                <a:latin typeface="D2Coding" panose="020B0609020101020101" pitchFamily="49" charset="-127"/>
+                <a:ea typeface="D2Coding" panose="020B0609020101020101" pitchFamily="49" charset="-127"/>
+                <a:cs typeface="맑은 고딕 Semilight" panose="020B0502040204020203" pitchFamily="50" charset="-127"/>
+              </a:rPr>
+              <a:t>(), </a:t>
+            </a:r>
+            <a:r>
+              <a:rPr lang="en-US" altLang="ko-KR" sz="1400" dirty="0" err="1">
+                <a:latin typeface="D2Coding" panose="020B0609020101020101" pitchFamily="49" charset="-127"/>
+                <a:ea typeface="D2Coding" panose="020B0609020101020101" pitchFamily="49" charset="-127"/>
+                <a:cs typeface="맑은 고딕 Semilight" panose="020B0502040204020203" pitchFamily="50" charset="-127"/>
+              </a:rPr>
+              <a:t>lr</a:t>
+            </a:r>
+            <a:r>
+              <a:rPr lang="en-US" altLang="ko-KR" sz="1400" dirty="0">
+                <a:latin typeface="D2Coding" panose="020B0609020101020101" pitchFamily="49" charset="-127"/>
+                <a:ea typeface="D2Coding" panose="020B0609020101020101" pitchFamily="49" charset="-127"/>
+                <a:cs typeface="맑은 고딕 Semilight" panose="020B0502040204020203" pitchFamily="50" charset="-127"/>
+              </a:rPr>
+              <a:t>=0.001)</a:t>
+            </a:r>
+            <a:endParaRPr lang="ko-KR" altLang="en-US" sz="1400" dirty="0">
+              <a:latin typeface="D2Coding" panose="020B0609020101020101" pitchFamily="49" charset="-127"/>
+              <a:ea typeface="D2Coding" panose="020B0609020101020101" pitchFamily="49" charset="-127"/>
+              <a:cs typeface="맑은 고딕 Semilight" panose="020B0502040204020203" pitchFamily="50" charset="-127"/>
+            </a:endParaRPr>
+          </a:p>
+        </p:txBody>
+      </p:sp>
+    </p:spTree>
+    <p:extLst>
+      <p:ext uri="{BB962C8B-B14F-4D97-AF65-F5344CB8AC3E}">
+        <p14:creationId xmlns:p14="http://schemas.microsoft.com/office/powerpoint/2010/main" val="1007565770"/>
+      </p:ext>
+    </p:extLst>
+  </p:cSld>
+  <p:clrMapOvr>
+    <a:masterClrMapping/>
+  </p:clrMapOvr>
+  <mc:AlternateContent xmlns:mc="http://schemas.openxmlformats.org/markup-compatibility/2006" xmlns:p14="http://schemas.microsoft.com/office/powerpoint/2010/main">
+    <mc:Choice Requires="p14">
+      <p:transition p14:dur="10"/>
+    </mc:Choice>
+    <mc:Fallback xmlns="">
+      <p:transition/>
+    </mc:Fallback>
+  </mc:AlternateContent>
+</p:sld>
+</file>
+
+<file path=ppt/slides/slide12.xml><?xml version="1.0" encoding="utf-8"?>
+<p:sld xmlns:a="http://schemas.openxmlformats.org/drawingml/2006/main" xmlns:r="http://schemas.openxmlformats.org/officeDocument/2006/relationships" xmlns:p="http://schemas.openxmlformats.org/presentationml/2006/main">
+  <p:cSld>
+    <p:spTree>
+      <p:nvGrpSpPr>
+        <p:cNvPr id="1" name="">
+          <a:extLst>
+            <a:ext uri="{FF2B5EF4-FFF2-40B4-BE49-F238E27FC236}">
               <a16:creationId xmlns:a16="http://schemas.microsoft.com/office/drawing/2014/main" id="{B9317C1F-C47D-3DBA-F1A6-060FC3415377}"/>
             </a:ext>
           </a:extLst>
@@ -4933,7 +7439,7 @@
             <a:fld id="{9860EDB8-5305-433F-BE41-D7A86D811DB3}" type="slidenum">
               <a:rPr lang="en-US" altLang="ko-KR" noProof="0" smtClean="0"/>
               <a:pPr/>
-              <a:t>10</a:t>
+              <a:t>12</a:t>
             </a:fld>
             <a:endParaRPr lang="ko-KR" altLang="en-US" noProof="0"/>
           </a:p>
@@ -5227,7 +7733,7 @@
 </p:sld>
 </file>
 
-<file path=ppt/slides/slide11.xml><?xml version="1.0" encoding="utf-8"?>
+<file path=ppt/slides/slide13.xml><?xml version="1.0" encoding="utf-8"?>
 <p:sld xmlns:a="http://schemas.openxmlformats.org/drawingml/2006/main" xmlns:r="http://schemas.openxmlformats.org/officeDocument/2006/relationships" xmlns:p="http://schemas.openxmlformats.org/presentationml/2006/main">
   <p:cSld>
     <p:spTree>
@@ -5274,7 +7780,7 @@
             <a:fld id="{9860EDB8-5305-433F-BE41-D7A86D811DB3}" type="slidenum">
               <a:rPr lang="en-US" altLang="ko-KR" noProof="0" smtClean="0"/>
               <a:pPr/>
-              <a:t>11</a:t>
+              <a:t>13</a:t>
             </a:fld>
             <a:endParaRPr lang="ko-KR" altLang="en-US" noProof="0"/>
           </a:p>
@@ -5392,7 +7898,7 @@
 </p:sld>
 </file>
 
-<file path=ppt/slides/slide12.xml><?xml version="1.0" encoding="utf-8"?>
+<file path=ppt/slides/slide14.xml><?xml version="1.0" encoding="utf-8"?>
 <p:sld xmlns:a="http://schemas.openxmlformats.org/drawingml/2006/main" xmlns:r="http://schemas.openxmlformats.org/officeDocument/2006/relationships" xmlns:p="http://schemas.openxmlformats.org/presentationml/2006/main">
   <p:cSld>
     <p:spTree>
@@ -5439,7 +7945,7 @@
             <a:fld id="{9860EDB8-5305-433F-BE41-D7A86D811DB3}" type="slidenum">
               <a:rPr lang="en-US" altLang="ko-KR" noProof="0" smtClean="0"/>
               <a:pPr/>
-              <a:t>12</a:t>
+              <a:t>14</a:t>
             </a:fld>
             <a:endParaRPr lang="ko-KR" altLang="en-US" noProof="0"/>
           </a:p>
@@ -5663,7 +8169,432 @@
 </p:sld>
 </file>
 
-<file path=ppt/slides/slide13.xml><?xml version="1.0" encoding="utf-8"?>
+<file path=ppt/slides/slide15.xml><?xml version="1.0" encoding="utf-8"?>
+<p:sld xmlns:a="http://schemas.openxmlformats.org/drawingml/2006/main" xmlns:r="http://schemas.openxmlformats.org/officeDocument/2006/relationships" xmlns:p="http://schemas.openxmlformats.org/presentationml/2006/main">
+  <p:cSld>
+    <p:spTree>
+      <p:nvGrpSpPr>
+        <p:cNvPr id="1" name="">
+          <a:extLst>
+            <a:ext uri="{FF2B5EF4-FFF2-40B4-BE49-F238E27FC236}">
+              <a16:creationId xmlns:a16="http://schemas.microsoft.com/office/drawing/2014/main" id="{D13EE4A1-01E7-F1CE-F5D5-5CA1CCA3CDF8}"/>
+            </a:ext>
+          </a:extLst>
+        </p:cNvPr>
+        <p:cNvGrpSpPr/>
+        <p:nvPr/>
+      </p:nvGrpSpPr>
+      <p:grpSpPr>
+        <a:xfrm>
+          <a:off x="0" y="0"/>
+          <a:ext cx="0" cy="0"/>
+          <a:chOff x="0" y="0"/>
+          <a:chExt cx="0" cy="0"/>
+        </a:xfrm>
+      </p:grpSpPr>
+      <p:sp>
+        <p:nvSpPr>
+          <p:cNvPr id="2" name="직사각형 1">
+            <a:extLst>
+              <a:ext uri="{FF2B5EF4-FFF2-40B4-BE49-F238E27FC236}">
+                <a16:creationId xmlns:a16="http://schemas.microsoft.com/office/drawing/2014/main" id="{3003D61B-9A4F-C715-04D8-2CDAF2DB8811}"/>
+              </a:ext>
+            </a:extLst>
+          </p:cNvPr>
+          <p:cNvSpPr/>
+          <p:nvPr/>
+        </p:nvSpPr>
+        <p:spPr>
+          <a:xfrm>
+            <a:off x="1571625" y="4133851"/>
+            <a:ext cx="7524750" cy="457200"/>
+          </a:xfrm>
+          <a:prstGeom prst="rect">
+            <a:avLst/>
+          </a:prstGeom>
+          <a:solidFill>
+            <a:schemeClr val="bg1">
+              <a:lumMod val="75000"/>
+            </a:schemeClr>
+          </a:solidFill>
+          <a:ln>
+            <a:noFill/>
+          </a:ln>
+        </p:spPr>
+        <p:style>
+          <a:lnRef idx="2">
+            <a:schemeClr val="accent1">
+              <a:shade val="15000"/>
+            </a:schemeClr>
+          </a:lnRef>
+          <a:fillRef idx="1">
+            <a:schemeClr val="accent1"/>
+          </a:fillRef>
+          <a:effectRef idx="0">
+            <a:schemeClr val="accent1"/>
+          </a:effectRef>
+          <a:fontRef idx="minor">
+            <a:schemeClr val="lt1"/>
+          </a:fontRef>
+        </p:style>
+        <p:txBody>
+          <a:bodyPr rtlCol="0" anchor="ctr"/>
+          <a:lstStyle/>
+          <a:p>
+            <a:pPr algn="ctr"/>
+            <a:endParaRPr lang="ko-KR" altLang="en-US" dirty="0"/>
+          </a:p>
+        </p:txBody>
+      </p:sp>
+      <p:sp>
+        <p:nvSpPr>
+          <p:cNvPr id="8" name="제목 7">
+            <a:extLst>
+              <a:ext uri="{FF2B5EF4-FFF2-40B4-BE49-F238E27FC236}">
+                <a16:creationId xmlns:a16="http://schemas.microsoft.com/office/drawing/2014/main" id="{3702EE9B-FBB7-DB48-45B1-2C8983A81441}"/>
+              </a:ext>
+            </a:extLst>
+          </p:cNvPr>
+          <p:cNvSpPr>
+            <a:spLocks noGrp="1"/>
+          </p:cNvSpPr>
+          <p:nvPr>
+            <p:ph type="title"/>
+          </p:nvPr>
+        </p:nvSpPr>
+        <p:spPr>
+          <a:xfrm>
+            <a:off x="521207" y="448056"/>
+            <a:ext cx="8135613" cy="640080"/>
+          </a:xfrm>
+        </p:spPr>
+        <p:txBody>
+          <a:bodyPr rtlCol="0">
+            <a:noAutofit/>
+          </a:bodyPr>
+          <a:lstStyle/>
+          <a:p>
+            <a:pPr rtl="0"/>
+            <a:r>
+              <a:rPr lang="en-US" altLang="ko-KR" dirty="0">
+                <a:solidFill>
+                  <a:schemeClr val="tx1"/>
+                </a:solidFill>
+                <a:cs typeface="Segoe UI Light" panose="020B0502040204020203" pitchFamily="34" charset="0"/>
+              </a:rPr>
+              <a:t>Contents</a:t>
+            </a:r>
+            <a:endParaRPr lang="ko-KR" altLang="en-US" dirty="0">
+              <a:solidFill>
+                <a:schemeClr val="tx1"/>
+              </a:solidFill>
+              <a:cs typeface="Segoe UI Light" panose="020B0502040204020203" pitchFamily="34" charset="0"/>
+            </a:endParaRPr>
+          </a:p>
+        </p:txBody>
+      </p:sp>
+      <p:sp>
+        <p:nvSpPr>
+          <p:cNvPr id="12" name="슬라이드 번호 개체 틀 11">
+            <a:extLst>
+              <a:ext uri="{FF2B5EF4-FFF2-40B4-BE49-F238E27FC236}">
+                <a16:creationId xmlns:a16="http://schemas.microsoft.com/office/drawing/2014/main" id="{A82BDDE7-1363-F174-A592-50B52479FD71}"/>
+              </a:ext>
+            </a:extLst>
+          </p:cNvPr>
+          <p:cNvSpPr>
+            <a:spLocks noGrp="1"/>
+          </p:cNvSpPr>
+          <p:nvPr>
+            <p:ph type="sldNum" sz="quarter" idx="4"/>
+          </p:nvPr>
+        </p:nvSpPr>
+        <p:spPr/>
+        <p:txBody>
+          <a:bodyPr/>
+          <a:lstStyle/>
+          <a:p>
+            <a:fld id="{9860EDB8-5305-433F-BE41-D7A86D811DB3}" type="slidenum">
+              <a:rPr lang="en-US" altLang="ko-KR" noProof="0" smtClean="0"/>
+              <a:pPr/>
+              <a:t>15</a:t>
+            </a:fld>
+            <a:endParaRPr lang="ko-KR" altLang="en-US" noProof="0" dirty="0"/>
+          </a:p>
+        </p:txBody>
+      </p:sp>
+      <p:sp>
+        <p:nvSpPr>
+          <p:cNvPr id="16" name="TextBox 15">
+            <a:extLst>
+              <a:ext uri="{FF2B5EF4-FFF2-40B4-BE49-F238E27FC236}">
+                <a16:creationId xmlns:a16="http://schemas.microsoft.com/office/drawing/2014/main" id="{A7339E24-C77F-E796-4141-E33FD5771E35}"/>
+              </a:ext>
+            </a:extLst>
+          </p:cNvPr>
+          <p:cNvSpPr txBox="1"/>
+          <p:nvPr/>
+        </p:nvSpPr>
+        <p:spPr>
+          <a:xfrm>
+            <a:off x="2477049" y="1345311"/>
+            <a:ext cx="6752676" cy="5123390"/>
+          </a:xfrm>
+          <a:prstGeom prst="rect">
+            <a:avLst/>
+          </a:prstGeom>
+          <a:noFill/>
+        </p:spPr>
+        <p:txBody>
+          <a:bodyPr wrap="square" rtlCol="0">
+            <a:spAutoFit/>
+          </a:bodyPr>
+          <a:lstStyle/>
+          <a:p>
+            <a:pPr marL="342900" indent="-342900">
+              <a:lnSpc>
+                <a:spcPct val="150000"/>
+              </a:lnSpc>
+              <a:buFont typeface="+mj-lt"/>
+              <a:buAutoNum type="arabicPeriod"/>
+            </a:pPr>
+            <a:r>
+              <a:rPr lang="en-US" altLang="ko-KR" sz="2000" b="1" dirty="0">
+                <a:latin typeface="D2Coding" panose="020B0609020101020101" pitchFamily="49" charset="-127"/>
+                <a:ea typeface="D2Coding" panose="020B0609020101020101" pitchFamily="49" charset="-127"/>
+                <a:cs typeface="맑은 고딕 Semilight" panose="020B0502040204020203" pitchFamily="50" charset="-127"/>
+              </a:rPr>
+              <a:t>Tensor</a:t>
+            </a:r>
+          </a:p>
+          <a:p>
+            <a:pPr marL="342900" indent="-342900">
+              <a:lnSpc>
+                <a:spcPct val="150000"/>
+              </a:lnSpc>
+              <a:buFont typeface="+mj-lt"/>
+              <a:buAutoNum type="arabicPeriod"/>
+            </a:pPr>
+            <a:r>
+              <a:rPr lang="en-US" altLang="ko-KR" sz="2000" b="1" dirty="0" err="1">
+                <a:latin typeface="D2Coding" panose="020B0609020101020101" pitchFamily="49" charset="-127"/>
+                <a:ea typeface="D2Coding" panose="020B0609020101020101" pitchFamily="49" charset="-127"/>
+                <a:cs typeface="맑은 고딕 Semilight" panose="020B0502040204020203" pitchFamily="50" charset="-127"/>
+              </a:rPr>
+              <a:t>Autograd</a:t>
+            </a:r>
+            <a:endParaRPr lang="en-US" altLang="ko-KR" sz="2000" b="1" dirty="0">
+              <a:latin typeface="D2Coding" panose="020B0609020101020101" pitchFamily="49" charset="-127"/>
+              <a:ea typeface="D2Coding" panose="020B0609020101020101" pitchFamily="49" charset="-127"/>
+              <a:cs typeface="맑은 고딕 Semilight" panose="020B0502040204020203" pitchFamily="50" charset="-127"/>
+            </a:endParaRPr>
+          </a:p>
+          <a:p>
+            <a:pPr marL="342900" indent="-342900">
+              <a:lnSpc>
+                <a:spcPct val="150000"/>
+              </a:lnSpc>
+              <a:buFont typeface="+mj-lt"/>
+              <a:buAutoNum type="arabicPeriod"/>
+            </a:pPr>
+            <a:r>
+              <a:rPr lang="en-US" altLang="ko-KR" sz="2000" b="1" dirty="0">
+                <a:latin typeface="D2Coding" panose="020B0609020101020101" pitchFamily="49" charset="-127"/>
+                <a:ea typeface="D2Coding" panose="020B0609020101020101" pitchFamily="49" charset="-127"/>
+                <a:cs typeface="맑은 고딕 Semilight" panose="020B0502040204020203" pitchFamily="50" charset="-127"/>
+              </a:rPr>
+              <a:t>Backpropagation</a:t>
+            </a:r>
+          </a:p>
+          <a:p>
+            <a:pPr marL="342900" indent="-342900">
+              <a:lnSpc>
+                <a:spcPct val="150000"/>
+              </a:lnSpc>
+              <a:buFont typeface="+mj-lt"/>
+              <a:buAutoNum type="arabicPeriod"/>
+            </a:pPr>
+            <a:r>
+              <a:rPr lang="en-US" altLang="ko-KR" sz="2000" b="1" dirty="0">
+                <a:latin typeface="D2Coding" panose="020B0609020101020101" pitchFamily="49" charset="-127"/>
+                <a:ea typeface="D2Coding" panose="020B0609020101020101" pitchFamily="49" charset="-127"/>
+                <a:cs typeface="맑은 고딕 Semilight" panose="020B0502040204020203" pitchFamily="50" charset="-127"/>
+              </a:rPr>
+              <a:t>Forward &amp; Backward Pass</a:t>
+            </a:r>
+          </a:p>
+          <a:p>
+            <a:pPr marL="342900" indent="-342900">
+              <a:lnSpc>
+                <a:spcPct val="150000"/>
+              </a:lnSpc>
+              <a:buFont typeface="+mj-lt"/>
+              <a:buAutoNum type="arabicPeriod"/>
+            </a:pPr>
+            <a:r>
+              <a:rPr lang="en-US" altLang="ko-KR" sz="2000" b="1" dirty="0">
+                <a:latin typeface="D2Coding" panose="020B0609020101020101" pitchFamily="49" charset="-127"/>
+                <a:ea typeface="D2Coding" panose="020B0609020101020101" pitchFamily="49" charset="-127"/>
+                <a:cs typeface="맑은 고딕 Semilight" panose="020B0502040204020203" pitchFamily="50" charset="-127"/>
+              </a:rPr>
+              <a:t>Optimizer &amp; Model</a:t>
+            </a:r>
+          </a:p>
+          <a:p>
+            <a:pPr marL="342900" indent="-342900">
+              <a:lnSpc>
+                <a:spcPct val="150000"/>
+              </a:lnSpc>
+              <a:buFont typeface="+mj-lt"/>
+              <a:buAutoNum type="arabicPeriod"/>
+            </a:pPr>
+            <a:r>
+              <a:rPr lang="en-US" altLang="ko-KR" sz="2000" b="1" dirty="0">
+                <a:latin typeface="D2Coding" panose="020B0609020101020101" pitchFamily="49" charset="-127"/>
+                <a:ea typeface="D2Coding" panose="020B0609020101020101" pitchFamily="49" charset="-127"/>
+                <a:cs typeface="맑은 고딕 Semilight" panose="020B0502040204020203" pitchFamily="50" charset="-127"/>
+              </a:rPr>
+              <a:t>Optimizers</a:t>
+            </a:r>
+          </a:p>
+          <a:p>
+            <a:pPr marL="342900" indent="-342900">
+              <a:lnSpc>
+                <a:spcPct val="150000"/>
+              </a:lnSpc>
+              <a:buFont typeface="+mj-lt"/>
+              <a:buAutoNum type="arabicPeriod"/>
+            </a:pPr>
+            <a:r>
+              <a:rPr lang="en-US" altLang="ko-KR" sz="2000" b="1" dirty="0">
+                <a:latin typeface="D2Coding" panose="020B0609020101020101" pitchFamily="49" charset="-127"/>
+                <a:ea typeface="D2Coding" panose="020B0609020101020101" pitchFamily="49" charset="-127"/>
+                <a:cs typeface="맑은 고딕 Semilight" panose="020B0502040204020203" pitchFamily="50" charset="-127"/>
+              </a:rPr>
+              <a:t> Loss Function with L1, L2 regularization</a:t>
+            </a:r>
+          </a:p>
+          <a:p>
+            <a:pPr marL="342900" indent="-342900">
+              <a:lnSpc>
+                <a:spcPct val="150000"/>
+              </a:lnSpc>
+              <a:buFont typeface="+mj-lt"/>
+              <a:buAutoNum type="arabicPeriod"/>
+            </a:pPr>
+            <a:r>
+              <a:rPr lang="en-US" altLang="ko-KR" sz="2000" b="1" dirty="0">
+                <a:latin typeface="D2Coding" panose="020B0609020101020101" pitchFamily="49" charset="-127"/>
+                <a:ea typeface="D2Coding" panose="020B0609020101020101" pitchFamily="49" charset="-127"/>
+                <a:cs typeface="맑은 고딕 Semilight" panose="020B0502040204020203" pitchFamily="50" charset="-127"/>
+              </a:rPr>
+              <a:t> Regularizations</a:t>
+            </a:r>
+          </a:p>
+          <a:p>
+            <a:pPr marL="342900" indent="-342900">
+              <a:lnSpc>
+                <a:spcPct val="150000"/>
+              </a:lnSpc>
+              <a:buFont typeface="+mj-lt"/>
+              <a:buAutoNum type="arabicPeriod"/>
+            </a:pPr>
+            <a:r>
+              <a:rPr lang="en-US" altLang="ko-KR" sz="2000" b="1" dirty="0">
+                <a:latin typeface="D2Coding" panose="020B0609020101020101" pitchFamily="49" charset="-127"/>
+                <a:ea typeface="D2Coding" panose="020B0609020101020101" pitchFamily="49" charset="-127"/>
+                <a:cs typeface="맑은 고딕 Semilight" panose="020B0502040204020203" pitchFamily="50" charset="-127"/>
+              </a:rPr>
+              <a:t> </a:t>
+            </a:r>
+            <a:r>
+              <a:rPr lang="en-US" altLang="ko-KR" sz="2000" b="1" dirty="0" err="1">
+                <a:latin typeface="D2Coding" panose="020B0609020101020101" pitchFamily="49" charset="-127"/>
+                <a:ea typeface="D2Coding" panose="020B0609020101020101" pitchFamily="49" charset="-127"/>
+                <a:cs typeface="맑은 고딕 Semilight" panose="020B0502040204020203" pitchFamily="50" charset="-127"/>
+              </a:rPr>
+              <a:t>Pytorch</a:t>
+            </a:r>
+            <a:r>
+              <a:rPr lang="en-US" altLang="ko-KR" sz="2000" b="1" dirty="0">
+                <a:latin typeface="D2Coding" panose="020B0609020101020101" pitchFamily="49" charset="-127"/>
+                <a:ea typeface="D2Coding" panose="020B0609020101020101" pitchFamily="49" charset="-127"/>
+                <a:cs typeface="맑은 고딕 Semilight" panose="020B0502040204020203" pitchFamily="50" charset="-127"/>
+              </a:rPr>
+              <a:t> with fashion </a:t>
+            </a:r>
+            <a:r>
+              <a:rPr lang="en-US" altLang="ko-KR" sz="2000" b="1" dirty="0" err="1">
+                <a:latin typeface="D2Coding" panose="020B0609020101020101" pitchFamily="49" charset="-127"/>
+                <a:ea typeface="D2Coding" panose="020B0609020101020101" pitchFamily="49" charset="-127"/>
+                <a:cs typeface="맑은 고딕 Semilight" panose="020B0502040204020203" pitchFamily="50" charset="-127"/>
+              </a:rPr>
+              <a:t>mnist</a:t>
+            </a:r>
+            <a:endParaRPr lang="en-US" altLang="ko-KR" sz="2000" b="1" dirty="0">
+              <a:latin typeface="D2Coding" panose="020B0609020101020101" pitchFamily="49" charset="-127"/>
+              <a:ea typeface="D2Coding" panose="020B0609020101020101" pitchFamily="49" charset="-127"/>
+              <a:cs typeface="맑은 고딕 Semilight" panose="020B0502040204020203" pitchFamily="50" charset="-127"/>
+            </a:endParaRPr>
+          </a:p>
+          <a:p>
+            <a:pPr marL="342900" indent="-342900">
+              <a:lnSpc>
+                <a:spcPct val="150000"/>
+              </a:lnSpc>
+              <a:buFont typeface="+mj-lt"/>
+              <a:buAutoNum type="arabicPeriod"/>
+            </a:pPr>
+            <a:r>
+              <a:rPr lang="en-US" altLang="ko-KR" sz="2000" b="1" dirty="0">
+                <a:latin typeface="D2Coding" panose="020B0609020101020101" pitchFamily="49" charset="-127"/>
+                <a:ea typeface="D2Coding" panose="020B0609020101020101" pitchFamily="49" charset="-127"/>
+                <a:cs typeface="맑은 고딕 Semilight" panose="020B0502040204020203" pitchFamily="50" charset="-127"/>
+              </a:rPr>
+              <a:t> Understanding basic CNN</a:t>
+            </a:r>
+          </a:p>
+          <a:p>
+            <a:pPr marL="342900" indent="-342900">
+              <a:lnSpc>
+                <a:spcPct val="150000"/>
+              </a:lnSpc>
+              <a:buFont typeface="+mj-lt"/>
+              <a:buAutoNum type="arabicPeriod"/>
+            </a:pPr>
+            <a:r>
+              <a:rPr lang="en-US" altLang="ko-KR" sz="2000" b="1" dirty="0">
+                <a:latin typeface="D2Coding" panose="020B0609020101020101" pitchFamily="49" charset="-127"/>
+                <a:ea typeface="D2Coding" panose="020B0609020101020101" pitchFamily="49" charset="-127"/>
+                <a:cs typeface="맑은 고딕 Semilight" panose="020B0502040204020203" pitchFamily="50" charset="-127"/>
+              </a:rPr>
+              <a:t> Roadmap to ML &amp; ML</a:t>
+            </a:r>
+          </a:p>
+        </p:txBody>
+      </p:sp>
+    </p:spTree>
+    <p:extLst>
+      <p:ext uri="{BB962C8B-B14F-4D97-AF65-F5344CB8AC3E}">
+        <p14:creationId xmlns:p14="http://schemas.microsoft.com/office/powerpoint/2010/main" val="2848765293"/>
+      </p:ext>
+    </p:extLst>
+  </p:cSld>
+  <p:clrMapOvr>
+    <a:masterClrMapping/>
+  </p:clrMapOvr>
+  <mc:AlternateContent xmlns:mc="http://schemas.openxmlformats.org/markup-compatibility/2006" xmlns:p14="http://schemas.microsoft.com/office/powerpoint/2010/main">
+    <mc:Choice Requires="p14">
+      <p:transition p14:dur="10"/>
+    </mc:Choice>
+    <mc:Fallback xmlns="">
+      <p:transition/>
+    </mc:Fallback>
+  </mc:AlternateContent>
+</p:sld>
+</file>
+
+<file path=ppt/slides/slide16.xml><?xml version="1.0" encoding="utf-8"?>
 <p:sld xmlns:a="http://schemas.openxmlformats.org/drawingml/2006/main" xmlns:r="http://schemas.openxmlformats.org/officeDocument/2006/relationships" xmlns:p="http://schemas.openxmlformats.org/presentationml/2006/main">
   <p:cSld>
     <p:spTree>
@@ -5710,7 +8641,7 @@
             <a:fld id="{9860EDB8-5305-433F-BE41-D7A86D811DB3}" type="slidenum">
               <a:rPr lang="en-US" altLang="ko-KR" noProof="0" smtClean="0"/>
               <a:pPr/>
-              <a:t>13</a:t>
+              <a:t>16</a:t>
             </a:fld>
             <a:endParaRPr lang="ko-KR" altLang="en-US" noProof="0"/>
           </a:p>
@@ -6410,7 +9341,7 @@
 </p:sld>
 </file>
 
-<file path=ppt/slides/slide14.xml><?xml version="1.0" encoding="utf-8"?>
+<file path=ppt/slides/slide17.xml><?xml version="1.0" encoding="utf-8"?>
 <p:sld xmlns:a="http://schemas.openxmlformats.org/drawingml/2006/main" xmlns:r="http://schemas.openxmlformats.org/officeDocument/2006/relationships" xmlns:p="http://schemas.openxmlformats.org/presentationml/2006/main">
   <p:cSld>
     <p:spTree>
@@ -6594,7 +9525,7 @@
             <a:fld id="{D57F1E4F-1CFF-5643-939E-217C01CDF565}" type="slidenum">
               <a:rPr lang="en-US" smtClean="0"/>
               <a:pPr/>
-              <a:t>14</a:t>
+              <a:t>17</a:t>
             </a:fld>
             <a:endParaRPr lang="en-US" dirty="0"/>
           </a:p>
@@ -7061,7 +9992,432 @@
 </p:sld>
 </file>
 
-<file path=ppt/slides/slide15.xml><?xml version="1.0" encoding="utf-8"?>
+<file path=ppt/slides/slide18.xml><?xml version="1.0" encoding="utf-8"?>
+<p:sld xmlns:a="http://schemas.openxmlformats.org/drawingml/2006/main" xmlns:r="http://schemas.openxmlformats.org/officeDocument/2006/relationships" xmlns:p="http://schemas.openxmlformats.org/presentationml/2006/main">
+  <p:cSld>
+    <p:spTree>
+      <p:nvGrpSpPr>
+        <p:cNvPr id="1" name="">
+          <a:extLst>
+            <a:ext uri="{FF2B5EF4-FFF2-40B4-BE49-F238E27FC236}">
+              <a16:creationId xmlns:a16="http://schemas.microsoft.com/office/drawing/2014/main" id="{D0DAF962-BC56-0A39-765C-2EC2B08AC00C}"/>
+            </a:ext>
+          </a:extLst>
+        </p:cNvPr>
+        <p:cNvGrpSpPr/>
+        <p:nvPr/>
+      </p:nvGrpSpPr>
+      <p:grpSpPr>
+        <a:xfrm>
+          <a:off x="0" y="0"/>
+          <a:ext cx="0" cy="0"/>
+          <a:chOff x="0" y="0"/>
+          <a:chExt cx="0" cy="0"/>
+        </a:xfrm>
+      </p:grpSpPr>
+      <p:sp>
+        <p:nvSpPr>
+          <p:cNvPr id="2" name="직사각형 1">
+            <a:extLst>
+              <a:ext uri="{FF2B5EF4-FFF2-40B4-BE49-F238E27FC236}">
+                <a16:creationId xmlns:a16="http://schemas.microsoft.com/office/drawing/2014/main" id="{294CE5A6-9C5C-75EF-D600-91A64E164AF9}"/>
+              </a:ext>
+            </a:extLst>
+          </p:cNvPr>
+          <p:cNvSpPr/>
+          <p:nvPr/>
+        </p:nvSpPr>
+        <p:spPr>
+          <a:xfrm>
+            <a:off x="1571625" y="4600576"/>
+            <a:ext cx="7524750" cy="457200"/>
+          </a:xfrm>
+          <a:prstGeom prst="rect">
+            <a:avLst/>
+          </a:prstGeom>
+          <a:solidFill>
+            <a:schemeClr val="bg1">
+              <a:lumMod val="75000"/>
+            </a:schemeClr>
+          </a:solidFill>
+          <a:ln>
+            <a:noFill/>
+          </a:ln>
+        </p:spPr>
+        <p:style>
+          <a:lnRef idx="2">
+            <a:schemeClr val="accent1">
+              <a:shade val="15000"/>
+            </a:schemeClr>
+          </a:lnRef>
+          <a:fillRef idx="1">
+            <a:schemeClr val="accent1"/>
+          </a:fillRef>
+          <a:effectRef idx="0">
+            <a:schemeClr val="accent1"/>
+          </a:effectRef>
+          <a:fontRef idx="minor">
+            <a:schemeClr val="lt1"/>
+          </a:fontRef>
+        </p:style>
+        <p:txBody>
+          <a:bodyPr rtlCol="0" anchor="ctr"/>
+          <a:lstStyle/>
+          <a:p>
+            <a:pPr algn="ctr"/>
+            <a:endParaRPr lang="ko-KR" altLang="en-US" dirty="0"/>
+          </a:p>
+        </p:txBody>
+      </p:sp>
+      <p:sp>
+        <p:nvSpPr>
+          <p:cNvPr id="8" name="제목 7">
+            <a:extLst>
+              <a:ext uri="{FF2B5EF4-FFF2-40B4-BE49-F238E27FC236}">
+                <a16:creationId xmlns:a16="http://schemas.microsoft.com/office/drawing/2014/main" id="{36D3F9B8-EB82-687E-8059-01F582F86637}"/>
+              </a:ext>
+            </a:extLst>
+          </p:cNvPr>
+          <p:cNvSpPr>
+            <a:spLocks noGrp="1"/>
+          </p:cNvSpPr>
+          <p:nvPr>
+            <p:ph type="title"/>
+          </p:nvPr>
+        </p:nvSpPr>
+        <p:spPr>
+          <a:xfrm>
+            <a:off x="521207" y="448056"/>
+            <a:ext cx="8135613" cy="640080"/>
+          </a:xfrm>
+        </p:spPr>
+        <p:txBody>
+          <a:bodyPr rtlCol="0">
+            <a:noAutofit/>
+          </a:bodyPr>
+          <a:lstStyle/>
+          <a:p>
+            <a:pPr rtl="0"/>
+            <a:r>
+              <a:rPr lang="en-US" altLang="ko-KR" dirty="0">
+                <a:solidFill>
+                  <a:schemeClr val="tx1"/>
+                </a:solidFill>
+                <a:cs typeface="Segoe UI Light" panose="020B0502040204020203" pitchFamily="34" charset="0"/>
+              </a:rPr>
+              <a:t>Contents</a:t>
+            </a:r>
+            <a:endParaRPr lang="ko-KR" altLang="en-US" dirty="0">
+              <a:solidFill>
+                <a:schemeClr val="tx1"/>
+              </a:solidFill>
+              <a:cs typeface="Segoe UI Light" panose="020B0502040204020203" pitchFamily="34" charset="0"/>
+            </a:endParaRPr>
+          </a:p>
+        </p:txBody>
+      </p:sp>
+      <p:sp>
+        <p:nvSpPr>
+          <p:cNvPr id="12" name="슬라이드 번호 개체 틀 11">
+            <a:extLst>
+              <a:ext uri="{FF2B5EF4-FFF2-40B4-BE49-F238E27FC236}">
+                <a16:creationId xmlns:a16="http://schemas.microsoft.com/office/drawing/2014/main" id="{D56DA0E0-51DC-B9E6-FFE3-33E86D403B29}"/>
+              </a:ext>
+            </a:extLst>
+          </p:cNvPr>
+          <p:cNvSpPr>
+            <a:spLocks noGrp="1"/>
+          </p:cNvSpPr>
+          <p:nvPr>
+            <p:ph type="sldNum" sz="quarter" idx="4"/>
+          </p:nvPr>
+        </p:nvSpPr>
+        <p:spPr/>
+        <p:txBody>
+          <a:bodyPr/>
+          <a:lstStyle/>
+          <a:p>
+            <a:fld id="{9860EDB8-5305-433F-BE41-D7A86D811DB3}" type="slidenum">
+              <a:rPr lang="en-US" altLang="ko-KR" noProof="0" smtClean="0"/>
+              <a:pPr/>
+              <a:t>18</a:t>
+            </a:fld>
+            <a:endParaRPr lang="ko-KR" altLang="en-US" noProof="0" dirty="0"/>
+          </a:p>
+        </p:txBody>
+      </p:sp>
+      <p:sp>
+        <p:nvSpPr>
+          <p:cNvPr id="16" name="TextBox 15">
+            <a:extLst>
+              <a:ext uri="{FF2B5EF4-FFF2-40B4-BE49-F238E27FC236}">
+                <a16:creationId xmlns:a16="http://schemas.microsoft.com/office/drawing/2014/main" id="{25015801-F1B1-5FB5-F29E-9387FE2077D0}"/>
+              </a:ext>
+            </a:extLst>
+          </p:cNvPr>
+          <p:cNvSpPr txBox="1"/>
+          <p:nvPr/>
+        </p:nvSpPr>
+        <p:spPr>
+          <a:xfrm>
+            <a:off x="2477049" y="1345311"/>
+            <a:ext cx="6752676" cy="5123390"/>
+          </a:xfrm>
+          <a:prstGeom prst="rect">
+            <a:avLst/>
+          </a:prstGeom>
+          <a:noFill/>
+        </p:spPr>
+        <p:txBody>
+          <a:bodyPr wrap="square" rtlCol="0">
+            <a:spAutoFit/>
+          </a:bodyPr>
+          <a:lstStyle/>
+          <a:p>
+            <a:pPr marL="342900" indent="-342900">
+              <a:lnSpc>
+                <a:spcPct val="150000"/>
+              </a:lnSpc>
+              <a:buFont typeface="+mj-lt"/>
+              <a:buAutoNum type="arabicPeriod"/>
+            </a:pPr>
+            <a:r>
+              <a:rPr lang="en-US" altLang="ko-KR" sz="2000" b="1" dirty="0">
+                <a:latin typeface="D2Coding" panose="020B0609020101020101" pitchFamily="49" charset="-127"/>
+                <a:ea typeface="D2Coding" panose="020B0609020101020101" pitchFamily="49" charset="-127"/>
+                <a:cs typeface="맑은 고딕 Semilight" panose="020B0502040204020203" pitchFamily="50" charset="-127"/>
+              </a:rPr>
+              <a:t>Tensor</a:t>
+            </a:r>
+          </a:p>
+          <a:p>
+            <a:pPr marL="342900" indent="-342900">
+              <a:lnSpc>
+                <a:spcPct val="150000"/>
+              </a:lnSpc>
+              <a:buFont typeface="+mj-lt"/>
+              <a:buAutoNum type="arabicPeriod"/>
+            </a:pPr>
+            <a:r>
+              <a:rPr lang="en-US" altLang="ko-KR" sz="2000" b="1" dirty="0" err="1">
+                <a:latin typeface="D2Coding" panose="020B0609020101020101" pitchFamily="49" charset="-127"/>
+                <a:ea typeface="D2Coding" panose="020B0609020101020101" pitchFamily="49" charset="-127"/>
+                <a:cs typeface="맑은 고딕 Semilight" panose="020B0502040204020203" pitchFamily="50" charset="-127"/>
+              </a:rPr>
+              <a:t>Autograd</a:t>
+            </a:r>
+            <a:endParaRPr lang="en-US" altLang="ko-KR" sz="2000" b="1" dirty="0">
+              <a:latin typeface="D2Coding" panose="020B0609020101020101" pitchFamily="49" charset="-127"/>
+              <a:ea typeface="D2Coding" panose="020B0609020101020101" pitchFamily="49" charset="-127"/>
+              <a:cs typeface="맑은 고딕 Semilight" panose="020B0502040204020203" pitchFamily="50" charset="-127"/>
+            </a:endParaRPr>
+          </a:p>
+          <a:p>
+            <a:pPr marL="342900" indent="-342900">
+              <a:lnSpc>
+                <a:spcPct val="150000"/>
+              </a:lnSpc>
+              <a:buFont typeface="+mj-lt"/>
+              <a:buAutoNum type="arabicPeriod"/>
+            </a:pPr>
+            <a:r>
+              <a:rPr lang="en-US" altLang="ko-KR" sz="2000" b="1" dirty="0">
+                <a:latin typeface="D2Coding" panose="020B0609020101020101" pitchFamily="49" charset="-127"/>
+                <a:ea typeface="D2Coding" panose="020B0609020101020101" pitchFamily="49" charset="-127"/>
+                <a:cs typeface="맑은 고딕 Semilight" panose="020B0502040204020203" pitchFamily="50" charset="-127"/>
+              </a:rPr>
+              <a:t>Backpropagation</a:t>
+            </a:r>
+          </a:p>
+          <a:p>
+            <a:pPr marL="342900" indent="-342900">
+              <a:lnSpc>
+                <a:spcPct val="150000"/>
+              </a:lnSpc>
+              <a:buFont typeface="+mj-lt"/>
+              <a:buAutoNum type="arabicPeriod"/>
+            </a:pPr>
+            <a:r>
+              <a:rPr lang="en-US" altLang="ko-KR" sz="2000" b="1" dirty="0">
+                <a:latin typeface="D2Coding" panose="020B0609020101020101" pitchFamily="49" charset="-127"/>
+                <a:ea typeface="D2Coding" panose="020B0609020101020101" pitchFamily="49" charset="-127"/>
+                <a:cs typeface="맑은 고딕 Semilight" panose="020B0502040204020203" pitchFamily="50" charset="-127"/>
+              </a:rPr>
+              <a:t>Forward &amp; Backward Pass</a:t>
+            </a:r>
+          </a:p>
+          <a:p>
+            <a:pPr marL="342900" indent="-342900">
+              <a:lnSpc>
+                <a:spcPct val="150000"/>
+              </a:lnSpc>
+              <a:buFont typeface="+mj-lt"/>
+              <a:buAutoNum type="arabicPeriod"/>
+            </a:pPr>
+            <a:r>
+              <a:rPr lang="en-US" altLang="ko-KR" sz="2000" b="1" dirty="0">
+                <a:latin typeface="D2Coding" panose="020B0609020101020101" pitchFamily="49" charset="-127"/>
+                <a:ea typeface="D2Coding" panose="020B0609020101020101" pitchFamily="49" charset="-127"/>
+                <a:cs typeface="맑은 고딕 Semilight" panose="020B0502040204020203" pitchFamily="50" charset="-127"/>
+              </a:rPr>
+              <a:t>Optimizer &amp; Model</a:t>
+            </a:r>
+          </a:p>
+          <a:p>
+            <a:pPr marL="342900" indent="-342900">
+              <a:lnSpc>
+                <a:spcPct val="150000"/>
+              </a:lnSpc>
+              <a:buFont typeface="+mj-lt"/>
+              <a:buAutoNum type="arabicPeriod"/>
+            </a:pPr>
+            <a:r>
+              <a:rPr lang="en-US" altLang="ko-KR" sz="2000" b="1" dirty="0">
+                <a:latin typeface="D2Coding" panose="020B0609020101020101" pitchFamily="49" charset="-127"/>
+                <a:ea typeface="D2Coding" panose="020B0609020101020101" pitchFamily="49" charset="-127"/>
+                <a:cs typeface="맑은 고딕 Semilight" panose="020B0502040204020203" pitchFamily="50" charset="-127"/>
+              </a:rPr>
+              <a:t>Optimizers</a:t>
+            </a:r>
+          </a:p>
+          <a:p>
+            <a:pPr marL="342900" indent="-342900">
+              <a:lnSpc>
+                <a:spcPct val="150000"/>
+              </a:lnSpc>
+              <a:buFont typeface="+mj-lt"/>
+              <a:buAutoNum type="arabicPeriod"/>
+            </a:pPr>
+            <a:r>
+              <a:rPr lang="en-US" altLang="ko-KR" sz="2000" b="1" dirty="0">
+                <a:latin typeface="D2Coding" panose="020B0609020101020101" pitchFamily="49" charset="-127"/>
+                <a:ea typeface="D2Coding" panose="020B0609020101020101" pitchFamily="49" charset="-127"/>
+                <a:cs typeface="맑은 고딕 Semilight" panose="020B0502040204020203" pitchFamily="50" charset="-127"/>
+              </a:rPr>
+              <a:t> Loss Function with L1, L2 regularization</a:t>
+            </a:r>
+          </a:p>
+          <a:p>
+            <a:pPr marL="342900" indent="-342900">
+              <a:lnSpc>
+                <a:spcPct val="150000"/>
+              </a:lnSpc>
+              <a:buFont typeface="+mj-lt"/>
+              <a:buAutoNum type="arabicPeriod"/>
+            </a:pPr>
+            <a:r>
+              <a:rPr lang="en-US" altLang="ko-KR" sz="2000" b="1" dirty="0">
+                <a:latin typeface="D2Coding" panose="020B0609020101020101" pitchFamily="49" charset="-127"/>
+                <a:ea typeface="D2Coding" panose="020B0609020101020101" pitchFamily="49" charset="-127"/>
+                <a:cs typeface="맑은 고딕 Semilight" panose="020B0502040204020203" pitchFamily="50" charset="-127"/>
+              </a:rPr>
+              <a:t> Regularizations</a:t>
+            </a:r>
+          </a:p>
+          <a:p>
+            <a:pPr marL="342900" indent="-342900">
+              <a:lnSpc>
+                <a:spcPct val="150000"/>
+              </a:lnSpc>
+              <a:buFont typeface="+mj-lt"/>
+              <a:buAutoNum type="arabicPeriod"/>
+            </a:pPr>
+            <a:r>
+              <a:rPr lang="en-US" altLang="ko-KR" sz="2000" b="1" dirty="0">
+                <a:latin typeface="D2Coding" panose="020B0609020101020101" pitchFamily="49" charset="-127"/>
+                <a:ea typeface="D2Coding" panose="020B0609020101020101" pitchFamily="49" charset="-127"/>
+                <a:cs typeface="맑은 고딕 Semilight" panose="020B0502040204020203" pitchFamily="50" charset="-127"/>
+              </a:rPr>
+              <a:t> </a:t>
+            </a:r>
+            <a:r>
+              <a:rPr lang="en-US" altLang="ko-KR" sz="2000" b="1" dirty="0" err="1">
+                <a:latin typeface="D2Coding" panose="020B0609020101020101" pitchFamily="49" charset="-127"/>
+                <a:ea typeface="D2Coding" panose="020B0609020101020101" pitchFamily="49" charset="-127"/>
+                <a:cs typeface="맑은 고딕 Semilight" panose="020B0502040204020203" pitchFamily="50" charset="-127"/>
+              </a:rPr>
+              <a:t>Pytorch</a:t>
+            </a:r>
+            <a:r>
+              <a:rPr lang="en-US" altLang="ko-KR" sz="2000" b="1" dirty="0">
+                <a:latin typeface="D2Coding" panose="020B0609020101020101" pitchFamily="49" charset="-127"/>
+                <a:ea typeface="D2Coding" panose="020B0609020101020101" pitchFamily="49" charset="-127"/>
+                <a:cs typeface="맑은 고딕 Semilight" panose="020B0502040204020203" pitchFamily="50" charset="-127"/>
+              </a:rPr>
+              <a:t> with fashion </a:t>
+            </a:r>
+            <a:r>
+              <a:rPr lang="en-US" altLang="ko-KR" sz="2000" b="1" dirty="0" err="1">
+                <a:latin typeface="D2Coding" panose="020B0609020101020101" pitchFamily="49" charset="-127"/>
+                <a:ea typeface="D2Coding" panose="020B0609020101020101" pitchFamily="49" charset="-127"/>
+                <a:cs typeface="맑은 고딕 Semilight" panose="020B0502040204020203" pitchFamily="50" charset="-127"/>
+              </a:rPr>
+              <a:t>mnist</a:t>
+            </a:r>
+            <a:endParaRPr lang="en-US" altLang="ko-KR" sz="2000" b="1" dirty="0">
+              <a:latin typeface="D2Coding" panose="020B0609020101020101" pitchFamily="49" charset="-127"/>
+              <a:ea typeface="D2Coding" panose="020B0609020101020101" pitchFamily="49" charset="-127"/>
+              <a:cs typeface="맑은 고딕 Semilight" panose="020B0502040204020203" pitchFamily="50" charset="-127"/>
+            </a:endParaRPr>
+          </a:p>
+          <a:p>
+            <a:pPr marL="342900" indent="-342900">
+              <a:lnSpc>
+                <a:spcPct val="150000"/>
+              </a:lnSpc>
+              <a:buFont typeface="+mj-lt"/>
+              <a:buAutoNum type="arabicPeriod"/>
+            </a:pPr>
+            <a:r>
+              <a:rPr lang="en-US" altLang="ko-KR" sz="2000" b="1" dirty="0">
+                <a:latin typeface="D2Coding" panose="020B0609020101020101" pitchFamily="49" charset="-127"/>
+                <a:ea typeface="D2Coding" panose="020B0609020101020101" pitchFamily="49" charset="-127"/>
+                <a:cs typeface="맑은 고딕 Semilight" panose="020B0502040204020203" pitchFamily="50" charset="-127"/>
+              </a:rPr>
+              <a:t> Understanding basic CNN</a:t>
+            </a:r>
+          </a:p>
+          <a:p>
+            <a:pPr marL="342900" indent="-342900">
+              <a:lnSpc>
+                <a:spcPct val="150000"/>
+              </a:lnSpc>
+              <a:buFont typeface="+mj-lt"/>
+              <a:buAutoNum type="arabicPeriod"/>
+            </a:pPr>
+            <a:r>
+              <a:rPr lang="en-US" altLang="ko-KR" sz="2000" b="1" dirty="0">
+                <a:latin typeface="D2Coding" panose="020B0609020101020101" pitchFamily="49" charset="-127"/>
+                <a:ea typeface="D2Coding" panose="020B0609020101020101" pitchFamily="49" charset="-127"/>
+                <a:cs typeface="맑은 고딕 Semilight" panose="020B0502040204020203" pitchFamily="50" charset="-127"/>
+              </a:rPr>
+              <a:t> Roadmap to ML &amp; ML</a:t>
+            </a:r>
+          </a:p>
+        </p:txBody>
+      </p:sp>
+    </p:spTree>
+    <p:extLst>
+      <p:ext uri="{BB962C8B-B14F-4D97-AF65-F5344CB8AC3E}">
+        <p14:creationId xmlns:p14="http://schemas.microsoft.com/office/powerpoint/2010/main" val="1450455570"/>
+      </p:ext>
+    </p:extLst>
+  </p:cSld>
+  <p:clrMapOvr>
+    <a:masterClrMapping/>
+  </p:clrMapOvr>
+  <mc:AlternateContent xmlns:mc="http://schemas.openxmlformats.org/markup-compatibility/2006" xmlns:p14="http://schemas.microsoft.com/office/powerpoint/2010/main">
+    <mc:Choice Requires="p14">
+      <p:transition p14:dur="10"/>
+    </mc:Choice>
+    <mc:Fallback xmlns="">
+      <p:transition/>
+    </mc:Fallback>
+  </mc:AlternateContent>
+</p:sld>
+</file>
+
+<file path=ppt/slides/slide19.xml><?xml version="1.0" encoding="utf-8"?>
 <p:sld xmlns:a="http://schemas.openxmlformats.org/drawingml/2006/main" xmlns:r="http://schemas.openxmlformats.org/officeDocument/2006/relationships" xmlns:p="http://schemas.openxmlformats.org/presentationml/2006/main">
   <p:cSld>
     <p:spTree>
@@ -7167,7 +10523,7 @@
             <a:fld id="{D57F1E4F-1CFF-5643-939E-217C01CDF565}" type="slidenum">
               <a:rPr lang="en-US" smtClean="0"/>
               <a:pPr/>
-              <a:t>15</a:t>
+              <a:t>19</a:t>
             </a:fld>
             <a:endParaRPr lang="en-US" dirty="0"/>
           </a:p>
@@ -9111,7 +12467,432 @@
 </p:sld>
 </file>
 
-<file path=ppt/slides/slide16.xml><?xml version="1.0" encoding="utf-8"?>
+<file path=ppt/slides/slide2.xml><?xml version="1.0" encoding="utf-8"?>
+<p:sld xmlns:a="http://schemas.openxmlformats.org/drawingml/2006/main" xmlns:r="http://schemas.openxmlformats.org/officeDocument/2006/relationships" xmlns:p="http://schemas.openxmlformats.org/presentationml/2006/main">
+  <p:cSld>
+    <p:spTree>
+      <p:nvGrpSpPr>
+        <p:cNvPr id="1" name="">
+          <a:extLst>
+            <a:ext uri="{FF2B5EF4-FFF2-40B4-BE49-F238E27FC236}">
+              <a16:creationId xmlns:a16="http://schemas.microsoft.com/office/drawing/2014/main" id="{10E0E775-05A8-0B2E-3045-C7403DD4772D}"/>
+            </a:ext>
+          </a:extLst>
+        </p:cNvPr>
+        <p:cNvGrpSpPr/>
+        <p:nvPr/>
+      </p:nvGrpSpPr>
+      <p:grpSpPr>
+        <a:xfrm>
+          <a:off x="0" y="0"/>
+          <a:ext cx="0" cy="0"/>
+          <a:chOff x="0" y="0"/>
+          <a:chExt cx="0" cy="0"/>
+        </a:xfrm>
+      </p:grpSpPr>
+      <p:sp>
+        <p:nvSpPr>
+          <p:cNvPr id="2" name="직사각형 1">
+            <a:extLst>
+              <a:ext uri="{FF2B5EF4-FFF2-40B4-BE49-F238E27FC236}">
+                <a16:creationId xmlns:a16="http://schemas.microsoft.com/office/drawing/2014/main" id="{001C3FE3-FA0C-4461-E726-E4ADE5CC5001}"/>
+              </a:ext>
+            </a:extLst>
+          </p:cNvPr>
+          <p:cNvSpPr/>
+          <p:nvPr/>
+        </p:nvSpPr>
+        <p:spPr>
+          <a:xfrm>
+            <a:off x="1571625" y="3238501"/>
+            <a:ext cx="7524750" cy="457200"/>
+          </a:xfrm>
+          <a:prstGeom prst="rect">
+            <a:avLst/>
+          </a:prstGeom>
+          <a:solidFill>
+            <a:schemeClr val="bg1">
+              <a:lumMod val="75000"/>
+            </a:schemeClr>
+          </a:solidFill>
+          <a:ln>
+            <a:noFill/>
+          </a:ln>
+        </p:spPr>
+        <p:style>
+          <a:lnRef idx="2">
+            <a:schemeClr val="accent1">
+              <a:shade val="15000"/>
+            </a:schemeClr>
+          </a:lnRef>
+          <a:fillRef idx="1">
+            <a:schemeClr val="accent1"/>
+          </a:fillRef>
+          <a:effectRef idx="0">
+            <a:schemeClr val="accent1"/>
+          </a:effectRef>
+          <a:fontRef idx="minor">
+            <a:schemeClr val="lt1"/>
+          </a:fontRef>
+        </p:style>
+        <p:txBody>
+          <a:bodyPr rtlCol="0" anchor="ctr"/>
+          <a:lstStyle/>
+          <a:p>
+            <a:pPr algn="ctr"/>
+            <a:endParaRPr lang="ko-KR" altLang="en-US" dirty="0"/>
+          </a:p>
+        </p:txBody>
+      </p:sp>
+      <p:sp>
+        <p:nvSpPr>
+          <p:cNvPr id="8" name="제목 7">
+            <a:extLst>
+              <a:ext uri="{FF2B5EF4-FFF2-40B4-BE49-F238E27FC236}">
+                <a16:creationId xmlns:a16="http://schemas.microsoft.com/office/drawing/2014/main" id="{584C55D0-C2AA-C028-A764-80EBE5AC2B39}"/>
+              </a:ext>
+            </a:extLst>
+          </p:cNvPr>
+          <p:cNvSpPr>
+            <a:spLocks noGrp="1"/>
+          </p:cNvSpPr>
+          <p:nvPr>
+            <p:ph type="title"/>
+          </p:nvPr>
+        </p:nvSpPr>
+        <p:spPr>
+          <a:xfrm>
+            <a:off x="521207" y="448056"/>
+            <a:ext cx="8135613" cy="640080"/>
+          </a:xfrm>
+        </p:spPr>
+        <p:txBody>
+          <a:bodyPr rtlCol="0">
+            <a:noAutofit/>
+          </a:bodyPr>
+          <a:lstStyle/>
+          <a:p>
+            <a:pPr rtl="0"/>
+            <a:r>
+              <a:rPr lang="en-US" altLang="ko-KR" dirty="0">
+                <a:solidFill>
+                  <a:schemeClr val="tx1"/>
+                </a:solidFill>
+                <a:cs typeface="Segoe UI Light" panose="020B0502040204020203" pitchFamily="34" charset="0"/>
+              </a:rPr>
+              <a:t>Contents</a:t>
+            </a:r>
+            <a:endParaRPr lang="ko-KR" altLang="en-US" dirty="0">
+              <a:solidFill>
+                <a:schemeClr val="tx1"/>
+              </a:solidFill>
+              <a:cs typeface="Segoe UI Light" panose="020B0502040204020203" pitchFamily="34" charset="0"/>
+            </a:endParaRPr>
+          </a:p>
+        </p:txBody>
+      </p:sp>
+      <p:sp>
+        <p:nvSpPr>
+          <p:cNvPr id="12" name="슬라이드 번호 개체 틀 11">
+            <a:extLst>
+              <a:ext uri="{FF2B5EF4-FFF2-40B4-BE49-F238E27FC236}">
+                <a16:creationId xmlns:a16="http://schemas.microsoft.com/office/drawing/2014/main" id="{DDEF4870-5C4D-2E0B-B788-E69040D32E16}"/>
+              </a:ext>
+            </a:extLst>
+          </p:cNvPr>
+          <p:cNvSpPr>
+            <a:spLocks noGrp="1"/>
+          </p:cNvSpPr>
+          <p:nvPr>
+            <p:ph type="sldNum" sz="quarter" idx="4"/>
+          </p:nvPr>
+        </p:nvSpPr>
+        <p:spPr/>
+        <p:txBody>
+          <a:bodyPr/>
+          <a:lstStyle/>
+          <a:p>
+            <a:fld id="{9860EDB8-5305-433F-BE41-D7A86D811DB3}" type="slidenum">
+              <a:rPr lang="en-US" altLang="ko-KR" noProof="0" smtClean="0"/>
+              <a:pPr/>
+              <a:t>2</a:t>
+            </a:fld>
+            <a:endParaRPr lang="ko-KR" altLang="en-US" noProof="0" dirty="0"/>
+          </a:p>
+        </p:txBody>
+      </p:sp>
+      <p:sp>
+        <p:nvSpPr>
+          <p:cNvPr id="16" name="TextBox 15">
+            <a:extLst>
+              <a:ext uri="{FF2B5EF4-FFF2-40B4-BE49-F238E27FC236}">
+                <a16:creationId xmlns:a16="http://schemas.microsoft.com/office/drawing/2014/main" id="{D2B4665E-8947-4774-C082-ED94684AA3E1}"/>
+              </a:ext>
+            </a:extLst>
+          </p:cNvPr>
+          <p:cNvSpPr txBox="1"/>
+          <p:nvPr/>
+        </p:nvSpPr>
+        <p:spPr>
+          <a:xfrm>
+            <a:off x="2477049" y="1345311"/>
+            <a:ext cx="6752676" cy="5123390"/>
+          </a:xfrm>
+          <a:prstGeom prst="rect">
+            <a:avLst/>
+          </a:prstGeom>
+          <a:noFill/>
+        </p:spPr>
+        <p:txBody>
+          <a:bodyPr wrap="square" rtlCol="0">
+            <a:spAutoFit/>
+          </a:bodyPr>
+          <a:lstStyle/>
+          <a:p>
+            <a:pPr marL="342900" indent="-342900">
+              <a:lnSpc>
+                <a:spcPct val="150000"/>
+              </a:lnSpc>
+              <a:buFont typeface="+mj-lt"/>
+              <a:buAutoNum type="arabicPeriod"/>
+            </a:pPr>
+            <a:r>
+              <a:rPr lang="en-US" altLang="ko-KR" sz="2000" b="1" dirty="0">
+                <a:latin typeface="D2Coding" panose="020B0609020101020101" pitchFamily="49" charset="-127"/>
+                <a:ea typeface="D2Coding" panose="020B0609020101020101" pitchFamily="49" charset="-127"/>
+                <a:cs typeface="맑은 고딕 Semilight" panose="020B0502040204020203" pitchFamily="50" charset="-127"/>
+              </a:rPr>
+              <a:t>Tensor</a:t>
+            </a:r>
+          </a:p>
+          <a:p>
+            <a:pPr marL="342900" indent="-342900">
+              <a:lnSpc>
+                <a:spcPct val="150000"/>
+              </a:lnSpc>
+              <a:buFont typeface="+mj-lt"/>
+              <a:buAutoNum type="arabicPeriod"/>
+            </a:pPr>
+            <a:r>
+              <a:rPr lang="en-US" altLang="ko-KR" sz="2000" b="1" dirty="0" err="1">
+                <a:latin typeface="D2Coding" panose="020B0609020101020101" pitchFamily="49" charset="-127"/>
+                <a:ea typeface="D2Coding" panose="020B0609020101020101" pitchFamily="49" charset="-127"/>
+                <a:cs typeface="맑은 고딕 Semilight" panose="020B0502040204020203" pitchFamily="50" charset="-127"/>
+              </a:rPr>
+              <a:t>Autograd</a:t>
+            </a:r>
+            <a:endParaRPr lang="en-US" altLang="ko-KR" sz="2000" b="1" dirty="0">
+              <a:latin typeface="D2Coding" panose="020B0609020101020101" pitchFamily="49" charset="-127"/>
+              <a:ea typeface="D2Coding" panose="020B0609020101020101" pitchFamily="49" charset="-127"/>
+              <a:cs typeface="맑은 고딕 Semilight" panose="020B0502040204020203" pitchFamily="50" charset="-127"/>
+            </a:endParaRPr>
+          </a:p>
+          <a:p>
+            <a:pPr marL="342900" indent="-342900">
+              <a:lnSpc>
+                <a:spcPct val="150000"/>
+              </a:lnSpc>
+              <a:buFont typeface="+mj-lt"/>
+              <a:buAutoNum type="arabicPeriod"/>
+            </a:pPr>
+            <a:r>
+              <a:rPr lang="en-US" altLang="ko-KR" sz="2000" b="1" dirty="0">
+                <a:latin typeface="D2Coding" panose="020B0609020101020101" pitchFamily="49" charset="-127"/>
+                <a:ea typeface="D2Coding" panose="020B0609020101020101" pitchFamily="49" charset="-127"/>
+                <a:cs typeface="맑은 고딕 Semilight" panose="020B0502040204020203" pitchFamily="50" charset="-127"/>
+              </a:rPr>
+              <a:t>Backpropagation</a:t>
+            </a:r>
+          </a:p>
+          <a:p>
+            <a:pPr marL="342900" indent="-342900">
+              <a:lnSpc>
+                <a:spcPct val="150000"/>
+              </a:lnSpc>
+              <a:buFont typeface="+mj-lt"/>
+              <a:buAutoNum type="arabicPeriod"/>
+            </a:pPr>
+            <a:r>
+              <a:rPr lang="en-US" altLang="ko-KR" sz="2000" b="1" dirty="0">
+                <a:latin typeface="D2Coding" panose="020B0609020101020101" pitchFamily="49" charset="-127"/>
+                <a:ea typeface="D2Coding" panose="020B0609020101020101" pitchFamily="49" charset="-127"/>
+                <a:cs typeface="맑은 고딕 Semilight" panose="020B0502040204020203" pitchFamily="50" charset="-127"/>
+              </a:rPr>
+              <a:t>Forward &amp; Backward Pass</a:t>
+            </a:r>
+          </a:p>
+          <a:p>
+            <a:pPr marL="342900" indent="-342900">
+              <a:lnSpc>
+                <a:spcPct val="150000"/>
+              </a:lnSpc>
+              <a:buFont typeface="+mj-lt"/>
+              <a:buAutoNum type="arabicPeriod"/>
+            </a:pPr>
+            <a:r>
+              <a:rPr lang="en-US" altLang="ko-KR" sz="2000" b="1" dirty="0">
+                <a:latin typeface="D2Coding" panose="020B0609020101020101" pitchFamily="49" charset="-127"/>
+                <a:ea typeface="D2Coding" panose="020B0609020101020101" pitchFamily="49" charset="-127"/>
+                <a:cs typeface="맑은 고딕 Semilight" panose="020B0502040204020203" pitchFamily="50" charset="-127"/>
+              </a:rPr>
+              <a:t>Optimizer &amp; Model</a:t>
+            </a:r>
+          </a:p>
+          <a:p>
+            <a:pPr marL="342900" indent="-342900">
+              <a:lnSpc>
+                <a:spcPct val="150000"/>
+              </a:lnSpc>
+              <a:buFont typeface="+mj-lt"/>
+              <a:buAutoNum type="arabicPeriod"/>
+            </a:pPr>
+            <a:r>
+              <a:rPr lang="en-US" altLang="ko-KR" sz="2000" b="1" dirty="0">
+                <a:latin typeface="D2Coding" panose="020B0609020101020101" pitchFamily="49" charset="-127"/>
+                <a:ea typeface="D2Coding" panose="020B0609020101020101" pitchFamily="49" charset="-127"/>
+                <a:cs typeface="맑은 고딕 Semilight" panose="020B0502040204020203" pitchFamily="50" charset="-127"/>
+              </a:rPr>
+              <a:t>Optimizers</a:t>
+            </a:r>
+          </a:p>
+          <a:p>
+            <a:pPr marL="342900" indent="-342900">
+              <a:lnSpc>
+                <a:spcPct val="150000"/>
+              </a:lnSpc>
+              <a:buFont typeface="+mj-lt"/>
+              <a:buAutoNum type="arabicPeriod"/>
+            </a:pPr>
+            <a:r>
+              <a:rPr lang="en-US" altLang="ko-KR" sz="2000" b="1" dirty="0">
+                <a:latin typeface="D2Coding" panose="020B0609020101020101" pitchFamily="49" charset="-127"/>
+                <a:ea typeface="D2Coding" panose="020B0609020101020101" pitchFamily="49" charset="-127"/>
+                <a:cs typeface="맑은 고딕 Semilight" panose="020B0502040204020203" pitchFamily="50" charset="-127"/>
+              </a:rPr>
+              <a:t> Loss Function with L1, L2 regularization</a:t>
+            </a:r>
+          </a:p>
+          <a:p>
+            <a:pPr marL="342900" indent="-342900">
+              <a:lnSpc>
+                <a:spcPct val="150000"/>
+              </a:lnSpc>
+              <a:buFont typeface="+mj-lt"/>
+              <a:buAutoNum type="arabicPeriod"/>
+            </a:pPr>
+            <a:r>
+              <a:rPr lang="en-US" altLang="ko-KR" sz="2000" b="1" dirty="0">
+                <a:latin typeface="D2Coding" panose="020B0609020101020101" pitchFamily="49" charset="-127"/>
+                <a:ea typeface="D2Coding" panose="020B0609020101020101" pitchFamily="49" charset="-127"/>
+                <a:cs typeface="맑은 고딕 Semilight" panose="020B0502040204020203" pitchFamily="50" charset="-127"/>
+              </a:rPr>
+              <a:t> Regularizations</a:t>
+            </a:r>
+          </a:p>
+          <a:p>
+            <a:pPr marL="342900" indent="-342900">
+              <a:lnSpc>
+                <a:spcPct val="150000"/>
+              </a:lnSpc>
+              <a:buFont typeface="+mj-lt"/>
+              <a:buAutoNum type="arabicPeriod"/>
+            </a:pPr>
+            <a:r>
+              <a:rPr lang="en-US" altLang="ko-KR" sz="2000" b="1" dirty="0">
+                <a:latin typeface="D2Coding" panose="020B0609020101020101" pitchFamily="49" charset="-127"/>
+                <a:ea typeface="D2Coding" panose="020B0609020101020101" pitchFamily="49" charset="-127"/>
+                <a:cs typeface="맑은 고딕 Semilight" panose="020B0502040204020203" pitchFamily="50" charset="-127"/>
+              </a:rPr>
+              <a:t> </a:t>
+            </a:r>
+            <a:r>
+              <a:rPr lang="en-US" altLang="ko-KR" sz="2000" b="1" dirty="0" err="1">
+                <a:latin typeface="D2Coding" panose="020B0609020101020101" pitchFamily="49" charset="-127"/>
+                <a:ea typeface="D2Coding" panose="020B0609020101020101" pitchFamily="49" charset="-127"/>
+                <a:cs typeface="맑은 고딕 Semilight" panose="020B0502040204020203" pitchFamily="50" charset="-127"/>
+              </a:rPr>
+              <a:t>Pytorch</a:t>
+            </a:r>
+            <a:r>
+              <a:rPr lang="en-US" altLang="ko-KR" sz="2000" b="1" dirty="0">
+                <a:latin typeface="D2Coding" panose="020B0609020101020101" pitchFamily="49" charset="-127"/>
+                <a:ea typeface="D2Coding" panose="020B0609020101020101" pitchFamily="49" charset="-127"/>
+                <a:cs typeface="맑은 고딕 Semilight" panose="020B0502040204020203" pitchFamily="50" charset="-127"/>
+              </a:rPr>
+              <a:t> with fashion </a:t>
+            </a:r>
+            <a:r>
+              <a:rPr lang="en-US" altLang="ko-KR" sz="2000" b="1" dirty="0" err="1">
+                <a:latin typeface="D2Coding" panose="020B0609020101020101" pitchFamily="49" charset="-127"/>
+                <a:ea typeface="D2Coding" panose="020B0609020101020101" pitchFamily="49" charset="-127"/>
+                <a:cs typeface="맑은 고딕 Semilight" panose="020B0502040204020203" pitchFamily="50" charset="-127"/>
+              </a:rPr>
+              <a:t>mnist</a:t>
+            </a:r>
+            <a:endParaRPr lang="en-US" altLang="ko-KR" sz="2000" b="1" dirty="0">
+              <a:latin typeface="D2Coding" panose="020B0609020101020101" pitchFamily="49" charset="-127"/>
+              <a:ea typeface="D2Coding" panose="020B0609020101020101" pitchFamily="49" charset="-127"/>
+              <a:cs typeface="맑은 고딕 Semilight" panose="020B0502040204020203" pitchFamily="50" charset="-127"/>
+            </a:endParaRPr>
+          </a:p>
+          <a:p>
+            <a:pPr marL="342900" indent="-342900">
+              <a:lnSpc>
+                <a:spcPct val="150000"/>
+              </a:lnSpc>
+              <a:buFont typeface="+mj-lt"/>
+              <a:buAutoNum type="arabicPeriod"/>
+            </a:pPr>
+            <a:r>
+              <a:rPr lang="en-US" altLang="ko-KR" sz="2000" b="1" dirty="0">
+                <a:latin typeface="D2Coding" panose="020B0609020101020101" pitchFamily="49" charset="-127"/>
+                <a:ea typeface="D2Coding" panose="020B0609020101020101" pitchFamily="49" charset="-127"/>
+                <a:cs typeface="맑은 고딕 Semilight" panose="020B0502040204020203" pitchFamily="50" charset="-127"/>
+              </a:rPr>
+              <a:t> Understanding basic CNN</a:t>
+            </a:r>
+          </a:p>
+          <a:p>
+            <a:pPr marL="342900" indent="-342900">
+              <a:lnSpc>
+                <a:spcPct val="150000"/>
+              </a:lnSpc>
+              <a:buFont typeface="+mj-lt"/>
+              <a:buAutoNum type="arabicPeriod"/>
+            </a:pPr>
+            <a:r>
+              <a:rPr lang="en-US" altLang="ko-KR" sz="2000" b="1" dirty="0">
+                <a:latin typeface="D2Coding" panose="020B0609020101020101" pitchFamily="49" charset="-127"/>
+                <a:ea typeface="D2Coding" panose="020B0609020101020101" pitchFamily="49" charset="-127"/>
+                <a:cs typeface="맑은 고딕 Semilight" panose="020B0502040204020203" pitchFamily="50" charset="-127"/>
+              </a:rPr>
+              <a:t> Roadmap to ML &amp; ML</a:t>
+            </a:r>
+          </a:p>
+        </p:txBody>
+      </p:sp>
+    </p:spTree>
+    <p:extLst>
+      <p:ext uri="{BB962C8B-B14F-4D97-AF65-F5344CB8AC3E}">
+        <p14:creationId xmlns:p14="http://schemas.microsoft.com/office/powerpoint/2010/main" val="3704531010"/>
+      </p:ext>
+    </p:extLst>
+  </p:cSld>
+  <p:clrMapOvr>
+    <a:masterClrMapping/>
+  </p:clrMapOvr>
+  <mc:AlternateContent xmlns:mc="http://schemas.openxmlformats.org/markup-compatibility/2006" xmlns:p14="http://schemas.microsoft.com/office/powerpoint/2010/main">
+    <mc:Choice Requires="p14">
+      <p:transition p14:dur="10"/>
+    </mc:Choice>
+    <mc:Fallback xmlns="">
+      <p:transition/>
+    </mc:Fallback>
+  </mc:AlternateContent>
+</p:sld>
+</file>
+
+<file path=ppt/slides/slide20.xml><?xml version="1.0" encoding="utf-8"?>
 <p:sld xmlns:a="http://schemas.openxmlformats.org/drawingml/2006/main" xmlns:r="http://schemas.openxmlformats.org/officeDocument/2006/relationships" xmlns:p="http://schemas.openxmlformats.org/presentationml/2006/main">
   <p:cSld>
     <p:spTree>
@@ -9243,7 +13024,7 @@
             <a:fld id="{D57F1E4F-1CFF-5643-939E-217C01CDF565}" type="slidenum">
               <a:rPr lang="en-US" smtClean="0"/>
               <a:pPr/>
-              <a:t>16</a:t>
+              <a:t>20</a:t>
             </a:fld>
             <a:endParaRPr lang="en-US" dirty="0"/>
           </a:p>
@@ -9817,7 +13598,7 @@
 </p:sld>
 </file>
 
-<file path=ppt/slides/slide17.xml><?xml version="1.0" encoding="utf-8"?>
+<file path=ppt/slides/slide21.xml><?xml version="1.0" encoding="utf-8"?>
 <p:sld xmlns:a="http://schemas.openxmlformats.org/drawingml/2006/main" xmlns:r="http://schemas.openxmlformats.org/officeDocument/2006/relationships" xmlns:p="http://schemas.openxmlformats.org/presentationml/2006/main">
   <p:cSld>
     <p:spTree>
@@ -9825,7 +13606,7 @@
         <p:cNvPr id="1" name="">
           <a:extLst>
             <a:ext uri="{FF2B5EF4-FFF2-40B4-BE49-F238E27FC236}">
-              <a16:creationId xmlns:a16="http://schemas.microsoft.com/office/drawing/2014/main" id="{B63ECCFD-463F-7127-518A-5DC5407A9CB2}"/>
+              <a16:creationId xmlns:a16="http://schemas.microsoft.com/office/drawing/2014/main" id="{15B125F6-F24E-9FB4-6ECA-D22604C4ACF8}"/>
             </a:ext>
           </a:extLst>
         </p:cNvPr>
@@ -9842,10 +13623,64 @@
       </p:grpSpPr>
       <p:sp>
         <p:nvSpPr>
+          <p:cNvPr id="2" name="직사각형 1">
+            <a:extLst>
+              <a:ext uri="{FF2B5EF4-FFF2-40B4-BE49-F238E27FC236}">
+                <a16:creationId xmlns:a16="http://schemas.microsoft.com/office/drawing/2014/main" id="{AB0C61D8-1616-C6B8-9FEC-D11B28CD4BF2}"/>
+              </a:ext>
+            </a:extLst>
+          </p:cNvPr>
+          <p:cNvSpPr/>
+          <p:nvPr/>
+        </p:nvSpPr>
+        <p:spPr>
+          <a:xfrm>
+            <a:off x="1571625" y="5057776"/>
+            <a:ext cx="7524750" cy="457200"/>
+          </a:xfrm>
+          <a:prstGeom prst="rect">
+            <a:avLst/>
+          </a:prstGeom>
+          <a:solidFill>
+            <a:schemeClr val="bg1">
+              <a:lumMod val="75000"/>
+            </a:schemeClr>
+          </a:solidFill>
+          <a:ln>
+            <a:noFill/>
+          </a:ln>
+        </p:spPr>
+        <p:style>
+          <a:lnRef idx="2">
+            <a:schemeClr val="accent1">
+              <a:shade val="15000"/>
+            </a:schemeClr>
+          </a:lnRef>
+          <a:fillRef idx="1">
+            <a:schemeClr val="accent1"/>
+          </a:fillRef>
+          <a:effectRef idx="0">
+            <a:schemeClr val="accent1"/>
+          </a:effectRef>
+          <a:fontRef idx="minor">
+            <a:schemeClr val="lt1"/>
+          </a:fontRef>
+        </p:style>
+        <p:txBody>
+          <a:bodyPr rtlCol="0" anchor="ctr"/>
+          <a:lstStyle/>
+          <a:p>
+            <a:pPr algn="ctr"/>
+            <a:endParaRPr lang="ko-KR" altLang="en-US" dirty="0"/>
+          </a:p>
+        </p:txBody>
+      </p:sp>
+      <p:sp>
+        <p:nvSpPr>
           <p:cNvPr id="8" name="제목 7">
             <a:extLst>
               <a:ext uri="{FF2B5EF4-FFF2-40B4-BE49-F238E27FC236}">
-                <a16:creationId xmlns:a16="http://schemas.microsoft.com/office/drawing/2014/main" id="{99266F11-C291-BAA9-5735-0A5A7CFF4F5C}"/>
+                <a16:creationId xmlns:a16="http://schemas.microsoft.com/office/drawing/2014/main" id="{A47D1732-55A1-BAC2-7A11-146984E7CE30}"/>
               </a:ext>
             </a:extLst>
           </p:cNvPr>
@@ -9870,24 +13705,18 @@
           <a:p>
             <a:pPr rtl="0"/>
             <a:r>
-              <a:rPr lang="en-US" altLang="ko-KR" dirty="0" err="1">
+              <a:rPr lang="en-US" altLang="ko-KR" dirty="0">
+                <a:solidFill>
+                  <a:schemeClr val="tx1"/>
+                </a:solidFill>
                 <a:cs typeface="Segoe UI Light" panose="020B0502040204020203" pitchFamily="34" charset="0"/>
               </a:rPr>
-              <a:t>pytorch</a:t>
-            </a:r>
-            <a:r>
-              <a:rPr lang="ko-KR" altLang="en-US" dirty="0">
-                <a:cs typeface="Segoe UI Light" panose="020B0502040204020203" pitchFamily="34" charset="0"/>
-              </a:rPr>
-              <a:t> </a:t>
-            </a:r>
-            <a:r>
-              <a:rPr lang="en-US" altLang="ko-KR" dirty="0">
-                <a:cs typeface="Segoe UI Light" panose="020B0502040204020203" pitchFamily="34" charset="0"/>
-              </a:rPr>
-              <a:t>tutorial</a:t>
+              <a:t>Contents</a:t>
             </a:r>
             <a:endParaRPr lang="ko-KR" altLang="en-US" dirty="0">
+              <a:solidFill>
+                <a:schemeClr val="tx1"/>
+              </a:solidFill>
               <a:cs typeface="Segoe UI Light" panose="020B0502040204020203" pitchFamily="34" charset="0"/>
             </a:endParaRPr>
           </a:p>
@@ -9898,7 +13727,7 @@
           <p:cNvPr id="12" name="슬라이드 번호 개체 틀 11">
             <a:extLst>
               <a:ext uri="{FF2B5EF4-FFF2-40B4-BE49-F238E27FC236}">
-                <a16:creationId xmlns:a16="http://schemas.microsoft.com/office/drawing/2014/main" id="{5D2A3FE8-AC2B-31B3-C63B-4CF02B6CB59D}"/>
+                <a16:creationId xmlns:a16="http://schemas.microsoft.com/office/drawing/2014/main" id="{8BD6D622-6C11-B524-84D3-DE18F25D8601}"/>
               </a:ext>
             </a:extLst>
           </p:cNvPr>
@@ -9917,7 +13746,7 @@
             <a:fld id="{9860EDB8-5305-433F-BE41-D7A86D811DB3}" type="slidenum">
               <a:rPr lang="en-US" altLang="ko-KR" noProof="0" smtClean="0"/>
               <a:pPr/>
-              <a:t>17</a:t>
+              <a:t>21</a:t>
             </a:fld>
             <a:endParaRPr lang="ko-KR" altLang="en-US" noProof="0" dirty="0"/>
           </a:p>
@@ -9928,7 +13757,7 @@
           <p:cNvPr id="16" name="TextBox 15">
             <a:extLst>
               <a:ext uri="{FF2B5EF4-FFF2-40B4-BE49-F238E27FC236}">
-                <a16:creationId xmlns:a16="http://schemas.microsoft.com/office/drawing/2014/main" id="{6DBC71BA-4391-0FA8-6E62-1CDC58F5E7DD}"/>
+                <a16:creationId xmlns:a16="http://schemas.microsoft.com/office/drawing/2014/main" id="{4CC1D6EC-EA81-70BB-F0CB-C30EA60FDF8D}"/>
               </a:ext>
             </a:extLst>
           </p:cNvPr>
@@ -9937,8 +13766,8 @@
         </p:nvSpPr>
         <p:spPr>
           <a:xfrm>
-            <a:off x="950697" y="1402638"/>
-            <a:ext cx="10553194" cy="4770537"/>
+            <a:off x="2477049" y="1345311"/>
+            <a:ext cx="6752676" cy="5123390"/>
           </a:xfrm>
           <a:prstGeom prst="rect">
             <a:avLst/>
@@ -9952,328 +13781,231 @@
           <a:lstStyle/>
           <a:p>
             <a:pPr marL="342900" indent="-342900">
+              <a:lnSpc>
+                <a:spcPct val="150000"/>
+              </a:lnSpc>
               <a:buFont typeface="+mj-lt"/>
               <a:buAutoNum type="arabicPeriod"/>
             </a:pPr>
             <a:r>
-              <a:rPr lang="en-US" altLang="ko-KR" sz="1600" dirty="0">
-                <a:latin typeface="맑은 고딕 Semilight" panose="020B0502040204020203" pitchFamily="50" charset="-127"/>
-                <a:ea typeface="맑은 고딕 Semilight" panose="020B0502040204020203" pitchFamily="50" charset="-127"/>
-                <a:cs typeface="맑은 고딕 Semilight" panose="020B0502040204020203" pitchFamily="50" charset="-127"/>
-              </a:rPr>
-              <a:t>Installation</a:t>
+              <a:rPr lang="en-US" altLang="ko-KR" sz="2000" b="1" dirty="0">
+                <a:latin typeface="D2Coding" panose="020B0609020101020101" pitchFamily="49" charset="-127"/>
+                <a:ea typeface="D2Coding" panose="020B0609020101020101" pitchFamily="49" charset="-127"/>
+                <a:cs typeface="맑은 고딕 Semilight" panose="020B0502040204020203" pitchFamily="50" charset="-127"/>
+              </a:rPr>
+              <a:t>Tensor</a:t>
             </a:r>
           </a:p>
           <a:p>
             <a:pPr marL="342900" indent="-342900">
+              <a:lnSpc>
+                <a:spcPct val="150000"/>
+              </a:lnSpc>
               <a:buFont typeface="+mj-lt"/>
               <a:buAutoNum type="arabicPeriod"/>
             </a:pPr>
             <a:r>
-              <a:rPr lang="en-US" altLang="ko-KR" sz="1600" dirty="0">
-                <a:latin typeface="맑은 고딕 Semilight" panose="020B0502040204020203" pitchFamily="50" charset="-127"/>
-                <a:ea typeface="맑은 고딕 Semilight" panose="020B0502040204020203" pitchFamily="50" charset="-127"/>
-                <a:cs typeface="맑은 고딕 Semilight" panose="020B0502040204020203" pitchFamily="50" charset="-127"/>
-              </a:rPr>
-              <a:t>Tensor Basics</a:t>
-            </a:r>
+              <a:rPr lang="en-US" altLang="ko-KR" sz="2000" b="1" dirty="0" err="1">
+                <a:latin typeface="D2Coding" panose="020B0609020101020101" pitchFamily="49" charset="-127"/>
+                <a:ea typeface="D2Coding" panose="020B0609020101020101" pitchFamily="49" charset="-127"/>
+                <a:cs typeface="맑은 고딕 Semilight" panose="020B0502040204020203" pitchFamily="50" charset="-127"/>
+              </a:rPr>
+              <a:t>Autograd</a:t>
+            </a:r>
+            <a:endParaRPr lang="en-US" altLang="ko-KR" sz="2000" b="1" dirty="0">
+              <a:latin typeface="D2Coding" panose="020B0609020101020101" pitchFamily="49" charset="-127"/>
+              <a:ea typeface="D2Coding" panose="020B0609020101020101" pitchFamily="49" charset="-127"/>
+              <a:cs typeface="맑은 고딕 Semilight" panose="020B0502040204020203" pitchFamily="50" charset="-127"/>
+            </a:endParaRPr>
           </a:p>
           <a:p>
             <a:pPr marL="342900" indent="-342900">
+              <a:lnSpc>
+                <a:spcPct val="150000"/>
+              </a:lnSpc>
               <a:buFont typeface="+mj-lt"/>
               <a:buAutoNum type="arabicPeriod"/>
             </a:pPr>
             <a:r>
-              <a:rPr lang="en-US" altLang="ko-KR" sz="1600" dirty="0" err="1">
-                <a:latin typeface="맑은 고딕 Semilight" panose="020B0502040204020203" pitchFamily="50" charset="-127"/>
-                <a:ea typeface="맑은 고딕 Semilight" panose="020B0502040204020203" pitchFamily="50" charset="-127"/>
-                <a:cs typeface="맑은 고딕 Semilight" panose="020B0502040204020203" pitchFamily="50" charset="-127"/>
-              </a:rPr>
-              <a:t>Autograd</a:t>
-            </a:r>
-            <a:endParaRPr lang="en-US" altLang="ko-KR" sz="1600" dirty="0">
-              <a:latin typeface="맑은 고딕 Semilight" panose="020B0502040204020203" pitchFamily="50" charset="-127"/>
-              <a:ea typeface="맑은 고딕 Semilight" panose="020B0502040204020203" pitchFamily="50" charset="-127"/>
-              <a:cs typeface="맑은 고딕 Semilight" panose="020B0502040204020203" pitchFamily="50" charset="-127"/>
-            </a:endParaRPr>
+              <a:rPr lang="en-US" altLang="ko-KR" sz="2000" b="1" dirty="0">
+                <a:latin typeface="D2Coding" panose="020B0609020101020101" pitchFamily="49" charset="-127"/>
+                <a:ea typeface="D2Coding" panose="020B0609020101020101" pitchFamily="49" charset="-127"/>
+                <a:cs typeface="맑은 고딕 Semilight" panose="020B0502040204020203" pitchFamily="50" charset="-127"/>
+              </a:rPr>
+              <a:t>Backpropagation</a:t>
+            </a:r>
           </a:p>
           <a:p>
             <a:pPr marL="342900" indent="-342900">
+              <a:lnSpc>
+                <a:spcPct val="150000"/>
+              </a:lnSpc>
               <a:buFont typeface="+mj-lt"/>
               <a:buAutoNum type="arabicPeriod"/>
             </a:pPr>
             <a:r>
-              <a:rPr lang="en-US" altLang="ko-KR" sz="1600" dirty="0">
-                <a:latin typeface="맑은 고딕 Semilight" panose="020B0502040204020203" pitchFamily="50" charset="-127"/>
-                <a:ea typeface="맑은 고딕 Semilight" panose="020B0502040204020203" pitchFamily="50" charset="-127"/>
-                <a:cs typeface="맑은 고딕 Semilight" panose="020B0502040204020203" pitchFamily="50" charset="-127"/>
-              </a:rPr>
-              <a:t>Backpropagation</a:t>
+              <a:rPr lang="en-US" altLang="ko-KR" sz="2000" b="1" dirty="0">
+                <a:latin typeface="D2Coding" panose="020B0609020101020101" pitchFamily="49" charset="-127"/>
+                <a:ea typeface="D2Coding" panose="020B0609020101020101" pitchFamily="49" charset="-127"/>
+                <a:cs typeface="맑은 고딕 Semilight" panose="020B0502040204020203" pitchFamily="50" charset="-127"/>
+              </a:rPr>
+              <a:t>Forward &amp; Backward Pass</a:t>
             </a:r>
           </a:p>
           <a:p>
             <a:pPr marL="342900" indent="-342900">
+              <a:lnSpc>
+                <a:spcPct val="150000"/>
+              </a:lnSpc>
               <a:buFont typeface="+mj-lt"/>
               <a:buAutoNum type="arabicPeriod"/>
             </a:pPr>
             <a:r>
-              <a:rPr lang="en-US" altLang="ko-KR" sz="1600" dirty="0">
-                <a:latin typeface="맑은 고딕 Semilight" panose="020B0502040204020203" pitchFamily="50" charset="-127"/>
-                <a:ea typeface="맑은 고딕 Semilight" panose="020B0502040204020203" pitchFamily="50" charset="-127"/>
-                <a:cs typeface="맑은 고딕 Semilight" panose="020B0502040204020203" pitchFamily="50" charset="-127"/>
-              </a:rPr>
-              <a:t>Gradient Descent With </a:t>
-            </a:r>
-            <a:r>
-              <a:rPr lang="en-US" altLang="ko-KR" sz="1600" dirty="0" err="1">
-                <a:latin typeface="맑은 고딕 Semilight" panose="020B0502040204020203" pitchFamily="50" charset="-127"/>
-                <a:ea typeface="맑은 고딕 Semilight" panose="020B0502040204020203" pitchFamily="50" charset="-127"/>
-                <a:cs typeface="맑은 고딕 Semilight" panose="020B0502040204020203" pitchFamily="50" charset="-127"/>
-              </a:rPr>
-              <a:t>Autograd</a:t>
-            </a:r>
-            <a:r>
-              <a:rPr lang="en-US" altLang="ko-KR" sz="1600" dirty="0">
-                <a:latin typeface="맑은 고딕 Semilight" panose="020B0502040204020203" pitchFamily="50" charset="-127"/>
-                <a:ea typeface="맑은 고딕 Semilight" panose="020B0502040204020203" pitchFamily="50" charset="-127"/>
-                <a:cs typeface="맑은 고딕 Semilight" panose="020B0502040204020203" pitchFamily="50" charset="-127"/>
-              </a:rPr>
-              <a:t> and Backpropagation</a:t>
+              <a:rPr lang="en-US" altLang="ko-KR" sz="2000" b="1" dirty="0">
+                <a:latin typeface="D2Coding" panose="020B0609020101020101" pitchFamily="49" charset="-127"/>
+                <a:ea typeface="D2Coding" panose="020B0609020101020101" pitchFamily="49" charset="-127"/>
+                <a:cs typeface="맑은 고딕 Semilight" panose="020B0502040204020203" pitchFamily="50" charset="-127"/>
+              </a:rPr>
+              <a:t>Optimizer &amp; Model</a:t>
             </a:r>
           </a:p>
           <a:p>
             <a:pPr marL="342900" indent="-342900">
+              <a:lnSpc>
+                <a:spcPct val="150000"/>
+              </a:lnSpc>
               <a:buFont typeface="+mj-lt"/>
               <a:buAutoNum type="arabicPeriod"/>
             </a:pPr>
             <a:r>
-              <a:rPr lang="en-US" altLang="ko-KR" sz="1600" dirty="0">
-                <a:latin typeface="맑은 고딕 Semilight" panose="020B0502040204020203" pitchFamily="50" charset="-127"/>
-                <a:ea typeface="맑은 고딕 Semilight" panose="020B0502040204020203" pitchFamily="50" charset="-127"/>
-                <a:cs typeface="맑은 고딕 Semilight" panose="020B0502040204020203" pitchFamily="50" charset="-127"/>
-              </a:rPr>
-              <a:t>Training Pipeline: Model, Loss, and Optimizer</a:t>
+              <a:rPr lang="en-US" altLang="ko-KR" sz="2000" b="1" dirty="0">
+                <a:latin typeface="D2Coding" panose="020B0609020101020101" pitchFamily="49" charset="-127"/>
+                <a:ea typeface="D2Coding" panose="020B0609020101020101" pitchFamily="49" charset="-127"/>
+                <a:cs typeface="맑은 고딕 Semilight" panose="020B0502040204020203" pitchFamily="50" charset="-127"/>
+              </a:rPr>
+              <a:t>Optimizers</a:t>
             </a:r>
           </a:p>
           <a:p>
             <a:pPr marL="342900" indent="-342900">
+              <a:lnSpc>
+                <a:spcPct val="150000"/>
+              </a:lnSpc>
               <a:buFont typeface="+mj-lt"/>
               <a:buAutoNum type="arabicPeriod"/>
             </a:pPr>
             <a:r>
-              <a:rPr lang="en-US" altLang="ko-KR" sz="1600" dirty="0">
-                <a:latin typeface="맑은 고딕 Semilight" panose="020B0502040204020203" pitchFamily="50" charset="-127"/>
-                <a:ea typeface="맑은 고딕 Semilight" panose="020B0502040204020203" pitchFamily="50" charset="-127"/>
-                <a:cs typeface="맑은 고딕 Semilight" panose="020B0502040204020203" pitchFamily="50" charset="-127"/>
-              </a:rPr>
-              <a:t>Linear Regression</a:t>
+              <a:rPr lang="en-US" altLang="ko-KR" sz="2000" b="1" dirty="0">
+                <a:latin typeface="D2Coding" panose="020B0609020101020101" pitchFamily="49" charset="-127"/>
+                <a:ea typeface="D2Coding" panose="020B0609020101020101" pitchFamily="49" charset="-127"/>
+                <a:cs typeface="맑은 고딕 Semilight" panose="020B0502040204020203" pitchFamily="50" charset="-127"/>
+              </a:rPr>
+              <a:t> Loss Function with L1, L2 regularization</a:t>
             </a:r>
           </a:p>
           <a:p>
             <a:pPr marL="342900" indent="-342900">
+              <a:lnSpc>
+                <a:spcPct val="150000"/>
+              </a:lnSpc>
               <a:buFont typeface="+mj-lt"/>
               <a:buAutoNum type="arabicPeriod"/>
             </a:pPr>
             <a:r>
-              <a:rPr lang="en-US" altLang="ko-KR" sz="1600" dirty="0">
-                <a:latin typeface="맑은 고딕 Semilight" panose="020B0502040204020203" pitchFamily="50" charset="-127"/>
-                <a:ea typeface="맑은 고딕 Semilight" panose="020B0502040204020203" pitchFamily="50" charset="-127"/>
-                <a:cs typeface="맑은 고딕 Semilight" panose="020B0502040204020203" pitchFamily="50" charset="-127"/>
-              </a:rPr>
-              <a:t>Logistic Regression</a:t>
+              <a:rPr lang="en-US" altLang="ko-KR" sz="2000" b="1" dirty="0">
+                <a:latin typeface="D2Coding" panose="020B0609020101020101" pitchFamily="49" charset="-127"/>
+                <a:ea typeface="D2Coding" panose="020B0609020101020101" pitchFamily="49" charset="-127"/>
+                <a:cs typeface="맑은 고딕 Semilight" panose="020B0502040204020203" pitchFamily="50" charset="-127"/>
+              </a:rPr>
+              <a:t> Regularizations</a:t>
             </a:r>
           </a:p>
           <a:p>
             <a:pPr marL="342900" indent="-342900">
+              <a:lnSpc>
+                <a:spcPct val="150000"/>
+              </a:lnSpc>
               <a:buFont typeface="+mj-lt"/>
               <a:buAutoNum type="arabicPeriod"/>
             </a:pPr>
             <a:r>
-              <a:rPr lang="en-US" altLang="ko-KR" sz="1600" dirty="0">
-                <a:latin typeface="맑은 고딕 Semilight" panose="020B0502040204020203" pitchFamily="50" charset="-127"/>
-                <a:ea typeface="맑은 고딕 Semilight" panose="020B0502040204020203" pitchFamily="50" charset="-127"/>
-                <a:cs typeface="맑은 고딕 Semilight" panose="020B0502040204020203" pitchFamily="50" charset="-127"/>
-              </a:rPr>
-              <a:t>Dataset and </a:t>
-            </a:r>
-            <a:r>
-              <a:rPr lang="en-US" altLang="ko-KR" sz="1600" dirty="0" err="1">
-                <a:latin typeface="맑은 고딕 Semilight" panose="020B0502040204020203" pitchFamily="50" charset="-127"/>
-                <a:ea typeface="맑은 고딕 Semilight" panose="020B0502040204020203" pitchFamily="50" charset="-127"/>
-                <a:cs typeface="맑은 고딕 Semilight" panose="020B0502040204020203" pitchFamily="50" charset="-127"/>
-              </a:rPr>
-              <a:t>DataLoader</a:t>
-            </a:r>
-            <a:endParaRPr lang="en-US" altLang="ko-KR" sz="1600" dirty="0">
-              <a:latin typeface="맑은 고딕 Semilight" panose="020B0502040204020203" pitchFamily="50" charset="-127"/>
-              <a:ea typeface="맑은 고딕 Semilight" panose="020B0502040204020203" pitchFamily="50" charset="-127"/>
+              <a:rPr lang="en-US" altLang="ko-KR" sz="2000" b="1" dirty="0">
+                <a:latin typeface="D2Coding" panose="020B0609020101020101" pitchFamily="49" charset="-127"/>
+                <a:ea typeface="D2Coding" panose="020B0609020101020101" pitchFamily="49" charset="-127"/>
+                <a:cs typeface="맑은 고딕 Semilight" panose="020B0502040204020203" pitchFamily="50" charset="-127"/>
+              </a:rPr>
+              <a:t> </a:t>
+            </a:r>
+            <a:r>
+              <a:rPr lang="en-US" altLang="ko-KR" sz="2000" b="1" dirty="0" err="1">
+                <a:latin typeface="D2Coding" panose="020B0609020101020101" pitchFamily="49" charset="-127"/>
+                <a:ea typeface="D2Coding" panose="020B0609020101020101" pitchFamily="49" charset="-127"/>
+                <a:cs typeface="맑은 고딕 Semilight" panose="020B0502040204020203" pitchFamily="50" charset="-127"/>
+              </a:rPr>
+              <a:t>Pytorch</a:t>
+            </a:r>
+            <a:r>
+              <a:rPr lang="en-US" altLang="ko-KR" sz="2000" b="1" dirty="0">
+                <a:latin typeface="D2Coding" panose="020B0609020101020101" pitchFamily="49" charset="-127"/>
+                <a:ea typeface="D2Coding" panose="020B0609020101020101" pitchFamily="49" charset="-127"/>
+                <a:cs typeface="맑은 고딕 Semilight" panose="020B0502040204020203" pitchFamily="50" charset="-127"/>
+              </a:rPr>
+              <a:t> with fashion </a:t>
+            </a:r>
+            <a:r>
+              <a:rPr lang="en-US" altLang="ko-KR" sz="2000" b="1" dirty="0" err="1">
+                <a:latin typeface="D2Coding" panose="020B0609020101020101" pitchFamily="49" charset="-127"/>
+                <a:ea typeface="D2Coding" panose="020B0609020101020101" pitchFamily="49" charset="-127"/>
+                <a:cs typeface="맑은 고딕 Semilight" panose="020B0502040204020203" pitchFamily="50" charset="-127"/>
+              </a:rPr>
+              <a:t>mnist</a:t>
+            </a:r>
+            <a:endParaRPr lang="en-US" altLang="ko-KR" sz="2000" b="1" dirty="0">
+              <a:latin typeface="D2Coding" panose="020B0609020101020101" pitchFamily="49" charset="-127"/>
+              <a:ea typeface="D2Coding" panose="020B0609020101020101" pitchFamily="49" charset="-127"/>
               <a:cs typeface="맑은 고딕 Semilight" panose="020B0502040204020203" pitchFamily="50" charset="-127"/>
             </a:endParaRPr>
           </a:p>
           <a:p>
             <a:pPr marL="342900" indent="-342900">
+              <a:lnSpc>
+                <a:spcPct val="150000"/>
+              </a:lnSpc>
               <a:buFont typeface="+mj-lt"/>
               <a:buAutoNum type="arabicPeriod"/>
             </a:pPr>
             <a:r>
-              <a:rPr lang="en-US" altLang="ko-KR" sz="1600" dirty="0">
-                <a:latin typeface="맑은 고딕 Semilight" panose="020B0502040204020203" pitchFamily="50" charset="-127"/>
-                <a:ea typeface="맑은 고딕 Semilight" panose="020B0502040204020203" pitchFamily="50" charset="-127"/>
-                <a:cs typeface="맑은 고딕 Semilight" panose="020B0502040204020203" pitchFamily="50" charset="-127"/>
-              </a:rPr>
-              <a:t>Dataset Transforms</a:t>
+              <a:rPr lang="en-US" altLang="ko-KR" sz="2000" b="1" dirty="0">
+                <a:latin typeface="D2Coding" panose="020B0609020101020101" pitchFamily="49" charset="-127"/>
+                <a:ea typeface="D2Coding" panose="020B0609020101020101" pitchFamily="49" charset="-127"/>
+                <a:cs typeface="맑은 고딕 Semilight" panose="020B0502040204020203" pitchFamily="50" charset="-127"/>
+              </a:rPr>
+              <a:t> Understanding basic CNN</a:t>
             </a:r>
           </a:p>
           <a:p>
             <a:pPr marL="342900" indent="-342900">
+              <a:lnSpc>
+                <a:spcPct val="150000"/>
+              </a:lnSpc>
               <a:buFont typeface="+mj-lt"/>
               <a:buAutoNum type="arabicPeriod"/>
             </a:pPr>
             <a:r>
-              <a:rPr lang="en-US" altLang="ko-KR" sz="1600" dirty="0" err="1">
-                <a:latin typeface="맑은 고딕 Semilight" panose="020B0502040204020203" pitchFamily="50" charset="-127"/>
-                <a:ea typeface="맑은 고딕 Semilight" panose="020B0502040204020203" pitchFamily="50" charset="-127"/>
-                <a:cs typeface="맑은 고딕 Semilight" panose="020B0502040204020203" pitchFamily="50" charset="-127"/>
-              </a:rPr>
-              <a:t>Softmax</a:t>
-            </a:r>
-            <a:r>
-              <a:rPr lang="en-US" altLang="ko-KR" sz="1600" dirty="0">
-                <a:latin typeface="맑은 고딕 Semilight" panose="020B0502040204020203" pitchFamily="50" charset="-127"/>
-                <a:ea typeface="맑은 고딕 Semilight" panose="020B0502040204020203" pitchFamily="50" charset="-127"/>
-                <a:cs typeface="맑은 고딕 Semilight" panose="020B0502040204020203" pitchFamily="50" charset="-127"/>
-              </a:rPr>
-              <a:t> And Cross Entropy</a:t>
-            </a:r>
-          </a:p>
-          <a:p>
-            <a:pPr marL="342900" indent="-342900">
-              <a:buFont typeface="+mj-lt"/>
-              <a:buAutoNum type="arabicPeriod"/>
-            </a:pPr>
-            <a:r>
-              <a:rPr lang="en-US" altLang="ko-KR" sz="1600" dirty="0">
-                <a:latin typeface="맑은 고딕 Semilight" panose="020B0502040204020203" pitchFamily="50" charset="-127"/>
-                <a:ea typeface="맑은 고딕 Semilight" panose="020B0502040204020203" pitchFamily="50" charset="-127"/>
-                <a:cs typeface="맑은 고딕 Semilight" panose="020B0502040204020203" pitchFamily="50" charset="-127"/>
-              </a:rPr>
-              <a:t>Activation Functions</a:t>
-            </a:r>
-          </a:p>
-          <a:p>
-            <a:pPr marL="342900" indent="-342900">
-              <a:buFont typeface="+mj-lt"/>
-              <a:buAutoNum type="arabicPeriod"/>
-            </a:pPr>
-            <a:r>
-              <a:rPr lang="en-US" altLang="ko-KR" sz="1600" dirty="0">
-                <a:latin typeface="맑은 고딕 Semilight" panose="020B0502040204020203" pitchFamily="50" charset="-127"/>
-                <a:ea typeface="맑은 고딕 Semilight" panose="020B0502040204020203" pitchFamily="50" charset="-127"/>
-                <a:cs typeface="맑은 고딕 Semilight" panose="020B0502040204020203" pitchFamily="50" charset="-127"/>
-              </a:rPr>
-              <a:t>Feed-Forward Neural Net</a:t>
-            </a:r>
-          </a:p>
-          <a:p>
-            <a:pPr marL="342900" indent="-342900">
-              <a:buFont typeface="+mj-lt"/>
-              <a:buAutoNum type="arabicPeriod"/>
-            </a:pPr>
-            <a:r>
-              <a:rPr lang="en-US" altLang="ko-KR" sz="1600" dirty="0">
-                <a:latin typeface="맑은 고딕 Semilight" panose="020B0502040204020203" pitchFamily="50" charset="-127"/>
-                <a:ea typeface="맑은 고딕 Semilight" panose="020B0502040204020203" pitchFamily="50" charset="-127"/>
-                <a:cs typeface="맑은 고딕 Semilight" panose="020B0502040204020203" pitchFamily="50" charset="-127"/>
-              </a:rPr>
-              <a:t>Convolutional Neural Net (CNN)</a:t>
-            </a:r>
-          </a:p>
-          <a:p>
-            <a:pPr marL="342900" indent="-342900">
-              <a:buFont typeface="+mj-lt"/>
-              <a:buAutoNum type="arabicPeriod"/>
-            </a:pPr>
-            <a:r>
-              <a:rPr lang="en-US" altLang="ko-KR" sz="1600" dirty="0">
-                <a:latin typeface="맑은 고딕 Semilight" panose="020B0502040204020203" pitchFamily="50" charset="-127"/>
-                <a:ea typeface="맑은 고딕 Semilight" panose="020B0502040204020203" pitchFamily="50" charset="-127"/>
-                <a:cs typeface="맑은 고딕 Semilight" panose="020B0502040204020203" pitchFamily="50" charset="-127"/>
-              </a:rPr>
-              <a:t>Transfer Learning</a:t>
-            </a:r>
-          </a:p>
-          <a:p>
-            <a:pPr marL="342900" indent="-342900">
-              <a:buFont typeface="+mj-lt"/>
-              <a:buAutoNum type="arabicPeriod"/>
-            </a:pPr>
-            <a:r>
-              <a:rPr lang="en-US" altLang="ko-KR" sz="1600" dirty="0" err="1">
-                <a:latin typeface="맑은 고딕 Semilight" panose="020B0502040204020203" pitchFamily="50" charset="-127"/>
-                <a:ea typeface="맑은 고딕 Semilight" panose="020B0502040204020203" pitchFamily="50" charset="-127"/>
-                <a:cs typeface="맑은 고딕 Semilight" panose="020B0502040204020203" pitchFamily="50" charset="-127"/>
-              </a:rPr>
-              <a:t>Tensorboard</a:t>
-            </a:r>
-            <a:endParaRPr lang="en-US" altLang="ko-KR" sz="1600" dirty="0">
-              <a:latin typeface="맑은 고딕 Semilight" panose="020B0502040204020203" pitchFamily="50" charset="-127"/>
-              <a:ea typeface="맑은 고딕 Semilight" panose="020B0502040204020203" pitchFamily="50" charset="-127"/>
-              <a:cs typeface="맑은 고딕 Semilight" panose="020B0502040204020203" pitchFamily="50" charset="-127"/>
-            </a:endParaRPr>
-          </a:p>
-          <a:p>
-            <a:pPr marL="342900" indent="-342900">
-              <a:buFont typeface="+mj-lt"/>
-              <a:buAutoNum type="arabicPeriod"/>
-            </a:pPr>
-            <a:r>
-              <a:rPr lang="en-US" altLang="ko-KR" sz="1600" dirty="0">
-                <a:latin typeface="맑은 고딕 Semilight" panose="020B0502040204020203" pitchFamily="50" charset="-127"/>
-                <a:ea typeface="맑은 고딕 Semilight" panose="020B0502040204020203" pitchFamily="50" charset="-127"/>
-                <a:cs typeface="맑은 고딕 Semilight" panose="020B0502040204020203" pitchFamily="50" charset="-127"/>
-              </a:rPr>
-              <a:t>Save and Load Models</a:t>
-            </a:r>
-          </a:p>
-          <a:p>
-            <a:pPr marL="342900" indent="-342900">
-              <a:buFont typeface="+mj-lt"/>
-              <a:buAutoNum type="arabicPeriod"/>
-            </a:pPr>
-            <a:endParaRPr lang="en-US" altLang="ko-KR" sz="1600" dirty="0">
-              <a:latin typeface="맑은 고딕 Semilight" panose="020B0502040204020203" pitchFamily="50" charset="-127"/>
-              <a:ea typeface="맑은 고딕 Semilight" panose="020B0502040204020203" pitchFamily="50" charset="-127"/>
-              <a:cs typeface="맑은 고딕 Semilight" panose="020B0502040204020203" pitchFamily="50" charset="-127"/>
-            </a:endParaRPr>
-          </a:p>
-          <a:p>
-            <a:r>
-              <a:rPr lang="en-US" altLang="ko-KR" sz="1600" dirty="0" err="1">
-                <a:latin typeface="맑은 고딕 Semilight" panose="020B0502040204020203" pitchFamily="50" charset="-127"/>
-                <a:ea typeface="맑은 고딕 Semilight" panose="020B0502040204020203" pitchFamily="50" charset="-127"/>
-                <a:cs typeface="맑은 고딕 Semilight" panose="020B0502040204020203" pitchFamily="50" charset="-127"/>
-                <a:hlinkClick r:id="rId3">
-                  <a:extLst>
-                    <a:ext uri="{A12FA001-AC4F-418D-AE19-62706E023703}">
-                      <ahyp:hlinkClr xmlns:ahyp="http://schemas.microsoft.com/office/drawing/2018/hyperlinkcolor" val="tx"/>
-                    </a:ext>
-                  </a:extLst>
-                </a:hlinkClick>
-              </a:rPr>
-              <a:t>pytorch</a:t>
-            </a:r>
-            <a:endParaRPr lang="en-US" altLang="ko-KR" sz="1600" dirty="0">
-              <a:latin typeface="맑은 고딕 Semilight" panose="020B0502040204020203" pitchFamily="50" charset="-127"/>
-              <a:ea typeface="맑은 고딕 Semilight" panose="020B0502040204020203" pitchFamily="50" charset="-127"/>
-              <a:cs typeface="맑은 고딕 Semilight" panose="020B0502040204020203" pitchFamily="50" charset="-127"/>
-            </a:endParaRPr>
+              <a:rPr lang="en-US" altLang="ko-KR" sz="2000" b="1" dirty="0">
+                <a:latin typeface="D2Coding" panose="020B0609020101020101" pitchFamily="49" charset="-127"/>
+                <a:ea typeface="D2Coding" panose="020B0609020101020101" pitchFamily="49" charset="-127"/>
+                <a:cs typeface="맑은 고딕 Semilight" panose="020B0502040204020203" pitchFamily="50" charset="-127"/>
+              </a:rPr>
+              <a:t> Roadmap to ML &amp; ML</a:t>
+            </a:r>
           </a:p>
         </p:txBody>
       </p:sp>
     </p:spTree>
     <p:extLst>
       <p:ext uri="{BB962C8B-B14F-4D97-AF65-F5344CB8AC3E}">
-        <p14:creationId xmlns:p14="http://schemas.microsoft.com/office/powerpoint/2010/main" val="2361090074"/>
+        <p14:creationId xmlns:p14="http://schemas.microsoft.com/office/powerpoint/2010/main" val="722090702"/>
       </p:ext>
     </p:extLst>
   </p:cSld>
@@ -10291,7 +14023,461 @@
 </p:sld>
 </file>
 
-<file path=ppt/slides/slide18.xml><?xml version="1.0" encoding="utf-8"?>
+<file path=ppt/slides/slide22.xml><?xml version="1.0" encoding="utf-8"?>
+<p:sld xmlns:a="http://schemas.openxmlformats.org/drawingml/2006/main" xmlns:r="http://schemas.openxmlformats.org/officeDocument/2006/relationships" xmlns:p="http://schemas.openxmlformats.org/presentationml/2006/main">
+  <p:cSld>
+    <p:spTree>
+      <p:nvGrpSpPr>
+        <p:cNvPr id="1" name="">
+          <a:extLst>
+            <a:ext uri="{FF2B5EF4-FFF2-40B4-BE49-F238E27FC236}">
+              <a16:creationId xmlns:a16="http://schemas.microsoft.com/office/drawing/2014/main" id="{B7F6F69F-5F21-9965-5FF5-3C563F827071}"/>
+            </a:ext>
+          </a:extLst>
+        </p:cNvPr>
+        <p:cNvGrpSpPr/>
+        <p:nvPr/>
+      </p:nvGrpSpPr>
+      <p:grpSpPr>
+        <a:xfrm>
+          <a:off x="0" y="0"/>
+          <a:ext cx="0" cy="0"/>
+          <a:chOff x="0" y="0"/>
+          <a:chExt cx="0" cy="0"/>
+        </a:xfrm>
+      </p:grpSpPr>
+      <p:sp>
+        <p:nvSpPr>
+          <p:cNvPr id="12" name="슬라이드 번호 개체 틀 11">
+            <a:extLst>
+              <a:ext uri="{FF2B5EF4-FFF2-40B4-BE49-F238E27FC236}">
+                <a16:creationId xmlns:a16="http://schemas.microsoft.com/office/drawing/2014/main" id="{136A6429-98B6-0EEE-AEE1-F592305EC250}"/>
+              </a:ext>
+            </a:extLst>
+          </p:cNvPr>
+          <p:cNvSpPr>
+            <a:spLocks noGrp="1"/>
+          </p:cNvSpPr>
+          <p:nvPr>
+            <p:ph type="sldNum" sz="quarter" idx="4"/>
+          </p:nvPr>
+        </p:nvSpPr>
+        <p:spPr/>
+        <p:txBody>
+          <a:bodyPr/>
+          <a:lstStyle/>
+          <a:p>
+            <a:fld id="{9860EDB8-5305-433F-BE41-D7A86D811DB3}" type="slidenum">
+              <a:rPr lang="en-US" altLang="ko-KR" noProof="0" smtClean="0"/>
+              <a:pPr/>
+              <a:t>22</a:t>
+            </a:fld>
+            <a:endParaRPr lang="ko-KR" altLang="en-US" noProof="0"/>
+          </a:p>
+        </p:txBody>
+      </p:sp>
+      <p:sp>
+        <p:nvSpPr>
+          <p:cNvPr id="6" name="제목 7">
+            <a:extLst>
+              <a:ext uri="{FF2B5EF4-FFF2-40B4-BE49-F238E27FC236}">
+                <a16:creationId xmlns:a16="http://schemas.microsoft.com/office/drawing/2014/main" id="{77043BCF-860E-7E9C-4462-D6539A24628F}"/>
+              </a:ext>
+            </a:extLst>
+          </p:cNvPr>
+          <p:cNvSpPr>
+            <a:spLocks noGrp="1"/>
+          </p:cNvSpPr>
+          <p:nvPr>
+            <p:ph type="title"/>
+          </p:nvPr>
+        </p:nvSpPr>
+        <p:spPr>
+          <a:xfrm>
+            <a:off x="521207" y="448056"/>
+            <a:ext cx="9222868" cy="640080"/>
+          </a:xfrm>
+        </p:spPr>
+        <p:txBody>
+          <a:bodyPr rtlCol="0">
+            <a:noAutofit/>
+          </a:bodyPr>
+          <a:lstStyle/>
+          <a:p>
+            <a:r>
+              <a:rPr lang="en-US" altLang="ko-KR" b="1" dirty="0">
+                <a:latin typeface="D2Coding" panose="020B0609020101020101" pitchFamily="49" charset="-127"/>
+                <a:ea typeface="D2Coding" panose="020B0609020101020101" pitchFamily="49" charset="-127"/>
+                <a:cs typeface="Segoe UI Light" panose="020B0502040204020203" pitchFamily="34" charset="0"/>
+              </a:rPr>
+              <a:t>Hands-on : FNN(feed-forward neural networks) </a:t>
+            </a:r>
+            <a:endParaRPr lang="ko-KR" altLang="en-US" b="1" dirty="0">
+              <a:latin typeface="D2Coding" panose="020B0609020101020101" pitchFamily="49" charset="-127"/>
+              <a:ea typeface="D2Coding" panose="020B0609020101020101" pitchFamily="49" charset="-127"/>
+              <a:cs typeface="Segoe UI Light" panose="020B0502040204020203" pitchFamily="34" charset="0"/>
+            </a:endParaRPr>
+          </a:p>
+        </p:txBody>
+      </p:sp>
+      <p:pic>
+        <p:nvPicPr>
+          <p:cNvPr id="13" name="그림 12">
+            <a:extLst>
+              <a:ext uri="{FF2B5EF4-FFF2-40B4-BE49-F238E27FC236}">
+                <a16:creationId xmlns:a16="http://schemas.microsoft.com/office/drawing/2014/main" id="{49EA13C3-4AEE-C90F-56A0-A0BA7A0EA473}"/>
+              </a:ext>
+            </a:extLst>
+          </p:cNvPr>
+          <p:cNvPicPr>
+            <a:picLocks noChangeAspect="1"/>
+          </p:cNvPicPr>
+          <p:nvPr/>
+        </p:nvPicPr>
+        <p:blipFill>
+          <a:blip r:embed="rId3"/>
+          <a:stretch>
+            <a:fillRect/>
+          </a:stretch>
+        </p:blipFill>
+        <p:spPr>
+          <a:xfrm>
+            <a:off x="10167455" y="2124"/>
+            <a:ext cx="1775896" cy="1086012"/>
+          </a:xfrm>
+          <a:prstGeom prst="rect">
+            <a:avLst/>
+          </a:prstGeom>
+        </p:spPr>
+      </p:pic>
+      <p:sp>
+        <p:nvSpPr>
+          <p:cNvPr id="14" name="TextBox 13">
+            <a:extLst>
+              <a:ext uri="{FF2B5EF4-FFF2-40B4-BE49-F238E27FC236}">
+                <a16:creationId xmlns:a16="http://schemas.microsoft.com/office/drawing/2014/main" id="{EF47D98B-3A5A-EA27-BD67-65ED7F2E9C89}"/>
+              </a:ext>
+            </a:extLst>
+          </p:cNvPr>
+          <p:cNvSpPr txBox="1"/>
+          <p:nvPr/>
+        </p:nvSpPr>
+        <p:spPr>
+          <a:xfrm>
+            <a:off x="589396" y="1280968"/>
+            <a:ext cx="8049780" cy="454292"/>
+          </a:xfrm>
+          <a:prstGeom prst="rect">
+            <a:avLst/>
+          </a:prstGeom>
+          <a:noFill/>
+        </p:spPr>
+        <p:txBody>
+          <a:bodyPr wrap="square" rtlCol="0">
+            <a:spAutoFit/>
+          </a:bodyPr>
+          <a:lstStyle/>
+          <a:p>
+            <a:pPr marL="285750" indent="-285750">
+              <a:lnSpc>
+                <a:spcPct val="150000"/>
+              </a:lnSpc>
+              <a:buFont typeface="Wingdings" panose="05000000000000000000" pitchFamily="2" charset="2"/>
+              <a:buChar char="v"/>
+            </a:pPr>
+            <a:r>
+              <a:rPr lang="en-US" altLang="ko-KR" dirty="0" err="1">
+                <a:latin typeface="맑은 고딕 Semilight" panose="020B0502040204020203" pitchFamily="50" charset="-127"/>
+                <a:ea typeface="맑은 고딕 Semilight" panose="020B0502040204020203" pitchFamily="50" charset="-127"/>
+                <a:cs typeface="맑은 고딕 Semilight" panose="020B0502040204020203" pitchFamily="50" charset="-127"/>
+              </a:rPr>
+              <a:t>pytorch</a:t>
+            </a:r>
+            <a:r>
+              <a:rPr lang="ko-KR" altLang="en-US" dirty="0">
+                <a:latin typeface="맑은 고딕 Semilight" panose="020B0502040204020203" pitchFamily="50" charset="-127"/>
+                <a:ea typeface="맑은 고딕 Semilight" panose="020B0502040204020203" pitchFamily="50" charset="-127"/>
+                <a:cs typeface="맑은 고딕 Semilight" panose="020B0502040204020203" pitchFamily="50" charset="-127"/>
+              </a:rPr>
+              <a:t> </a:t>
+            </a:r>
+            <a:r>
+              <a:rPr lang="en-US" altLang="ko-KR" dirty="0">
+                <a:latin typeface="맑은 고딕 Semilight" panose="020B0502040204020203" pitchFamily="50" charset="-127"/>
+                <a:ea typeface="맑은 고딕 Semilight" panose="020B0502040204020203" pitchFamily="50" charset="-127"/>
+                <a:cs typeface="맑은 고딕 Semilight" panose="020B0502040204020203" pitchFamily="50" charset="-127"/>
+              </a:rPr>
+              <a:t>beginner tutorials : </a:t>
+            </a:r>
+            <a:r>
+              <a:rPr lang="en-US" altLang="ko-KR" dirty="0">
+                <a:latin typeface="맑은 고딕 Semilight" panose="020B0502040204020203" pitchFamily="50" charset="-127"/>
+                <a:ea typeface="맑은 고딕 Semilight" panose="020B0502040204020203" pitchFamily="50" charset="-127"/>
+                <a:cs typeface="맑은 고딕 Semilight" panose="020B0502040204020203" pitchFamily="50" charset="-127"/>
+                <a:hlinkClick r:id="rId4">
+                  <a:extLst>
+                    <a:ext uri="{A12FA001-AC4F-418D-AE19-62706E023703}">
+                      <ahyp:hlinkClr xmlns:ahyp="http://schemas.microsoft.com/office/drawing/2018/hyperlinkcolor" val="tx"/>
+                    </a:ext>
+                  </a:extLst>
+                </a:hlinkClick>
+              </a:rPr>
+              <a:t>beginner/basics/</a:t>
+            </a:r>
+            <a:r>
+              <a:rPr lang="en-US" altLang="ko-KR" dirty="0" err="1">
+                <a:latin typeface="맑은 고딕 Semilight" panose="020B0502040204020203" pitchFamily="50" charset="-127"/>
+                <a:ea typeface="맑은 고딕 Semilight" panose="020B0502040204020203" pitchFamily="50" charset="-127"/>
+                <a:cs typeface="맑은 고딕 Semilight" panose="020B0502040204020203" pitchFamily="50" charset="-127"/>
+                <a:hlinkClick r:id="rId4">
+                  <a:extLst>
+                    <a:ext uri="{A12FA001-AC4F-418D-AE19-62706E023703}">
+                      <ahyp:hlinkClr xmlns:ahyp="http://schemas.microsoft.com/office/drawing/2018/hyperlinkcolor" val="tx"/>
+                    </a:ext>
+                  </a:extLst>
+                </a:hlinkClick>
+              </a:rPr>
+              <a:t>quickstart_tutorial</a:t>
+            </a:r>
+            <a:r>
+              <a:rPr lang="en-US" altLang="ko-KR" dirty="0">
+                <a:latin typeface="맑은 고딕 Semilight" panose="020B0502040204020203" pitchFamily="50" charset="-127"/>
+                <a:ea typeface="맑은 고딕 Semilight" panose="020B0502040204020203" pitchFamily="50" charset="-127"/>
+                <a:cs typeface="맑은 고딕 Semilight" panose="020B0502040204020203" pitchFamily="50" charset="-127"/>
+              </a:rPr>
+              <a:t> </a:t>
+            </a:r>
+            <a:r>
+              <a:rPr lang="ko-KR" altLang="en-US" dirty="0">
+                <a:latin typeface="맑은 고딕 Semilight" panose="020B0502040204020203" pitchFamily="50" charset="-127"/>
+                <a:ea typeface="맑은 고딕 Semilight" panose="020B0502040204020203" pitchFamily="50" charset="-127"/>
+                <a:cs typeface="맑은 고딕 Semilight" panose="020B0502040204020203" pitchFamily="50" charset="-127"/>
+              </a:rPr>
+              <a:t>실습하기</a:t>
+            </a:r>
+            <a:endParaRPr lang="en-US" altLang="ko-KR" dirty="0">
+              <a:latin typeface="맑은 고딕 Semilight" panose="020B0502040204020203" pitchFamily="50" charset="-127"/>
+              <a:ea typeface="맑은 고딕 Semilight" panose="020B0502040204020203" pitchFamily="50" charset="-127"/>
+              <a:cs typeface="맑은 고딕 Semilight" panose="020B0502040204020203" pitchFamily="50" charset="-127"/>
+            </a:endParaRPr>
+          </a:p>
+        </p:txBody>
+      </p:sp>
+      <p:pic>
+        <p:nvPicPr>
+          <p:cNvPr id="5" name="그림 4">
+            <a:extLst>
+              <a:ext uri="{FF2B5EF4-FFF2-40B4-BE49-F238E27FC236}">
+                <a16:creationId xmlns:a16="http://schemas.microsoft.com/office/drawing/2014/main" id="{35A247DB-62BC-D297-EEBF-9C1ADD451AB3}"/>
+              </a:ext>
+            </a:extLst>
+          </p:cNvPr>
+          <p:cNvPicPr>
+            <a:picLocks noChangeAspect="1"/>
+          </p:cNvPicPr>
+          <p:nvPr/>
+        </p:nvPicPr>
+        <p:blipFill>
+          <a:blip r:embed="rId5"/>
+          <a:stretch>
+            <a:fillRect/>
+          </a:stretch>
+        </p:blipFill>
+        <p:spPr>
+          <a:xfrm>
+            <a:off x="988197" y="1928092"/>
+            <a:ext cx="8660628" cy="4382002"/>
+          </a:xfrm>
+          <a:prstGeom prst="rect">
+            <a:avLst/>
+          </a:prstGeom>
+        </p:spPr>
+      </p:pic>
+      <p:sp>
+        <p:nvSpPr>
+          <p:cNvPr id="7" name="직사각형 6">
+            <a:extLst>
+              <a:ext uri="{FF2B5EF4-FFF2-40B4-BE49-F238E27FC236}">
+                <a16:creationId xmlns:a16="http://schemas.microsoft.com/office/drawing/2014/main" id="{2348AE8C-9754-5F92-FDF7-7599B2467D74}"/>
+              </a:ext>
+            </a:extLst>
+          </p:cNvPr>
+          <p:cNvSpPr/>
+          <p:nvPr/>
+        </p:nvSpPr>
+        <p:spPr>
+          <a:xfrm>
+            <a:off x="742950" y="2695575"/>
+            <a:ext cx="1600201" cy="3171825"/>
+          </a:xfrm>
+          <a:prstGeom prst="rect">
+            <a:avLst/>
+          </a:prstGeom>
+          <a:noFill/>
+          <a:ln w="38100">
+            <a:solidFill>
+              <a:srgbClr val="FF0000"/>
+            </a:solidFill>
+          </a:ln>
+        </p:spPr>
+        <p:style>
+          <a:lnRef idx="2">
+            <a:schemeClr val="accent1">
+              <a:shade val="15000"/>
+            </a:schemeClr>
+          </a:lnRef>
+          <a:fillRef idx="1">
+            <a:schemeClr val="accent1"/>
+          </a:fillRef>
+          <a:effectRef idx="0">
+            <a:schemeClr val="accent1"/>
+          </a:effectRef>
+          <a:fontRef idx="minor">
+            <a:schemeClr val="lt1"/>
+          </a:fontRef>
+        </p:style>
+        <p:txBody>
+          <a:bodyPr rtlCol="0" anchor="ctr"/>
+          <a:lstStyle/>
+          <a:p>
+            <a:pPr algn="ctr"/>
+            <a:endParaRPr lang="ko-KR" altLang="en-US"/>
+          </a:p>
+        </p:txBody>
+      </p:sp>
+      <p:pic>
+        <p:nvPicPr>
+          <p:cNvPr id="9" name="그림 8">
+            <a:extLst>
+              <a:ext uri="{FF2B5EF4-FFF2-40B4-BE49-F238E27FC236}">
+                <a16:creationId xmlns:a16="http://schemas.microsoft.com/office/drawing/2014/main" id="{EF3AC939-CEC8-D94D-6832-3F219F350332}"/>
+              </a:ext>
+            </a:extLst>
+          </p:cNvPr>
+          <p:cNvPicPr>
+            <a:picLocks noChangeAspect="1"/>
+          </p:cNvPicPr>
+          <p:nvPr/>
+        </p:nvPicPr>
+        <p:blipFill>
+          <a:blip r:embed="rId6"/>
+          <a:stretch>
+            <a:fillRect/>
+          </a:stretch>
+        </p:blipFill>
+        <p:spPr>
+          <a:xfrm>
+            <a:off x="9744075" y="3048557"/>
+            <a:ext cx="2088991" cy="2141071"/>
+          </a:xfrm>
+          <a:prstGeom prst="rect">
+            <a:avLst/>
+          </a:prstGeom>
+        </p:spPr>
+      </p:pic>
+    </p:spTree>
+    <p:extLst>
+      <p:ext uri="{BB962C8B-B14F-4D97-AF65-F5344CB8AC3E}">
+        <p14:creationId xmlns:p14="http://schemas.microsoft.com/office/powerpoint/2010/main" val="1508578287"/>
+      </p:ext>
+    </p:extLst>
+  </p:cSld>
+  <p:clrMapOvr>
+    <a:masterClrMapping/>
+  </p:clrMapOvr>
+  <mc:AlternateContent xmlns:mc="http://schemas.openxmlformats.org/markup-compatibility/2006" xmlns:p14="http://schemas.microsoft.com/office/powerpoint/2010/main">
+    <mc:Choice Requires="p14">
+      <p:transition p14:dur="10"/>
+    </mc:Choice>
+    <mc:Fallback xmlns="">
+      <p:transition/>
+    </mc:Fallback>
+  </mc:AlternateContent>
+  <p:timing>
+    <p:tnLst>
+      <p:par>
+        <p:cTn id="1" dur="indefinite" restart="never" nodeType="tmRoot">
+          <p:childTnLst>
+            <p:seq concurrent="1" nextAc="seek">
+              <p:cTn id="2" dur="indefinite" nodeType="mainSeq">
+                <p:childTnLst>
+                  <p:par>
+                    <p:cTn id="3" fill="hold">
+                      <p:stCondLst>
+                        <p:cond delay="indefinite"/>
+                        <p:cond evt="onBegin" delay="0">
+                          <p:tn val="2"/>
+                        </p:cond>
+                      </p:stCondLst>
+                      <p:childTnLst>
+                        <p:par>
+                          <p:cTn id="4" fill="hold">
+                            <p:stCondLst>
+                              <p:cond delay="0"/>
+                            </p:stCondLst>
+                            <p:childTnLst>
+                              <p:par>
+                                <p:cTn id="5" presetID="1" presetClass="entr" presetSubtype="0" fill="hold" grpId="0" nodeType="withEffect">
+                                  <p:stCondLst>
+                                    <p:cond delay="0"/>
+                                  </p:stCondLst>
+                                  <p:childTnLst>
+                                    <p:set>
+                                      <p:cBhvr>
+                                        <p:cTn id="6" dur="1" fill="hold">
+                                          <p:stCondLst>
+                                            <p:cond delay="0"/>
+                                          </p:stCondLst>
+                                        </p:cTn>
+                                        <p:tgtEl>
+                                          <p:spTgt spid="7"/>
+                                        </p:tgtEl>
+                                        <p:attrNameLst>
+                                          <p:attrName>style.visibility</p:attrName>
+                                        </p:attrNameLst>
+                                      </p:cBhvr>
+                                      <p:to>
+                                        <p:strVal val="visible"/>
+                                      </p:to>
+                                    </p:set>
+                                  </p:childTnLst>
+                                </p:cTn>
+                              </p:par>
+                            </p:childTnLst>
+                          </p:cTn>
+                        </p:par>
+                      </p:childTnLst>
+                    </p:cTn>
+                  </p:par>
+                </p:childTnLst>
+              </p:cTn>
+              <p:prevCondLst>
+                <p:cond evt="onPrev" delay="0">
+                  <p:tgtEl>
+                    <p:sldTgt/>
+                  </p:tgtEl>
+                </p:cond>
+              </p:prevCondLst>
+              <p:nextCondLst>
+                <p:cond evt="onNext" delay="0">
+                  <p:tgtEl>
+                    <p:sldTgt/>
+                  </p:tgtEl>
+                </p:cond>
+              </p:nextCondLst>
+            </p:seq>
+          </p:childTnLst>
+        </p:cTn>
+      </p:par>
+    </p:tnLst>
+    <p:bldLst>
+      <p:bldP spid="7" grpId="0" animBg="1"/>
+    </p:bldLst>
+  </p:timing>
+</p:sld>
+</file>
+
+<file path=ppt/slides/slide23.xml><?xml version="1.0" encoding="utf-8"?>
 <p:sld xmlns:a="http://schemas.openxmlformats.org/drawingml/2006/main" xmlns:r="http://schemas.openxmlformats.org/officeDocument/2006/relationships" xmlns:p="http://schemas.openxmlformats.org/presentationml/2006/main">
   <p:cSld>
     <p:spTree>
@@ -10316,59 +14502,6 @@
       </p:grpSpPr>
       <p:sp>
         <p:nvSpPr>
-          <p:cNvPr id="8" name="제목 7">
-            <a:extLst>
-              <a:ext uri="{FF2B5EF4-FFF2-40B4-BE49-F238E27FC236}">
-                <a16:creationId xmlns:a16="http://schemas.microsoft.com/office/drawing/2014/main" id="{AA2DB6BC-6868-9901-E00D-C3C2AB962A25}"/>
-              </a:ext>
-            </a:extLst>
-          </p:cNvPr>
-          <p:cNvSpPr>
-            <a:spLocks noGrp="1"/>
-          </p:cNvSpPr>
-          <p:nvPr>
-            <p:ph type="title"/>
-          </p:nvPr>
-        </p:nvSpPr>
-        <p:spPr>
-          <a:xfrm>
-            <a:off x="521207" y="448056"/>
-            <a:ext cx="8135613" cy="640080"/>
-          </a:xfrm>
-        </p:spPr>
-        <p:txBody>
-          <a:bodyPr rtlCol="0">
-            <a:noAutofit/>
-          </a:bodyPr>
-          <a:lstStyle/>
-          <a:p>
-            <a:pPr rtl="0"/>
-            <a:r>
-              <a:rPr lang="en-US" altLang="ko-KR" dirty="0" err="1">
-                <a:cs typeface="Segoe UI Light" panose="020B0502040204020203" pitchFamily="34" charset="0"/>
-              </a:rPr>
-              <a:t>pytorch</a:t>
-            </a:r>
-            <a:r>
-              <a:rPr lang="ko-KR" altLang="en-US" dirty="0">
-                <a:cs typeface="Segoe UI Light" panose="020B0502040204020203" pitchFamily="34" charset="0"/>
-              </a:rPr>
-              <a:t> </a:t>
-            </a:r>
-            <a:r>
-              <a:rPr lang="en-US" altLang="ko-KR" dirty="0">
-                <a:cs typeface="Segoe UI Light" panose="020B0502040204020203" pitchFamily="34" charset="0"/>
-              </a:rPr>
-              <a:t>tutorial</a:t>
-            </a:r>
-            <a:endParaRPr lang="ko-KR" altLang="en-US" dirty="0">
-              <a:cs typeface="Segoe UI Light" panose="020B0502040204020203" pitchFamily="34" charset="0"/>
-            </a:endParaRPr>
-          </a:p>
-        </p:txBody>
-      </p:sp>
-      <p:sp>
-        <p:nvSpPr>
           <p:cNvPr id="12" name="슬라이드 번호 개체 틀 11">
             <a:extLst>
               <a:ext uri="{FF2B5EF4-FFF2-40B4-BE49-F238E27FC236}">
@@ -10391,47 +14524,9 @@
             <a:fld id="{9860EDB8-5305-433F-BE41-D7A86D811DB3}" type="slidenum">
               <a:rPr lang="en-US" altLang="ko-KR" noProof="0" smtClean="0"/>
               <a:pPr/>
-              <a:t>18</a:t>
+              <a:t>23</a:t>
             </a:fld>
             <a:endParaRPr lang="ko-KR" altLang="en-US" noProof="0" dirty="0"/>
-          </a:p>
-        </p:txBody>
-      </p:sp>
-      <p:sp>
-        <p:nvSpPr>
-          <p:cNvPr id="2" name="TextBox 1">
-            <a:extLst>
-              <a:ext uri="{FF2B5EF4-FFF2-40B4-BE49-F238E27FC236}">
-                <a16:creationId xmlns:a16="http://schemas.microsoft.com/office/drawing/2014/main" id="{19108F93-971A-05E2-4AA8-06CBB655E8DE}"/>
-              </a:ext>
-            </a:extLst>
-          </p:cNvPr>
-          <p:cNvSpPr txBox="1"/>
-          <p:nvPr/>
-        </p:nvSpPr>
-        <p:spPr>
-          <a:xfrm>
-            <a:off x="521207" y="1476375"/>
-            <a:ext cx="3276600" cy="369332"/>
-          </a:xfrm>
-          <a:prstGeom prst="rect">
-            <a:avLst/>
-          </a:prstGeom>
-          <a:noFill/>
-        </p:spPr>
-        <p:txBody>
-          <a:bodyPr wrap="square" rtlCol="0">
-            <a:spAutoFit/>
-          </a:bodyPr>
-          <a:lstStyle/>
-          <a:p>
-            <a:r>
-              <a:rPr lang="en-US" altLang="ko-KR" dirty="0">
-                <a:hlinkClick r:id="rId3"/>
-              </a:rPr>
-              <a:t>https://pytorch.org/</a:t>
-            </a:r>
-            <a:endParaRPr lang="ko-KR" altLang="en-US" dirty="0"/>
           </a:p>
         </p:txBody>
       </p:sp>
@@ -10450,6 +14545,80 @@
           <p:nvPr/>
         </p:nvPicPr>
         <p:blipFill>
+          <a:blip r:embed="rId3"/>
+          <a:stretch>
+            <a:fillRect/>
+          </a:stretch>
+        </p:blipFill>
+        <p:spPr>
+          <a:xfrm>
+            <a:off x="685800" y="1905671"/>
+            <a:ext cx="9248775" cy="3973066"/>
+          </a:xfrm>
+          <a:prstGeom prst="rect">
+            <a:avLst/>
+          </a:prstGeom>
+        </p:spPr>
+      </p:pic>
+      <p:sp>
+        <p:nvSpPr>
+          <p:cNvPr id="6" name="제목 7">
+            <a:extLst>
+              <a:ext uri="{FF2B5EF4-FFF2-40B4-BE49-F238E27FC236}">
+                <a16:creationId xmlns:a16="http://schemas.microsoft.com/office/drawing/2014/main" id="{16A9DD86-4E9A-1A71-D4E7-962716446692}"/>
+              </a:ext>
+            </a:extLst>
+          </p:cNvPr>
+          <p:cNvSpPr>
+            <a:spLocks noGrp="1"/>
+          </p:cNvSpPr>
+          <p:nvPr>
+            <p:ph type="title"/>
+          </p:nvPr>
+        </p:nvSpPr>
+        <p:spPr>
+          <a:xfrm>
+            <a:off x="521207" y="448056"/>
+            <a:ext cx="9222868" cy="640080"/>
+          </a:xfrm>
+        </p:spPr>
+        <p:txBody>
+          <a:bodyPr rtlCol="0">
+            <a:noAutofit/>
+          </a:bodyPr>
+          <a:lstStyle/>
+          <a:p>
+            <a:r>
+              <a:rPr lang="en-US" altLang="ko-KR" b="1" dirty="0">
+                <a:latin typeface="D2Coding" panose="020B0609020101020101" pitchFamily="49" charset="-127"/>
+                <a:ea typeface="D2Coding" panose="020B0609020101020101" pitchFamily="49" charset="-127"/>
+                <a:cs typeface="Segoe UI Light" panose="020B0502040204020203" pitchFamily="34" charset="0"/>
+              </a:rPr>
+              <a:t>Hands-on : FNN(feed-forward neural networks) </a:t>
+            </a:r>
+            <a:endParaRPr lang="ko-KR" altLang="en-US" b="1" dirty="0">
+              <a:latin typeface="D2Coding" panose="020B0609020101020101" pitchFamily="49" charset="-127"/>
+              <a:ea typeface="D2Coding" panose="020B0609020101020101" pitchFamily="49" charset="-127"/>
+              <a:cs typeface="Segoe UI Light" panose="020B0502040204020203" pitchFamily="34" charset="0"/>
+            </a:endParaRPr>
+          </a:p>
+        </p:txBody>
+      </p:sp>
+      <p:pic>
+        <p:nvPicPr>
+          <p:cNvPr id="7" name="그림 6">
+            <a:extLst>
+              <a:ext uri="{FF2B5EF4-FFF2-40B4-BE49-F238E27FC236}">
+                <a16:creationId xmlns:a16="http://schemas.microsoft.com/office/drawing/2014/main" id="{D54C62C5-03F9-52C5-6C25-FCF862E238F1}"/>
+              </a:ext>
+            </a:extLst>
+          </p:cNvPr>
+          <p:cNvPicPr>
+            <a:picLocks noChangeAspect="1"/>
+          </p:cNvPicPr>
+          <p:nvPr/>
+        </p:nvPicPr>
+        <p:blipFill>
           <a:blip r:embed="rId4"/>
           <a:stretch>
             <a:fillRect/>
@@ -10457,8 +14626,8 @@
         </p:blipFill>
         <p:spPr>
           <a:xfrm>
-            <a:off x="1657350" y="2039021"/>
-            <a:ext cx="9248775" cy="3973066"/>
+            <a:off x="10167455" y="2124"/>
+            <a:ext cx="1775896" cy="1086012"/>
           </a:xfrm>
           <a:prstGeom prst="rect">
             <a:avLst/>
@@ -10486,7 +14655,432 @@
 </p:sld>
 </file>
 
-<file path=ppt/slides/slide19.xml><?xml version="1.0" encoding="utf-8"?>
+<file path=ppt/slides/slide24.xml><?xml version="1.0" encoding="utf-8"?>
+<p:sld xmlns:a="http://schemas.openxmlformats.org/drawingml/2006/main" xmlns:r="http://schemas.openxmlformats.org/officeDocument/2006/relationships" xmlns:p="http://schemas.openxmlformats.org/presentationml/2006/main">
+  <p:cSld>
+    <p:spTree>
+      <p:nvGrpSpPr>
+        <p:cNvPr id="1" name="">
+          <a:extLst>
+            <a:ext uri="{FF2B5EF4-FFF2-40B4-BE49-F238E27FC236}">
+              <a16:creationId xmlns:a16="http://schemas.microsoft.com/office/drawing/2014/main" id="{368C24D2-795A-9770-2CC6-CCD7AC46EE82}"/>
+            </a:ext>
+          </a:extLst>
+        </p:cNvPr>
+        <p:cNvGrpSpPr/>
+        <p:nvPr/>
+      </p:nvGrpSpPr>
+      <p:grpSpPr>
+        <a:xfrm>
+          <a:off x="0" y="0"/>
+          <a:ext cx="0" cy="0"/>
+          <a:chOff x="0" y="0"/>
+          <a:chExt cx="0" cy="0"/>
+        </a:xfrm>
+      </p:grpSpPr>
+      <p:sp>
+        <p:nvSpPr>
+          <p:cNvPr id="2" name="직사각형 1">
+            <a:extLst>
+              <a:ext uri="{FF2B5EF4-FFF2-40B4-BE49-F238E27FC236}">
+                <a16:creationId xmlns:a16="http://schemas.microsoft.com/office/drawing/2014/main" id="{AF6A87F4-187E-DD65-9466-BADE8AF36D5B}"/>
+              </a:ext>
+            </a:extLst>
+          </p:cNvPr>
+          <p:cNvSpPr/>
+          <p:nvPr/>
+        </p:nvSpPr>
+        <p:spPr>
+          <a:xfrm>
+            <a:off x="1571625" y="5524501"/>
+            <a:ext cx="7524750" cy="457200"/>
+          </a:xfrm>
+          <a:prstGeom prst="rect">
+            <a:avLst/>
+          </a:prstGeom>
+          <a:solidFill>
+            <a:schemeClr val="bg1">
+              <a:lumMod val="75000"/>
+            </a:schemeClr>
+          </a:solidFill>
+          <a:ln>
+            <a:noFill/>
+          </a:ln>
+        </p:spPr>
+        <p:style>
+          <a:lnRef idx="2">
+            <a:schemeClr val="accent1">
+              <a:shade val="15000"/>
+            </a:schemeClr>
+          </a:lnRef>
+          <a:fillRef idx="1">
+            <a:schemeClr val="accent1"/>
+          </a:fillRef>
+          <a:effectRef idx="0">
+            <a:schemeClr val="accent1"/>
+          </a:effectRef>
+          <a:fontRef idx="minor">
+            <a:schemeClr val="lt1"/>
+          </a:fontRef>
+        </p:style>
+        <p:txBody>
+          <a:bodyPr rtlCol="0" anchor="ctr"/>
+          <a:lstStyle/>
+          <a:p>
+            <a:pPr algn="ctr"/>
+            <a:endParaRPr lang="ko-KR" altLang="en-US" dirty="0"/>
+          </a:p>
+        </p:txBody>
+      </p:sp>
+      <p:sp>
+        <p:nvSpPr>
+          <p:cNvPr id="8" name="제목 7">
+            <a:extLst>
+              <a:ext uri="{FF2B5EF4-FFF2-40B4-BE49-F238E27FC236}">
+                <a16:creationId xmlns:a16="http://schemas.microsoft.com/office/drawing/2014/main" id="{9C6451FB-B5B0-2B09-D6E1-0C8D2D6CEA0A}"/>
+              </a:ext>
+            </a:extLst>
+          </p:cNvPr>
+          <p:cNvSpPr>
+            <a:spLocks noGrp="1"/>
+          </p:cNvSpPr>
+          <p:nvPr>
+            <p:ph type="title"/>
+          </p:nvPr>
+        </p:nvSpPr>
+        <p:spPr>
+          <a:xfrm>
+            <a:off x="521207" y="448056"/>
+            <a:ext cx="8135613" cy="640080"/>
+          </a:xfrm>
+        </p:spPr>
+        <p:txBody>
+          <a:bodyPr rtlCol="0">
+            <a:noAutofit/>
+          </a:bodyPr>
+          <a:lstStyle/>
+          <a:p>
+            <a:pPr rtl="0"/>
+            <a:r>
+              <a:rPr lang="en-US" altLang="ko-KR" dirty="0">
+                <a:solidFill>
+                  <a:schemeClr val="tx1"/>
+                </a:solidFill>
+                <a:cs typeface="Segoe UI Light" panose="020B0502040204020203" pitchFamily="34" charset="0"/>
+              </a:rPr>
+              <a:t>Contents</a:t>
+            </a:r>
+            <a:endParaRPr lang="ko-KR" altLang="en-US" dirty="0">
+              <a:solidFill>
+                <a:schemeClr val="tx1"/>
+              </a:solidFill>
+              <a:cs typeface="Segoe UI Light" panose="020B0502040204020203" pitchFamily="34" charset="0"/>
+            </a:endParaRPr>
+          </a:p>
+        </p:txBody>
+      </p:sp>
+      <p:sp>
+        <p:nvSpPr>
+          <p:cNvPr id="12" name="슬라이드 번호 개체 틀 11">
+            <a:extLst>
+              <a:ext uri="{FF2B5EF4-FFF2-40B4-BE49-F238E27FC236}">
+                <a16:creationId xmlns:a16="http://schemas.microsoft.com/office/drawing/2014/main" id="{5476CEA2-8E69-3F61-1640-F7FC2FC718CF}"/>
+              </a:ext>
+            </a:extLst>
+          </p:cNvPr>
+          <p:cNvSpPr>
+            <a:spLocks noGrp="1"/>
+          </p:cNvSpPr>
+          <p:nvPr>
+            <p:ph type="sldNum" sz="quarter" idx="4"/>
+          </p:nvPr>
+        </p:nvSpPr>
+        <p:spPr/>
+        <p:txBody>
+          <a:bodyPr/>
+          <a:lstStyle/>
+          <a:p>
+            <a:fld id="{9860EDB8-5305-433F-BE41-D7A86D811DB3}" type="slidenum">
+              <a:rPr lang="en-US" altLang="ko-KR" noProof="0" smtClean="0"/>
+              <a:pPr/>
+              <a:t>24</a:t>
+            </a:fld>
+            <a:endParaRPr lang="ko-KR" altLang="en-US" noProof="0" dirty="0"/>
+          </a:p>
+        </p:txBody>
+      </p:sp>
+      <p:sp>
+        <p:nvSpPr>
+          <p:cNvPr id="16" name="TextBox 15">
+            <a:extLst>
+              <a:ext uri="{FF2B5EF4-FFF2-40B4-BE49-F238E27FC236}">
+                <a16:creationId xmlns:a16="http://schemas.microsoft.com/office/drawing/2014/main" id="{F49E6121-98EC-50B1-9F36-DB08FF71541A}"/>
+              </a:ext>
+            </a:extLst>
+          </p:cNvPr>
+          <p:cNvSpPr txBox="1"/>
+          <p:nvPr/>
+        </p:nvSpPr>
+        <p:spPr>
+          <a:xfrm>
+            <a:off x="2477049" y="1345311"/>
+            <a:ext cx="6752676" cy="5123390"/>
+          </a:xfrm>
+          <a:prstGeom prst="rect">
+            <a:avLst/>
+          </a:prstGeom>
+          <a:noFill/>
+        </p:spPr>
+        <p:txBody>
+          <a:bodyPr wrap="square" rtlCol="0">
+            <a:spAutoFit/>
+          </a:bodyPr>
+          <a:lstStyle/>
+          <a:p>
+            <a:pPr marL="342900" indent="-342900">
+              <a:lnSpc>
+                <a:spcPct val="150000"/>
+              </a:lnSpc>
+              <a:buFont typeface="+mj-lt"/>
+              <a:buAutoNum type="arabicPeriod"/>
+            </a:pPr>
+            <a:r>
+              <a:rPr lang="en-US" altLang="ko-KR" sz="2000" b="1" dirty="0">
+                <a:latin typeface="D2Coding" panose="020B0609020101020101" pitchFamily="49" charset="-127"/>
+                <a:ea typeface="D2Coding" panose="020B0609020101020101" pitchFamily="49" charset="-127"/>
+                <a:cs typeface="맑은 고딕 Semilight" panose="020B0502040204020203" pitchFamily="50" charset="-127"/>
+              </a:rPr>
+              <a:t>Tensor</a:t>
+            </a:r>
+          </a:p>
+          <a:p>
+            <a:pPr marL="342900" indent="-342900">
+              <a:lnSpc>
+                <a:spcPct val="150000"/>
+              </a:lnSpc>
+              <a:buFont typeface="+mj-lt"/>
+              <a:buAutoNum type="arabicPeriod"/>
+            </a:pPr>
+            <a:r>
+              <a:rPr lang="en-US" altLang="ko-KR" sz="2000" b="1" dirty="0" err="1">
+                <a:latin typeface="D2Coding" panose="020B0609020101020101" pitchFamily="49" charset="-127"/>
+                <a:ea typeface="D2Coding" panose="020B0609020101020101" pitchFamily="49" charset="-127"/>
+                <a:cs typeface="맑은 고딕 Semilight" panose="020B0502040204020203" pitchFamily="50" charset="-127"/>
+              </a:rPr>
+              <a:t>Autograd</a:t>
+            </a:r>
+            <a:endParaRPr lang="en-US" altLang="ko-KR" sz="2000" b="1" dirty="0">
+              <a:latin typeface="D2Coding" panose="020B0609020101020101" pitchFamily="49" charset="-127"/>
+              <a:ea typeface="D2Coding" panose="020B0609020101020101" pitchFamily="49" charset="-127"/>
+              <a:cs typeface="맑은 고딕 Semilight" panose="020B0502040204020203" pitchFamily="50" charset="-127"/>
+            </a:endParaRPr>
+          </a:p>
+          <a:p>
+            <a:pPr marL="342900" indent="-342900">
+              <a:lnSpc>
+                <a:spcPct val="150000"/>
+              </a:lnSpc>
+              <a:buFont typeface="+mj-lt"/>
+              <a:buAutoNum type="arabicPeriod"/>
+            </a:pPr>
+            <a:r>
+              <a:rPr lang="en-US" altLang="ko-KR" sz="2000" b="1" dirty="0">
+                <a:latin typeface="D2Coding" panose="020B0609020101020101" pitchFamily="49" charset="-127"/>
+                <a:ea typeface="D2Coding" panose="020B0609020101020101" pitchFamily="49" charset="-127"/>
+                <a:cs typeface="맑은 고딕 Semilight" panose="020B0502040204020203" pitchFamily="50" charset="-127"/>
+              </a:rPr>
+              <a:t>Backpropagation</a:t>
+            </a:r>
+          </a:p>
+          <a:p>
+            <a:pPr marL="342900" indent="-342900">
+              <a:lnSpc>
+                <a:spcPct val="150000"/>
+              </a:lnSpc>
+              <a:buFont typeface="+mj-lt"/>
+              <a:buAutoNum type="arabicPeriod"/>
+            </a:pPr>
+            <a:r>
+              <a:rPr lang="en-US" altLang="ko-KR" sz="2000" b="1" dirty="0">
+                <a:latin typeface="D2Coding" panose="020B0609020101020101" pitchFamily="49" charset="-127"/>
+                <a:ea typeface="D2Coding" panose="020B0609020101020101" pitchFamily="49" charset="-127"/>
+                <a:cs typeface="맑은 고딕 Semilight" panose="020B0502040204020203" pitchFamily="50" charset="-127"/>
+              </a:rPr>
+              <a:t>Forward &amp; Backward Pass</a:t>
+            </a:r>
+          </a:p>
+          <a:p>
+            <a:pPr marL="342900" indent="-342900">
+              <a:lnSpc>
+                <a:spcPct val="150000"/>
+              </a:lnSpc>
+              <a:buFont typeface="+mj-lt"/>
+              <a:buAutoNum type="arabicPeriod"/>
+            </a:pPr>
+            <a:r>
+              <a:rPr lang="en-US" altLang="ko-KR" sz="2000" b="1" dirty="0">
+                <a:latin typeface="D2Coding" panose="020B0609020101020101" pitchFamily="49" charset="-127"/>
+                <a:ea typeface="D2Coding" panose="020B0609020101020101" pitchFamily="49" charset="-127"/>
+                <a:cs typeface="맑은 고딕 Semilight" panose="020B0502040204020203" pitchFamily="50" charset="-127"/>
+              </a:rPr>
+              <a:t>Optimizer &amp; Model</a:t>
+            </a:r>
+          </a:p>
+          <a:p>
+            <a:pPr marL="342900" indent="-342900">
+              <a:lnSpc>
+                <a:spcPct val="150000"/>
+              </a:lnSpc>
+              <a:buFont typeface="+mj-lt"/>
+              <a:buAutoNum type="arabicPeriod"/>
+            </a:pPr>
+            <a:r>
+              <a:rPr lang="en-US" altLang="ko-KR" sz="2000" b="1" dirty="0">
+                <a:latin typeface="D2Coding" panose="020B0609020101020101" pitchFamily="49" charset="-127"/>
+                <a:ea typeface="D2Coding" panose="020B0609020101020101" pitchFamily="49" charset="-127"/>
+                <a:cs typeface="맑은 고딕 Semilight" panose="020B0502040204020203" pitchFamily="50" charset="-127"/>
+              </a:rPr>
+              <a:t>Optimizers</a:t>
+            </a:r>
+          </a:p>
+          <a:p>
+            <a:pPr marL="342900" indent="-342900">
+              <a:lnSpc>
+                <a:spcPct val="150000"/>
+              </a:lnSpc>
+              <a:buFont typeface="+mj-lt"/>
+              <a:buAutoNum type="arabicPeriod"/>
+            </a:pPr>
+            <a:r>
+              <a:rPr lang="en-US" altLang="ko-KR" sz="2000" b="1" dirty="0">
+                <a:latin typeface="D2Coding" panose="020B0609020101020101" pitchFamily="49" charset="-127"/>
+                <a:ea typeface="D2Coding" panose="020B0609020101020101" pitchFamily="49" charset="-127"/>
+                <a:cs typeface="맑은 고딕 Semilight" panose="020B0502040204020203" pitchFamily="50" charset="-127"/>
+              </a:rPr>
+              <a:t> Loss Function with L1, L2 regularization</a:t>
+            </a:r>
+          </a:p>
+          <a:p>
+            <a:pPr marL="342900" indent="-342900">
+              <a:lnSpc>
+                <a:spcPct val="150000"/>
+              </a:lnSpc>
+              <a:buFont typeface="+mj-lt"/>
+              <a:buAutoNum type="arabicPeriod"/>
+            </a:pPr>
+            <a:r>
+              <a:rPr lang="en-US" altLang="ko-KR" sz="2000" b="1" dirty="0">
+                <a:latin typeface="D2Coding" panose="020B0609020101020101" pitchFamily="49" charset="-127"/>
+                <a:ea typeface="D2Coding" panose="020B0609020101020101" pitchFamily="49" charset="-127"/>
+                <a:cs typeface="맑은 고딕 Semilight" panose="020B0502040204020203" pitchFamily="50" charset="-127"/>
+              </a:rPr>
+              <a:t> Regularizations</a:t>
+            </a:r>
+          </a:p>
+          <a:p>
+            <a:pPr marL="342900" indent="-342900">
+              <a:lnSpc>
+                <a:spcPct val="150000"/>
+              </a:lnSpc>
+              <a:buFont typeface="+mj-lt"/>
+              <a:buAutoNum type="arabicPeriod"/>
+            </a:pPr>
+            <a:r>
+              <a:rPr lang="en-US" altLang="ko-KR" sz="2000" b="1" dirty="0">
+                <a:latin typeface="D2Coding" panose="020B0609020101020101" pitchFamily="49" charset="-127"/>
+                <a:ea typeface="D2Coding" panose="020B0609020101020101" pitchFamily="49" charset="-127"/>
+                <a:cs typeface="맑은 고딕 Semilight" panose="020B0502040204020203" pitchFamily="50" charset="-127"/>
+              </a:rPr>
+              <a:t> </a:t>
+            </a:r>
+            <a:r>
+              <a:rPr lang="en-US" altLang="ko-KR" sz="2000" b="1" dirty="0" err="1">
+                <a:latin typeface="D2Coding" panose="020B0609020101020101" pitchFamily="49" charset="-127"/>
+                <a:ea typeface="D2Coding" panose="020B0609020101020101" pitchFamily="49" charset="-127"/>
+                <a:cs typeface="맑은 고딕 Semilight" panose="020B0502040204020203" pitchFamily="50" charset="-127"/>
+              </a:rPr>
+              <a:t>Pytorch</a:t>
+            </a:r>
+            <a:r>
+              <a:rPr lang="en-US" altLang="ko-KR" sz="2000" b="1" dirty="0">
+                <a:latin typeface="D2Coding" panose="020B0609020101020101" pitchFamily="49" charset="-127"/>
+                <a:ea typeface="D2Coding" panose="020B0609020101020101" pitchFamily="49" charset="-127"/>
+                <a:cs typeface="맑은 고딕 Semilight" panose="020B0502040204020203" pitchFamily="50" charset="-127"/>
+              </a:rPr>
+              <a:t> with fashion </a:t>
+            </a:r>
+            <a:r>
+              <a:rPr lang="en-US" altLang="ko-KR" sz="2000" b="1" dirty="0" err="1">
+                <a:latin typeface="D2Coding" panose="020B0609020101020101" pitchFamily="49" charset="-127"/>
+                <a:ea typeface="D2Coding" panose="020B0609020101020101" pitchFamily="49" charset="-127"/>
+                <a:cs typeface="맑은 고딕 Semilight" panose="020B0502040204020203" pitchFamily="50" charset="-127"/>
+              </a:rPr>
+              <a:t>mnist</a:t>
+            </a:r>
+            <a:endParaRPr lang="en-US" altLang="ko-KR" sz="2000" b="1" dirty="0">
+              <a:latin typeface="D2Coding" panose="020B0609020101020101" pitchFamily="49" charset="-127"/>
+              <a:ea typeface="D2Coding" panose="020B0609020101020101" pitchFamily="49" charset="-127"/>
+              <a:cs typeface="맑은 고딕 Semilight" panose="020B0502040204020203" pitchFamily="50" charset="-127"/>
+            </a:endParaRPr>
+          </a:p>
+          <a:p>
+            <a:pPr marL="342900" indent="-342900">
+              <a:lnSpc>
+                <a:spcPct val="150000"/>
+              </a:lnSpc>
+              <a:buFont typeface="+mj-lt"/>
+              <a:buAutoNum type="arabicPeriod"/>
+            </a:pPr>
+            <a:r>
+              <a:rPr lang="en-US" altLang="ko-KR" sz="2000" b="1" dirty="0">
+                <a:latin typeface="D2Coding" panose="020B0609020101020101" pitchFamily="49" charset="-127"/>
+                <a:ea typeface="D2Coding" panose="020B0609020101020101" pitchFamily="49" charset="-127"/>
+                <a:cs typeface="맑은 고딕 Semilight" panose="020B0502040204020203" pitchFamily="50" charset="-127"/>
+              </a:rPr>
+              <a:t> Understanding basic CNN</a:t>
+            </a:r>
+          </a:p>
+          <a:p>
+            <a:pPr marL="342900" indent="-342900">
+              <a:lnSpc>
+                <a:spcPct val="150000"/>
+              </a:lnSpc>
+              <a:buFont typeface="+mj-lt"/>
+              <a:buAutoNum type="arabicPeriod"/>
+            </a:pPr>
+            <a:r>
+              <a:rPr lang="en-US" altLang="ko-KR" sz="2000" b="1" dirty="0">
+                <a:latin typeface="D2Coding" panose="020B0609020101020101" pitchFamily="49" charset="-127"/>
+                <a:ea typeface="D2Coding" panose="020B0609020101020101" pitchFamily="49" charset="-127"/>
+                <a:cs typeface="맑은 고딕 Semilight" panose="020B0502040204020203" pitchFamily="50" charset="-127"/>
+              </a:rPr>
+              <a:t> Roadmap to ML &amp; ML</a:t>
+            </a:r>
+          </a:p>
+        </p:txBody>
+      </p:sp>
+    </p:spTree>
+    <p:extLst>
+      <p:ext uri="{BB962C8B-B14F-4D97-AF65-F5344CB8AC3E}">
+        <p14:creationId xmlns:p14="http://schemas.microsoft.com/office/powerpoint/2010/main" val="1370884394"/>
+      </p:ext>
+    </p:extLst>
+  </p:cSld>
+  <p:clrMapOvr>
+    <a:masterClrMapping/>
+  </p:clrMapOvr>
+  <mc:AlternateContent xmlns:mc="http://schemas.openxmlformats.org/markup-compatibility/2006" xmlns:p14="http://schemas.microsoft.com/office/powerpoint/2010/main">
+    <mc:Choice Requires="p14">
+      <p:transition p14:dur="10"/>
+    </mc:Choice>
+    <mc:Fallback xmlns="">
+      <p:transition/>
+    </mc:Fallback>
+  </mc:AlternateContent>
+</p:sld>
+</file>
+
+<file path=ppt/slides/slide25.xml><?xml version="1.0" encoding="utf-8"?>
 <p:sld xmlns:a="http://schemas.openxmlformats.org/drawingml/2006/main" xmlns:r="http://schemas.openxmlformats.org/officeDocument/2006/relationships" xmlns:p="http://schemas.openxmlformats.org/presentationml/2006/main">
   <p:cSld>
     <p:spTree>
@@ -10633,7 +15227,7 @@
             <a:fld id="{9860EDB8-5305-433F-BE41-D7A86D811DB3}" type="slidenum">
               <a:rPr lang="en-US" altLang="ko-KR" noProof="0" smtClean="0"/>
               <a:pPr/>
-              <a:t>19</a:t>
+              <a:t>25</a:t>
             </a:fld>
             <a:endParaRPr lang="ko-KR" altLang="en-US" noProof="0" dirty="0"/>
           </a:p>
@@ -11625,7 +16219,1438 @@
 </p:sld>
 </file>
 
-<file path=ppt/slides/slide2.xml><?xml version="1.0" encoding="utf-8"?>
+<file path=ppt/slides/slide26.xml><?xml version="1.0" encoding="utf-8"?>
+<p:sld xmlns:a="http://schemas.openxmlformats.org/drawingml/2006/main" xmlns:r="http://schemas.openxmlformats.org/officeDocument/2006/relationships" xmlns:p="http://schemas.openxmlformats.org/presentationml/2006/main">
+  <p:cSld>
+    <p:spTree>
+      <p:nvGrpSpPr>
+        <p:cNvPr id="1" name="">
+          <a:extLst>
+            <a:ext uri="{FF2B5EF4-FFF2-40B4-BE49-F238E27FC236}">
+              <a16:creationId xmlns:a16="http://schemas.microsoft.com/office/drawing/2014/main" id="{D8C024D3-B76F-4EF6-FB36-817559F477A2}"/>
+            </a:ext>
+          </a:extLst>
+        </p:cNvPr>
+        <p:cNvGrpSpPr/>
+        <p:nvPr/>
+      </p:nvGrpSpPr>
+      <p:grpSpPr>
+        <a:xfrm>
+          <a:off x="0" y="0"/>
+          <a:ext cx="0" cy="0"/>
+          <a:chOff x="0" y="0"/>
+          <a:chExt cx="0" cy="0"/>
+        </a:xfrm>
+      </p:grpSpPr>
+      <p:sp>
+        <p:nvSpPr>
+          <p:cNvPr id="2" name="직사각형 1">
+            <a:extLst>
+              <a:ext uri="{FF2B5EF4-FFF2-40B4-BE49-F238E27FC236}">
+                <a16:creationId xmlns:a16="http://schemas.microsoft.com/office/drawing/2014/main" id="{52C52BAD-5AF8-5229-B71B-857EAB79667E}"/>
+              </a:ext>
+            </a:extLst>
+          </p:cNvPr>
+          <p:cNvSpPr/>
+          <p:nvPr/>
+        </p:nvSpPr>
+        <p:spPr>
+          <a:xfrm>
+            <a:off x="1571625" y="5972176"/>
+            <a:ext cx="7524750" cy="457200"/>
+          </a:xfrm>
+          <a:prstGeom prst="rect">
+            <a:avLst/>
+          </a:prstGeom>
+          <a:solidFill>
+            <a:schemeClr val="bg1">
+              <a:lumMod val="75000"/>
+            </a:schemeClr>
+          </a:solidFill>
+          <a:ln>
+            <a:noFill/>
+          </a:ln>
+        </p:spPr>
+        <p:style>
+          <a:lnRef idx="2">
+            <a:schemeClr val="accent1">
+              <a:shade val="15000"/>
+            </a:schemeClr>
+          </a:lnRef>
+          <a:fillRef idx="1">
+            <a:schemeClr val="accent1"/>
+          </a:fillRef>
+          <a:effectRef idx="0">
+            <a:schemeClr val="accent1"/>
+          </a:effectRef>
+          <a:fontRef idx="minor">
+            <a:schemeClr val="lt1"/>
+          </a:fontRef>
+        </p:style>
+        <p:txBody>
+          <a:bodyPr rtlCol="0" anchor="ctr"/>
+          <a:lstStyle/>
+          <a:p>
+            <a:pPr algn="ctr"/>
+            <a:endParaRPr lang="ko-KR" altLang="en-US" dirty="0"/>
+          </a:p>
+        </p:txBody>
+      </p:sp>
+      <p:sp>
+        <p:nvSpPr>
+          <p:cNvPr id="8" name="제목 7">
+            <a:extLst>
+              <a:ext uri="{FF2B5EF4-FFF2-40B4-BE49-F238E27FC236}">
+                <a16:creationId xmlns:a16="http://schemas.microsoft.com/office/drawing/2014/main" id="{3D887314-2584-B9E0-7765-727A4DE0B81B}"/>
+              </a:ext>
+            </a:extLst>
+          </p:cNvPr>
+          <p:cNvSpPr>
+            <a:spLocks noGrp="1"/>
+          </p:cNvSpPr>
+          <p:nvPr>
+            <p:ph type="title"/>
+          </p:nvPr>
+        </p:nvSpPr>
+        <p:spPr>
+          <a:xfrm>
+            <a:off x="521207" y="448056"/>
+            <a:ext cx="8135613" cy="640080"/>
+          </a:xfrm>
+        </p:spPr>
+        <p:txBody>
+          <a:bodyPr rtlCol="0">
+            <a:noAutofit/>
+          </a:bodyPr>
+          <a:lstStyle/>
+          <a:p>
+            <a:pPr rtl="0"/>
+            <a:r>
+              <a:rPr lang="en-US" altLang="ko-KR" dirty="0">
+                <a:solidFill>
+                  <a:schemeClr val="tx1"/>
+                </a:solidFill>
+                <a:cs typeface="Segoe UI Light" panose="020B0502040204020203" pitchFamily="34" charset="0"/>
+              </a:rPr>
+              <a:t>Contents</a:t>
+            </a:r>
+            <a:endParaRPr lang="ko-KR" altLang="en-US" dirty="0">
+              <a:solidFill>
+                <a:schemeClr val="tx1"/>
+              </a:solidFill>
+              <a:cs typeface="Segoe UI Light" panose="020B0502040204020203" pitchFamily="34" charset="0"/>
+            </a:endParaRPr>
+          </a:p>
+        </p:txBody>
+      </p:sp>
+      <p:sp>
+        <p:nvSpPr>
+          <p:cNvPr id="12" name="슬라이드 번호 개체 틀 11">
+            <a:extLst>
+              <a:ext uri="{FF2B5EF4-FFF2-40B4-BE49-F238E27FC236}">
+                <a16:creationId xmlns:a16="http://schemas.microsoft.com/office/drawing/2014/main" id="{5774DC5C-580B-B56A-B260-7F9A4273CB0D}"/>
+              </a:ext>
+            </a:extLst>
+          </p:cNvPr>
+          <p:cNvSpPr>
+            <a:spLocks noGrp="1"/>
+          </p:cNvSpPr>
+          <p:nvPr>
+            <p:ph type="sldNum" sz="quarter" idx="4"/>
+          </p:nvPr>
+        </p:nvSpPr>
+        <p:spPr/>
+        <p:txBody>
+          <a:bodyPr/>
+          <a:lstStyle/>
+          <a:p>
+            <a:fld id="{9860EDB8-5305-433F-BE41-D7A86D811DB3}" type="slidenum">
+              <a:rPr lang="en-US" altLang="ko-KR" noProof="0" smtClean="0"/>
+              <a:pPr/>
+              <a:t>26</a:t>
+            </a:fld>
+            <a:endParaRPr lang="ko-KR" altLang="en-US" noProof="0" dirty="0"/>
+          </a:p>
+        </p:txBody>
+      </p:sp>
+      <p:sp>
+        <p:nvSpPr>
+          <p:cNvPr id="16" name="TextBox 15">
+            <a:extLst>
+              <a:ext uri="{FF2B5EF4-FFF2-40B4-BE49-F238E27FC236}">
+                <a16:creationId xmlns:a16="http://schemas.microsoft.com/office/drawing/2014/main" id="{8A97A261-A8A9-C748-CFF6-94D8128BE845}"/>
+              </a:ext>
+            </a:extLst>
+          </p:cNvPr>
+          <p:cNvSpPr txBox="1"/>
+          <p:nvPr/>
+        </p:nvSpPr>
+        <p:spPr>
+          <a:xfrm>
+            <a:off x="2477049" y="1345311"/>
+            <a:ext cx="6752676" cy="5123390"/>
+          </a:xfrm>
+          <a:prstGeom prst="rect">
+            <a:avLst/>
+          </a:prstGeom>
+          <a:noFill/>
+        </p:spPr>
+        <p:txBody>
+          <a:bodyPr wrap="square" rtlCol="0">
+            <a:spAutoFit/>
+          </a:bodyPr>
+          <a:lstStyle/>
+          <a:p>
+            <a:pPr marL="342900" indent="-342900">
+              <a:lnSpc>
+                <a:spcPct val="150000"/>
+              </a:lnSpc>
+              <a:buFont typeface="+mj-lt"/>
+              <a:buAutoNum type="arabicPeriod"/>
+            </a:pPr>
+            <a:r>
+              <a:rPr lang="en-US" altLang="ko-KR" sz="2000" b="1" dirty="0">
+                <a:latin typeface="D2Coding" panose="020B0609020101020101" pitchFamily="49" charset="-127"/>
+                <a:ea typeface="D2Coding" panose="020B0609020101020101" pitchFamily="49" charset="-127"/>
+                <a:cs typeface="맑은 고딕 Semilight" panose="020B0502040204020203" pitchFamily="50" charset="-127"/>
+              </a:rPr>
+              <a:t>Tensor</a:t>
+            </a:r>
+          </a:p>
+          <a:p>
+            <a:pPr marL="342900" indent="-342900">
+              <a:lnSpc>
+                <a:spcPct val="150000"/>
+              </a:lnSpc>
+              <a:buFont typeface="+mj-lt"/>
+              <a:buAutoNum type="arabicPeriod"/>
+            </a:pPr>
+            <a:r>
+              <a:rPr lang="en-US" altLang="ko-KR" sz="2000" b="1" dirty="0" err="1">
+                <a:latin typeface="D2Coding" panose="020B0609020101020101" pitchFamily="49" charset="-127"/>
+                <a:ea typeface="D2Coding" panose="020B0609020101020101" pitchFamily="49" charset="-127"/>
+                <a:cs typeface="맑은 고딕 Semilight" panose="020B0502040204020203" pitchFamily="50" charset="-127"/>
+              </a:rPr>
+              <a:t>Autograd</a:t>
+            </a:r>
+            <a:endParaRPr lang="en-US" altLang="ko-KR" sz="2000" b="1" dirty="0">
+              <a:latin typeface="D2Coding" panose="020B0609020101020101" pitchFamily="49" charset="-127"/>
+              <a:ea typeface="D2Coding" panose="020B0609020101020101" pitchFamily="49" charset="-127"/>
+              <a:cs typeface="맑은 고딕 Semilight" panose="020B0502040204020203" pitchFamily="50" charset="-127"/>
+            </a:endParaRPr>
+          </a:p>
+          <a:p>
+            <a:pPr marL="342900" indent="-342900">
+              <a:lnSpc>
+                <a:spcPct val="150000"/>
+              </a:lnSpc>
+              <a:buFont typeface="+mj-lt"/>
+              <a:buAutoNum type="arabicPeriod"/>
+            </a:pPr>
+            <a:r>
+              <a:rPr lang="en-US" altLang="ko-KR" sz="2000" b="1" dirty="0">
+                <a:latin typeface="D2Coding" panose="020B0609020101020101" pitchFamily="49" charset="-127"/>
+                <a:ea typeface="D2Coding" panose="020B0609020101020101" pitchFamily="49" charset="-127"/>
+                <a:cs typeface="맑은 고딕 Semilight" panose="020B0502040204020203" pitchFamily="50" charset="-127"/>
+              </a:rPr>
+              <a:t>Backpropagation</a:t>
+            </a:r>
+          </a:p>
+          <a:p>
+            <a:pPr marL="342900" indent="-342900">
+              <a:lnSpc>
+                <a:spcPct val="150000"/>
+              </a:lnSpc>
+              <a:buFont typeface="+mj-lt"/>
+              <a:buAutoNum type="arabicPeriod"/>
+            </a:pPr>
+            <a:r>
+              <a:rPr lang="en-US" altLang="ko-KR" sz="2000" b="1" dirty="0">
+                <a:latin typeface="D2Coding" panose="020B0609020101020101" pitchFamily="49" charset="-127"/>
+                <a:ea typeface="D2Coding" panose="020B0609020101020101" pitchFamily="49" charset="-127"/>
+                <a:cs typeface="맑은 고딕 Semilight" panose="020B0502040204020203" pitchFamily="50" charset="-127"/>
+              </a:rPr>
+              <a:t>Forward &amp; Backward Pass</a:t>
+            </a:r>
+          </a:p>
+          <a:p>
+            <a:pPr marL="342900" indent="-342900">
+              <a:lnSpc>
+                <a:spcPct val="150000"/>
+              </a:lnSpc>
+              <a:buFont typeface="+mj-lt"/>
+              <a:buAutoNum type="arabicPeriod"/>
+            </a:pPr>
+            <a:r>
+              <a:rPr lang="en-US" altLang="ko-KR" sz="2000" b="1" dirty="0">
+                <a:latin typeface="D2Coding" panose="020B0609020101020101" pitchFamily="49" charset="-127"/>
+                <a:ea typeface="D2Coding" panose="020B0609020101020101" pitchFamily="49" charset="-127"/>
+                <a:cs typeface="맑은 고딕 Semilight" panose="020B0502040204020203" pitchFamily="50" charset="-127"/>
+              </a:rPr>
+              <a:t>Optimizer &amp; Model</a:t>
+            </a:r>
+          </a:p>
+          <a:p>
+            <a:pPr marL="342900" indent="-342900">
+              <a:lnSpc>
+                <a:spcPct val="150000"/>
+              </a:lnSpc>
+              <a:buFont typeface="+mj-lt"/>
+              <a:buAutoNum type="arabicPeriod"/>
+            </a:pPr>
+            <a:r>
+              <a:rPr lang="en-US" altLang="ko-KR" sz="2000" b="1" dirty="0">
+                <a:latin typeface="D2Coding" panose="020B0609020101020101" pitchFamily="49" charset="-127"/>
+                <a:ea typeface="D2Coding" panose="020B0609020101020101" pitchFamily="49" charset="-127"/>
+                <a:cs typeface="맑은 고딕 Semilight" panose="020B0502040204020203" pitchFamily="50" charset="-127"/>
+              </a:rPr>
+              <a:t>Optimizers</a:t>
+            </a:r>
+          </a:p>
+          <a:p>
+            <a:pPr marL="342900" indent="-342900">
+              <a:lnSpc>
+                <a:spcPct val="150000"/>
+              </a:lnSpc>
+              <a:buFont typeface="+mj-lt"/>
+              <a:buAutoNum type="arabicPeriod"/>
+            </a:pPr>
+            <a:r>
+              <a:rPr lang="en-US" altLang="ko-KR" sz="2000" b="1" dirty="0">
+                <a:latin typeface="D2Coding" panose="020B0609020101020101" pitchFamily="49" charset="-127"/>
+                <a:ea typeface="D2Coding" panose="020B0609020101020101" pitchFamily="49" charset="-127"/>
+                <a:cs typeface="맑은 고딕 Semilight" panose="020B0502040204020203" pitchFamily="50" charset="-127"/>
+              </a:rPr>
+              <a:t> Loss Function with L1, L2 regularization</a:t>
+            </a:r>
+          </a:p>
+          <a:p>
+            <a:pPr marL="342900" indent="-342900">
+              <a:lnSpc>
+                <a:spcPct val="150000"/>
+              </a:lnSpc>
+              <a:buFont typeface="+mj-lt"/>
+              <a:buAutoNum type="arabicPeriod"/>
+            </a:pPr>
+            <a:r>
+              <a:rPr lang="en-US" altLang="ko-KR" sz="2000" b="1" dirty="0">
+                <a:latin typeface="D2Coding" panose="020B0609020101020101" pitchFamily="49" charset="-127"/>
+                <a:ea typeface="D2Coding" panose="020B0609020101020101" pitchFamily="49" charset="-127"/>
+                <a:cs typeface="맑은 고딕 Semilight" panose="020B0502040204020203" pitchFamily="50" charset="-127"/>
+              </a:rPr>
+              <a:t> Regularizations</a:t>
+            </a:r>
+          </a:p>
+          <a:p>
+            <a:pPr marL="342900" indent="-342900">
+              <a:lnSpc>
+                <a:spcPct val="150000"/>
+              </a:lnSpc>
+              <a:buFont typeface="+mj-lt"/>
+              <a:buAutoNum type="arabicPeriod"/>
+            </a:pPr>
+            <a:r>
+              <a:rPr lang="en-US" altLang="ko-KR" sz="2000" b="1" dirty="0">
+                <a:latin typeface="D2Coding" panose="020B0609020101020101" pitchFamily="49" charset="-127"/>
+                <a:ea typeface="D2Coding" panose="020B0609020101020101" pitchFamily="49" charset="-127"/>
+                <a:cs typeface="맑은 고딕 Semilight" panose="020B0502040204020203" pitchFamily="50" charset="-127"/>
+              </a:rPr>
+              <a:t> </a:t>
+            </a:r>
+            <a:r>
+              <a:rPr lang="en-US" altLang="ko-KR" sz="2000" b="1" dirty="0" err="1">
+                <a:latin typeface="D2Coding" panose="020B0609020101020101" pitchFamily="49" charset="-127"/>
+                <a:ea typeface="D2Coding" panose="020B0609020101020101" pitchFamily="49" charset="-127"/>
+                <a:cs typeface="맑은 고딕 Semilight" panose="020B0502040204020203" pitchFamily="50" charset="-127"/>
+              </a:rPr>
+              <a:t>Pytorch</a:t>
+            </a:r>
+            <a:r>
+              <a:rPr lang="en-US" altLang="ko-KR" sz="2000" b="1" dirty="0">
+                <a:latin typeface="D2Coding" panose="020B0609020101020101" pitchFamily="49" charset="-127"/>
+                <a:ea typeface="D2Coding" panose="020B0609020101020101" pitchFamily="49" charset="-127"/>
+                <a:cs typeface="맑은 고딕 Semilight" panose="020B0502040204020203" pitchFamily="50" charset="-127"/>
+              </a:rPr>
+              <a:t> with fashion </a:t>
+            </a:r>
+            <a:r>
+              <a:rPr lang="en-US" altLang="ko-KR" sz="2000" b="1" dirty="0" err="1">
+                <a:latin typeface="D2Coding" panose="020B0609020101020101" pitchFamily="49" charset="-127"/>
+                <a:ea typeface="D2Coding" panose="020B0609020101020101" pitchFamily="49" charset="-127"/>
+                <a:cs typeface="맑은 고딕 Semilight" panose="020B0502040204020203" pitchFamily="50" charset="-127"/>
+              </a:rPr>
+              <a:t>mnist</a:t>
+            </a:r>
+            <a:endParaRPr lang="en-US" altLang="ko-KR" sz="2000" b="1" dirty="0">
+              <a:latin typeface="D2Coding" panose="020B0609020101020101" pitchFamily="49" charset="-127"/>
+              <a:ea typeface="D2Coding" panose="020B0609020101020101" pitchFamily="49" charset="-127"/>
+              <a:cs typeface="맑은 고딕 Semilight" panose="020B0502040204020203" pitchFamily="50" charset="-127"/>
+            </a:endParaRPr>
+          </a:p>
+          <a:p>
+            <a:pPr marL="342900" indent="-342900">
+              <a:lnSpc>
+                <a:spcPct val="150000"/>
+              </a:lnSpc>
+              <a:buFont typeface="+mj-lt"/>
+              <a:buAutoNum type="arabicPeriod"/>
+            </a:pPr>
+            <a:r>
+              <a:rPr lang="en-US" altLang="ko-KR" sz="2000" b="1" dirty="0">
+                <a:latin typeface="D2Coding" panose="020B0609020101020101" pitchFamily="49" charset="-127"/>
+                <a:ea typeface="D2Coding" panose="020B0609020101020101" pitchFamily="49" charset="-127"/>
+                <a:cs typeface="맑은 고딕 Semilight" panose="020B0502040204020203" pitchFamily="50" charset="-127"/>
+              </a:rPr>
+              <a:t> Understanding basic CNN</a:t>
+            </a:r>
+          </a:p>
+          <a:p>
+            <a:pPr marL="342900" indent="-342900">
+              <a:lnSpc>
+                <a:spcPct val="150000"/>
+              </a:lnSpc>
+              <a:buFont typeface="+mj-lt"/>
+              <a:buAutoNum type="arabicPeriod"/>
+            </a:pPr>
+            <a:r>
+              <a:rPr lang="en-US" altLang="ko-KR" sz="2000" b="1" dirty="0">
+                <a:latin typeface="D2Coding" panose="020B0609020101020101" pitchFamily="49" charset="-127"/>
+                <a:ea typeface="D2Coding" panose="020B0609020101020101" pitchFamily="49" charset="-127"/>
+                <a:cs typeface="맑은 고딕 Semilight" panose="020B0502040204020203" pitchFamily="50" charset="-127"/>
+              </a:rPr>
+              <a:t> Roadmap to ML &amp; ML</a:t>
+            </a:r>
+          </a:p>
+        </p:txBody>
+      </p:sp>
+    </p:spTree>
+    <p:extLst>
+      <p:ext uri="{BB962C8B-B14F-4D97-AF65-F5344CB8AC3E}">
+        <p14:creationId xmlns:p14="http://schemas.microsoft.com/office/powerpoint/2010/main" val="3425184650"/>
+      </p:ext>
+    </p:extLst>
+  </p:cSld>
+  <p:clrMapOvr>
+    <a:masterClrMapping/>
+  </p:clrMapOvr>
+  <mc:AlternateContent xmlns:mc="http://schemas.openxmlformats.org/markup-compatibility/2006" xmlns:p14="http://schemas.microsoft.com/office/powerpoint/2010/main">
+    <mc:Choice Requires="p14">
+      <p:transition p14:dur="10"/>
+    </mc:Choice>
+    <mc:Fallback xmlns="">
+      <p:transition/>
+    </mc:Fallback>
+  </mc:AlternateContent>
+</p:sld>
+</file>
+
+<file path=ppt/slides/slide27.xml><?xml version="1.0" encoding="utf-8"?>
+<p:sld xmlns:a="http://schemas.openxmlformats.org/drawingml/2006/main" xmlns:r="http://schemas.openxmlformats.org/officeDocument/2006/relationships" xmlns:p="http://schemas.openxmlformats.org/presentationml/2006/main">
+  <p:cSld>
+    <p:spTree>
+      <p:nvGrpSpPr>
+        <p:cNvPr id="1" name="">
+          <a:extLst>
+            <a:ext uri="{FF2B5EF4-FFF2-40B4-BE49-F238E27FC236}">
+              <a16:creationId xmlns:a16="http://schemas.microsoft.com/office/drawing/2014/main" id="{82EA696D-E2D1-CD86-64F4-8CC48809E5B8}"/>
+            </a:ext>
+          </a:extLst>
+        </p:cNvPr>
+        <p:cNvGrpSpPr/>
+        <p:nvPr/>
+      </p:nvGrpSpPr>
+      <p:grpSpPr>
+        <a:xfrm>
+          <a:off x="0" y="0"/>
+          <a:ext cx="0" cy="0"/>
+          <a:chOff x="0" y="0"/>
+          <a:chExt cx="0" cy="0"/>
+        </a:xfrm>
+      </p:grpSpPr>
+      <p:sp>
+        <p:nvSpPr>
+          <p:cNvPr id="4" name="슬라이드 번호 개체 틀 3">
+            <a:extLst>
+              <a:ext uri="{FF2B5EF4-FFF2-40B4-BE49-F238E27FC236}">
+                <a16:creationId xmlns:a16="http://schemas.microsoft.com/office/drawing/2014/main" id="{3EC740FE-6F83-D884-B809-54D148F08284}"/>
+              </a:ext>
+            </a:extLst>
+          </p:cNvPr>
+          <p:cNvSpPr>
+            <a:spLocks noGrp="1"/>
+          </p:cNvSpPr>
+          <p:nvPr>
+            <p:ph type="sldNum" sz="quarter" idx="12"/>
+          </p:nvPr>
+        </p:nvSpPr>
+        <p:spPr>
+          <a:xfrm>
+            <a:off x="10514011" y="6036261"/>
+            <a:ext cx="753545" cy="365125"/>
+          </a:xfrm>
+        </p:spPr>
+        <p:txBody>
+          <a:bodyPr/>
+          <a:lstStyle/>
+          <a:p>
+            <a:fld id="{D57F1E4F-1CFF-5643-939E-217C01CDF565}" type="slidenum">
+              <a:rPr lang="en-US" smtClean="0"/>
+              <a:pPr/>
+              <a:t>27</a:t>
+            </a:fld>
+            <a:endParaRPr lang="en-US" dirty="0"/>
+          </a:p>
+        </p:txBody>
+      </p:sp>
+      <p:sp>
+        <p:nvSpPr>
+          <p:cNvPr id="39" name="제목 1">
+            <a:extLst>
+              <a:ext uri="{FF2B5EF4-FFF2-40B4-BE49-F238E27FC236}">
+                <a16:creationId xmlns:a16="http://schemas.microsoft.com/office/drawing/2014/main" id="{0A0B4FAC-D084-686F-33F3-B9FDC5D318DC}"/>
+              </a:ext>
+            </a:extLst>
+          </p:cNvPr>
+          <p:cNvSpPr txBox="1">
+            <a:spLocks/>
+          </p:cNvSpPr>
+          <p:nvPr/>
+        </p:nvSpPr>
+        <p:spPr>
+          <a:xfrm>
+            <a:off x="590464" y="395619"/>
+            <a:ext cx="10353762" cy="766439"/>
+          </a:xfrm>
+          <a:prstGeom prst="rect">
+            <a:avLst/>
+          </a:prstGeom>
+        </p:spPr>
+        <p:txBody>
+          <a:bodyPr vert="horz" lIns="91440" tIns="45720" rIns="91440" bIns="45720" rtlCol="0" anchor="ctr">
+            <a:normAutofit/>
+          </a:bodyPr>
+          <a:lstStyle>
+            <a:lvl1pPr algn="ctr" defTabSz="914400" rtl="0" eaLnBrk="1" latinLnBrk="1" hangingPunct="1">
+              <a:lnSpc>
+                <a:spcPct val="90000"/>
+              </a:lnSpc>
+              <a:spcBef>
+                <a:spcPct val="0"/>
+              </a:spcBef>
+              <a:buNone/>
+              <a:defRPr sz="3200" kern="1200" cap="all" baseline="0">
+                <a:solidFill>
+                  <a:schemeClr val="tx1"/>
+                </a:solidFill>
+                <a:effectLst/>
+                <a:latin typeface="Batang" panose="02030600000101010101" pitchFamily="18" charset="-127"/>
+                <a:ea typeface="Batang" panose="02030600000101010101" pitchFamily="18" charset="-127"/>
+                <a:cs typeface="+mj-cs"/>
+              </a:defRPr>
+            </a:lvl1pPr>
+          </a:lstStyle>
+          <a:p>
+            <a:pPr algn="l"/>
+            <a:r>
+              <a:rPr lang="en-US" altLang="ko-KR" sz="2800" cap="none" dirty="0">
+                <a:latin typeface="ADLaM Display" panose="02010000000000000000" pitchFamily="2" charset="0"/>
+                <a:ea typeface="ADLaM Display" panose="02010000000000000000" pitchFamily="2" charset="0"/>
+                <a:cs typeface="ADLaM Display" panose="02010000000000000000" pitchFamily="2" charset="0"/>
+              </a:rPr>
+              <a:t>Road Map to Machine Learning</a:t>
+            </a:r>
+            <a:endParaRPr lang="ko-KR" altLang="en-US" sz="2800" cap="none" dirty="0">
+              <a:solidFill>
+                <a:schemeClr val="bg2">
+                  <a:lumMod val="25000"/>
+                </a:schemeClr>
+              </a:solidFill>
+              <a:latin typeface="맑은 고딕" panose="020B0503020000020004" pitchFamily="50" charset="-127"/>
+              <a:ea typeface="맑은 고딕" panose="020B0503020000020004" pitchFamily="50" charset="-127"/>
+              <a:cs typeface="Segoe UI Light" panose="020B0502040204020203" pitchFamily="34" charset="0"/>
+            </a:endParaRPr>
+          </a:p>
+        </p:txBody>
+      </p:sp>
+      <p:sp>
+        <p:nvSpPr>
+          <p:cNvPr id="21" name="직사각형 20">
+            <a:extLst>
+              <a:ext uri="{FF2B5EF4-FFF2-40B4-BE49-F238E27FC236}">
+                <a16:creationId xmlns:a16="http://schemas.microsoft.com/office/drawing/2014/main" id="{21B29722-9A0A-0A05-CB21-114FCC052BFD}"/>
+              </a:ext>
+            </a:extLst>
+          </p:cNvPr>
+          <p:cNvSpPr/>
+          <p:nvPr/>
+        </p:nvSpPr>
+        <p:spPr>
+          <a:xfrm>
+            <a:off x="2963022" y="1805459"/>
+            <a:ext cx="8395972" cy="766438"/>
+          </a:xfrm>
+          <a:prstGeom prst="rect">
+            <a:avLst/>
+          </a:prstGeom>
+        </p:spPr>
+        <p:style>
+          <a:lnRef idx="2">
+            <a:schemeClr val="dk1">
+              <a:shade val="15000"/>
+            </a:schemeClr>
+          </a:lnRef>
+          <a:fillRef idx="1">
+            <a:schemeClr val="dk1"/>
+          </a:fillRef>
+          <a:effectRef idx="0">
+            <a:schemeClr val="dk1"/>
+          </a:effectRef>
+          <a:fontRef idx="minor">
+            <a:schemeClr val="lt1"/>
+          </a:fontRef>
+        </p:style>
+        <p:txBody>
+          <a:bodyPr rtlCol="0" anchor="ctr"/>
+          <a:lstStyle/>
+          <a:p>
+            <a:pPr algn="ctr"/>
+            <a:r>
+              <a:rPr lang="en-US" altLang="ko-KR" sz="2000" b="1" dirty="0">
+                <a:latin typeface="D2Coding" panose="020B0609020101020101" pitchFamily="49" charset="-127"/>
+                <a:ea typeface="D2Coding" panose="020B0609020101020101" pitchFamily="49" charset="-127"/>
+              </a:rPr>
+              <a:t>Tabular, Image, Text, Audio and Timeseries Data</a:t>
+            </a:r>
+            <a:endParaRPr lang="ko-KR" altLang="en-US" sz="2000" b="1" dirty="0">
+              <a:latin typeface="D2Coding" panose="020B0609020101020101" pitchFamily="49" charset="-127"/>
+              <a:ea typeface="D2Coding" panose="020B0609020101020101" pitchFamily="49" charset="-127"/>
+            </a:endParaRPr>
+          </a:p>
+        </p:txBody>
+      </p:sp>
+      <p:sp>
+        <p:nvSpPr>
+          <p:cNvPr id="25" name="직사각형 24">
+            <a:extLst>
+              <a:ext uri="{FF2B5EF4-FFF2-40B4-BE49-F238E27FC236}">
+                <a16:creationId xmlns:a16="http://schemas.microsoft.com/office/drawing/2014/main" id="{1C6F37DF-D666-0CD1-FCE3-B454F0DA4276}"/>
+              </a:ext>
+            </a:extLst>
+          </p:cNvPr>
+          <p:cNvSpPr/>
+          <p:nvPr/>
+        </p:nvSpPr>
+        <p:spPr>
+          <a:xfrm>
+            <a:off x="2972550" y="2558415"/>
+            <a:ext cx="8386446" cy="766438"/>
+          </a:xfrm>
+          <a:prstGeom prst="rect">
+            <a:avLst/>
+          </a:prstGeom>
+          <a:solidFill>
+            <a:srgbClr val="00B050"/>
+          </a:solidFill>
+        </p:spPr>
+        <p:style>
+          <a:lnRef idx="2">
+            <a:schemeClr val="dk1">
+              <a:shade val="15000"/>
+            </a:schemeClr>
+          </a:lnRef>
+          <a:fillRef idx="1">
+            <a:schemeClr val="dk1"/>
+          </a:fillRef>
+          <a:effectRef idx="0">
+            <a:schemeClr val="dk1"/>
+          </a:effectRef>
+          <a:fontRef idx="minor">
+            <a:schemeClr val="lt1"/>
+          </a:fontRef>
+        </p:style>
+        <p:txBody>
+          <a:bodyPr rtlCol="0" anchor="ctr"/>
+          <a:lstStyle/>
+          <a:p>
+            <a:pPr algn="ctr"/>
+            <a:r>
+              <a:rPr lang="en-US" altLang="ko-KR" sz="2000" b="1" dirty="0">
+                <a:latin typeface="D2Coding" panose="020B0609020101020101" pitchFamily="49" charset="-127"/>
+                <a:ea typeface="D2Coding" panose="020B0609020101020101" pitchFamily="49" charset="-127"/>
+              </a:rPr>
+              <a:t>Statistics, Probability, Linear Algebra, Calculus</a:t>
+            </a:r>
+            <a:endParaRPr lang="ko-KR" altLang="en-US" sz="2000" b="1" dirty="0">
+              <a:latin typeface="D2Coding" panose="020B0609020101020101" pitchFamily="49" charset="-127"/>
+              <a:ea typeface="D2Coding" panose="020B0609020101020101" pitchFamily="49" charset="-127"/>
+            </a:endParaRPr>
+          </a:p>
+        </p:txBody>
+      </p:sp>
+      <p:sp>
+        <p:nvSpPr>
+          <p:cNvPr id="26" name="직사각형 25">
+            <a:extLst>
+              <a:ext uri="{FF2B5EF4-FFF2-40B4-BE49-F238E27FC236}">
+                <a16:creationId xmlns:a16="http://schemas.microsoft.com/office/drawing/2014/main" id="{50A30AF5-51AE-C4F8-D19E-E9B23AFEA8B6}"/>
+              </a:ext>
+            </a:extLst>
+          </p:cNvPr>
+          <p:cNvSpPr/>
+          <p:nvPr/>
+        </p:nvSpPr>
+        <p:spPr>
+          <a:xfrm>
+            <a:off x="2972549" y="3324852"/>
+            <a:ext cx="8386446" cy="1866892"/>
+          </a:xfrm>
+          <a:prstGeom prst="rect">
+            <a:avLst/>
+          </a:prstGeom>
+          <a:solidFill>
+            <a:srgbClr val="00B0F0"/>
+          </a:solidFill>
+        </p:spPr>
+        <p:style>
+          <a:lnRef idx="2">
+            <a:schemeClr val="dk1">
+              <a:shade val="15000"/>
+            </a:schemeClr>
+          </a:lnRef>
+          <a:fillRef idx="1">
+            <a:schemeClr val="dk1"/>
+          </a:fillRef>
+          <a:effectRef idx="0">
+            <a:schemeClr val="dk1"/>
+          </a:effectRef>
+          <a:fontRef idx="minor">
+            <a:schemeClr val="lt1"/>
+          </a:fontRef>
+        </p:style>
+        <p:txBody>
+          <a:bodyPr rtlCol="0" anchor="ctr"/>
+          <a:lstStyle/>
+          <a:p>
+            <a:pPr algn="ctr"/>
+            <a:r>
+              <a:rPr lang="en-US" altLang="ko-KR" sz="2000" b="1" dirty="0">
+                <a:latin typeface="D2Coding" panose="020B0609020101020101" pitchFamily="49" charset="-127"/>
+                <a:ea typeface="D2Coding" panose="020B0609020101020101" pitchFamily="49" charset="-127"/>
+              </a:rPr>
+              <a:t>Python, pandas, Web application, Database</a:t>
+            </a:r>
+          </a:p>
+          <a:p>
+            <a:pPr algn="ctr"/>
+            <a:r>
+              <a:rPr lang="en-US" altLang="ko-KR" sz="2000" b="1" dirty="0">
+                <a:latin typeface="D2Coding" panose="020B0609020101020101" pitchFamily="49" charset="-127"/>
+                <a:ea typeface="D2Coding" panose="020B0609020101020101" pitchFamily="49" charset="-127"/>
+              </a:rPr>
+              <a:t>Fast API, </a:t>
+            </a:r>
+            <a:r>
+              <a:rPr lang="en-US" altLang="ko-KR" sz="2000" b="1" dirty="0" err="1">
+                <a:latin typeface="D2Coding" panose="020B0609020101020101" pitchFamily="49" charset="-127"/>
+                <a:ea typeface="D2Coding" panose="020B0609020101020101" pitchFamily="49" charset="-127"/>
+              </a:rPr>
+              <a:t>gradio</a:t>
+            </a:r>
+            <a:r>
+              <a:rPr lang="en-US" altLang="ko-KR" sz="2000" b="1" dirty="0">
+                <a:latin typeface="D2Coding" panose="020B0609020101020101" pitchFamily="49" charset="-127"/>
+                <a:ea typeface="D2Coding" panose="020B0609020101020101" pitchFamily="49" charset="-127"/>
+              </a:rPr>
+              <a:t>, </a:t>
+            </a:r>
+            <a:r>
+              <a:rPr lang="en-US" altLang="ko-KR" sz="2000" b="1" dirty="0" err="1">
+                <a:latin typeface="D2Coding" panose="020B0609020101020101" pitchFamily="49" charset="-127"/>
+                <a:ea typeface="D2Coding" panose="020B0609020101020101" pitchFamily="49" charset="-127"/>
+              </a:rPr>
+              <a:t>streamlit</a:t>
+            </a:r>
+            <a:r>
+              <a:rPr lang="en-US" altLang="ko-KR" sz="2000" b="1" dirty="0">
+                <a:latin typeface="D2Coding" panose="020B0609020101020101" pitchFamily="49" charset="-127"/>
+                <a:ea typeface="D2Coding" panose="020B0609020101020101" pitchFamily="49" charset="-127"/>
+              </a:rPr>
+              <a:t>, React, Typescript</a:t>
+            </a:r>
+          </a:p>
+          <a:p>
+            <a:pPr algn="ctr"/>
+            <a:r>
+              <a:rPr lang="en-US" altLang="ko-KR" sz="2000" b="1" dirty="0">
+                <a:latin typeface="D2Coding" panose="020B0609020101020101" pitchFamily="49" charset="-127"/>
+                <a:ea typeface="D2Coding" panose="020B0609020101020101" pitchFamily="49" charset="-127"/>
+              </a:rPr>
+              <a:t>Scikit-learn, </a:t>
+            </a:r>
+            <a:r>
+              <a:rPr lang="en-US" altLang="ko-KR" sz="2000" b="1" dirty="0" err="1">
+                <a:latin typeface="D2Coding" panose="020B0609020101020101" pitchFamily="49" charset="-127"/>
+                <a:ea typeface="D2Coding" panose="020B0609020101020101" pitchFamily="49" charset="-127"/>
+              </a:rPr>
+              <a:t>Pytorch</a:t>
+            </a:r>
+            <a:r>
+              <a:rPr lang="en-US" altLang="ko-KR" sz="2000" b="1" dirty="0">
+                <a:latin typeface="D2Coding" panose="020B0609020101020101" pitchFamily="49" charset="-127"/>
+                <a:ea typeface="D2Coding" panose="020B0609020101020101" pitchFamily="49" charset="-127"/>
+              </a:rPr>
+              <a:t>, </a:t>
+            </a:r>
+            <a:r>
+              <a:rPr lang="en-US" altLang="ko-KR" sz="2000" b="1" dirty="0" err="1">
+                <a:latin typeface="D2Coding" panose="020B0609020101020101" pitchFamily="49" charset="-127"/>
+                <a:ea typeface="D2Coding" panose="020B0609020101020101" pitchFamily="49" charset="-127"/>
+              </a:rPr>
+              <a:t>Keras</a:t>
+            </a:r>
+            <a:endParaRPr lang="en-US" altLang="ko-KR" sz="2000" b="1" dirty="0">
+              <a:latin typeface="D2Coding" panose="020B0609020101020101" pitchFamily="49" charset="-127"/>
+              <a:ea typeface="D2Coding" panose="020B0609020101020101" pitchFamily="49" charset="-127"/>
+            </a:endParaRPr>
+          </a:p>
+          <a:p>
+            <a:pPr algn="ctr"/>
+            <a:r>
+              <a:rPr lang="en-US" altLang="ko-KR" sz="2000" b="1" dirty="0">
+                <a:latin typeface="D2Coding" panose="020B0609020101020101" pitchFamily="49" charset="-127"/>
+                <a:ea typeface="D2Coding" panose="020B0609020101020101" pitchFamily="49" charset="-127"/>
+              </a:rPr>
+              <a:t>Deep learning, NLP, LLM, </a:t>
+            </a:r>
+            <a:r>
+              <a:rPr lang="en-US" altLang="ko-KR" sz="2000" b="1" dirty="0" err="1">
+                <a:latin typeface="D2Coding" panose="020B0609020101020101" pitchFamily="49" charset="-127"/>
+                <a:ea typeface="D2Coding" panose="020B0609020101020101" pitchFamily="49" charset="-127"/>
+              </a:rPr>
+              <a:t>Langchain</a:t>
+            </a:r>
+            <a:r>
+              <a:rPr lang="en-US" altLang="ko-KR" sz="2000" b="1" dirty="0">
+                <a:latin typeface="D2Coding" panose="020B0609020101020101" pitchFamily="49" charset="-127"/>
+                <a:ea typeface="D2Coding" panose="020B0609020101020101" pitchFamily="49" charset="-127"/>
+              </a:rPr>
+              <a:t>, AI Agent SDK, …..</a:t>
+            </a:r>
+            <a:endParaRPr lang="ko-KR" altLang="en-US" sz="2000" b="1" dirty="0">
+              <a:latin typeface="D2Coding" panose="020B0609020101020101" pitchFamily="49" charset="-127"/>
+              <a:ea typeface="D2Coding" panose="020B0609020101020101" pitchFamily="49" charset="-127"/>
+            </a:endParaRPr>
+          </a:p>
+        </p:txBody>
+      </p:sp>
+      <p:sp>
+        <p:nvSpPr>
+          <p:cNvPr id="27" name="직사각형 26">
+            <a:extLst>
+              <a:ext uri="{FF2B5EF4-FFF2-40B4-BE49-F238E27FC236}">
+                <a16:creationId xmlns:a16="http://schemas.microsoft.com/office/drawing/2014/main" id="{7DBB2324-4F94-CDB4-43CB-68DE1EA9A59D}"/>
+              </a:ext>
+            </a:extLst>
+          </p:cNvPr>
+          <p:cNvSpPr/>
+          <p:nvPr/>
+        </p:nvSpPr>
+        <p:spPr>
+          <a:xfrm>
+            <a:off x="2972548" y="5191744"/>
+            <a:ext cx="8386446" cy="657225"/>
+          </a:xfrm>
+          <a:prstGeom prst="rect">
+            <a:avLst/>
+          </a:prstGeom>
+          <a:solidFill>
+            <a:srgbClr val="FF9B45"/>
+          </a:solidFill>
+        </p:spPr>
+        <p:style>
+          <a:lnRef idx="2">
+            <a:schemeClr val="dk1">
+              <a:shade val="15000"/>
+            </a:schemeClr>
+          </a:lnRef>
+          <a:fillRef idx="1">
+            <a:schemeClr val="dk1"/>
+          </a:fillRef>
+          <a:effectRef idx="0">
+            <a:schemeClr val="dk1"/>
+          </a:effectRef>
+          <a:fontRef idx="minor">
+            <a:schemeClr val="lt1"/>
+          </a:fontRef>
+        </p:style>
+        <p:txBody>
+          <a:bodyPr rtlCol="0" anchor="ctr"/>
+          <a:lstStyle/>
+          <a:p>
+            <a:pPr algn="ctr"/>
+            <a:r>
+              <a:rPr lang="en-US" altLang="ko-KR" sz="2000" b="1" dirty="0">
+                <a:latin typeface="D2Coding" panose="020B0609020101020101" pitchFamily="49" charset="-127"/>
+                <a:ea typeface="D2Coding" panose="020B0609020101020101" pitchFamily="49" charset="-127"/>
+              </a:rPr>
+              <a:t>Soft skills</a:t>
+            </a:r>
+            <a:endParaRPr lang="ko-KR" altLang="en-US" sz="2000" b="1" dirty="0">
+              <a:latin typeface="D2Coding" panose="020B0609020101020101" pitchFamily="49" charset="-127"/>
+              <a:ea typeface="D2Coding" panose="020B0609020101020101" pitchFamily="49" charset="-127"/>
+            </a:endParaRPr>
+          </a:p>
+        </p:txBody>
+      </p:sp>
+      <p:sp>
+        <p:nvSpPr>
+          <p:cNvPr id="33" name="직사각형 32">
+            <a:extLst>
+              <a:ext uri="{FF2B5EF4-FFF2-40B4-BE49-F238E27FC236}">
+                <a16:creationId xmlns:a16="http://schemas.microsoft.com/office/drawing/2014/main" id="{2F1244DF-632A-E1F0-5A59-6E5B42049C5A}"/>
+              </a:ext>
+            </a:extLst>
+          </p:cNvPr>
+          <p:cNvSpPr/>
+          <p:nvPr/>
+        </p:nvSpPr>
+        <p:spPr>
+          <a:xfrm>
+            <a:off x="1357108" y="2558415"/>
+            <a:ext cx="1605914" cy="2633329"/>
+          </a:xfrm>
+          <a:prstGeom prst="rect">
+            <a:avLst/>
+          </a:prstGeom>
+          <a:solidFill>
+            <a:schemeClr val="accent5">
+              <a:lumMod val="75000"/>
+            </a:schemeClr>
+          </a:solidFill>
+        </p:spPr>
+        <p:style>
+          <a:lnRef idx="2">
+            <a:schemeClr val="dk1">
+              <a:shade val="15000"/>
+            </a:schemeClr>
+          </a:lnRef>
+          <a:fillRef idx="1">
+            <a:schemeClr val="dk1"/>
+          </a:fillRef>
+          <a:effectRef idx="0">
+            <a:schemeClr val="dk1"/>
+          </a:effectRef>
+          <a:fontRef idx="minor">
+            <a:schemeClr val="lt1"/>
+          </a:fontRef>
+        </p:style>
+        <p:txBody>
+          <a:bodyPr rtlCol="0" anchor="ctr"/>
+          <a:lstStyle/>
+          <a:p>
+            <a:pPr algn="ctr"/>
+            <a:r>
+              <a:rPr lang="en-US" altLang="ko-KR" sz="2000" b="1" dirty="0">
+                <a:latin typeface="D2Coding" panose="020B0609020101020101" pitchFamily="49" charset="-127"/>
+                <a:ea typeface="D2Coding" panose="020B0609020101020101" pitchFamily="49" charset="-127"/>
+              </a:rPr>
+              <a:t>Hard skills</a:t>
+            </a:r>
+            <a:endParaRPr lang="ko-KR" altLang="en-US" sz="2000" b="1" dirty="0">
+              <a:latin typeface="D2Coding" panose="020B0609020101020101" pitchFamily="49" charset="-127"/>
+              <a:ea typeface="D2Coding" panose="020B0609020101020101" pitchFamily="49" charset="-127"/>
+            </a:endParaRPr>
+          </a:p>
+        </p:txBody>
+      </p:sp>
+    </p:spTree>
+    <p:extLst>
+      <p:ext uri="{BB962C8B-B14F-4D97-AF65-F5344CB8AC3E}">
+        <p14:creationId xmlns:p14="http://schemas.microsoft.com/office/powerpoint/2010/main" val="650477012"/>
+      </p:ext>
+    </p:extLst>
+  </p:cSld>
+  <p:clrMapOvr>
+    <a:masterClrMapping/>
+  </p:clrMapOvr>
+</p:sld>
+</file>
+
+<file path=ppt/slides/slide28.xml><?xml version="1.0" encoding="utf-8"?>
+<p:sld xmlns:a="http://schemas.openxmlformats.org/drawingml/2006/main" xmlns:r="http://schemas.openxmlformats.org/officeDocument/2006/relationships" xmlns:p="http://schemas.openxmlformats.org/presentationml/2006/main">
+  <p:cSld>
+    <p:spTree>
+      <p:nvGrpSpPr>
+        <p:cNvPr id="1" name="">
+          <a:extLst>
+            <a:ext uri="{FF2B5EF4-FFF2-40B4-BE49-F238E27FC236}">
+              <a16:creationId xmlns:a16="http://schemas.microsoft.com/office/drawing/2014/main" id="{B63ECCFD-463F-7127-518A-5DC5407A9CB2}"/>
+            </a:ext>
+          </a:extLst>
+        </p:cNvPr>
+        <p:cNvGrpSpPr/>
+        <p:nvPr/>
+      </p:nvGrpSpPr>
+      <p:grpSpPr>
+        <a:xfrm>
+          <a:off x="0" y="0"/>
+          <a:ext cx="0" cy="0"/>
+          <a:chOff x="0" y="0"/>
+          <a:chExt cx="0" cy="0"/>
+        </a:xfrm>
+      </p:grpSpPr>
+      <p:sp>
+        <p:nvSpPr>
+          <p:cNvPr id="8" name="제목 7">
+            <a:extLst>
+              <a:ext uri="{FF2B5EF4-FFF2-40B4-BE49-F238E27FC236}">
+                <a16:creationId xmlns:a16="http://schemas.microsoft.com/office/drawing/2014/main" id="{99266F11-C291-BAA9-5735-0A5A7CFF4F5C}"/>
+              </a:ext>
+            </a:extLst>
+          </p:cNvPr>
+          <p:cNvSpPr>
+            <a:spLocks noGrp="1"/>
+          </p:cNvSpPr>
+          <p:nvPr>
+            <p:ph type="title"/>
+          </p:nvPr>
+        </p:nvSpPr>
+        <p:spPr>
+          <a:xfrm>
+            <a:off x="521207" y="448056"/>
+            <a:ext cx="8135613" cy="640080"/>
+          </a:xfrm>
+        </p:spPr>
+        <p:txBody>
+          <a:bodyPr rtlCol="0">
+            <a:noAutofit/>
+          </a:bodyPr>
+          <a:lstStyle/>
+          <a:p>
+            <a:pPr rtl="0"/>
+            <a:r>
+              <a:rPr lang="en-US" altLang="ko-KR" dirty="0" err="1">
+                <a:cs typeface="Segoe UI Light" panose="020B0502040204020203" pitchFamily="34" charset="0"/>
+              </a:rPr>
+              <a:t>pytorch</a:t>
+            </a:r>
+            <a:r>
+              <a:rPr lang="ko-KR" altLang="en-US" dirty="0">
+                <a:cs typeface="Segoe UI Light" panose="020B0502040204020203" pitchFamily="34" charset="0"/>
+              </a:rPr>
+              <a:t> </a:t>
+            </a:r>
+            <a:r>
+              <a:rPr lang="en-US" altLang="ko-KR" dirty="0">
+                <a:cs typeface="Segoe UI Light" panose="020B0502040204020203" pitchFamily="34" charset="0"/>
+              </a:rPr>
+              <a:t>tutorial</a:t>
+            </a:r>
+            <a:endParaRPr lang="ko-KR" altLang="en-US" dirty="0">
+              <a:cs typeface="Segoe UI Light" panose="020B0502040204020203" pitchFamily="34" charset="0"/>
+            </a:endParaRPr>
+          </a:p>
+        </p:txBody>
+      </p:sp>
+      <p:sp>
+        <p:nvSpPr>
+          <p:cNvPr id="12" name="슬라이드 번호 개체 틀 11">
+            <a:extLst>
+              <a:ext uri="{FF2B5EF4-FFF2-40B4-BE49-F238E27FC236}">
+                <a16:creationId xmlns:a16="http://schemas.microsoft.com/office/drawing/2014/main" id="{5D2A3FE8-AC2B-31B3-C63B-4CF02B6CB59D}"/>
+              </a:ext>
+            </a:extLst>
+          </p:cNvPr>
+          <p:cNvSpPr>
+            <a:spLocks noGrp="1"/>
+          </p:cNvSpPr>
+          <p:nvPr>
+            <p:ph type="sldNum" sz="quarter" idx="4"/>
+          </p:nvPr>
+        </p:nvSpPr>
+        <p:spPr/>
+        <p:txBody>
+          <a:bodyPr/>
+          <a:lstStyle/>
+          <a:p>
+            <a:fld id="{9860EDB8-5305-433F-BE41-D7A86D811DB3}" type="slidenum">
+              <a:rPr lang="en-US" altLang="ko-KR" noProof="0" smtClean="0"/>
+              <a:pPr/>
+              <a:t>28</a:t>
+            </a:fld>
+            <a:endParaRPr lang="ko-KR" altLang="en-US" noProof="0" dirty="0"/>
+          </a:p>
+        </p:txBody>
+      </p:sp>
+      <p:sp>
+        <p:nvSpPr>
+          <p:cNvPr id="16" name="TextBox 15">
+            <a:extLst>
+              <a:ext uri="{FF2B5EF4-FFF2-40B4-BE49-F238E27FC236}">
+                <a16:creationId xmlns:a16="http://schemas.microsoft.com/office/drawing/2014/main" id="{6DBC71BA-4391-0FA8-6E62-1CDC58F5E7DD}"/>
+              </a:ext>
+            </a:extLst>
+          </p:cNvPr>
+          <p:cNvSpPr txBox="1"/>
+          <p:nvPr/>
+        </p:nvSpPr>
+        <p:spPr>
+          <a:xfrm>
+            <a:off x="950697" y="1402638"/>
+            <a:ext cx="10553194" cy="4770537"/>
+          </a:xfrm>
+          <a:prstGeom prst="rect">
+            <a:avLst/>
+          </a:prstGeom>
+          <a:noFill/>
+        </p:spPr>
+        <p:txBody>
+          <a:bodyPr wrap="square" rtlCol="0">
+            <a:spAutoFit/>
+          </a:bodyPr>
+          <a:lstStyle/>
+          <a:p>
+            <a:pPr marL="342900" indent="-342900">
+              <a:buFont typeface="+mj-lt"/>
+              <a:buAutoNum type="arabicPeriod"/>
+            </a:pPr>
+            <a:r>
+              <a:rPr lang="en-US" altLang="ko-KR" sz="1600" dirty="0">
+                <a:latin typeface="맑은 고딕 Semilight" panose="020B0502040204020203" pitchFamily="50" charset="-127"/>
+                <a:ea typeface="맑은 고딕 Semilight" panose="020B0502040204020203" pitchFamily="50" charset="-127"/>
+                <a:cs typeface="맑은 고딕 Semilight" panose="020B0502040204020203" pitchFamily="50" charset="-127"/>
+              </a:rPr>
+              <a:t>Installation</a:t>
+            </a:r>
+          </a:p>
+          <a:p>
+            <a:pPr marL="342900" indent="-342900">
+              <a:buFont typeface="+mj-lt"/>
+              <a:buAutoNum type="arabicPeriod"/>
+            </a:pPr>
+            <a:r>
+              <a:rPr lang="en-US" altLang="ko-KR" sz="1600" dirty="0">
+                <a:latin typeface="맑은 고딕 Semilight" panose="020B0502040204020203" pitchFamily="50" charset="-127"/>
+                <a:ea typeface="맑은 고딕 Semilight" panose="020B0502040204020203" pitchFamily="50" charset="-127"/>
+                <a:cs typeface="맑은 고딕 Semilight" panose="020B0502040204020203" pitchFamily="50" charset="-127"/>
+              </a:rPr>
+              <a:t>Tensor Basics</a:t>
+            </a:r>
+          </a:p>
+          <a:p>
+            <a:pPr marL="342900" indent="-342900">
+              <a:buFont typeface="+mj-lt"/>
+              <a:buAutoNum type="arabicPeriod"/>
+            </a:pPr>
+            <a:r>
+              <a:rPr lang="en-US" altLang="ko-KR" sz="1600" dirty="0" err="1">
+                <a:latin typeface="맑은 고딕 Semilight" panose="020B0502040204020203" pitchFamily="50" charset="-127"/>
+                <a:ea typeface="맑은 고딕 Semilight" panose="020B0502040204020203" pitchFamily="50" charset="-127"/>
+                <a:cs typeface="맑은 고딕 Semilight" panose="020B0502040204020203" pitchFamily="50" charset="-127"/>
+              </a:rPr>
+              <a:t>Autograd</a:t>
+            </a:r>
+            <a:endParaRPr lang="en-US" altLang="ko-KR" sz="1600" dirty="0">
+              <a:latin typeface="맑은 고딕 Semilight" panose="020B0502040204020203" pitchFamily="50" charset="-127"/>
+              <a:ea typeface="맑은 고딕 Semilight" panose="020B0502040204020203" pitchFamily="50" charset="-127"/>
+              <a:cs typeface="맑은 고딕 Semilight" panose="020B0502040204020203" pitchFamily="50" charset="-127"/>
+            </a:endParaRPr>
+          </a:p>
+          <a:p>
+            <a:pPr marL="342900" indent="-342900">
+              <a:buFont typeface="+mj-lt"/>
+              <a:buAutoNum type="arabicPeriod"/>
+            </a:pPr>
+            <a:r>
+              <a:rPr lang="en-US" altLang="ko-KR" sz="1600" dirty="0">
+                <a:latin typeface="맑은 고딕 Semilight" panose="020B0502040204020203" pitchFamily="50" charset="-127"/>
+                <a:ea typeface="맑은 고딕 Semilight" panose="020B0502040204020203" pitchFamily="50" charset="-127"/>
+                <a:cs typeface="맑은 고딕 Semilight" panose="020B0502040204020203" pitchFamily="50" charset="-127"/>
+              </a:rPr>
+              <a:t>Backpropagation</a:t>
+            </a:r>
+          </a:p>
+          <a:p>
+            <a:pPr marL="342900" indent="-342900">
+              <a:buFont typeface="+mj-lt"/>
+              <a:buAutoNum type="arabicPeriod"/>
+            </a:pPr>
+            <a:r>
+              <a:rPr lang="en-US" altLang="ko-KR" sz="1600" dirty="0">
+                <a:latin typeface="맑은 고딕 Semilight" panose="020B0502040204020203" pitchFamily="50" charset="-127"/>
+                <a:ea typeface="맑은 고딕 Semilight" panose="020B0502040204020203" pitchFamily="50" charset="-127"/>
+                <a:cs typeface="맑은 고딕 Semilight" panose="020B0502040204020203" pitchFamily="50" charset="-127"/>
+              </a:rPr>
+              <a:t>Gradient Descent With </a:t>
+            </a:r>
+            <a:r>
+              <a:rPr lang="en-US" altLang="ko-KR" sz="1600" dirty="0" err="1">
+                <a:latin typeface="맑은 고딕 Semilight" panose="020B0502040204020203" pitchFamily="50" charset="-127"/>
+                <a:ea typeface="맑은 고딕 Semilight" panose="020B0502040204020203" pitchFamily="50" charset="-127"/>
+                <a:cs typeface="맑은 고딕 Semilight" panose="020B0502040204020203" pitchFamily="50" charset="-127"/>
+              </a:rPr>
+              <a:t>Autograd</a:t>
+            </a:r>
+            <a:r>
+              <a:rPr lang="en-US" altLang="ko-KR" sz="1600" dirty="0">
+                <a:latin typeface="맑은 고딕 Semilight" panose="020B0502040204020203" pitchFamily="50" charset="-127"/>
+                <a:ea typeface="맑은 고딕 Semilight" panose="020B0502040204020203" pitchFamily="50" charset="-127"/>
+                <a:cs typeface="맑은 고딕 Semilight" panose="020B0502040204020203" pitchFamily="50" charset="-127"/>
+              </a:rPr>
+              <a:t> and Backpropagation</a:t>
+            </a:r>
+          </a:p>
+          <a:p>
+            <a:pPr marL="342900" indent="-342900">
+              <a:buFont typeface="+mj-lt"/>
+              <a:buAutoNum type="arabicPeriod"/>
+            </a:pPr>
+            <a:r>
+              <a:rPr lang="en-US" altLang="ko-KR" sz="1600" dirty="0">
+                <a:latin typeface="맑은 고딕 Semilight" panose="020B0502040204020203" pitchFamily="50" charset="-127"/>
+                <a:ea typeface="맑은 고딕 Semilight" panose="020B0502040204020203" pitchFamily="50" charset="-127"/>
+                <a:cs typeface="맑은 고딕 Semilight" panose="020B0502040204020203" pitchFamily="50" charset="-127"/>
+              </a:rPr>
+              <a:t>Training Pipeline: Model, Loss, and Optimizer</a:t>
+            </a:r>
+          </a:p>
+          <a:p>
+            <a:pPr marL="342900" indent="-342900">
+              <a:buFont typeface="+mj-lt"/>
+              <a:buAutoNum type="arabicPeriod"/>
+            </a:pPr>
+            <a:r>
+              <a:rPr lang="en-US" altLang="ko-KR" sz="1600" dirty="0">
+                <a:latin typeface="맑은 고딕 Semilight" panose="020B0502040204020203" pitchFamily="50" charset="-127"/>
+                <a:ea typeface="맑은 고딕 Semilight" panose="020B0502040204020203" pitchFamily="50" charset="-127"/>
+                <a:cs typeface="맑은 고딕 Semilight" panose="020B0502040204020203" pitchFamily="50" charset="-127"/>
+              </a:rPr>
+              <a:t>Linear Regression</a:t>
+            </a:r>
+          </a:p>
+          <a:p>
+            <a:pPr marL="342900" indent="-342900">
+              <a:buFont typeface="+mj-lt"/>
+              <a:buAutoNum type="arabicPeriod"/>
+            </a:pPr>
+            <a:r>
+              <a:rPr lang="en-US" altLang="ko-KR" sz="1600" dirty="0">
+                <a:latin typeface="맑은 고딕 Semilight" panose="020B0502040204020203" pitchFamily="50" charset="-127"/>
+                <a:ea typeface="맑은 고딕 Semilight" panose="020B0502040204020203" pitchFamily="50" charset="-127"/>
+                <a:cs typeface="맑은 고딕 Semilight" panose="020B0502040204020203" pitchFamily="50" charset="-127"/>
+              </a:rPr>
+              <a:t>Logistic Regression</a:t>
+            </a:r>
+          </a:p>
+          <a:p>
+            <a:pPr marL="342900" indent="-342900">
+              <a:buFont typeface="+mj-lt"/>
+              <a:buAutoNum type="arabicPeriod"/>
+            </a:pPr>
+            <a:r>
+              <a:rPr lang="en-US" altLang="ko-KR" sz="1600" dirty="0">
+                <a:latin typeface="맑은 고딕 Semilight" panose="020B0502040204020203" pitchFamily="50" charset="-127"/>
+                <a:ea typeface="맑은 고딕 Semilight" panose="020B0502040204020203" pitchFamily="50" charset="-127"/>
+                <a:cs typeface="맑은 고딕 Semilight" panose="020B0502040204020203" pitchFamily="50" charset="-127"/>
+              </a:rPr>
+              <a:t>Dataset and </a:t>
+            </a:r>
+            <a:r>
+              <a:rPr lang="en-US" altLang="ko-KR" sz="1600" dirty="0" err="1">
+                <a:latin typeface="맑은 고딕 Semilight" panose="020B0502040204020203" pitchFamily="50" charset="-127"/>
+                <a:ea typeface="맑은 고딕 Semilight" panose="020B0502040204020203" pitchFamily="50" charset="-127"/>
+                <a:cs typeface="맑은 고딕 Semilight" panose="020B0502040204020203" pitchFamily="50" charset="-127"/>
+              </a:rPr>
+              <a:t>DataLoader</a:t>
+            </a:r>
+            <a:endParaRPr lang="en-US" altLang="ko-KR" sz="1600" dirty="0">
+              <a:latin typeface="맑은 고딕 Semilight" panose="020B0502040204020203" pitchFamily="50" charset="-127"/>
+              <a:ea typeface="맑은 고딕 Semilight" panose="020B0502040204020203" pitchFamily="50" charset="-127"/>
+              <a:cs typeface="맑은 고딕 Semilight" panose="020B0502040204020203" pitchFamily="50" charset="-127"/>
+            </a:endParaRPr>
+          </a:p>
+          <a:p>
+            <a:pPr marL="342900" indent="-342900">
+              <a:buFont typeface="+mj-lt"/>
+              <a:buAutoNum type="arabicPeriod"/>
+            </a:pPr>
+            <a:r>
+              <a:rPr lang="en-US" altLang="ko-KR" sz="1600" dirty="0">
+                <a:latin typeface="맑은 고딕 Semilight" panose="020B0502040204020203" pitchFamily="50" charset="-127"/>
+                <a:ea typeface="맑은 고딕 Semilight" panose="020B0502040204020203" pitchFamily="50" charset="-127"/>
+                <a:cs typeface="맑은 고딕 Semilight" panose="020B0502040204020203" pitchFamily="50" charset="-127"/>
+              </a:rPr>
+              <a:t>Dataset Transforms</a:t>
+            </a:r>
+          </a:p>
+          <a:p>
+            <a:pPr marL="342900" indent="-342900">
+              <a:buFont typeface="+mj-lt"/>
+              <a:buAutoNum type="arabicPeriod"/>
+            </a:pPr>
+            <a:r>
+              <a:rPr lang="en-US" altLang="ko-KR" sz="1600" dirty="0" err="1">
+                <a:latin typeface="맑은 고딕 Semilight" panose="020B0502040204020203" pitchFamily="50" charset="-127"/>
+                <a:ea typeface="맑은 고딕 Semilight" panose="020B0502040204020203" pitchFamily="50" charset="-127"/>
+                <a:cs typeface="맑은 고딕 Semilight" panose="020B0502040204020203" pitchFamily="50" charset="-127"/>
+              </a:rPr>
+              <a:t>Softmax</a:t>
+            </a:r>
+            <a:r>
+              <a:rPr lang="en-US" altLang="ko-KR" sz="1600" dirty="0">
+                <a:latin typeface="맑은 고딕 Semilight" panose="020B0502040204020203" pitchFamily="50" charset="-127"/>
+                <a:ea typeface="맑은 고딕 Semilight" panose="020B0502040204020203" pitchFamily="50" charset="-127"/>
+                <a:cs typeface="맑은 고딕 Semilight" panose="020B0502040204020203" pitchFamily="50" charset="-127"/>
+              </a:rPr>
+              <a:t> And Cross Entropy</a:t>
+            </a:r>
+          </a:p>
+          <a:p>
+            <a:pPr marL="342900" indent="-342900">
+              <a:buFont typeface="+mj-lt"/>
+              <a:buAutoNum type="arabicPeriod"/>
+            </a:pPr>
+            <a:r>
+              <a:rPr lang="en-US" altLang="ko-KR" sz="1600" dirty="0">
+                <a:latin typeface="맑은 고딕 Semilight" panose="020B0502040204020203" pitchFamily="50" charset="-127"/>
+                <a:ea typeface="맑은 고딕 Semilight" panose="020B0502040204020203" pitchFamily="50" charset="-127"/>
+                <a:cs typeface="맑은 고딕 Semilight" panose="020B0502040204020203" pitchFamily="50" charset="-127"/>
+              </a:rPr>
+              <a:t>Activation Functions</a:t>
+            </a:r>
+          </a:p>
+          <a:p>
+            <a:pPr marL="342900" indent="-342900">
+              <a:buFont typeface="+mj-lt"/>
+              <a:buAutoNum type="arabicPeriod"/>
+            </a:pPr>
+            <a:r>
+              <a:rPr lang="en-US" altLang="ko-KR" sz="1600" dirty="0">
+                <a:latin typeface="맑은 고딕 Semilight" panose="020B0502040204020203" pitchFamily="50" charset="-127"/>
+                <a:ea typeface="맑은 고딕 Semilight" panose="020B0502040204020203" pitchFamily="50" charset="-127"/>
+                <a:cs typeface="맑은 고딕 Semilight" panose="020B0502040204020203" pitchFamily="50" charset="-127"/>
+              </a:rPr>
+              <a:t>Feed-Forward Neural Net</a:t>
+            </a:r>
+          </a:p>
+          <a:p>
+            <a:pPr marL="342900" indent="-342900">
+              <a:buFont typeface="+mj-lt"/>
+              <a:buAutoNum type="arabicPeriod"/>
+            </a:pPr>
+            <a:r>
+              <a:rPr lang="en-US" altLang="ko-KR" sz="1600" dirty="0">
+                <a:latin typeface="맑은 고딕 Semilight" panose="020B0502040204020203" pitchFamily="50" charset="-127"/>
+                <a:ea typeface="맑은 고딕 Semilight" panose="020B0502040204020203" pitchFamily="50" charset="-127"/>
+                <a:cs typeface="맑은 고딕 Semilight" panose="020B0502040204020203" pitchFamily="50" charset="-127"/>
+              </a:rPr>
+              <a:t>Convolutional Neural Net (CNN)</a:t>
+            </a:r>
+          </a:p>
+          <a:p>
+            <a:pPr marL="342900" indent="-342900">
+              <a:buFont typeface="+mj-lt"/>
+              <a:buAutoNum type="arabicPeriod"/>
+            </a:pPr>
+            <a:r>
+              <a:rPr lang="en-US" altLang="ko-KR" sz="1600" dirty="0">
+                <a:latin typeface="맑은 고딕 Semilight" panose="020B0502040204020203" pitchFamily="50" charset="-127"/>
+                <a:ea typeface="맑은 고딕 Semilight" panose="020B0502040204020203" pitchFamily="50" charset="-127"/>
+                <a:cs typeface="맑은 고딕 Semilight" panose="020B0502040204020203" pitchFamily="50" charset="-127"/>
+              </a:rPr>
+              <a:t>Transfer Learning</a:t>
+            </a:r>
+          </a:p>
+          <a:p>
+            <a:pPr marL="342900" indent="-342900">
+              <a:buFont typeface="+mj-lt"/>
+              <a:buAutoNum type="arabicPeriod"/>
+            </a:pPr>
+            <a:r>
+              <a:rPr lang="en-US" altLang="ko-KR" sz="1600" dirty="0" err="1">
+                <a:latin typeface="맑은 고딕 Semilight" panose="020B0502040204020203" pitchFamily="50" charset="-127"/>
+                <a:ea typeface="맑은 고딕 Semilight" panose="020B0502040204020203" pitchFamily="50" charset="-127"/>
+                <a:cs typeface="맑은 고딕 Semilight" panose="020B0502040204020203" pitchFamily="50" charset="-127"/>
+              </a:rPr>
+              <a:t>Tensorboard</a:t>
+            </a:r>
+            <a:endParaRPr lang="en-US" altLang="ko-KR" sz="1600" dirty="0">
+              <a:latin typeface="맑은 고딕 Semilight" panose="020B0502040204020203" pitchFamily="50" charset="-127"/>
+              <a:ea typeface="맑은 고딕 Semilight" panose="020B0502040204020203" pitchFamily="50" charset="-127"/>
+              <a:cs typeface="맑은 고딕 Semilight" panose="020B0502040204020203" pitchFamily="50" charset="-127"/>
+            </a:endParaRPr>
+          </a:p>
+          <a:p>
+            <a:pPr marL="342900" indent="-342900">
+              <a:buFont typeface="+mj-lt"/>
+              <a:buAutoNum type="arabicPeriod"/>
+            </a:pPr>
+            <a:r>
+              <a:rPr lang="en-US" altLang="ko-KR" sz="1600" dirty="0">
+                <a:latin typeface="맑은 고딕 Semilight" panose="020B0502040204020203" pitchFamily="50" charset="-127"/>
+                <a:ea typeface="맑은 고딕 Semilight" panose="020B0502040204020203" pitchFamily="50" charset="-127"/>
+                <a:cs typeface="맑은 고딕 Semilight" panose="020B0502040204020203" pitchFamily="50" charset="-127"/>
+              </a:rPr>
+              <a:t>Save and Load Models</a:t>
+            </a:r>
+          </a:p>
+          <a:p>
+            <a:pPr marL="342900" indent="-342900">
+              <a:buFont typeface="+mj-lt"/>
+              <a:buAutoNum type="arabicPeriod"/>
+            </a:pPr>
+            <a:endParaRPr lang="en-US" altLang="ko-KR" sz="1600" dirty="0">
+              <a:latin typeface="맑은 고딕 Semilight" panose="020B0502040204020203" pitchFamily="50" charset="-127"/>
+              <a:ea typeface="맑은 고딕 Semilight" panose="020B0502040204020203" pitchFamily="50" charset="-127"/>
+              <a:cs typeface="맑은 고딕 Semilight" panose="020B0502040204020203" pitchFamily="50" charset="-127"/>
+            </a:endParaRPr>
+          </a:p>
+          <a:p>
+            <a:r>
+              <a:rPr lang="en-US" altLang="ko-KR" sz="1600" dirty="0" err="1">
+                <a:latin typeface="맑은 고딕 Semilight" panose="020B0502040204020203" pitchFamily="50" charset="-127"/>
+                <a:ea typeface="맑은 고딕 Semilight" panose="020B0502040204020203" pitchFamily="50" charset="-127"/>
+                <a:cs typeface="맑은 고딕 Semilight" panose="020B0502040204020203" pitchFamily="50" charset="-127"/>
+                <a:hlinkClick r:id="rId3">
+                  <a:extLst>
+                    <a:ext uri="{A12FA001-AC4F-418D-AE19-62706E023703}">
+                      <ahyp:hlinkClr xmlns:ahyp="http://schemas.microsoft.com/office/drawing/2018/hyperlinkcolor" val="tx"/>
+                    </a:ext>
+                  </a:extLst>
+                </a:hlinkClick>
+              </a:rPr>
+              <a:t>pytorch</a:t>
+            </a:r>
+            <a:endParaRPr lang="en-US" altLang="ko-KR" sz="1600" dirty="0">
+              <a:latin typeface="맑은 고딕 Semilight" panose="020B0502040204020203" pitchFamily="50" charset="-127"/>
+              <a:ea typeface="맑은 고딕 Semilight" panose="020B0502040204020203" pitchFamily="50" charset="-127"/>
+              <a:cs typeface="맑은 고딕 Semilight" panose="020B0502040204020203" pitchFamily="50" charset="-127"/>
+            </a:endParaRPr>
+          </a:p>
+        </p:txBody>
+      </p:sp>
+    </p:spTree>
+    <p:extLst>
+      <p:ext uri="{BB962C8B-B14F-4D97-AF65-F5344CB8AC3E}">
+        <p14:creationId xmlns:p14="http://schemas.microsoft.com/office/powerpoint/2010/main" val="2904606139"/>
+      </p:ext>
+    </p:extLst>
+  </p:cSld>
+  <p:clrMapOvr>
+    <a:masterClrMapping/>
+  </p:clrMapOvr>
+  <mc:AlternateContent xmlns:mc="http://schemas.openxmlformats.org/markup-compatibility/2006" xmlns:p14="http://schemas.microsoft.com/office/powerpoint/2010/main">
+    <mc:Choice Requires="p14">
+      <p:transition p14:dur="10"/>
+    </mc:Choice>
+    <mc:Fallback xmlns="">
+      <p:transition/>
+    </mc:Fallback>
+  </mc:AlternateContent>
+</p:sld>
+</file>
+
+<file path=ppt/slides/slide3.xml><?xml version="1.0" encoding="utf-8"?>
 <p:sld xmlns:a="http://schemas.openxmlformats.org/drawingml/2006/main" xmlns:r="http://schemas.openxmlformats.org/officeDocument/2006/relationships" xmlns:p="http://schemas.openxmlformats.org/presentationml/2006/main">
   <p:cSld>
     <p:spTree>
@@ -11672,7 +17697,7 @@
             <a:fld id="{9860EDB8-5305-433F-BE41-D7A86D811DB3}" type="slidenum">
               <a:rPr lang="en-US" altLang="ko-KR" noProof="0" smtClean="0"/>
               <a:pPr/>
-              <a:t>2</a:t>
+              <a:t>3</a:t>
             </a:fld>
             <a:endParaRPr lang="ko-KR" altLang="en-US" noProof="0"/>
           </a:p>
@@ -11872,7 +17897,7 @@
 </p:sld>
 </file>
 
-<file path=ppt/slides/slide3.xml><?xml version="1.0" encoding="utf-8"?>
+<file path=ppt/slides/slide4.xml><?xml version="1.0" encoding="utf-8"?>
 <p:sld xmlns:a="http://schemas.openxmlformats.org/drawingml/2006/main" xmlns:r="http://schemas.openxmlformats.org/officeDocument/2006/relationships" xmlns:p="http://schemas.openxmlformats.org/presentationml/2006/main">
   <p:cSld>
     <p:spTree>
@@ -11919,7 +17944,7 @@
             <a:fld id="{9860EDB8-5305-433F-BE41-D7A86D811DB3}" type="slidenum">
               <a:rPr lang="en-US" altLang="ko-KR" noProof="0" smtClean="0"/>
               <a:pPr/>
-              <a:t>3</a:t>
+              <a:t>4</a:t>
             </a:fld>
             <a:endParaRPr lang="ko-KR" altLang="en-US" noProof="0"/>
           </a:p>
@@ -12400,7 +18425,7 @@
 </p:sld>
 </file>
 
-<file path=ppt/slides/slide4.xml><?xml version="1.0" encoding="utf-8"?>
+<file path=ppt/slides/slide5.xml><?xml version="1.0" encoding="utf-8"?>
 <p:sld xmlns:a="http://schemas.openxmlformats.org/drawingml/2006/main" xmlns:r="http://schemas.openxmlformats.org/officeDocument/2006/relationships" xmlns:p="http://schemas.openxmlformats.org/presentationml/2006/main">
   <p:cSld>
     <p:spTree>
@@ -12447,7 +18472,7 @@
             <a:fld id="{9860EDB8-5305-433F-BE41-D7A86D811DB3}" type="slidenum">
               <a:rPr lang="en-US" altLang="ko-KR" noProof="0" smtClean="0"/>
               <a:pPr/>
-              <a:t>4</a:t>
+              <a:t>5</a:t>
             </a:fld>
             <a:endParaRPr lang="ko-KR" altLang="en-US" noProof="0"/>
           </a:p>
@@ -13971,7 +19996,7 @@
 </p:sld>
 </file>
 
-<file path=ppt/slides/slide5.xml><?xml version="1.0" encoding="utf-8"?>
+<file path=ppt/slides/slide6.xml><?xml version="1.0" encoding="utf-8"?>
 <p:sld xmlns:a="http://schemas.openxmlformats.org/drawingml/2006/main" xmlns:r="http://schemas.openxmlformats.org/officeDocument/2006/relationships" xmlns:p="http://schemas.openxmlformats.org/presentationml/2006/main">
   <p:cSld>
     <p:spTree>
@@ -14018,7 +20043,7 @@
             <a:fld id="{9860EDB8-5305-433F-BE41-D7A86D811DB3}" type="slidenum">
               <a:rPr lang="en-US" altLang="ko-KR" noProof="0" smtClean="0"/>
               <a:pPr/>
-              <a:t>5</a:t>
+              <a:t>6</a:t>
             </a:fld>
             <a:endParaRPr lang="ko-KR" altLang="en-US" noProof="0"/>
           </a:p>
@@ -15220,7 +21245,7 @@
 </p:sld>
 </file>
 
-<file path=ppt/slides/slide6.xml><?xml version="1.0" encoding="utf-8"?>
+<file path=ppt/slides/slide7.xml><?xml version="1.0" encoding="utf-8"?>
 <p:sld xmlns:a="http://schemas.openxmlformats.org/drawingml/2006/main" xmlns:r="http://schemas.openxmlformats.org/officeDocument/2006/relationships" xmlns:p="http://schemas.openxmlformats.org/presentationml/2006/main">
   <p:cSld>
     <p:spTree>
@@ -15267,7 +21292,7 @@
             <a:fld id="{9860EDB8-5305-433F-BE41-D7A86D811DB3}" type="slidenum">
               <a:rPr lang="en-US" altLang="ko-KR" noProof="0" smtClean="0"/>
               <a:pPr/>
-              <a:t>6</a:t>
+              <a:t>7</a:t>
             </a:fld>
             <a:endParaRPr lang="ko-KR" altLang="en-US" noProof="0"/>
           </a:p>
@@ -16450,7 +22475,7 @@
 </p:sld>
 </file>
 
-<file path=ppt/slides/slide7.xml><?xml version="1.0" encoding="utf-8"?>
+<file path=ppt/slides/slide8.xml><?xml version="1.0" encoding="utf-8"?>
 <p:sld xmlns:a="http://schemas.openxmlformats.org/drawingml/2006/main" xmlns:r="http://schemas.openxmlformats.org/officeDocument/2006/relationships" xmlns:p="http://schemas.openxmlformats.org/presentationml/2006/main">
   <p:cSld>
     <p:spTree>
@@ -16497,7 +22522,7 @@
             <a:fld id="{9860EDB8-5305-433F-BE41-D7A86D811DB3}" type="slidenum">
               <a:rPr lang="en-US" altLang="ko-KR" noProof="0" smtClean="0"/>
               <a:pPr/>
-              <a:t>7</a:t>
+              <a:t>8</a:t>
             </a:fld>
             <a:endParaRPr lang="ko-KR" altLang="en-US" noProof="0"/>
           </a:p>
@@ -16645,20 +22670,12 @@
               <a:t> </a:t>
             </a:r>
             <a:r>
-              <a:rPr lang="en-US" altLang="ko-KR" dirty="0" err="1">
-                <a:latin typeface="맑은 고딕 Semilight" panose="020B0502040204020203" pitchFamily="50" charset="-127"/>
-                <a:ea typeface="맑은 고딕 Semilight" panose="020B0502040204020203" pitchFamily="50" charset="-127"/>
-                <a:cs typeface="맑은 고딕 Semilight" panose="020B0502040204020203" pitchFamily="50" charset="-127"/>
-              </a:rPr>
-              <a:t>tjfh</a:t>
-            </a:r>
-            <a:r>
               <a:rPr lang="ko-KR" altLang="en-US" dirty="0">
                 <a:latin typeface="맑은 고딕 Semilight" panose="020B0502040204020203" pitchFamily="50" charset="-127"/>
                 <a:ea typeface="맑은 고딕 Semilight" panose="020B0502040204020203" pitchFamily="50" charset="-127"/>
                 <a:cs typeface="맑은 고딕 Semilight" panose="020B0502040204020203" pitchFamily="50" charset="-127"/>
               </a:rPr>
-              <a:t> 비교하여 생각해 보자 </a:t>
+              <a:t>비교하여 생각해 보자 </a:t>
             </a:r>
           </a:p>
         </p:txBody>
@@ -17714,7 +23731,7 @@
 </p:sld>
 </file>
 
-<file path=ppt/slides/slide8.xml><?xml version="1.0" encoding="utf-8"?>
+<file path=ppt/slides/slide9.xml><?xml version="1.0" encoding="utf-8"?>
 <p:sld xmlns:a="http://schemas.openxmlformats.org/drawingml/2006/main" xmlns:r="http://schemas.openxmlformats.org/officeDocument/2006/relationships" xmlns:p="http://schemas.openxmlformats.org/presentationml/2006/main">
   <p:cSld>
     <p:spTree>
@@ -17761,7 +23778,7 @@
             <a:fld id="{9860EDB8-5305-433F-BE41-D7A86D811DB3}" type="slidenum">
               <a:rPr lang="en-US" altLang="ko-KR" noProof="0" smtClean="0"/>
               <a:pPr/>
-              <a:t>8</a:t>
+              <a:t>9</a:t>
             </a:fld>
             <a:endParaRPr lang="ko-KR" altLang="en-US" noProof="0"/>
           </a:p>
@@ -18588,1125 +24605,6 @@
     <p:extLst>
       <p:ext uri="{BB962C8B-B14F-4D97-AF65-F5344CB8AC3E}">
         <p14:creationId xmlns:p14="http://schemas.microsoft.com/office/powerpoint/2010/main" val="1334305961"/>
-      </p:ext>
-    </p:extLst>
-  </p:cSld>
-  <p:clrMapOvr>
-    <a:masterClrMapping/>
-  </p:clrMapOvr>
-  <mc:AlternateContent xmlns:mc="http://schemas.openxmlformats.org/markup-compatibility/2006" xmlns:p14="http://schemas.microsoft.com/office/powerpoint/2010/main">
-    <mc:Choice Requires="p14">
-      <p:transition p14:dur="10"/>
-    </mc:Choice>
-    <mc:Fallback xmlns="">
-      <p:transition/>
-    </mc:Fallback>
-  </mc:AlternateContent>
-</p:sld>
-</file>
-
-<file path=ppt/slides/slide9.xml><?xml version="1.0" encoding="utf-8"?>
-<p:sld xmlns:a="http://schemas.openxmlformats.org/drawingml/2006/main" xmlns:r="http://schemas.openxmlformats.org/officeDocument/2006/relationships" xmlns:p="http://schemas.openxmlformats.org/presentationml/2006/main">
-  <p:cSld>
-    <p:spTree>
-      <p:nvGrpSpPr>
-        <p:cNvPr id="1" name="">
-          <a:extLst>
-            <a:ext uri="{FF2B5EF4-FFF2-40B4-BE49-F238E27FC236}">
-              <a16:creationId xmlns:a16="http://schemas.microsoft.com/office/drawing/2014/main" id="{BD7DD655-3BF0-4C09-0B1D-D934CBF8FA31}"/>
-            </a:ext>
-          </a:extLst>
-        </p:cNvPr>
-        <p:cNvGrpSpPr/>
-        <p:nvPr/>
-      </p:nvGrpSpPr>
-      <p:grpSpPr>
-        <a:xfrm>
-          <a:off x="0" y="0"/>
-          <a:ext cx="0" cy="0"/>
-          <a:chOff x="0" y="0"/>
-          <a:chExt cx="0" cy="0"/>
-        </a:xfrm>
-      </p:grpSpPr>
-      <p:sp>
-        <p:nvSpPr>
-          <p:cNvPr id="12" name="슬라이드 번호 개체 틀 11">
-            <a:extLst>
-              <a:ext uri="{FF2B5EF4-FFF2-40B4-BE49-F238E27FC236}">
-                <a16:creationId xmlns:a16="http://schemas.microsoft.com/office/drawing/2014/main" id="{3E92CA1D-10C5-A32D-483B-FE34B16A6F89}"/>
-              </a:ext>
-            </a:extLst>
-          </p:cNvPr>
-          <p:cNvSpPr>
-            <a:spLocks noGrp="1"/>
-          </p:cNvSpPr>
-          <p:nvPr>
-            <p:ph type="sldNum" sz="quarter" idx="4"/>
-          </p:nvPr>
-        </p:nvSpPr>
-        <p:spPr/>
-        <p:txBody>
-          <a:bodyPr/>
-          <a:lstStyle/>
-          <a:p>
-            <a:fld id="{9860EDB8-5305-433F-BE41-D7A86D811DB3}" type="slidenum">
-              <a:rPr lang="en-US" altLang="ko-KR" noProof="0" smtClean="0"/>
-              <a:pPr/>
-              <a:t>9</a:t>
-            </a:fld>
-            <a:endParaRPr lang="ko-KR" altLang="en-US" noProof="0"/>
-          </a:p>
-        </p:txBody>
-      </p:sp>
-      <p:sp>
-        <p:nvSpPr>
-          <p:cNvPr id="9" name="제목 7">
-            <a:extLst>
-              <a:ext uri="{FF2B5EF4-FFF2-40B4-BE49-F238E27FC236}">
-                <a16:creationId xmlns:a16="http://schemas.microsoft.com/office/drawing/2014/main" id="{6F7D973D-804F-BD5B-9801-7FE8ED1828DD}"/>
-              </a:ext>
-            </a:extLst>
-          </p:cNvPr>
-          <p:cNvSpPr>
-            <a:spLocks noGrp="1"/>
-          </p:cNvSpPr>
-          <p:nvPr>
-            <p:ph type="title"/>
-          </p:nvPr>
-        </p:nvSpPr>
-        <p:spPr>
-          <a:xfrm>
-            <a:off x="521206" y="448056"/>
-            <a:ext cx="10432543" cy="640080"/>
-          </a:xfrm>
-        </p:spPr>
-        <p:txBody>
-          <a:bodyPr rtlCol="0">
-            <a:noAutofit/>
-          </a:bodyPr>
-          <a:lstStyle/>
-          <a:p>
-            <a:r>
-              <a:rPr lang="en-US" altLang="ko-KR" b="1" dirty="0">
-                <a:latin typeface="D2Coding" panose="020B0609020101020101" pitchFamily="49" charset="-127"/>
-                <a:ea typeface="D2Coding" panose="020B0609020101020101" pitchFamily="49" charset="-127"/>
-                <a:cs typeface="Segoe UI Light" panose="020B0502040204020203" pitchFamily="34" charset="0"/>
-              </a:rPr>
-              <a:t>Adam</a:t>
-            </a:r>
-            <a:endParaRPr lang="ko-KR" altLang="en-US" b="1" dirty="0">
-              <a:latin typeface="D2Coding" panose="020B0609020101020101" pitchFamily="49" charset="-127"/>
-              <a:ea typeface="D2Coding" panose="020B0609020101020101" pitchFamily="49" charset="-127"/>
-              <a:cs typeface="Segoe UI Light" panose="020B0502040204020203" pitchFamily="34" charset="0"/>
-            </a:endParaRPr>
-          </a:p>
-        </p:txBody>
-      </p:sp>
-      <p:sp>
-        <p:nvSpPr>
-          <p:cNvPr id="4" name="TextBox 3">
-            <a:extLst>
-              <a:ext uri="{FF2B5EF4-FFF2-40B4-BE49-F238E27FC236}">
-                <a16:creationId xmlns:a16="http://schemas.microsoft.com/office/drawing/2014/main" id="{ACE620EF-E9BF-EDFB-0EDB-46AA50F1672C}"/>
-              </a:ext>
-            </a:extLst>
-          </p:cNvPr>
-          <p:cNvSpPr txBox="1"/>
-          <p:nvPr/>
-        </p:nvSpPr>
-        <p:spPr>
-          <a:xfrm>
-            <a:off x="647700" y="1171575"/>
-            <a:ext cx="11000826" cy="1152688"/>
-          </a:xfrm>
-          <a:prstGeom prst="rect">
-            <a:avLst/>
-          </a:prstGeom>
-          <a:noFill/>
-        </p:spPr>
-        <p:txBody>
-          <a:bodyPr wrap="square" rtlCol="0">
-            <a:spAutoFit/>
-          </a:bodyPr>
-          <a:lstStyle/>
-          <a:p>
-            <a:pPr>
-              <a:lnSpc>
-                <a:spcPct val="150000"/>
-              </a:lnSpc>
-            </a:pPr>
-            <a:r>
-              <a:rPr lang="en-US" altLang="ko-KR" sz="1600" dirty="0">
-                <a:latin typeface="맑은 고딕 Semilight" panose="020B0502040204020203" pitchFamily="50" charset="-127"/>
-                <a:ea typeface="맑은 고딕 Semilight" panose="020B0502040204020203" pitchFamily="50" charset="-127"/>
-                <a:cs typeface="맑은 고딕 Semilight" panose="020B0502040204020203" pitchFamily="50" charset="-127"/>
-              </a:rPr>
-              <a:t>Adam(Adaptive Moment Estimation)</a:t>
-            </a:r>
-            <a:r>
-              <a:rPr lang="ko-KR" altLang="en-US" sz="1600" dirty="0">
-                <a:latin typeface="맑은 고딕 Semilight" panose="020B0502040204020203" pitchFamily="50" charset="-127"/>
-                <a:ea typeface="맑은 고딕 Semilight" panose="020B0502040204020203" pitchFamily="50" charset="-127"/>
-                <a:cs typeface="맑은 고딕 Semilight" panose="020B0502040204020203" pitchFamily="50" charset="-127"/>
-              </a:rPr>
-              <a:t>은 현재 </a:t>
-            </a:r>
-            <a:r>
-              <a:rPr lang="ko-KR" altLang="en-US" sz="1600" dirty="0" err="1">
-                <a:latin typeface="맑은 고딕 Semilight" panose="020B0502040204020203" pitchFamily="50" charset="-127"/>
-                <a:ea typeface="맑은 고딕 Semilight" panose="020B0502040204020203" pitchFamily="50" charset="-127"/>
-                <a:cs typeface="맑은 고딕 Semilight" panose="020B0502040204020203" pitchFamily="50" charset="-127"/>
-              </a:rPr>
-              <a:t>딥러닝에서</a:t>
-            </a:r>
-            <a:r>
-              <a:rPr lang="ko-KR" altLang="en-US" sz="1600" dirty="0">
-                <a:latin typeface="맑은 고딕 Semilight" panose="020B0502040204020203" pitchFamily="50" charset="-127"/>
-                <a:ea typeface="맑은 고딕 Semilight" panose="020B0502040204020203" pitchFamily="50" charset="-127"/>
-                <a:cs typeface="맑은 고딕 Semilight" panose="020B0502040204020203" pitchFamily="50" charset="-127"/>
-              </a:rPr>
-              <a:t> 가장 많이 사용되는 최적화 알고리즘</a:t>
-            </a:r>
-            <a:r>
-              <a:rPr lang="en-US" altLang="ko-KR" sz="1600" dirty="0">
-                <a:latin typeface="맑은 고딕 Semilight" panose="020B0502040204020203" pitchFamily="50" charset="-127"/>
-                <a:ea typeface="맑은 고딕 Semilight" panose="020B0502040204020203" pitchFamily="50" charset="-127"/>
-                <a:cs typeface="맑은 고딕 Semilight" panose="020B0502040204020203" pitchFamily="50" charset="-127"/>
-              </a:rPr>
-              <a:t>(Optimizer)</a:t>
-            </a:r>
-            <a:r>
-              <a:rPr lang="ko-KR" altLang="en-US" sz="1600" dirty="0">
-                <a:latin typeface="맑은 고딕 Semilight" panose="020B0502040204020203" pitchFamily="50" charset="-127"/>
-                <a:ea typeface="맑은 고딕 Semilight" panose="020B0502040204020203" pitchFamily="50" charset="-127"/>
-                <a:cs typeface="맑은 고딕 Semilight" panose="020B0502040204020203" pitchFamily="50" charset="-127"/>
-              </a:rPr>
-              <a:t>으로 </a:t>
-            </a:r>
-            <a:r>
-              <a:rPr lang="en-US" altLang="ko-KR" sz="1600" dirty="0">
-                <a:latin typeface="맑은 고딕 Semilight" panose="020B0502040204020203" pitchFamily="50" charset="-127"/>
-                <a:ea typeface="맑은 고딕 Semilight" panose="020B0502040204020203" pitchFamily="50" charset="-127"/>
-                <a:cs typeface="맑은 고딕 Semilight" panose="020B0502040204020203" pitchFamily="50" charset="-127"/>
-              </a:rPr>
-              <a:t>SGD</a:t>
-            </a:r>
-            <a:r>
-              <a:rPr lang="ko-KR" altLang="en-US" sz="1600" dirty="0">
-                <a:latin typeface="맑은 고딕 Semilight" panose="020B0502040204020203" pitchFamily="50" charset="-127"/>
-                <a:ea typeface="맑은 고딕 Semilight" panose="020B0502040204020203" pitchFamily="50" charset="-127"/>
-                <a:cs typeface="맑은 고딕 Semilight" panose="020B0502040204020203" pitchFamily="50" charset="-127"/>
-              </a:rPr>
-              <a:t>가 </a:t>
-            </a:r>
-            <a:r>
-              <a:rPr lang="en-US" altLang="ko-KR" sz="1600" dirty="0">
-                <a:latin typeface="맑은 고딕 Semilight" panose="020B0502040204020203" pitchFamily="50" charset="-127"/>
-                <a:ea typeface="맑은 고딕 Semilight" panose="020B0502040204020203" pitchFamily="50" charset="-127"/>
-                <a:cs typeface="맑은 고딕 Semilight" panose="020B0502040204020203" pitchFamily="50" charset="-127"/>
-              </a:rPr>
-              <a:t>"</a:t>
-            </a:r>
-            <a:r>
-              <a:rPr lang="ko-KR" altLang="en-US" sz="1600" dirty="0">
-                <a:latin typeface="맑은 고딕 Semilight" panose="020B0502040204020203" pitchFamily="50" charset="-127"/>
-                <a:ea typeface="맑은 고딕 Semilight" panose="020B0502040204020203" pitchFamily="50" charset="-127"/>
-                <a:cs typeface="맑은 고딕 Semilight" panose="020B0502040204020203" pitchFamily="50" charset="-127"/>
-              </a:rPr>
-              <a:t>경사를 따라 일정하게 내려가는 산악인</a:t>
-            </a:r>
-            <a:r>
-              <a:rPr lang="en-US" altLang="ko-KR" sz="1600" dirty="0">
-                <a:latin typeface="맑은 고딕 Semilight" panose="020B0502040204020203" pitchFamily="50" charset="-127"/>
-                <a:ea typeface="맑은 고딕 Semilight" panose="020B0502040204020203" pitchFamily="50" charset="-127"/>
-                <a:cs typeface="맑은 고딕 Semilight" panose="020B0502040204020203" pitchFamily="50" charset="-127"/>
-              </a:rPr>
-              <a:t>"</a:t>
-            </a:r>
-            <a:r>
-              <a:rPr lang="ko-KR" altLang="en-US" sz="1600" dirty="0">
-                <a:latin typeface="맑은 고딕 Semilight" panose="020B0502040204020203" pitchFamily="50" charset="-127"/>
-                <a:ea typeface="맑은 고딕 Semilight" panose="020B0502040204020203" pitchFamily="50" charset="-127"/>
-                <a:cs typeface="맑은 고딕 Semilight" panose="020B0502040204020203" pitchFamily="50" charset="-127"/>
-              </a:rPr>
-              <a:t>이라면</a:t>
-            </a:r>
-            <a:r>
-              <a:rPr lang="en-US" altLang="ko-KR" sz="1600" dirty="0">
-                <a:latin typeface="맑은 고딕 Semilight" panose="020B0502040204020203" pitchFamily="50" charset="-127"/>
-                <a:ea typeface="맑은 고딕 Semilight" panose="020B0502040204020203" pitchFamily="50" charset="-127"/>
-                <a:cs typeface="맑은 고딕 Semilight" panose="020B0502040204020203" pitchFamily="50" charset="-127"/>
-              </a:rPr>
-              <a:t>, Adam</a:t>
-            </a:r>
-            <a:r>
-              <a:rPr lang="ko-KR" altLang="en-US" sz="1600" dirty="0">
-                <a:latin typeface="맑은 고딕 Semilight" panose="020B0502040204020203" pitchFamily="50" charset="-127"/>
-                <a:ea typeface="맑은 고딕 Semilight" panose="020B0502040204020203" pitchFamily="50" charset="-127"/>
-                <a:cs typeface="맑은 고딕 Semilight" panose="020B0502040204020203" pitchFamily="50" charset="-127"/>
-              </a:rPr>
-              <a:t>은 </a:t>
-            </a:r>
-            <a:r>
-              <a:rPr lang="en-US" altLang="ko-KR" sz="1600" dirty="0">
-                <a:latin typeface="맑은 고딕 Semilight" panose="020B0502040204020203" pitchFamily="50" charset="-127"/>
-                <a:ea typeface="맑은 고딕 Semilight" panose="020B0502040204020203" pitchFamily="50" charset="-127"/>
-                <a:cs typeface="맑은 고딕 Semilight" panose="020B0502040204020203" pitchFamily="50" charset="-127"/>
-              </a:rPr>
-              <a:t>"</a:t>
-            </a:r>
-            <a:r>
-              <a:rPr lang="ko-KR" altLang="en-US" sz="1600" dirty="0">
-                <a:latin typeface="맑은 고딕 Semilight" panose="020B0502040204020203" pitchFamily="50" charset="-127"/>
-                <a:ea typeface="맑은 고딕 Semilight" panose="020B0502040204020203" pitchFamily="50" charset="-127"/>
-                <a:cs typeface="맑은 고딕 Semilight" panose="020B0502040204020203" pitchFamily="50" charset="-127"/>
-              </a:rPr>
-              <a:t>가속도를 붙여 빠르게 내려가면서도</a:t>
-            </a:r>
-            <a:r>
-              <a:rPr lang="en-US" altLang="ko-KR" sz="1600" dirty="0">
-                <a:latin typeface="맑은 고딕 Semilight" panose="020B0502040204020203" pitchFamily="50" charset="-127"/>
-                <a:ea typeface="맑은 고딕 Semilight" panose="020B0502040204020203" pitchFamily="50" charset="-127"/>
-                <a:cs typeface="맑은 고딕 Semilight" panose="020B0502040204020203" pitchFamily="50" charset="-127"/>
-              </a:rPr>
-              <a:t>, </a:t>
-            </a:r>
-            <a:r>
-              <a:rPr lang="ko-KR" altLang="en-US" sz="1600" dirty="0">
-                <a:latin typeface="맑은 고딕 Semilight" panose="020B0502040204020203" pitchFamily="50" charset="-127"/>
-                <a:ea typeface="맑은 고딕 Semilight" panose="020B0502040204020203" pitchFamily="50" charset="-127"/>
-                <a:cs typeface="맑은 고딕 Semilight" panose="020B0502040204020203" pitchFamily="50" charset="-127"/>
-              </a:rPr>
-              <a:t>지형에 따라 보폭을 조절하는 산악인</a:t>
-            </a:r>
-            <a:r>
-              <a:rPr lang="en-US" altLang="ko-KR" sz="1600" dirty="0">
-                <a:latin typeface="맑은 고딕 Semilight" panose="020B0502040204020203" pitchFamily="50" charset="-127"/>
-                <a:ea typeface="맑은 고딕 Semilight" panose="020B0502040204020203" pitchFamily="50" charset="-127"/>
-                <a:cs typeface="맑은 고딕 Semilight" panose="020B0502040204020203" pitchFamily="50" charset="-127"/>
-              </a:rPr>
-              <a:t>"</a:t>
-            </a:r>
-            <a:endParaRPr lang="ko-KR" altLang="en-US" sz="1600" dirty="0">
-              <a:latin typeface="맑은 고딕 Semilight" panose="020B0502040204020203" pitchFamily="50" charset="-127"/>
-              <a:ea typeface="맑은 고딕 Semilight" panose="020B0502040204020203" pitchFamily="50" charset="-127"/>
-              <a:cs typeface="맑은 고딕 Semilight" panose="020B0502040204020203" pitchFamily="50" charset="-127"/>
-            </a:endParaRPr>
-          </a:p>
-        </p:txBody>
-      </p:sp>
-      <p:sp>
-        <p:nvSpPr>
-          <p:cNvPr id="5" name="TextBox 4">
-            <a:extLst>
-              <a:ext uri="{FF2B5EF4-FFF2-40B4-BE49-F238E27FC236}">
-                <a16:creationId xmlns:a16="http://schemas.microsoft.com/office/drawing/2014/main" id="{952D744E-229E-9680-5FD9-AACFE88AF07F}"/>
-              </a:ext>
-            </a:extLst>
-          </p:cNvPr>
-          <p:cNvSpPr txBox="1"/>
-          <p:nvPr/>
-        </p:nvSpPr>
-        <p:spPr>
-          <a:xfrm>
-            <a:off x="772075" y="2664522"/>
-            <a:ext cx="5495375" cy="3539430"/>
-          </a:xfrm>
-          <a:prstGeom prst="rect">
-            <a:avLst/>
-          </a:prstGeom>
-          <a:solidFill>
-            <a:srgbClr val="76E3FF"/>
-          </a:solidFill>
-        </p:spPr>
-        <p:txBody>
-          <a:bodyPr wrap="square">
-            <a:spAutoFit/>
-          </a:bodyPr>
-          <a:lstStyle/>
-          <a:p>
-            <a:r>
-              <a:rPr lang="en-US" altLang="ko-KR" sz="1400" dirty="0">
-                <a:latin typeface="D2Coding" panose="020B0609020101020101" pitchFamily="49" charset="-127"/>
-                <a:ea typeface="D2Coding" panose="020B0609020101020101" pitchFamily="49" charset="-127"/>
-                <a:cs typeface="맑은 고딕 Semilight" panose="020B0502040204020203" pitchFamily="50" charset="-127"/>
-              </a:rPr>
-              <a:t># Adam</a:t>
-            </a:r>
-            <a:r>
-              <a:rPr lang="ko-KR" altLang="en-US" sz="1400" dirty="0">
-                <a:latin typeface="D2Coding" panose="020B0609020101020101" pitchFamily="49" charset="-127"/>
-                <a:ea typeface="D2Coding" panose="020B0609020101020101" pitchFamily="49" charset="-127"/>
-                <a:cs typeface="맑은 고딕 Semilight" panose="020B0502040204020203" pitchFamily="50" charset="-127"/>
-              </a:rPr>
-              <a:t>의 내부 로직 </a:t>
-            </a:r>
-            <a:r>
-              <a:rPr lang="en-US" altLang="ko-KR" sz="1400" dirty="0">
-                <a:latin typeface="D2Coding" panose="020B0609020101020101" pitchFamily="49" charset="-127"/>
-                <a:ea typeface="D2Coding" panose="020B0609020101020101" pitchFamily="49" charset="-127"/>
-                <a:cs typeface="맑은 고딕 Semilight" panose="020B0502040204020203" pitchFamily="50" charset="-127"/>
-              </a:rPr>
-              <a:t>(</a:t>
-            </a:r>
-            <a:r>
-              <a:rPr lang="ko-KR" altLang="en-US" sz="1400" dirty="0">
-                <a:latin typeface="D2Coding" panose="020B0609020101020101" pitchFamily="49" charset="-127"/>
-                <a:ea typeface="D2Coding" panose="020B0609020101020101" pitchFamily="49" charset="-127"/>
-                <a:cs typeface="맑은 고딕 Semilight" panose="020B0502040204020203" pitchFamily="50" charset="-127"/>
-              </a:rPr>
-              <a:t>개념적 이해</a:t>
-            </a:r>
-            <a:r>
-              <a:rPr lang="en-US" altLang="ko-KR" sz="1400" dirty="0">
-                <a:latin typeface="D2Coding" panose="020B0609020101020101" pitchFamily="49" charset="-127"/>
-                <a:ea typeface="D2Coding" panose="020B0609020101020101" pitchFamily="49" charset="-127"/>
-                <a:cs typeface="맑은 고딕 Semilight" panose="020B0502040204020203" pitchFamily="50" charset="-127"/>
-              </a:rPr>
-              <a:t>)</a:t>
-            </a:r>
-          </a:p>
-          <a:p>
-            <a:r>
-              <a:rPr lang="en-US" altLang="ko-KR" sz="1400" dirty="0">
-                <a:latin typeface="D2Coding" panose="020B0609020101020101" pitchFamily="49" charset="-127"/>
-                <a:ea typeface="D2Coding" panose="020B0609020101020101" pitchFamily="49" charset="-127"/>
-                <a:cs typeface="맑은 고딕 Semilight" panose="020B0502040204020203" pitchFamily="50" charset="-127"/>
-              </a:rPr>
-              <a:t>for epoch in range(epochs):</a:t>
-            </a:r>
-          </a:p>
-          <a:p>
-            <a:r>
-              <a:rPr lang="en-US" altLang="ko-KR" sz="1400" dirty="0">
-                <a:latin typeface="D2Coding" panose="020B0609020101020101" pitchFamily="49" charset="-127"/>
-                <a:ea typeface="D2Coding" panose="020B0609020101020101" pitchFamily="49" charset="-127"/>
-                <a:cs typeface="맑은 고딕 Semilight" panose="020B0502040204020203" pitchFamily="50" charset="-127"/>
-              </a:rPr>
-              <a:t>    for </a:t>
-            </a:r>
-            <a:r>
-              <a:rPr lang="en-US" altLang="ko-KR" sz="1400" dirty="0" err="1">
-                <a:latin typeface="D2Coding" panose="020B0609020101020101" pitchFamily="49" charset="-127"/>
-                <a:ea typeface="D2Coding" panose="020B0609020101020101" pitchFamily="49" charset="-127"/>
-                <a:cs typeface="맑은 고딕 Semilight" panose="020B0502040204020203" pitchFamily="50" charset="-127"/>
-              </a:rPr>
-              <a:t>batch_X</a:t>
-            </a:r>
-            <a:r>
-              <a:rPr lang="en-US" altLang="ko-KR" sz="1400" dirty="0">
-                <a:latin typeface="D2Coding" panose="020B0609020101020101" pitchFamily="49" charset="-127"/>
-                <a:ea typeface="D2Coding" panose="020B0609020101020101" pitchFamily="49" charset="-127"/>
-                <a:cs typeface="맑은 고딕 Semilight" panose="020B0502040204020203" pitchFamily="50" charset="-127"/>
-              </a:rPr>
-              <a:t>, </a:t>
-            </a:r>
-            <a:r>
-              <a:rPr lang="en-US" altLang="ko-KR" sz="1400" dirty="0" err="1">
-                <a:latin typeface="D2Coding" panose="020B0609020101020101" pitchFamily="49" charset="-127"/>
-                <a:ea typeface="D2Coding" panose="020B0609020101020101" pitchFamily="49" charset="-127"/>
-                <a:cs typeface="맑은 고딕 Semilight" panose="020B0502040204020203" pitchFamily="50" charset="-127"/>
-              </a:rPr>
-              <a:t>batch_y</a:t>
-            </a:r>
-            <a:r>
-              <a:rPr lang="en-US" altLang="ko-KR" sz="1400" dirty="0">
-                <a:latin typeface="D2Coding" panose="020B0609020101020101" pitchFamily="49" charset="-127"/>
-                <a:ea typeface="D2Coding" panose="020B0609020101020101" pitchFamily="49" charset="-127"/>
-                <a:cs typeface="맑은 고딕 Semilight" panose="020B0502040204020203" pitchFamily="50" charset="-127"/>
-              </a:rPr>
-              <a:t> in </a:t>
-            </a:r>
-            <a:r>
-              <a:rPr lang="en-US" altLang="ko-KR" sz="1400" dirty="0" err="1">
-                <a:latin typeface="D2Coding" panose="020B0609020101020101" pitchFamily="49" charset="-127"/>
-                <a:ea typeface="D2Coding" panose="020B0609020101020101" pitchFamily="49" charset="-127"/>
-                <a:cs typeface="맑은 고딕 Semilight" panose="020B0502040204020203" pitchFamily="50" charset="-127"/>
-              </a:rPr>
-              <a:t>dataloader</a:t>
-            </a:r>
-            <a:r>
-              <a:rPr lang="en-US" altLang="ko-KR" sz="1400" dirty="0">
-                <a:latin typeface="D2Coding" panose="020B0609020101020101" pitchFamily="49" charset="-127"/>
-                <a:ea typeface="D2Coding" panose="020B0609020101020101" pitchFamily="49" charset="-127"/>
-                <a:cs typeface="맑은 고딕 Semilight" panose="020B0502040204020203" pitchFamily="50" charset="-127"/>
-              </a:rPr>
-              <a:t>:</a:t>
-            </a:r>
-          </a:p>
-          <a:p>
-            <a:r>
-              <a:rPr lang="en-US" altLang="ko-KR" sz="1400" dirty="0">
-                <a:latin typeface="D2Coding" panose="020B0609020101020101" pitchFamily="49" charset="-127"/>
-                <a:ea typeface="D2Coding" panose="020B0609020101020101" pitchFamily="49" charset="-127"/>
-                <a:cs typeface="맑은 고딕 Semilight" panose="020B0502040204020203" pitchFamily="50" charset="-127"/>
-              </a:rPr>
-              <a:t>        # 1. </a:t>
-            </a:r>
-            <a:r>
-              <a:rPr lang="ko-KR" altLang="en-US" sz="1400" dirty="0">
-                <a:latin typeface="D2Coding" panose="020B0609020101020101" pitchFamily="49" charset="-127"/>
-                <a:ea typeface="D2Coding" panose="020B0609020101020101" pitchFamily="49" charset="-127"/>
-                <a:cs typeface="맑은 고딕 Semilight" panose="020B0502040204020203" pitchFamily="50" charset="-127"/>
-              </a:rPr>
-              <a:t>기울기 계산</a:t>
-            </a:r>
-          </a:p>
-          <a:p>
-            <a:r>
-              <a:rPr lang="ko-KR" altLang="en-US" sz="1400" dirty="0">
-                <a:latin typeface="D2Coding" panose="020B0609020101020101" pitchFamily="49" charset="-127"/>
-                <a:ea typeface="D2Coding" panose="020B0609020101020101" pitchFamily="49" charset="-127"/>
-                <a:cs typeface="맑은 고딕 Semilight" panose="020B0502040204020203" pitchFamily="50" charset="-127"/>
-              </a:rPr>
-              <a:t>        </a:t>
-            </a:r>
-            <a:r>
-              <a:rPr lang="en-US" altLang="ko-KR" sz="1400" dirty="0">
-                <a:latin typeface="D2Coding" panose="020B0609020101020101" pitchFamily="49" charset="-127"/>
-                <a:ea typeface="D2Coding" panose="020B0609020101020101" pitchFamily="49" charset="-127"/>
-                <a:cs typeface="맑은 고딕 Semilight" panose="020B0502040204020203" pitchFamily="50" charset="-127"/>
-              </a:rPr>
-              <a:t>gradient = </a:t>
-            </a:r>
-            <a:r>
-              <a:rPr lang="en-US" altLang="ko-KR" sz="1400" dirty="0" err="1">
-                <a:latin typeface="D2Coding" panose="020B0609020101020101" pitchFamily="49" charset="-127"/>
-                <a:ea typeface="D2Coding" panose="020B0609020101020101" pitchFamily="49" charset="-127"/>
-                <a:cs typeface="맑은 고딕 Semilight" panose="020B0502040204020203" pitchFamily="50" charset="-127"/>
-              </a:rPr>
-              <a:t>compute_gradient</a:t>
-            </a:r>
-            <a:r>
-              <a:rPr lang="en-US" altLang="ko-KR" sz="1400" dirty="0">
-                <a:latin typeface="D2Coding" panose="020B0609020101020101" pitchFamily="49" charset="-127"/>
-                <a:ea typeface="D2Coding" panose="020B0609020101020101" pitchFamily="49" charset="-127"/>
-                <a:cs typeface="맑은 고딕 Semilight" panose="020B0502040204020203" pitchFamily="50" charset="-127"/>
-              </a:rPr>
-              <a:t>(</a:t>
-            </a:r>
-            <a:r>
-              <a:rPr lang="en-US" altLang="ko-KR" sz="1400" dirty="0" err="1">
-                <a:latin typeface="D2Coding" panose="020B0609020101020101" pitchFamily="49" charset="-127"/>
-                <a:ea typeface="D2Coding" panose="020B0609020101020101" pitchFamily="49" charset="-127"/>
-                <a:cs typeface="맑은 고딕 Semilight" panose="020B0502040204020203" pitchFamily="50" charset="-127"/>
-              </a:rPr>
-              <a:t>batch_X</a:t>
-            </a:r>
-            <a:r>
-              <a:rPr lang="en-US" altLang="ko-KR" sz="1400" dirty="0">
-                <a:latin typeface="D2Coding" panose="020B0609020101020101" pitchFamily="49" charset="-127"/>
-                <a:ea typeface="D2Coding" panose="020B0609020101020101" pitchFamily="49" charset="-127"/>
-                <a:cs typeface="맑은 고딕 Semilight" panose="020B0502040204020203" pitchFamily="50" charset="-127"/>
-              </a:rPr>
-              <a:t>, </a:t>
-            </a:r>
-            <a:r>
-              <a:rPr lang="en-US" altLang="ko-KR" sz="1400" dirty="0" err="1">
-                <a:latin typeface="D2Coding" panose="020B0609020101020101" pitchFamily="49" charset="-127"/>
-                <a:ea typeface="D2Coding" panose="020B0609020101020101" pitchFamily="49" charset="-127"/>
-                <a:cs typeface="맑은 고딕 Semilight" panose="020B0502040204020203" pitchFamily="50" charset="-127"/>
-              </a:rPr>
-              <a:t>batch_y</a:t>
-            </a:r>
-            <a:r>
-              <a:rPr lang="en-US" altLang="ko-KR" sz="1400" dirty="0">
-                <a:latin typeface="D2Coding" panose="020B0609020101020101" pitchFamily="49" charset="-127"/>
-                <a:ea typeface="D2Coding" panose="020B0609020101020101" pitchFamily="49" charset="-127"/>
-                <a:cs typeface="맑은 고딕 Semilight" panose="020B0502040204020203" pitchFamily="50" charset="-127"/>
-              </a:rPr>
-              <a:t>)</a:t>
-            </a:r>
-          </a:p>
-          <a:p>
-            <a:r>
-              <a:rPr lang="en-US" altLang="ko-KR" sz="1400" dirty="0">
-                <a:latin typeface="D2Coding" panose="020B0609020101020101" pitchFamily="49" charset="-127"/>
-                <a:ea typeface="D2Coding" panose="020B0609020101020101" pitchFamily="49" charset="-127"/>
-                <a:cs typeface="맑은 고딕 Semilight" panose="020B0502040204020203" pitchFamily="50" charset="-127"/>
-              </a:rPr>
-              <a:t>        </a:t>
-            </a:r>
-          </a:p>
-          <a:p>
-            <a:r>
-              <a:rPr lang="en-US" altLang="ko-KR" sz="1400" dirty="0">
-                <a:latin typeface="D2Coding" panose="020B0609020101020101" pitchFamily="49" charset="-127"/>
-                <a:ea typeface="D2Coding" panose="020B0609020101020101" pitchFamily="49" charset="-127"/>
-                <a:cs typeface="맑은 고딕 Semilight" panose="020B0502040204020203" pitchFamily="50" charset="-127"/>
-              </a:rPr>
-              <a:t>        # 2. </a:t>
-            </a:r>
-            <a:r>
-              <a:rPr lang="ko-KR" altLang="en-US" sz="1400" dirty="0">
-                <a:latin typeface="D2Coding" panose="020B0609020101020101" pitchFamily="49" charset="-127"/>
-                <a:ea typeface="D2Coding" panose="020B0609020101020101" pitchFamily="49" charset="-127"/>
-                <a:cs typeface="맑은 고딕 Semilight" panose="020B0502040204020203" pitchFamily="50" charset="-127"/>
-              </a:rPr>
-              <a:t>엔진 </a:t>
-            </a:r>
-            <a:r>
-              <a:rPr lang="en-US" altLang="ko-KR" sz="1400" dirty="0">
-                <a:latin typeface="D2Coding" panose="020B0609020101020101" pitchFamily="49" charset="-127"/>
-                <a:ea typeface="D2Coding" panose="020B0609020101020101" pitchFamily="49" charset="-127"/>
-                <a:cs typeface="맑은 고딕 Semilight" panose="020B0502040204020203" pitchFamily="50" charset="-127"/>
-              </a:rPr>
-              <a:t>1: </a:t>
-            </a:r>
-            <a:r>
-              <a:rPr lang="ko-KR" altLang="en-US" sz="1400" dirty="0">
-                <a:latin typeface="D2Coding" panose="020B0609020101020101" pitchFamily="49" charset="-127"/>
-                <a:ea typeface="D2Coding" panose="020B0609020101020101" pitchFamily="49" charset="-127"/>
-                <a:cs typeface="맑은 고딕 Semilight" panose="020B0502040204020203" pitchFamily="50" charset="-127"/>
-              </a:rPr>
-              <a:t>관성</a:t>
-            </a:r>
-            <a:r>
-              <a:rPr lang="en-US" altLang="ko-KR" sz="1400" dirty="0">
-                <a:latin typeface="D2Coding" panose="020B0609020101020101" pitchFamily="49" charset="-127"/>
-                <a:ea typeface="D2Coding" panose="020B0609020101020101" pitchFamily="49" charset="-127"/>
-                <a:cs typeface="맑은 고딕 Semilight" panose="020B0502040204020203" pitchFamily="50" charset="-127"/>
-              </a:rPr>
-              <a:t>(Momentum) </a:t>
-            </a:r>
-            <a:r>
-              <a:rPr lang="ko-KR" altLang="en-US" sz="1400" dirty="0">
-                <a:latin typeface="D2Coding" panose="020B0609020101020101" pitchFamily="49" charset="-127"/>
-                <a:ea typeface="D2Coding" panose="020B0609020101020101" pitchFamily="49" charset="-127"/>
-                <a:cs typeface="맑은 고딕 Semilight" panose="020B0502040204020203" pitchFamily="50" charset="-127"/>
-              </a:rPr>
-              <a:t>계산 </a:t>
-            </a:r>
-            <a:r>
-              <a:rPr lang="en-US" altLang="ko-KR" sz="1400" dirty="0">
-                <a:latin typeface="D2Coding" panose="020B0609020101020101" pitchFamily="49" charset="-127"/>
-                <a:ea typeface="D2Coding" panose="020B0609020101020101" pitchFamily="49" charset="-127"/>
-                <a:cs typeface="맑은 고딕 Semilight" panose="020B0502040204020203" pitchFamily="50" charset="-127"/>
-              </a:rPr>
-              <a:t>(</a:t>
-            </a:r>
-            <a:r>
-              <a:rPr lang="ko-KR" altLang="en-US" sz="1400" dirty="0">
-                <a:latin typeface="D2Coding" panose="020B0609020101020101" pitchFamily="49" charset="-127"/>
-                <a:ea typeface="D2Coding" panose="020B0609020101020101" pitchFamily="49" charset="-127"/>
-                <a:cs typeface="맑은 고딕 Semilight" panose="020B0502040204020203" pitchFamily="50" charset="-127"/>
-              </a:rPr>
-              <a:t>방향 결정</a:t>
-            </a:r>
-            <a:r>
-              <a:rPr lang="en-US" altLang="ko-KR" sz="1400" dirty="0">
-                <a:latin typeface="D2Coding" panose="020B0609020101020101" pitchFamily="49" charset="-127"/>
-                <a:ea typeface="D2Coding" panose="020B0609020101020101" pitchFamily="49" charset="-127"/>
-                <a:cs typeface="맑은 고딕 Semilight" panose="020B0502040204020203" pitchFamily="50" charset="-127"/>
-              </a:rPr>
-              <a:t>)</a:t>
-            </a:r>
-          </a:p>
-          <a:p>
-            <a:r>
-              <a:rPr lang="en-US" altLang="ko-KR" sz="1400" dirty="0">
-                <a:latin typeface="D2Coding" panose="020B0609020101020101" pitchFamily="49" charset="-127"/>
-                <a:ea typeface="D2Coding" panose="020B0609020101020101" pitchFamily="49" charset="-127"/>
-                <a:cs typeface="맑은 고딕 Semilight" panose="020B0502040204020203" pitchFamily="50" charset="-127"/>
-              </a:rPr>
-              <a:t>        # beta</a:t>
-            </a:r>
-            <a:r>
-              <a:rPr lang="ko-KR" altLang="en-US" sz="1400" dirty="0">
-                <a:latin typeface="D2Coding" panose="020B0609020101020101" pitchFamily="49" charset="-127"/>
-                <a:ea typeface="D2Coding" panose="020B0609020101020101" pitchFamily="49" charset="-127"/>
-                <a:cs typeface="맑은 고딕 Semilight" panose="020B0502040204020203" pitchFamily="50" charset="-127"/>
-              </a:rPr>
-              <a:t> </a:t>
-            </a:r>
-            <a:r>
-              <a:rPr lang="en-US" altLang="ko-KR" sz="1400" dirty="0">
-                <a:latin typeface="D2Coding" panose="020B0609020101020101" pitchFamily="49" charset="-127"/>
-                <a:ea typeface="D2Coding" panose="020B0609020101020101" pitchFamily="49" charset="-127"/>
-                <a:cs typeface="맑은 고딕 Semilight" panose="020B0502040204020203" pitchFamily="50" charset="-127"/>
-              </a:rPr>
-              <a:t>1</a:t>
-            </a:r>
-            <a:r>
-              <a:rPr lang="ko-KR" altLang="en-US" sz="1400" dirty="0">
-                <a:latin typeface="D2Coding" panose="020B0609020101020101" pitchFamily="49" charset="-127"/>
-                <a:ea typeface="D2Coding" panose="020B0609020101020101" pitchFamily="49" charset="-127"/>
-                <a:cs typeface="맑은 고딕 Semilight" panose="020B0502040204020203" pitchFamily="50" charset="-127"/>
-              </a:rPr>
-              <a:t> </a:t>
-            </a:r>
-            <a:r>
-              <a:rPr lang="en-US" altLang="ko-KR" sz="1400" dirty="0">
-                <a:latin typeface="D2Coding" panose="020B0609020101020101" pitchFamily="49" charset="-127"/>
-                <a:ea typeface="D2Coding" panose="020B0609020101020101" pitchFamily="49" charset="-127"/>
-                <a:cs typeface="맑은 고딕 Semilight" panose="020B0502040204020203" pitchFamily="50" charset="-127"/>
-              </a:rPr>
-              <a:t>=</a:t>
-            </a:r>
-            <a:r>
-              <a:rPr lang="ko-KR" altLang="en-US" sz="1400" dirty="0">
-                <a:latin typeface="D2Coding" panose="020B0609020101020101" pitchFamily="49" charset="-127"/>
-                <a:ea typeface="D2Coding" panose="020B0609020101020101" pitchFamily="49" charset="-127"/>
-                <a:cs typeface="맑은 고딕 Semilight" panose="020B0502040204020203" pitchFamily="50" charset="-127"/>
-              </a:rPr>
-              <a:t> </a:t>
-            </a:r>
-            <a:r>
-              <a:rPr lang="ko-KR" altLang="en-US" sz="1400" dirty="0" err="1">
-                <a:latin typeface="D2Coding" panose="020B0609020101020101" pitchFamily="49" charset="-127"/>
-                <a:ea typeface="D2Coding" panose="020B0609020101020101" pitchFamily="49" charset="-127"/>
-                <a:cs typeface="맑은 고딕 Semilight" panose="020B0502040204020203" pitchFamily="50" charset="-127"/>
-              </a:rPr>
-              <a:t>엑세레이터</a:t>
-            </a:r>
-            <a:r>
-              <a:rPr lang="en-US" altLang="ko-KR" sz="1400" dirty="0">
-                <a:latin typeface="D2Coding" panose="020B0609020101020101" pitchFamily="49" charset="-127"/>
-                <a:ea typeface="D2Coding" panose="020B0609020101020101" pitchFamily="49" charset="-127"/>
-                <a:cs typeface="맑은 고딕 Semilight" panose="020B0502040204020203" pitchFamily="50" charset="-127"/>
-              </a:rPr>
-              <a:t>, beta</a:t>
-            </a:r>
-            <a:r>
-              <a:rPr lang="ko-KR" altLang="en-US" sz="1400" dirty="0">
-                <a:latin typeface="D2Coding" panose="020B0609020101020101" pitchFamily="49" charset="-127"/>
-                <a:ea typeface="D2Coding" panose="020B0609020101020101" pitchFamily="49" charset="-127"/>
-                <a:cs typeface="맑은 고딕 Semilight" panose="020B0502040204020203" pitchFamily="50" charset="-127"/>
-              </a:rPr>
-              <a:t> </a:t>
-            </a:r>
-            <a:r>
-              <a:rPr lang="en-US" altLang="ko-KR" sz="1400" dirty="0">
-                <a:latin typeface="D2Coding" panose="020B0609020101020101" pitchFamily="49" charset="-127"/>
-                <a:ea typeface="D2Coding" panose="020B0609020101020101" pitchFamily="49" charset="-127"/>
-                <a:cs typeface="맑은 고딕 Semilight" panose="020B0502040204020203" pitchFamily="50" charset="-127"/>
-              </a:rPr>
-              <a:t>2</a:t>
-            </a:r>
-            <a:r>
-              <a:rPr lang="ko-KR" altLang="en-US" sz="1400" dirty="0">
-                <a:latin typeface="D2Coding" panose="020B0609020101020101" pitchFamily="49" charset="-127"/>
-                <a:ea typeface="D2Coding" panose="020B0609020101020101" pitchFamily="49" charset="-127"/>
-                <a:cs typeface="맑은 고딕 Semilight" panose="020B0502040204020203" pitchFamily="50" charset="-127"/>
-              </a:rPr>
-              <a:t> </a:t>
-            </a:r>
-            <a:r>
-              <a:rPr lang="en-US" altLang="ko-KR" sz="1400" dirty="0">
-                <a:latin typeface="D2Coding" panose="020B0609020101020101" pitchFamily="49" charset="-127"/>
-                <a:ea typeface="D2Coding" panose="020B0609020101020101" pitchFamily="49" charset="-127"/>
-                <a:cs typeface="맑은 고딕 Semilight" panose="020B0502040204020203" pitchFamily="50" charset="-127"/>
-              </a:rPr>
-              <a:t>=</a:t>
-            </a:r>
-            <a:r>
-              <a:rPr lang="ko-KR" altLang="en-US" sz="1400" dirty="0">
-                <a:latin typeface="D2Coding" panose="020B0609020101020101" pitchFamily="49" charset="-127"/>
-                <a:ea typeface="D2Coding" panose="020B0609020101020101" pitchFamily="49" charset="-127"/>
-                <a:cs typeface="맑은 고딕 Semilight" panose="020B0502040204020203" pitchFamily="50" charset="-127"/>
-              </a:rPr>
-              <a:t> 브레이크</a:t>
-            </a:r>
-            <a:endParaRPr lang="en-US" altLang="ko-KR" sz="1400" dirty="0">
-              <a:latin typeface="D2Coding" panose="020B0609020101020101" pitchFamily="49" charset="-127"/>
-              <a:ea typeface="D2Coding" panose="020B0609020101020101" pitchFamily="49" charset="-127"/>
-              <a:cs typeface="맑은 고딕 Semilight" panose="020B0502040204020203" pitchFamily="50" charset="-127"/>
-            </a:endParaRPr>
-          </a:p>
-          <a:p>
-            <a:r>
-              <a:rPr lang="en-US" altLang="ko-KR" sz="1400" dirty="0">
-                <a:latin typeface="D2Coding" panose="020B0609020101020101" pitchFamily="49" charset="-127"/>
-                <a:ea typeface="D2Coding" panose="020B0609020101020101" pitchFamily="49" charset="-127"/>
-                <a:cs typeface="맑은 고딕 Semilight" panose="020B0502040204020203" pitchFamily="50" charset="-127"/>
-              </a:rPr>
-              <a:t>        m = beta1 * m + (1 - beta1) * gradient</a:t>
-            </a:r>
-          </a:p>
-          <a:p>
-            <a:r>
-              <a:rPr lang="en-US" altLang="ko-KR" sz="1400" dirty="0">
-                <a:latin typeface="D2Coding" panose="020B0609020101020101" pitchFamily="49" charset="-127"/>
-                <a:ea typeface="D2Coding" panose="020B0609020101020101" pitchFamily="49" charset="-127"/>
-                <a:cs typeface="맑은 고딕 Semilight" panose="020B0502040204020203" pitchFamily="50" charset="-127"/>
-              </a:rPr>
-              <a:t>        </a:t>
-            </a:r>
-          </a:p>
-          <a:p>
-            <a:r>
-              <a:rPr lang="en-US" altLang="ko-KR" sz="1400" dirty="0">
-                <a:latin typeface="D2Coding" panose="020B0609020101020101" pitchFamily="49" charset="-127"/>
-                <a:ea typeface="D2Coding" panose="020B0609020101020101" pitchFamily="49" charset="-127"/>
-                <a:cs typeface="맑은 고딕 Semilight" panose="020B0502040204020203" pitchFamily="50" charset="-127"/>
-              </a:rPr>
-              <a:t>        # 3. </a:t>
-            </a:r>
-            <a:r>
-              <a:rPr lang="ko-KR" altLang="en-US" sz="1400" dirty="0">
-                <a:latin typeface="D2Coding" panose="020B0609020101020101" pitchFamily="49" charset="-127"/>
-                <a:ea typeface="D2Coding" panose="020B0609020101020101" pitchFamily="49" charset="-127"/>
-                <a:cs typeface="맑은 고딕 Semilight" panose="020B0502040204020203" pitchFamily="50" charset="-127"/>
-              </a:rPr>
-              <a:t>엔진 </a:t>
-            </a:r>
-            <a:r>
-              <a:rPr lang="en-US" altLang="ko-KR" sz="1400" dirty="0">
-                <a:latin typeface="D2Coding" panose="020B0609020101020101" pitchFamily="49" charset="-127"/>
-                <a:ea typeface="D2Coding" panose="020B0609020101020101" pitchFamily="49" charset="-127"/>
-                <a:cs typeface="맑은 고딕 Semilight" panose="020B0502040204020203" pitchFamily="50" charset="-127"/>
-              </a:rPr>
-              <a:t>2: </a:t>
-            </a:r>
-            <a:r>
-              <a:rPr lang="ko-KR" altLang="en-US" sz="1400" dirty="0">
-                <a:latin typeface="D2Coding" panose="020B0609020101020101" pitchFamily="49" charset="-127"/>
-                <a:ea typeface="D2Coding" panose="020B0609020101020101" pitchFamily="49" charset="-127"/>
-                <a:cs typeface="맑은 고딕 Semilight" panose="020B0502040204020203" pitchFamily="50" charset="-127"/>
-              </a:rPr>
-              <a:t>보폭</a:t>
-            </a:r>
-            <a:r>
-              <a:rPr lang="en-US" altLang="ko-KR" sz="1400" dirty="0">
-                <a:latin typeface="D2Coding" panose="020B0609020101020101" pitchFamily="49" charset="-127"/>
-                <a:ea typeface="D2Coding" panose="020B0609020101020101" pitchFamily="49" charset="-127"/>
-                <a:cs typeface="맑은 고딕 Semilight" panose="020B0502040204020203" pitchFamily="50" charset="-127"/>
-              </a:rPr>
-              <a:t>(</a:t>
-            </a:r>
-            <a:r>
-              <a:rPr lang="en-US" altLang="ko-KR" sz="1400" dirty="0" err="1">
-                <a:latin typeface="D2Coding" panose="020B0609020101020101" pitchFamily="49" charset="-127"/>
-                <a:ea typeface="D2Coding" panose="020B0609020101020101" pitchFamily="49" charset="-127"/>
-                <a:cs typeface="맑은 고딕 Semilight" panose="020B0502040204020203" pitchFamily="50" charset="-127"/>
-              </a:rPr>
-              <a:t>RMSProp</a:t>
-            </a:r>
-            <a:r>
-              <a:rPr lang="en-US" altLang="ko-KR" sz="1400" dirty="0">
-                <a:latin typeface="D2Coding" panose="020B0609020101020101" pitchFamily="49" charset="-127"/>
-                <a:ea typeface="D2Coding" panose="020B0609020101020101" pitchFamily="49" charset="-127"/>
-                <a:cs typeface="맑은 고딕 Semilight" panose="020B0502040204020203" pitchFamily="50" charset="-127"/>
-              </a:rPr>
-              <a:t>) </a:t>
-            </a:r>
-            <a:r>
-              <a:rPr lang="ko-KR" altLang="en-US" sz="1400" dirty="0">
-                <a:latin typeface="D2Coding" panose="020B0609020101020101" pitchFamily="49" charset="-127"/>
-                <a:ea typeface="D2Coding" panose="020B0609020101020101" pitchFamily="49" charset="-127"/>
-                <a:cs typeface="맑은 고딕 Semilight" panose="020B0502040204020203" pitchFamily="50" charset="-127"/>
-              </a:rPr>
-              <a:t>조절 </a:t>
-            </a:r>
-            <a:r>
-              <a:rPr lang="en-US" altLang="ko-KR" sz="1400" dirty="0">
-                <a:latin typeface="D2Coding" panose="020B0609020101020101" pitchFamily="49" charset="-127"/>
-                <a:ea typeface="D2Coding" panose="020B0609020101020101" pitchFamily="49" charset="-127"/>
-                <a:cs typeface="맑은 고딕 Semilight" panose="020B0502040204020203" pitchFamily="50" charset="-127"/>
-              </a:rPr>
-              <a:t>(</a:t>
-            </a:r>
-            <a:r>
-              <a:rPr lang="ko-KR" altLang="en-US" sz="1400" dirty="0">
-                <a:latin typeface="D2Coding" panose="020B0609020101020101" pitchFamily="49" charset="-127"/>
-                <a:ea typeface="D2Coding" panose="020B0609020101020101" pitchFamily="49" charset="-127"/>
-                <a:cs typeface="맑은 고딕 Semilight" panose="020B0502040204020203" pitchFamily="50" charset="-127"/>
-              </a:rPr>
-              <a:t>보폭 결정</a:t>
-            </a:r>
-            <a:r>
-              <a:rPr lang="en-US" altLang="ko-KR" sz="1400" dirty="0">
-                <a:latin typeface="D2Coding" panose="020B0609020101020101" pitchFamily="49" charset="-127"/>
-                <a:ea typeface="D2Coding" panose="020B0609020101020101" pitchFamily="49" charset="-127"/>
-                <a:cs typeface="맑은 고딕 Semilight" panose="020B0502040204020203" pitchFamily="50" charset="-127"/>
-              </a:rPr>
-              <a:t>)</a:t>
-            </a:r>
-          </a:p>
-          <a:p>
-            <a:r>
-              <a:rPr lang="en-US" altLang="ko-KR" sz="1400" dirty="0">
-                <a:latin typeface="D2Coding" panose="020B0609020101020101" pitchFamily="49" charset="-127"/>
-                <a:ea typeface="D2Coding" panose="020B0609020101020101" pitchFamily="49" charset="-127"/>
-                <a:cs typeface="맑은 고딕 Semilight" panose="020B0502040204020203" pitchFamily="50" charset="-127"/>
-              </a:rPr>
-              <a:t>        v = beta2 * v + (1 - beta2) * (gradient**2)</a:t>
-            </a:r>
-          </a:p>
-          <a:p>
-            <a:r>
-              <a:rPr lang="en-US" altLang="ko-KR" sz="1400" dirty="0">
-                <a:latin typeface="D2Coding" panose="020B0609020101020101" pitchFamily="49" charset="-127"/>
-                <a:ea typeface="D2Coding" panose="020B0609020101020101" pitchFamily="49" charset="-127"/>
-                <a:cs typeface="맑은 고딕 Semilight" panose="020B0502040204020203" pitchFamily="50" charset="-127"/>
-              </a:rPr>
-              <a:t>        </a:t>
-            </a:r>
-          </a:p>
-          <a:p>
-            <a:r>
-              <a:rPr lang="en-US" altLang="ko-KR" sz="1400" dirty="0">
-                <a:latin typeface="D2Coding" panose="020B0609020101020101" pitchFamily="49" charset="-127"/>
-                <a:ea typeface="D2Coding" panose="020B0609020101020101" pitchFamily="49" charset="-127"/>
-                <a:cs typeface="맑은 고딕 Semilight" panose="020B0502040204020203" pitchFamily="50" charset="-127"/>
-              </a:rPr>
-              <a:t>        # 4. </a:t>
-            </a:r>
-            <a:r>
-              <a:rPr lang="ko-KR" altLang="en-US" sz="1400" dirty="0">
-                <a:latin typeface="D2Coding" panose="020B0609020101020101" pitchFamily="49" charset="-127"/>
-                <a:ea typeface="D2Coding" panose="020B0609020101020101" pitchFamily="49" charset="-127"/>
-                <a:cs typeface="맑은 고딕 Semilight" panose="020B0502040204020203" pitchFamily="50" charset="-127"/>
-              </a:rPr>
-              <a:t>파라미터 업데이트</a:t>
-            </a:r>
-          </a:p>
-          <a:p>
-            <a:r>
-              <a:rPr lang="ko-KR" altLang="en-US" sz="1400" dirty="0">
-                <a:latin typeface="D2Coding" panose="020B0609020101020101" pitchFamily="49" charset="-127"/>
-                <a:ea typeface="D2Coding" panose="020B0609020101020101" pitchFamily="49" charset="-127"/>
-                <a:cs typeface="맑은 고딕 Semilight" panose="020B0502040204020203" pitchFamily="50" charset="-127"/>
-              </a:rPr>
-              <a:t>        </a:t>
-            </a:r>
-            <a:r>
-              <a:rPr lang="en-US" altLang="ko-KR" sz="1400" dirty="0">
-                <a:latin typeface="D2Coding" panose="020B0609020101020101" pitchFamily="49" charset="-127"/>
-                <a:ea typeface="D2Coding" panose="020B0609020101020101" pitchFamily="49" charset="-127"/>
-                <a:cs typeface="맑은 고딕 Semilight" panose="020B0502040204020203" pitchFamily="50" charset="-127"/>
-              </a:rPr>
-              <a:t># </a:t>
-            </a:r>
-            <a:r>
-              <a:rPr lang="ko-KR" altLang="en-US" sz="1400" dirty="0">
-                <a:latin typeface="D2Coding" panose="020B0609020101020101" pitchFamily="49" charset="-127"/>
-                <a:ea typeface="D2Coding" panose="020B0609020101020101" pitchFamily="49" charset="-127"/>
-                <a:cs typeface="맑은 고딕 Semilight" panose="020B0502040204020203" pitchFamily="50" charset="-127"/>
-              </a:rPr>
-              <a:t>방향</a:t>
-            </a:r>
-            <a:r>
-              <a:rPr lang="en-US" altLang="ko-KR" sz="1400" dirty="0">
-                <a:latin typeface="D2Coding" panose="020B0609020101020101" pitchFamily="49" charset="-127"/>
-                <a:ea typeface="D2Coding" panose="020B0609020101020101" pitchFamily="49" charset="-127"/>
-                <a:cs typeface="맑은 고딕 Semilight" panose="020B0502040204020203" pitchFamily="50" charset="-127"/>
-              </a:rPr>
-              <a:t>(m)</a:t>
-            </a:r>
-            <a:r>
-              <a:rPr lang="ko-KR" altLang="en-US" sz="1400" dirty="0">
-                <a:latin typeface="D2Coding" panose="020B0609020101020101" pitchFamily="49" charset="-127"/>
-                <a:ea typeface="D2Coding" panose="020B0609020101020101" pitchFamily="49" charset="-127"/>
-                <a:cs typeface="맑은 고딕 Semilight" panose="020B0502040204020203" pitchFamily="50" charset="-127"/>
-              </a:rPr>
-              <a:t>을 보폭조절장치</a:t>
-            </a:r>
-            <a:r>
-              <a:rPr lang="en-US" altLang="ko-KR" sz="1400" dirty="0">
-                <a:latin typeface="D2Coding" panose="020B0609020101020101" pitchFamily="49" charset="-127"/>
-                <a:ea typeface="D2Coding" panose="020B0609020101020101" pitchFamily="49" charset="-127"/>
-                <a:cs typeface="맑은 고딕 Semilight" panose="020B0502040204020203" pitchFamily="50" charset="-127"/>
-              </a:rPr>
-              <a:t>(root v)</a:t>
-            </a:r>
-            <a:r>
-              <a:rPr lang="ko-KR" altLang="en-US" sz="1400" dirty="0">
-                <a:latin typeface="D2Coding" panose="020B0609020101020101" pitchFamily="49" charset="-127"/>
-                <a:ea typeface="D2Coding" panose="020B0609020101020101" pitchFamily="49" charset="-127"/>
-                <a:cs typeface="맑은 고딕 Semilight" panose="020B0502040204020203" pitchFamily="50" charset="-127"/>
-              </a:rPr>
-              <a:t>로 효율적으로 이동</a:t>
-            </a:r>
-          </a:p>
-          <a:p>
-            <a:r>
-              <a:rPr lang="ko-KR" altLang="en-US" sz="1400" dirty="0">
-                <a:latin typeface="D2Coding" panose="020B0609020101020101" pitchFamily="49" charset="-127"/>
-                <a:ea typeface="D2Coding" panose="020B0609020101020101" pitchFamily="49" charset="-127"/>
-                <a:cs typeface="맑은 고딕 Semilight" panose="020B0502040204020203" pitchFamily="50" charset="-127"/>
-              </a:rPr>
-              <a:t>        </a:t>
-            </a:r>
-            <a:r>
-              <a:rPr lang="en-US" altLang="ko-KR" sz="1400" dirty="0">
-                <a:latin typeface="D2Coding" panose="020B0609020101020101" pitchFamily="49" charset="-127"/>
-                <a:ea typeface="D2Coding" panose="020B0609020101020101" pitchFamily="49" charset="-127"/>
-                <a:cs typeface="맑은 고딕 Semilight" panose="020B0502040204020203" pitchFamily="50" charset="-127"/>
-              </a:rPr>
-              <a:t>W -= </a:t>
-            </a:r>
-            <a:r>
-              <a:rPr lang="en-US" altLang="ko-KR" sz="1400" dirty="0" err="1">
-                <a:latin typeface="D2Coding" panose="020B0609020101020101" pitchFamily="49" charset="-127"/>
-                <a:ea typeface="D2Coding" panose="020B0609020101020101" pitchFamily="49" charset="-127"/>
-                <a:cs typeface="맑은 고딕 Semilight" panose="020B0502040204020203" pitchFamily="50" charset="-127"/>
-              </a:rPr>
-              <a:t>learning_rate</a:t>
-            </a:r>
-            <a:r>
-              <a:rPr lang="en-US" altLang="ko-KR" sz="1400" dirty="0">
-                <a:latin typeface="D2Coding" panose="020B0609020101020101" pitchFamily="49" charset="-127"/>
-                <a:ea typeface="D2Coding" panose="020B0609020101020101" pitchFamily="49" charset="-127"/>
-                <a:cs typeface="맑은 고딕 Semilight" panose="020B0502040204020203" pitchFamily="50" charset="-127"/>
-              </a:rPr>
-              <a:t> * m / (sqrt(v) + epsilon)</a:t>
-            </a:r>
-            <a:endParaRPr lang="ko-KR" altLang="en-US" sz="1400" dirty="0">
-              <a:latin typeface="D2Coding" panose="020B0609020101020101" pitchFamily="49" charset="-127"/>
-              <a:ea typeface="D2Coding" panose="020B0609020101020101" pitchFamily="49" charset="-127"/>
-              <a:cs typeface="맑은 고딕 Semilight" panose="020B0502040204020203" pitchFamily="50" charset="-127"/>
-            </a:endParaRPr>
-          </a:p>
-        </p:txBody>
-      </p:sp>
-      <p:sp>
-        <p:nvSpPr>
-          <p:cNvPr id="6" name="TextBox 5">
-            <a:extLst>
-              <a:ext uri="{FF2B5EF4-FFF2-40B4-BE49-F238E27FC236}">
-                <a16:creationId xmlns:a16="http://schemas.microsoft.com/office/drawing/2014/main" id="{DFE137D4-D843-BF4D-CE09-019D168C2A21}"/>
-              </a:ext>
-            </a:extLst>
-          </p:cNvPr>
-          <p:cNvSpPr txBox="1"/>
-          <p:nvPr/>
-        </p:nvSpPr>
-        <p:spPr>
-          <a:xfrm>
-            <a:off x="6362700" y="2664522"/>
-            <a:ext cx="5410199" cy="705642"/>
-          </a:xfrm>
-          <a:prstGeom prst="rect">
-            <a:avLst/>
-          </a:prstGeom>
-          <a:solidFill>
-            <a:srgbClr val="76E3FF"/>
-          </a:solidFill>
-        </p:spPr>
-        <p:txBody>
-          <a:bodyPr wrap="square">
-            <a:spAutoFit/>
-          </a:bodyPr>
-          <a:lstStyle/>
-          <a:p>
-            <a:pPr>
-              <a:lnSpc>
-                <a:spcPct val="150000"/>
-              </a:lnSpc>
-            </a:pPr>
-            <a:r>
-              <a:rPr lang="en-US" altLang="ko-KR" sz="1400" dirty="0">
-                <a:latin typeface="D2Coding" panose="020B0609020101020101" pitchFamily="49" charset="-127"/>
-                <a:ea typeface="D2Coding" panose="020B0609020101020101" pitchFamily="49" charset="-127"/>
-                <a:cs typeface="맑은 고딕 Semilight" panose="020B0502040204020203" pitchFamily="50" charset="-127"/>
-              </a:rPr>
-              <a:t># SGD </a:t>
-            </a:r>
-            <a:r>
-              <a:rPr lang="ko-KR" altLang="en-US" sz="1400" dirty="0">
-                <a:latin typeface="D2Coding" panose="020B0609020101020101" pitchFamily="49" charset="-127"/>
-                <a:ea typeface="D2Coding" panose="020B0609020101020101" pitchFamily="49" charset="-127"/>
-                <a:cs typeface="맑은 고딕 Semilight" panose="020B0502040204020203" pitchFamily="50" charset="-127"/>
-              </a:rPr>
-              <a:t>대신 </a:t>
-            </a:r>
-            <a:r>
-              <a:rPr lang="en-US" altLang="ko-KR" sz="1400" dirty="0">
-                <a:latin typeface="D2Coding" panose="020B0609020101020101" pitchFamily="49" charset="-127"/>
-                <a:ea typeface="D2Coding" panose="020B0609020101020101" pitchFamily="49" charset="-127"/>
-                <a:cs typeface="맑은 고딕 Semilight" panose="020B0502040204020203" pitchFamily="50" charset="-127"/>
-              </a:rPr>
-              <a:t>Adam </a:t>
-            </a:r>
-            <a:r>
-              <a:rPr lang="ko-KR" altLang="en-US" sz="1400" dirty="0">
-                <a:latin typeface="D2Coding" panose="020B0609020101020101" pitchFamily="49" charset="-127"/>
-                <a:ea typeface="D2Coding" panose="020B0609020101020101" pitchFamily="49" charset="-127"/>
-                <a:cs typeface="맑은 고딕 Semilight" panose="020B0502040204020203" pitchFamily="50" charset="-127"/>
-              </a:rPr>
-              <a:t>사용 </a:t>
-            </a:r>
-            <a:endParaRPr lang="en-US" altLang="ko-KR" sz="1400" dirty="0">
-              <a:latin typeface="D2Coding" panose="020B0609020101020101" pitchFamily="49" charset="-127"/>
-              <a:ea typeface="D2Coding" panose="020B0609020101020101" pitchFamily="49" charset="-127"/>
-              <a:cs typeface="맑은 고딕 Semilight" panose="020B0502040204020203" pitchFamily="50" charset="-127"/>
-            </a:endParaRPr>
-          </a:p>
-          <a:p>
-            <a:pPr>
-              <a:lnSpc>
-                <a:spcPct val="150000"/>
-              </a:lnSpc>
-            </a:pPr>
-            <a:r>
-              <a:rPr lang="en-US" altLang="ko-KR" sz="1400" dirty="0">
-                <a:latin typeface="D2Coding" panose="020B0609020101020101" pitchFamily="49" charset="-127"/>
-                <a:ea typeface="D2Coding" panose="020B0609020101020101" pitchFamily="49" charset="-127"/>
-                <a:cs typeface="맑은 고딕 Semilight" panose="020B0502040204020203" pitchFamily="50" charset="-127"/>
-              </a:rPr>
-              <a:t>optimizer = </a:t>
-            </a:r>
-            <a:r>
-              <a:rPr lang="en-US" altLang="ko-KR" sz="1400" dirty="0" err="1">
-                <a:latin typeface="D2Coding" panose="020B0609020101020101" pitchFamily="49" charset="-127"/>
-                <a:ea typeface="D2Coding" panose="020B0609020101020101" pitchFamily="49" charset="-127"/>
-                <a:cs typeface="맑은 고딕 Semilight" panose="020B0502040204020203" pitchFamily="50" charset="-127"/>
-              </a:rPr>
-              <a:t>torch.optim.Adam</a:t>
-            </a:r>
-            <a:r>
-              <a:rPr lang="en-US" altLang="ko-KR" sz="1400" dirty="0">
-                <a:latin typeface="D2Coding" panose="020B0609020101020101" pitchFamily="49" charset="-127"/>
-                <a:ea typeface="D2Coding" panose="020B0609020101020101" pitchFamily="49" charset="-127"/>
-                <a:cs typeface="맑은 고딕 Semilight" panose="020B0502040204020203" pitchFamily="50" charset="-127"/>
-              </a:rPr>
-              <a:t>(</a:t>
-            </a:r>
-            <a:r>
-              <a:rPr lang="en-US" altLang="ko-KR" sz="1400" dirty="0" err="1">
-                <a:latin typeface="D2Coding" panose="020B0609020101020101" pitchFamily="49" charset="-127"/>
-                <a:ea typeface="D2Coding" panose="020B0609020101020101" pitchFamily="49" charset="-127"/>
-                <a:cs typeface="맑은 고딕 Semilight" panose="020B0502040204020203" pitchFamily="50" charset="-127"/>
-              </a:rPr>
-              <a:t>model.parameters</a:t>
-            </a:r>
-            <a:r>
-              <a:rPr lang="en-US" altLang="ko-KR" sz="1400" dirty="0">
-                <a:latin typeface="D2Coding" panose="020B0609020101020101" pitchFamily="49" charset="-127"/>
-                <a:ea typeface="D2Coding" panose="020B0609020101020101" pitchFamily="49" charset="-127"/>
-                <a:cs typeface="맑은 고딕 Semilight" panose="020B0502040204020203" pitchFamily="50" charset="-127"/>
-              </a:rPr>
-              <a:t>(), </a:t>
-            </a:r>
-            <a:r>
-              <a:rPr lang="en-US" altLang="ko-KR" sz="1400" dirty="0" err="1">
-                <a:latin typeface="D2Coding" panose="020B0609020101020101" pitchFamily="49" charset="-127"/>
-                <a:ea typeface="D2Coding" panose="020B0609020101020101" pitchFamily="49" charset="-127"/>
-                <a:cs typeface="맑은 고딕 Semilight" panose="020B0502040204020203" pitchFamily="50" charset="-127"/>
-              </a:rPr>
-              <a:t>lr</a:t>
-            </a:r>
-            <a:r>
-              <a:rPr lang="en-US" altLang="ko-KR" sz="1400" dirty="0">
-                <a:latin typeface="D2Coding" panose="020B0609020101020101" pitchFamily="49" charset="-127"/>
-                <a:ea typeface="D2Coding" panose="020B0609020101020101" pitchFamily="49" charset="-127"/>
-                <a:cs typeface="맑은 고딕 Semilight" panose="020B0502040204020203" pitchFamily="50" charset="-127"/>
-              </a:rPr>
-              <a:t>=0.001)</a:t>
-            </a:r>
-            <a:endParaRPr lang="ko-KR" altLang="en-US" sz="1400" dirty="0">
-              <a:latin typeface="D2Coding" panose="020B0609020101020101" pitchFamily="49" charset="-127"/>
-              <a:ea typeface="D2Coding" panose="020B0609020101020101" pitchFamily="49" charset="-127"/>
-              <a:cs typeface="맑은 고딕 Semilight" panose="020B0502040204020203" pitchFamily="50" charset="-127"/>
-            </a:endParaRPr>
-          </a:p>
-        </p:txBody>
-      </p:sp>
-    </p:spTree>
-    <p:extLst>
-      <p:ext uri="{BB962C8B-B14F-4D97-AF65-F5344CB8AC3E}">
-        <p14:creationId xmlns:p14="http://schemas.microsoft.com/office/powerpoint/2010/main" val="1007565770"/>
       </p:ext>
     </p:extLst>
   </p:cSld>

--- a/Linear_Algebra/w5_03_Deep_Learning_with_pytorch.pptx
+++ b/Linear_Algebra/w5_03_Deep_Learning_with_pytorch.pptx
@@ -5,10 +5,10 @@
     <p:sldMasterId id="2147483660" r:id="rId1"/>
   </p:sldMasterIdLst>
   <p:notesMasterIdLst>
-    <p:notesMasterId r:id="rId30"/>
+    <p:notesMasterId r:id="rId31"/>
   </p:notesMasterIdLst>
   <p:handoutMasterIdLst>
-    <p:handoutMasterId r:id="rId31"/>
+    <p:handoutMasterId r:id="rId32"/>
   </p:handoutMasterIdLst>
   <p:sldIdLst>
     <p:sldId id="1074" r:id="rId2"/>
@@ -18,27 +18,28 @@
     <p:sldId id="1075" r:id="rId6"/>
     <p:sldId id="1072" r:id="rId7"/>
     <p:sldId id="1073" r:id="rId8"/>
-    <p:sldId id="1076" r:id="rId9"/>
+    <p:sldId id="1097" r:id="rId9"/>
     <p:sldId id="1077" r:id="rId10"/>
-    <p:sldId id="1091" r:id="rId11"/>
-    <p:sldId id="1078" r:id="rId12"/>
-    <p:sldId id="1079" r:id="rId13"/>
-    <p:sldId id="1080" r:id="rId14"/>
-    <p:sldId id="1081" r:id="rId15"/>
-    <p:sldId id="1092" r:id="rId16"/>
-    <p:sldId id="1082" r:id="rId17"/>
-    <p:sldId id="921" r:id="rId18"/>
-    <p:sldId id="1093" r:id="rId19"/>
-    <p:sldId id="1084" r:id="rId20"/>
-    <p:sldId id="1083" r:id="rId21"/>
-    <p:sldId id="1094" r:id="rId22"/>
-    <p:sldId id="1089" r:id="rId23"/>
-    <p:sldId id="1085" r:id="rId24"/>
-    <p:sldId id="1095" r:id="rId25"/>
-    <p:sldId id="1086" r:id="rId26"/>
-    <p:sldId id="1096" r:id="rId27"/>
-    <p:sldId id="995" r:id="rId28"/>
-    <p:sldId id="980" r:id="rId29"/>
+    <p:sldId id="1076" r:id="rId11"/>
+    <p:sldId id="1091" r:id="rId12"/>
+    <p:sldId id="1078" r:id="rId13"/>
+    <p:sldId id="1079" r:id="rId14"/>
+    <p:sldId id="1080" r:id="rId15"/>
+    <p:sldId id="1081" r:id="rId16"/>
+    <p:sldId id="1092" r:id="rId17"/>
+    <p:sldId id="1082" r:id="rId18"/>
+    <p:sldId id="921" r:id="rId19"/>
+    <p:sldId id="1093" r:id="rId20"/>
+    <p:sldId id="1084" r:id="rId21"/>
+    <p:sldId id="1083" r:id="rId22"/>
+    <p:sldId id="1094" r:id="rId23"/>
+    <p:sldId id="1089" r:id="rId24"/>
+    <p:sldId id="1085" r:id="rId25"/>
+    <p:sldId id="1095" r:id="rId26"/>
+    <p:sldId id="1086" r:id="rId27"/>
+    <p:sldId id="1096" r:id="rId28"/>
+    <p:sldId id="995" r:id="rId29"/>
+    <p:sldId id="980" r:id="rId30"/>
   </p:sldIdLst>
   <p:sldSz cx="12192000" cy="6858000"/>
   <p:notesSz cx="6858000" cy="9144000"/>
@@ -152,8 +153,9 @@
             <p14:sldId id="1075"/>
             <p14:sldId id="1072"/>
             <p14:sldId id="1073"/>
+            <p14:sldId id="1097"/>
+            <p14:sldId id="1077"/>
             <p14:sldId id="1076"/>
-            <p14:sldId id="1077"/>
             <p14:sldId id="1091"/>
             <p14:sldId id="1078"/>
             <p14:sldId id="1079"/>
@@ -297,7 +299,7 @@
                 <a:latin typeface="맑은 고딕" panose="020B0503020000020004" pitchFamily="50" charset="-127"/>
                 <a:ea typeface="맑은 고딕" panose="020B0503020000020004" pitchFamily="50" charset="-127"/>
               </a:rPr>
-              <a:t>2026-05-02</a:t>
+              <a:t>2026-05-06</a:t>
             </a:fld>
             <a:endParaRPr lang="ko-KR" altLang="en-US">
               <a:latin typeface="맑은 고딕" panose="020B0503020000020004" pitchFamily="50" charset="-127"/>
@@ -483,7 +485,7 @@
           <a:p>
             <a:fld id="{43E1C3DD-4A19-441D-907C-380838DB51C4}" type="datetime1">
               <a:rPr lang="ko-KR" altLang="en-US" noProof="0" smtClean="0"/>
-              <a:t>2026-05-02</a:t>
+              <a:t>2026-05-06</a:t>
             </a:fld>
             <a:endParaRPr lang="ko-KR" altLang="en-US" noProof="0"/>
           </a:p>
@@ -895,6 +897,124 @@
         <p:cNvPr id="1" name="">
           <a:extLst>
             <a:ext uri="{FF2B5EF4-FFF2-40B4-BE49-F238E27FC236}">
+              <a16:creationId xmlns:a16="http://schemas.microsoft.com/office/drawing/2014/main" id="{5F80606C-8F93-3187-CC72-DBA9E6DC41D1}"/>
+            </a:ext>
+          </a:extLst>
+        </p:cNvPr>
+        <p:cNvGrpSpPr/>
+        <p:nvPr/>
+      </p:nvGrpSpPr>
+      <p:grpSpPr>
+        <a:xfrm>
+          <a:off x="0" y="0"/>
+          <a:ext cx="0" cy="0"/>
+          <a:chOff x="0" y="0"/>
+          <a:chExt cx="0" cy="0"/>
+        </a:xfrm>
+      </p:grpSpPr>
+      <p:sp>
+        <p:nvSpPr>
+          <p:cNvPr id="2" name="슬라이드 이미지 개체 틀 1">
+            <a:extLst>
+              <a:ext uri="{FF2B5EF4-FFF2-40B4-BE49-F238E27FC236}">
+                <a16:creationId xmlns:a16="http://schemas.microsoft.com/office/drawing/2014/main" id="{6F5EC279-D4D7-8A03-C182-A87B66647CEF}"/>
+              </a:ext>
+            </a:extLst>
+          </p:cNvPr>
+          <p:cNvSpPr>
+            <a:spLocks noGrp="1" noRot="1" noChangeAspect="1"/>
+          </p:cNvSpPr>
+          <p:nvPr>
+            <p:ph type="sldImg"/>
+          </p:nvPr>
+        </p:nvSpPr>
+        <p:spPr/>
+      </p:sp>
+      <p:sp>
+        <p:nvSpPr>
+          <p:cNvPr id="3" name="슬라이드 노트 개체 틀 2">
+            <a:extLst>
+              <a:ext uri="{FF2B5EF4-FFF2-40B4-BE49-F238E27FC236}">
+                <a16:creationId xmlns:a16="http://schemas.microsoft.com/office/drawing/2014/main" id="{8EDF8244-5045-8711-B408-2D52B919A2E3}"/>
+              </a:ext>
+            </a:extLst>
+          </p:cNvPr>
+          <p:cNvSpPr>
+            <a:spLocks noGrp="1"/>
+          </p:cNvSpPr>
+          <p:nvPr>
+            <p:ph type="body" idx="1"/>
+          </p:nvPr>
+        </p:nvSpPr>
+        <p:spPr/>
+        <p:txBody>
+          <a:bodyPr/>
+          <a:lstStyle/>
+          <a:p>
+            <a:endParaRPr lang="ko-KR" altLang="en-US">
+              <a:latin typeface="맑은 고딕" panose="020B0503020000020004" pitchFamily="50" charset="-127"/>
+              <a:ea typeface="맑은 고딕" panose="020B0503020000020004" pitchFamily="50" charset="-127"/>
+            </a:endParaRPr>
+          </a:p>
+        </p:txBody>
+      </p:sp>
+      <p:sp>
+        <p:nvSpPr>
+          <p:cNvPr id="4" name="슬라이드 번호 개체 틀 3">
+            <a:extLst>
+              <a:ext uri="{FF2B5EF4-FFF2-40B4-BE49-F238E27FC236}">
+                <a16:creationId xmlns:a16="http://schemas.microsoft.com/office/drawing/2014/main" id="{28562F61-502C-1C57-6BA8-04388DB272FC}"/>
+              </a:ext>
+            </a:extLst>
+          </p:cNvPr>
+          <p:cNvSpPr>
+            <a:spLocks noGrp="1"/>
+          </p:cNvSpPr>
+          <p:nvPr>
+            <p:ph type="sldNum" sz="quarter" idx="5"/>
+          </p:nvPr>
+        </p:nvSpPr>
+        <p:spPr/>
+        <p:txBody>
+          <a:bodyPr/>
+          <a:lstStyle/>
+          <a:p>
+            <a:pPr rtl="0"/>
+            <a:fld id="{DF61EA0F-A667-4B49-8422-0062BC55E249}" type="slidenum">
+              <a:rPr lang="en-US" altLang="ko-KR" smtClean="0">
+                <a:latin typeface="맑은 고딕" panose="020B0503020000020004" pitchFamily="50" charset="-127"/>
+                <a:ea typeface="맑은 고딕" panose="020B0503020000020004" pitchFamily="50" charset="-127"/>
+              </a:rPr>
+              <a:t>10</a:t>
+            </a:fld>
+            <a:endParaRPr lang="ko-KR" altLang="en-US">
+              <a:latin typeface="맑은 고딕" panose="020B0503020000020004" pitchFamily="50" charset="-127"/>
+              <a:ea typeface="맑은 고딕" panose="020B0503020000020004" pitchFamily="50" charset="-127"/>
+            </a:endParaRPr>
+          </a:p>
+        </p:txBody>
+      </p:sp>
+    </p:spTree>
+    <p:extLst>
+      <p:ext uri="{BB962C8B-B14F-4D97-AF65-F5344CB8AC3E}">
+        <p14:creationId xmlns:p14="http://schemas.microsoft.com/office/powerpoint/2010/main" val="2555386750"/>
+      </p:ext>
+    </p:extLst>
+  </p:cSld>
+  <p:clrMapOvr>
+    <a:masterClrMapping/>
+  </p:clrMapOvr>
+</p:notes>
+</file>
+
+<file path=ppt/notesSlides/notesSlide11.xml><?xml version="1.0" encoding="utf-8"?>
+<p:notes xmlns:a="http://schemas.openxmlformats.org/drawingml/2006/main" xmlns:r="http://schemas.openxmlformats.org/officeDocument/2006/relationships" xmlns:p="http://schemas.openxmlformats.org/presentationml/2006/main">
+  <p:cSld>
+    <p:spTree>
+      <p:nvGrpSpPr>
+        <p:cNvPr id="1" name="">
+          <a:extLst>
+            <a:ext uri="{FF2B5EF4-FFF2-40B4-BE49-F238E27FC236}">
               <a16:creationId xmlns:a16="http://schemas.microsoft.com/office/drawing/2014/main" id="{0815034D-BB4E-E78E-991E-5D0999AC1CB0}"/>
             </a:ext>
           </a:extLst>
@@ -983,7 +1103,7 @@
                 <a:latin typeface="맑은 고딕" panose="020B0503020000020004" pitchFamily="50" charset="-127"/>
                 <a:ea typeface="맑은 고딕" panose="020B0503020000020004" pitchFamily="50" charset="-127"/>
               </a:rPr>
-              <a:t>10</a:t>
+              <a:t>11</a:t>
             </a:fld>
             <a:endParaRPr lang="ko-KR" altLang="en-US">
               <a:latin typeface="맑은 고딕" panose="020B0503020000020004" pitchFamily="50" charset="-127"/>
@@ -1005,7 +1125,7 @@
 </p:notes>
 </file>
 
-<file path=ppt/notesSlides/notesSlide11.xml><?xml version="1.0" encoding="utf-8"?>
+<file path=ppt/notesSlides/notesSlide12.xml><?xml version="1.0" encoding="utf-8"?>
 <p:notes xmlns:a="http://schemas.openxmlformats.org/drawingml/2006/main" xmlns:r="http://schemas.openxmlformats.org/officeDocument/2006/relationships" xmlns:p="http://schemas.openxmlformats.org/presentationml/2006/main">
   <p:cSld>
     <p:spTree>
@@ -1101,7 +1221,7 @@
                 <a:latin typeface="맑은 고딕" panose="020B0503020000020004" pitchFamily="50" charset="-127"/>
                 <a:ea typeface="맑은 고딕" panose="020B0503020000020004" pitchFamily="50" charset="-127"/>
               </a:rPr>
-              <a:t>11</a:t>
+              <a:t>12</a:t>
             </a:fld>
             <a:endParaRPr lang="ko-KR" altLang="en-US">
               <a:latin typeface="맑은 고딕" panose="020B0503020000020004" pitchFamily="50" charset="-127"/>
@@ -1123,7 +1243,7 @@
 </p:notes>
 </file>
 
-<file path=ppt/notesSlides/notesSlide12.xml><?xml version="1.0" encoding="utf-8"?>
+<file path=ppt/notesSlides/notesSlide13.xml><?xml version="1.0" encoding="utf-8"?>
 <p:notes xmlns:a="http://schemas.openxmlformats.org/drawingml/2006/main" xmlns:r="http://schemas.openxmlformats.org/officeDocument/2006/relationships" xmlns:p="http://schemas.openxmlformats.org/presentationml/2006/main">
   <p:cSld>
     <p:spTree>
@@ -1219,7 +1339,7 @@
                 <a:latin typeface="맑은 고딕" panose="020B0503020000020004" pitchFamily="50" charset="-127"/>
                 <a:ea typeface="맑은 고딕" panose="020B0503020000020004" pitchFamily="50" charset="-127"/>
               </a:rPr>
-              <a:t>12</a:t>
+              <a:t>13</a:t>
             </a:fld>
             <a:endParaRPr lang="ko-KR" altLang="en-US">
               <a:latin typeface="맑은 고딕" panose="020B0503020000020004" pitchFamily="50" charset="-127"/>
@@ -1241,7 +1361,7 @@
 </p:notes>
 </file>
 
-<file path=ppt/notesSlides/notesSlide13.xml><?xml version="1.0" encoding="utf-8"?>
+<file path=ppt/notesSlides/notesSlide14.xml><?xml version="1.0" encoding="utf-8"?>
 <p:notes xmlns:a="http://schemas.openxmlformats.org/drawingml/2006/main" xmlns:r="http://schemas.openxmlformats.org/officeDocument/2006/relationships" xmlns:p="http://schemas.openxmlformats.org/presentationml/2006/main">
   <p:cSld>
     <p:spTree>
@@ -1337,7 +1457,7 @@
                 <a:latin typeface="맑은 고딕" panose="020B0503020000020004" pitchFamily="50" charset="-127"/>
                 <a:ea typeface="맑은 고딕" panose="020B0503020000020004" pitchFamily="50" charset="-127"/>
               </a:rPr>
-              <a:t>13</a:t>
+              <a:t>14</a:t>
             </a:fld>
             <a:endParaRPr lang="ko-KR" altLang="en-US">
               <a:latin typeface="맑은 고딕" panose="020B0503020000020004" pitchFamily="50" charset="-127"/>
@@ -1359,7 +1479,7 @@
 </p:notes>
 </file>
 
-<file path=ppt/notesSlides/notesSlide14.xml><?xml version="1.0" encoding="utf-8"?>
+<file path=ppt/notesSlides/notesSlide15.xml><?xml version="1.0" encoding="utf-8"?>
 <p:notes xmlns:a="http://schemas.openxmlformats.org/drawingml/2006/main" xmlns:r="http://schemas.openxmlformats.org/officeDocument/2006/relationships" xmlns:p="http://schemas.openxmlformats.org/presentationml/2006/main">
   <p:cSld>
     <p:spTree>
@@ -1455,7 +1575,7 @@
                 <a:latin typeface="맑은 고딕" panose="020B0503020000020004" pitchFamily="50" charset="-127"/>
                 <a:ea typeface="맑은 고딕" panose="020B0503020000020004" pitchFamily="50" charset="-127"/>
               </a:rPr>
-              <a:t>14</a:t>
+              <a:t>15</a:t>
             </a:fld>
             <a:endParaRPr lang="ko-KR" altLang="en-US">
               <a:latin typeface="맑은 고딕" panose="020B0503020000020004" pitchFamily="50" charset="-127"/>
@@ -1477,7 +1597,7 @@
 </p:notes>
 </file>
 
-<file path=ppt/notesSlides/notesSlide15.xml><?xml version="1.0" encoding="utf-8"?>
+<file path=ppt/notesSlides/notesSlide16.xml><?xml version="1.0" encoding="utf-8"?>
 <p:notes xmlns:a="http://schemas.openxmlformats.org/drawingml/2006/main" xmlns:r="http://schemas.openxmlformats.org/officeDocument/2006/relationships" xmlns:p="http://schemas.openxmlformats.org/presentationml/2006/main">
   <p:cSld>
     <p:spTree>
@@ -1573,7 +1693,7 @@
                 <a:latin typeface="맑은 고딕" panose="020B0503020000020004" pitchFamily="50" charset="-127"/>
                 <a:ea typeface="맑은 고딕" panose="020B0503020000020004" pitchFamily="50" charset="-127"/>
               </a:rPr>
-              <a:t>15</a:t>
+              <a:t>16</a:t>
             </a:fld>
             <a:endParaRPr lang="ko-KR" altLang="en-US">
               <a:latin typeface="맑은 고딕" panose="020B0503020000020004" pitchFamily="50" charset="-127"/>
@@ -1595,7 +1715,7 @@
 </p:notes>
 </file>
 
-<file path=ppt/notesSlides/notesSlide16.xml><?xml version="1.0" encoding="utf-8"?>
+<file path=ppt/notesSlides/notesSlide17.xml><?xml version="1.0" encoding="utf-8"?>
 <p:notes xmlns:a="http://schemas.openxmlformats.org/drawingml/2006/main" xmlns:r="http://schemas.openxmlformats.org/officeDocument/2006/relationships" xmlns:p="http://schemas.openxmlformats.org/presentationml/2006/main">
   <p:cSld>
     <p:spTree>
@@ -1691,7 +1811,7 @@
                 <a:latin typeface="맑은 고딕" panose="020B0503020000020004" pitchFamily="50" charset="-127"/>
                 <a:ea typeface="맑은 고딕" panose="020B0503020000020004" pitchFamily="50" charset="-127"/>
               </a:rPr>
-              <a:t>16</a:t>
+              <a:t>17</a:t>
             </a:fld>
             <a:endParaRPr lang="ko-KR" altLang="en-US">
               <a:latin typeface="맑은 고딕" panose="020B0503020000020004" pitchFamily="50" charset="-127"/>
@@ -1713,7 +1833,7 @@
 </p:notes>
 </file>
 
-<file path=ppt/notesSlides/notesSlide17.xml><?xml version="1.0" encoding="utf-8"?>
+<file path=ppt/notesSlides/notesSlide18.xml><?xml version="1.0" encoding="utf-8"?>
 <p:notes xmlns:a="http://schemas.openxmlformats.org/drawingml/2006/main" xmlns:r="http://schemas.openxmlformats.org/officeDocument/2006/relationships" xmlns:p="http://schemas.openxmlformats.org/presentationml/2006/main">
   <p:cSld>
     <p:spTree>
@@ -1809,7 +1929,7 @@
                 <a:latin typeface="맑은 고딕" panose="020B0503020000020004" pitchFamily="50" charset="-127"/>
                 <a:ea typeface="맑은 고딕" panose="020B0503020000020004" pitchFamily="50" charset="-127"/>
               </a:rPr>
-              <a:t>18</a:t>
+              <a:t>19</a:t>
             </a:fld>
             <a:endParaRPr lang="ko-KR" altLang="en-US">
               <a:latin typeface="맑은 고딕" panose="020B0503020000020004" pitchFamily="50" charset="-127"/>
@@ -1831,7 +1951,7 @@
 </p:notes>
 </file>
 
-<file path=ppt/notesSlides/notesSlide18.xml><?xml version="1.0" encoding="utf-8"?>
+<file path=ppt/notesSlides/notesSlide19.xml><?xml version="1.0" encoding="utf-8"?>
 <p:notes xmlns:a="http://schemas.openxmlformats.org/drawingml/2006/main" xmlns:r="http://schemas.openxmlformats.org/officeDocument/2006/relationships" xmlns:p="http://schemas.openxmlformats.org/presentationml/2006/main">
   <p:cSld>
     <p:spTree>
@@ -1927,7 +2047,7 @@
                 <a:latin typeface="맑은 고딕" panose="020B0503020000020004" pitchFamily="50" charset="-127"/>
                 <a:ea typeface="맑은 고딕" panose="020B0503020000020004" pitchFamily="50" charset="-127"/>
               </a:rPr>
-              <a:t>21</a:t>
+              <a:t>22</a:t>
             </a:fld>
             <a:endParaRPr lang="ko-KR" altLang="en-US">
               <a:latin typeface="맑은 고딕" panose="020B0503020000020004" pitchFamily="50" charset="-127"/>
@@ -1940,124 +2060,6 @@
     <p:extLst>
       <p:ext uri="{BB962C8B-B14F-4D97-AF65-F5344CB8AC3E}">
         <p14:creationId xmlns:p14="http://schemas.microsoft.com/office/powerpoint/2010/main" val="2728697898"/>
-      </p:ext>
-    </p:extLst>
-  </p:cSld>
-  <p:clrMapOvr>
-    <a:masterClrMapping/>
-  </p:clrMapOvr>
-</p:notes>
-</file>
-
-<file path=ppt/notesSlides/notesSlide19.xml><?xml version="1.0" encoding="utf-8"?>
-<p:notes xmlns:a="http://schemas.openxmlformats.org/drawingml/2006/main" xmlns:r="http://schemas.openxmlformats.org/officeDocument/2006/relationships" xmlns:p="http://schemas.openxmlformats.org/presentationml/2006/main">
-  <p:cSld>
-    <p:spTree>
-      <p:nvGrpSpPr>
-        <p:cNvPr id="1" name="">
-          <a:extLst>
-            <a:ext uri="{FF2B5EF4-FFF2-40B4-BE49-F238E27FC236}">
-              <a16:creationId xmlns:a16="http://schemas.microsoft.com/office/drawing/2014/main" id="{9238F1B2-C174-E815-D409-0A3F77E5D6B5}"/>
-            </a:ext>
-          </a:extLst>
-        </p:cNvPr>
-        <p:cNvGrpSpPr/>
-        <p:nvPr/>
-      </p:nvGrpSpPr>
-      <p:grpSpPr>
-        <a:xfrm>
-          <a:off x="0" y="0"/>
-          <a:ext cx="0" cy="0"/>
-          <a:chOff x="0" y="0"/>
-          <a:chExt cx="0" cy="0"/>
-        </a:xfrm>
-      </p:grpSpPr>
-      <p:sp>
-        <p:nvSpPr>
-          <p:cNvPr id="2" name="슬라이드 이미지 개체 틀 1">
-            <a:extLst>
-              <a:ext uri="{FF2B5EF4-FFF2-40B4-BE49-F238E27FC236}">
-                <a16:creationId xmlns:a16="http://schemas.microsoft.com/office/drawing/2014/main" id="{A82F3EB6-6D78-86EC-C34E-AC16F68386F3}"/>
-              </a:ext>
-            </a:extLst>
-          </p:cNvPr>
-          <p:cNvSpPr>
-            <a:spLocks noGrp="1" noRot="1" noChangeAspect="1"/>
-          </p:cNvSpPr>
-          <p:nvPr>
-            <p:ph type="sldImg"/>
-          </p:nvPr>
-        </p:nvSpPr>
-        <p:spPr/>
-      </p:sp>
-      <p:sp>
-        <p:nvSpPr>
-          <p:cNvPr id="3" name="슬라이드 노트 개체 틀 2">
-            <a:extLst>
-              <a:ext uri="{FF2B5EF4-FFF2-40B4-BE49-F238E27FC236}">
-                <a16:creationId xmlns:a16="http://schemas.microsoft.com/office/drawing/2014/main" id="{07803FFD-0CAF-439F-9645-8DFDBEEC0C71}"/>
-              </a:ext>
-            </a:extLst>
-          </p:cNvPr>
-          <p:cNvSpPr>
-            <a:spLocks noGrp="1"/>
-          </p:cNvSpPr>
-          <p:nvPr>
-            <p:ph type="body" idx="1"/>
-          </p:nvPr>
-        </p:nvSpPr>
-        <p:spPr/>
-        <p:txBody>
-          <a:bodyPr/>
-          <a:lstStyle/>
-          <a:p>
-            <a:endParaRPr lang="ko-KR" altLang="en-US">
-              <a:latin typeface="맑은 고딕" panose="020B0503020000020004" pitchFamily="50" charset="-127"/>
-              <a:ea typeface="맑은 고딕" panose="020B0503020000020004" pitchFamily="50" charset="-127"/>
-            </a:endParaRPr>
-          </a:p>
-        </p:txBody>
-      </p:sp>
-      <p:sp>
-        <p:nvSpPr>
-          <p:cNvPr id="4" name="슬라이드 번호 개체 틀 3">
-            <a:extLst>
-              <a:ext uri="{FF2B5EF4-FFF2-40B4-BE49-F238E27FC236}">
-                <a16:creationId xmlns:a16="http://schemas.microsoft.com/office/drawing/2014/main" id="{E2B9B655-4B54-32DD-0A1C-BBBE25F5C54D}"/>
-              </a:ext>
-            </a:extLst>
-          </p:cNvPr>
-          <p:cNvSpPr>
-            <a:spLocks noGrp="1"/>
-          </p:cNvSpPr>
-          <p:nvPr>
-            <p:ph type="sldNum" sz="quarter" idx="5"/>
-          </p:nvPr>
-        </p:nvSpPr>
-        <p:spPr/>
-        <p:txBody>
-          <a:bodyPr/>
-          <a:lstStyle/>
-          <a:p>
-            <a:pPr rtl="0"/>
-            <a:fld id="{DF61EA0F-A667-4B49-8422-0062BC55E249}" type="slidenum">
-              <a:rPr lang="en-US" altLang="ko-KR" smtClean="0">
-                <a:latin typeface="맑은 고딕" panose="020B0503020000020004" pitchFamily="50" charset="-127"/>
-                <a:ea typeface="맑은 고딕" panose="020B0503020000020004" pitchFamily="50" charset="-127"/>
-              </a:rPr>
-              <a:t>22</a:t>
-            </a:fld>
-            <a:endParaRPr lang="ko-KR" altLang="en-US">
-              <a:latin typeface="맑은 고딕" panose="020B0503020000020004" pitchFamily="50" charset="-127"/>
-              <a:ea typeface="맑은 고딕" panose="020B0503020000020004" pitchFamily="50" charset="-127"/>
-            </a:endParaRPr>
-          </a:p>
-        </p:txBody>
-      </p:sp>
-    </p:spTree>
-    <p:extLst>
-      <p:ext uri="{BB962C8B-B14F-4D97-AF65-F5344CB8AC3E}">
-        <p14:creationId xmlns:p14="http://schemas.microsoft.com/office/powerpoint/2010/main" val="692413168"/>
       </p:ext>
     </p:extLst>
   </p:cSld>
@@ -2193,6 +2195,124 @@
         <p:cNvPr id="1" name="">
           <a:extLst>
             <a:ext uri="{FF2B5EF4-FFF2-40B4-BE49-F238E27FC236}">
+              <a16:creationId xmlns:a16="http://schemas.microsoft.com/office/drawing/2014/main" id="{9238F1B2-C174-E815-D409-0A3F77E5D6B5}"/>
+            </a:ext>
+          </a:extLst>
+        </p:cNvPr>
+        <p:cNvGrpSpPr/>
+        <p:nvPr/>
+      </p:nvGrpSpPr>
+      <p:grpSpPr>
+        <a:xfrm>
+          <a:off x="0" y="0"/>
+          <a:ext cx="0" cy="0"/>
+          <a:chOff x="0" y="0"/>
+          <a:chExt cx="0" cy="0"/>
+        </a:xfrm>
+      </p:grpSpPr>
+      <p:sp>
+        <p:nvSpPr>
+          <p:cNvPr id="2" name="슬라이드 이미지 개체 틀 1">
+            <a:extLst>
+              <a:ext uri="{FF2B5EF4-FFF2-40B4-BE49-F238E27FC236}">
+                <a16:creationId xmlns:a16="http://schemas.microsoft.com/office/drawing/2014/main" id="{A82F3EB6-6D78-86EC-C34E-AC16F68386F3}"/>
+              </a:ext>
+            </a:extLst>
+          </p:cNvPr>
+          <p:cNvSpPr>
+            <a:spLocks noGrp="1" noRot="1" noChangeAspect="1"/>
+          </p:cNvSpPr>
+          <p:nvPr>
+            <p:ph type="sldImg"/>
+          </p:nvPr>
+        </p:nvSpPr>
+        <p:spPr/>
+      </p:sp>
+      <p:sp>
+        <p:nvSpPr>
+          <p:cNvPr id="3" name="슬라이드 노트 개체 틀 2">
+            <a:extLst>
+              <a:ext uri="{FF2B5EF4-FFF2-40B4-BE49-F238E27FC236}">
+                <a16:creationId xmlns:a16="http://schemas.microsoft.com/office/drawing/2014/main" id="{07803FFD-0CAF-439F-9645-8DFDBEEC0C71}"/>
+              </a:ext>
+            </a:extLst>
+          </p:cNvPr>
+          <p:cNvSpPr>
+            <a:spLocks noGrp="1"/>
+          </p:cNvSpPr>
+          <p:nvPr>
+            <p:ph type="body" idx="1"/>
+          </p:nvPr>
+        </p:nvSpPr>
+        <p:spPr/>
+        <p:txBody>
+          <a:bodyPr/>
+          <a:lstStyle/>
+          <a:p>
+            <a:endParaRPr lang="ko-KR" altLang="en-US">
+              <a:latin typeface="맑은 고딕" panose="020B0503020000020004" pitchFamily="50" charset="-127"/>
+              <a:ea typeface="맑은 고딕" panose="020B0503020000020004" pitchFamily="50" charset="-127"/>
+            </a:endParaRPr>
+          </a:p>
+        </p:txBody>
+      </p:sp>
+      <p:sp>
+        <p:nvSpPr>
+          <p:cNvPr id="4" name="슬라이드 번호 개체 틀 3">
+            <a:extLst>
+              <a:ext uri="{FF2B5EF4-FFF2-40B4-BE49-F238E27FC236}">
+                <a16:creationId xmlns:a16="http://schemas.microsoft.com/office/drawing/2014/main" id="{E2B9B655-4B54-32DD-0A1C-BBBE25F5C54D}"/>
+              </a:ext>
+            </a:extLst>
+          </p:cNvPr>
+          <p:cNvSpPr>
+            <a:spLocks noGrp="1"/>
+          </p:cNvSpPr>
+          <p:nvPr>
+            <p:ph type="sldNum" sz="quarter" idx="5"/>
+          </p:nvPr>
+        </p:nvSpPr>
+        <p:spPr/>
+        <p:txBody>
+          <a:bodyPr/>
+          <a:lstStyle/>
+          <a:p>
+            <a:pPr rtl="0"/>
+            <a:fld id="{DF61EA0F-A667-4B49-8422-0062BC55E249}" type="slidenum">
+              <a:rPr lang="en-US" altLang="ko-KR" smtClean="0">
+                <a:latin typeface="맑은 고딕" panose="020B0503020000020004" pitchFamily="50" charset="-127"/>
+                <a:ea typeface="맑은 고딕" panose="020B0503020000020004" pitchFamily="50" charset="-127"/>
+              </a:rPr>
+              <a:t>23</a:t>
+            </a:fld>
+            <a:endParaRPr lang="ko-KR" altLang="en-US">
+              <a:latin typeface="맑은 고딕" panose="020B0503020000020004" pitchFamily="50" charset="-127"/>
+              <a:ea typeface="맑은 고딕" panose="020B0503020000020004" pitchFamily="50" charset="-127"/>
+            </a:endParaRPr>
+          </a:p>
+        </p:txBody>
+      </p:sp>
+    </p:spTree>
+    <p:extLst>
+      <p:ext uri="{BB962C8B-B14F-4D97-AF65-F5344CB8AC3E}">
+        <p14:creationId xmlns:p14="http://schemas.microsoft.com/office/powerpoint/2010/main" val="692413168"/>
+      </p:ext>
+    </p:extLst>
+  </p:cSld>
+  <p:clrMapOvr>
+    <a:masterClrMapping/>
+  </p:clrMapOvr>
+</p:notes>
+</file>
+
+<file path=ppt/notesSlides/notesSlide21.xml><?xml version="1.0" encoding="utf-8"?>
+<p:notes xmlns:a="http://schemas.openxmlformats.org/drawingml/2006/main" xmlns:r="http://schemas.openxmlformats.org/officeDocument/2006/relationships" xmlns:p="http://schemas.openxmlformats.org/presentationml/2006/main">
+  <p:cSld>
+    <p:spTree>
+      <p:nvGrpSpPr>
+        <p:cNvPr id="1" name="">
+          <a:extLst>
+            <a:ext uri="{FF2B5EF4-FFF2-40B4-BE49-F238E27FC236}">
               <a16:creationId xmlns:a16="http://schemas.microsoft.com/office/drawing/2014/main" id="{B917560D-60B5-CBEE-2F03-3A123D207134}"/>
             </a:ext>
           </a:extLst>
@@ -2281,7 +2401,7 @@
                 <a:latin typeface="맑은 고딕" panose="020B0503020000020004" pitchFamily="50" charset="-127"/>
                 <a:ea typeface="맑은 고딕" panose="020B0503020000020004" pitchFamily="50" charset="-127"/>
               </a:rPr>
-              <a:t>23</a:t>
+              <a:t>24</a:t>
             </a:fld>
             <a:endParaRPr lang="ko-KR" altLang="en-US">
               <a:latin typeface="맑은 고딕" panose="020B0503020000020004" pitchFamily="50" charset="-127"/>
@@ -2303,7 +2423,7 @@
 </p:notes>
 </file>
 
-<file path=ppt/notesSlides/notesSlide21.xml><?xml version="1.0" encoding="utf-8"?>
+<file path=ppt/notesSlides/notesSlide22.xml><?xml version="1.0" encoding="utf-8"?>
 <p:notes xmlns:a="http://schemas.openxmlformats.org/drawingml/2006/main" xmlns:r="http://schemas.openxmlformats.org/officeDocument/2006/relationships" xmlns:p="http://schemas.openxmlformats.org/presentationml/2006/main">
   <p:cSld>
     <p:spTree>
@@ -2399,7 +2519,7 @@
                 <a:latin typeface="맑은 고딕" panose="020B0503020000020004" pitchFamily="50" charset="-127"/>
                 <a:ea typeface="맑은 고딕" panose="020B0503020000020004" pitchFamily="50" charset="-127"/>
               </a:rPr>
-              <a:t>24</a:t>
+              <a:t>25</a:t>
             </a:fld>
             <a:endParaRPr lang="ko-KR" altLang="en-US">
               <a:latin typeface="맑은 고딕" panose="020B0503020000020004" pitchFamily="50" charset="-127"/>
@@ -2421,7 +2541,7 @@
 </p:notes>
 </file>
 
-<file path=ppt/notesSlides/notesSlide22.xml><?xml version="1.0" encoding="utf-8"?>
+<file path=ppt/notesSlides/notesSlide23.xml><?xml version="1.0" encoding="utf-8"?>
 <p:notes xmlns:a="http://schemas.openxmlformats.org/drawingml/2006/main" xmlns:r="http://schemas.openxmlformats.org/officeDocument/2006/relationships" xmlns:p="http://schemas.openxmlformats.org/presentationml/2006/main">
   <p:cSld>
     <p:spTree>
@@ -2517,7 +2637,7 @@
                 <a:latin typeface="맑은 고딕" panose="020B0503020000020004" pitchFamily="50" charset="-127"/>
                 <a:ea typeface="맑은 고딕" panose="020B0503020000020004" pitchFamily="50" charset="-127"/>
               </a:rPr>
-              <a:t>25</a:t>
+              <a:t>26</a:t>
             </a:fld>
             <a:endParaRPr lang="ko-KR" altLang="en-US">
               <a:latin typeface="맑은 고딕" panose="020B0503020000020004" pitchFamily="50" charset="-127"/>
@@ -2539,7 +2659,7 @@
 </p:notes>
 </file>
 
-<file path=ppt/notesSlides/notesSlide23.xml><?xml version="1.0" encoding="utf-8"?>
+<file path=ppt/notesSlides/notesSlide24.xml><?xml version="1.0" encoding="utf-8"?>
 <p:notes xmlns:a="http://schemas.openxmlformats.org/drawingml/2006/main" xmlns:r="http://schemas.openxmlformats.org/officeDocument/2006/relationships" xmlns:p="http://schemas.openxmlformats.org/presentationml/2006/main">
   <p:cSld>
     <p:spTree>
@@ -2635,7 +2755,7 @@
                 <a:latin typeface="맑은 고딕" panose="020B0503020000020004" pitchFamily="50" charset="-127"/>
                 <a:ea typeface="맑은 고딕" panose="020B0503020000020004" pitchFamily="50" charset="-127"/>
               </a:rPr>
-              <a:t>26</a:t>
+              <a:t>27</a:t>
             </a:fld>
             <a:endParaRPr lang="ko-KR" altLang="en-US">
               <a:latin typeface="맑은 고딕" panose="020B0503020000020004" pitchFamily="50" charset="-127"/>
@@ -2657,7 +2777,7 @@
 </p:notes>
 </file>
 
-<file path=ppt/notesSlides/notesSlide24.xml><?xml version="1.0" encoding="utf-8"?>
+<file path=ppt/notesSlides/notesSlide25.xml><?xml version="1.0" encoding="utf-8"?>
 <p:notes xmlns:a="http://schemas.openxmlformats.org/drawingml/2006/main" xmlns:r="http://schemas.openxmlformats.org/officeDocument/2006/relationships" xmlns:p="http://schemas.openxmlformats.org/presentationml/2006/main">
   <p:cSld>
     <p:spTree>
@@ -2753,7 +2873,7 @@
                 <a:latin typeface="맑은 고딕" panose="020B0503020000020004" pitchFamily="50" charset="-127"/>
                 <a:ea typeface="맑은 고딕" panose="020B0503020000020004" pitchFamily="50" charset="-127"/>
               </a:rPr>
-              <a:t>28</a:t>
+              <a:t>29</a:t>
             </a:fld>
             <a:endParaRPr lang="ko-KR" altLang="en-US">
               <a:latin typeface="맑은 고딕" panose="020B0503020000020004" pitchFamily="50" charset="-127"/>
@@ -3373,7 +3493,7 @@
         <p:cNvPr id="1" name="">
           <a:extLst>
             <a:ext uri="{FF2B5EF4-FFF2-40B4-BE49-F238E27FC236}">
-              <a16:creationId xmlns:a16="http://schemas.microsoft.com/office/drawing/2014/main" id="{5F80606C-8F93-3187-CC72-DBA9E6DC41D1}"/>
+              <a16:creationId xmlns:a16="http://schemas.microsoft.com/office/drawing/2014/main" id="{0F7FADA8-6871-F2BF-66E0-7D339D71A1D9}"/>
             </a:ext>
           </a:extLst>
         </p:cNvPr>
@@ -3393,7 +3513,7 @@
           <p:cNvPr id="2" name="슬라이드 이미지 개체 틀 1">
             <a:extLst>
               <a:ext uri="{FF2B5EF4-FFF2-40B4-BE49-F238E27FC236}">
-                <a16:creationId xmlns:a16="http://schemas.microsoft.com/office/drawing/2014/main" id="{6F5EC279-D4D7-8A03-C182-A87B66647CEF}"/>
+                <a16:creationId xmlns:a16="http://schemas.microsoft.com/office/drawing/2014/main" id="{A86D6FEF-3022-7EF8-A259-33DFDBE28FCB}"/>
               </a:ext>
             </a:extLst>
           </p:cNvPr>
@@ -3411,7 +3531,7 @@
           <p:cNvPr id="3" name="슬라이드 노트 개체 틀 2">
             <a:extLst>
               <a:ext uri="{FF2B5EF4-FFF2-40B4-BE49-F238E27FC236}">
-                <a16:creationId xmlns:a16="http://schemas.microsoft.com/office/drawing/2014/main" id="{8EDF8244-5045-8711-B408-2D52B919A2E3}"/>
+                <a16:creationId xmlns:a16="http://schemas.microsoft.com/office/drawing/2014/main" id="{EC9F7314-2187-03D2-84A9-D974DF47EFFB}"/>
               </a:ext>
             </a:extLst>
           </p:cNvPr>
@@ -3439,7 +3559,7 @@
           <p:cNvPr id="4" name="슬라이드 번호 개체 틀 3">
             <a:extLst>
               <a:ext uri="{FF2B5EF4-FFF2-40B4-BE49-F238E27FC236}">
-                <a16:creationId xmlns:a16="http://schemas.microsoft.com/office/drawing/2014/main" id="{28562F61-502C-1C57-6BA8-04388DB272FC}"/>
+                <a16:creationId xmlns:a16="http://schemas.microsoft.com/office/drawing/2014/main" id="{97836F6C-F156-63E6-A30C-857DA1800072}"/>
               </a:ext>
             </a:extLst>
           </p:cNvPr>
@@ -3473,7 +3593,7 @@
     </p:spTree>
     <p:extLst>
       <p:ext uri="{BB962C8B-B14F-4D97-AF65-F5344CB8AC3E}">
-        <p14:creationId xmlns:p14="http://schemas.microsoft.com/office/powerpoint/2010/main" val="2555386750"/>
+        <p14:creationId xmlns:p14="http://schemas.microsoft.com/office/powerpoint/2010/main" val="1610307648"/>
       </p:ext>
     </p:extLst>
   </p:cSld>
@@ -4069,7 +4189,7 @@
           <a:p>
             <a:fld id="{990475B5-67CA-4281-BDCA-DA943C3C8EB3}" type="datetime1">
               <a:rPr lang="ko-KR" altLang="en-US" noProof="0" smtClean="0"/>
-              <a:t>2026-05-02</a:t>
+              <a:t>2026-05-06</a:t>
             </a:fld>
             <a:endParaRPr lang="ko-KR" altLang="en-US" noProof="0"/>
           </a:p>
@@ -4723,7 +4843,7 @@
           <a:p>
             <a:fld id="{48A87A34-81AB-432B-8DAE-1953F412C126}" type="datetimeFigureOut">
               <a:rPr lang="en-US" smtClean="0"/>
-              <a:t>5/2/2026</a:t>
+              <a:t>5/6/2026</a:t>
             </a:fld>
             <a:endParaRPr lang="en-US" dirty="0"/>
           </a:p>
@@ -5019,7 +5139,7 @@
           <a:p>
             <a:fld id="{C655C81E-72E7-4D05-94B5-F45B321A525D}" type="datetime1">
               <a:rPr lang="ko-KR" altLang="en-US" noProof="0" smtClean="0"/>
-              <a:t>2026-05-02</a:t>
+              <a:t>2026-05-06</a:t>
             </a:fld>
             <a:endParaRPr lang="ko-KR" altLang="en-US" noProof="0" dirty="0">
               <a:latin typeface="맑은 고딕" panose="020B0503020000020004" pitchFamily="50" charset="-127"/>
@@ -5856,6 +5976,1705 @@
         <p:cNvPr id="1" name="">
           <a:extLst>
             <a:ext uri="{FF2B5EF4-FFF2-40B4-BE49-F238E27FC236}">
+              <a16:creationId xmlns:a16="http://schemas.microsoft.com/office/drawing/2014/main" id="{FC55FDEC-92DB-458A-4D4A-C5719743A818}"/>
+            </a:ext>
+          </a:extLst>
+        </p:cNvPr>
+        <p:cNvGrpSpPr/>
+        <p:nvPr/>
+      </p:nvGrpSpPr>
+      <p:grpSpPr>
+        <a:xfrm>
+          <a:off x="0" y="0"/>
+          <a:ext cx="0" cy="0"/>
+          <a:chOff x="0" y="0"/>
+          <a:chExt cx="0" cy="0"/>
+        </a:xfrm>
+      </p:grpSpPr>
+      <p:sp>
+        <p:nvSpPr>
+          <p:cNvPr id="12" name="슬라이드 번호 개체 틀 11">
+            <a:extLst>
+              <a:ext uri="{FF2B5EF4-FFF2-40B4-BE49-F238E27FC236}">
+                <a16:creationId xmlns:a16="http://schemas.microsoft.com/office/drawing/2014/main" id="{6170C0F2-1D86-E3C1-A314-0F9824FDBA01}"/>
+              </a:ext>
+            </a:extLst>
+          </p:cNvPr>
+          <p:cNvSpPr>
+            <a:spLocks noGrp="1"/>
+          </p:cNvSpPr>
+          <p:nvPr>
+            <p:ph type="sldNum" sz="quarter" idx="4"/>
+          </p:nvPr>
+        </p:nvSpPr>
+        <p:spPr/>
+        <p:txBody>
+          <a:bodyPr/>
+          <a:lstStyle/>
+          <a:p>
+            <a:fld id="{9860EDB8-5305-433F-BE41-D7A86D811DB3}" type="slidenum">
+              <a:rPr lang="en-US" altLang="ko-KR" noProof="0" smtClean="0"/>
+              <a:pPr/>
+              <a:t>10</a:t>
+            </a:fld>
+            <a:endParaRPr lang="ko-KR" altLang="en-US" noProof="0" dirty="0"/>
+          </a:p>
+        </p:txBody>
+      </p:sp>
+      <p:sp>
+        <p:nvSpPr>
+          <p:cNvPr id="9" name="제목 7">
+            <a:extLst>
+              <a:ext uri="{FF2B5EF4-FFF2-40B4-BE49-F238E27FC236}">
+                <a16:creationId xmlns:a16="http://schemas.microsoft.com/office/drawing/2014/main" id="{F05F2869-814D-7F01-9596-6A440BFDCDFD}"/>
+              </a:ext>
+            </a:extLst>
+          </p:cNvPr>
+          <p:cNvSpPr>
+            <a:spLocks noGrp="1"/>
+          </p:cNvSpPr>
+          <p:nvPr>
+            <p:ph type="title"/>
+          </p:nvPr>
+        </p:nvSpPr>
+        <p:spPr>
+          <a:xfrm>
+            <a:off x="521206" y="448056"/>
+            <a:ext cx="10432543" cy="640080"/>
+          </a:xfrm>
+        </p:spPr>
+        <p:txBody>
+          <a:bodyPr rtlCol="0">
+            <a:noAutofit/>
+          </a:bodyPr>
+          <a:lstStyle/>
+          <a:p>
+            <a:r>
+              <a:rPr lang="en-US" altLang="ko-KR" b="1" dirty="0">
+                <a:latin typeface="D2Coding" panose="020B0609020101020101" pitchFamily="49" charset="-127"/>
+                <a:ea typeface="D2Coding" panose="020B0609020101020101" pitchFamily="49" charset="-127"/>
+                <a:cs typeface="Segoe UI Light" panose="020B0502040204020203" pitchFamily="34" charset="0"/>
+              </a:rPr>
+              <a:t>Gradient Descent &amp; Stochastic Gradient Descent</a:t>
+            </a:r>
+            <a:endParaRPr lang="ko-KR" altLang="en-US" b="1" dirty="0">
+              <a:latin typeface="D2Coding" panose="020B0609020101020101" pitchFamily="49" charset="-127"/>
+              <a:ea typeface="D2Coding" panose="020B0609020101020101" pitchFamily="49" charset="-127"/>
+              <a:cs typeface="Segoe UI Light" panose="020B0502040204020203" pitchFamily="34" charset="0"/>
+            </a:endParaRPr>
+          </a:p>
+        </p:txBody>
+      </p:sp>
+      <p:sp>
+        <p:nvSpPr>
+          <p:cNvPr id="4" name="TextBox 3">
+            <a:extLst>
+              <a:ext uri="{FF2B5EF4-FFF2-40B4-BE49-F238E27FC236}">
+                <a16:creationId xmlns:a16="http://schemas.microsoft.com/office/drawing/2014/main" id="{CD70390A-1E41-1D06-1DE9-249627522AFF}"/>
+              </a:ext>
+            </a:extLst>
+          </p:cNvPr>
+          <p:cNvSpPr txBox="1"/>
+          <p:nvPr/>
+        </p:nvSpPr>
+        <p:spPr>
+          <a:xfrm>
+            <a:off x="647700" y="1381125"/>
+            <a:ext cx="11000826" cy="869790"/>
+          </a:xfrm>
+          <a:prstGeom prst="rect">
+            <a:avLst/>
+          </a:prstGeom>
+          <a:noFill/>
+        </p:spPr>
+        <p:txBody>
+          <a:bodyPr wrap="square" rtlCol="0">
+            <a:spAutoFit/>
+          </a:bodyPr>
+          <a:lstStyle/>
+          <a:p>
+            <a:pPr>
+              <a:lnSpc>
+                <a:spcPct val="150000"/>
+              </a:lnSpc>
+            </a:pPr>
+            <a:r>
+              <a:rPr lang="ko-KR" altLang="en-US" dirty="0">
+                <a:latin typeface="맑은 고딕 Semilight" panose="020B0502040204020203" pitchFamily="50" charset="-127"/>
+                <a:ea typeface="맑은 고딕 Semilight" panose="020B0502040204020203" pitchFamily="50" charset="-127"/>
+                <a:cs typeface="맑은 고딕 Semilight" panose="020B0502040204020203" pitchFamily="50" charset="-127"/>
+              </a:rPr>
+              <a:t>이전</a:t>
+            </a:r>
+            <a:r>
+              <a:rPr lang="en-US" altLang="ko-KR" dirty="0">
+                <a:latin typeface="맑은 고딕 Semilight" panose="020B0502040204020203" pitchFamily="50" charset="-127"/>
+                <a:ea typeface="맑은 고딕 Semilight" panose="020B0502040204020203" pitchFamily="50" charset="-127"/>
+                <a:cs typeface="맑은 고딕 Semilight" panose="020B0502040204020203" pitchFamily="50" charset="-127"/>
+              </a:rPr>
+              <a:t> 3</a:t>
+            </a:r>
+            <a:r>
+              <a:rPr lang="ko-KR" altLang="en-US" dirty="0">
+                <a:latin typeface="맑은 고딕 Semilight" panose="020B0502040204020203" pitchFamily="50" charset="-127"/>
+                <a:ea typeface="맑은 고딕 Semilight" panose="020B0502040204020203" pitchFamily="50" charset="-127"/>
+                <a:cs typeface="맑은 고딕 Semilight" panose="020B0502040204020203" pitchFamily="50" charset="-127"/>
+              </a:rPr>
+              <a:t>개 코드는 </a:t>
+            </a:r>
+            <a:r>
+              <a:rPr lang="en-US" altLang="ko-KR" dirty="0">
+                <a:latin typeface="맑은 고딕 Semilight" panose="020B0502040204020203" pitchFamily="50" charset="-127"/>
+                <a:ea typeface="맑은 고딕 Semilight" panose="020B0502040204020203" pitchFamily="50" charset="-127"/>
+                <a:cs typeface="맑은 고딕 Semilight" panose="020B0502040204020203" pitchFamily="50" charset="-127"/>
+              </a:rPr>
+              <a:t>Gradient Descent &amp; Stochastic Gradient Descent </a:t>
+            </a:r>
+            <a:r>
+              <a:rPr lang="ko-KR" altLang="en-US" dirty="0">
+                <a:latin typeface="맑은 고딕 Semilight" panose="020B0502040204020203" pitchFamily="50" charset="-127"/>
+                <a:ea typeface="맑은 고딕 Semilight" panose="020B0502040204020203" pitchFamily="50" charset="-127"/>
+                <a:cs typeface="맑은 고딕 Semilight" panose="020B0502040204020203" pitchFamily="50" charset="-127"/>
+              </a:rPr>
+              <a:t>방식 중 어느 것인가</a:t>
+            </a:r>
+            <a:r>
+              <a:rPr lang="en-US" altLang="ko-KR" dirty="0">
+                <a:latin typeface="맑은 고딕 Semilight" panose="020B0502040204020203" pitchFamily="50" charset="-127"/>
+                <a:ea typeface="맑은 고딕 Semilight" panose="020B0502040204020203" pitchFamily="50" charset="-127"/>
+                <a:cs typeface="맑은 고딕 Semilight" panose="020B0502040204020203" pitchFamily="50" charset="-127"/>
+              </a:rPr>
+              <a:t>?</a:t>
+            </a:r>
+            <a:r>
+              <a:rPr lang="ko-KR" altLang="en-US" dirty="0">
+                <a:latin typeface="맑은 고딕 Semilight" panose="020B0502040204020203" pitchFamily="50" charset="-127"/>
+                <a:ea typeface="맑은 고딕 Semilight" panose="020B0502040204020203" pitchFamily="50" charset="-127"/>
+                <a:cs typeface="맑은 고딕 Semilight" panose="020B0502040204020203" pitchFamily="50" charset="-127"/>
+              </a:rPr>
+              <a:t> 아래 코드를</a:t>
+            </a:r>
+            <a:r>
+              <a:rPr lang="en-US" altLang="ko-KR" dirty="0">
+                <a:latin typeface="맑은 고딕 Semilight" panose="020B0502040204020203" pitchFamily="50" charset="-127"/>
+                <a:ea typeface="맑은 고딕 Semilight" panose="020B0502040204020203" pitchFamily="50" charset="-127"/>
+                <a:cs typeface="맑은 고딕 Semilight" panose="020B0502040204020203" pitchFamily="50" charset="-127"/>
+              </a:rPr>
+              <a:t> </a:t>
+            </a:r>
+            <a:r>
+              <a:rPr lang="ko-KR" altLang="en-US" dirty="0">
+                <a:latin typeface="맑은 고딕 Semilight" panose="020B0502040204020203" pitchFamily="50" charset="-127"/>
+                <a:ea typeface="맑은 고딕 Semilight" panose="020B0502040204020203" pitchFamily="50" charset="-127"/>
+                <a:cs typeface="맑은 고딕 Semilight" panose="020B0502040204020203" pitchFamily="50" charset="-127"/>
+              </a:rPr>
+              <a:t>비교하여 생각해 보자 </a:t>
+            </a:r>
+          </a:p>
+        </p:txBody>
+      </p:sp>
+      <p:sp>
+        <p:nvSpPr>
+          <p:cNvPr id="6" name="TextBox 5">
+            <a:extLst>
+              <a:ext uri="{FF2B5EF4-FFF2-40B4-BE49-F238E27FC236}">
+                <a16:creationId xmlns:a16="http://schemas.microsoft.com/office/drawing/2014/main" id="{25EB0D2A-1DD3-19D2-7586-86295E876451}"/>
+              </a:ext>
+            </a:extLst>
+          </p:cNvPr>
+          <p:cNvSpPr txBox="1"/>
+          <p:nvPr/>
+        </p:nvSpPr>
+        <p:spPr>
+          <a:xfrm>
+            <a:off x="6409776" y="2673735"/>
+            <a:ext cx="5238750" cy="2677656"/>
+          </a:xfrm>
+          <a:prstGeom prst="rect">
+            <a:avLst/>
+          </a:prstGeom>
+          <a:solidFill>
+            <a:srgbClr val="76E3FF"/>
+          </a:solidFill>
+        </p:spPr>
+        <p:txBody>
+          <a:bodyPr wrap="square">
+            <a:spAutoFit/>
+          </a:bodyPr>
+          <a:lstStyle/>
+          <a:p>
+            <a:r>
+              <a:rPr lang="ko-KR" altLang="en-US" sz="1400" dirty="0" err="1">
+                <a:latin typeface="D2Coding" panose="020B0609020101020101" pitchFamily="49" charset="-127"/>
+                <a:ea typeface="D2Coding" panose="020B0609020101020101" pitchFamily="49" charset="-127"/>
+              </a:rPr>
+              <a:t>for</a:t>
+            </a:r>
+            <a:r>
+              <a:rPr lang="ko-KR" altLang="en-US" sz="1400" dirty="0">
+                <a:latin typeface="D2Coding" panose="020B0609020101020101" pitchFamily="49" charset="-127"/>
+                <a:ea typeface="D2Coding" panose="020B0609020101020101" pitchFamily="49" charset="-127"/>
+              </a:rPr>
+              <a:t> </a:t>
+            </a:r>
+            <a:r>
+              <a:rPr lang="ko-KR" altLang="en-US" sz="1400" dirty="0" err="1">
+                <a:latin typeface="D2Coding" panose="020B0609020101020101" pitchFamily="49" charset="-127"/>
+                <a:ea typeface="D2Coding" panose="020B0609020101020101" pitchFamily="49" charset="-127"/>
+              </a:rPr>
+              <a:t>epoch</a:t>
+            </a:r>
+            <a:r>
+              <a:rPr lang="ko-KR" altLang="en-US" sz="1400" dirty="0">
+                <a:latin typeface="D2Coding" panose="020B0609020101020101" pitchFamily="49" charset="-127"/>
+                <a:ea typeface="D2Coding" panose="020B0609020101020101" pitchFamily="49" charset="-127"/>
+              </a:rPr>
+              <a:t> </a:t>
+            </a:r>
+            <a:r>
+              <a:rPr lang="ko-KR" altLang="en-US" sz="1400" dirty="0" err="1">
+                <a:latin typeface="D2Coding" panose="020B0609020101020101" pitchFamily="49" charset="-127"/>
+                <a:ea typeface="D2Coding" panose="020B0609020101020101" pitchFamily="49" charset="-127"/>
+              </a:rPr>
+              <a:t>in</a:t>
+            </a:r>
+            <a:r>
+              <a:rPr lang="ko-KR" altLang="en-US" sz="1400" dirty="0">
+                <a:latin typeface="D2Coding" panose="020B0609020101020101" pitchFamily="49" charset="-127"/>
+                <a:ea typeface="D2Coding" panose="020B0609020101020101" pitchFamily="49" charset="-127"/>
+              </a:rPr>
+              <a:t> </a:t>
+            </a:r>
+            <a:r>
+              <a:rPr lang="ko-KR" altLang="en-US" sz="1400" dirty="0" err="1">
+                <a:latin typeface="D2Coding" panose="020B0609020101020101" pitchFamily="49" charset="-127"/>
+                <a:ea typeface="D2Coding" panose="020B0609020101020101" pitchFamily="49" charset="-127"/>
+              </a:rPr>
+              <a:t>range</a:t>
+            </a:r>
+            <a:r>
+              <a:rPr lang="ko-KR" altLang="en-US" sz="1400" dirty="0">
+                <a:latin typeface="D2Coding" panose="020B0609020101020101" pitchFamily="49" charset="-127"/>
+                <a:ea typeface="D2Coding" panose="020B0609020101020101" pitchFamily="49" charset="-127"/>
+              </a:rPr>
+              <a:t>(</a:t>
+            </a:r>
+            <a:r>
+              <a:rPr lang="ko-KR" altLang="en-US" sz="1400" dirty="0" err="1">
+                <a:latin typeface="D2Coding" panose="020B0609020101020101" pitchFamily="49" charset="-127"/>
+                <a:ea typeface="D2Coding" panose="020B0609020101020101" pitchFamily="49" charset="-127"/>
+              </a:rPr>
+              <a:t>epochs</a:t>
+            </a:r>
+            <a:r>
+              <a:rPr lang="ko-KR" altLang="en-US" sz="1400" dirty="0">
+                <a:latin typeface="D2Coding" panose="020B0609020101020101" pitchFamily="49" charset="-127"/>
+                <a:ea typeface="D2Coding" panose="020B0609020101020101" pitchFamily="49" charset="-127"/>
+              </a:rPr>
+              <a:t>):</a:t>
+            </a:r>
+          </a:p>
+          <a:p>
+            <a:r>
+              <a:rPr lang="ko-KR" altLang="en-US" sz="1400" dirty="0">
+                <a:latin typeface="D2Coding" panose="020B0609020101020101" pitchFamily="49" charset="-127"/>
+                <a:ea typeface="D2Coding" panose="020B0609020101020101" pitchFamily="49" charset="-127"/>
+              </a:rPr>
+              <a:t>    </a:t>
+            </a:r>
+            <a:r>
+              <a:rPr lang="ko-KR" altLang="en-US" sz="1400" dirty="0" err="1">
+                <a:latin typeface="D2Coding" panose="020B0609020101020101" pitchFamily="49" charset="-127"/>
+                <a:ea typeface="D2Coding" panose="020B0609020101020101" pitchFamily="49" charset="-127"/>
+              </a:rPr>
+              <a:t>for</a:t>
+            </a:r>
+            <a:r>
+              <a:rPr lang="ko-KR" altLang="en-US" sz="1400" dirty="0">
+                <a:latin typeface="D2Coding" panose="020B0609020101020101" pitchFamily="49" charset="-127"/>
+                <a:ea typeface="D2Coding" panose="020B0609020101020101" pitchFamily="49" charset="-127"/>
+              </a:rPr>
+              <a:t> </a:t>
+            </a:r>
+            <a:r>
+              <a:rPr lang="ko-KR" altLang="en-US" sz="1400" dirty="0" err="1">
+                <a:latin typeface="D2Coding" panose="020B0609020101020101" pitchFamily="49" charset="-127"/>
+                <a:ea typeface="D2Coding" panose="020B0609020101020101" pitchFamily="49" charset="-127"/>
+              </a:rPr>
+              <a:t>i</a:t>
+            </a:r>
+            <a:r>
+              <a:rPr lang="ko-KR" altLang="en-US" sz="1400" dirty="0">
+                <a:latin typeface="D2Coding" panose="020B0609020101020101" pitchFamily="49" charset="-127"/>
+                <a:ea typeface="D2Coding" panose="020B0609020101020101" pitchFamily="49" charset="-127"/>
+              </a:rPr>
+              <a:t> </a:t>
+            </a:r>
+            <a:r>
+              <a:rPr lang="ko-KR" altLang="en-US" sz="1400" dirty="0" err="1">
+                <a:latin typeface="D2Coding" panose="020B0609020101020101" pitchFamily="49" charset="-127"/>
+                <a:ea typeface="D2Coding" panose="020B0609020101020101" pitchFamily="49" charset="-127"/>
+              </a:rPr>
+              <a:t>in</a:t>
+            </a:r>
+            <a:r>
+              <a:rPr lang="ko-KR" altLang="en-US" sz="1400" dirty="0">
+                <a:latin typeface="D2Coding" panose="020B0609020101020101" pitchFamily="49" charset="-127"/>
+                <a:ea typeface="D2Coding" panose="020B0609020101020101" pitchFamily="49" charset="-127"/>
+              </a:rPr>
+              <a:t> </a:t>
+            </a:r>
+            <a:r>
+              <a:rPr lang="ko-KR" altLang="en-US" sz="1400" dirty="0" err="1">
+                <a:latin typeface="D2Coding" panose="020B0609020101020101" pitchFamily="49" charset="-127"/>
+                <a:ea typeface="D2Coding" panose="020B0609020101020101" pitchFamily="49" charset="-127"/>
+              </a:rPr>
+              <a:t>range</a:t>
+            </a:r>
+            <a:r>
+              <a:rPr lang="ko-KR" altLang="en-US" sz="1400" dirty="0">
+                <a:latin typeface="D2Coding" panose="020B0609020101020101" pitchFamily="49" charset="-127"/>
+                <a:ea typeface="D2Coding" panose="020B0609020101020101" pitchFamily="49" charset="-127"/>
+              </a:rPr>
+              <a:t>(</a:t>
+            </a:r>
+            <a:r>
+              <a:rPr lang="ko-KR" altLang="en-US" sz="1400" dirty="0" err="1">
+                <a:latin typeface="D2Coding" panose="020B0609020101020101" pitchFamily="49" charset="-127"/>
+                <a:ea typeface="D2Coding" panose="020B0609020101020101" pitchFamily="49" charset="-127"/>
+              </a:rPr>
+              <a:t>len</a:t>
+            </a:r>
+            <a:r>
+              <a:rPr lang="ko-KR" altLang="en-US" sz="1400" dirty="0">
+                <a:latin typeface="D2Coding" panose="020B0609020101020101" pitchFamily="49" charset="-127"/>
+                <a:ea typeface="D2Coding" panose="020B0609020101020101" pitchFamily="49" charset="-127"/>
+              </a:rPr>
+              <a:t>(</a:t>
+            </a:r>
+            <a:r>
+              <a:rPr lang="ko-KR" altLang="en-US" sz="1400" dirty="0" err="1">
+                <a:latin typeface="D2Coding" panose="020B0609020101020101" pitchFamily="49" charset="-127"/>
+                <a:ea typeface="D2Coding" panose="020B0609020101020101" pitchFamily="49" charset="-127"/>
+              </a:rPr>
+              <a:t>X</a:t>
+            </a:r>
+            <a:r>
+              <a:rPr lang="ko-KR" altLang="en-US" sz="1400" dirty="0">
+                <a:latin typeface="D2Coding" panose="020B0609020101020101" pitchFamily="49" charset="-127"/>
+                <a:ea typeface="D2Coding" panose="020B0609020101020101" pitchFamily="49" charset="-127"/>
+              </a:rPr>
+              <a:t>)): # 데이터 100개를 하나씩 순회</a:t>
+            </a:r>
+          </a:p>
+          <a:p>
+            <a:r>
+              <a:rPr lang="ko-KR" altLang="en-US" sz="1400" dirty="0">
+                <a:latin typeface="D2Coding" panose="020B0609020101020101" pitchFamily="49" charset="-127"/>
+                <a:ea typeface="D2Coding" panose="020B0609020101020101" pitchFamily="49" charset="-127"/>
+              </a:rPr>
+              <a:t>        </a:t>
+            </a:r>
+            <a:r>
+              <a:rPr lang="ko-KR" altLang="en-US" sz="1400" dirty="0" err="1">
+                <a:latin typeface="D2Coding" panose="020B0609020101020101" pitchFamily="49" charset="-127"/>
+                <a:ea typeface="D2Coding" panose="020B0609020101020101" pitchFamily="49" charset="-127"/>
+              </a:rPr>
+              <a:t>x_single</a:t>
+            </a:r>
+            <a:r>
+              <a:rPr lang="ko-KR" altLang="en-US" sz="1400" dirty="0">
+                <a:latin typeface="D2Coding" panose="020B0609020101020101" pitchFamily="49" charset="-127"/>
+                <a:ea typeface="D2Coding" panose="020B0609020101020101" pitchFamily="49" charset="-127"/>
+              </a:rPr>
+              <a:t> = </a:t>
+            </a:r>
+            <a:r>
+              <a:rPr lang="ko-KR" altLang="en-US" sz="1400" dirty="0" err="1">
+                <a:latin typeface="D2Coding" panose="020B0609020101020101" pitchFamily="49" charset="-127"/>
+                <a:ea typeface="D2Coding" panose="020B0609020101020101" pitchFamily="49" charset="-127"/>
+              </a:rPr>
+              <a:t>X</a:t>
+            </a:r>
+            <a:r>
+              <a:rPr lang="ko-KR" altLang="en-US" sz="1400" dirty="0">
+                <a:latin typeface="D2Coding" panose="020B0609020101020101" pitchFamily="49" charset="-127"/>
+                <a:ea typeface="D2Coding" panose="020B0609020101020101" pitchFamily="49" charset="-127"/>
+              </a:rPr>
+              <a:t>[</a:t>
+            </a:r>
+            <a:r>
+              <a:rPr lang="ko-KR" altLang="en-US" sz="1400" dirty="0" err="1">
+                <a:latin typeface="D2Coding" panose="020B0609020101020101" pitchFamily="49" charset="-127"/>
+                <a:ea typeface="D2Coding" panose="020B0609020101020101" pitchFamily="49" charset="-127"/>
+              </a:rPr>
+              <a:t>i</a:t>
+            </a:r>
+            <a:r>
+              <a:rPr lang="ko-KR" altLang="en-US" sz="1400" dirty="0">
+                <a:latin typeface="D2Coding" panose="020B0609020101020101" pitchFamily="49" charset="-127"/>
+                <a:ea typeface="D2Coding" panose="020B0609020101020101" pitchFamily="49" charset="-127"/>
+              </a:rPr>
+              <a:t>]     # 데이터 1개 추출</a:t>
+            </a:r>
+          </a:p>
+          <a:p>
+            <a:r>
+              <a:rPr lang="ko-KR" altLang="en-US" sz="1400" dirty="0">
+                <a:latin typeface="D2Coding" panose="020B0609020101020101" pitchFamily="49" charset="-127"/>
+                <a:ea typeface="D2Coding" panose="020B0609020101020101" pitchFamily="49" charset="-127"/>
+              </a:rPr>
+              <a:t>        </a:t>
+            </a:r>
+            <a:r>
+              <a:rPr lang="ko-KR" altLang="en-US" sz="1400" dirty="0" err="1">
+                <a:latin typeface="D2Coding" panose="020B0609020101020101" pitchFamily="49" charset="-127"/>
+                <a:ea typeface="D2Coding" panose="020B0609020101020101" pitchFamily="49" charset="-127"/>
+              </a:rPr>
+              <a:t>y_true_single</a:t>
+            </a:r>
+            <a:r>
+              <a:rPr lang="ko-KR" altLang="en-US" sz="1400" dirty="0">
+                <a:latin typeface="D2Coding" panose="020B0609020101020101" pitchFamily="49" charset="-127"/>
+                <a:ea typeface="D2Coding" panose="020B0609020101020101" pitchFamily="49" charset="-127"/>
+              </a:rPr>
+              <a:t> = </a:t>
+            </a:r>
+            <a:r>
+              <a:rPr lang="ko-KR" altLang="en-US" sz="1400" dirty="0" err="1">
+                <a:latin typeface="D2Coding" panose="020B0609020101020101" pitchFamily="49" charset="-127"/>
+                <a:ea typeface="D2Coding" panose="020B0609020101020101" pitchFamily="49" charset="-127"/>
+              </a:rPr>
+              <a:t>y_true</a:t>
+            </a:r>
+            <a:r>
+              <a:rPr lang="ko-KR" altLang="en-US" sz="1400" dirty="0">
+                <a:latin typeface="D2Coding" panose="020B0609020101020101" pitchFamily="49" charset="-127"/>
+                <a:ea typeface="D2Coding" panose="020B0609020101020101" pitchFamily="49" charset="-127"/>
+              </a:rPr>
+              <a:t>[</a:t>
+            </a:r>
+            <a:r>
+              <a:rPr lang="ko-KR" altLang="en-US" sz="1400" dirty="0" err="1">
+                <a:latin typeface="D2Coding" panose="020B0609020101020101" pitchFamily="49" charset="-127"/>
+                <a:ea typeface="D2Coding" panose="020B0609020101020101" pitchFamily="49" charset="-127"/>
+              </a:rPr>
+              <a:t>i</a:t>
+            </a:r>
+            <a:r>
+              <a:rPr lang="ko-KR" altLang="en-US" sz="1400" dirty="0">
+                <a:latin typeface="D2Coding" panose="020B0609020101020101" pitchFamily="49" charset="-127"/>
+                <a:ea typeface="D2Coding" panose="020B0609020101020101" pitchFamily="49" charset="-127"/>
+              </a:rPr>
+              <a:t>]</a:t>
+            </a:r>
+          </a:p>
+          <a:p>
+            <a:r>
+              <a:rPr lang="ko-KR" altLang="en-US" sz="1400" dirty="0">
+                <a:latin typeface="D2Coding" panose="020B0609020101020101" pitchFamily="49" charset="-127"/>
+                <a:ea typeface="D2Coding" panose="020B0609020101020101" pitchFamily="49" charset="-127"/>
+              </a:rPr>
+              <a:t>        </a:t>
+            </a:r>
+          </a:p>
+          <a:p>
+            <a:r>
+              <a:rPr lang="ko-KR" altLang="en-US" sz="1400" dirty="0">
+                <a:latin typeface="D2Coding" panose="020B0609020101020101" pitchFamily="49" charset="-127"/>
+                <a:ea typeface="D2Coding" panose="020B0609020101020101" pitchFamily="49" charset="-127"/>
+              </a:rPr>
+              <a:t>        </a:t>
+            </a:r>
+            <a:r>
+              <a:rPr lang="ko-KR" altLang="en-US" sz="1400" dirty="0" err="1">
+                <a:latin typeface="D2Coding" panose="020B0609020101020101" pitchFamily="49" charset="-127"/>
+                <a:ea typeface="D2Coding" panose="020B0609020101020101" pitchFamily="49" charset="-127"/>
+              </a:rPr>
+              <a:t>y_hat</a:t>
+            </a:r>
+            <a:r>
+              <a:rPr lang="ko-KR" altLang="en-US" sz="1400" dirty="0">
+                <a:latin typeface="D2Coding" panose="020B0609020101020101" pitchFamily="49" charset="-127"/>
+                <a:ea typeface="D2Coding" panose="020B0609020101020101" pitchFamily="49" charset="-127"/>
+              </a:rPr>
+              <a:t> = </a:t>
+            </a:r>
+            <a:r>
+              <a:rPr lang="ko-KR" altLang="en-US" sz="1400" dirty="0" err="1">
+                <a:latin typeface="D2Coding" panose="020B0609020101020101" pitchFamily="49" charset="-127"/>
+                <a:ea typeface="D2Coding" panose="020B0609020101020101" pitchFamily="49" charset="-127"/>
+              </a:rPr>
+              <a:t>x_single</a:t>
+            </a:r>
+            <a:r>
+              <a:rPr lang="ko-KR" altLang="en-US" sz="1400" dirty="0">
+                <a:latin typeface="D2Coding" panose="020B0609020101020101" pitchFamily="49" charset="-127"/>
+                <a:ea typeface="D2Coding" panose="020B0609020101020101" pitchFamily="49" charset="-127"/>
+              </a:rPr>
+              <a:t> @ </a:t>
+            </a:r>
+            <a:r>
+              <a:rPr lang="ko-KR" altLang="en-US" sz="1400" dirty="0" err="1">
+                <a:latin typeface="D2Coding" panose="020B0609020101020101" pitchFamily="49" charset="-127"/>
+                <a:ea typeface="D2Coding" panose="020B0609020101020101" pitchFamily="49" charset="-127"/>
+              </a:rPr>
+              <a:t>W</a:t>
+            </a:r>
+            <a:r>
+              <a:rPr lang="ko-KR" altLang="en-US" sz="1400" dirty="0">
+                <a:latin typeface="D2Coding" panose="020B0609020101020101" pitchFamily="49" charset="-127"/>
+                <a:ea typeface="D2Coding" panose="020B0609020101020101" pitchFamily="49" charset="-127"/>
+              </a:rPr>
+              <a:t> + </a:t>
+            </a:r>
+            <a:r>
+              <a:rPr lang="ko-KR" altLang="en-US" sz="1400" dirty="0" err="1">
+                <a:latin typeface="D2Coding" panose="020B0609020101020101" pitchFamily="49" charset="-127"/>
+                <a:ea typeface="D2Coding" panose="020B0609020101020101" pitchFamily="49" charset="-127"/>
+              </a:rPr>
+              <a:t>b</a:t>
+            </a:r>
+            <a:r>
+              <a:rPr lang="ko-KR" altLang="en-US" sz="1400" dirty="0">
+                <a:latin typeface="D2Coding" panose="020B0609020101020101" pitchFamily="49" charset="-127"/>
+                <a:ea typeface="D2Coding" panose="020B0609020101020101" pitchFamily="49" charset="-127"/>
+              </a:rPr>
+              <a:t>  # 1개만 예측</a:t>
+            </a:r>
+          </a:p>
+          <a:p>
+            <a:r>
+              <a:rPr lang="ko-KR" altLang="en-US" sz="1400" dirty="0">
+                <a:latin typeface="D2Coding" panose="020B0609020101020101" pitchFamily="49" charset="-127"/>
+                <a:ea typeface="D2Coding" panose="020B0609020101020101" pitchFamily="49" charset="-127"/>
+              </a:rPr>
+              <a:t>        </a:t>
+            </a:r>
+            <a:r>
+              <a:rPr lang="ko-KR" altLang="en-US" sz="1400" dirty="0" err="1">
+                <a:latin typeface="D2Coding" panose="020B0609020101020101" pitchFamily="49" charset="-127"/>
+                <a:ea typeface="D2Coding" panose="020B0609020101020101" pitchFamily="49" charset="-127"/>
+              </a:rPr>
+              <a:t>loss</a:t>
+            </a:r>
+            <a:r>
+              <a:rPr lang="ko-KR" altLang="en-US" sz="1400" dirty="0">
+                <a:latin typeface="D2Coding" panose="020B0609020101020101" pitchFamily="49" charset="-127"/>
+                <a:ea typeface="D2Coding" panose="020B0609020101020101" pitchFamily="49" charset="-127"/>
+              </a:rPr>
+              <a:t> = (</a:t>
+            </a:r>
+            <a:r>
+              <a:rPr lang="ko-KR" altLang="en-US" sz="1400" dirty="0" err="1">
+                <a:latin typeface="D2Coding" panose="020B0609020101020101" pitchFamily="49" charset="-127"/>
+                <a:ea typeface="D2Coding" panose="020B0609020101020101" pitchFamily="49" charset="-127"/>
+              </a:rPr>
+              <a:t>y_hat</a:t>
+            </a:r>
+            <a:r>
+              <a:rPr lang="ko-KR" altLang="en-US" sz="1400" dirty="0">
+                <a:latin typeface="D2Coding" panose="020B0609020101020101" pitchFamily="49" charset="-127"/>
+                <a:ea typeface="D2Coding" panose="020B0609020101020101" pitchFamily="49" charset="-127"/>
+              </a:rPr>
+              <a:t> - </a:t>
+            </a:r>
+            <a:r>
+              <a:rPr lang="ko-KR" altLang="en-US" sz="1400" dirty="0" err="1">
+                <a:latin typeface="D2Coding" panose="020B0609020101020101" pitchFamily="49" charset="-127"/>
+                <a:ea typeface="D2Coding" panose="020B0609020101020101" pitchFamily="49" charset="-127"/>
+              </a:rPr>
+              <a:t>y_true_single</a:t>
+            </a:r>
+            <a:r>
+              <a:rPr lang="ko-KR" altLang="en-US" sz="1400" dirty="0">
+                <a:latin typeface="D2Coding" panose="020B0609020101020101" pitchFamily="49" charset="-127"/>
+                <a:ea typeface="D2Coding" panose="020B0609020101020101" pitchFamily="49" charset="-127"/>
+              </a:rPr>
+              <a:t>)**2 # 1개의 오차</a:t>
+            </a:r>
+          </a:p>
+          <a:p>
+            <a:r>
+              <a:rPr lang="ko-KR" altLang="en-US" sz="1400" dirty="0">
+                <a:latin typeface="D2Coding" panose="020B0609020101020101" pitchFamily="49" charset="-127"/>
+                <a:ea typeface="D2Coding" panose="020B0609020101020101" pitchFamily="49" charset="-127"/>
+              </a:rPr>
+              <a:t>        </a:t>
+            </a:r>
+          </a:p>
+          <a:p>
+            <a:r>
+              <a:rPr lang="ko-KR" altLang="en-US" sz="1400" dirty="0">
+                <a:latin typeface="D2Coding" panose="020B0609020101020101" pitchFamily="49" charset="-127"/>
+                <a:ea typeface="D2Coding" panose="020B0609020101020101" pitchFamily="49" charset="-127"/>
+              </a:rPr>
+              <a:t>        </a:t>
+            </a:r>
+            <a:r>
+              <a:rPr lang="ko-KR" altLang="en-US" sz="1400" dirty="0" err="1">
+                <a:latin typeface="D2Coding" panose="020B0609020101020101" pitchFamily="49" charset="-127"/>
+                <a:ea typeface="D2Coding" panose="020B0609020101020101" pitchFamily="49" charset="-127"/>
+              </a:rPr>
+              <a:t>loss.backward</a:t>
+            </a:r>
+            <a:r>
+              <a:rPr lang="ko-KR" altLang="en-US" sz="1400" dirty="0">
+                <a:latin typeface="D2Coding" panose="020B0609020101020101" pitchFamily="49" charset="-127"/>
+                <a:ea typeface="D2Coding" panose="020B0609020101020101" pitchFamily="49" charset="-127"/>
+              </a:rPr>
+              <a:t>()</a:t>
+            </a:r>
+          </a:p>
+          <a:p>
+            <a:r>
+              <a:rPr lang="ko-KR" altLang="en-US" sz="1400" dirty="0">
+                <a:latin typeface="D2Coding" panose="020B0609020101020101" pitchFamily="49" charset="-127"/>
+                <a:ea typeface="D2Coding" panose="020B0609020101020101" pitchFamily="49" charset="-127"/>
+              </a:rPr>
+              <a:t>        </a:t>
+            </a:r>
+            <a:r>
+              <a:rPr lang="ko-KR" altLang="en-US" sz="1400" dirty="0" err="1">
+                <a:latin typeface="D2Coding" panose="020B0609020101020101" pitchFamily="49" charset="-127"/>
+                <a:ea typeface="D2Coding" panose="020B0609020101020101" pitchFamily="49" charset="-127"/>
+              </a:rPr>
+              <a:t>with</a:t>
+            </a:r>
+            <a:r>
+              <a:rPr lang="ko-KR" altLang="en-US" sz="1400" dirty="0">
+                <a:latin typeface="D2Coding" panose="020B0609020101020101" pitchFamily="49" charset="-127"/>
+                <a:ea typeface="D2Coding" panose="020B0609020101020101" pitchFamily="49" charset="-127"/>
+              </a:rPr>
+              <a:t> </a:t>
+            </a:r>
+            <a:r>
+              <a:rPr lang="ko-KR" altLang="en-US" sz="1400" dirty="0" err="1">
+                <a:latin typeface="D2Coding" panose="020B0609020101020101" pitchFamily="49" charset="-127"/>
+                <a:ea typeface="D2Coding" panose="020B0609020101020101" pitchFamily="49" charset="-127"/>
+              </a:rPr>
+              <a:t>torch.no_grad</a:t>
+            </a:r>
+            <a:r>
+              <a:rPr lang="ko-KR" altLang="en-US" sz="1400" dirty="0">
+                <a:latin typeface="D2Coding" panose="020B0609020101020101" pitchFamily="49" charset="-127"/>
+                <a:ea typeface="D2Coding" panose="020B0609020101020101" pitchFamily="49" charset="-127"/>
+              </a:rPr>
+              <a:t>():</a:t>
+            </a:r>
+          </a:p>
+          <a:p>
+            <a:r>
+              <a:rPr lang="ko-KR" altLang="en-US" sz="1400" dirty="0">
+                <a:latin typeface="D2Coding" panose="020B0609020101020101" pitchFamily="49" charset="-127"/>
+                <a:ea typeface="D2Coding" panose="020B0609020101020101" pitchFamily="49" charset="-127"/>
+              </a:rPr>
+              <a:t>            </a:t>
+            </a:r>
+            <a:r>
+              <a:rPr lang="ko-KR" altLang="en-US" sz="1400" dirty="0" err="1">
+                <a:latin typeface="D2Coding" panose="020B0609020101020101" pitchFamily="49" charset="-127"/>
+                <a:ea typeface="D2Coding" panose="020B0609020101020101" pitchFamily="49" charset="-127"/>
+              </a:rPr>
+              <a:t>W</a:t>
+            </a:r>
+            <a:r>
+              <a:rPr lang="ko-KR" altLang="en-US" sz="1400" dirty="0">
+                <a:latin typeface="D2Coding" panose="020B0609020101020101" pitchFamily="49" charset="-127"/>
+                <a:ea typeface="D2Coding" panose="020B0609020101020101" pitchFamily="49" charset="-127"/>
+              </a:rPr>
+              <a:t> -= </a:t>
+            </a:r>
+            <a:r>
+              <a:rPr lang="ko-KR" altLang="en-US" sz="1400" dirty="0" err="1">
+                <a:latin typeface="D2Coding" panose="020B0609020101020101" pitchFamily="49" charset="-127"/>
+                <a:ea typeface="D2Coding" panose="020B0609020101020101" pitchFamily="49" charset="-127"/>
+              </a:rPr>
+              <a:t>learning_rate</a:t>
+            </a:r>
+            <a:r>
+              <a:rPr lang="ko-KR" altLang="en-US" sz="1400" dirty="0">
+                <a:latin typeface="D2Coding" panose="020B0609020101020101" pitchFamily="49" charset="-127"/>
+                <a:ea typeface="D2Coding" panose="020B0609020101020101" pitchFamily="49" charset="-127"/>
+              </a:rPr>
+              <a:t> * </a:t>
+            </a:r>
+            <a:r>
+              <a:rPr lang="ko-KR" altLang="en-US" sz="1400" dirty="0" err="1">
+                <a:latin typeface="D2Coding" panose="020B0609020101020101" pitchFamily="49" charset="-127"/>
+                <a:ea typeface="D2Coding" panose="020B0609020101020101" pitchFamily="49" charset="-127"/>
+              </a:rPr>
+              <a:t>W.grad</a:t>
+            </a:r>
+            <a:endParaRPr lang="ko-KR" altLang="en-US" sz="1400" dirty="0">
+              <a:latin typeface="D2Coding" panose="020B0609020101020101" pitchFamily="49" charset="-127"/>
+              <a:ea typeface="D2Coding" panose="020B0609020101020101" pitchFamily="49" charset="-127"/>
+            </a:endParaRPr>
+          </a:p>
+          <a:p>
+            <a:r>
+              <a:rPr lang="ko-KR" altLang="en-US" sz="1400" dirty="0">
+                <a:latin typeface="D2Coding" panose="020B0609020101020101" pitchFamily="49" charset="-127"/>
+                <a:ea typeface="D2Coding" panose="020B0609020101020101" pitchFamily="49" charset="-127"/>
+              </a:rPr>
+              <a:t>            ...</a:t>
+            </a:r>
+          </a:p>
+        </p:txBody>
+      </p:sp>
+      <p:sp>
+        <p:nvSpPr>
+          <p:cNvPr id="18" name="TextBox 17">
+            <a:extLst>
+              <a:ext uri="{FF2B5EF4-FFF2-40B4-BE49-F238E27FC236}">
+                <a16:creationId xmlns:a16="http://schemas.microsoft.com/office/drawing/2014/main" id="{DB6844F7-DF49-397A-9B28-18CA92B157B2}"/>
+              </a:ext>
+            </a:extLst>
+          </p:cNvPr>
+          <p:cNvSpPr txBox="1"/>
+          <p:nvPr/>
+        </p:nvSpPr>
+        <p:spPr>
+          <a:xfrm>
+            <a:off x="690288" y="2648679"/>
+            <a:ext cx="5457825" cy="2677656"/>
+          </a:xfrm>
+          <a:prstGeom prst="rect">
+            <a:avLst/>
+          </a:prstGeom>
+          <a:solidFill>
+            <a:srgbClr val="76E3FF"/>
+          </a:solidFill>
+        </p:spPr>
+        <p:txBody>
+          <a:bodyPr wrap="square">
+            <a:spAutoFit/>
+          </a:bodyPr>
+          <a:lstStyle/>
+          <a:p>
+            <a:r>
+              <a:rPr lang="ko-KR" altLang="en-US" sz="1400" dirty="0" err="1">
+                <a:latin typeface="D2Coding" panose="020B0609020101020101" pitchFamily="49" charset="-127"/>
+                <a:ea typeface="D2Coding" panose="020B0609020101020101" pitchFamily="49" charset="-127"/>
+              </a:rPr>
+              <a:t>for</a:t>
+            </a:r>
+            <a:r>
+              <a:rPr lang="ko-KR" altLang="en-US" sz="1400" dirty="0">
+                <a:latin typeface="D2Coding" panose="020B0609020101020101" pitchFamily="49" charset="-127"/>
+                <a:ea typeface="D2Coding" panose="020B0609020101020101" pitchFamily="49" charset="-127"/>
+              </a:rPr>
+              <a:t> </a:t>
+            </a:r>
+            <a:r>
+              <a:rPr lang="ko-KR" altLang="en-US" sz="1400" dirty="0" err="1">
+                <a:latin typeface="D2Coding" panose="020B0609020101020101" pitchFamily="49" charset="-127"/>
+                <a:ea typeface="D2Coding" panose="020B0609020101020101" pitchFamily="49" charset="-127"/>
+              </a:rPr>
+              <a:t>epoch</a:t>
+            </a:r>
+            <a:r>
+              <a:rPr lang="ko-KR" altLang="en-US" sz="1400" dirty="0">
+                <a:latin typeface="D2Coding" panose="020B0609020101020101" pitchFamily="49" charset="-127"/>
+                <a:ea typeface="D2Coding" panose="020B0609020101020101" pitchFamily="49" charset="-127"/>
+              </a:rPr>
+              <a:t> </a:t>
+            </a:r>
+            <a:r>
+              <a:rPr lang="ko-KR" altLang="en-US" sz="1400" dirty="0" err="1">
+                <a:latin typeface="D2Coding" panose="020B0609020101020101" pitchFamily="49" charset="-127"/>
+                <a:ea typeface="D2Coding" panose="020B0609020101020101" pitchFamily="49" charset="-127"/>
+              </a:rPr>
+              <a:t>in</a:t>
+            </a:r>
+            <a:r>
+              <a:rPr lang="ko-KR" altLang="en-US" sz="1400" dirty="0">
+                <a:latin typeface="D2Coding" panose="020B0609020101020101" pitchFamily="49" charset="-127"/>
+                <a:ea typeface="D2Coding" panose="020B0609020101020101" pitchFamily="49" charset="-127"/>
+              </a:rPr>
+              <a:t> </a:t>
+            </a:r>
+            <a:r>
+              <a:rPr lang="ko-KR" altLang="en-US" sz="1400" dirty="0" err="1">
+                <a:latin typeface="D2Coding" panose="020B0609020101020101" pitchFamily="49" charset="-127"/>
+                <a:ea typeface="D2Coding" panose="020B0609020101020101" pitchFamily="49" charset="-127"/>
+              </a:rPr>
+              <a:t>range</a:t>
+            </a:r>
+            <a:r>
+              <a:rPr lang="ko-KR" altLang="en-US" sz="1400" dirty="0">
+                <a:latin typeface="D2Coding" panose="020B0609020101020101" pitchFamily="49" charset="-127"/>
+                <a:ea typeface="D2Coding" panose="020B0609020101020101" pitchFamily="49" charset="-127"/>
+              </a:rPr>
+              <a:t>(</a:t>
+            </a:r>
+            <a:r>
+              <a:rPr lang="ko-KR" altLang="en-US" sz="1400" dirty="0" err="1">
+                <a:latin typeface="D2Coding" panose="020B0609020101020101" pitchFamily="49" charset="-127"/>
+                <a:ea typeface="D2Coding" panose="020B0609020101020101" pitchFamily="49" charset="-127"/>
+              </a:rPr>
+              <a:t>epochs</a:t>
+            </a:r>
+            <a:r>
+              <a:rPr lang="ko-KR" altLang="en-US" sz="1400" dirty="0">
+                <a:latin typeface="D2Coding" panose="020B0609020101020101" pitchFamily="49" charset="-127"/>
+                <a:ea typeface="D2Coding" panose="020B0609020101020101" pitchFamily="49" charset="-127"/>
+              </a:rPr>
+              <a:t>):</a:t>
+            </a:r>
+          </a:p>
+          <a:p>
+            <a:r>
+              <a:rPr lang="ko-KR" altLang="en-US" sz="1400" dirty="0">
+                <a:latin typeface="D2Coding" panose="020B0609020101020101" pitchFamily="49" charset="-127"/>
+                <a:ea typeface="D2Coding" panose="020B0609020101020101" pitchFamily="49" charset="-127"/>
+              </a:rPr>
+              <a:t>    # </a:t>
+            </a:r>
+            <a:r>
+              <a:rPr lang="ko-KR" altLang="en-US" sz="1400" dirty="0" err="1">
+                <a:latin typeface="D2Coding" panose="020B0609020101020101" pitchFamily="49" charset="-127"/>
+                <a:ea typeface="D2Coding" panose="020B0609020101020101" pitchFamily="49" charset="-127"/>
+              </a:rPr>
+              <a:t>Forward</a:t>
+            </a:r>
+            <a:r>
+              <a:rPr lang="ko-KR" altLang="en-US" sz="1400" dirty="0">
+                <a:latin typeface="D2Coding" panose="020B0609020101020101" pitchFamily="49" charset="-127"/>
+                <a:ea typeface="D2Coding" panose="020B0609020101020101" pitchFamily="49" charset="-127"/>
+              </a:rPr>
+              <a:t> </a:t>
+            </a:r>
+            <a:r>
+              <a:rPr lang="ko-KR" altLang="en-US" sz="1400" dirty="0" err="1">
+                <a:latin typeface="D2Coding" panose="020B0609020101020101" pitchFamily="49" charset="-127"/>
+                <a:ea typeface="D2Coding" panose="020B0609020101020101" pitchFamily="49" charset="-127"/>
+              </a:rPr>
+              <a:t>pass</a:t>
+            </a:r>
+            <a:r>
+              <a:rPr lang="ko-KR" altLang="en-US" sz="1400" dirty="0">
+                <a:latin typeface="D2Coding" panose="020B0609020101020101" pitchFamily="49" charset="-127"/>
+                <a:ea typeface="D2Coding" panose="020B0609020101020101" pitchFamily="49" charset="-127"/>
+              </a:rPr>
+              <a:t> and </a:t>
+            </a:r>
+            <a:r>
+              <a:rPr lang="ko-KR" altLang="en-US" sz="1400" dirty="0" err="1">
+                <a:latin typeface="D2Coding" panose="020B0609020101020101" pitchFamily="49" charset="-127"/>
+                <a:ea typeface="D2Coding" panose="020B0609020101020101" pitchFamily="49" charset="-127"/>
+              </a:rPr>
+              <a:t>loss</a:t>
+            </a:r>
+            <a:endParaRPr lang="ko-KR" altLang="en-US" sz="1400" dirty="0">
+              <a:latin typeface="D2Coding" panose="020B0609020101020101" pitchFamily="49" charset="-127"/>
+              <a:ea typeface="D2Coding" panose="020B0609020101020101" pitchFamily="49" charset="-127"/>
+            </a:endParaRPr>
+          </a:p>
+          <a:p>
+            <a:r>
+              <a:rPr lang="ko-KR" altLang="en-US" sz="1400" dirty="0">
+                <a:latin typeface="D2Coding" panose="020B0609020101020101" pitchFamily="49" charset="-127"/>
+                <a:ea typeface="D2Coding" panose="020B0609020101020101" pitchFamily="49" charset="-127"/>
+              </a:rPr>
+              <a:t>    </a:t>
+            </a:r>
+            <a:r>
+              <a:rPr lang="ko-KR" altLang="en-US" sz="1400" dirty="0" err="1">
+                <a:latin typeface="D2Coding" panose="020B0609020101020101" pitchFamily="49" charset="-127"/>
+                <a:ea typeface="D2Coding" panose="020B0609020101020101" pitchFamily="49" charset="-127"/>
+              </a:rPr>
+              <a:t>y_hat</a:t>
+            </a:r>
+            <a:r>
+              <a:rPr lang="ko-KR" altLang="en-US" sz="1400" dirty="0">
+                <a:latin typeface="D2Coding" panose="020B0609020101020101" pitchFamily="49" charset="-127"/>
+                <a:ea typeface="D2Coding" panose="020B0609020101020101" pitchFamily="49" charset="-127"/>
+              </a:rPr>
+              <a:t> = </a:t>
+            </a:r>
+            <a:r>
+              <a:rPr lang="ko-KR" altLang="en-US" sz="1400" dirty="0" err="1">
+                <a:latin typeface="D2Coding" panose="020B0609020101020101" pitchFamily="49" charset="-127"/>
+                <a:ea typeface="D2Coding" panose="020B0609020101020101" pitchFamily="49" charset="-127"/>
+              </a:rPr>
+              <a:t>X</a:t>
+            </a:r>
+            <a:r>
+              <a:rPr lang="ko-KR" altLang="en-US" sz="1400" dirty="0">
+                <a:latin typeface="D2Coding" panose="020B0609020101020101" pitchFamily="49" charset="-127"/>
+                <a:ea typeface="D2Coding" panose="020B0609020101020101" pitchFamily="49" charset="-127"/>
+              </a:rPr>
+              <a:t> @ </a:t>
+            </a:r>
+            <a:r>
+              <a:rPr lang="ko-KR" altLang="en-US" sz="1400" dirty="0" err="1">
+                <a:latin typeface="D2Coding" panose="020B0609020101020101" pitchFamily="49" charset="-127"/>
+                <a:ea typeface="D2Coding" panose="020B0609020101020101" pitchFamily="49" charset="-127"/>
+              </a:rPr>
+              <a:t>W</a:t>
+            </a:r>
+            <a:r>
+              <a:rPr lang="ko-KR" altLang="en-US" sz="1400" dirty="0">
+                <a:latin typeface="D2Coding" panose="020B0609020101020101" pitchFamily="49" charset="-127"/>
+                <a:ea typeface="D2Coding" panose="020B0609020101020101" pitchFamily="49" charset="-127"/>
+              </a:rPr>
+              <a:t> + </a:t>
+            </a:r>
+            <a:r>
+              <a:rPr lang="ko-KR" altLang="en-US" sz="1400" dirty="0" err="1">
+                <a:latin typeface="D2Coding" panose="020B0609020101020101" pitchFamily="49" charset="-127"/>
+                <a:ea typeface="D2Coding" panose="020B0609020101020101" pitchFamily="49" charset="-127"/>
+              </a:rPr>
+              <a:t>b</a:t>
+            </a:r>
+            <a:endParaRPr lang="ko-KR" altLang="en-US" sz="1400" dirty="0">
+              <a:latin typeface="D2Coding" panose="020B0609020101020101" pitchFamily="49" charset="-127"/>
+              <a:ea typeface="D2Coding" panose="020B0609020101020101" pitchFamily="49" charset="-127"/>
+            </a:endParaRPr>
+          </a:p>
+          <a:p>
+            <a:r>
+              <a:rPr lang="ko-KR" altLang="en-US" sz="1400" dirty="0">
+                <a:latin typeface="D2Coding" panose="020B0609020101020101" pitchFamily="49" charset="-127"/>
+                <a:ea typeface="D2Coding" panose="020B0609020101020101" pitchFamily="49" charset="-127"/>
+              </a:rPr>
+              <a:t>    </a:t>
+            </a:r>
+            <a:r>
+              <a:rPr lang="ko-KR" altLang="en-US" sz="1400" dirty="0" err="1">
+                <a:latin typeface="D2Coding" panose="020B0609020101020101" pitchFamily="49" charset="-127"/>
+                <a:ea typeface="D2Coding" panose="020B0609020101020101" pitchFamily="49" charset="-127"/>
+              </a:rPr>
+              <a:t>loss</a:t>
+            </a:r>
+            <a:r>
+              <a:rPr lang="ko-KR" altLang="en-US" sz="1400" dirty="0">
+                <a:latin typeface="D2Coding" panose="020B0609020101020101" pitchFamily="49" charset="-127"/>
+                <a:ea typeface="D2Coding" panose="020B0609020101020101" pitchFamily="49" charset="-127"/>
+              </a:rPr>
+              <a:t> = </a:t>
+            </a:r>
+            <a:r>
+              <a:rPr lang="ko-KR" altLang="en-US" sz="1400" dirty="0" err="1">
+                <a:latin typeface="D2Coding" panose="020B0609020101020101" pitchFamily="49" charset="-127"/>
+                <a:ea typeface="D2Coding" panose="020B0609020101020101" pitchFamily="49" charset="-127"/>
+              </a:rPr>
+              <a:t>torch.mean</a:t>
+            </a:r>
+            <a:r>
+              <a:rPr lang="ko-KR" altLang="en-US" sz="1400" dirty="0">
+                <a:latin typeface="D2Coding" panose="020B0609020101020101" pitchFamily="49" charset="-127"/>
+                <a:ea typeface="D2Coding" panose="020B0609020101020101" pitchFamily="49" charset="-127"/>
+              </a:rPr>
+              <a:t>((</a:t>
+            </a:r>
+            <a:r>
+              <a:rPr lang="ko-KR" altLang="en-US" sz="1400" dirty="0" err="1">
+                <a:latin typeface="D2Coding" panose="020B0609020101020101" pitchFamily="49" charset="-127"/>
+                <a:ea typeface="D2Coding" panose="020B0609020101020101" pitchFamily="49" charset="-127"/>
+              </a:rPr>
+              <a:t>y_hat</a:t>
+            </a:r>
+            <a:r>
+              <a:rPr lang="ko-KR" altLang="en-US" sz="1400" dirty="0">
+                <a:latin typeface="D2Coding" panose="020B0609020101020101" pitchFamily="49" charset="-127"/>
+                <a:ea typeface="D2Coding" panose="020B0609020101020101" pitchFamily="49" charset="-127"/>
+              </a:rPr>
+              <a:t> - </a:t>
+            </a:r>
+            <a:r>
+              <a:rPr lang="ko-KR" altLang="en-US" sz="1400" dirty="0" err="1">
+                <a:latin typeface="D2Coding" panose="020B0609020101020101" pitchFamily="49" charset="-127"/>
+                <a:ea typeface="D2Coding" panose="020B0609020101020101" pitchFamily="49" charset="-127"/>
+              </a:rPr>
+              <a:t>y_true</a:t>
+            </a:r>
+            <a:r>
+              <a:rPr lang="ko-KR" altLang="en-US" sz="1400" dirty="0">
+                <a:latin typeface="D2Coding" panose="020B0609020101020101" pitchFamily="49" charset="-127"/>
+                <a:ea typeface="D2Coding" panose="020B0609020101020101" pitchFamily="49" charset="-127"/>
+              </a:rPr>
+              <a:t>)**2)</a:t>
+            </a:r>
+          </a:p>
+          <a:p>
+            <a:r>
+              <a:rPr lang="ko-KR" altLang="en-US" sz="1400" dirty="0">
+                <a:latin typeface="D2Coding" panose="020B0609020101020101" pitchFamily="49" charset="-127"/>
+                <a:ea typeface="D2Coding" panose="020B0609020101020101" pitchFamily="49" charset="-127"/>
+              </a:rPr>
+              <a:t>    </a:t>
+            </a:r>
+          </a:p>
+          <a:p>
+            <a:r>
+              <a:rPr lang="ko-KR" altLang="en-US" sz="1400" dirty="0">
+                <a:latin typeface="D2Coding" panose="020B0609020101020101" pitchFamily="49" charset="-127"/>
+                <a:ea typeface="D2Coding" panose="020B0609020101020101" pitchFamily="49" charset="-127"/>
+              </a:rPr>
+              <a:t>    # </a:t>
+            </a:r>
+            <a:r>
+              <a:rPr lang="ko-KR" altLang="en-US" sz="1400" dirty="0" err="1">
+                <a:latin typeface="D2Coding" panose="020B0609020101020101" pitchFamily="49" charset="-127"/>
+                <a:ea typeface="D2Coding" panose="020B0609020101020101" pitchFamily="49" charset="-127"/>
+              </a:rPr>
+              <a:t>Backward</a:t>
+            </a:r>
+            <a:r>
+              <a:rPr lang="ko-KR" altLang="en-US" sz="1400" dirty="0">
+                <a:latin typeface="D2Coding" panose="020B0609020101020101" pitchFamily="49" charset="-127"/>
+                <a:ea typeface="D2Coding" panose="020B0609020101020101" pitchFamily="49" charset="-127"/>
+              </a:rPr>
+              <a:t> </a:t>
+            </a:r>
+            <a:r>
+              <a:rPr lang="ko-KR" altLang="en-US" sz="1400" dirty="0" err="1">
+                <a:latin typeface="D2Coding" panose="020B0609020101020101" pitchFamily="49" charset="-127"/>
+                <a:ea typeface="D2Coding" panose="020B0609020101020101" pitchFamily="49" charset="-127"/>
+              </a:rPr>
+              <a:t>pass</a:t>
+            </a:r>
+            <a:endParaRPr lang="ko-KR" altLang="en-US" sz="1400" dirty="0">
+              <a:latin typeface="D2Coding" panose="020B0609020101020101" pitchFamily="49" charset="-127"/>
+              <a:ea typeface="D2Coding" panose="020B0609020101020101" pitchFamily="49" charset="-127"/>
+            </a:endParaRPr>
+          </a:p>
+          <a:p>
+            <a:r>
+              <a:rPr lang="ko-KR" altLang="en-US" sz="1400" dirty="0">
+                <a:latin typeface="D2Coding" panose="020B0609020101020101" pitchFamily="49" charset="-127"/>
+                <a:ea typeface="D2Coding" panose="020B0609020101020101" pitchFamily="49" charset="-127"/>
+              </a:rPr>
+              <a:t>    </a:t>
+            </a:r>
+            <a:r>
+              <a:rPr lang="ko-KR" altLang="en-US" sz="1400" dirty="0" err="1">
+                <a:latin typeface="D2Coding" panose="020B0609020101020101" pitchFamily="49" charset="-127"/>
+                <a:ea typeface="D2Coding" panose="020B0609020101020101" pitchFamily="49" charset="-127"/>
+              </a:rPr>
+              <a:t>loss.backward</a:t>
+            </a:r>
+            <a:r>
+              <a:rPr lang="ko-KR" altLang="en-US" sz="1400" dirty="0">
+                <a:latin typeface="D2Coding" panose="020B0609020101020101" pitchFamily="49" charset="-127"/>
+                <a:ea typeface="D2Coding" panose="020B0609020101020101" pitchFamily="49" charset="-127"/>
+              </a:rPr>
+              <a:t>()</a:t>
+            </a:r>
+          </a:p>
+          <a:p>
+            <a:r>
+              <a:rPr lang="ko-KR" altLang="en-US" sz="1400" dirty="0">
+                <a:latin typeface="D2Coding" panose="020B0609020101020101" pitchFamily="49" charset="-127"/>
+                <a:ea typeface="D2Coding" panose="020B0609020101020101" pitchFamily="49" charset="-127"/>
+              </a:rPr>
+              <a:t>    </a:t>
+            </a:r>
+          </a:p>
+          <a:p>
+            <a:r>
+              <a:rPr lang="ko-KR" altLang="en-US" sz="1400" dirty="0">
+                <a:latin typeface="D2Coding" panose="020B0609020101020101" pitchFamily="49" charset="-127"/>
+                <a:ea typeface="D2Coding" panose="020B0609020101020101" pitchFamily="49" charset="-127"/>
+              </a:rPr>
+              <a:t>    # </a:t>
+            </a:r>
+            <a:r>
+              <a:rPr lang="ko-KR" altLang="en-US" sz="1400" dirty="0" err="1">
+                <a:latin typeface="D2Coding" panose="020B0609020101020101" pitchFamily="49" charset="-127"/>
+                <a:ea typeface="D2Coding" panose="020B0609020101020101" pitchFamily="49" charset="-127"/>
+              </a:rPr>
+              <a:t>Update</a:t>
+            </a:r>
+            <a:r>
+              <a:rPr lang="ko-KR" altLang="en-US" sz="1400" dirty="0">
+                <a:latin typeface="D2Coding" panose="020B0609020101020101" pitchFamily="49" charset="-127"/>
+                <a:ea typeface="D2Coding" panose="020B0609020101020101" pitchFamily="49" charset="-127"/>
+              </a:rPr>
+              <a:t> </a:t>
+            </a:r>
+            <a:r>
+              <a:rPr lang="ko-KR" altLang="en-US" sz="1400" dirty="0" err="1">
+                <a:latin typeface="D2Coding" panose="020B0609020101020101" pitchFamily="49" charset="-127"/>
+                <a:ea typeface="D2Coding" panose="020B0609020101020101" pitchFamily="49" charset="-127"/>
+              </a:rPr>
+              <a:t>parameters</a:t>
+            </a:r>
+            <a:endParaRPr lang="ko-KR" altLang="en-US" sz="1400" dirty="0">
+              <a:latin typeface="D2Coding" panose="020B0609020101020101" pitchFamily="49" charset="-127"/>
+              <a:ea typeface="D2Coding" panose="020B0609020101020101" pitchFamily="49" charset="-127"/>
+            </a:endParaRPr>
+          </a:p>
+          <a:p>
+            <a:r>
+              <a:rPr lang="ko-KR" altLang="en-US" sz="1400" dirty="0">
+                <a:latin typeface="D2Coding" panose="020B0609020101020101" pitchFamily="49" charset="-127"/>
+                <a:ea typeface="D2Coding" panose="020B0609020101020101" pitchFamily="49" charset="-127"/>
+              </a:rPr>
+              <a:t>    </a:t>
+            </a:r>
+            <a:r>
+              <a:rPr lang="ko-KR" altLang="en-US" sz="1400" dirty="0" err="1">
+                <a:latin typeface="D2Coding" panose="020B0609020101020101" pitchFamily="49" charset="-127"/>
+                <a:ea typeface="D2Coding" panose="020B0609020101020101" pitchFamily="49" charset="-127"/>
+              </a:rPr>
+              <a:t>with</a:t>
+            </a:r>
+            <a:r>
+              <a:rPr lang="ko-KR" altLang="en-US" sz="1400" dirty="0">
+                <a:latin typeface="D2Coding" panose="020B0609020101020101" pitchFamily="49" charset="-127"/>
+                <a:ea typeface="D2Coding" panose="020B0609020101020101" pitchFamily="49" charset="-127"/>
+              </a:rPr>
+              <a:t> </a:t>
+            </a:r>
+            <a:r>
+              <a:rPr lang="ko-KR" altLang="en-US" sz="1400" dirty="0" err="1">
+                <a:latin typeface="D2Coding" panose="020B0609020101020101" pitchFamily="49" charset="-127"/>
+                <a:ea typeface="D2Coding" panose="020B0609020101020101" pitchFamily="49" charset="-127"/>
+              </a:rPr>
+              <a:t>torch.no_grad</a:t>
+            </a:r>
+            <a:r>
+              <a:rPr lang="ko-KR" altLang="en-US" sz="1400" dirty="0">
+                <a:latin typeface="D2Coding" panose="020B0609020101020101" pitchFamily="49" charset="-127"/>
+                <a:ea typeface="D2Coding" panose="020B0609020101020101" pitchFamily="49" charset="-127"/>
+              </a:rPr>
+              <a:t>():</a:t>
+            </a:r>
+          </a:p>
+          <a:p>
+            <a:r>
+              <a:rPr lang="ko-KR" altLang="en-US" sz="1400" dirty="0">
+                <a:latin typeface="D2Coding" panose="020B0609020101020101" pitchFamily="49" charset="-127"/>
+                <a:ea typeface="D2Coding" panose="020B0609020101020101" pitchFamily="49" charset="-127"/>
+              </a:rPr>
+              <a:t>        </a:t>
+            </a:r>
+            <a:r>
+              <a:rPr lang="ko-KR" altLang="en-US" sz="1400" dirty="0" err="1">
+                <a:latin typeface="D2Coding" panose="020B0609020101020101" pitchFamily="49" charset="-127"/>
+                <a:ea typeface="D2Coding" panose="020B0609020101020101" pitchFamily="49" charset="-127"/>
+              </a:rPr>
+              <a:t>W</a:t>
+            </a:r>
+            <a:r>
+              <a:rPr lang="ko-KR" altLang="en-US" sz="1400" dirty="0">
+                <a:latin typeface="D2Coding" panose="020B0609020101020101" pitchFamily="49" charset="-127"/>
+                <a:ea typeface="D2Coding" panose="020B0609020101020101" pitchFamily="49" charset="-127"/>
+              </a:rPr>
+              <a:t> -= </a:t>
+            </a:r>
+            <a:r>
+              <a:rPr lang="ko-KR" altLang="en-US" sz="1400" dirty="0" err="1">
+                <a:latin typeface="D2Coding" panose="020B0609020101020101" pitchFamily="49" charset="-127"/>
+                <a:ea typeface="D2Coding" panose="020B0609020101020101" pitchFamily="49" charset="-127"/>
+              </a:rPr>
+              <a:t>learning_rate</a:t>
+            </a:r>
+            <a:r>
+              <a:rPr lang="ko-KR" altLang="en-US" sz="1400" dirty="0">
+                <a:latin typeface="D2Coding" panose="020B0609020101020101" pitchFamily="49" charset="-127"/>
+                <a:ea typeface="D2Coding" panose="020B0609020101020101" pitchFamily="49" charset="-127"/>
+              </a:rPr>
+              <a:t> * </a:t>
+            </a:r>
+            <a:r>
+              <a:rPr lang="ko-KR" altLang="en-US" sz="1400" dirty="0" err="1">
+                <a:latin typeface="D2Coding" panose="020B0609020101020101" pitchFamily="49" charset="-127"/>
+                <a:ea typeface="D2Coding" panose="020B0609020101020101" pitchFamily="49" charset="-127"/>
+              </a:rPr>
+              <a:t>W.grad</a:t>
+            </a:r>
+            <a:endParaRPr lang="en-US" altLang="ko-KR" sz="1400" dirty="0">
+              <a:latin typeface="D2Coding" panose="020B0609020101020101" pitchFamily="49" charset="-127"/>
+              <a:ea typeface="D2Coding" panose="020B0609020101020101" pitchFamily="49" charset="-127"/>
+            </a:endParaRPr>
+          </a:p>
+          <a:p>
+            <a:r>
+              <a:rPr lang="en-US" altLang="ko-KR" sz="1400" dirty="0">
+                <a:latin typeface="D2Coding" panose="020B0609020101020101" pitchFamily="49" charset="-127"/>
+                <a:ea typeface="D2Coding" panose="020B0609020101020101" pitchFamily="49" charset="-127"/>
+              </a:rPr>
+              <a:t>        ...</a:t>
+            </a:r>
+          </a:p>
+        </p:txBody>
+      </p:sp>
+      <p:sp>
+        <p:nvSpPr>
+          <p:cNvPr id="3" name="TextBox 2">
+            <a:extLst>
+              <a:ext uri="{FF2B5EF4-FFF2-40B4-BE49-F238E27FC236}">
+                <a16:creationId xmlns:a16="http://schemas.microsoft.com/office/drawing/2014/main" id="{A1934629-776A-7EAC-58BD-F8C7185C1251}"/>
+              </a:ext>
+            </a:extLst>
+          </p:cNvPr>
+          <p:cNvSpPr txBox="1"/>
+          <p:nvPr/>
+        </p:nvSpPr>
+        <p:spPr>
+          <a:xfrm>
+            <a:off x="1089892" y="5543301"/>
+            <a:ext cx="2207491" cy="338554"/>
+          </a:xfrm>
+          <a:prstGeom prst="rect">
+            <a:avLst/>
+          </a:prstGeom>
+          <a:noFill/>
+        </p:spPr>
+        <p:txBody>
+          <a:bodyPr wrap="square">
+            <a:spAutoFit/>
+          </a:bodyPr>
+          <a:lstStyle/>
+          <a:p>
+            <a:r>
+              <a:rPr lang="en-US" altLang="ko-KR" sz="1600" dirty="0">
+                <a:ln>
+                  <a:solidFill>
+                    <a:srgbClr val="002060"/>
+                  </a:solidFill>
+                </a:ln>
+                <a:latin typeface="맑은 고딕 Semilight" panose="020B0502040204020203" pitchFamily="50" charset="-127"/>
+                <a:ea typeface="맑은 고딕 Semilight" panose="020B0502040204020203" pitchFamily="50" charset="-127"/>
+                <a:cs typeface="맑은 고딕 Semilight" panose="020B0502040204020203" pitchFamily="50" charset="-127"/>
+              </a:rPr>
+              <a:t>Gradient Descent</a:t>
+            </a:r>
+            <a:endParaRPr lang="ko-KR" altLang="en-US" sz="1600" dirty="0">
+              <a:ln>
+                <a:solidFill>
+                  <a:srgbClr val="002060"/>
+                </a:solidFill>
+              </a:ln>
+              <a:latin typeface="맑은 고딕 Semilight" panose="020B0502040204020203" pitchFamily="50" charset="-127"/>
+              <a:ea typeface="맑은 고딕 Semilight" panose="020B0502040204020203" pitchFamily="50" charset="-127"/>
+              <a:cs typeface="맑은 고딕 Semilight" panose="020B0502040204020203" pitchFamily="50" charset="-127"/>
+            </a:endParaRPr>
+          </a:p>
+        </p:txBody>
+      </p:sp>
+      <p:sp>
+        <p:nvSpPr>
+          <p:cNvPr id="7" name="TextBox 6">
+            <a:extLst>
+              <a:ext uri="{FF2B5EF4-FFF2-40B4-BE49-F238E27FC236}">
+                <a16:creationId xmlns:a16="http://schemas.microsoft.com/office/drawing/2014/main" id="{E334BDE7-E393-4D59-2A6B-ADB931094440}"/>
+              </a:ext>
+            </a:extLst>
+          </p:cNvPr>
+          <p:cNvSpPr txBox="1"/>
+          <p:nvPr/>
+        </p:nvSpPr>
+        <p:spPr>
+          <a:xfrm>
+            <a:off x="8562105" y="5543301"/>
+            <a:ext cx="2715491" cy="338554"/>
+          </a:xfrm>
+          <a:prstGeom prst="rect">
+            <a:avLst/>
+          </a:prstGeom>
+          <a:noFill/>
+        </p:spPr>
+        <p:txBody>
+          <a:bodyPr wrap="square">
+            <a:spAutoFit/>
+          </a:bodyPr>
+          <a:lstStyle/>
+          <a:p>
+            <a:r>
+              <a:rPr lang="en-US" altLang="ko-KR" sz="1600" dirty="0">
+                <a:ln>
+                  <a:solidFill>
+                    <a:srgbClr val="002060"/>
+                  </a:solidFill>
+                </a:ln>
+                <a:latin typeface="맑은 고딕 Semilight" panose="020B0502040204020203" pitchFamily="50" charset="-127"/>
+                <a:ea typeface="맑은 고딕 Semilight" panose="020B0502040204020203" pitchFamily="50" charset="-127"/>
+                <a:cs typeface="맑은 고딕 Semilight" panose="020B0502040204020203" pitchFamily="50" charset="-127"/>
+              </a:rPr>
+              <a:t>Stochastic Gradient Descent </a:t>
+            </a:r>
+            <a:endParaRPr lang="ko-KR" altLang="en-US" sz="1600" dirty="0">
+              <a:ln>
+                <a:solidFill>
+                  <a:srgbClr val="002060"/>
+                </a:solidFill>
+              </a:ln>
+              <a:latin typeface="맑은 고딕 Semilight" panose="020B0502040204020203" pitchFamily="50" charset="-127"/>
+              <a:ea typeface="맑은 고딕 Semilight" panose="020B0502040204020203" pitchFamily="50" charset="-127"/>
+              <a:cs typeface="맑은 고딕 Semilight" panose="020B0502040204020203" pitchFamily="50" charset="-127"/>
+            </a:endParaRPr>
+          </a:p>
+        </p:txBody>
+      </p:sp>
+      <p:cxnSp>
+        <p:nvCxnSpPr>
+          <p:cNvPr id="13" name="직선 화살표 연결선 12">
+            <a:extLst>
+              <a:ext uri="{FF2B5EF4-FFF2-40B4-BE49-F238E27FC236}">
+                <a16:creationId xmlns:a16="http://schemas.microsoft.com/office/drawing/2014/main" id="{9E21E8D2-0517-4B1E-8753-936030110715}"/>
+              </a:ext>
+            </a:extLst>
+          </p:cNvPr>
+          <p:cNvCxnSpPr>
+            <a:cxnSpLocks/>
+          </p:cNvCxnSpPr>
+          <p:nvPr/>
+        </p:nvCxnSpPr>
+        <p:spPr>
+          <a:xfrm flipV="1">
+            <a:off x="3419200" y="5689596"/>
+            <a:ext cx="4784435" cy="22982"/>
+          </a:xfrm>
+          <a:prstGeom prst="straightConnector1">
+            <a:avLst/>
+          </a:prstGeom>
+          <a:ln>
+            <a:headEnd type="triangle"/>
+            <a:tailEnd type="triangle"/>
+          </a:ln>
+        </p:spPr>
+        <p:style>
+          <a:lnRef idx="1">
+            <a:schemeClr val="dk1"/>
+          </a:lnRef>
+          <a:fillRef idx="0">
+            <a:schemeClr val="dk1"/>
+          </a:fillRef>
+          <a:effectRef idx="0">
+            <a:schemeClr val="dk1"/>
+          </a:effectRef>
+          <a:fontRef idx="minor">
+            <a:schemeClr val="tx1"/>
+          </a:fontRef>
+        </p:style>
+      </p:cxnSp>
+      <p:sp>
+        <p:nvSpPr>
+          <p:cNvPr id="8" name="TextBox 7">
+            <a:extLst>
+              <a:ext uri="{FF2B5EF4-FFF2-40B4-BE49-F238E27FC236}">
+                <a16:creationId xmlns:a16="http://schemas.microsoft.com/office/drawing/2014/main" id="{E1C1AC0E-5BFD-1DCE-406E-5743B5D69E27}"/>
+              </a:ext>
+            </a:extLst>
+          </p:cNvPr>
+          <p:cNvSpPr txBox="1"/>
+          <p:nvPr/>
+        </p:nvSpPr>
+        <p:spPr>
+          <a:xfrm>
+            <a:off x="4825998" y="5460228"/>
+            <a:ext cx="2207491" cy="584775"/>
+          </a:xfrm>
+          <a:prstGeom prst="rect">
+            <a:avLst/>
+          </a:prstGeom>
+          <a:solidFill>
+            <a:schemeClr val="bg1"/>
+          </a:solidFill>
+        </p:spPr>
+        <p:txBody>
+          <a:bodyPr wrap="square">
+            <a:spAutoFit/>
+          </a:bodyPr>
+          <a:lstStyle/>
+          <a:p>
+            <a:pPr algn="ctr"/>
+            <a:r>
+              <a:rPr lang="en-US" altLang="ko-KR" sz="1600" dirty="0">
+                <a:ln>
+                  <a:solidFill>
+                    <a:srgbClr val="002060"/>
+                  </a:solidFill>
+                </a:ln>
+                <a:latin typeface="맑은 고딕 Semilight" panose="020B0502040204020203" pitchFamily="50" charset="-127"/>
+                <a:ea typeface="맑은 고딕 Semilight" panose="020B0502040204020203" pitchFamily="50" charset="-127"/>
+                <a:cs typeface="맑은 고딕 Semilight" panose="020B0502040204020203" pitchFamily="50" charset="-127"/>
+              </a:rPr>
+              <a:t>Mini</a:t>
+            </a:r>
+            <a:r>
+              <a:rPr lang="ko-KR" altLang="en-US" sz="1600" dirty="0">
+                <a:ln>
+                  <a:solidFill>
+                    <a:srgbClr val="002060"/>
+                  </a:solidFill>
+                </a:ln>
+                <a:latin typeface="맑은 고딕 Semilight" panose="020B0502040204020203" pitchFamily="50" charset="-127"/>
+                <a:ea typeface="맑은 고딕 Semilight" panose="020B0502040204020203" pitchFamily="50" charset="-127"/>
+                <a:cs typeface="맑은 고딕 Semilight" panose="020B0502040204020203" pitchFamily="50" charset="-127"/>
+              </a:rPr>
+              <a:t> </a:t>
+            </a:r>
+            <a:r>
+              <a:rPr lang="en-US" altLang="ko-KR" sz="1600" dirty="0">
+                <a:ln>
+                  <a:solidFill>
+                    <a:srgbClr val="002060"/>
+                  </a:solidFill>
+                </a:ln>
+                <a:latin typeface="맑은 고딕 Semilight" panose="020B0502040204020203" pitchFamily="50" charset="-127"/>
+                <a:ea typeface="맑은 고딕 Semilight" panose="020B0502040204020203" pitchFamily="50" charset="-127"/>
+                <a:cs typeface="맑은 고딕 Semilight" panose="020B0502040204020203" pitchFamily="50" charset="-127"/>
+              </a:rPr>
+              <a:t>Batch</a:t>
+            </a:r>
+          </a:p>
+          <a:p>
+            <a:pPr algn="ctr"/>
+            <a:r>
+              <a:rPr lang="en-US" altLang="ko-KR" sz="1600" dirty="0">
+                <a:ln>
+                  <a:solidFill>
+                    <a:srgbClr val="002060"/>
+                  </a:solidFill>
+                </a:ln>
+                <a:latin typeface="맑은 고딕 Semilight" panose="020B0502040204020203" pitchFamily="50" charset="-127"/>
+                <a:ea typeface="맑은 고딕 Semilight" panose="020B0502040204020203" pitchFamily="50" charset="-127"/>
+                <a:cs typeface="맑은 고딕 Semilight" panose="020B0502040204020203" pitchFamily="50" charset="-127"/>
+              </a:rPr>
+              <a:t>Gradient Descent</a:t>
+            </a:r>
+            <a:endParaRPr lang="ko-KR" altLang="en-US" sz="1600" dirty="0">
+              <a:ln>
+                <a:solidFill>
+                  <a:srgbClr val="002060"/>
+                </a:solidFill>
+              </a:ln>
+            </a:endParaRPr>
+          </a:p>
+        </p:txBody>
+      </p:sp>
+    </p:spTree>
+    <p:extLst>
+      <p:ext uri="{BB962C8B-B14F-4D97-AF65-F5344CB8AC3E}">
+        <p14:creationId xmlns:p14="http://schemas.microsoft.com/office/powerpoint/2010/main" val="1678031342"/>
+      </p:ext>
+    </p:extLst>
+  </p:cSld>
+  <p:clrMapOvr>
+    <a:masterClrMapping/>
+  </p:clrMapOvr>
+  <mc:AlternateContent xmlns:mc="http://schemas.openxmlformats.org/markup-compatibility/2006" xmlns:p14="http://schemas.microsoft.com/office/powerpoint/2010/main">
+    <mc:Choice Requires="p14">
+      <p:transition p14:dur="10"/>
+    </mc:Choice>
+    <mc:Fallback xmlns="">
+      <p:transition/>
+    </mc:Fallback>
+  </mc:AlternateContent>
+  <p:timing>
+    <p:tnLst>
+      <p:par>
+        <p:cTn id="1" dur="indefinite" restart="never" nodeType="tmRoot">
+          <p:childTnLst>
+            <p:seq concurrent="1" nextAc="seek">
+              <p:cTn id="2" dur="indefinite" nodeType="mainSeq">
+                <p:childTnLst>
+                  <p:par>
+                    <p:cTn id="3" fill="hold">
+                      <p:stCondLst>
+                        <p:cond delay="indefinite"/>
+                      </p:stCondLst>
+                      <p:childTnLst>
+                        <p:par>
+                          <p:cTn id="4" fill="hold">
+                            <p:stCondLst>
+                              <p:cond delay="0"/>
+                            </p:stCondLst>
+                            <p:childTnLst>
+                              <p:par>
+                                <p:cTn id="5" presetID="1" presetClass="entr" presetSubtype="0" fill="hold" grpId="0" nodeType="clickEffect">
+                                  <p:stCondLst>
+                                    <p:cond delay="0"/>
+                                  </p:stCondLst>
+                                  <p:childTnLst>
+                                    <p:set>
+                                      <p:cBhvr>
+                                        <p:cTn id="6" dur="1" fill="hold">
+                                          <p:stCondLst>
+                                            <p:cond delay="0"/>
+                                          </p:stCondLst>
+                                        </p:cTn>
+                                        <p:tgtEl>
+                                          <p:spTgt spid="3"/>
+                                        </p:tgtEl>
+                                        <p:attrNameLst>
+                                          <p:attrName>style.visibility</p:attrName>
+                                        </p:attrNameLst>
+                                      </p:cBhvr>
+                                      <p:to>
+                                        <p:strVal val="visible"/>
+                                      </p:to>
+                                    </p:set>
+                                  </p:childTnLst>
+                                </p:cTn>
+                              </p:par>
+                            </p:childTnLst>
+                          </p:cTn>
+                        </p:par>
+                      </p:childTnLst>
+                    </p:cTn>
+                  </p:par>
+                  <p:par>
+                    <p:cTn id="7" fill="hold">
+                      <p:stCondLst>
+                        <p:cond delay="indefinite"/>
+                      </p:stCondLst>
+                      <p:childTnLst>
+                        <p:par>
+                          <p:cTn id="8" fill="hold">
+                            <p:stCondLst>
+                              <p:cond delay="0"/>
+                            </p:stCondLst>
+                            <p:childTnLst>
+                              <p:par>
+                                <p:cTn id="9" presetID="1" presetClass="entr" presetSubtype="0" fill="hold" grpId="0" nodeType="clickEffect">
+                                  <p:stCondLst>
+                                    <p:cond delay="0"/>
+                                  </p:stCondLst>
+                                  <p:childTnLst>
+                                    <p:set>
+                                      <p:cBhvr>
+                                        <p:cTn id="10" dur="1" fill="hold">
+                                          <p:stCondLst>
+                                            <p:cond delay="0"/>
+                                          </p:stCondLst>
+                                        </p:cTn>
+                                        <p:tgtEl>
+                                          <p:spTgt spid="7"/>
+                                        </p:tgtEl>
+                                        <p:attrNameLst>
+                                          <p:attrName>style.visibility</p:attrName>
+                                        </p:attrNameLst>
+                                      </p:cBhvr>
+                                      <p:to>
+                                        <p:strVal val="visible"/>
+                                      </p:to>
+                                    </p:set>
+                                  </p:childTnLst>
+                                </p:cTn>
+                              </p:par>
+                            </p:childTnLst>
+                          </p:cTn>
+                        </p:par>
+                      </p:childTnLst>
+                    </p:cTn>
+                  </p:par>
+                  <p:par>
+                    <p:cTn id="11" fill="hold">
+                      <p:stCondLst>
+                        <p:cond delay="indefinite"/>
+                      </p:stCondLst>
+                      <p:childTnLst>
+                        <p:par>
+                          <p:cTn id="12" fill="hold">
+                            <p:stCondLst>
+                              <p:cond delay="0"/>
+                            </p:stCondLst>
+                            <p:childTnLst>
+                              <p:par>
+                                <p:cTn id="13" presetID="1" presetClass="entr" presetSubtype="0" fill="hold" grpId="0" nodeType="clickEffect">
+                                  <p:stCondLst>
+                                    <p:cond delay="0"/>
+                                  </p:stCondLst>
+                                  <p:childTnLst>
+                                    <p:set>
+                                      <p:cBhvr>
+                                        <p:cTn id="14" dur="1" fill="hold">
+                                          <p:stCondLst>
+                                            <p:cond delay="0"/>
+                                          </p:stCondLst>
+                                        </p:cTn>
+                                        <p:tgtEl>
+                                          <p:spTgt spid="8"/>
+                                        </p:tgtEl>
+                                        <p:attrNameLst>
+                                          <p:attrName>style.visibility</p:attrName>
+                                        </p:attrNameLst>
+                                      </p:cBhvr>
+                                      <p:to>
+                                        <p:strVal val="visible"/>
+                                      </p:to>
+                                    </p:set>
+                                  </p:childTnLst>
+                                </p:cTn>
+                              </p:par>
+                              <p:par>
+                                <p:cTn id="15" presetID="1" presetClass="entr" presetSubtype="0" fill="hold" nodeType="withEffect">
+                                  <p:stCondLst>
+                                    <p:cond delay="0"/>
+                                  </p:stCondLst>
+                                  <p:childTnLst>
+                                    <p:set>
+                                      <p:cBhvr>
+                                        <p:cTn id="16" dur="1" fill="hold">
+                                          <p:stCondLst>
+                                            <p:cond delay="0"/>
+                                          </p:stCondLst>
+                                        </p:cTn>
+                                        <p:tgtEl>
+                                          <p:spTgt spid="13"/>
+                                        </p:tgtEl>
+                                        <p:attrNameLst>
+                                          <p:attrName>style.visibility</p:attrName>
+                                        </p:attrNameLst>
+                                      </p:cBhvr>
+                                      <p:to>
+                                        <p:strVal val="visible"/>
+                                      </p:to>
+                                    </p:set>
+                                  </p:childTnLst>
+                                </p:cTn>
+                              </p:par>
+                            </p:childTnLst>
+                          </p:cTn>
+                        </p:par>
+                      </p:childTnLst>
+                    </p:cTn>
+                  </p:par>
+                </p:childTnLst>
+              </p:cTn>
+              <p:prevCondLst>
+                <p:cond evt="onPrev" delay="0">
+                  <p:tgtEl>
+                    <p:sldTgt/>
+                  </p:tgtEl>
+                </p:cond>
+              </p:prevCondLst>
+              <p:nextCondLst>
+                <p:cond evt="onNext" delay="0">
+                  <p:tgtEl>
+                    <p:sldTgt/>
+                  </p:tgtEl>
+                </p:cond>
+              </p:nextCondLst>
+            </p:seq>
+          </p:childTnLst>
+        </p:cTn>
+      </p:par>
+    </p:tnLst>
+    <p:bldLst>
+      <p:bldP spid="3" grpId="0"/>
+      <p:bldP spid="7" grpId="0"/>
+      <p:bldP spid="8" grpId="0" animBg="1"/>
+    </p:bldLst>
+  </p:timing>
+</p:sld>
+</file>
+
+<file path=ppt/slides/slide11.xml><?xml version="1.0" encoding="utf-8"?>
+<p:sld xmlns:a="http://schemas.openxmlformats.org/drawingml/2006/main" xmlns:r="http://schemas.openxmlformats.org/officeDocument/2006/relationships" xmlns:p="http://schemas.openxmlformats.org/presentationml/2006/main">
+  <p:cSld>
+    <p:spTree>
+      <p:nvGrpSpPr>
+        <p:cNvPr id="1" name="">
+          <a:extLst>
+            <a:ext uri="{FF2B5EF4-FFF2-40B4-BE49-F238E27FC236}">
               <a16:creationId xmlns:a16="http://schemas.microsoft.com/office/drawing/2014/main" id="{1ECFFBE9-3F99-0F85-0651-175D2B3192A7}"/>
             </a:ext>
           </a:extLst>
@@ -5996,7 +7815,7 @@
             <a:fld id="{9860EDB8-5305-433F-BE41-D7A86D811DB3}" type="slidenum">
               <a:rPr lang="en-US" altLang="ko-KR" noProof="0" smtClean="0"/>
               <a:pPr/>
-              <a:t>10</a:t>
+              <a:t>11</a:t>
             </a:fld>
             <a:endParaRPr lang="ko-KR" altLang="en-US" noProof="0" dirty="0"/>
           </a:p>
@@ -6273,7 +8092,7 @@
 </p:sld>
 </file>
 
-<file path=ppt/slides/slide11.xml><?xml version="1.0" encoding="utf-8"?>
+<file path=ppt/slides/slide12.xml><?xml version="1.0" encoding="utf-8"?>
 <p:sld xmlns:a="http://schemas.openxmlformats.org/drawingml/2006/main" xmlns:r="http://schemas.openxmlformats.org/officeDocument/2006/relationships" xmlns:p="http://schemas.openxmlformats.org/presentationml/2006/main">
   <p:cSld>
     <p:spTree>
@@ -6320,7 +8139,7 @@
             <a:fld id="{9860EDB8-5305-433F-BE41-D7A86D811DB3}" type="slidenum">
               <a:rPr lang="en-US" altLang="ko-KR" noProof="0" smtClean="0"/>
               <a:pPr/>
-              <a:t>11</a:t>
+              <a:t>12</a:t>
             </a:fld>
             <a:endParaRPr lang="ko-KR" altLang="en-US" noProof="0"/>
           </a:p>
@@ -7392,7 +9211,7 @@
 </p:sld>
 </file>
 
-<file path=ppt/slides/slide12.xml><?xml version="1.0" encoding="utf-8"?>
+<file path=ppt/slides/slide13.xml><?xml version="1.0" encoding="utf-8"?>
 <p:sld xmlns:a="http://schemas.openxmlformats.org/drawingml/2006/main" xmlns:r="http://schemas.openxmlformats.org/officeDocument/2006/relationships" xmlns:p="http://schemas.openxmlformats.org/presentationml/2006/main">
   <p:cSld>
     <p:spTree>
@@ -7439,7 +9258,7 @@
             <a:fld id="{9860EDB8-5305-433F-BE41-D7A86D811DB3}" type="slidenum">
               <a:rPr lang="en-US" altLang="ko-KR" noProof="0" smtClean="0"/>
               <a:pPr/>
-              <a:t>12</a:t>
+              <a:t>13</a:t>
             </a:fld>
             <a:endParaRPr lang="ko-KR" altLang="en-US" noProof="0"/>
           </a:p>
@@ -7733,7 +9552,7 @@
 </p:sld>
 </file>
 
-<file path=ppt/slides/slide13.xml><?xml version="1.0" encoding="utf-8"?>
+<file path=ppt/slides/slide14.xml><?xml version="1.0" encoding="utf-8"?>
 <p:sld xmlns:a="http://schemas.openxmlformats.org/drawingml/2006/main" xmlns:r="http://schemas.openxmlformats.org/officeDocument/2006/relationships" xmlns:p="http://schemas.openxmlformats.org/presentationml/2006/main">
   <p:cSld>
     <p:spTree>
@@ -7780,7 +9599,7 @@
             <a:fld id="{9860EDB8-5305-433F-BE41-D7A86D811DB3}" type="slidenum">
               <a:rPr lang="en-US" altLang="ko-KR" noProof="0" smtClean="0"/>
               <a:pPr/>
-              <a:t>13</a:t>
+              <a:t>14</a:t>
             </a:fld>
             <a:endParaRPr lang="ko-KR" altLang="en-US" noProof="0"/>
           </a:p>
@@ -7898,7 +9717,7 @@
 </p:sld>
 </file>
 
-<file path=ppt/slides/slide14.xml><?xml version="1.0" encoding="utf-8"?>
+<file path=ppt/slides/slide15.xml><?xml version="1.0" encoding="utf-8"?>
 <p:sld xmlns:a="http://schemas.openxmlformats.org/drawingml/2006/main" xmlns:r="http://schemas.openxmlformats.org/officeDocument/2006/relationships" xmlns:p="http://schemas.openxmlformats.org/presentationml/2006/main">
   <p:cSld>
     <p:spTree>
@@ -7945,7 +9764,7 @@
             <a:fld id="{9860EDB8-5305-433F-BE41-D7A86D811DB3}" type="slidenum">
               <a:rPr lang="en-US" altLang="ko-KR" noProof="0" smtClean="0"/>
               <a:pPr/>
-              <a:t>14</a:t>
+              <a:t>15</a:t>
             </a:fld>
             <a:endParaRPr lang="ko-KR" altLang="en-US" noProof="0"/>
           </a:p>
@@ -8169,7 +9988,7 @@
 </p:sld>
 </file>
 
-<file path=ppt/slides/slide15.xml><?xml version="1.0" encoding="utf-8"?>
+<file path=ppt/slides/slide16.xml><?xml version="1.0" encoding="utf-8"?>
 <p:sld xmlns:a="http://schemas.openxmlformats.org/drawingml/2006/main" xmlns:r="http://schemas.openxmlformats.org/officeDocument/2006/relationships" xmlns:p="http://schemas.openxmlformats.org/presentationml/2006/main">
   <p:cSld>
     <p:spTree>
@@ -8317,7 +10136,7 @@
             <a:fld id="{9860EDB8-5305-433F-BE41-D7A86D811DB3}" type="slidenum">
               <a:rPr lang="en-US" altLang="ko-KR" noProof="0" smtClean="0"/>
               <a:pPr/>
-              <a:t>15</a:t>
+              <a:t>16</a:t>
             </a:fld>
             <a:endParaRPr lang="ko-KR" altLang="en-US" noProof="0" dirty="0"/>
           </a:p>
@@ -8594,7 +10413,7 @@
 </p:sld>
 </file>
 
-<file path=ppt/slides/slide16.xml><?xml version="1.0" encoding="utf-8"?>
+<file path=ppt/slides/slide17.xml><?xml version="1.0" encoding="utf-8"?>
 <p:sld xmlns:a="http://schemas.openxmlformats.org/drawingml/2006/main" xmlns:r="http://schemas.openxmlformats.org/officeDocument/2006/relationships" xmlns:p="http://schemas.openxmlformats.org/presentationml/2006/main">
   <p:cSld>
     <p:spTree>
@@ -8641,7 +10460,7 @@
             <a:fld id="{9860EDB8-5305-433F-BE41-D7A86D811DB3}" type="slidenum">
               <a:rPr lang="en-US" altLang="ko-KR" noProof="0" smtClean="0"/>
               <a:pPr/>
-              <a:t>16</a:t>
+              <a:t>17</a:t>
             </a:fld>
             <a:endParaRPr lang="ko-KR" altLang="en-US" noProof="0"/>
           </a:p>
@@ -9341,7 +11160,7 @@
 </p:sld>
 </file>
 
-<file path=ppt/slides/slide17.xml><?xml version="1.0" encoding="utf-8"?>
+<file path=ppt/slides/slide18.xml><?xml version="1.0" encoding="utf-8"?>
 <p:sld xmlns:a="http://schemas.openxmlformats.org/drawingml/2006/main" xmlns:r="http://schemas.openxmlformats.org/officeDocument/2006/relationships" xmlns:p="http://schemas.openxmlformats.org/presentationml/2006/main">
   <p:cSld>
     <p:spTree>
@@ -9525,7 +11344,7 @@
             <a:fld id="{D57F1E4F-1CFF-5643-939E-217C01CDF565}" type="slidenum">
               <a:rPr lang="en-US" smtClean="0"/>
               <a:pPr/>
-              <a:t>17</a:t>
+              <a:t>18</a:t>
             </a:fld>
             <a:endParaRPr lang="en-US" dirty="0"/>
           </a:p>
@@ -9992,7 +11811,7 @@
 </p:sld>
 </file>
 
-<file path=ppt/slides/slide18.xml><?xml version="1.0" encoding="utf-8"?>
+<file path=ppt/slides/slide19.xml><?xml version="1.0" encoding="utf-8"?>
 <p:sld xmlns:a="http://schemas.openxmlformats.org/drawingml/2006/main" xmlns:r="http://schemas.openxmlformats.org/officeDocument/2006/relationships" xmlns:p="http://schemas.openxmlformats.org/presentationml/2006/main">
   <p:cSld>
     <p:spTree>
@@ -10140,7 +11959,7 @@
             <a:fld id="{9860EDB8-5305-433F-BE41-D7A86D811DB3}" type="slidenum">
               <a:rPr lang="en-US" altLang="ko-KR" noProof="0" smtClean="0"/>
               <a:pPr/>
-              <a:t>18</a:t>
+              <a:t>19</a:t>
             </a:fld>
             <a:endParaRPr lang="ko-KR" altLang="en-US" noProof="0" dirty="0"/>
           </a:p>
@@ -10417,7 +12236,432 @@
 </p:sld>
 </file>
 
-<file path=ppt/slides/slide19.xml><?xml version="1.0" encoding="utf-8"?>
+<file path=ppt/slides/slide2.xml><?xml version="1.0" encoding="utf-8"?>
+<p:sld xmlns:a="http://schemas.openxmlformats.org/drawingml/2006/main" xmlns:r="http://schemas.openxmlformats.org/officeDocument/2006/relationships" xmlns:p="http://schemas.openxmlformats.org/presentationml/2006/main">
+  <p:cSld>
+    <p:spTree>
+      <p:nvGrpSpPr>
+        <p:cNvPr id="1" name="">
+          <a:extLst>
+            <a:ext uri="{FF2B5EF4-FFF2-40B4-BE49-F238E27FC236}">
+              <a16:creationId xmlns:a16="http://schemas.microsoft.com/office/drawing/2014/main" id="{10E0E775-05A8-0B2E-3045-C7403DD4772D}"/>
+            </a:ext>
+          </a:extLst>
+        </p:cNvPr>
+        <p:cNvGrpSpPr/>
+        <p:nvPr/>
+      </p:nvGrpSpPr>
+      <p:grpSpPr>
+        <a:xfrm>
+          <a:off x="0" y="0"/>
+          <a:ext cx="0" cy="0"/>
+          <a:chOff x="0" y="0"/>
+          <a:chExt cx="0" cy="0"/>
+        </a:xfrm>
+      </p:grpSpPr>
+      <p:sp>
+        <p:nvSpPr>
+          <p:cNvPr id="2" name="직사각형 1">
+            <a:extLst>
+              <a:ext uri="{FF2B5EF4-FFF2-40B4-BE49-F238E27FC236}">
+                <a16:creationId xmlns:a16="http://schemas.microsoft.com/office/drawing/2014/main" id="{001C3FE3-FA0C-4461-E726-E4ADE5CC5001}"/>
+              </a:ext>
+            </a:extLst>
+          </p:cNvPr>
+          <p:cNvSpPr/>
+          <p:nvPr/>
+        </p:nvSpPr>
+        <p:spPr>
+          <a:xfrm>
+            <a:off x="1571625" y="3238501"/>
+            <a:ext cx="7524750" cy="457200"/>
+          </a:xfrm>
+          <a:prstGeom prst="rect">
+            <a:avLst/>
+          </a:prstGeom>
+          <a:solidFill>
+            <a:schemeClr val="bg1">
+              <a:lumMod val="75000"/>
+            </a:schemeClr>
+          </a:solidFill>
+          <a:ln>
+            <a:noFill/>
+          </a:ln>
+        </p:spPr>
+        <p:style>
+          <a:lnRef idx="2">
+            <a:schemeClr val="accent1">
+              <a:shade val="15000"/>
+            </a:schemeClr>
+          </a:lnRef>
+          <a:fillRef idx="1">
+            <a:schemeClr val="accent1"/>
+          </a:fillRef>
+          <a:effectRef idx="0">
+            <a:schemeClr val="accent1"/>
+          </a:effectRef>
+          <a:fontRef idx="minor">
+            <a:schemeClr val="lt1"/>
+          </a:fontRef>
+        </p:style>
+        <p:txBody>
+          <a:bodyPr rtlCol="0" anchor="ctr"/>
+          <a:lstStyle/>
+          <a:p>
+            <a:pPr algn="ctr"/>
+            <a:endParaRPr lang="ko-KR" altLang="en-US" dirty="0"/>
+          </a:p>
+        </p:txBody>
+      </p:sp>
+      <p:sp>
+        <p:nvSpPr>
+          <p:cNvPr id="8" name="제목 7">
+            <a:extLst>
+              <a:ext uri="{FF2B5EF4-FFF2-40B4-BE49-F238E27FC236}">
+                <a16:creationId xmlns:a16="http://schemas.microsoft.com/office/drawing/2014/main" id="{584C55D0-C2AA-C028-A764-80EBE5AC2B39}"/>
+              </a:ext>
+            </a:extLst>
+          </p:cNvPr>
+          <p:cNvSpPr>
+            <a:spLocks noGrp="1"/>
+          </p:cNvSpPr>
+          <p:nvPr>
+            <p:ph type="title"/>
+          </p:nvPr>
+        </p:nvSpPr>
+        <p:spPr>
+          <a:xfrm>
+            <a:off x="521207" y="448056"/>
+            <a:ext cx="8135613" cy="640080"/>
+          </a:xfrm>
+        </p:spPr>
+        <p:txBody>
+          <a:bodyPr rtlCol="0">
+            <a:noAutofit/>
+          </a:bodyPr>
+          <a:lstStyle/>
+          <a:p>
+            <a:pPr rtl="0"/>
+            <a:r>
+              <a:rPr lang="en-US" altLang="ko-KR" dirty="0">
+                <a:solidFill>
+                  <a:schemeClr val="tx1"/>
+                </a:solidFill>
+                <a:cs typeface="Segoe UI Light" panose="020B0502040204020203" pitchFamily="34" charset="0"/>
+              </a:rPr>
+              <a:t>Contents</a:t>
+            </a:r>
+            <a:endParaRPr lang="ko-KR" altLang="en-US" dirty="0">
+              <a:solidFill>
+                <a:schemeClr val="tx1"/>
+              </a:solidFill>
+              <a:cs typeface="Segoe UI Light" panose="020B0502040204020203" pitchFamily="34" charset="0"/>
+            </a:endParaRPr>
+          </a:p>
+        </p:txBody>
+      </p:sp>
+      <p:sp>
+        <p:nvSpPr>
+          <p:cNvPr id="12" name="슬라이드 번호 개체 틀 11">
+            <a:extLst>
+              <a:ext uri="{FF2B5EF4-FFF2-40B4-BE49-F238E27FC236}">
+                <a16:creationId xmlns:a16="http://schemas.microsoft.com/office/drawing/2014/main" id="{DDEF4870-5C4D-2E0B-B788-E69040D32E16}"/>
+              </a:ext>
+            </a:extLst>
+          </p:cNvPr>
+          <p:cNvSpPr>
+            <a:spLocks noGrp="1"/>
+          </p:cNvSpPr>
+          <p:nvPr>
+            <p:ph type="sldNum" sz="quarter" idx="4"/>
+          </p:nvPr>
+        </p:nvSpPr>
+        <p:spPr/>
+        <p:txBody>
+          <a:bodyPr/>
+          <a:lstStyle/>
+          <a:p>
+            <a:fld id="{9860EDB8-5305-433F-BE41-D7A86D811DB3}" type="slidenum">
+              <a:rPr lang="en-US" altLang="ko-KR" noProof="0" smtClean="0"/>
+              <a:pPr/>
+              <a:t>2</a:t>
+            </a:fld>
+            <a:endParaRPr lang="ko-KR" altLang="en-US" noProof="0" dirty="0"/>
+          </a:p>
+        </p:txBody>
+      </p:sp>
+      <p:sp>
+        <p:nvSpPr>
+          <p:cNvPr id="16" name="TextBox 15">
+            <a:extLst>
+              <a:ext uri="{FF2B5EF4-FFF2-40B4-BE49-F238E27FC236}">
+                <a16:creationId xmlns:a16="http://schemas.microsoft.com/office/drawing/2014/main" id="{D2B4665E-8947-4774-C082-ED94684AA3E1}"/>
+              </a:ext>
+            </a:extLst>
+          </p:cNvPr>
+          <p:cNvSpPr txBox="1"/>
+          <p:nvPr/>
+        </p:nvSpPr>
+        <p:spPr>
+          <a:xfrm>
+            <a:off x="2477049" y="1345311"/>
+            <a:ext cx="6752676" cy="5123390"/>
+          </a:xfrm>
+          <a:prstGeom prst="rect">
+            <a:avLst/>
+          </a:prstGeom>
+          <a:noFill/>
+        </p:spPr>
+        <p:txBody>
+          <a:bodyPr wrap="square" rtlCol="0">
+            <a:spAutoFit/>
+          </a:bodyPr>
+          <a:lstStyle/>
+          <a:p>
+            <a:pPr marL="342900" indent="-342900">
+              <a:lnSpc>
+                <a:spcPct val="150000"/>
+              </a:lnSpc>
+              <a:buFont typeface="+mj-lt"/>
+              <a:buAutoNum type="arabicPeriod"/>
+            </a:pPr>
+            <a:r>
+              <a:rPr lang="en-US" altLang="ko-KR" sz="2000" b="1" dirty="0">
+                <a:latin typeface="D2Coding" panose="020B0609020101020101" pitchFamily="49" charset="-127"/>
+                <a:ea typeface="D2Coding" panose="020B0609020101020101" pitchFamily="49" charset="-127"/>
+                <a:cs typeface="맑은 고딕 Semilight" panose="020B0502040204020203" pitchFamily="50" charset="-127"/>
+              </a:rPr>
+              <a:t>Tensor</a:t>
+            </a:r>
+          </a:p>
+          <a:p>
+            <a:pPr marL="342900" indent="-342900">
+              <a:lnSpc>
+                <a:spcPct val="150000"/>
+              </a:lnSpc>
+              <a:buFont typeface="+mj-lt"/>
+              <a:buAutoNum type="arabicPeriod"/>
+            </a:pPr>
+            <a:r>
+              <a:rPr lang="en-US" altLang="ko-KR" sz="2000" b="1" dirty="0" err="1">
+                <a:latin typeface="D2Coding" panose="020B0609020101020101" pitchFamily="49" charset="-127"/>
+                <a:ea typeface="D2Coding" panose="020B0609020101020101" pitchFamily="49" charset="-127"/>
+                <a:cs typeface="맑은 고딕 Semilight" panose="020B0502040204020203" pitchFamily="50" charset="-127"/>
+              </a:rPr>
+              <a:t>Autograd</a:t>
+            </a:r>
+            <a:endParaRPr lang="en-US" altLang="ko-KR" sz="2000" b="1" dirty="0">
+              <a:latin typeface="D2Coding" panose="020B0609020101020101" pitchFamily="49" charset="-127"/>
+              <a:ea typeface="D2Coding" panose="020B0609020101020101" pitchFamily="49" charset="-127"/>
+              <a:cs typeface="맑은 고딕 Semilight" panose="020B0502040204020203" pitchFamily="50" charset="-127"/>
+            </a:endParaRPr>
+          </a:p>
+          <a:p>
+            <a:pPr marL="342900" indent="-342900">
+              <a:lnSpc>
+                <a:spcPct val="150000"/>
+              </a:lnSpc>
+              <a:buFont typeface="+mj-lt"/>
+              <a:buAutoNum type="arabicPeriod"/>
+            </a:pPr>
+            <a:r>
+              <a:rPr lang="en-US" altLang="ko-KR" sz="2000" b="1" dirty="0">
+                <a:latin typeface="D2Coding" panose="020B0609020101020101" pitchFamily="49" charset="-127"/>
+                <a:ea typeface="D2Coding" panose="020B0609020101020101" pitchFamily="49" charset="-127"/>
+                <a:cs typeface="맑은 고딕 Semilight" panose="020B0502040204020203" pitchFamily="50" charset="-127"/>
+              </a:rPr>
+              <a:t>Backpropagation</a:t>
+            </a:r>
+          </a:p>
+          <a:p>
+            <a:pPr marL="342900" indent="-342900">
+              <a:lnSpc>
+                <a:spcPct val="150000"/>
+              </a:lnSpc>
+              <a:buFont typeface="+mj-lt"/>
+              <a:buAutoNum type="arabicPeriod"/>
+            </a:pPr>
+            <a:r>
+              <a:rPr lang="en-US" altLang="ko-KR" sz="2000" b="1" dirty="0">
+                <a:latin typeface="D2Coding" panose="020B0609020101020101" pitchFamily="49" charset="-127"/>
+                <a:ea typeface="D2Coding" panose="020B0609020101020101" pitchFamily="49" charset="-127"/>
+                <a:cs typeface="맑은 고딕 Semilight" panose="020B0502040204020203" pitchFamily="50" charset="-127"/>
+              </a:rPr>
+              <a:t>Forward &amp; Backward Pass</a:t>
+            </a:r>
+          </a:p>
+          <a:p>
+            <a:pPr marL="342900" indent="-342900">
+              <a:lnSpc>
+                <a:spcPct val="150000"/>
+              </a:lnSpc>
+              <a:buFont typeface="+mj-lt"/>
+              <a:buAutoNum type="arabicPeriod"/>
+            </a:pPr>
+            <a:r>
+              <a:rPr lang="en-US" altLang="ko-KR" sz="2000" b="1" dirty="0">
+                <a:latin typeface="D2Coding" panose="020B0609020101020101" pitchFamily="49" charset="-127"/>
+                <a:ea typeface="D2Coding" panose="020B0609020101020101" pitchFamily="49" charset="-127"/>
+                <a:cs typeface="맑은 고딕 Semilight" panose="020B0502040204020203" pitchFamily="50" charset="-127"/>
+              </a:rPr>
+              <a:t>Optimizer &amp; Model</a:t>
+            </a:r>
+          </a:p>
+          <a:p>
+            <a:pPr marL="342900" indent="-342900">
+              <a:lnSpc>
+                <a:spcPct val="150000"/>
+              </a:lnSpc>
+              <a:buFont typeface="+mj-lt"/>
+              <a:buAutoNum type="arabicPeriod"/>
+            </a:pPr>
+            <a:r>
+              <a:rPr lang="en-US" altLang="ko-KR" sz="2000" b="1" dirty="0">
+                <a:latin typeface="D2Coding" panose="020B0609020101020101" pitchFamily="49" charset="-127"/>
+                <a:ea typeface="D2Coding" panose="020B0609020101020101" pitchFamily="49" charset="-127"/>
+                <a:cs typeface="맑은 고딕 Semilight" panose="020B0502040204020203" pitchFamily="50" charset="-127"/>
+              </a:rPr>
+              <a:t>Optimizers</a:t>
+            </a:r>
+          </a:p>
+          <a:p>
+            <a:pPr marL="342900" indent="-342900">
+              <a:lnSpc>
+                <a:spcPct val="150000"/>
+              </a:lnSpc>
+              <a:buFont typeface="+mj-lt"/>
+              <a:buAutoNum type="arabicPeriod"/>
+            </a:pPr>
+            <a:r>
+              <a:rPr lang="en-US" altLang="ko-KR" sz="2000" b="1" dirty="0">
+                <a:latin typeface="D2Coding" panose="020B0609020101020101" pitchFamily="49" charset="-127"/>
+                <a:ea typeface="D2Coding" panose="020B0609020101020101" pitchFamily="49" charset="-127"/>
+                <a:cs typeface="맑은 고딕 Semilight" panose="020B0502040204020203" pitchFamily="50" charset="-127"/>
+              </a:rPr>
+              <a:t> Loss Function with L1, L2 regularization</a:t>
+            </a:r>
+          </a:p>
+          <a:p>
+            <a:pPr marL="342900" indent="-342900">
+              <a:lnSpc>
+                <a:spcPct val="150000"/>
+              </a:lnSpc>
+              <a:buFont typeface="+mj-lt"/>
+              <a:buAutoNum type="arabicPeriod"/>
+            </a:pPr>
+            <a:r>
+              <a:rPr lang="en-US" altLang="ko-KR" sz="2000" b="1" dirty="0">
+                <a:latin typeface="D2Coding" panose="020B0609020101020101" pitchFamily="49" charset="-127"/>
+                <a:ea typeface="D2Coding" panose="020B0609020101020101" pitchFamily="49" charset="-127"/>
+                <a:cs typeface="맑은 고딕 Semilight" panose="020B0502040204020203" pitchFamily="50" charset="-127"/>
+              </a:rPr>
+              <a:t> Regularizations</a:t>
+            </a:r>
+          </a:p>
+          <a:p>
+            <a:pPr marL="342900" indent="-342900">
+              <a:lnSpc>
+                <a:spcPct val="150000"/>
+              </a:lnSpc>
+              <a:buFont typeface="+mj-lt"/>
+              <a:buAutoNum type="arabicPeriod"/>
+            </a:pPr>
+            <a:r>
+              <a:rPr lang="en-US" altLang="ko-KR" sz="2000" b="1" dirty="0">
+                <a:latin typeface="D2Coding" panose="020B0609020101020101" pitchFamily="49" charset="-127"/>
+                <a:ea typeface="D2Coding" panose="020B0609020101020101" pitchFamily="49" charset="-127"/>
+                <a:cs typeface="맑은 고딕 Semilight" panose="020B0502040204020203" pitchFamily="50" charset="-127"/>
+              </a:rPr>
+              <a:t> </a:t>
+            </a:r>
+            <a:r>
+              <a:rPr lang="en-US" altLang="ko-KR" sz="2000" b="1" dirty="0" err="1">
+                <a:latin typeface="D2Coding" panose="020B0609020101020101" pitchFamily="49" charset="-127"/>
+                <a:ea typeface="D2Coding" panose="020B0609020101020101" pitchFamily="49" charset="-127"/>
+                <a:cs typeface="맑은 고딕 Semilight" panose="020B0502040204020203" pitchFamily="50" charset="-127"/>
+              </a:rPr>
+              <a:t>Pytorch</a:t>
+            </a:r>
+            <a:r>
+              <a:rPr lang="en-US" altLang="ko-KR" sz="2000" b="1" dirty="0">
+                <a:latin typeface="D2Coding" panose="020B0609020101020101" pitchFamily="49" charset="-127"/>
+                <a:ea typeface="D2Coding" panose="020B0609020101020101" pitchFamily="49" charset="-127"/>
+                <a:cs typeface="맑은 고딕 Semilight" panose="020B0502040204020203" pitchFamily="50" charset="-127"/>
+              </a:rPr>
+              <a:t> with fashion </a:t>
+            </a:r>
+            <a:r>
+              <a:rPr lang="en-US" altLang="ko-KR" sz="2000" b="1" dirty="0" err="1">
+                <a:latin typeface="D2Coding" panose="020B0609020101020101" pitchFamily="49" charset="-127"/>
+                <a:ea typeface="D2Coding" panose="020B0609020101020101" pitchFamily="49" charset="-127"/>
+                <a:cs typeface="맑은 고딕 Semilight" panose="020B0502040204020203" pitchFamily="50" charset="-127"/>
+              </a:rPr>
+              <a:t>mnist</a:t>
+            </a:r>
+            <a:endParaRPr lang="en-US" altLang="ko-KR" sz="2000" b="1" dirty="0">
+              <a:latin typeface="D2Coding" panose="020B0609020101020101" pitchFamily="49" charset="-127"/>
+              <a:ea typeface="D2Coding" panose="020B0609020101020101" pitchFamily="49" charset="-127"/>
+              <a:cs typeface="맑은 고딕 Semilight" panose="020B0502040204020203" pitchFamily="50" charset="-127"/>
+            </a:endParaRPr>
+          </a:p>
+          <a:p>
+            <a:pPr marL="342900" indent="-342900">
+              <a:lnSpc>
+                <a:spcPct val="150000"/>
+              </a:lnSpc>
+              <a:buFont typeface="+mj-lt"/>
+              <a:buAutoNum type="arabicPeriod"/>
+            </a:pPr>
+            <a:r>
+              <a:rPr lang="en-US" altLang="ko-KR" sz="2000" b="1" dirty="0">
+                <a:latin typeface="D2Coding" panose="020B0609020101020101" pitchFamily="49" charset="-127"/>
+                <a:ea typeface="D2Coding" panose="020B0609020101020101" pitchFamily="49" charset="-127"/>
+                <a:cs typeface="맑은 고딕 Semilight" panose="020B0502040204020203" pitchFamily="50" charset="-127"/>
+              </a:rPr>
+              <a:t> Understanding basic CNN</a:t>
+            </a:r>
+          </a:p>
+          <a:p>
+            <a:pPr marL="342900" indent="-342900">
+              <a:lnSpc>
+                <a:spcPct val="150000"/>
+              </a:lnSpc>
+              <a:buFont typeface="+mj-lt"/>
+              <a:buAutoNum type="arabicPeriod"/>
+            </a:pPr>
+            <a:r>
+              <a:rPr lang="en-US" altLang="ko-KR" sz="2000" b="1" dirty="0">
+                <a:latin typeface="D2Coding" panose="020B0609020101020101" pitchFamily="49" charset="-127"/>
+                <a:ea typeface="D2Coding" panose="020B0609020101020101" pitchFamily="49" charset="-127"/>
+                <a:cs typeface="맑은 고딕 Semilight" panose="020B0502040204020203" pitchFamily="50" charset="-127"/>
+              </a:rPr>
+              <a:t> Roadmap to ML &amp; ML</a:t>
+            </a:r>
+          </a:p>
+        </p:txBody>
+      </p:sp>
+    </p:spTree>
+    <p:extLst>
+      <p:ext uri="{BB962C8B-B14F-4D97-AF65-F5344CB8AC3E}">
+        <p14:creationId xmlns:p14="http://schemas.microsoft.com/office/powerpoint/2010/main" val="3704531010"/>
+      </p:ext>
+    </p:extLst>
+  </p:cSld>
+  <p:clrMapOvr>
+    <a:masterClrMapping/>
+  </p:clrMapOvr>
+  <mc:AlternateContent xmlns:mc="http://schemas.openxmlformats.org/markup-compatibility/2006" xmlns:p14="http://schemas.microsoft.com/office/powerpoint/2010/main">
+    <mc:Choice Requires="p14">
+      <p:transition p14:dur="10"/>
+    </mc:Choice>
+    <mc:Fallback xmlns="">
+      <p:transition/>
+    </mc:Fallback>
+  </mc:AlternateContent>
+</p:sld>
+</file>
+
+<file path=ppt/slides/slide20.xml><?xml version="1.0" encoding="utf-8"?>
 <p:sld xmlns:a="http://schemas.openxmlformats.org/drawingml/2006/main" xmlns:r="http://schemas.openxmlformats.org/officeDocument/2006/relationships" xmlns:p="http://schemas.openxmlformats.org/presentationml/2006/main">
   <p:cSld>
     <p:spTree>
@@ -10523,7 +12767,7 @@
             <a:fld id="{D57F1E4F-1CFF-5643-939E-217C01CDF565}" type="slidenum">
               <a:rPr lang="en-US" smtClean="0"/>
               <a:pPr/>
-              <a:t>19</a:t>
+              <a:t>20</a:t>
             </a:fld>
             <a:endParaRPr lang="en-US" dirty="0"/>
           </a:p>
@@ -10638,7 +12882,13 @@
           <p:cNvGraphicFramePr>
             <a:graphicFrameLocks noGrp="1"/>
           </p:cNvGraphicFramePr>
-          <p:nvPr/>
+          <p:nvPr>
+            <p:extLst>
+              <p:ext uri="{D42A27DB-BD31-4B8C-83A1-F6EECF244321}">
+                <p14:modId xmlns:p14="http://schemas.microsoft.com/office/powerpoint/2010/main" val="3473239980"/>
+              </p:ext>
+            </p:extLst>
+          </p:nvPr>
         </p:nvGraphicFramePr>
         <p:xfrm>
           <a:off x="616256" y="1858889"/>
@@ -10651,35 +12901,35 @@
                 <a:tableStyleId>{5C22544A-7EE6-4342-B048-85BDC9FD1C3A}</a:tableStyleId>
               </a:tblPr>
               <a:tblGrid>
-                <a:gridCol w="1142131">
+                <a:gridCol w="944689">
                   <a:extLst>
                     <a:ext uri="{9D8B030D-6E8A-4147-A177-3AD203B41FA5}">
                       <a16:colId xmlns:a16="http://schemas.microsoft.com/office/drawing/2014/main" val="3226445911"/>
                     </a:ext>
                   </a:extLst>
                 </a:gridCol>
-                <a:gridCol w="1865104">
+                <a:gridCol w="1644073">
                   <a:extLst>
                     <a:ext uri="{9D8B030D-6E8A-4147-A177-3AD203B41FA5}">
                       <a16:colId xmlns:a16="http://schemas.microsoft.com/office/drawing/2014/main" val="2748943094"/>
                     </a:ext>
                   </a:extLst>
                 </a:gridCol>
-                <a:gridCol w="2936546">
+                <a:gridCol w="2724727">
                   <a:extLst>
                     <a:ext uri="{9D8B030D-6E8A-4147-A177-3AD203B41FA5}">
                       <a16:colId xmlns:a16="http://schemas.microsoft.com/office/drawing/2014/main" val="823288303"/>
                     </a:ext>
                   </a:extLst>
                 </a:gridCol>
-                <a:gridCol w="2351221">
+                <a:gridCol w="2512291">
                   <a:extLst>
                     <a:ext uri="{9D8B030D-6E8A-4147-A177-3AD203B41FA5}">
                       <a16:colId xmlns:a16="http://schemas.microsoft.com/office/drawing/2014/main" val="1692164174"/>
                     </a:ext>
                   </a:extLst>
                 </a:gridCol>
-                <a:gridCol w="2014005">
+                <a:gridCol w="2483227">
                   <a:extLst>
                     <a:ext uri="{9D8B030D-6E8A-4147-A177-3AD203B41FA5}">
                       <a16:colId xmlns:a16="http://schemas.microsoft.com/office/drawing/2014/main" val="2178149482"/>
@@ -10910,7 +13160,7 @@
                         <a:buNone/>
                       </a:pPr>
                       <a:r>
-                        <a:rPr lang="ko-KR" altLang="en-US" sz="1400" b="0" dirty="0">
+                        <a:rPr lang="ko-KR" altLang="en-US" sz="1200" b="0" kern="1200" dirty="0">
                           <a:solidFill>
                             <a:srgbClr val="1F1F1F"/>
                           </a:solidFill>
@@ -10953,7 +13203,7 @@
                         <a:buNone/>
                       </a:pPr>
                       <a:r>
-                        <a:rPr lang="en-US" sz="1400" b="0" dirty="0">
+                        <a:rPr lang="en-US" sz="1200" b="0" kern="1200" dirty="0">
                           <a:solidFill>
                             <a:srgbClr val="1F1F1F"/>
                           </a:solidFill>
@@ -10970,7 +13220,7 @@
                         <a:buNone/>
                       </a:pPr>
                       <a:r>
-                        <a:rPr lang="en-US" sz="1400" b="0" dirty="0">
+                        <a:rPr lang="en-US" sz="1200" b="0" kern="1200" dirty="0">
                           <a:solidFill>
                             <a:srgbClr val="1F1F1F"/>
                           </a:solidFill>
@@ -10982,7 +13232,7 @@
                         <a:t>(</a:t>
                       </a:r>
                       <a:r>
-                        <a:rPr lang="ko-KR" altLang="en-US" sz="1400" b="0" dirty="0" err="1">
+                        <a:rPr lang="ko-KR" altLang="en-US" sz="1200" b="0" kern="1200" dirty="0" err="1">
                           <a:solidFill>
                             <a:srgbClr val="1F1F1F"/>
                           </a:solidFill>
@@ -10994,7 +13244,7 @@
                         <a:t>드롭아웃</a:t>
                       </a:r>
                       <a:r>
-                        <a:rPr lang="en-US" altLang="ko-KR" sz="1400" b="0" dirty="0">
+                        <a:rPr lang="en-US" altLang="ko-KR" sz="1200" b="0" kern="1200" dirty="0">
                           <a:solidFill>
                             <a:srgbClr val="1F1F1F"/>
                           </a:solidFill>
@@ -11042,11 +13292,11 @@
                     <a:bodyPr/>
                     <a:lstStyle/>
                     <a:p>
-                      <a:pPr rtl="0">
+                      <a:pPr algn="ctr" rtl="0">
                         <a:buNone/>
                       </a:pPr>
                       <a:r>
-                        <a:rPr lang="ko-KR" altLang="en-US" sz="1400" b="0" dirty="0">
+                        <a:rPr lang="ko-KR" altLang="en-US" sz="1200" b="0" kern="1200" dirty="0">
                           <a:solidFill>
                             <a:srgbClr val="1F1F1F"/>
                           </a:solidFill>
@@ -11085,7 +13335,7 @@
                     <a:bodyPr/>
                     <a:lstStyle/>
                     <a:p>
-                      <a:pPr rtl="0">
+                      <a:pPr algn="ctr" rtl="0">
                         <a:buNone/>
                       </a:pPr>
                       <a:r>
@@ -11119,7 +13369,7 @@
                     <a:bodyPr/>
                     <a:lstStyle/>
                     <a:p>
-                      <a:pPr rtl="0">
+                      <a:pPr algn="ctr" rtl="0">
                         <a:buNone/>
                       </a:pPr>
                       <a:r>
@@ -11188,7 +13438,7 @@
                         <a:buNone/>
                       </a:pPr>
                       <a:r>
-                        <a:rPr lang="ko-KR" altLang="en-US" sz="1400" b="0" dirty="0">
+                        <a:rPr lang="ko-KR" altLang="en-US" sz="1200" b="0" kern="1200" dirty="0">
                           <a:solidFill>
                             <a:srgbClr val="1F1F1F"/>
                           </a:solidFill>
@@ -11222,7 +13472,7 @@
                         <a:buNone/>
                       </a:pPr>
                       <a:r>
-                        <a:rPr lang="en-US" sz="1400" b="0" dirty="0">
+                        <a:rPr lang="en-US" sz="1200" b="0" kern="1200" dirty="0">
                           <a:solidFill>
                             <a:srgbClr val="1F1F1F"/>
                           </a:solidFill>
@@ -11239,7 +13489,7 @@
                         <a:buNone/>
                       </a:pPr>
                       <a:r>
-                        <a:rPr lang="en-US" sz="1400" b="0" dirty="0">
+                        <a:rPr lang="en-US" sz="1200" b="0" kern="1200" dirty="0">
                           <a:solidFill>
                             <a:srgbClr val="1F1F1F"/>
                           </a:solidFill>
@@ -11251,7 +13501,7 @@
                         <a:t>(</a:t>
                       </a:r>
                       <a:r>
-                        <a:rPr lang="ko-KR" altLang="en-US" sz="1400" b="0" dirty="0">
+                        <a:rPr lang="ko-KR" altLang="en-US" sz="1200" b="0" kern="1200" dirty="0">
                           <a:solidFill>
                             <a:srgbClr val="1F1F1F"/>
                           </a:solidFill>
@@ -11263,7 +13513,7 @@
                         <a:t>배치 정규화</a:t>
                       </a:r>
                       <a:r>
-                        <a:rPr lang="en-US" altLang="ko-KR" sz="1400" b="0" dirty="0">
+                        <a:rPr lang="en-US" altLang="ko-KR" sz="1200" b="0" kern="1200" dirty="0">
                           <a:solidFill>
                             <a:srgbClr val="1F1F1F"/>
                           </a:solidFill>
@@ -11302,11 +13552,11 @@
                     <a:bodyPr/>
                     <a:lstStyle/>
                     <a:p>
-                      <a:pPr rtl="0">
+                      <a:pPr algn="ctr" rtl="0">
                         <a:buNone/>
                       </a:pPr>
                       <a:r>
-                        <a:rPr lang="ko-KR" altLang="en-US" sz="1400" b="0" dirty="0">
+                        <a:rPr lang="ko-KR" altLang="en-US" sz="1200" b="0" kern="1200" dirty="0">
                           <a:solidFill>
                             <a:srgbClr val="1F1F1F"/>
                           </a:solidFill>
@@ -11318,7 +13568,7 @@
                         <a:t>각 층을 통과할 때마다 데이터의 분포를 평균 </a:t>
                       </a:r>
                       <a:r>
-                        <a:rPr lang="en-US" altLang="ko-KR" sz="1400" b="0" dirty="0">
+                        <a:rPr lang="en-US" altLang="ko-KR" sz="1200" b="0" kern="1200" dirty="0">
                           <a:solidFill>
                             <a:srgbClr val="1F1F1F"/>
                           </a:solidFill>
@@ -11330,7 +13580,7 @@
                         <a:t>0, </a:t>
                       </a:r>
                       <a:r>
-                        <a:rPr lang="ko-KR" altLang="en-US" sz="1400" b="0" dirty="0">
+                        <a:rPr lang="ko-KR" altLang="en-US" sz="1200" b="0" kern="1200" dirty="0">
                           <a:solidFill>
                             <a:srgbClr val="1F1F1F"/>
                           </a:solidFill>
@@ -11342,7 +13592,7 @@
                         <a:t>분산 </a:t>
                       </a:r>
                       <a:r>
-                        <a:rPr lang="en-US" altLang="ko-KR" sz="1400" b="0" dirty="0">
+                        <a:rPr lang="en-US" altLang="ko-KR" sz="1200" b="0" kern="1200" dirty="0">
                           <a:solidFill>
                             <a:srgbClr val="1F1F1F"/>
                           </a:solidFill>
@@ -11354,7 +13604,7 @@
                         <a:t>1</a:t>
                       </a:r>
                       <a:r>
-                        <a:rPr lang="ko-KR" altLang="en-US" sz="1400" b="0" dirty="0">
+                        <a:rPr lang="ko-KR" altLang="en-US" sz="1200" b="0" kern="1200" dirty="0">
                           <a:solidFill>
                             <a:srgbClr val="1F1F1F"/>
                           </a:solidFill>
@@ -11384,7 +13634,7 @@
                     <a:bodyPr/>
                     <a:lstStyle/>
                     <a:p>
-                      <a:pPr rtl="0">
+                      <a:pPr algn="ctr" rtl="0">
                         <a:buNone/>
                       </a:pPr>
                       <a:r>
@@ -11444,7 +13694,7 @@
                     <a:bodyPr/>
                     <a:lstStyle/>
                     <a:p>
-                      <a:pPr rtl="0">
+                      <a:pPr algn="ctr" rtl="0">
                         <a:buNone/>
                       </a:pPr>
                       <a:r>
@@ -11551,7 +13801,7 @@
                         <a:buNone/>
                       </a:pPr>
                       <a:r>
-                        <a:rPr lang="ko-KR" altLang="en-US" sz="1400" b="0" dirty="0">
+                        <a:rPr lang="ko-KR" altLang="en-US" sz="1200" b="0" kern="1200" dirty="0">
                           <a:solidFill>
                             <a:srgbClr val="1F1F1F"/>
                           </a:solidFill>
@@ -11585,7 +13835,7 @@
                         <a:buNone/>
                       </a:pPr>
                       <a:r>
-                        <a:rPr lang="en-US" sz="1400" b="0" dirty="0">
+                        <a:rPr lang="en-US" sz="1200" b="0" kern="1200" dirty="0">
                           <a:solidFill>
                             <a:srgbClr val="1F1F1F"/>
                           </a:solidFill>
@@ -11602,7 +13852,7 @@
                         <a:buNone/>
                       </a:pPr>
                       <a:r>
-                        <a:rPr lang="en-US" sz="1400" b="0" dirty="0">
+                        <a:rPr lang="en-US" sz="1200" b="0" kern="1200" dirty="0">
                           <a:solidFill>
                             <a:srgbClr val="1F1F1F"/>
                           </a:solidFill>
@@ -11614,7 +13864,7 @@
                         <a:t>(</a:t>
                       </a:r>
                       <a:r>
-                        <a:rPr lang="ko-KR" altLang="en-US" sz="1400" b="0" dirty="0">
+                        <a:rPr lang="ko-KR" altLang="en-US" sz="1200" b="0" kern="1200" dirty="0">
                           <a:solidFill>
                             <a:srgbClr val="1F1F1F"/>
                           </a:solidFill>
@@ -11626,7 +13876,7 @@
                         <a:t>데이터 증강</a:t>
                       </a:r>
                       <a:r>
-                        <a:rPr lang="en-US" altLang="ko-KR" sz="1400" b="0" dirty="0">
+                        <a:rPr lang="en-US" altLang="ko-KR" sz="1200" b="0" kern="1200" dirty="0">
                           <a:solidFill>
                             <a:srgbClr val="1F1F1F"/>
                           </a:solidFill>
@@ -11665,11 +13915,11 @@
                     <a:bodyPr/>
                     <a:lstStyle/>
                     <a:p>
-                      <a:pPr rtl="0">
+                      <a:pPr algn="ctr" rtl="0">
                         <a:buNone/>
                       </a:pPr>
                       <a:r>
-                        <a:rPr lang="ko-KR" altLang="en-US" sz="1400" b="0" dirty="0">
+                        <a:rPr lang="ko-KR" altLang="en-US" sz="1200" b="0" kern="1200" dirty="0">
                           <a:solidFill>
                             <a:srgbClr val="1F1F1F"/>
                           </a:solidFill>
@@ -11681,7 +13931,7 @@
                         <a:t>원본 데이터를 회전</a:t>
                       </a:r>
                       <a:r>
-                        <a:rPr lang="en-US" altLang="ko-KR" sz="1400" b="0" dirty="0">
+                        <a:rPr lang="en-US" altLang="ko-KR" sz="1200" b="0" kern="1200" dirty="0">
                           <a:solidFill>
                             <a:srgbClr val="1F1F1F"/>
                           </a:solidFill>
@@ -11693,7 +13943,7 @@
                         <a:t>, </a:t>
                       </a:r>
                       <a:r>
-                        <a:rPr lang="ko-KR" altLang="en-US" sz="1400" b="0" dirty="0">
+                        <a:rPr lang="ko-KR" altLang="en-US" sz="1200" b="0" kern="1200" dirty="0">
                           <a:solidFill>
                             <a:srgbClr val="1F1F1F"/>
                           </a:solidFill>
@@ -11705,7 +13955,7 @@
                         <a:t>자르기</a:t>
                       </a:r>
                       <a:r>
-                        <a:rPr lang="en-US" altLang="ko-KR" sz="1400" b="0" dirty="0">
+                        <a:rPr lang="en-US" altLang="ko-KR" sz="1200" b="0" kern="1200" dirty="0">
                           <a:solidFill>
                             <a:srgbClr val="1F1F1F"/>
                           </a:solidFill>
@@ -11717,7 +13967,7 @@
                         <a:t>, </a:t>
                       </a:r>
                       <a:r>
-                        <a:rPr lang="ko-KR" altLang="en-US" sz="1400" b="0" dirty="0">
+                        <a:rPr lang="ko-KR" altLang="en-US" sz="1200" b="0" kern="1200" dirty="0">
                           <a:solidFill>
                             <a:srgbClr val="1F1F1F"/>
                           </a:solidFill>
@@ -11747,7 +13997,7 @@
                     <a:bodyPr/>
                     <a:lstStyle/>
                     <a:p>
-                      <a:pPr rtl="0">
+                      <a:pPr algn="ctr" rtl="0">
                         <a:buNone/>
                       </a:pPr>
                       <a:r>
@@ -11771,7 +14021,7 @@
                     <a:bodyPr/>
                     <a:lstStyle/>
                     <a:p>
-                      <a:pPr rtl="0">
+                      <a:pPr algn="ctr" rtl="0">
                         <a:buNone/>
                       </a:pPr>
                       <a:r>
@@ -11854,7 +14104,7 @@
                         <a:buNone/>
                       </a:pPr>
                       <a:r>
-                        <a:rPr lang="ko-KR" altLang="en-US" sz="1400" b="0" dirty="0">
+                        <a:rPr lang="ko-KR" altLang="en-US" sz="1200" b="0" kern="1200" dirty="0">
                           <a:solidFill>
                             <a:srgbClr val="1F1F1F"/>
                           </a:solidFill>
@@ -11888,7 +14138,7 @@
                         <a:buNone/>
                       </a:pPr>
                       <a:r>
-                        <a:rPr lang="en-US" sz="1400" b="0" dirty="0">
+                        <a:rPr lang="en-US" sz="1200" b="0" kern="1200" dirty="0">
                           <a:solidFill>
                             <a:srgbClr val="1F1F1F"/>
                           </a:solidFill>
@@ -11905,7 +14155,7 @@
                         <a:buNone/>
                       </a:pPr>
                       <a:r>
-                        <a:rPr lang="en-US" sz="1400" b="0" dirty="0">
+                        <a:rPr lang="en-US" sz="1200" b="0" kern="1200" dirty="0">
                           <a:solidFill>
                             <a:srgbClr val="1F1F1F"/>
                           </a:solidFill>
@@ -11917,7 +14167,7 @@
                         <a:t>(</a:t>
                       </a:r>
                       <a:r>
-                        <a:rPr lang="ko-KR" altLang="en-US" sz="1400" b="0" dirty="0">
+                        <a:rPr lang="ko-KR" altLang="en-US" sz="1200" b="0" kern="1200" dirty="0">
                           <a:solidFill>
                             <a:srgbClr val="1F1F1F"/>
                           </a:solidFill>
@@ -11929,7 +14179,7 @@
                         <a:t>가중치 감쇠</a:t>
                       </a:r>
                       <a:r>
-                        <a:rPr lang="en-US" altLang="ko-KR" sz="1400" b="0" dirty="0">
+                        <a:rPr lang="en-US" altLang="ko-KR" sz="1200" b="0" kern="1200" dirty="0">
                           <a:solidFill>
                             <a:srgbClr val="1F1F1F"/>
                           </a:solidFill>
@@ -11968,11 +14218,11 @@
                     <a:bodyPr/>
                     <a:lstStyle/>
                     <a:p>
-                      <a:pPr rtl="0">
+                      <a:pPr algn="ctr" rtl="0">
                         <a:buNone/>
                       </a:pPr>
                       <a:r>
-                        <a:rPr lang="ko-KR" altLang="en-US" sz="1400" b="0" dirty="0">
+                        <a:rPr lang="ko-KR" altLang="en-US" sz="1200" b="0" kern="1200" dirty="0">
                           <a:solidFill>
                             <a:srgbClr val="1F1F1F"/>
                           </a:solidFill>
@@ -11984,7 +14234,7 @@
                         <a:t>손실 함수에 가중치</a:t>
                       </a:r>
                       <a:r>
-                        <a:rPr lang="en-US" altLang="ko-KR" sz="1400" b="0" dirty="0">
+                        <a:rPr lang="en-US" altLang="ko-KR" sz="1200" b="0" kern="1200" dirty="0">
                           <a:solidFill>
                             <a:srgbClr val="1F1F1F"/>
                           </a:solidFill>
@@ -11996,7 +14246,7 @@
                         <a:t>($W$)</a:t>
                       </a:r>
                       <a:r>
-                        <a:rPr lang="ko-KR" altLang="en-US" sz="1400" b="0" dirty="0">
+                        <a:rPr lang="ko-KR" altLang="en-US" sz="1200" b="0" kern="1200" dirty="0">
                           <a:solidFill>
                             <a:srgbClr val="1F1F1F"/>
                           </a:solidFill>
@@ -12026,7 +14276,7 @@
                     <a:bodyPr/>
                     <a:lstStyle/>
                     <a:p>
-                      <a:pPr rtl="0">
+                      <a:pPr algn="ctr" rtl="0">
                         <a:buNone/>
                       </a:pPr>
                       <a:r>
@@ -12050,11 +14300,11 @@
                     <a:bodyPr/>
                     <a:lstStyle/>
                     <a:p>
-                      <a:pPr rtl="0">
+                      <a:pPr algn="ctr" rtl="0">
                         <a:buNone/>
                       </a:pPr>
                       <a:r>
-                        <a:rPr lang="en-US" altLang="ko-KR" sz="1200" b="0">
+                        <a:rPr lang="en-US" altLang="ko-KR" sz="1200" b="0" dirty="0">
                           <a:solidFill>
                             <a:srgbClr val="1F1F1F"/>
                           </a:solidFill>
@@ -12066,7 +14316,7 @@
                         <a:t>"</a:t>
                       </a:r>
                       <a:r>
-                        <a:rPr lang="ko-KR" altLang="en-US" sz="1200" b="0">
+                        <a:rPr lang="ko-KR" altLang="en-US" sz="1200" b="0" dirty="0">
                           <a:solidFill>
                             <a:srgbClr val="1F1F1F"/>
                           </a:solidFill>
@@ -12078,7 +14328,7 @@
                         <a:t>말할 때 너무 큰 소리</a:t>
                       </a:r>
                       <a:r>
-                        <a:rPr lang="en-US" altLang="ko-KR" sz="1200" b="0">
+                        <a:rPr lang="en-US" altLang="ko-KR" sz="1200" b="0" dirty="0">
                           <a:solidFill>
                             <a:srgbClr val="1F1F1F"/>
                           </a:solidFill>
@@ -12090,7 +14340,7 @@
                         <a:t>(</a:t>
                       </a:r>
                       <a:r>
-                        <a:rPr lang="ko-KR" altLang="en-US" sz="1200" b="0">
+                        <a:rPr lang="ko-KR" altLang="en-US" sz="1200" b="0" dirty="0">
                           <a:solidFill>
                             <a:srgbClr val="1F1F1F"/>
                           </a:solidFill>
@@ -12102,7 +14352,7 @@
                         <a:t>과한 가중치</a:t>
                       </a:r>
                       <a:r>
-                        <a:rPr lang="en-US" altLang="ko-KR" sz="1200" b="0">
+                        <a:rPr lang="en-US" altLang="ko-KR" sz="1200" b="0" dirty="0">
                           <a:solidFill>
                             <a:srgbClr val="1F1F1F"/>
                           </a:solidFill>
@@ -12114,7 +14364,7 @@
                         <a:t>)</a:t>
                       </a:r>
                       <a:r>
-                        <a:rPr lang="ko-KR" altLang="en-US" sz="1200" b="0">
+                        <a:rPr lang="ko-KR" altLang="en-US" sz="1200" b="0" dirty="0">
                           <a:solidFill>
                             <a:srgbClr val="1F1F1F"/>
                           </a:solidFill>
@@ -12126,7 +14376,7 @@
                         <a:t>를 내지 못하도록 벌금 매기</a:t>
                       </a:r>
                       <a:r>
-                        <a:rPr lang="en-US" altLang="ko-KR" sz="1200" b="0">
+                        <a:rPr lang="en-US" altLang="ko-KR" sz="1200" b="0" dirty="0">
                           <a:solidFill>
                             <a:srgbClr val="1F1F1F"/>
                           </a:solidFill>
@@ -12157,7 +14407,7 @@
                         <a:buNone/>
                       </a:pPr>
                       <a:r>
-                        <a:rPr lang="ko-KR" altLang="en-US" sz="1400" b="0" dirty="0">
+                        <a:rPr lang="ko-KR" altLang="en-US" sz="1200" b="0" kern="1200" dirty="0">
                           <a:solidFill>
                             <a:srgbClr val="1F1F1F"/>
                           </a:solidFill>
@@ -12191,7 +14441,7 @@
                         <a:buNone/>
                       </a:pPr>
                       <a:r>
-                        <a:rPr lang="en-US" sz="1400" b="0" dirty="0">
+                        <a:rPr lang="en-US" sz="1200" b="0" kern="1200" dirty="0">
                           <a:solidFill>
                             <a:srgbClr val="1F1F1F"/>
                           </a:solidFill>
@@ -12208,7 +14458,7 @@
                         <a:buNone/>
                       </a:pPr>
                       <a:r>
-                        <a:rPr lang="en-US" sz="1400" b="0" dirty="0">
+                        <a:rPr lang="en-US" sz="1200" b="0" kern="1200" dirty="0">
                           <a:solidFill>
                             <a:srgbClr val="1F1F1F"/>
                           </a:solidFill>
@@ -12220,7 +14470,7 @@
                         <a:t>(</a:t>
                       </a:r>
                       <a:r>
-                        <a:rPr lang="ko-KR" altLang="en-US" sz="1400" b="0" dirty="0">
+                        <a:rPr lang="ko-KR" altLang="en-US" sz="1200" b="0" kern="1200" dirty="0">
                           <a:solidFill>
                             <a:srgbClr val="1F1F1F"/>
                           </a:solidFill>
@@ -12232,7 +14482,7 @@
                         <a:t>조기 종료</a:t>
                       </a:r>
                       <a:r>
-                        <a:rPr lang="en-US" altLang="ko-KR" sz="1400" b="0" dirty="0">
+                        <a:rPr lang="en-US" altLang="ko-KR" sz="1200" b="0" kern="1200" dirty="0">
                           <a:solidFill>
                             <a:srgbClr val="1F1F1F"/>
                           </a:solidFill>
@@ -12271,11 +14521,11 @@
                     <a:bodyPr/>
                     <a:lstStyle/>
                     <a:p>
-                      <a:pPr rtl="0">
+                      <a:pPr algn="ctr" rtl="0">
                         <a:buNone/>
                       </a:pPr>
                       <a:r>
-                        <a:rPr lang="ko-KR" altLang="en-US" sz="1400" b="0" dirty="0">
+                        <a:rPr lang="ko-KR" altLang="en-US" sz="1200" b="0" kern="1200" dirty="0">
                           <a:solidFill>
                             <a:srgbClr val="1F1F1F"/>
                           </a:solidFill>
@@ -12287,7 +14537,7 @@
                         <a:t>검증 오차</a:t>
                       </a:r>
                       <a:r>
-                        <a:rPr lang="en-US" altLang="ko-KR" sz="1400" b="0" dirty="0">
+                        <a:rPr lang="en-US" altLang="ko-KR" sz="1200" b="0" kern="1200" dirty="0">
                           <a:solidFill>
                             <a:srgbClr val="1F1F1F"/>
                           </a:solidFill>
@@ -12299,7 +14549,7 @@
                         <a:t>(Validation Loss)</a:t>
                       </a:r>
                       <a:r>
-                        <a:rPr lang="ko-KR" altLang="en-US" sz="1400" b="0" dirty="0">
+                        <a:rPr lang="ko-KR" altLang="en-US" sz="1200" b="0" kern="1200" dirty="0">
                           <a:solidFill>
                             <a:srgbClr val="1F1F1F"/>
                           </a:solidFill>
@@ -12329,7 +14579,7 @@
                     <a:bodyPr/>
                     <a:lstStyle/>
                     <a:p>
-                      <a:pPr rtl="0">
+                      <a:pPr algn="ctr" rtl="0">
                         <a:buNone/>
                       </a:pPr>
                       <a:r>
@@ -12353,7 +14603,7 @@
                     <a:bodyPr/>
                     <a:lstStyle/>
                     <a:p>
-                      <a:pPr rtl="0">
+                      <a:pPr algn="ctr" rtl="0">
                         <a:buNone/>
                       </a:pPr>
                       <a:r>
@@ -12467,432 +14717,7 @@
 </p:sld>
 </file>
 
-<file path=ppt/slides/slide2.xml><?xml version="1.0" encoding="utf-8"?>
-<p:sld xmlns:a="http://schemas.openxmlformats.org/drawingml/2006/main" xmlns:r="http://schemas.openxmlformats.org/officeDocument/2006/relationships" xmlns:p="http://schemas.openxmlformats.org/presentationml/2006/main">
-  <p:cSld>
-    <p:spTree>
-      <p:nvGrpSpPr>
-        <p:cNvPr id="1" name="">
-          <a:extLst>
-            <a:ext uri="{FF2B5EF4-FFF2-40B4-BE49-F238E27FC236}">
-              <a16:creationId xmlns:a16="http://schemas.microsoft.com/office/drawing/2014/main" id="{10E0E775-05A8-0B2E-3045-C7403DD4772D}"/>
-            </a:ext>
-          </a:extLst>
-        </p:cNvPr>
-        <p:cNvGrpSpPr/>
-        <p:nvPr/>
-      </p:nvGrpSpPr>
-      <p:grpSpPr>
-        <a:xfrm>
-          <a:off x="0" y="0"/>
-          <a:ext cx="0" cy="0"/>
-          <a:chOff x="0" y="0"/>
-          <a:chExt cx="0" cy="0"/>
-        </a:xfrm>
-      </p:grpSpPr>
-      <p:sp>
-        <p:nvSpPr>
-          <p:cNvPr id="2" name="직사각형 1">
-            <a:extLst>
-              <a:ext uri="{FF2B5EF4-FFF2-40B4-BE49-F238E27FC236}">
-                <a16:creationId xmlns:a16="http://schemas.microsoft.com/office/drawing/2014/main" id="{001C3FE3-FA0C-4461-E726-E4ADE5CC5001}"/>
-              </a:ext>
-            </a:extLst>
-          </p:cNvPr>
-          <p:cNvSpPr/>
-          <p:nvPr/>
-        </p:nvSpPr>
-        <p:spPr>
-          <a:xfrm>
-            <a:off x="1571625" y="3238501"/>
-            <a:ext cx="7524750" cy="457200"/>
-          </a:xfrm>
-          <a:prstGeom prst="rect">
-            <a:avLst/>
-          </a:prstGeom>
-          <a:solidFill>
-            <a:schemeClr val="bg1">
-              <a:lumMod val="75000"/>
-            </a:schemeClr>
-          </a:solidFill>
-          <a:ln>
-            <a:noFill/>
-          </a:ln>
-        </p:spPr>
-        <p:style>
-          <a:lnRef idx="2">
-            <a:schemeClr val="accent1">
-              <a:shade val="15000"/>
-            </a:schemeClr>
-          </a:lnRef>
-          <a:fillRef idx="1">
-            <a:schemeClr val="accent1"/>
-          </a:fillRef>
-          <a:effectRef idx="0">
-            <a:schemeClr val="accent1"/>
-          </a:effectRef>
-          <a:fontRef idx="minor">
-            <a:schemeClr val="lt1"/>
-          </a:fontRef>
-        </p:style>
-        <p:txBody>
-          <a:bodyPr rtlCol="0" anchor="ctr"/>
-          <a:lstStyle/>
-          <a:p>
-            <a:pPr algn="ctr"/>
-            <a:endParaRPr lang="ko-KR" altLang="en-US" dirty="0"/>
-          </a:p>
-        </p:txBody>
-      </p:sp>
-      <p:sp>
-        <p:nvSpPr>
-          <p:cNvPr id="8" name="제목 7">
-            <a:extLst>
-              <a:ext uri="{FF2B5EF4-FFF2-40B4-BE49-F238E27FC236}">
-                <a16:creationId xmlns:a16="http://schemas.microsoft.com/office/drawing/2014/main" id="{584C55D0-C2AA-C028-A764-80EBE5AC2B39}"/>
-              </a:ext>
-            </a:extLst>
-          </p:cNvPr>
-          <p:cNvSpPr>
-            <a:spLocks noGrp="1"/>
-          </p:cNvSpPr>
-          <p:nvPr>
-            <p:ph type="title"/>
-          </p:nvPr>
-        </p:nvSpPr>
-        <p:spPr>
-          <a:xfrm>
-            <a:off x="521207" y="448056"/>
-            <a:ext cx="8135613" cy="640080"/>
-          </a:xfrm>
-        </p:spPr>
-        <p:txBody>
-          <a:bodyPr rtlCol="0">
-            <a:noAutofit/>
-          </a:bodyPr>
-          <a:lstStyle/>
-          <a:p>
-            <a:pPr rtl="0"/>
-            <a:r>
-              <a:rPr lang="en-US" altLang="ko-KR" dirty="0">
-                <a:solidFill>
-                  <a:schemeClr val="tx1"/>
-                </a:solidFill>
-                <a:cs typeface="Segoe UI Light" panose="020B0502040204020203" pitchFamily="34" charset="0"/>
-              </a:rPr>
-              <a:t>Contents</a:t>
-            </a:r>
-            <a:endParaRPr lang="ko-KR" altLang="en-US" dirty="0">
-              <a:solidFill>
-                <a:schemeClr val="tx1"/>
-              </a:solidFill>
-              <a:cs typeface="Segoe UI Light" panose="020B0502040204020203" pitchFamily="34" charset="0"/>
-            </a:endParaRPr>
-          </a:p>
-        </p:txBody>
-      </p:sp>
-      <p:sp>
-        <p:nvSpPr>
-          <p:cNvPr id="12" name="슬라이드 번호 개체 틀 11">
-            <a:extLst>
-              <a:ext uri="{FF2B5EF4-FFF2-40B4-BE49-F238E27FC236}">
-                <a16:creationId xmlns:a16="http://schemas.microsoft.com/office/drawing/2014/main" id="{DDEF4870-5C4D-2E0B-B788-E69040D32E16}"/>
-              </a:ext>
-            </a:extLst>
-          </p:cNvPr>
-          <p:cNvSpPr>
-            <a:spLocks noGrp="1"/>
-          </p:cNvSpPr>
-          <p:nvPr>
-            <p:ph type="sldNum" sz="quarter" idx="4"/>
-          </p:nvPr>
-        </p:nvSpPr>
-        <p:spPr/>
-        <p:txBody>
-          <a:bodyPr/>
-          <a:lstStyle/>
-          <a:p>
-            <a:fld id="{9860EDB8-5305-433F-BE41-D7A86D811DB3}" type="slidenum">
-              <a:rPr lang="en-US" altLang="ko-KR" noProof="0" smtClean="0"/>
-              <a:pPr/>
-              <a:t>2</a:t>
-            </a:fld>
-            <a:endParaRPr lang="ko-KR" altLang="en-US" noProof="0" dirty="0"/>
-          </a:p>
-        </p:txBody>
-      </p:sp>
-      <p:sp>
-        <p:nvSpPr>
-          <p:cNvPr id="16" name="TextBox 15">
-            <a:extLst>
-              <a:ext uri="{FF2B5EF4-FFF2-40B4-BE49-F238E27FC236}">
-                <a16:creationId xmlns:a16="http://schemas.microsoft.com/office/drawing/2014/main" id="{D2B4665E-8947-4774-C082-ED94684AA3E1}"/>
-              </a:ext>
-            </a:extLst>
-          </p:cNvPr>
-          <p:cNvSpPr txBox="1"/>
-          <p:nvPr/>
-        </p:nvSpPr>
-        <p:spPr>
-          <a:xfrm>
-            <a:off x="2477049" y="1345311"/>
-            <a:ext cx="6752676" cy="5123390"/>
-          </a:xfrm>
-          <a:prstGeom prst="rect">
-            <a:avLst/>
-          </a:prstGeom>
-          <a:noFill/>
-        </p:spPr>
-        <p:txBody>
-          <a:bodyPr wrap="square" rtlCol="0">
-            <a:spAutoFit/>
-          </a:bodyPr>
-          <a:lstStyle/>
-          <a:p>
-            <a:pPr marL="342900" indent="-342900">
-              <a:lnSpc>
-                <a:spcPct val="150000"/>
-              </a:lnSpc>
-              <a:buFont typeface="+mj-lt"/>
-              <a:buAutoNum type="arabicPeriod"/>
-            </a:pPr>
-            <a:r>
-              <a:rPr lang="en-US" altLang="ko-KR" sz="2000" b="1" dirty="0">
-                <a:latin typeface="D2Coding" panose="020B0609020101020101" pitchFamily="49" charset="-127"/>
-                <a:ea typeface="D2Coding" panose="020B0609020101020101" pitchFamily="49" charset="-127"/>
-                <a:cs typeface="맑은 고딕 Semilight" panose="020B0502040204020203" pitchFamily="50" charset="-127"/>
-              </a:rPr>
-              <a:t>Tensor</a:t>
-            </a:r>
-          </a:p>
-          <a:p>
-            <a:pPr marL="342900" indent="-342900">
-              <a:lnSpc>
-                <a:spcPct val="150000"/>
-              </a:lnSpc>
-              <a:buFont typeface="+mj-lt"/>
-              <a:buAutoNum type="arabicPeriod"/>
-            </a:pPr>
-            <a:r>
-              <a:rPr lang="en-US" altLang="ko-KR" sz="2000" b="1" dirty="0" err="1">
-                <a:latin typeface="D2Coding" panose="020B0609020101020101" pitchFamily="49" charset="-127"/>
-                <a:ea typeface="D2Coding" panose="020B0609020101020101" pitchFamily="49" charset="-127"/>
-                <a:cs typeface="맑은 고딕 Semilight" panose="020B0502040204020203" pitchFamily="50" charset="-127"/>
-              </a:rPr>
-              <a:t>Autograd</a:t>
-            </a:r>
-            <a:endParaRPr lang="en-US" altLang="ko-KR" sz="2000" b="1" dirty="0">
-              <a:latin typeface="D2Coding" panose="020B0609020101020101" pitchFamily="49" charset="-127"/>
-              <a:ea typeface="D2Coding" panose="020B0609020101020101" pitchFamily="49" charset="-127"/>
-              <a:cs typeface="맑은 고딕 Semilight" panose="020B0502040204020203" pitchFamily="50" charset="-127"/>
-            </a:endParaRPr>
-          </a:p>
-          <a:p>
-            <a:pPr marL="342900" indent="-342900">
-              <a:lnSpc>
-                <a:spcPct val="150000"/>
-              </a:lnSpc>
-              <a:buFont typeface="+mj-lt"/>
-              <a:buAutoNum type="arabicPeriod"/>
-            </a:pPr>
-            <a:r>
-              <a:rPr lang="en-US" altLang="ko-KR" sz="2000" b="1" dirty="0">
-                <a:latin typeface="D2Coding" panose="020B0609020101020101" pitchFamily="49" charset="-127"/>
-                <a:ea typeface="D2Coding" panose="020B0609020101020101" pitchFamily="49" charset="-127"/>
-                <a:cs typeface="맑은 고딕 Semilight" panose="020B0502040204020203" pitchFamily="50" charset="-127"/>
-              </a:rPr>
-              <a:t>Backpropagation</a:t>
-            </a:r>
-          </a:p>
-          <a:p>
-            <a:pPr marL="342900" indent="-342900">
-              <a:lnSpc>
-                <a:spcPct val="150000"/>
-              </a:lnSpc>
-              <a:buFont typeface="+mj-lt"/>
-              <a:buAutoNum type="arabicPeriod"/>
-            </a:pPr>
-            <a:r>
-              <a:rPr lang="en-US" altLang="ko-KR" sz="2000" b="1" dirty="0">
-                <a:latin typeface="D2Coding" panose="020B0609020101020101" pitchFamily="49" charset="-127"/>
-                <a:ea typeface="D2Coding" panose="020B0609020101020101" pitchFamily="49" charset="-127"/>
-                <a:cs typeface="맑은 고딕 Semilight" panose="020B0502040204020203" pitchFamily="50" charset="-127"/>
-              </a:rPr>
-              <a:t>Forward &amp; Backward Pass</a:t>
-            </a:r>
-          </a:p>
-          <a:p>
-            <a:pPr marL="342900" indent="-342900">
-              <a:lnSpc>
-                <a:spcPct val="150000"/>
-              </a:lnSpc>
-              <a:buFont typeface="+mj-lt"/>
-              <a:buAutoNum type="arabicPeriod"/>
-            </a:pPr>
-            <a:r>
-              <a:rPr lang="en-US" altLang="ko-KR" sz="2000" b="1" dirty="0">
-                <a:latin typeface="D2Coding" panose="020B0609020101020101" pitchFamily="49" charset="-127"/>
-                <a:ea typeface="D2Coding" panose="020B0609020101020101" pitchFamily="49" charset="-127"/>
-                <a:cs typeface="맑은 고딕 Semilight" panose="020B0502040204020203" pitchFamily="50" charset="-127"/>
-              </a:rPr>
-              <a:t>Optimizer &amp; Model</a:t>
-            </a:r>
-          </a:p>
-          <a:p>
-            <a:pPr marL="342900" indent="-342900">
-              <a:lnSpc>
-                <a:spcPct val="150000"/>
-              </a:lnSpc>
-              <a:buFont typeface="+mj-lt"/>
-              <a:buAutoNum type="arabicPeriod"/>
-            </a:pPr>
-            <a:r>
-              <a:rPr lang="en-US" altLang="ko-KR" sz="2000" b="1" dirty="0">
-                <a:latin typeface="D2Coding" panose="020B0609020101020101" pitchFamily="49" charset="-127"/>
-                <a:ea typeface="D2Coding" panose="020B0609020101020101" pitchFamily="49" charset="-127"/>
-                <a:cs typeface="맑은 고딕 Semilight" panose="020B0502040204020203" pitchFamily="50" charset="-127"/>
-              </a:rPr>
-              <a:t>Optimizers</a:t>
-            </a:r>
-          </a:p>
-          <a:p>
-            <a:pPr marL="342900" indent="-342900">
-              <a:lnSpc>
-                <a:spcPct val="150000"/>
-              </a:lnSpc>
-              <a:buFont typeface="+mj-lt"/>
-              <a:buAutoNum type="arabicPeriod"/>
-            </a:pPr>
-            <a:r>
-              <a:rPr lang="en-US" altLang="ko-KR" sz="2000" b="1" dirty="0">
-                <a:latin typeface="D2Coding" panose="020B0609020101020101" pitchFamily="49" charset="-127"/>
-                <a:ea typeface="D2Coding" panose="020B0609020101020101" pitchFamily="49" charset="-127"/>
-                <a:cs typeface="맑은 고딕 Semilight" panose="020B0502040204020203" pitchFamily="50" charset="-127"/>
-              </a:rPr>
-              <a:t> Loss Function with L1, L2 regularization</a:t>
-            </a:r>
-          </a:p>
-          <a:p>
-            <a:pPr marL="342900" indent="-342900">
-              <a:lnSpc>
-                <a:spcPct val="150000"/>
-              </a:lnSpc>
-              <a:buFont typeface="+mj-lt"/>
-              <a:buAutoNum type="arabicPeriod"/>
-            </a:pPr>
-            <a:r>
-              <a:rPr lang="en-US" altLang="ko-KR" sz="2000" b="1" dirty="0">
-                <a:latin typeface="D2Coding" panose="020B0609020101020101" pitchFamily="49" charset="-127"/>
-                <a:ea typeface="D2Coding" panose="020B0609020101020101" pitchFamily="49" charset="-127"/>
-                <a:cs typeface="맑은 고딕 Semilight" panose="020B0502040204020203" pitchFamily="50" charset="-127"/>
-              </a:rPr>
-              <a:t> Regularizations</a:t>
-            </a:r>
-          </a:p>
-          <a:p>
-            <a:pPr marL="342900" indent="-342900">
-              <a:lnSpc>
-                <a:spcPct val="150000"/>
-              </a:lnSpc>
-              <a:buFont typeface="+mj-lt"/>
-              <a:buAutoNum type="arabicPeriod"/>
-            </a:pPr>
-            <a:r>
-              <a:rPr lang="en-US" altLang="ko-KR" sz="2000" b="1" dirty="0">
-                <a:latin typeface="D2Coding" panose="020B0609020101020101" pitchFamily="49" charset="-127"/>
-                <a:ea typeface="D2Coding" panose="020B0609020101020101" pitchFamily="49" charset="-127"/>
-                <a:cs typeface="맑은 고딕 Semilight" panose="020B0502040204020203" pitchFamily="50" charset="-127"/>
-              </a:rPr>
-              <a:t> </a:t>
-            </a:r>
-            <a:r>
-              <a:rPr lang="en-US" altLang="ko-KR" sz="2000" b="1" dirty="0" err="1">
-                <a:latin typeface="D2Coding" panose="020B0609020101020101" pitchFamily="49" charset="-127"/>
-                <a:ea typeface="D2Coding" panose="020B0609020101020101" pitchFamily="49" charset="-127"/>
-                <a:cs typeface="맑은 고딕 Semilight" panose="020B0502040204020203" pitchFamily="50" charset="-127"/>
-              </a:rPr>
-              <a:t>Pytorch</a:t>
-            </a:r>
-            <a:r>
-              <a:rPr lang="en-US" altLang="ko-KR" sz="2000" b="1" dirty="0">
-                <a:latin typeface="D2Coding" panose="020B0609020101020101" pitchFamily="49" charset="-127"/>
-                <a:ea typeface="D2Coding" panose="020B0609020101020101" pitchFamily="49" charset="-127"/>
-                <a:cs typeface="맑은 고딕 Semilight" panose="020B0502040204020203" pitchFamily="50" charset="-127"/>
-              </a:rPr>
-              <a:t> with fashion </a:t>
-            </a:r>
-            <a:r>
-              <a:rPr lang="en-US" altLang="ko-KR" sz="2000" b="1" dirty="0" err="1">
-                <a:latin typeface="D2Coding" panose="020B0609020101020101" pitchFamily="49" charset="-127"/>
-                <a:ea typeface="D2Coding" panose="020B0609020101020101" pitchFamily="49" charset="-127"/>
-                <a:cs typeface="맑은 고딕 Semilight" panose="020B0502040204020203" pitchFamily="50" charset="-127"/>
-              </a:rPr>
-              <a:t>mnist</a:t>
-            </a:r>
-            <a:endParaRPr lang="en-US" altLang="ko-KR" sz="2000" b="1" dirty="0">
-              <a:latin typeface="D2Coding" panose="020B0609020101020101" pitchFamily="49" charset="-127"/>
-              <a:ea typeface="D2Coding" panose="020B0609020101020101" pitchFamily="49" charset="-127"/>
-              <a:cs typeface="맑은 고딕 Semilight" panose="020B0502040204020203" pitchFamily="50" charset="-127"/>
-            </a:endParaRPr>
-          </a:p>
-          <a:p>
-            <a:pPr marL="342900" indent="-342900">
-              <a:lnSpc>
-                <a:spcPct val="150000"/>
-              </a:lnSpc>
-              <a:buFont typeface="+mj-lt"/>
-              <a:buAutoNum type="arabicPeriod"/>
-            </a:pPr>
-            <a:r>
-              <a:rPr lang="en-US" altLang="ko-KR" sz="2000" b="1" dirty="0">
-                <a:latin typeface="D2Coding" panose="020B0609020101020101" pitchFamily="49" charset="-127"/>
-                <a:ea typeface="D2Coding" panose="020B0609020101020101" pitchFamily="49" charset="-127"/>
-                <a:cs typeface="맑은 고딕 Semilight" panose="020B0502040204020203" pitchFamily="50" charset="-127"/>
-              </a:rPr>
-              <a:t> Understanding basic CNN</a:t>
-            </a:r>
-          </a:p>
-          <a:p>
-            <a:pPr marL="342900" indent="-342900">
-              <a:lnSpc>
-                <a:spcPct val="150000"/>
-              </a:lnSpc>
-              <a:buFont typeface="+mj-lt"/>
-              <a:buAutoNum type="arabicPeriod"/>
-            </a:pPr>
-            <a:r>
-              <a:rPr lang="en-US" altLang="ko-KR" sz="2000" b="1" dirty="0">
-                <a:latin typeface="D2Coding" panose="020B0609020101020101" pitchFamily="49" charset="-127"/>
-                <a:ea typeface="D2Coding" panose="020B0609020101020101" pitchFamily="49" charset="-127"/>
-                <a:cs typeface="맑은 고딕 Semilight" panose="020B0502040204020203" pitchFamily="50" charset="-127"/>
-              </a:rPr>
-              <a:t> Roadmap to ML &amp; ML</a:t>
-            </a:r>
-          </a:p>
-        </p:txBody>
-      </p:sp>
-    </p:spTree>
-    <p:extLst>
-      <p:ext uri="{BB962C8B-B14F-4D97-AF65-F5344CB8AC3E}">
-        <p14:creationId xmlns:p14="http://schemas.microsoft.com/office/powerpoint/2010/main" val="3704531010"/>
-      </p:ext>
-    </p:extLst>
-  </p:cSld>
-  <p:clrMapOvr>
-    <a:masterClrMapping/>
-  </p:clrMapOvr>
-  <mc:AlternateContent xmlns:mc="http://schemas.openxmlformats.org/markup-compatibility/2006" xmlns:p14="http://schemas.microsoft.com/office/powerpoint/2010/main">
-    <mc:Choice Requires="p14">
-      <p:transition p14:dur="10"/>
-    </mc:Choice>
-    <mc:Fallback xmlns="">
-      <p:transition/>
-    </mc:Fallback>
-  </mc:AlternateContent>
-</p:sld>
-</file>
-
-<file path=ppt/slides/slide20.xml><?xml version="1.0" encoding="utf-8"?>
+<file path=ppt/slides/slide21.xml><?xml version="1.0" encoding="utf-8"?>
 <p:sld xmlns:a="http://schemas.openxmlformats.org/drawingml/2006/main" xmlns:r="http://schemas.openxmlformats.org/officeDocument/2006/relationships" xmlns:p="http://schemas.openxmlformats.org/presentationml/2006/main">
   <p:cSld>
     <p:spTree>
@@ -13024,7 +14849,7 @@
             <a:fld id="{D57F1E4F-1CFF-5643-939E-217C01CDF565}" type="slidenum">
               <a:rPr lang="en-US" smtClean="0"/>
               <a:pPr/>
-              <a:t>20</a:t>
+              <a:t>21</a:t>
             </a:fld>
             <a:endParaRPr lang="en-US" dirty="0"/>
           </a:p>
@@ -13598,7 +15423,7 @@
 </p:sld>
 </file>
 
-<file path=ppt/slides/slide21.xml><?xml version="1.0" encoding="utf-8"?>
+<file path=ppt/slides/slide22.xml><?xml version="1.0" encoding="utf-8"?>
 <p:sld xmlns:a="http://schemas.openxmlformats.org/drawingml/2006/main" xmlns:r="http://schemas.openxmlformats.org/officeDocument/2006/relationships" xmlns:p="http://schemas.openxmlformats.org/presentationml/2006/main">
   <p:cSld>
     <p:spTree>
@@ -13746,7 +15571,7 @@
             <a:fld id="{9860EDB8-5305-433F-BE41-D7A86D811DB3}" type="slidenum">
               <a:rPr lang="en-US" altLang="ko-KR" noProof="0" smtClean="0"/>
               <a:pPr/>
-              <a:t>21</a:t>
+              <a:t>22</a:t>
             </a:fld>
             <a:endParaRPr lang="ko-KR" altLang="en-US" noProof="0" dirty="0"/>
           </a:p>
@@ -14023,7 +15848,7 @@
 </p:sld>
 </file>
 
-<file path=ppt/slides/slide22.xml><?xml version="1.0" encoding="utf-8"?>
+<file path=ppt/slides/slide23.xml><?xml version="1.0" encoding="utf-8"?>
 <p:sld xmlns:a="http://schemas.openxmlformats.org/drawingml/2006/main" xmlns:r="http://schemas.openxmlformats.org/officeDocument/2006/relationships" xmlns:p="http://schemas.openxmlformats.org/presentationml/2006/main">
   <p:cSld>
     <p:spTree>
@@ -14070,7 +15895,7 @@
             <a:fld id="{9860EDB8-5305-433F-BE41-D7A86D811DB3}" type="slidenum">
               <a:rPr lang="en-US" altLang="ko-KR" noProof="0" smtClean="0"/>
               <a:pPr/>
-              <a:t>22</a:t>
+              <a:t>23</a:t>
             </a:fld>
             <a:endParaRPr lang="ko-KR" altLang="en-US" noProof="0"/>
           </a:p>
@@ -14477,7 +16302,7 @@
 </p:sld>
 </file>
 
-<file path=ppt/slides/slide23.xml><?xml version="1.0" encoding="utf-8"?>
+<file path=ppt/slides/slide24.xml><?xml version="1.0" encoding="utf-8"?>
 <p:sld xmlns:a="http://schemas.openxmlformats.org/drawingml/2006/main" xmlns:r="http://schemas.openxmlformats.org/officeDocument/2006/relationships" xmlns:p="http://schemas.openxmlformats.org/presentationml/2006/main">
   <p:cSld>
     <p:spTree>
@@ -14524,7 +16349,7 @@
             <a:fld id="{9860EDB8-5305-433F-BE41-D7A86D811DB3}" type="slidenum">
               <a:rPr lang="en-US" altLang="ko-KR" noProof="0" smtClean="0"/>
               <a:pPr/>
-              <a:t>23</a:t>
+              <a:t>24</a:t>
             </a:fld>
             <a:endParaRPr lang="ko-KR" altLang="en-US" noProof="0" dirty="0"/>
           </a:p>
@@ -14655,7 +16480,7 @@
 </p:sld>
 </file>
 
-<file path=ppt/slides/slide24.xml><?xml version="1.0" encoding="utf-8"?>
+<file path=ppt/slides/slide25.xml><?xml version="1.0" encoding="utf-8"?>
 <p:sld xmlns:a="http://schemas.openxmlformats.org/drawingml/2006/main" xmlns:r="http://schemas.openxmlformats.org/officeDocument/2006/relationships" xmlns:p="http://schemas.openxmlformats.org/presentationml/2006/main">
   <p:cSld>
     <p:spTree>
@@ -14803,7 +16628,7 @@
             <a:fld id="{9860EDB8-5305-433F-BE41-D7A86D811DB3}" type="slidenum">
               <a:rPr lang="en-US" altLang="ko-KR" noProof="0" smtClean="0"/>
               <a:pPr/>
-              <a:t>24</a:t>
+              <a:t>25</a:t>
             </a:fld>
             <a:endParaRPr lang="ko-KR" altLang="en-US" noProof="0" dirty="0"/>
           </a:p>
@@ -15080,7 +16905,7 @@
 </p:sld>
 </file>
 
-<file path=ppt/slides/slide25.xml><?xml version="1.0" encoding="utf-8"?>
+<file path=ppt/slides/slide26.xml><?xml version="1.0" encoding="utf-8"?>
 <p:sld xmlns:a="http://schemas.openxmlformats.org/drawingml/2006/main" xmlns:r="http://schemas.openxmlformats.org/officeDocument/2006/relationships" xmlns:p="http://schemas.openxmlformats.org/presentationml/2006/main">
   <p:cSld>
     <p:spTree>
@@ -15227,7 +17052,7 @@
             <a:fld id="{9860EDB8-5305-433F-BE41-D7A86D811DB3}" type="slidenum">
               <a:rPr lang="en-US" altLang="ko-KR" noProof="0" smtClean="0"/>
               <a:pPr/>
-              <a:t>25</a:t>
+              <a:t>26</a:t>
             </a:fld>
             <a:endParaRPr lang="ko-KR" altLang="en-US" noProof="0" dirty="0"/>
           </a:p>
@@ -16219,7 +18044,7 @@
 </p:sld>
 </file>
 
-<file path=ppt/slides/slide26.xml><?xml version="1.0" encoding="utf-8"?>
+<file path=ppt/slides/slide27.xml><?xml version="1.0" encoding="utf-8"?>
 <p:sld xmlns:a="http://schemas.openxmlformats.org/drawingml/2006/main" xmlns:r="http://schemas.openxmlformats.org/officeDocument/2006/relationships" xmlns:p="http://schemas.openxmlformats.org/presentationml/2006/main">
   <p:cSld>
     <p:spTree>
@@ -16367,7 +18192,7 @@
             <a:fld id="{9860EDB8-5305-433F-BE41-D7A86D811DB3}" type="slidenum">
               <a:rPr lang="en-US" altLang="ko-KR" noProof="0" smtClean="0"/>
               <a:pPr/>
-              <a:t>26</a:t>
+              <a:t>27</a:t>
             </a:fld>
             <a:endParaRPr lang="ko-KR" altLang="en-US" noProof="0" dirty="0"/>
           </a:p>
@@ -16644,7 +18469,7 @@
 </p:sld>
 </file>
 
-<file path=ppt/slides/slide27.xml><?xml version="1.0" encoding="utf-8"?>
+<file path=ppt/slides/slide28.xml><?xml version="1.0" encoding="utf-8"?>
 <p:sld xmlns:a="http://schemas.openxmlformats.org/drawingml/2006/main" xmlns:r="http://schemas.openxmlformats.org/officeDocument/2006/relationships" xmlns:p="http://schemas.openxmlformats.org/presentationml/2006/main">
   <p:cSld>
     <p:spTree>
@@ -16696,7 +18521,7 @@
             <a:fld id="{D57F1E4F-1CFF-5643-939E-217C01CDF565}" type="slidenum">
               <a:rPr lang="en-US" smtClean="0"/>
               <a:pPr/>
-              <a:t>27</a:t>
+              <a:t>28</a:t>
             </a:fld>
             <a:endParaRPr lang="en-US" dirty="0"/>
           </a:p>
@@ -17176,7 +19001,7 @@
 </p:sld>
 </file>
 
-<file path=ppt/slides/slide28.xml><?xml version="1.0" encoding="utf-8"?>
+<file path=ppt/slides/slide29.xml><?xml version="1.0" encoding="utf-8"?>
 <p:sld xmlns:a="http://schemas.openxmlformats.org/drawingml/2006/main" xmlns:r="http://schemas.openxmlformats.org/officeDocument/2006/relationships" xmlns:p="http://schemas.openxmlformats.org/presentationml/2006/main">
   <p:cSld>
     <p:spTree>
@@ -17276,7 +19101,7 @@
             <a:fld id="{9860EDB8-5305-433F-BE41-D7A86D811DB3}" type="slidenum">
               <a:rPr lang="en-US" altLang="ko-KR" noProof="0" smtClean="0"/>
               <a:pPr/>
-              <a:t>28</a:t>
+              <a:t>29</a:t>
             </a:fld>
             <a:endParaRPr lang="ko-KR" altLang="en-US" noProof="0" dirty="0"/>
           </a:p>
@@ -18512,7 +20337,7 @@
                 <a:ea typeface="D2Coding" panose="020B0609020101020101" pitchFamily="49" charset="-127"/>
                 <a:cs typeface="Segoe UI Light" panose="020B0502040204020203" pitchFamily="34" charset="0"/>
               </a:rPr>
-              <a:t>From scratch</a:t>
+              <a:t>1. from scratch</a:t>
             </a:r>
             <a:endParaRPr lang="ko-KR" altLang="en-US" b="1" dirty="0">
               <a:latin typeface="D2Coding" panose="020B0609020101020101" pitchFamily="49" charset="-127"/>
@@ -20083,7 +21908,7 @@
                 <a:ea typeface="D2Coding" panose="020B0609020101020101" pitchFamily="49" charset="-127"/>
                 <a:cs typeface="Segoe UI Light" panose="020B0502040204020203" pitchFamily="34" charset="0"/>
               </a:rPr>
-              <a:t>Optimizer</a:t>
+              <a:t>2. optimizer</a:t>
             </a:r>
             <a:endParaRPr lang="ko-KR" altLang="en-US" b="1" dirty="0">
               <a:latin typeface="D2Coding" panose="020B0609020101020101" pitchFamily="49" charset="-127"/>
@@ -20107,7 +21932,7 @@
         </p:nvSpPr>
         <p:spPr>
           <a:xfrm>
-            <a:off x="543474" y="1433415"/>
+            <a:off x="1116124" y="1433415"/>
             <a:ext cx="8295726" cy="4770537"/>
           </a:xfrm>
           <a:prstGeom prst="rect">
@@ -21105,8 +22930,8 @@
         </p:nvSpPr>
         <p:spPr>
           <a:xfrm>
-            <a:off x="958593" y="5342037"/>
-            <a:ext cx="6356607" cy="814290"/>
+            <a:off x="646545" y="5369745"/>
+            <a:ext cx="7241305" cy="814290"/>
           </a:xfrm>
           <a:prstGeom prst="rect">
             <a:avLst/>
@@ -21332,7 +23157,7 @@
                 <a:ea typeface="D2Coding" panose="020B0609020101020101" pitchFamily="49" charset="-127"/>
                 <a:cs typeface="Segoe UI Light" panose="020B0502040204020203" pitchFamily="34" charset="0"/>
               </a:rPr>
-              <a:t>model (like pro)</a:t>
+              <a:t>3. model (like pro)</a:t>
             </a:r>
             <a:endParaRPr lang="ko-KR" altLang="en-US" b="1" dirty="0">
               <a:latin typeface="D2Coding" panose="020B0609020101020101" pitchFamily="49" charset="-127"/>
@@ -21356,14 +23181,14 @@
         </p:nvSpPr>
         <p:spPr>
           <a:xfrm>
-            <a:off x="600253" y="1371860"/>
+            <a:off x="941999" y="1371860"/>
             <a:ext cx="5030260" cy="4832092"/>
           </a:xfrm>
           <a:prstGeom prst="rect">
             <a:avLst/>
           </a:prstGeom>
           <a:solidFill>
-            <a:schemeClr val="accent4"/>
+            <a:srgbClr val="92D050"/>
           </a:solidFill>
         </p:spPr>
         <p:txBody>
@@ -21933,7 +23758,7 @@
             <a:avLst/>
           </a:prstGeom>
           <a:solidFill>
-            <a:schemeClr val="accent4"/>
+            <a:srgbClr val="92D050"/>
           </a:solidFill>
         </p:spPr>
         <p:txBody>
@@ -22451,6 +24276,58 @@
               </a:rPr>
               <a:t>')</a:t>
             </a:r>
+          </a:p>
+        </p:txBody>
+      </p:sp>
+      <p:sp>
+        <p:nvSpPr>
+          <p:cNvPr id="4" name="직사각형 3">
+            <a:extLst>
+              <a:ext uri="{FF2B5EF4-FFF2-40B4-BE49-F238E27FC236}">
+                <a16:creationId xmlns:a16="http://schemas.microsoft.com/office/drawing/2014/main" id="{FCFF61B4-C3E4-021B-E1A6-9CFDBB592E4F}"/>
+              </a:ext>
+            </a:extLst>
+          </p:cNvPr>
+          <p:cNvSpPr/>
+          <p:nvPr/>
+        </p:nvSpPr>
+        <p:spPr>
+          <a:xfrm>
+            <a:off x="521207" y="2469527"/>
+            <a:ext cx="5574793" cy="2074762"/>
+          </a:xfrm>
+          <a:prstGeom prst="rect">
+            <a:avLst/>
+          </a:prstGeom>
+          <a:noFill/>
+          <a:ln w="38100">
+            <a:solidFill>
+              <a:srgbClr val="FF0000"/>
+            </a:solidFill>
+          </a:ln>
+        </p:spPr>
+        <p:style>
+          <a:lnRef idx="2">
+            <a:schemeClr val="accent1">
+              <a:shade val="15000"/>
+            </a:schemeClr>
+          </a:lnRef>
+          <a:fillRef idx="1">
+            <a:schemeClr val="accent1"/>
+          </a:fillRef>
+          <a:effectRef idx="0">
+            <a:schemeClr val="accent1"/>
+          </a:effectRef>
+          <a:fontRef idx="minor">
+            <a:schemeClr val="lt1"/>
+          </a:fontRef>
+        </p:style>
+        <p:txBody>
+          <a:bodyPr rtlCol="0" anchor="ctr"/>
+          <a:lstStyle/>
+          <a:p>
+            <a:pPr algn="ctr"/>
+            <a:endParaRPr lang="ko-KR" altLang="en-US"/>
           </a:p>
         </p:txBody>
       </p:sp>
@@ -22472,6 +24349,87 @@
       <p:transition/>
     </mc:Fallback>
   </mc:AlternateContent>
+  <p:timing>
+    <p:tnLst>
+      <p:par>
+        <p:cTn id="1" dur="indefinite" restart="never" nodeType="tmRoot">
+          <p:childTnLst>
+            <p:seq concurrent="1" nextAc="seek">
+              <p:cTn id="2" dur="indefinite" nodeType="mainSeq">
+                <p:childTnLst>
+                  <p:par>
+                    <p:cTn id="3" fill="hold">
+                      <p:stCondLst>
+                        <p:cond delay="indefinite"/>
+                        <p:cond evt="onBegin" delay="0">
+                          <p:tn val="2"/>
+                        </p:cond>
+                      </p:stCondLst>
+                      <p:childTnLst>
+                        <p:par>
+                          <p:cTn id="4" fill="hold">
+                            <p:stCondLst>
+                              <p:cond delay="0"/>
+                            </p:stCondLst>
+                            <p:childTnLst>
+                              <p:par>
+                                <p:cTn id="5" presetID="1" presetClass="entr" presetSubtype="0" fill="hold" grpId="0" nodeType="withEffect">
+                                  <p:stCondLst>
+                                    <p:cond delay="0"/>
+                                  </p:stCondLst>
+                                  <p:childTnLst>
+                                    <p:set>
+                                      <p:cBhvr>
+                                        <p:cTn id="6" dur="1" fill="hold">
+                                          <p:stCondLst>
+                                            <p:cond delay="0"/>
+                                          </p:stCondLst>
+                                        </p:cTn>
+                                        <p:tgtEl>
+                                          <p:spTgt spid="4"/>
+                                        </p:tgtEl>
+                                        <p:attrNameLst>
+                                          <p:attrName>style.visibility</p:attrName>
+                                        </p:attrNameLst>
+                                      </p:cBhvr>
+                                      <p:to>
+                                        <p:strVal val="visible"/>
+                                      </p:to>
+                                    </p:set>
+                                  </p:childTnLst>
+                                </p:cTn>
+                              </p:par>
+                            </p:childTnLst>
+                          </p:cTn>
+                        </p:par>
+                      </p:childTnLst>
+                    </p:cTn>
+                  </p:par>
+                </p:childTnLst>
+              </p:cTn>
+              <p:prevCondLst>
+                <p:cond evt="onPrev" delay="0">
+                  <p:tgtEl>
+                    <p:sldTgt/>
+                  </p:tgtEl>
+                </p:cond>
+              </p:prevCondLst>
+              <p:nextCondLst>
+                <p:cond evt="onNext" delay="0">
+                  <p:tgtEl>
+                    <p:sldTgt/>
+                  </p:tgtEl>
+                </p:cond>
+              </p:nextCondLst>
+            </p:seq>
+          </p:childTnLst>
+        </p:cTn>
+      </p:par>
+    </p:tnLst>
+    <p:bldLst>
+      <p:bldP spid="4" grpId="0" animBg="1"/>
+    </p:bldLst>
+  </p:timing>
 </p:sld>
 </file>
 
@@ -22483,7 +24441,7 @@
         <p:cNvPr id="1" name="">
           <a:extLst>
             <a:ext uri="{FF2B5EF4-FFF2-40B4-BE49-F238E27FC236}">
-              <a16:creationId xmlns:a16="http://schemas.microsoft.com/office/drawing/2014/main" id="{FC55FDEC-92DB-458A-4D4A-C5719743A818}"/>
+              <a16:creationId xmlns:a16="http://schemas.microsoft.com/office/drawing/2014/main" id="{00C5F4DD-CB94-3340-8B81-7BA5CCD4B9D4}"/>
             </a:ext>
           </a:extLst>
         </p:cNvPr>
@@ -22503,7 +24461,7 @@
           <p:cNvPr id="12" name="슬라이드 번호 개체 틀 11">
             <a:extLst>
               <a:ext uri="{FF2B5EF4-FFF2-40B4-BE49-F238E27FC236}">
-                <a16:creationId xmlns:a16="http://schemas.microsoft.com/office/drawing/2014/main" id="{6170C0F2-1D86-E3C1-A314-0F9824FDBA01}"/>
+                <a16:creationId xmlns:a16="http://schemas.microsoft.com/office/drawing/2014/main" id="{F272D7B0-04E8-FAD1-7A01-90042C71F088}"/>
               </a:ext>
             </a:extLst>
           </p:cNvPr>
@@ -22524,7 +24482,7 @@
               <a:pPr/>
               <a:t>8</a:t>
             </a:fld>
-            <a:endParaRPr lang="ko-KR" altLang="en-US" noProof="0"/>
+            <a:endParaRPr lang="ko-KR" altLang="en-US" noProof="0" dirty="0"/>
           </a:p>
         </p:txBody>
       </p:sp>
@@ -22533,7 +24491,7 @@
           <p:cNvPr id="9" name="제목 7">
             <a:extLst>
               <a:ext uri="{FF2B5EF4-FFF2-40B4-BE49-F238E27FC236}">
-                <a16:creationId xmlns:a16="http://schemas.microsoft.com/office/drawing/2014/main" id="{F05F2869-814D-7F01-9596-6A440BFDCDFD}"/>
+                <a16:creationId xmlns:a16="http://schemas.microsoft.com/office/drawing/2014/main" id="{AFB13091-5220-FC43-0B7C-5ED49F66EC70}"/>
               </a:ext>
             </a:extLst>
           </p:cNvPr>
@@ -22562,7 +24520,23 @@
                 <a:ea typeface="D2Coding" panose="020B0609020101020101" pitchFamily="49" charset="-127"/>
                 <a:cs typeface="Segoe UI Light" panose="020B0502040204020203" pitchFamily="34" charset="0"/>
               </a:rPr>
-              <a:t>Gradient Descent &amp; Stochastic Gradient Descent</a:t>
+              <a:t>Three</a:t>
+            </a:r>
+            <a:r>
+              <a:rPr lang="ko-KR" altLang="en-US" b="1" dirty="0">
+                <a:latin typeface="D2Coding" panose="020B0609020101020101" pitchFamily="49" charset="-127"/>
+                <a:ea typeface="D2Coding" panose="020B0609020101020101" pitchFamily="49" charset="-127"/>
+                <a:cs typeface="Segoe UI Light" panose="020B0502040204020203" pitchFamily="34" charset="0"/>
+              </a:rPr>
+              <a:t> </a:t>
+            </a:r>
+            <a:r>
+              <a:rPr lang="en-US" altLang="ko-KR" b="1" dirty="0">
+                <a:latin typeface="D2Coding" panose="020B0609020101020101" pitchFamily="49" charset="-127"/>
+                <a:ea typeface="D2Coding" panose="020B0609020101020101" pitchFamily="49" charset="-127"/>
+                <a:cs typeface="Segoe UI Light" panose="020B0502040204020203" pitchFamily="34" charset="0"/>
+              </a:rPr>
+              <a:t>Gradient Descent Method</a:t>
             </a:r>
             <a:endParaRPr lang="ko-KR" altLang="en-US" b="1" dirty="0">
               <a:latin typeface="D2Coding" panose="020B0609020101020101" pitchFamily="49" charset="-127"/>
@@ -22572,1148 +24546,913 @@
           </a:p>
         </p:txBody>
       </p:sp>
-      <p:sp>
-        <p:nvSpPr>
-          <p:cNvPr id="4" name="TextBox 3">
+      <mc:AlternateContent xmlns:mc="http://schemas.openxmlformats.org/markup-compatibility/2006">
+        <mc:Choice xmlns:a14="http://schemas.microsoft.com/office/drawing/2010/main" Requires="a14">
+          <p:sp>
+            <p:nvSpPr>
+              <p:cNvPr id="14" name="TextBox 13">
+                <a:extLst>
+                  <a:ext uri="{FF2B5EF4-FFF2-40B4-BE49-F238E27FC236}">
+                    <a16:creationId xmlns:a16="http://schemas.microsoft.com/office/drawing/2014/main" id="{059E222E-B4B8-0F89-CF5D-A3D898198B15}"/>
+                  </a:ext>
+                </a:extLst>
+              </p:cNvPr>
+              <p:cNvSpPr txBox="1"/>
+              <p:nvPr/>
+            </p:nvSpPr>
+            <p:spPr>
+              <a:xfrm>
+                <a:off x="647700" y="1257300"/>
+                <a:ext cx="11000826" cy="869790"/>
+              </a:xfrm>
+              <a:prstGeom prst="rect">
+                <a:avLst/>
+              </a:prstGeom>
+              <a:noFill/>
+            </p:spPr>
+            <p:txBody>
+              <a:bodyPr wrap="square" rtlCol="0">
+                <a:spAutoFit/>
+              </a:bodyPr>
+              <a:lstStyle/>
+              <a:p>
+                <a:pPr>
+                  <a:lnSpc>
+                    <a:spcPct val="150000"/>
+                  </a:lnSpc>
+                </a:pPr>
+                <a:r>
+                  <a:rPr lang="ko-KR" altLang="en-US" dirty="0">
+                    <a:latin typeface="맑은 고딕 Semilight" panose="020B0502040204020203" pitchFamily="50" charset="-127"/>
+                    <a:ea typeface="맑은 고딕 Semilight" panose="020B0502040204020203" pitchFamily="50" charset="-127"/>
+                    <a:cs typeface="맑은 고딕 Semilight" panose="020B0502040204020203" pitchFamily="50" charset="-127"/>
+                  </a:rPr>
+                  <a:t>데이터가</a:t>
+                </a:r>
+                <a:r>
+                  <a:rPr lang="en-US" altLang="ko-KR" dirty="0">
+                    <a:latin typeface="맑은 고딕 Semilight" panose="020B0502040204020203" pitchFamily="50" charset="-127"/>
+                    <a:ea typeface="맑은 고딕 Semilight" panose="020B0502040204020203" pitchFamily="50" charset="-127"/>
+                    <a:cs typeface="맑은 고딕 Semilight" panose="020B0502040204020203" pitchFamily="50" charset="-127"/>
+                  </a:rPr>
+                  <a:t> N=100</a:t>
+                </a:r>
+                <a:r>
+                  <a:rPr lang="ko-KR" altLang="en-US" dirty="0">
+                    <a:latin typeface="맑은 고딕 Semilight" panose="020B0502040204020203" pitchFamily="50" charset="-127"/>
+                    <a:ea typeface="맑은 고딕 Semilight" panose="020B0502040204020203" pitchFamily="50" charset="-127"/>
+                    <a:cs typeface="맑은 고딕 Semilight" panose="020B0502040204020203" pitchFamily="50" charset="-127"/>
+                  </a:rPr>
+                  <a:t>라고 가정하고 </a:t>
+                </a:r>
+                <a:r>
+                  <a:rPr lang="ko-KR" altLang="en-US" dirty="0" err="1">
+                    <a:latin typeface="맑은 고딕 Semilight" panose="020B0502040204020203" pitchFamily="50" charset="-127"/>
+                    <a:ea typeface="맑은 고딕 Semilight" panose="020B0502040204020203" pitchFamily="50" charset="-127"/>
+                    <a:cs typeface="맑은 고딕 Semilight" panose="020B0502040204020203" pitchFamily="50" charset="-127"/>
+                  </a:rPr>
+                  <a:t>회귀식</a:t>
+                </a:r>
+                <a:r>
+                  <a:rPr lang="ko-KR" altLang="en-US" dirty="0">
+                    <a:latin typeface="맑은 고딕 Semilight" panose="020B0502040204020203" pitchFamily="50" charset="-127"/>
+                    <a:ea typeface="맑은 고딕 Semilight" panose="020B0502040204020203" pitchFamily="50" charset="-127"/>
+                    <a:cs typeface="맑은 고딕 Semilight" panose="020B0502040204020203" pitchFamily="50" charset="-127"/>
+                  </a:rPr>
+                  <a:t> </a:t>
+                </a:r>
+                <a14:m>
+                  <m:oMath xmlns:m="http://schemas.openxmlformats.org/officeDocument/2006/math">
+                    <m:r>
+                      <a:rPr lang="en-US" altLang="ko-KR" i="1" smtClean="0">
+                        <a:latin typeface="Cambria Math" panose="02040503050406030204" pitchFamily="18" charset="0"/>
+                      </a:rPr>
+                      <m:t>𝑦</m:t>
+                    </m:r>
+                    <m:r>
+                      <a:rPr lang="en-US" altLang="ko-KR" i="0" smtClean="0">
+                        <a:latin typeface="Cambria Math" panose="02040503050406030204" pitchFamily="18" charset="0"/>
+                      </a:rPr>
+                      <m:t>=</m:t>
+                    </m:r>
+                    <m:r>
+                      <a:rPr lang="en-US" altLang="ko-KR" i="1" smtClean="0">
+                        <a:latin typeface="Cambria Math" panose="02040503050406030204" pitchFamily="18" charset="0"/>
+                      </a:rPr>
+                      <m:t>𝜔</m:t>
+                    </m:r>
+                    <m:r>
+                      <a:rPr lang="en-US" altLang="ko-KR" i="1" smtClean="0">
+                        <a:latin typeface="Cambria Math" panose="02040503050406030204" pitchFamily="18" charset="0"/>
+                      </a:rPr>
+                      <m:t>𝑥</m:t>
+                    </m:r>
+                    <m:r>
+                      <a:rPr lang="en-US" altLang="ko-KR" i="0" smtClean="0">
+                        <a:latin typeface="Cambria Math" panose="02040503050406030204" pitchFamily="18" charset="0"/>
+                      </a:rPr>
+                      <m:t>+</m:t>
+                    </m:r>
+                    <m:r>
+                      <a:rPr lang="en-US" altLang="ko-KR" i="1" smtClean="0">
+                        <a:latin typeface="Cambria Math" panose="02040503050406030204" pitchFamily="18" charset="0"/>
+                      </a:rPr>
+                      <m:t>𝑏</m:t>
+                    </m:r>
+                  </m:oMath>
+                </a14:m>
+                <a:r>
+                  <a:rPr lang="en-US" altLang="ko-KR" dirty="0">
+                    <a:latin typeface="맑은 고딕 Semilight" panose="020B0502040204020203" pitchFamily="50" charset="-127"/>
+                    <a:ea typeface="맑은 고딕 Semilight" panose="020B0502040204020203" pitchFamily="50" charset="-127"/>
+                    <a:cs typeface="맑은 고딕 Semilight" panose="020B0502040204020203" pitchFamily="50" charset="-127"/>
+                  </a:rPr>
+                  <a:t> </a:t>
+                </a:r>
+                <a:r>
+                  <a:rPr lang="ko-KR" altLang="en-US" dirty="0">
+                    <a:latin typeface="맑은 고딕 Semilight" panose="020B0502040204020203" pitchFamily="50" charset="-127"/>
+                    <a:ea typeface="맑은 고딕 Semilight" panose="020B0502040204020203" pitchFamily="50" charset="-127"/>
+                    <a:cs typeface="맑은 고딕 Semilight" panose="020B0502040204020203" pitchFamily="50" charset="-127"/>
+                  </a:rPr>
+                  <a:t>의</a:t>
+                </a:r>
+                <a:r>
+                  <a:rPr lang="en-US" altLang="ko-KR" dirty="0">
+                    <a:latin typeface="맑은 고딕 Semilight" panose="020B0502040204020203" pitchFamily="50" charset="-127"/>
+                    <a:ea typeface="맑은 고딕 Semilight" panose="020B0502040204020203" pitchFamily="50" charset="-127"/>
+                    <a:cs typeface="맑은 고딕 Semilight" panose="020B0502040204020203" pitchFamily="50" charset="-127"/>
+                  </a:rPr>
+                  <a:t> parameter </a:t>
+                </a:r>
+                <a14:m>
+                  <m:oMath xmlns:m="http://schemas.openxmlformats.org/officeDocument/2006/math">
+                    <m:r>
+                      <a:rPr lang="en-US" altLang="ko-KR" i="1">
+                        <a:latin typeface="Cambria Math" panose="02040503050406030204" pitchFamily="18" charset="0"/>
+                      </a:rPr>
+                      <m:t>𝜔</m:t>
+                    </m:r>
+                    <m:r>
+                      <a:rPr lang="en-US" altLang="ko-KR" b="0" i="1" smtClean="0">
+                        <a:latin typeface="Cambria Math" panose="02040503050406030204" pitchFamily="18" charset="0"/>
+                      </a:rPr>
+                      <m:t>,  </m:t>
+                    </m:r>
+                    <m:r>
+                      <a:rPr lang="en-US" altLang="ko-KR" i="1">
+                        <a:latin typeface="Cambria Math" panose="02040503050406030204" pitchFamily="18" charset="0"/>
+                      </a:rPr>
+                      <m:t>𝑏</m:t>
+                    </m:r>
+                  </m:oMath>
+                </a14:m>
+                <a:r>
+                  <a:rPr lang="en-US" altLang="ko-KR" dirty="0">
+                    <a:latin typeface="맑은 고딕 Semilight" panose="020B0502040204020203" pitchFamily="50" charset="-127"/>
+                    <a:ea typeface="맑은 고딕 Semilight" panose="020B0502040204020203" pitchFamily="50" charset="-127"/>
+                    <a:cs typeface="맑은 고딕 Semilight" panose="020B0502040204020203" pitchFamily="50" charset="-127"/>
+                  </a:rPr>
+                  <a:t> </a:t>
+                </a:r>
+                <a:r>
+                  <a:rPr lang="ko-KR" altLang="en-US" dirty="0">
+                    <a:latin typeface="맑은 고딕 Semilight" panose="020B0502040204020203" pitchFamily="50" charset="-127"/>
+                    <a:ea typeface="맑은 고딕 Semilight" panose="020B0502040204020203" pitchFamily="50" charset="-127"/>
+                    <a:cs typeface="맑은 고딕 Semilight" panose="020B0502040204020203" pitchFamily="50" charset="-127"/>
+                  </a:rPr>
+                  <a:t>를 </a:t>
+                </a:r>
+                <a:r>
+                  <a:rPr lang="en-US" altLang="ko-KR" dirty="0">
+                    <a:latin typeface="맑은 고딕 Semilight" panose="020B0502040204020203" pitchFamily="50" charset="-127"/>
+                    <a:ea typeface="맑은 고딕 Semilight" panose="020B0502040204020203" pitchFamily="50" charset="-127"/>
+                    <a:cs typeface="맑은 고딕 Semilight" panose="020B0502040204020203" pitchFamily="50" charset="-127"/>
+                  </a:rPr>
+                  <a:t>gradient descent </a:t>
+                </a:r>
+                <a:r>
+                  <a:rPr lang="ko-KR" altLang="en-US" dirty="0">
+                    <a:latin typeface="맑은 고딕 Semilight" panose="020B0502040204020203" pitchFamily="50" charset="-127"/>
+                    <a:ea typeface="맑은 고딕 Semilight" panose="020B0502040204020203" pitchFamily="50" charset="-127"/>
+                    <a:cs typeface="맑은 고딕 Semilight" panose="020B0502040204020203" pitchFamily="50" charset="-127"/>
+                  </a:rPr>
+                  <a:t>으로 구하는 미분계산식을 살펴보고 </a:t>
+                </a:r>
+                <a:r>
+                  <a:rPr lang="en-US" altLang="ko-KR" dirty="0">
+                    <a:latin typeface="맑은 고딕 Semilight" panose="020B0502040204020203" pitchFamily="50" charset="-127"/>
+                    <a:ea typeface="맑은 고딕 Semilight" panose="020B0502040204020203" pitchFamily="50" charset="-127"/>
+                    <a:cs typeface="맑은 고딕 Semilight" panose="020B0502040204020203" pitchFamily="50" charset="-127"/>
+                  </a:rPr>
+                  <a:t>3</a:t>
+                </a:r>
+                <a:r>
+                  <a:rPr lang="ko-KR" altLang="en-US" dirty="0">
+                    <a:latin typeface="맑은 고딕 Semilight" panose="020B0502040204020203" pitchFamily="50" charset="-127"/>
+                    <a:ea typeface="맑은 고딕 Semilight" panose="020B0502040204020203" pitchFamily="50" charset="-127"/>
+                    <a:cs typeface="맑은 고딕 Semilight" panose="020B0502040204020203" pitchFamily="50" charset="-127"/>
+                  </a:rPr>
+                  <a:t>가지 방식 모두 </a:t>
+                </a:r>
+                <a:r>
+                  <a:rPr lang="en-US" altLang="ko-KR" dirty="0">
+                    <a:latin typeface="맑은 고딕 Semilight" panose="020B0502040204020203" pitchFamily="50" charset="-127"/>
+                    <a:ea typeface="맑은 고딕 Semilight" panose="020B0502040204020203" pitchFamily="50" charset="-127"/>
+                    <a:cs typeface="맑은 고딕 Semilight" panose="020B0502040204020203" pitchFamily="50" charset="-127"/>
+                  </a:rPr>
+                  <a:t>Learning rate(step</a:t>
+                </a:r>
+                <a:r>
+                  <a:rPr lang="ko-KR" altLang="en-US" dirty="0">
+                    <a:latin typeface="맑은 고딕 Semilight" panose="020B0502040204020203" pitchFamily="50" charset="-127"/>
+                    <a:ea typeface="맑은 고딕 Semilight" panose="020B0502040204020203" pitchFamily="50" charset="-127"/>
+                    <a:cs typeface="맑은 고딕 Semilight" panose="020B0502040204020203" pitchFamily="50" charset="-127"/>
+                  </a:rPr>
+                  <a:t> </a:t>
+                </a:r>
+                <a:r>
+                  <a:rPr lang="en-US" altLang="ko-KR" dirty="0">
+                    <a:latin typeface="맑은 고딕 Semilight" panose="020B0502040204020203" pitchFamily="50" charset="-127"/>
+                    <a:ea typeface="맑은 고딕 Semilight" panose="020B0502040204020203" pitchFamily="50" charset="-127"/>
+                    <a:cs typeface="맑은 고딕 Semilight" panose="020B0502040204020203" pitchFamily="50" charset="-127"/>
+                  </a:rPr>
+                  <a:t>size)</a:t>
+                </a:r>
+                <a:r>
+                  <a:rPr lang="ko-KR" altLang="en-US" dirty="0">
+                    <a:latin typeface="맑은 고딕 Semilight" panose="020B0502040204020203" pitchFamily="50" charset="-127"/>
+                    <a:ea typeface="맑은 고딕 Semilight" panose="020B0502040204020203" pitchFamily="50" charset="-127"/>
+                    <a:cs typeface="맑은 고딕 Semilight" panose="020B0502040204020203" pitchFamily="50" charset="-127"/>
+                  </a:rPr>
+                  <a:t>에 영향을 받는다는 것을 이해하자</a:t>
+                </a:r>
+                <a:r>
+                  <a:rPr lang="en-US" altLang="ko-KR" dirty="0">
+                    <a:latin typeface="맑은 고딕 Semilight" panose="020B0502040204020203" pitchFamily="50" charset="-127"/>
+                    <a:ea typeface="맑은 고딕 Semilight" panose="020B0502040204020203" pitchFamily="50" charset="-127"/>
+                    <a:cs typeface="맑은 고딕 Semilight" panose="020B0502040204020203" pitchFamily="50" charset="-127"/>
+                  </a:rPr>
+                  <a:t> </a:t>
+                </a:r>
+                <a:endParaRPr lang="ko-KR" altLang="en-US" dirty="0">
+                  <a:latin typeface="맑은 고딕 Semilight" panose="020B0502040204020203" pitchFamily="50" charset="-127"/>
+                  <a:ea typeface="맑은 고딕 Semilight" panose="020B0502040204020203" pitchFamily="50" charset="-127"/>
+                  <a:cs typeface="맑은 고딕 Semilight" panose="020B0502040204020203" pitchFamily="50" charset="-127"/>
+                </a:endParaRPr>
+              </a:p>
+            </p:txBody>
+          </p:sp>
+        </mc:Choice>
+        <mc:Fallback>
+          <p:sp>
+            <p:nvSpPr>
+              <p:cNvPr id="14" name="TextBox 13">
+                <a:extLst>
+                  <a:ext uri="{FF2B5EF4-FFF2-40B4-BE49-F238E27FC236}">
+                    <a16:creationId xmlns:a16="http://schemas.microsoft.com/office/drawing/2014/main" id="{059E222E-B4B8-0F89-CF5D-A3D898198B15}"/>
+                  </a:ext>
+                </a:extLst>
+              </p:cNvPr>
+              <p:cNvSpPr txBox="1">
+                <a:spLocks noRot="1" noChangeAspect="1" noMove="1" noResize="1" noEditPoints="1" noAdjustHandles="1" noChangeArrowheads="1" noChangeShapeType="1" noTextEdit="1"/>
+              </p:cNvSpPr>
+              <p:nvPr/>
+            </p:nvSpPr>
+            <p:spPr>
+              <a:xfrm>
+                <a:off x="647700" y="1257300"/>
+                <a:ext cx="11000826" cy="869790"/>
+              </a:xfrm>
+              <a:prstGeom prst="rect">
+                <a:avLst/>
+              </a:prstGeom>
+              <a:blipFill>
+                <a:blip r:embed="rId3"/>
+                <a:stretch>
+                  <a:fillRect l="-443" b="-9790"/>
+                </a:stretch>
+              </a:blipFill>
+            </p:spPr>
+            <p:txBody>
+              <a:bodyPr/>
+              <a:lstStyle/>
+              <a:p>
+                <a:r>
+                  <a:rPr lang="ko-KR" altLang="en-US">
+                    <a:noFill/>
+                  </a:rPr>
+                  <a:t> </a:t>
+                </a:r>
+              </a:p>
+            </p:txBody>
+          </p:sp>
+        </mc:Fallback>
+      </mc:AlternateContent>
+      <p:graphicFrame>
+        <p:nvGraphicFramePr>
+          <p:cNvPr id="16" name="표 15">
             <a:extLst>
               <a:ext uri="{FF2B5EF4-FFF2-40B4-BE49-F238E27FC236}">
-                <a16:creationId xmlns:a16="http://schemas.microsoft.com/office/drawing/2014/main" id="{CD70390A-1E41-1D06-1DE9-249627522AFF}"/>
+                <a16:creationId xmlns:a16="http://schemas.microsoft.com/office/drawing/2014/main" id="{F4775DD7-819A-689B-F963-2C71980A9576}"/>
               </a:ext>
             </a:extLst>
           </p:cNvPr>
-          <p:cNvSpPr txBox="1"/>
+          <p:cNvGraphicFramePr>
+            <a:graphicFrameLocks noGrp="1"/>
+          </p:cNvGraphicFramePr>
+          <p:nvPr>
+            <p:extLst>
+              <p:ext uri="{D42A27DB-BD31-4B8C-83A1-F6EECF244321}">
+                <p14:modId xmlns:p14="http://schemas.microsoft.com/office/powerpoint/2010/main" val="3726734836"/>
+              </p:ext>
+            </p:extLst>
+          </p:nvPr>
+        </p:nvGraphicFramePr>
+        <p:xfrm>
+          <a:off x="1117601" y="2585784"/>
+          <a:ext cx="10012029" cy="3301685"/>
+        </p:xfrm>
+        <a:graphic>
+          <a:graphicData uri="http://schemas.openxmlformats.org/drawingml/2006/table">
+            <a:tbl>
+              <a:tblPr firstRow="1" bandRow="1">
+                <a:tableStyleId>{5C22544A-7EE6-4342-B048-85BDC9FD1C3A}</a:tableStyleId>
+              </a:tblPr>
+              <a:tblGrid>
+                <a:gridCol w="3424768">
+                  <a:extLst>
+                    <a:ext uri="{9D8B030D-6E8A-4147-A177-3AD203B41FA5}">
+                      <a16:colId xmlns:a16="http://schemas.microsoft.com/office/drawing/2014/main" val="1024984588"/>
+                    </a:ext>
+                  </a:extLst>
+                </a:gridCol>
+                <a:gridCol w="3186095">
+                  <a:extLst>
+                    <a:ext uri="{9D8B030D-6E8A-4147-A177-3AD203B41FA5}">
+                      <a16:colId xmlns:a16="http://schemas.microsoft.com/office/drawing/2014/main" val="782476037"/>
+                    </a:ext>
+                  </a:extLst>
+                </a:gridCol>
+                <a:gridCol w="3401166">
+                  <a:extLst>
+                    <a:ext uri="{9D8B030D-6E8A-4147-A177-3AD203B41FA5}">
+                      <a16:colId xmlns:a16="http://schemas.microsoft.com/office/drawing/2014/main" val="3779458567"/>
+                    </a:ext>
+                  </a:extLst>
+                </a:gridCol>
+              </a:tblGrid>
+              <a:tr h="0">
+                <a:tc>
+                  <a:txBody>
+                    <a:bodyPr/>
+                    <a:lstStyle/>
+                    <a:p>
+                      <a:pPr marL="0" indent="0" algn="ctr" latinLnBrk="1">
+                        <a:buFontTx/>
+                        <a:buNone/>
+                      </a:pPr>
+                      <a:r>
+                        <a:rPr lang="en-US" altLang="ko-KR" sz="1800" kern="1200" dirty="0">
+                          <a:solidFill>
+                            <a:schemeClr val="bg1"/>
+                          </a:solidFill>
+                          <a:latin typeface="맑은 고딕 Semilight" panose="020B0502040204020203" pitchFamily="50" charset="-127"/>
+                          <a:ea typeface="맑은 고딕 Semilight" panose="020B0502040204020203" pitchFamily="50" charset="-127"/>
+                          <a:cs typeface="맑은 고딕 Semilight" panose="020B0502040204020203" pitchFamily="50" charset="-127"/>
+                        </a:rPr>
+                        <a:t>Gradient Descent </a:t>
+                      </a:r>
+                      <a:endParaRPr lang="ko-KR" altLang="en-US" sz="1800" kern="1200" dirty="0">
+                        <a:solidFill>
+                          <a:schemeClr val="bg1"/>
+                        </a:solidFill>
+                        <a:latin typeface="맑은 고딕 Semilight" panose="020B0502040204020203" pitchFamily="50" charset="-127"/>
+                        <a:ea typeface="맑은 고딕 Semilight" panose="020B0502040204020203" pitchFamily="50" charset="-127"/>
+                        <a:cs typeface="맑은 고딕 Semilight" panose="020B0502040204020203" pitchFamily="50" charset="-127"/>
+                      </a:endParaRPr>
+                    </a:p>
+                  </a:txBody>
+                  <a:tcPr/>
+                </a:tc>
+                <a:tc>
+                  <a:txBody>
+                    <a:bodyPr/>
+                    <a:lstStyle/>
+                    <a:p>
+                      <a:pPr marL="0" marR="0" lvl="0" indent="0" algn="ctr" defTabSz="914400" rtl="0" eaLnBrk="1" fontAlgn="auto" latinLnBrk="1" hangingPunct="1">
+                        <a:lnSpc>
+                          <a:spcPct val="100000"/>
+                        </a:lnSpc>
+                        <a:spcBef>
+                          <a:spcPts val="0"/>
+                        </a:spcBef>
+                        <a:spcAft>
+                          <a:spcPts val="0"/>
+                        </a:spcAft>
+                        <a:buClrTx/>
+                        <a:buSzTx/>
+                        <a:buFontTx/>
+                        <a:buNone/>
+                        <a:tabLst/>
+                        <a:defRPr/>
+                      </a:pPr>
+                      <a:r>
+                        <a:rPr lang="en-US" altLang="ko-KR" sz="1800" kern="1200" dirty="0">
+                          <a:solidFill>
+                            <a:schemeClr val="bg1"/>
+                          </a:solidFill>
+                          <a:latin typeface="맑은 고딕 Semilight" panose="020B0502040204020203" pitchFamily="50" charset="-127"/>
+                          <a:ea typeface="맑은 고딕 Semilight" panose="020B0502040204020203" pitchFamily="50" charset="-127"/>
+                          <a:cs typeface="맑은 고딕 Semilight" panose="020B0502040204020203" pitchFamily="50" charset="-127"/>
+                        </a:rPr>
+                        <a:t>Stochastic Gradient Descent </a:t>
+                      </a:r>
+                      <a:endParaRPr lang="ko-KR" altLang="en-US" sz="1800" kern="1200" dirty="0">
+                        <a:solidFill>
+                          <a:schemeClr val="bg1"/>
+                        </a:solidFill>
+                        <a:latin typeface="맑은 고딕 Semilight" panose="020B0502040204020203" pitchFamily="50" charset="-127"/>
+                        <a:ea typeface="맑은 고딕 Semilight" panose="020B0502040204020203" pitchFamily="50" charset="-127"/>
+                        <a:cs typeface="맑은 고딕 Semilight" panose="020B0502040204020203" pitchFamily="50" charset="-127"/>
+                      </a:endParaRPr>
+                    </a:p>
+                  </a:txBody>
+                  <a:tcPr/>
+                </a:tc>
+                <a:tc>
+                  <a:txBody>
+                    <a:bodyPr/>
+                    <a:lstStyle/>
+                    <a:p>
+                      <a:pPr marL="0" marR="0" lvl="0" indent="0" algn="ctr" defTabSz="914400" rtl="0" eaLnBrk="1" fontAlgn="auto" latinLnBrk="1" hangingPunct="1">
+                        <a:lnSpc>
+                          <a:spcPct val="100000"/>
+                        </a:lnSpc>
+                        <a:spcBef>
+                          <a:spcPts val="0"/>
+                        </a:spcBef>
+                        <a:spcAft>
+                          <a:spcPts val="0"/>
+                        </a:spcAft>
+                        <a:buClrTx/>
+                        <a:buSzTx/>
+                        <a:buFontTx/>
+                        <a:buNone/>
+                        <a:tabLst/>
+                        <a:defRPr/>
+                      </a:pPr>
+                      <a:r>
+                        <a:rPr lang="en-US" altLang="ko-KR" sz="1800" kern="1200" dirty="0">
+                          <a:solidFill>
+                            <a:schemeClr val="bg1"/>
+                          </a:solidFill>
+                          <a:latin typeface="맑은 고딕 Semilight" panose="020B0502040204020203" pitchFamily="50" charset="-127"/>
+                          <a:ea typeface="맑은 고딕 Semilight" panose="020B0502040204020203" pitchFamily="50" charset="-127"/>
+                          <a:cs typeface="맑은 고딕 Semilight" panose="020B0502040204020203" pitchFamily="50" charset="-127"/>
+                        </a:rPr>
+                        <a:t>Mini-batch SGD </a:t>
+                      </a:r>
+                      <a:r>
+                        <a:rPr lang="ko-KR" altLang="en-US" sz="1800" kern="1200" dirty="0">
+                          <a:solidFill>
+                            <a:schemeClr val="bg1"/>
+                          </a:solidFill>
+                          <a:latin typeface="맑은 고딕 Semilight" panose="020B0502040204020203" pitchFamily="50" charset="-127"/>
+                          <a:ea typeface="맑은 고딕 Semilight" panose="020B0502040204020203" pitchFamily="50" charset="-127"/>
+                          <a:cs typeface="맑은 고딕 Semilight" panose="020B0502040204020203" pitchFamily="50" charset="-127"/>
+                        </a:rPr>
+                        <a:t>방식</a:t>
+                      </a:r>
+                      <a:r>
+                        <a:rPr lang="en-US" altLang="ko-KR" sz="1800" kern="1200" dirty="0">
+                          <a:solidFill>
+                            <a:schemeClr val="bg1"/>
+                          </a:solidFill>
+                          <a:latin typeface="맑은 고딕 Semilight" panose="020B0502040204020203" pitchFamily="50" charset="-127"/>
+                          <a:ea typeface="맑은 고딕 Semilight" panose="020B0502040204020203" pitchFamily="50" charset="-127"/>
+                          <a:cs typeface="맑은 고딕 Semilight" panose="020B0502040204020203" pitchFamily="50" charset="-127"/>
+                        </a:rPr>
+                        <a:t> </a:t>
+                      </a:r>
+                      <a:endParaRPr lang="ko-KR" altLang="en-US" sz="1800" kern="1200" dirty="0">
+                        <a:solidFill>
+                          <a:schemeClr val="bg1"/>
+                        </a:solidFill>
+                        <a:latin typeface="맑은 고딕 Semilight" panose="020B0502040204020203" pitchFamily="50" charset="-127"/>
+                        <a:ea typeface="맑은 고딕 Semilight" panose="020B0502040204020203" pitchFamily="50" charset="-127"/>
+                        <a:cs typeface="맑은 고딕 Semilight" panose="020B0502040204020203" pitchFamily="50" charset="-127"/>
+                      </a:endParaRPr>
+                    </a:p>
+                  </a:txBody>
+                  <a:tcPr/>
+                </a:tc>
+                <a:extLst>
+                  <a:ext uri="{0D108BD9-81ED-4DB2-BD59-A6C34878D82A}">
+                    <a16:rowId xmlns:a16="http://schemas.microsoft.com/office/drawing/2014/main" val="2059994695"/>
+                  </a:ext>
+                </a:extLst>
+              </a:tr>
+              <a:tr h="285088">
+                <a:tc>
+                  <a:txBody>
+                    <a:bodyPr/>
+                    <a:lstStyle/>
+                    <a:p>
+                      <a:pPr marL="285750" indent="-285750" latinLnBrk="1">
+                        <a:buFont typeface="Wingdings" panose="05000000000000000000" pitchFamily="2" charset="2"/>
+                        <a:buChar char="§"/>
+                      </a:pPr>
+                      <a:r>
+                        <a:rPr lang="ko-KR" altLang="en-US" sz="1400" b="0" dirty="0">
+                          <a:latin typeface="맑은 고딕 Semilight" panose="020B0502040204020203" pitchFamily="50" charset="-127"/>
+                          <a:ea typeface="맑은 고딕 Semilight" panose="020B0502040204020203" pitchFamily="50" charset="-127"/>
+                          <a:cs typeface="맑은 고딕 Semilight" panose="020B0502040204020203" pitchFamily="50" charset="-127"/>
+                        </a:rPr>
+                        <a:t>모든 데이터</a:t>
+                      </a:r>
+                      <a:r>
+                        <a:rPr lang="en-US" altLang="ko-KR" sz="1400" b="0" dirty="0">
+                          <a:latin typeface="맑은 고딕 Semilight" panose="020B0502040204020203" pitchFamily="50" charset="-127"/>
+                          <a:ea typeface="맑은 고딕 Semilight" panose="020B0502040204020203" pitchFamily="50" charset="-127"/>
+                          <a:cs typeface="맑은 고딕 Semilight" panose="020B0502040204020203" pitchFamily="50" charset="-127"/>
+                        </a:rPr>
+                        <a:t>(100</a:t>
+                      </a:r>
+                      <a:r>
+                        <a:rPr lang="ko-KR" altLang="en-US" sz="1400" b="0" dirty="0">
+                          <a:latin typeface="맑은 고딕 Semilight" panose="020B0502040204020203" pitchFamily="50" charset="-127"/>
+                          <a:ea typeface="맑은 고딕 Semilight" panose="020B0502040204020203" pitchFamily="50" charset="-127"/>
+                          <a:cs typeface="맑은 고딕 Semilight" panose="020B0502040204020203" pitchFamily="50" charset="-127"/>
+                        </a:rPr>
+                        <a:t>개</a:t>
+                      </a:r>
+                      <a:r>
+                        <a:rPr lang="en-US" altLang="ko-KR" sz="1400" b="0" dirty="0">
+                          <a:latin typeface="맑은 고딕 Semilight" panose="020B0502040204020203" pitchFamily="50" charset="-127"/>
+                          <a:ea typeface="맑은 고딕 Semilight" panose="020B0502040204020203" pitchFamily="50" charset="-127"/>
+                          <a:cs typeface="맑은 고딕 Semilight" panose="020B0502040204020203" pitchFamily="50" charset="-127"/>
+                        </a:rPr>
+                        <a:t>)</a:t>
+                      </a:r>
+                      <a:r>
+                        <a:rPr lang="ko-KR" altLang="en-US" sz="1400" b="0" dirty="0">
+                          <a:latin typeface="맑은 고딕 Semilight" panose="020B0502040204020203" pitchFamily="50" charset="-127"/>
+                          <a:ea typeface="맑은 고딕 Semilight" panose="020B0502040204020203" pitchFamily="50" charset="-127"/>
+                          <a:cs typeface="맑은 고딕 Semilight" panose="020B0502040204020203" pitchFamily="50" charset="-127"/>
+                        </a:rPr>
+                        <a:t>를 파라미터의 미분식에 넣어 한 번에 계산</a:t>
+                      </a:r>
+                    </a:p>
+                  </a:txBody>
+                  <a:tcPr/>
+                </a:tc>
+                <a:tc>
+                  <a:txBody>
+                    <a:bodyPr/>
+                    <a:lstStyle/>
+                    <a:p>
+                      <a:pPr marL="285750" marR="0" lvl="0" indent="-285750" algn="l" defTabSz="914400" rtl="0" eaLnBrk="1" fontAlgn="auto" latinLnBrk="1" hangingPunct="1">
+                        <a:lnSpc>
+                          <a:spcPct val="100000"/>
+                        </a:lnSpc>
+                        <a:spcBef>
+                          <a:spcPts val="0"/>
+                        </a:spcBef>
+                        <a:spcAft>
+                          <a:spcPts val="0"/>
+                        </a:spcAft>
+                        <a:buClrTx/>
+                        <a:buSzTx/>
+                        <a:buFont typeface="Wingdings" panose="05000000000000000000" pitchFamily="2" charset="2"/>
+                        <a:buChar char="§"/>
+                        <a:tabLst/>
+                        <a:defRPr/>
+                      </a:pPr>
+                      <a:r>
+                        <a:rPr lang="ko-KR" altLang="en-US" sz="1400" b="0" dirty="0">
+                          <a:latin typeface="맑은 고딕 Semilight" panose="020B0502040204020203" pitchFamily="50" charset="-127"/>
+                          <a:ea typeface="맑은 고딕 Semilight" panose="020B0502040204020203" pitchFamily="50" charset="-127"/>
+                          <a:cs typeface="맑은 고딕 Semilight" panose="020B0502040204020203" pitchFamily="50" charset="-127"/>
+                        </a:rPr>
+                        <a:t>모든 데이터를 파라미터의 미분식에 넣어 한 번에 계산</a:t>
+                      </a:r>
+                    </a:p>
+                  </a:txBody>
+                  <a:tcPr/>
+                </a:tc>
+                <a:tc>
+                  <a:txBody>
+                    <a:bodyPr/>
+                    <a:lstStyle/>
+                    <a:p>
+                      <a:pPr marL="285750" marR="0" lvl="0" indent="-285750" algn="l" defTabSz="914400" rtl="0" eaLnBrk="1" fontAlgn="auto" latinLnBrk="1" hangingPunct="1">
+                        <a:lnSpc>
+                          <a:spcPct val="100000"/>
+                        </a:lnSpc>
+                        <a:spcBef>
+                          <a:spcPts val="0"/>
+                        </a:spcBef>
+                        <a:spcAft>
+                          <a:spcPts val="0"/>
+                        </a:spcAft>
+                        <a:buClrTx/>
+                        <a:buSzTx/>
+                        <a:buFont typeface="Wingdings" panose="05000000000000000000" pitchFamily="2" charset="2"/>
+                        <a:buChar char="§"/>
+                        <a:tabLst/>
+                        <a:defRPr/>
+                      </a:pPr>
+                      <a:r>
+                        <a:rPr lang="en-US" altLang="ko-KR" sz="1400" b="0" dirty="0">
+                          <a:latin typeface="맑은 고딕 Semilight" panose="020B0502040204020203" pitchFamily="50" charset="-127"/>
+                          <a:ea typeface="맑은 고딕 Semilight" panose="020B0502040204020203" pitchFamily="50" charset="-127"/>
+                          <a:cs typeface="맑은 고딕 Semilight" panose="020B0502040204020203" pitchFamily="50" charset="-127"/>
+                        </a:rPr>
+                        <a:t>100</a:t>
+                      </a:r>
+                      <a:r>
+                        <a:rPr lang="ko-KR" altLang="en-US" sz="1400" b="0" dirty="0">
+                          <a:latin typeface="맑은 고딕 Semilight" panose="020B0502040204020203" pitchFamily="50" charset="-127"/>
+                          <a:ea typeface="맑은 고딕 Semilight" panose="020B0502040204020203" pitchFamily="50" charset="-127"/>
+                          <a:cs typeface="맑은 고딕 Semilight" panose="020B0502040204020203" pitchFamily="50" charset="-127"/>
+                        </a:rPr>
+                        <a:t>개 데이터 </a:t>
+                      </a:r>
+                      <a:r>
+                        <a:rPr lang="en-US" altLang="ko-KR" sz="1400" b="0" dirty="0">
+                          <a:latin typeface="맑은 고딕 Semilight" panose="020B0502040204020203" pitchFamily="50" charset="-127"/>
+                          <a:ea typeface="맑은 고딕 Semilight" panose="020B0502040204020203" pitchFamily="50" charset="-127"/>
+                          <a:cs typeface="맑은 고딕 Semilight" panose="020B0502040204020203" pitchFamily="50" charset="-127"/>
+                        </a:rPr>
+                        <a:t>10</a:t>
+                      </a:r>
+                      <a:r>
+                        <a:rPr lang="ko-KR" altLang="en-US" sz="1400" b="0" dirty="0">
+                          <a:latin typeface="맑은 고딕 Semilight" panose="020B0502040204020203" pitchFamily="50" charset="-127"/>
+                          <a:ea typeface="맑은 고딕 Semilight" panose="020B0502040204020203" pitchFamily="50" charset="-127"/>
+                          <a:cs typeface="맑은 고딕 Semilight" panose="020B0502040204020203" pitchFamily="50" charset="-127"/>
+                        </a:rPr>
+                        <a:t>개로 나누어</a:t>
+                      </a:r>
+                      <a:r>
+                        <a:rPr lang="en-US" altLang="ko-KR" sz="1400" b="0" dirty="0">
+                          <a:latin typeface="맑은 고딕 Semilight" panose="020B0502040204020203" pitchFamily="50" charset="-127"/>
+                          <a:ea typeface="맑은 고딕 Semilight" panose="020B0502040204020203" pitchFamily="50" charset="-127"/>
+                          <a:cs typeface="맑은 고딕 Semilight" panose="020B0502040204020203" pitchFamily="50" charset="-127"/>
+                        </a:rPr>
+                        <a:t>(Batch)</a:t>
+                      </a:r>
+                      <a:r>
+                        <a:rPr lang="ko-KR" altLang="en-US" sz="1400" b="0" dirty="0">
+                          <a:latin typeface="맑은 고딕 Semilight" panose="020B0502040204020203" pitchFamily="50" charset="-127"/>
+                          <a:ea typeface="맑은 고딕 Semilight" panose="020B0502040204020203" pitchFamily="50" charset="-127"/>
+                          <a:cs typeface="맑은 고딕 Semilight" panose="020B0502040204020203" pitchFamily="50" charset="-127"/>
+                        </a:rPr>
+                        <a:t> 파라미터 미분식에서 계산</a:t>
+                      </a:r>
+                    </a:p>
+                  </a:txBody>
+                  <a:tcPr/>
+                </a:tc>
+                <a:extLst>
+                  <a:ext uri="{0D108BD9-81ED-4DB2-BD59-A6C34878D82A}">
+                    <a16:rowId xmlns:a16="http://schemas.microsoft.com/office/drawing/2014/main" val="2985248338"/>
+                  </a:ext>
+                </a:extLst>
+              </a:tr>
+              <a:tr h="0">
+                <a:tc>
+                  <a:txBody>
+                    <a:bodyPr/>
+                    <a:lstStyle/>
+                    <a:p>
+                      <a:pPr marL="285750" indent="-285750" latinLnBrk="1">
+                        <a:buFont typeface="Wingdings" panose="05000000000000000000" pitchFamily="2" charset="2"/>
+                        <a:buChar char="§"/>
+                      </a:pPr>
+                      <a:r>
+                        <a:rPr lang="en-US" altLang="ko-KR" sz="1400" b="0" dirty="0">
+                          <a:latin typeface="맑은 고딕 Semilight" panose="020B0502040204020203" pitchFamily="50" charset="-127"/>
+                          <a:ea typeface="맑은 고딕 Semilight" panose="020B0502040204020203" pitchFamily="50" charset="-127"/>
+                          <a:cs typeface="맑은 고딕 Semilight" panose="020B0502040204020203" pitchFamily="50" charset="-127"/>
+                        </a:rPr>
+                        <a:t>Use</a:t>
+                      </a:r>
+                      <a:r>
+                        <a:rPr lang="ko-KR" altLang="en-US" sz="1400" b="0" dirty="0">
+                          <a:latin typeface="맑은 고딕 Semilight" panose="020B0502040204020203" pitchFamily="50" charset="-127"/>
+                          <a:ea typeface="맑은 고딕 Semilight" panose="020B0502040204020203" pitchFamily="50" charset="-127"/>
+                          <a:cs typeface="맑은 고딕 Semilight" panose="020B0502040204020203" pitchFamily="50" charset="-127"/>
+                        </a:rPr>
+                        <a:t> </a:t>
+                      </a:r>
+                      <a:r>
+                        <a:rPr lang="en-US" altLang="ko-KR" sz="1400" b="0" dirty="0">
+                          <a:latin typeface="맑은 고딕 Semilight" panose="020B0502040204020203" pitchFamily="50" charset="-127"/>
+                          <a:ea typeface="맑은 고딕 Semilight" panose="020B0502040204020203" pitchFamily="50" charset="-127"/>
+                          <a:cs typeface="맑은 고딕 Semilight" panose="020B0502040204020203" pitchFamily="50" charset="-127"/>
+                        </a:rPr>
+                        <a:t>all 100 points per update</a:t>
+                      </a:r>
+                      <a:endParaRPr lang="ko-KR" altLang="en-US" sz="1400" b="0" dirty="0">
+                        <a:latin typeface="맑은 고딕 Semilight" panose="020B0502040204020203" pitchFamily="50" charset="-127"/>
+                        <a:ea typeface="맑은 고딕 Semilight" panose="020B0502040204020203" pitchFamily="50" charset="-127"/>
+                        <a:cs typeface="맑은 고딕 Semilight" panose="020B0502040204020203" pitchFamily="50" charset="-127"/>
+                      </a:endParaRPr>
+                    </a:p>
+                  </a:txBody>
+                  <a:tcPr/>
+                </a:tc>
+                <a:tc>
+                  <a:txBody>
+                    <a:bodyPr/>
+                    <a:lstStyle/>
+                    <a:p>
+                      <a:pPr marL="285750" indent="-285750" latinLnBrk="1">
+                        <a:buFont typeface="Wingdings" panose="05000000000000000000" pitchFamily="2" charset="2"/>
+                        <a:buChar char="§"/>
+                      </a:pPr>
+                      <a:r>
+                        <a:rPr lang="en-US" altLang="ko-KR" sz="1400" b="0" dirty="0">
+                          <a:latin typeface="맑은 고딕 Semilight" panose="020B0502040204020203" pitchFamily="50" charset="-127"/>
+                          <a:ea typeface="맑은 고딕 Semilight" panose="020B0502040204020203" pitchFamily="50" charset="-127"/>
+                          <a:cs typeface="맑은 고딕 Semilight" panose="020B0502040204020203" pitchFamily="50" charset="-127"/>
+                        </a:rPr>
+                        <a:t>Use</a:t>
+                      </a:r>
+                      <a:r>
+                        <a:rPr lang="ko-KR" altLang="en-US" sz="1400" b="0" dirty="0">
+                          <a:latin typeface="맑은 고딕 Semilight" panose="020B0502040204020203" pitchFamily="50" charset="-127"/>
+                          <a:ea typeface="맑은 고딕 Semilight" panose="020B0502040204020203" pitchFamily="50" charset="-127"/>
+                          <a:cs typeface="맑은 고딕 Semilight" panose="020B0502040204020203" pitchFamily="50" charset="-127"/>
+                        </a:rPr>
+                        <a:t> </a:t>
+                      </a:r>
+                      <a:r>
+                        <a:rPr lang="en-US" altLang="ko-KR" sz="1400" b="0" dirty="0">
+                          <a:latin typeface="맑은 고딕 Semilight" panose="020B0502040204020203" pitchFamily="50" charset="-127"/>
+                          <a:ea typeface="맑은 고딕 Semilight" panose="020B0502040204020203" pitchFamily="50" charset="-127"/>
+                          <a:cs typeface="맑은 고딕 Semilight" panose="020B0502040204020203" pitchFamily="50" charset="-127"/>
+                        </a:rPr>
+                        <a:t>single random point per update</a:t>
+                      </a:r>
+                      <a:endParaRPr lang="ko-KR" altLang="en-US" sz="1400" b="0" dirty="0">
+                        <a:latin typeface="맑은 고딕 Semilight" panose="020B0502040204020203" pitchFamily="50" charset="-127"/>
+                        <a:ea typeface="맑은 고딕 Semilight" panose="020B0502040204020203" pitchFamily="50" charset="-127"/>
+                        <a:cs typeface="맑은 고딕 Semilight" panose="020B0502040204020203" pitchFamily="50" charset="-127"/>
+                      </a:endParaRPr>
+                    </a:p>
+                  </a:txBody>
+                  <a:tcPr/>
+                </a:tc>
+                <a:tc>
+                  <a:txBody>
+                    <a:bodyPr/>
+                    <a:lstStyle/>
+                    <a:p>
+                      <a:pPr marL="285750" indent="-285750" latinLnBrk="1">
+                        <a:buFont typeface="Wingdings" panose="05000000000000000000" pitchFamily="2" charset="2"/>
+                        <a:buChar char="§"/>
+                      </a:pPr>
+                      <a:r>
+                        <a:rPr lang="en-US" altLang="ko-KR" sz="1400" b="0" dirty="0">
+                          <a:latin typeface="맑은 고딕 Semilight" panose="020B0502040204020203" pitchFamily="50" charset="-127"/>
+                          <a:ea typeface="맑은 고딕 Semilight" panose="020B0502040204020203" pitchFamily="50" charset="-127"/>
+                          <a:cs typeface="맑은 고딕 Semilight" panose="020B0502040204020203" pitchFamily="50" charset="-127"/>
+                        </a:rPr>
+                        <a:t>Use</a:t>
+                      </a:r>
+                      <a:r>
+                        <a:rPr lang="ko-KR" altLang="en-US" sz="1400" b="0" dirty="0">
+                          <a:latin typeface="맑은 고딕 Semilight" panose="020B0502040204020203" pitchFamily="50" charset="-127"/>
+                          <a:ea typeface="맑은 고딕 Semilight" panose="020B0502040204020203" pitchFamily="50" charset="-127"/>
+                          <a:cs typeface="맑은 고딕 Semilight" panose="020B0502040204020203" pitchFamily="50" charset="-127"/>
+                        </a:rPr>
+                        <a:t> </a:t>
+                      </a:r>
+                      <a:r>
+                        <a:rPr lang="en-US" altLang="ko-KR" sz="1400" b="0" dirty="0">
+                          <a:latin typeface="맑은 고딕 Semilight" panose="020B0502040204020203" pitchFamily="50" charset="-127"/>
+                          <a:ea typeface="맑은 고딕 Semilight" panose="020B0502040204020203" pitchFamily="50" charset="-127"/>
+                          <a:cs typeface="맑은 고딕 Semilight" panose="020B0502040204020203" pitchFamily="50" charset="-127"/>
+                        </a:rPr>
+                        <a:t>a random subset 10 points(batch) per update</a:t>
+                      </a:r>
+                      <a:endParaRPr lang="ko-KR" altLang="en-US" sz="1400" b="0" dirty="0">
+                        <a:latin typeface="맑은 고딕 Semilight" panose="020B0502040204020203" pitchFamily="50" charset="-127"/>
+                        <a:ea typeface="맑은 고딕 Semilight" panose="020B0502040204020203" pitchFamily="50" charset="-127"/>
+                        <a:cs typeface="맑은 고딕 Semilight" panose="020B0502040204020203" pitchFamily="50" charset="-127"/>
+                      </a:endParaRPr>
+                    </a:p>
+                  </a:txBody>
+                  <a:tcPr/>
+                </a:tc>
+                <a:extLst>
+                  <a:ext uri="{0D108BD9-81ED-4DB2-BD59-A6C34878D82A}">
+                    <a16:rowId xmlns:a16="http://schemas.microsoft.com/office/drawing/2014/main" val="2629295114"/>
+                  </a:ext>
+                </a:extLst>
+              </a:tr>
+              <a:tr h="1899605">
+                <a:tc>
+                  <a:txBody>
+                    <a:bodyPr/>
+                    <a:lstStyle/>
+                    <a:p>
+                      <a:pPr marL="285750" indent="-285750" latinLnBrk="1">
+                        <a:buFont typeface="Wingdings" panose="05000000000000000000" pitchFamily="2" charset="2"/>
+                        <a:buChar char="§"/>
+                      </a:pPr>
+                      <a:endParaRPr lang="ko-KR" altLang="en-US" sz="1400" b="0" dirty="0">
+                        <a:latin typeface="맑은 고딕 Semilight" panose="020B0502040204020203" pitchFamily="50" charset="-127"/>
+                        <a:ea typeface="맑은 고딕 Semilight" panose="020B0502040204020203" pitchFamily="50" charset="-127"/>
+                        <a:cs typeface="맑은 고딕 Semilight" panose="020B0502040204020203" pitchFamily="50" charset="-127"/>
+                      </a:endParaRPr>
+                    </a:p>
+                  </a:txBody>
+                  <a:tcPr/>
+                </a:tc>
+                <a:tc>
+                  <a:txBody>
+                    <a:bodyPr/>
+                    <a:lstStyle/>
+                    <a:p>
+                      <a:pPr marL="285750" indent="-285750" latinLnBrk="1">
+                        <a:buFont typeface="Wingdings" panose="05000000000000000000" pitchFamily="2" charset="2"/>
+                        <a:buChar char="§"/>
+                      </a:pPr>
+                      <a:endParaRPr lang="ko-KR" altLang="en-US" sz="1400" b="0" dirty="0">
+                        <a:latin typeface="맑은 고딕 Semilight" panose="020B0502040204020203" pitchFamily="50" charset="-127"/>
+                        <a:ea typeface="맑은 고딕 Semilight" panose="020B0502040204020203" pitchFamily="50" charset="-127"/>
+                        <a:cs typeface="맑은 고딕 Semilight" panose="020B0502040204020203" pitchFamily="50" charset="-127"/>
+                      </a:endParaRPr>
+                    </a:p>
+                  </a:txBody>
+                  <a:tcPr/>
+                </a:tc>
+                <a:tc>
+                  <a:txBody>
+                    <a:bodyPr/>
+                    <a:lstStyle/>
+                    <a:p>
+                      <a:pPr marL="285750" indent="-285750" latinLnBrk="1">
+                        <a:buFont typeface="Wingdings" panose="05000000000000000000" pitchFamily="2" charset="2"/>
+                        <a:buChar char="§"/>
+                      </a:pPr>
+                      <a:endParaRPr lang="ko-KR" altLang="en-US" sz="1400" b="0" dirty="0">
+                        <a:latin typeface="맑은 고딕 Semilight" panose="020B0502040204020203" pitchFamily="50" charset="-127"/>
+                        <a:ea typeface="맑은 고딕 Semilight" panose="020B0502040204020203" pitchFamily="50" charset="-127"/>
+                        <a:cs typeface="맑은 고딕 Semilight" panose="020B0502040204020203" pitchFamily="50" charset="-127"/>
+                      </a:endParaRPr>
+                    </a:p>
+                  </a:txBody>
+                  <a:tcPr/>
+                </a:tc>
+                <a:extLst>
+                  <a:ext uri="{0D108BD9-81ED-4DB2-BD59-A6C34878D82A}">
+                    <a16:rowId xmlns:a16="http://schemas.microsoft.com/office/drawing/2014/main" val="3368341601"/>
+                  </a:ext>
+                </a:extLst>
+              </a:tr>
+            </a:tbl>
+          </a:graphicData>
+        </a:graphic>
+      </p:graphicFrame>
+      <p:pic>
+        <p:nvPicPr>
+          <p:cNvPr id="10" name="그림 9">
+            <a:extLst>
+              <a:ext uri="{FF2B5EF4-FFF2-40B4-BE49-F238E27FC236}">
+                <a16:creationId xmlns:a16="http://schemas.microsoft.com/office/drawing/2014/main" id="{DCD6D1D3-B798-DAAC-8D58-1690B7345148}"/>
+              </a:ext>
+            </a:extLst>
+          </p:cNvPr>
+          <p:cNvPicPr>
+            <a:picLocks noChangeAspect="1"/>
+          </p:cNvPicPr>
           <p:nvPr/>
-        </p:nvSpPr>
+        </p:nvPicPr>
+        <p:blipFill>
+          <a:blip r:embed="rId4"/>
+          <a:stretch>
+            <a:fillRect/>
+          </a:stretch>
+        </p:blipFill>
         <p:spPr>
           <a:xfrm>
-            <a:off x="647700" y="1381125"/>
-            <a:ext cx="11000826" cy="869790"/>
+            <a:off x="1136260" y="4117196"/>
+            <a:ext cx="9956611" cy="1646534"/>
           </a:xfrm>
           <a:prstGeom prst="rect">
             <a:avLst/>
           </a:prstGeom>
-          <a:noFill/>
         </p:spPr>
-        <p:txBody>
-          <a:bodyPr wrap="square" rtlCol="0">
-            <a:spAutoFit/>
-          </a:bodyPr>
-          <a:lstStyle/>
-          <a:p>
-            <a:pPr>
-              <a:lnSpc>
-                <a:spcPct val="150000"/>
-              </a:lnSpc>
-            </a:pPr>
-            <a:r>
-              <a:rPr lang="ko-KR" altLang="en-US" dirty="0">
-                <a:latin typeface="맑은 고딕 Semilight" panose="020B0502040204020203" pitchFamily="50" charset="-127"/>
-                <a:ea typeface="맑은 고딕 Semilight" panose="020B0502040204020203" pitchFamily="50" charset="-127"/>
-                <a:cs typeface="맑은 고딕 Semilight" panose="020B0502040204020203" pitchFamily="50" charset="-127"/>
-              </a:rPr>
-              <a:t>이전</a:t>
-            </a:r>
-            <a:r>
-              <a:rPr lang="en-US" altLang="ko-KR" dirty="0">
-                <a:latin typeface="맑은 고딕 Semilight" panose="020B0502040204020203" pitchFamily="50" charset="-127"/>
-                <a:ea typeface="맑은 고딕 Semilight" panose="020B0502040204020203" pitchFamily="50" charset="-127"/>
-                <a:cs typeface="맑은 고딕 Semilight" panose="020B0502040204020203" pitchFamily="50" charset="-127"/>
-              </a:rPr>
-              <a:t> 3</a:t>
-            </a:r>
-            <a:r>
-              <a:rPr lang="ko-KR" altLang="en-US" dirty="0">
-                <a:latin typeface="맑은 고딕 Semilight" panose="020B0502040204020203" pitchFamily="50" charset="-127"/>
-                <a:ea typeface="맑은 고딕 Semilight" panose="020B0502040204020203" pitchFamily="50" charset="-127"/>
-                <a:cs typeface="맑은 고딕 Semilight" panose="020B0502040204020203" pitchFamily="50" charset="-127"/>
-              </a:rPr>
-              <a:t>개 코드는 </a:t>
-            </a:r>
-            <a:r>
-              <a:rPr lang="en-US" altLang="ko-KR" dirty="0">
-                <a:latin typeface="맑은 고딕 Semilight" panose="020B0502040204020203" pitchFamily="50" charset="-127"/>
-                <a:ea typeface="맑은 고딕 Semilight" panose="020B0502040204020203" pitchFamily="50" charset="-127"/>
-                <a:cs typeface="맑은 고딕 Semilight" panose="020B0502040204020203" pitchFamily="50" charset="-127"/>
-              </a:rPr>
-              <a:t>Gradient Descent &amp; Stochastic Gradient Descent </a:t>
-            </a:r>
-            <a:r>
-              <a:rPr lang="ko-KR" altLang="en-US" dirty="0">
-                <a:latin typeface="맑은 고딕 Semilight" panose="020B0502040204020203" pitchFamily="50" charset="-127"/>
-                <a:ea typeface="맑은 고딕 Semilight" panose="020B0502040204020203" pitchFamily="50" charset="-127"/>
-                <a:cs typeface="맑은 고딕 Semilight" panose="020B0502040204020203" pitchFamily="50" charset="-127"/>
-              </a:rPr>
-              <a:t>방식 중 어느 것인가</a:t>
-            </a:r>
-            <a:r>
-              <a:rPr lang="en-US" altLang="ko-KR" dirty="0">
-                <a:latin typeface="맑은 고딕 Semilight" panose="020B0502040204020203" pitchFamily="50" charset="-127"/>
-                <a:ea typeface="맑은 고딕 Semilight" panose="020B0502040204020203" pitchFamily="50" charset="-127"/>
-                <a:cs typeface="맑은 고딕 Semilight" panose="020B0502040204020203" pitchFamily="50" charset="-127"/>
-              </a:rPr>
-              <a:t>?</a:t>
-            </a:r>
-            <a:r>
-              <a:rPr lang="ko-KR" altLang="en-US" dirty="0">
-                <a:latin typeface="맑은 고딕 Semilight" panose="020B0502040204020203" pitchFamily="50" charset="-127"/>
-                <a:ea typeface="맑은 고딕 Semilight" panose="020B0502040204020203" pitchFamily="50" charset="-127"/>
-                <a:cs typeface="맑은 고딕 Semilight" panose="020B0502040204020203" pitchFamily="50" charset="-127"/>
-              </a:rPr>
-              <a:t> 아래 코드를</a:t>
-            </a:r>
-            <a:r>
-              <a:rPr lang="en-US" altLang="ko-KR" dirty="0">
-                <a:latin typeface="맑은 고딕 Semilight" panose="020B0502040204020203" pitchFamily="50" charset="-127"/>
-                <a:ea typeface="맑은 고딕 Semilight" panose="020B0502040204020203" pitchFamily="50" charset="-127"/>
-                <a:cs typeface="맑은 고딕 Semilight" panose="020B0502040204020203" pitchFamily="50" charset="-127"/>
-              </a:rPr>
-              <a:t> </a:t>
-            </a:r>
-            <a:r>
-              <a:rPr lang="ko-KR" altLang="en-US" dirty="0">
-                <a:latin typeface="맑은 고딕 Semilight" panose="020B0502040204020203" pitchFamily="50" charset="-127"/>
-                <a:ea typeface="맑은 고딕 Semilight" panose="020B0502040204020203" pitchFamily="50" charset="-127"/>
-                <a:cs typeface="맑은 고딕 Semilight" panose="020B0502040204020203" pitchFamily="50" charset="-127"/>
-              </a:rPr>
-              <a:t>비교하여 생각해 보자 </a:t>
-            </a:r>
-          </a:p>
-        </p:txBody>
-      </p:sp>
-      <p:sp>
-        <p:nvSpPr>
-          <p:cNvPr id="6" name="TextBox 5">
-            <a:extLst>
-              <a:ext uri="{FF2B5EF4-FFF2-40B4-BE49-F238E27FC236}">
-                <a16:creationId xmlns:a16="http://schemas.microsoft.com/office/drawing/2014/main" id="{25EB0D2A-1DD3-19D2-7586-86295E876451}"/>
-              </a:ext>
-            </a:extLst>
-          </p:cNvPr>
-          <p:cNvSpPr txBox="1"/>
-          <p:nvPr/>
-        </p:nvSpPr>
-        <p:spPr>
-          <a:xfrm>
-            <a:off x="6409776" y="2673735"/>
-            <a:ext cx="5238750" cy="2677656"/>
-          </a:xfrm>
-          <a:prstGeom prst="rect">
-            <a:avLst/>
-          </a:prstGeom>
-          <a:solidFill>
-            <a:srgbClr val="76E3FF"/>
-          </a:solidFill>
-        </p:spPr>
-        <p:txBody>
-          <a:bodyPr wrap="square">
-            <a:spAutoFit/>
-          </a:bodyPr>
-          <a:lstStyle/>
-          <a:p>
-            <a:r>
-              <a:rPr lang="ko-KR" altLang="en-US" sz="1400" dirty="0" err="1">
-                <a:latin typeface="D2Coding" panose="020B0609020101020101" pitchFamily="49" charset="-127"/>
-                <a:ea typeface="D2Coding" panose="020B0609020101020101" pitchFamily="49" charset="-127"/>
-              </a:rPr>
-              <a:t>for</a:t>
-            </a:r>
-            <a:r>
-              <a:rPr lang="ko-KR" altLang="en-US" sz="1400" dirty="0">
-                <a:latin typeface="D2Coding" panose="020B0609020101020101" pitchFamily="49" charset="-127"/>
-                <a:ea typeface="D2Coding" panose="020B0609020101020101" pitchFamily="49" charset="-127"/>
-              </a:rPr>
-              <a:t> </a:t>
-            </a:r>
-            <a:r>
-              <a:rPr lang="ko-KR" altLang="en-US" sz="1400" dirty="0" err="1">
-                <a:latin typeface="D2Coding" panose="020B0609020101020101" pitchFamily="49" charset="-127"/>
-                <a:ea typeface="D2Coding" panose="020B0609020101020101" pitchFamily="49" charset="-127"/>
-              </a:rPr>
-              <a:t>epoch</a:t>
-            </a:r>
-            <a:r>
-              <a:rPr lang="ko-KR" altLang="en-US" sz="1400" dirty="0">
-                <a:latin typeface="D2Coding" panose="020B0609020101020101" pitchFamily="49" charset="-127"/>
-                <a:ea typeface="D2Coding" panose="020B0609020101020101" pitchFamily="49" charset="-127"/>
-              </a:rPr>
-              <a:t> </a:t>
-            </a:r>
-            <a:r>
-              <a:rPr lang="ko-KR" altLang="en-US" sz="1400" dirty="0" err="1">
-                <a:latin typeface="D2Coding" panose="020B0609020101020101" pitchFamily="49" charset="-127"/>
-                <a:ea typeface="D2Coding" panose="020B0609020101020101" pitchFamily="49" charset="-127"/>
-              </a:rPr>
-              <a:t>in</a:t>
-            </a:r>
-            <a:r>
-              <a:rPr lang="ko-KR" altLang="en-US" sz="1400" dirty="0">
-                <a:latin typeface="D2Coding" panose="020B0609020101020101" pitchFamily="49" charset="-127"/>
-                <a:ea typeface="D2Coding" panose="020B0609020101020101" pitchFamily="49" charset="-127"/>
-              </a:rPr>
-              <a:t> </a:t>
-            </a:r>
-            <a:r>
-              <a:rPr lang="ko-KR" altLang="en-US" sz="1400" dirty="0" err="1">
-                <a:latin typeface="D2Coding" panose="020B0609020101020101" pitchFamily="49" charset="-127"/>
-                <a:ea typeface="D2Coding" panose="020B0609020101020101" pitchFamily="49" charset="-127"/>
-              </a:rPr>
-              <a:t>range</a:t>
-            </a:r>
-            <a:r>
-              <a:rPr lang="ko-KR" altLang="en-US" sz="1400" dirty="0">
-                <a:latin typeface="D2Coding" panose="020B0609020101020101" pitchFamily="49" charset="-127"/>
-                <a:ea typeface="D2Coding" panose="020B0609020101020101" pitchFamily="49" charset="-127"/>
-              </a:rPr>
-              <a:t>(</a:t>
-            </a:r>
-            <a:r>
-              <a:rPr lang="ko-KR" altLang="en-US" sz="1400" dirty="0" err="1">
-                <a:latin typeface="D2Coding" panose="020B0609020101020101" pitchFamily="49" charset="-127"/>
-                <a:ea typeface="D2Coding" panose="020B0609020101020101" pitchFamily="49" charset="-127"/>
-              </a:rPr>
-              <a:t>epochs</a:t>
-            </a:r>
-            <a:r>
-              <a:rPr lang="ko-KR" altLang="en-US" sz="1400" dirty="0">
-                <a:latin typeface="D2Coding" panose="020B0609020101020101" pitchFamily="49" charset="-127"/>
-                <a:ea typeface="D2Coding" panose="020B0609020101020101" pitchFamily="49" charset="-127"/>
-              </a:rPr>
-              <a:t>):</a:t>
-            </a:r>
-          </a:p>
-          <a:p>
-            <a:r>
-              <a:rPr lang="ko-KR" altLang="en-US" sz="1400" dirty="0">
-                <a:latin typeface="D2Coding" panose="020B0609020101020101" pitchFamily="49" charset="-127"/>
-                <a:ea typeface="D2Coding" panose="020B0609020101020101" pitchFamily="49" charset="-127"/>
-              </a:rPr>
-              <a:t>    </a:t>
-            </a:r>
-            <a:r>
-              <a:rPr lang="ko-KR" altLang="en-US" sz="1400" dirty="0" err="1">
-                <a:latin typeface="D2Coding" panose="020B0609020101020101" pitchFamily="49" charset="-127"/>
-                <a:ea typeface="D2Coding" panose="020B0609020101020101" pitchFamily="49" charset="-127"/>
-              </a:rPr>
-              <a:t>for</a:t>
-            </a:r>
-            <a:r>
-              <a:rPr lang="ko-KR" altLang="en-US" sz="1400" dirty="0">
-                <a:latin typeface="D2Coding" panose="020B0609020101020101" pitchFamily="49" charset="-127"/>
-                <a:ea typeface="D2Coding" panose="020B0609020101020101" pitchFamily="49" charset="-127"/>
-              </a:rPr>
-              <a:t> </a:t>
-            </a:r>
-            <a:r>
-              <a:rPr lang="ko-KR" altLang="en-US" sz="1400" dirty="0" err="1">
-                <a:latin typeface="D2Coding" panose="020B0609020101020101" pitchFamily="49" charset="-127"/>
-                <a:ea typeface="D2Coding" panose="020B0609020101020101" pitchFamily="49" charset="-127"/>
-              </a:rPr>
-              <a:t>i</a:t>
-            </a:r>
-            <a:r>
-              <a:rPr lang="ko-KR" altLang="en-US" sz="1400" dirty="0">
-                <a:latin typeface="D2Coding" panose="020B0609020101020101" pitchFamily="49" charset="-127"/>
-                <a:ea typeface="D2Coding" panose="020B0609020101020101" pitchFamily="49" charset="-127"/>
-              </a:rPr>
-              <a:t> </a:t>
-            </a:r>
-            <a:r>
-              <a:rPr lang="ko-KR" altLang="en-US" sz="1400" dirty="0" err="1">
-                <a:latin typeface="D2Coding" panose="020B0609020101020101" pitchFamily="49" charset="-127"/>
-                <a:ea typeface="D2Coding" panose="020B0609020101020101" pitchFamily="49" charset="-127"/>
-              </a:rPr>
-              <a:t>in</a:t>
-            </a:r>
-            <a:r>
-              <a:rPr lang="ko-KR" altLang="en-US" sz="1400" dirty="0">
-                <a:latin typeface="D2Coding" panose="020B0609020101020101" pitchFamily="49" charset="-127"/>
-                <a:ea typeface="D2Coding" panose="020B0609020101020101" pitchFamily="49" charset="-127"/>
-              </a:rPr>
-              <a:t> </a:t>
-            </a:r>
-            <a:r>
-              <a:rPr lang="ko-KR" altLang="en-US" sz="1400" dirty="0" err="1">
-                <a:latin typeface="D2Coding" panose="020B0609020101020101" pitchFamily="49" charset="-127"/>
-                <a:ea typeface="D2Coding" panose="020B0609020101020101" pitchFamily="49" charset="-127"/>
-              </a:rPr>
-              <a:t>range</a:t>
-            </a:r>
-            <a:r>
-              <a:rPr lang="ko-KR" altLang="en-US" sz="1400" dirty="0">
-                <a:latin typeface="D2Coding" panose="020B0609020101020101" pitchFamily="49" charset="-127"/>
-                <a:ea typeface="D2Coding" panose="020B0609020101020101" pitchFamily="49" charset="-127"/>
-              </a:rPr>
-              <a:t>(</a:t>
-            </a:r>
-            <a:r>
-              <a:rPr lang="ko-KR" altLang="en-US" sz="1400" dirty="0" err="1">
-                <a:latin typeface="D2Coding" panose="020B0609020101020101" pitchFamily="49" charset="-127"/>
-                <a:ea typeface="D2Coding" panose="020B0609020101020101" pitchFamily="49" charset="-127"/>
-              </a:rPr>
-              <a:t>len</a:t>
-            </a:r>
-            <a:r>
-              <a:rPr lang="ko-KR" altLang="en-US" sz="1400" dirty="0">
-                <a:latin typeface="D2Coding" panose="020B0609020101020101" pitchFamily="49" charset="-127"/>
-                <a:ea typeface="D2Coding" panose="020B0609020101020101" pitchFamily="49" charset="-127"/>
-              </a:rPr>
-              <a:t>(</a:t>
-            </a:r>
-            <a:r>
-              <a:rPr lang="ko-KR" altLang="en-US" sz="1400" dirty="0" err="1">
-                <a:latin typeface="D2Coding" panose="020B0609020101020101" pitchFamily="49" charset="-127"/>
-                <a:ea typeface="D2Coding" panose="020B0609020101020101" pitchFamily="49" charset="-127"/>
-              </a:rPr>
-              <a:t>X</a:t>
-            </a:r>
-            <a:r>
-              <a:rPr lang="ko-KR" altLang="en-US" sz="1400" dirty="0">
-                <a:latin typeface="D2Coding" panose="020B0609020101020101" pitchFamily="49" charset="-127"/>
-                <a:ea typeface="D2Coding" panose="020B0609020101020101" pitchFamily="49" charset="-127"/>
-              </a:rPr>
-              <a:t>)): # 데이터 100개를 하나씩 순회</a:t>
-            </a:r>
-          </a:p>
-          <a:p>
-            <a:r>
-              <a:rPr lang="ko-KR" altLang="en-US" sz="1400" dirty="0">
-                <a:latin typeface="D2Coding" panose="020B0609020101020101" pitchFamily="49" charset="-127"/>
-                <a:ea typeface="D2Coding" panose="020B0609020101020101" pitchFamily="49" charset="-127"/>
-              </a:rPr>
-              <a:t>        </a:t>
-            </a:r>
-            <a:r>
-              <a:rPr lang="ko-KR" altLang="en-US" sz="1400" dirty="0" err="1">
-                <a:latin typeface="D2Coding" panose="020B0609020101020101" pitchFamily="49" charset="-127"/>
-                <a:ea typeface="D2Coding" panose="020B0609020101020101" pitchFamily="49" charset="-127"/>
-              </a:rPr>
-              <a:t>x_single</a:t>
-            </a:r>
-            <a:r>
-              <a:rPr lang="ko-KR" altLang="en-US" sz="1400" dirty="0">
-                <a:latin typeface="D2Coding" panose="020B0609020101020101" pitchFamily="49" charset="-127"/>
-                <a:ea typeface="D2Coding" panose="020B0609020101020101" pitchFamily="49" charset="-127"/>
-              </a:rPr>
-              <a:t> = </a:t>
-            </a:r>
-            <a:r>
-              <a:rPr lang="ko-KR" altLang="en-US" sz="1400" dirty="0" err="1">
-                <a:latin typeface="D2Coding" panose="020B0609020101020101" pitchFamily="49" charset="-127"/>
-                <a:ea typeface="D2Coding" panose="020B0609020101020101" pitchFamily="49" charset="-127"/>
-              </a:rPr>
-              <a:t>X</a:t>
-            </a:r>
-            <a:r>
-              <a:rPr lang="ko-KR" altLang="en-US" sz="1400" dirty="0">
-                <a:latin typeface="D2Coding" panose="020B0609020101020101" pitchFamily="49" charset="-127"/>
-                <a:ea typeface="D2Coding" panose="020B0609020101020101" pitchFamily="49" charset="-127"/>
-              </a:rPr>
-              <a:t>[</a:t>
-            </a:r>
-            <a:r>
-              <a:rPr lang="ko-KR" altLang="en-US" sz="1400" dirty="0" err="1">
-                <a:latin typeface="D2Coding" panose="020B0609020101020101" pitchFamily="49" charset="-127"/>
-                <a:ea typeface="D2Coding" panose="020B0609020101020101" pitchFamily="49" charset="-127"/>
-              </a:rPr>
-              <a:t>i</a:t>
-            </a:r>
-            <a:r>
-              <a:rPr lang="ko-KR" altLang="en-US" sz="1400" dirty="0">
-                <a:latin typeface="D2Coding" panose="020B0609020101020101" pitchFamily="49" charset="-127"/>
-                <a:ea typeface="D2Coding" panose="020B0609020101020101" pitchFamily="49" charset="-127"/>
-              </a:rPr>
-              <a:t>]     # 데이터 1개 추출</a:t>
-            </a:r>
-          </a:p>
-          <a:p>
-            <a:r>
-              <a:rPr lang="ko-KR" altLang="en-US" sz="1400" dirty="0">
-                <a:latin typeface="D2Coding" panose="020B0609020101020101" pitchFamily="49" charset="-127"/>
-                <a:ea typeface="D2Coding" panose="020B0609020101020101" pitchFamily="49" charset="-127"/>
-              </a:rPr>
-              <a:t>        </a:t>
-            </a:r>
-            <a:r>
-              <a:rPr lang="ko-KR" altLang="en-US" sz="1400" dirty="0" err="1">
-                <a:latin typeface="D2Coding" panose="020B0609020101020101" pitchFamily="49" charset="-127"/>
-                <a:ea typeface="D2Coding" panose="020B0609020101020101" pitchFamily="49" charset="-127"/>
-              </a:rPr>
-              <a:t>y_true_single</a:t>
-            </a:r>
-            <a:r>
-              <a:rPr lang="ko-KR" altLang="en-US" sz="1400" dirty="0">
-                <a:latin typeface="D2Coding" panose="020B0609020101020101" pitchFamily="49" charset="-127"/>
-                <a:ea typeface="D2Coding" panose="020B0609020101020101" pitchFamily="49" charset="-127"/>
-              </a:rPr>
-              <a:t> = </a:t>
-            </a:r>
-            <a:r>
-              <a:rPr lang="ko-KR" altLang="en-US" sz="1400" dirty="0" err="1">
-                <a:latin typeface="D2Coding" panose="020B0609020101020101" pitchFamily="49" charset="-127"/>
-                <a:ea typeface="D2Coding" panose="020B0609020101020101" pitchFamily="49" charset="-127"/>
-              </a:rPr>
-              <a:t>y_true</a:t>
-            </a:r>
-            <a:r>
-              <a:rPr lang="ko-KR" altLang="en-US" sz="1400" dirty="0">
-                <a:latin typeface="D2Coding" panose="020B0609020101020101" pitchFamily="49" charset="-127"/>
-                <a:ea typeface="D2Coding" panose="020B0609020101020101" pitchFamily="49" charset="-127"/>
-              </a:rPr>
-              <a:t>[</a:t>
-            </a:r>
-            <a:r>
-              <a:rPr lang="ko-KR" altLang="en-US" sz="1400" dirty="0" err="1">
-                <a:latin typeface="D2Coding" panose="020B0609020101020101" pitchFamily="49" charset="-127"/>
-                <a:ea typeface="D2Coding" panose="020B0609020101020101" pitchFamily="49" charset="-127"/>
-              </a:rPr>
-              <a:t>i</a:t>
-            </a:r>
-            <a:r>
-              <a:rPr lang="ko-KR" altLang="en-US" sz="1400" dirty="0">
-                <a:latin typeface="D2Coding" panose="020B0609020101020101" pitchFamily="49" charset="-127"/>
-                <a:ea typeface="D2Coding" panose="020B0609020101020101" pitchFamily="49" charset="-127"/>
-              </a:rPr>
-              <a:t>]</a:t>
-            </a:r>
-          </a:p>
-          <a:p>
-            <a:r>
-              <a:rPr lang="ko-KR" altLang="en-US" sz="1400" dirty="0">
-                <a:latin typeface="D2Coding" panose="020B0609020101020101" pitchFamily="49" charset="-127"/>
-                <a:ea typeface="D2Coding" panose="020B0609020101020101" pitchFamily="49" charset="-127"/>
-              </a:rPr>
-              <a:t>        </a:t>
-            </a:r>
-          </a:p>
-          <a:p>
-            <a:r>
-              <a:rPr lang="ko-KR" altLang="en-US" sz="1400" dirty="0">
-                <a:latin typeface="D2Coding" panose="020B0609020101020101" pitchFamily="49" charset="-127"/>
-                <a:ea typeface="D2Coding" panose="020B0609020101020101" pitchFamily="49" charset="-127"/>
-              </a:rPr>
-              <a:t>        </a:t>
-            </a:r>
-            <a:r>
-              <a:rPr lang="ko-KR" altLang="en-US" sz="1400" dirty="0" err="1">
-                <a:latin typeface="D2Coding" panose="020B0609020101020101" pitchFamily="49" charset="-127"/>
-                <a:ea typeface="D2Coding" panose="020B0609020101020101" pitchFamily="49" charset="-127"/>
-              </a:rPr>
-              <a:t>y_hat</a:t>
-            </a:r>
-            <a:r>
-              <a:rPr lang="ko-KR" altLang="en-US" sz="1400" dirty="0">
-                <a:latin typeface="D2Coding" panose="020B0609020101020101" pitchFamily="49" charset="-127"/>
-                <a:ea typeface="D2Coding" panose="020B0609020101020101" pitchFamily="49" charset="-127"/>
-              </a:rPr>
-              <a:t> = </a:t>
-            </a:r>
-            <a:r>
-              <a:rPr lang="ko-KR" altLang="en-US" sz="1400" dirty="0" err="1">
-                <a:latin typeface="D2Coding" panose="020B0609020101020101" pitchFamily="49" charset="-127"/>
-                <a:ea typeface="D2Coding" panose="020B0609020101020101" pitchFamily="49" charset="-127"/>
-              </a:rPr>
-              <a:t>x_single</a:t>
-            </a:r>
-            <a:r>
-              <a:rPr lang="ko-KR" altLang="en-US" sz="1400" dirty="0">
-                <a:latin typeface="D2Coding" panose="020B0609020101020101" pitchFamily="49" charset="-127"/>
-                <a:ea typeface="D2Coding" panose="020B0609020101020101" pitchFamily="49" charset="-127"/>
-              </a:rPr>
-              <a:t> @ </a:t>
-            </a:r>
-            <a:r>
-              <a:rPr lang="ko-KR" altLang="en-US" sz="1400" dirty="0" err="1">
-                <a:latin typeface="D2Coding" panose="020B0609020101020101" pitchFamily="49" charset="-127"/>
-                <a:ea typeface="D2Coding" panose="020B0609020101020101" pitchFamily="49" charset="-127"/>
-              </a:rPr>
-              <a:t>W</a:t>
-            </a:r>
-            <a:r>
-              <a:rPr lang="ko-KR" altLang="en-US" sz="1400" dirty="0">
-                <a:latin typeface="D2Coding" panose="020B0609020101020101" pitchFamily="49" charset="-127"/>
-                <a:ea typeface="D2Coding" panose="020B0609020101020101" pitchFamily="49" charset="-127"/>
-              </a:rPr>
-              <a:t> + </a:t>
-            </a:r>
-            <a:r>
-              <a:rPr lang="ko-KR" altLang="en-US" sz="1400" dirty="0" err="1">
-                <a:latin typeface="D2Coding" panose="020B0609020101020101" pitchFamily="49" charset="-127"/>
-                <a:ea typeface="D2Coding" panose="020B0609020101020101" pitchFamily="49" charset="-127"/>
-              </a:rPr>
-              <a:t>b</a:t>
-            </a:r>
-            <a:r>
-              <a:rPr lang="ko-KR" altLang="en-US" sz="1400" dirty="0">
-                <a:latin typeface="D2Coding" panose="020B0609020101020101" pitchFamily="49" charset="-127"/>
-                <a:ea typeface="D2Coding" panose="020B0609020101020101" pitchFamily="49" charset="-127"/>
-              </a:rPr>
-              <a:t>  # 1개만 예측</a:t>
-            </a:r>
-          </a:p>
-          <a:p>
-            <a:r>
-              <a:rPr lang="ko-KR" altLang="en-US" sz="1400" dirty="0">
-                <a:latin typeface="D2Coding" panose="020B0609020101020101" pitchFamily="49" charset="-127"/>
-                <a:ea typeface="D2Coding" panose="020B0609020101020101" pitchFamily="49" charset="-127"/>
-              </a:rPr>
-              <a:t>        </a:t>
-            </a:r>
-            <a:r>
-              <a:rPr lang="ko-KR" altLang="en-US" sz="1400" dirty="0" err="1">
-                <a:latin typeface="D2Coding" panose="020B0609020101020101" pitchFamily="49" charset="-127"/>
-                <a:ea typeface="D2Coding" panose="020B0609020101020101" pitchFamily="49" charset="-127"/>
-              </a:rPr>
-              <a:t>loss</a:t>
-            </a:r>
-            <a:r>
-              <a:rPr lang="ko-KR" altLang="en-US" sz="1400" dirty="0">
-                <a:latin typeface="D2Coding" panose="020B0609020101020101" pitchFamily="49" charset="-127"/>
-                <a:ea typeface="D2Coding" panose="020B0609020101020101" pitchFamily="49" charset="-127"/>
-              </a:rPr>
-              <a:t> = (</a:t>
-            </a:r>
-            <a:r>
-              <a:rPr lang="ko-KR" altLang="en-US" sz="1400" dirty="0" err="1">
-                <a:latin typeface="D2Coding" panose="020B0609020101020101" pitchFamily="49" charset="-127"/>
-                <a:ea typeface="D2Coding" panose="020B0609020101020101" pitchFamily="49" charset="-127"/>
-              </a:rPr>
-              <a:t>y_hat</a:t>
-            </a:r>
-            <a:r>
-              <a:rPr lang="ko-KR" altLang="en-US" sz="1400" dirty="0">
-                <a:latin typeface="D2Coding" panose="020B0609020101020101" pitchFamily="49" charset="-127"/>
-                <a:ea typeface="D2Coding" panose="020B0609020101020101" pitchFamily="49" charset="-127"/>
-              </a:rPr>
-              <a:t> - </a:t>
-            </a:r>
-            <a:r>
-              <a:rPr lang="ko-KR" altLang="en-US" sz="1400" dirty="0" err="1">
-                <a:latin typeface="D2Coding" panose="020B0609020101020101" pitchFamily="49" charset="-127"/>
-                <a:ea typeface="D2Coding" panose="020B0609020101020101" pitchFamily="49" charset="-127"/>
-              </a:rPr>
-              <a:t>y_true_single</a:t>
-            </a:r>
-            <a:r>
-              <a:rPr lang="ko-KR" altLang="en-US" sz="1400" dirty="0">
-                <a:latin typeface="D2Coding" panose="020B0609020101020101" pitchFamily="49" charset="-127"/>
-                <a:ea typeface="D2Coding" panose="020B0609020101020101" pitchFamily="49" charset="-127"/>
-              </a:rPr>
-              <a:t>)**2 # 1개의 오차</a:t>
-            </a:r>
-          </a:p>
-          <a:p>
-            <a:r>
-              <a:rPr lang="ko-KR" altLang="en-US" sz="1400" dirty="0">
-                <a:latin typeface="D2Coding" panose="020B0609020101020101" pitchFamily="49" charset="-127"/>
-                <a:ea typeface="D2Coding" panose="020B0609020101020101" pitchFamily="49" charset="-127"/>
-              </a:rPr>
-              <a:t>        </a:t>
-            </a:r>
-          </a:p>
-          <a:p>
-            <a:r>
-              <a:rPr lang="ko-KR" altLang="en-US" sz="1400" dirty="0">
-                <a:latin typeface="D2Coding" panose="020B0609020101020101" pitchFamily="49" charset="-127"/>
-                <a:ea typeface="D2Coding" panose="020B0609020101020101" pitchFamily="49" charset="-127"/>
-              </a:rPr>
-              <a:t>        </a:t>
-            </a:r>
-            <a:r>
-              <a:rPr lang="ko-KR" altLang="en-US" sz="1400" dirty="0" err="1">
-                <a:latin typeface="D2Coding" panose="020B0609020101020101" pitchFamily="49" charset="-127"/>
-                <a:ea typeface="D2Coding" panose="020B0609020101020101" pitchFamily="49" charset="-127"/>
-              </a:rPr>
-              <a:t>loss.backward</a:t>
-            </a:r>
-            <a:r>
-              <a:rPr lang="ko-KR" altLang="en-US" sz="1400" dirty="0">
-                <a:latin typeface="D2Coding" panose="020B0609020101020101" pitchFamily="49" charset="-127"/>
-                <a:ea typeface="D2Coding" panose="020B0609020101020101" pitchFamily="49" charset="-127"/>
-              </a:rPr>
-              <a:t>()</a:t>
-            </a:r>
-          </a:p>
-          <a:p>
-            <a:r>
-              <a:rPr lang="ko-KR" altLang="en-US" sz="1400" dirty="0">
-                <a:latin typeface="D2Coding" panose="020B0609020101020101" pitchFamily="49" charset="-127"/>
-                <a:ea typeface="D2Coding" panose="020B0609020101020101" pitchFamily="49" charset="-127"/>
-              </a:rPr>
-              <a:t>        </a:t>
-            </a:r>
-            <a:r>
-              <a:rPr lang="ko-KR" altLang="en-US" sz="1400" dirty="0" err="1">
-                <a:latin typeface="D2Coding" panose="020B0609020101020101" pitchFamily="49" charset="-127"/>
-                <a:ea typeface="D2Coding" panose="020B0609020101020101" pitchFamily="49" charset="-127"/>
-              </a:rPr>
-              <a:t>with</a:t>
-            </a:r>
-            <a:r>
-              <a:rPr lang="ko-KR" altLang="en-US" sz="1400" dirty="0">
-                <a:latin typeface="D2Coding" panose="020B0609020101020101" pitchFamily="49" charset="-127"/>
-                <a:ea typeface="D2Coding" panose="020B0609020101020101" pitchFamily="49" charset="-127"/>
-              </a:rPr>
-              <a:t> </a:t>
-            </a:r>
-            <a:r>
-              <a:rPr lang="ko-KR" altLang="en-US" sz="1400" dirty="0" err="1">
-                <a:latin typeface="D2Coding" panose="020B0609020101020101" pitchFamily="49" charset="-127"/>
-                <a:ea typeface="D2Coding" panose="020B0609020101020101" pitchFamily="49" charset="-127"/>
-              </a:rPr>
-              <a:t>torch.no_grad</a:t>
-            </a:r>
-            <a:r>
-              <a:rPr lang="ko-KR" altLang="en-US" sz="1400" dirty="0">
-                <a:latin typeface="D2Coding" panose="020B0609020101020101" pitchFamily="49" charset="-127"/>
-                <a:ea typeface="D2Coding" panose="020B0609020101020101" pitchFamily="49" charset="-127"/>
-              </a:rPr>
-              <a:t>():</a:t>
-            </a:r>
-          </a:p>
-          <a:p>
-            <a:r>
-              <a:rPr lang="ko-KR" altLang="en-US" sz="1400" dirty="0">
-                <a:latin typeface="D2Coding" panose="020B0609020101020101" pitchFamily="49" charset="-127"/>
-                <a:ea typeface="D2Coding" panose="020B0609020101020101" pitchFamily="49" charset="-127"/>
-              </a:rPr>
-              <a:t>            </a:t>
-            </a:r>
-            <a:r>
-              <a:rPr lang="ko-KR" altLang="en-US" sz="1400" dirty="0" err="1">
-                <a:latin typeface="D2Coding" panose="020B0609020101020101" pitchFamily="49" charset="-127"/>
-                <a:ea typeface="D2Coding" panose="020B0609020101020101" pitchFamily="49" charset="-127"/>
-              </a:rPr>
-              <a:t>W</a:t>
-            </a:r>
-            <a:r>
-              <a:rPr lang="ko-KR" altLang="en-US" sz="1400" dirty="0">
-                <a:latin typeface="D2Coding" panose="020B0609020101020101" pitchFamily="49" charset="-127"/>
-                <a:ea typeface="D2Coding" panose="020B0609020101020101" pitchFamily="49" charset="-127"/>
-              </a:rPr>
-              <a:t> -= </a:t>
-            </a:r>
-            <a:r>
-              <a:rPr lang="ko-KR" altLang="en-US" sz="1400" dirty="0" err="1">
-                <a:latin typeface="D2Coding" panose="020B0609020101020101" pitchFamily="49" charset="-127"/>
-                <a:ea typeface="D2Coding" panose="020B0609020101020101" pitchFamily="49" charset="-127"/>
-              </a:rPr>
-              <a:t>learning_rate</a:t>
-            </a:r>
-            <a:r>
-              <a:rPr lang="ko-KR" altLang="en-US" sz="1400" dirty="0">
-                <a:latin typeface="D2Coding" panose="020B0609020101020101" pitchFamily="49" charset="-127"/>
-                <a:ea typeface="D2Coding" panose="020B0609020101020101" pitchFamily="49" charset="-127"/>
-              </a:rPr>
-              <a:t> * </a:t>
-            </a:r>
-            <a:r>
-              <a:rPr lang="ko-KR" altLang="en-US" sz="1400" dirty="0" err="1">
-                <a:latin typeface="D2Coding" panose="020B0609020101020101" pitchFamily="49" charset="-127"/>
-                <a:ea typeface="D2Coding" panose="020B0609020101020101" pitchFamily="49" charset="-127"/>
-              </a:rPr>
-              <a:t>W.grad</a:t>
-            </a:r>
-            <a:endParaRPr lang="ko-KR" altLang="en-US" sz="1400" dirty="0">
-              <a:latin typeface="D2Coding" panose="020B0609020101020101" pitchFamily="49" charset="-127"/>
-              <a:ea typeface="D2Coding" panose="020B0609020101020101" pitchFamily="49" charset="-127"/>
-            </a:endParaRPr>
-          </a:p>
-          <a:p>
-            <a:r>
-              <a:rPr lang="ko-KR" altLang="en-US" sz="1400" dirty="0">
-                <a:latin typeface="D2Coding" panose="020B0609020101020101" pitchFamily="49" charset="-127"/>
-                <a:ea typeface="D2Coding" panose="020B0609020101020101" pitchFamily="49" charset="-127"/>
-              </a:rPr>
-              <a:t>            ...</a:t>
-            </a:r>
-          </a:p>
-        </p:txBody>
-      </p:sp>
-      <p:sp>
-        <p:nvSpPr>
-          <p:cNvPr id="18" name="TextBox 17">
-            <a:extLst>
-              <a:ext uri="{FF2B5EF4-FFF2-40B4-BE49-F238E27FC236}">
-                <a16:creationId xmlns:a16="http://schemas.microsoft.com/office/drawing/2014/main" id="{DB6844F7-DF49-397A-9B28-18CA92B157B2}"/>
-              </a:ext>
-            </a:extLst>
-          </p:cNvPr>
-          <p:cNvSpPr txBox="1"/>
-          <p:nvPr/>
-        </p:nvSpPr>
-        <p:spPr>
-          <a:xfrm>
-            <a:off x="690288" y="2648679"/>
-            <a:ext cx="5457825" cy="2677656"/>
-          </a:xfrm>
-          <a:prstGeom prst="rect">
-            <a:avLst/>
-          </a:prstGeom>
-          <a:solidFill>
-            <a:srgbClr val="76E3FF"/>
-          </a:solidFill>
-        </p:spPr>
-        <p:txBody>
-          <a:bodyPr wrap="square">
-            <a:spAutoFit/>
-          </a:bodyPr>
-          <a:lstStyle/>
-          <a:p>
-            <a:r>
-              <a:rPr lang="ko-KR" altLang="en-US" sz="1400" dirty="0" err="1">
-                <a:latin typeface="D2Coding" panose="020B0609020101020101" pitchFamily="49" charset="-127"/>
-                <a:ea typeface="D2Coding" panose="020B0609020101020101" pitchFamily="49" charset="-127"/>
-              </a:rPr>
-              <a:t>for</a:t>
-            </a:r>
-            <a:r>
-              <a:rPr lang="ko-KR" altLang="en-US" sz="1400" dirty="0">
-                <a:latin typeface="D2Coding" panose="020B0609020101020101" pitchFamily="49" charset="-127"/>
-                <a:ea typeface="D2Coding" panose="020B0609020101020101" pitchFamily="49" charset="-127"/>
-              </a:rPr>
-              <a:t> </a:t>
-            </a:r>
-            <a:r>
-              <a:rPr lang="ko-KR" altLang="en-US" sz="1400" dirty="0" err="1">
-                <a:latin typeface="D2Coding" panose="020B0609020101020101" pitchFamily="49" charset="-127"/>
-                <a:ea typeface="D2Coding" panose="020B0609020101020101" pitchFamily="49" charset="-127"/>
-              </a:rPr>
-              <a:t>epoch</a:t>
-            </a:r>
-            <a:r>
-              <a:rPr lang="ko-KR" altLang="en-US" sz="1400" dirty="0">
-                <a:latin typeface="D2Coding" panose="020B0609020101020101" pitchFamily="49" charset="-127"/>
-                <a:ea typeface="D2Coding" panose="020B0609020101020101" pitchFamily="49" charset="-127"/>
-              </a:rPr>
-              <a:t> </a:t>
-            </a:r>
-            <a:r>
-              <a:rPr lang="ko-KR" altLang="en-US" sz="1400" dirty="0" err="1">
-                <a:latin typeface="D2Coding" panose="020B0609020101020101" pitchFamily="49" charset="-127"/>
-                <a:ea typeface="D2Coding" panose="020B0609020101020101" pitchFamily="49" charset="-127"/>
-              </a:rPr>
-              <a:t>in</a:t>
-            </a:r>
-            <a:r>
-              <a:rPr lang="ko-KR" altLang="en-US" sz="1400" dirty="0">
-                <a:latin typeface="D2Coding" panose="020B0609020101020101" pitchFamily="49" charset="-127"/>
-                <a:ea typeface="D2Coding" panose="020B0609020101020101" pitchFamily="49" charset="-127"/>
-              </a:rPr>
-              <a:t> </a:t>
-            </a:r>
-            <a:r>
-              <a:rPr lang="ko-KR" altLang="en-US" sz="1400" dirty="0" err="1">
-                <a:latin typeface="D2Coding" panose="020B0609020101020101" pitchFamily="49" charset="-127"/>
-                <a:ea typeface="D2Coding" panose="020B0609020101020101" pitchFamily="49" charset="-127"/>
-              </a:rPr>
-              <a:t>range</a:t>
-            </a:r>
-            <a:r>
-              <a:rPr lang="ko-KR" altLang="en-US" sz="1400" dirty="0">
-                <a:latin typeface="D2Coding" panose="020B0609020101020101" pitchFamily="49" charset="-127"/>
-                <a:ea typeface="D2Coding" panose="020B0609020101020101" pitchFamily="49" charset="-127"/>
-              </a:rPr>
-              <a:t>(</a:t>
-            </a:r>
-            <a:r>
-              <a:rPr lang="ko-KR" altLang="en-US" sz="1400" dirty="0" err="1">
-                <a:latin typeface="D2Coding" panose="020B0609020101020101" pitchFamily="49" charset="-127"/>
-                <a:ea typeface="D2Coding" panose="020B0609020101020101" pitchFamily="49" charset="-127"/>
-              </a:rPr>
-              <a:t>epochs</a:t>
-            </a:r>
-            <a:r>
-              <a:rPr lang="ko-KR" altLang="en-US" sz="1400" dirty="0">
-                <a:latin typeface="D2Coding" panose="020B0609020101020101" pitchFamily="49" charset="-127"/>
-                <a:ea typeface="D2Coding" panose="020B0609020101020101" pitchFamily="49" charset="-127"/>
-              </a:rPr>
-              <a:t>):</a:t>
-            </a:r>
-          </a:p>
-          <a:p>
-            <a:r>
-              <a:rPr lang="ko-KR" altLang="en-US" sz="1400" dirty="0">
-                <a:latin typeface="D2Coding" panose="020B0609020101020101" pitchFamily="49" charset="-127"/>
-                <a:ea typeface="D2Coding" panose="020B0609020101020101" pitchFamily="49" charset="-127"/>
-              </a:rPr>
-              <a:t>    # </a:t>
-            </a:r>
-            <a:r>
-              <a:rPr lang="ko-KR" altLang="en-US" sz="1400" dirty="0" err="1">
-                <a:latin typeface="D2Coding" panose="020B0609020101020101" pitchFamily="49" charset="-127"/>
-                <a:ea typeface="D2Coding" panose="020B0609020101020101" pitchFamily="49" charset="-127"/>
-              </a:rPr>
-              <a:t>Forward</a:t>
-            </a:r>
-            <a:r>
-              <a:rPr lang="ko-KR" altLang="en-US" sz="1400" dirty="0">
-                <a:latin typeface="D2Coding" panose="020B0609020101020101" pitchFamily="49" charset="-127"/>
-                <a:ea typeface="D2Coding" panose="020B0609020101020101" pitchFamily="49" charset="-127"/>
-              </a:rPr>
-              <a:t> </a:t>
-            </a:r>
-            <a:r>
-              <a:rPr lang="ko-KR" altLang="en-US" sz="1400" dirty="0" err="1">
-                <a:latin typeface="D2Coding" panose="020B0609020101020101" pitchFamily="49" charset="-127"/>
-                <a:ea typeface="D2Coding" panose="020B0609020101020101" pitchFamily="49" charset="-127"/>
-              </a:rPr>
-              <a:t>pass</a:t>
-            </a:r>
-            <a:r>
-              <a:rPr lang="ko-KR" altLang="en-US" sz="1400" dirty="0">
-                <a:latin typeface="D2Coding" panose="020B0609020101020101" pitchFamily="49" charset="-127"/>
-                <a:ea typeface="D2Coding" panose="020B0609020101020101" pitchFamily="49" charset="-127"/>
-              </a:rPr>
-              <a:t> and </a:t>
-            </a:r>
-            <a:r>
-              <a:rPr lang="ko-KR" altLang="en-US" sz="1400" dirty="0" err="1">
-                <a:latin typeface="D2Coding" panose="020B0609020101020101" pitchFamily="49" charset="-127"/>
-                <a:ea typeface="D2Coding" panose="020B0609020101020101" pitchFamily="49" charset="-127"/>
-              </a:rPr>
-              <a:t>loss</a:t>
-            </a:r>
-            <a:endParaRPr lang="ko-KR" altLang="en-US" sz="1400" dirty="0">
-              <a:latin typeface="D2Coding" panose="020B0609020101020101" pitchFamily="49" charset="-127"/>
-              <a:ea typeface="D2Coding" panose="020B0609020101020101" pitchFamily="49" charset="-127"/>
-            </a:endParaRPr>
-          </a:p>
-          <a:p>
-            <a:r>
-              <a:rPr lang="ko-KR" altLang="en-US" sz="1400" dirty="0">
-                <a:latin typeface="D2Coding" panose="020B0609020101020101" pitchFamily="49" charset="-127"/>
-                <a:ea typeface="D2Coding" panose="020B0609020101020101" pitchFamily="49" charset="-127"/>
-              </a:rPr>
-              <a:t>    </a:t>
-            </a:r>
-            <a:r>
-              <a:rPr lang="ko-KR" altLang="en-US" sz="1400" dirty="0" err="1">
-                <a:latin typeface="D2Coding" panose="020B0609020101020101" pitchFamily="49" charset="-127"/>
-                <a:ea typeface="D2Coding" panose="020B0609020101020101" pitchFamily="49" charset="-127"/>
-              </a:rPr>
-              <a:t>y_hat</a:t>
-            </a:r>
-            <a:r>
-              <a:rPr lang="ko-KR" altLang="en-US" sz="1400" dirty="0">
-                <a:latin typeface="D2Coding" panose="020B0609020101020101" pitchFamily="49" charset="-127"/>
-                <a:ea typeface="D2Coding" panose="020B0609020101020101" pitchFamily="49" charset="-127"/>
-              </a:rPr>
-              <a:t> = </a:t>
-            </a:r>
-            <a:r>
-              <a:rPr lang="ko-KR" altLang="en-US" sz="1400" dirty="0" err="1">
-                <a:latin typeface="D2Coding" panose="020B0609020101020101" pitchFamily="49" charset="-127"/>
-                <a:ea typeface="D2Coding" panose="020B0609020101020101" pitchFamily="49" charset="-127"/>
-              </a:rPr>
-              <a:t>X</a:t>
-            </a:r>
-            <a:r>
-              <a:rPr lang="ko-KR" altLang="en-US" sz="1400" dirty="0">
-                <a:latin typeface="D2Coding" panose="020B0609020101020101" pitchFamily="49" charset="-127"/>
-                <a:ea typeface="D2Coding" panose="020B0609020101020101" pitchFamily="49" charset="-127"/>
-              </a:rPr>
-              <a:t> @ </a:t>
-            </a:r>
-            <a:r>
-              <a:rPr lang="ko-KR" altLang="en-US" sz="1400" dirty="0" err="1">
-                <a:latin typeface="D2Coding" panose="020B0609020101020101" pitchFamily="49" charset="-127"/>
-                <a:ea typeface="D2Coding" panose="020B0609020101020101" pitchFamily="49" charset="-127"/>
-              </a:rPr>
-              <a:t>W</a:t>
-            </a:r>
-            <a:r>
-              <a:rPr lang="ko-KR" altLang="en-US" sz="1400" dirty="0">
-                <a:latin typeface="D2Coding" panose="020B0609020101020101" pitchFamily="49" charset="-127"/>
-                <a:ea typeface="D2Coding" panose="020B0609020101020101" pitchFamily="49" charset="-127"/>
-              </a:rPr>
-              <a:t> + </a:t>
-            </a:r>
-            <a:r>
-              <a:rPr lang="ko-KR" altLang="en-US" sz="1400" dirty="0" err="1">
-                <a:latin typeface="D2Coding" panose="020B0609020101020101" pitchFamily="49" charset="-127"/>
-                <a:ea typeface="D2Coding" panose="020B0609020101020101" pitchFamily="49" charset="-127"/>
-              </a:rPr>
-              <a:t>b</a:t>
-            </a:r>
-            <a:endParaRPr lang="ko-KR" altLang="en-US" sz="1400" dirty="0">
-              <a:latin typeface="D2Coding" panose="020B0609020101020101" pitchFamily="49" charset="-127"/>
-              <a:ea typeface="D2Coding" panose="020B0609020101020101" pitchFamily="49" charset="-127"/>
-            </a:endParaRPr>
-          </a:p>
-          <a:p>
-            <a:r>
-              <a:rPr lang="ko-KR" altLang="en-US" sz="1400" dirty="0">
-                <a:latin typeface="D2Coding" panose="020B0609020101020101" pitchFamily="49" charset="-127"/>
-                <a:ea typeface="D2Coding" panose="020B0609020101020101" pitchFamily="49" charset="-127"/>
-              </a:rPr>
-              <a:t>    </a:t>
-            </a:r>
-            <a:r>
-              <a:rPr lang="ko-KR" altLang="en-US" sz="1400" dirty="0" err="1">
-                <a:latin typeface="D2Coding" panose="020B0609020101020101" pitchFamily="49" charset="-127"/>
-                <a:ea typeface="D2Coding" panose="020B0609020101020101" pitchFamily="49" charset="-127"/>
-              </a:rPr>
-              <a:t>loss</a:t>
-            </a:r>
-            <a:r>
-              <a:rPr lang="ko-KR" altLang="en-US" sz="1400" dirty="0">
-                <a:latin typeface="D2Coding" panose="020B0609020101020101" pitchFamily="49" charset="-127"/>
-                <a:ea typeface="D2Coding" panose="020B0609020101020101" pitchFamily="49" charset="-127"/>
-              </a:rPr>
-              <a:t> = </a:t>
-            </a:r>
-            <a:r>
-              <a:rPr lang="ko-KR" altLang="en-US" sz="1400" dirty="0" err="1">
-                <a:latin typeface="D2Coding" panose="020B0609020101020101" pitchFamily="49" charset="-127"/>
-                <a:ea typeface="D2Coding" panose="020B0609020101020101" pitchFamily="49" charset="-127"/>
-              </a:rPr>
-              <a:t>torch.mean</a:t>
-            </a:r>
-            <a:r>
-              <a:rPr lang="ko-KR" altLang="en-US" sz="1400" dirty="0">
-                <a:latin typeface="D2Coding" panose="020B0609020101020101" pitchFamily="49" charset="-127"/>
-                <a:ea typeface="D2Coding" panose="020B0609020101020101" pitchFamily="49" charset="-127"/>
-              </a:rPr>
-              <a:t>((</a:t>
-            </a:r>
-            <a:r>
-              <a:rPr lang="ko-KR" altLang="en-US" sz="1400" dirty="0" err="1">
-                <a:latin typeface="D2Coding" panose="020B0609020101020101" pitchFamily="49" charset="-127"/>
-                <a:ea typeface="D2Coding" panose="020B0609020101020101" pitchFamily="49" charset="-127"/>
-              </a:rPr>
-              <a:t>y_hat</a:t>
-            </a:r>
-            <a:r>
-              <a:rPr lang="ko-KR" altLang="en-US" sz="1400" dirty="0">
-                <a:latin typeface="D2Coding" panose="020B0609020101020101" pitchFamily="49" charset="-127"/>
-                <a:ea typeface="D2Coding" panose="020B0609020101020101" pitchFamily="49" charset="-127"/>
-              </a:rPr>
-              <a:t> - </a:t>
-            </a:r>
-            <a:r>
-              <a:rPr lang="ko-KR" altLang="en-US" sz="1400" dirty="0" err="1">
-                <a:latin typeface="D2Coding" panose="020B0609020101020101" pitchFamily="49" charset="-127"/>
-                <a:ea typeface="D2Coding" panose="020B0609020101020101" pitchFamily="49" charset="-127"/>
-              </a:rPr>
-              <a:t>y_true</a:t>
-            </a:r>
-            <a:r>
-              <a:rPr lang="ko-KR" altLang="en-US" sz="1400" dirty="0">
-                <a:latin typeface="D2Coding" panose="020B0609020101020101" pitchFamily="49" charset="-127"/>
-                <a:ea typeface="D2Coding" panose="020B0609020101020101" pitchFamily="49" charset="-127"/>
-              </a:rPr>
-              <a:t>)**2)</a:t>
-            </a:r>
-          </a:p>
-          <a:p>
-            <a:r>
-              <a:rPr lang="ko-KR" altLang="en-US" sz="1400" dirty="0">
-                <a:latin typeface="D2Coding" panose="020B0609020101020101" pitchFamily="49" charset="-127"/>
-                <a:ea typeface="D2Coding" panose="020B0609020101020101" pitchFamily="49" charset="-127"/>
-              </a:rPr>
-              <a:t>    </a:t>
-            </a:r>
-          </a:p>
-          <a:p>
-            <a:r>
-              <a:rPr lang="ko-KR" altLang="en-US" sz="1400" dirty="0">
-                <a:latin typeface="D2Coding" panose="020B0609020101020101" pitchFamily="49" charset="-127"/>
-                <a:ea typeface="D2Coding" panose="020B0609020101020101" pitchFamily="49" charset="-127"/>
-              </a:rPr>
-              <a:t>    # </a:t>
-            </a:r>
-            <a:r>
-              <a:rPr lang="ko-KR" altLang="en-US" sz="1400" dirty="0" err="1">
-                <a:latin typeface="D2Coding" panose="020B0609020101020101" pitchFamily="49" charset="-127"/>
-                <a:ea typeface="D2Coding" panose="020B0609020101020101" pitchFamily="49" charset="-127"/>
-              </a:rPr>
-              <a:t>Backward</a:t>
-            </a:r>
-            <a:r>
-              <a:rPr lang="ko-KR" altLang="en-US" sz="1400" dirty="0">
-                <a:latin typeface="D2Coding" panose="020B0609020101020101" pitchFamily="49" charset="-127"/>
-                <a:ea typeface="D2Coding" panose="020B0609020101020101" pitchFamily="49" charset="-127"/>
-              </a:rPr>
-              <a:t> </a:t>
-            </a:r>
-            <a:r>
-              <a:rPr lang="ko-KR" altLang="en-US" sz="1400" dirty="0" err="1">
-                <a:latin typeface="D2Coding" panose="020B0609020101020101" pitchFamily="49" charset="-127"/>
-                <a:ea typeface="D2Coding" panose="020B0609020101020101" pitchFamily="49" charset="-127"/>
-              </a:rPr>
-              <a:t>pass</a:t>
-            </a:r>
-            <a:endParaRPr lang="ko-KR" altLang="en-US" sz="1400" dirty="0">
-              <a:latin typeface="D2Coding" panose="020B0609020101020101" pitchFamily="49" charset="-127"/>
-              <a:ea typeface="D2Coding" panose="020B0609020101020101" pitchFamily="49" charset="-127"/>
-            </a:endParaRPr>
-          </a:p>
-          <a:p>
-            <a:r>
-              <a:rPr lang="ko-KR" altLang="en-US" sz="1400" dirty="0">
-                <a:latin typeface="D2Coding" panose="020B0609020101020101" pitchFamily="49" charset="-127"/>
-                <a:ea typeface="D2Coding" panose="020B0609020101020101" pitchFamily="49" charset="-127"/>
-              </a:rPr>
-              <a:t>    </a:t>
-            </a:r>
-            <a:r>
-              <a:rPr lang="ko-KR" altLang="en-US" sz="1400" dirty="0" err="1">
-                <a:latin typeface="D2Coding" panose="020B0609020101020101" pitchFamily="49" charset="-127"/>
-                <a:ea typeface="D2Coding" panose="020B0609020101020101" pitchFamily="49" charset="-127"/>
-              </a:rPr>
-              <a:t>loss.backward</a:t>
-            </a:r>
-            <a:r>
-              <a:rPr lang="ko-KR" altLang="en-US" sz="1400" dirty="0">
-                <a:latin typeface="D2Coding" panose="020B0609020101020101" pitchFamily="49" charset="-127"/>
-                <a:ea typeface="D2Coding" panose="020B0609020101020101" pitchFamily="49" charset="-127"/>
-              </a:rPr>
-              <a:t>()</a:t>
-            </a:r>
-          </a:p>
-          <a:p>
-            <a:r>
-              <a:rPr lang="ko-KR" altLang="en-US" sz="1400" dirty="0">
-                <a:latin typeface="D2Coding" panose="020B0609020101020101" pitchFamily="49" charset="-127"/>
-                <a:ea typeface="D2Coding" panose="020B0609020101020101" pitchFamily="49" charset="-127"/>
-              </a:rPr>
-              <a:t>    </a:t>
-            </a:r>
-          </a:p>
-          <a:p>
-            <a:r>
-              <a:rPr lang="ko-KR" altLang="en-US" sz="1400" dirty="0">
-                <a:latin typeface="D2Coding" panose="020B0609020101020101" pitchFamily="49" charset="-127"/>
-                <a:ea typeface="D2Coding" panose="020B0609020101020101" pitchFamily="49" charset="-127"/>
-              </a:rPr>
-              <a:t>    # </a:t>
-            </a:r>
-            <a:r>
-              <a:rPr lang="ko-KR" altLang="en-US" sz="1400" dirty="0" err="1">
-                <a:latin typeface="D2Coding" panose="020B0609020101020101" pitchFamily="49" charset="-127"/>
-                <a:ea typeface="D2Coding" panose="020B0609020101020101" pitchFamily="49" charset="-127"/>
-              </a:rPr>
-              <a:t>Update</a:t>
-            </a:r>
-            <a:r>
-              <a:rPr lang="ko-KR" altLang="en-US" sz="1400" dirty="0">
-                <a:latin typeface="D2Coding" panose="020B0609020101020101" pitchFamily="49" charset="-127"/>
-                <a:ea typeface="D2Coding" panose="020B0609020101020101" pitchFamily="49" charset="-127"/>
-              </a:rPr>
-              <a:t> </a:t>
-            </a:r>
-            <a:r>
-              <a:rPr lang="ko-KR" altLang="en-US" sz="1400" dirty="0" err="1">
-                <a:latin typeface="D2Coding" panose="020B0609020101020101" pitchFamily="49" charset="-127"/>
-                <a:ea typeface="D2Coding" panose="020B0609020101020101" pitchFamily="49" charset="-127"/>
-              </a:rPr>
-              <a:t>parameters</a:t>
-            </a:r>
-            <a:endParaRPr lang="ko-KR" altLang="en-US" sz="1400" dirty="0">
-              <a:latin typeface="D2Coding" panose="020B0609020101020101" pitchFamily="49" charset="-127"/>
-              <a:ea typeface="D2Coding" panose="020B0609020101020101" pitchFamily="49" charset="-127"/>
-            </a:endParaRPr>
-          </a:p>
-          <a:p>
-            <a:r>
-              <a:rPr lang="ko-KR" altLang="en-US" sz="1400" dirty="0">
-                <a:latin typeface="D2Coding" panose="020B0609020101020101" pitchFamily="49" charset="-127"/>
-                <a:ea typeface="D2Coding" panose="020B0609020101020101" pitchFamily="49" charset="-127"/>
-              </a:rPr>
-              <a:t>    </a:t>
-            </a:r>
-            <a:r>
-              <a:rPr lang="ko-KR" altLang="en-US" sz="1400" dirty="0" err="1">
-                <a:latin typeface="D2Coding" panose="020B0609020101020101" pitchFamily="49" charset="-127"/>
-                <a:ea typeface="D2Coding" panose="020B0609020101020101" pitchFamily="49" charset="-127"/>
-              </a:rPr>
-              <a:t>with</a:t>
-            </a:r>
-            <a:r>
-              <a:rPr lang="ko-KR" altLang="en-US" sz="1400" dirty="0">
-                <a:latin typeface="D2Coding" panose="020B0609020101020101" pitchFamily="49" charset="-127"/>
-                <a:ea typeface="D2Coding" panose="020B0609020101020101" pitchFamily="49" charset="-127"/>
-              </a:rPr>
-              <a:t> </a:t>
-            </a:r>
-            <a:r>
-              <a:rPr lang="ko-KR" altLang="en-US" sz="1400" dirty="0" err="1">
-                <a:latin typeface="D2Coding" panose="020B0609020101020101" pitchFamily="49" charset="-127"/>
-                <a:ea typeface="D2Coding" panose="020B0609020101020101" pitchFamily="49" charset="-127"/>
-              </a:rPr>
-              <a:t>torch.no_grad</a:t>
-            </a:r>
-            <a:r>
-              <a:rPr lang="ko-KR" altLang="en-US" sz="1400" dirty="0">
-                <a:latin typeface="D2Coding" panose="020B0609020101020101" pitchFamily="49" charset="-127"/>
-                <a:ea typeface="D2Coding" panose="020B0609020101020101" pitchFamily="49" charset="-127"/>
-              </a:rPr>
-              <a:t>():</a:t>
-            </a:r>
-          </a:p>
-          <a:p>
-            <a:r>
-              <a:rPr lang="ko-KR" altLang="en-US" sz="1400" dirty="0">
-                <a:latin typeface="D2Coding" panose="020B0609020101020101" pitchFamily="49" charset="-127"/>
-                <a:ea typeface="D2Coding" panose="020B0609020101020101" pitchFamily="49" charset="-127"/>
-              </a:rPr>
-              <a:t>        </a:t>
-            </a:r>
-            <a:r>
-              <a:rPr lang="ko-KR" altLang="en-US" sz="1400" dirty="0" err="1">
-                <a:latin typeface="D2Coding" panose="020B0609020101020101" pitchFamily="49" charset="-127"/>
-                <a:ea typeface="D2Coding" panose="020B0609020101020101" pitchFamily="49" charset="-127"/>
-              </a:rPr>
-              <a:t>W</a:t>
-            </a:r>
-            <a:r>
-              <a:rPr lang="ko-KR" altLang="en-US" sz="1400" dirty="0">
-                <a:latin typeface="D2Coding" panose="020B0609020101020101" pitchFamily="49" charset="-127"/>
-                <a:ea typeface="D2Coding" panose="020B0609020101020101" pitchFamily="49" charset="-127"/>
-              </a:rPr>
-              <a:t> -= </a:t>
-            </a:r>
-            <a:r>
-              <a:rPr lang="ko-KR" altLang="en-US" sz="1400" dirty="0" err="1">
-                <a:latin typeface="D2Coding" panose="020B0609020101020101" pitchFamily="49" charset="-127"/>
-                <a:ea typeface="D2Coding" panose="020B0609020101020101" pitchFamily="49" charset="-127"/>
-              </a:rPr>
-              <a:t>learning_rate</a:t>
-            </a:r>
-            <a:r>
-              <a:rPr lang="ko-KR" altLang="en-US" sz="1400" dirty="0">
-                <a:latin typeface="D2Coding" panose="020B0609020101020101" pitchFamily="49" charset="-127"/>
-                <a:ea typeface="D2Coding" panose="020B0609020101020101" pitchFamily="49" charset="-127"/>
-              </a:rPr>
-              <a:t> * </a:t>
-            </a:r>
-            <a:r>
-              <a:rPr lang="ko-KR" altLang="en-US" sz="1400" dirty="0" err="1">
-                <a:latin typeface="D2Coding" panose="020B0609020101020101" pitchFamily="49" charset="-127"/>
-                <a:ea typeface="D2Coding" panose="020B0609020101020101" pitchFamily="49" charset="-127"/>
-              </a:rPr>
-              <a:t>W.grad</a:t>
-            </a:r>
-            <a:endParaRPr lang="en-US" altLang="ko-KR" sz="1400" dirty="0">
-              <a:latin typeface="D2Coding" panose="020B0609020101020101" pitchFamily="49" charset="-127"/>
-              <a:ea typeface="D2Coding" panose="020B0609020101020101" pitchFamily="49" charset="-127"/>
-            </a:endParaRPr>
-          </a:p>
-          <a:p>
-            <a:r>
-              <a:rPr lang="en-US" altLang="ko-KR" sz="1400" dirty="0">
-                <a:latin typeface="D2Coding" panose="020B0609020101020101" pitchFamily="49" charset="-127"/>
-                <a:ea typeface="D2Coding" panose="020B0609020101020101" pitchFamily="49" charset="-127"/>
-              </a:rPr>
-              <a:t>        ...</a:t>
-            </a:r>
-          </a:p>
-        </p:txBody>
-      </p:sp>
+      </p:pic>
     </p:spTree>
     <p:extLst>
       <p:ext uri="{BB962C8B-B14F-4D97-AF65-F5344CB8AC3E}">
-        <p14:creationId xmlns:p14="http://schemas.microsoft.com/office/powerpoint/2010/main" val="1678031342"/>
+        <p14:creationId xmlns:p14="http://schemas.microsoft.com/office/powerpoint/2010/main" val="454619773"/>
       </p:ext>
     </p:extLst>
   </p:cSld>
@@ -23780,7 +25519,7 @@
               <a:pPr/>
               <a:t>9</a:t>
             </a:fld>
-            <a:endParaRPr lang="ko-KR" altLang="en-US" noProof="0"/>
+            <a:endParaRPr lang="ko-KR" altLang="en-US" noProof="0" dirty="0"/>
           </a:p>
         </p:txBody>
       </p:sp>
@@ -24115,8 +25854,8 @@
         </p:nvSpPr>
         <p:spPr>
           <a:xfrm>
-            <a:off x="4219575" y="2603235"/>
-            <a:ext cx="7258050" cy="783356"/>
+            <a:off x="5120004" y="2510872"/>
+            <a:ext cx="6503843" cy="1020216"/>
           </a:xfrm>
           <a:prstGeom prst="rect">
             <a:avLst/>
@@ -24137,7 +25876,12 @@
               <a:buChar char="§"/>
             </a:pPr>
             <a:r>
-              <a:rPr lang="en-US" altLang="ko-KR" sz="1600" dirty="0">
+              <a:rPr lang="en-US" altLang="ko-KR" sz="1400" dirty="0">
+                <a:ln>
+                  <a:solidFill>
+                    <a:srgbClr val="002060"/>
+                  </a:solidFill>
+                </a:ln>
                 <a:latin typeface="맑은 고딕 Semilight" panose="020B0502040204020203" pitchFamily="50" charset="-127"/>
                 <a:ea typeface="맑은 고딕 Semilight" panose="020B0502040204020203" pitchFamily="50" charset="-127"/>
                 <a:cs typeface="맑은 고딕 Semilight" panose="020B0502040204020203" pitchFamily="50" charset="-127"/>
@@ -24145,34 +25889,34 @@
               <a:t>Gradient Descent </a:t>
             </a:r>
             <a:r>
-              <a:rPr lang="ko-KR" altLang="en-US" sz="1600" dirty="0">
-                <a:latin typeface="맑은 고딕 Semilight" panose="020B0502040204020203" pitchFamily="50" charset="-127"/>
-                <a:ea typeface="맑은 고딕 Semilight" panose="020B0502040204020203" pitchFamily="50" charset="-127"/>
-                <a:cs typeface="맑은 고딕 Semilight" panose="020B0502040204020203" pitchFamily="50" charset="-127"/>
-              </a:rPr>
-              <a:t>방식 </a:t>
-            </a:r>
-            <a:r>
-              <a:rPr lang="en-US" altLang="ko-KR" sz="1600" dirty="0">
-                <a:latin typeface="맑은 고딕 Semilight" panose="020B0502040204020203" pitchFamily="50" charset="-127"/>
-                <a:ea typeface="맑은 고딕 Semilight" panose="020B0502040204020203" pitchFamily="50" charset="-127"/>
-                <a:cs typeface="맑은 고딕 Semilight" panose="020B0502040204020203" pitchFamily="50" charset="-127"/>
-              </a:rPr>
-              <a:t>: </a:t>
-            </a:r>
-            <a:r>
-              <a:rPr lang="ko-KR" altLang="en-US" sz="1600" dirty="0">
-                <a:latin typeface="맑은 고딕 Semilight" panose="020B0502040204020203" pitchFamily="50" charset="-127"/>
-                <a:ea typeface="맑은 고딕 Semilight" panose="020B0502040204020203" pitchFamily="50" charset="-127"/>
-                <a:cs typeface="맑은 고딕 Semilight" panose="020B0502040204020203" pitchFamily="50" charset="-127"/>
-              </a:rPr>
-              <a:t>미분 계산 횟수</a:t>
-            </a:r>
-            <a:endParaRPr lang="en-US" altLang="ko-KR" sz="1600" dirty="0">
-              <a:latin typeface="맑은 고딕 Semilight" panose="020B0502040204020203" pitchFamily="50" charset="-127"/>
-              <a:ea typeface="맑은 고딕 Semilight" panose="020B0502040204020203" pitchFamily="50" charset="-127"/>
-              <a:cs typeface="맑은 고딕 Semilight" panose="020B0502040204020203" pitchFamily="50" charset="-127"/>
-            </a:endParaRPr>
+              <a:rPr lang="ko-KR" altLang="en-US" sz="1400" dirty="0">
+                <a:ln>
+                  <a:solidFill>
+                    <a:srgbClr val="002060"/>
+                  </a:solidFill>
+                </a:ln>
+                <a:latin typeface="맑은 고딕 Semilight" panose="020B0502040204020203" pitchFamily="50" charset="-127"/>
+                <a:ea typeface="맑은 고딕 Semilight" panose="020B0502040204020203" pitchFamily="50" charset="-127"/>
+                <a:cs typeface="맑은 고딕 Semilight" panose="020B0502040204020203" pitchFamily="50" charset="-127"/>
+              </a:rPr>
+              <a:t>방식</a:t>
+            </a:r>
+            <a:r>
+              <a:rPr lang="ko-KR" altLang="en-US" sz="1400" dirty="0">
+                <a:latin typeface="맑은 고딕 Semilight" panose="020B0502040204020203" pitchFamily="50" charset="-127"/>
+                <a:ea typeface="맑은 고딕 Semilight" panose="020B0502040204020203" pitchFamily="50" charset="-127"/>
+                <a:cs typeface="맑은 고딕 Semilight" panose="020B0502040204020203" pitchFamily="50" charset="-127"/>
+              </a:rPr>
+              <a:t> </a:t>
+            </a:r>
+            <a:r>
+              <a:rPr lang="en-US" altLang="ko-KR" sz="1400" dirty="0">
+                <a:latin typeface="맑은 고딕 Semilight" panose="020B0502040204020203" pitchFamily="50" charset="-127"/>
+                <a:ea typeface="맑은 고딕 Semilight" panose="020B0502040204020203" pitchFamily="50" charset="-127"/>
+                <a:cs typeface="맑은 고딕 Semilight" panose="020B0502040204020203" pitchFamily="50" charset="-127"/>
+              </a:rPr>
+              <a:t>:</a:t>
+            </a:r>
           </a:p>
           <a:p>
             <a:pPr marL="742950" lvl="1" indent="-285750">
@@ -24183,7 +25927,71 @@
               <a:buChar char="§"/>
             </a:pPr>
             <a:r>
-              <a:rPr lang="ko-KR" altLang="en-US" sz="1600" dirty="0" err="1">
+              <a:rPr lang="en-US" altLang="ko-KR" sz="1400" dirty="0">
+                <a:latin typeface="맑은 고딕 Semilight" panose="020B0502040204020203" pitchFamily="50" charset="-127"/>
+                <a:ea typeface="맑은 고딕 Semilight" panose="020B0502040204020203" pitchFamily="50" charset="-127"/>
+                <a:cs typeface="맑은 고딕 Semilight" panose="020B0502040204020203" pitchFamily="50" charset="-127"/>
+              </a:rPr>
+              <a:t>Forward,</a:t>
+            </a:r>
+            <a:r>
+              <a:rPr lang="ko-KR" altLang="en-US" sz="1400" dirty="0">
+                <a:latin typeface="맑은 고딕 Semilight" panose="020B0502040204020203" pitchFamily="50" charset="-127"/>
+                <a:ea typeface="맑은 고딕 Semilight" panose="020B0502040204020203" pitchFamily="50" charset="-127"/>
+                <a:cs typeface="맑은 고딕 Semilight" panose="020B0502040204020203" pitchFamily="50" charset="-127"/>
+              </a:rPr>
+              <a:t> </a:t>
+            </a:r>
+            <a:r>
+              <a:rPr lang="en-US" altLang="ko-KR" sz="1400" dirty="0">
+                <a:latin typeface="맑은 고딕 Semilight" panose="020B0502040204020203" pitchFamily="50" charset="-127"/>
+                <a:ea typeface="맑은 고딕 Semilight" panose="020B0502040204020203" pitchFamily="50" charset="-127"/>
+                <a:cs typeface="맑은 고딕 Semilight" panose="020B0502040204020203" pitchFamily="50" charset="-127"/>
+              </a:rPr>
+              <a:t>Back</a:t>
+            </a:r>
+            <a:r>
+              <a:rPr lang="ko-KR" altLang="en-US" sz="1400" dirty="0">
+                <a:latin typeface="맑은 고딕 Semilight" panose="020B0502040204020203" pitchFamily="50" charset="-127"/>
+                <a:ea typeface="맑은 고딕 Semilight" panose="020B0502040204020203" pitchFamily="50" charset="-127"/>
+                <a:cs typeface="맑은 고딕 Semilight" panose="020B0502040204020203" pitchFamily="50" charset="-127"/>
+              </a:rPr>
+              <a:t> </a:t>
+            </a:r>
+            <a:r>
+              <a:rPr lang="en-US" altLang="ko-KR" sz="1400" dirty="0">
+                <a:latin typeface="맑은 고딕 Semilight" panose="020B0502040204020203" pitchFamily="50" charset="-127"/>
+                <a:ea typeface="맑은 고딕 Semilight" panose="020B0502040204020203" pitchFamily="50" charset="-127"/>
+                <a:cs typeface="맑은 고딕 Semilight" panose="020B0502040204020203" pitchFamily="50" charset="-127"/>
+              </a:rPr>
+              <a:t>ward</a:t>
+            </a:r>
+            <a:r>
+              <a:rPr lang="ko-KR" altLang="en-US" sz="1400" dirty="0">
+                <a:latin typeface="맑은 고딕 Semilight" panose="020B0502040204020203" pitchFamily="50" charset="-127"/>
+                <a:ea typeface="맑은 고딕 Semilight" panose="020B0502040204020203" pitchFamily="50" charset="-127"/>
+                <a:cs typeface="맑은 고딕 Semilight" panose="020B0502040204020203" pitchFamily="50" charset="-127"/>
+              </a:rPr>
+              <a:t> </a:t>
+            </a:r>
+            <a:r>
+              <a:rPr lang="en-US" altLang="ko-KR" sz="1400" dirty="0">
+                <a:latin typeface="맑은 고딕 Semilight" panose="020B0502040204020203" pitchFamily="50" charset="-127"/>
+                <a:ea typeface="맑은 고딕 Semilight" panose="020B0502040204020203" pitchFamily="50" charset="-127"/>
+                <a:cs typeface="맑은 고딕 Semilight" panose="020B0502040204020203" pitchFamily="50" charset="-127"/>
+              </a:rPr>
+              <a:t>pass</a:t>
+            </a:r>
+            <a:r>
+              <a:rPr lang="ko-KR" altLang="en-US" sz="1400" dirty="0">
+                <a:latin typeface="맑은 고딕 Semilight" panose="020B0502040204020203" pitchFamily="50" charset="-127"/>
+                <a:ea typeface="맑은 고딕 Semilight" panose="020B0502040204020203" pitchFamily="50" charset="-127"/>
+                <a:cs typeface="맑은 고딕 Semilight" panose="020B0502040204020203" pitchFamily="50" charset="-127"/>
+              </a:rPr>
+              <a:t> </a:t>
+            </a:r>
+            <a:r>
+              <a:rPr lang="ko-KR" altLang="en-US" sz="1400" dirty="0" err="1">
                 <a:latin typeface="맑은 고딕 Semilight" panose="020B0502040204020203" pitchFamily="50" charset="-127"/>
                 <a:ea typeface="맑은 고딕 Semilight" panose="020B0502040204020203" pitchFamily="50" charset="-127"/>
                 <a:cs typeface="맑은 고딕 Semilight" panose="020B0502040204020203" pitchFamily="50" charset="-127"/>
@@ -24191,7 +25999,7 @@
               <a:t>에포크당</a:t>
             </a:r>
             <a:r>
-              <a:rPr lang="ko-KR" altLang="en-US" sz="1600" dirty="0">
+              <a:rPr lang="ko-KR" altLang="en-US" sz="1400" dirty="0">
                 <a:latin typeface="맑은 고딕 Semilight" panose="020B0502040204020203" pitchFamily="50" charset="-127"/>
                 <a:ea typeface="맑은 고딕 Semilight" panose="020B0502040204020203" pitchFamily="50" charset="-127"/>
                 <a:cs typeface="맑은 고딕 Semilight" panose="020B0502040204020203" pitchFamily="50" charset="-127"/>
@@ -24199,7 +26007,7 @@
               <a:t> </a:t>
             </a:r>
             <a:r>
-              <a:rPr lang="en-US" altLang="ko-KR" sz="1600" dirty="0">
+              <a:rPr lang="en-US" altLang="ko-KR" sz="1400" dirty="0">
                 <a:latin typeface="맑은 고딕 Semilight" panose="020B0502040204020203" pitchFamily="50" charset="-127"/>
                 <a:ea typeface="맑은 고딕 Semilight" panose="020B0502040204020203" pitchFamily="50" charset="-127"/>
                 <a:cs typeface="맑은 고딕 Semilight" panose="020B0502040204020203" pitchFamily="50" charset="-127"/>
@@ -24207,74 +26015,51 @@
               <a:t>1</a:t>
             </a:r>
             <a:r>
-              <a:rPr lang="ko-KR" altLang="en-US" sz="1600" dirty="0">
+              <a:rPr lang="ko-KR" altLang="en-US" sz="1400" dirty="0">
                 <a:latin typeface="맑은 고딕 Semilight" panose="020B0502040204020203" pitchFamily="50" charset="-127"/>
                 <a:ea typeface="맑은 고딕 Semilight" panose="020B0502040204020203" pitchFamily="50" charset="-127"/>
                 <a:cs typeface="맑은 고딕 Semilight" panose="020B0502040204020203" pitchFamily="50" charset="-127"/>
               </a:rPr>
               <a:t>회 </a:t>
             </a:r>
-            <a:r>
-              <a:rPr lang="en-US" altLang="ko-KR" sz="1600" dirty="0">
-                <a:latin typeface="맑은 고딕 Semilight" panose="020B0502040204020203" pitchFamily="50" charset="-127"/>
-                <a:ea typeface="맑은 고딕 Semilight" panose="020B0502040204020203" pitchFamily="50" charset="-127"/>
-                <a:cs typeface="맑은 고딕 Semilight" panose="020B0502040204020203" pitchFamily="50" charset="-127"/>
-              </a:rPr>
-              <a:t>(</a:t>
-            </a:r>
-            <a:r>
-              <a:rPr lang="ko-KR" altLang="en-US" sz="1600" dirty="0">
-                <a:latin typeface="맑은 고딕 Semilight" panose="020B0502040204020203" pitchFamily="50" charset="-127"/>
-                <a:ea typeface="맑은 고딕 Semilight" panose="020B0502040204020203" pitchFamily="50" charset="-127"/>
-                <a:cs typeface="맑은 고딕 Semilight" panose="020B0502040204020203" pitchFamily="50" charset="-127"/>
-              </a:rPr>
-              <a:t>하지만 </a:t>
-            </a:r>
-            <a:r>
-              <a:rPr lang="en-US" altLang="ko-KR" sz="1600" dirty="0">
-                <a:latin typeface="맑은 고딕 Semilight" panose="020B0502040204020203" pitchFamily="50" charset="-127"/>
-                <a:ea typeface="맑은 고딕 Semilight" panose="020B0502040204020203" pitchFamily="50" charset="-127"/>
-                <a:cs typeface="맑은 고딕 Semilight" panose="020B0502040204020203" pitchFamily="50" charset="-127"/>
-              </a:rPr>
-              <a:t>1</a:t>
-            </a:r>
-            <a:r>
-              <a:rPr lang="ko-KR" altLang="en-US" sz="1600" dirty="0">
-                <a:latin typeface="맑은 고딕 Semilight" panose="020B0502040204020203" pitchFamily="50" charset="-127"/>
-                <a:ea typeface="맑은 고딕 Semilight" panose="020B0502040204020203" pitchFamily="50" charset="-127"/>
-                <a:cs typeface="맑은 고딕 Semilight" panose="020B0502040204020203" pitchFamily="50" charset="-127"/>
-              </a:rPr>
-              <a:t>회 연산 시 데이터 </a:t>
-            </a:r>
-            <a:r>
-              <a:rPr lang="en-US" altLang="ko-KR" sz="1600" dirty="0">
-                <a:latin typeface="맑은 고딕 Semilight" panose="020B0502040204020203" pitchFamily="50" charset="-127"/>
-                <a:ea typeface="맑은 고딕 Semilight" panose="020B0502040204020203" pitchFamily="50" charset="-127"/>
-                <a:cs typeface="맑은 고딕 Semilight" panose="020B0502040204020203" pitchFamily="50" charset="-127"/>
-              </a:rPr>
-              <a:t>100</a:t>
-            </a:r>
-            <a:r>
-              <a:rPr lang="ko-KR" altLang="en-US" sz="1600" dirty="0">
-                <a:latin typeface="맑은 고딕 Semilight" panose="020B0502040204020203" pitchFamily="50" charset="-127"/>
-                <a:ea typeface="맑은 고딕 Semilight" panose="020B0502040204020203" pitchFamily="50" charset="-127"/>
-                <a:cs typeface="맑은 고딕 Semilight" panose="020B0502040204020203" pitchFamily="50" charset="-127"/>
-              </a:rPr>
-              <a:t>개 항을 모두 계산</a:t>
-            </a:r>
-            <a:r>
-              <a:rPr lang="en-US" altLang="ko-KR" sz="1600" dirty="0">
-                <a:latin typeface="맑은 고딕 Semilight" panose="020B0502040204020203" pitchFamily="50" charset="-127"/>
-                <a:ea typeface="맑은 고딕 Semilight" panose="020B0502040204020203" pitchFamily="50" charset="-127"/>
-                <a:cs typeface="맑은 고딕 Semilight" panose="020B0502040204020203" pitchFamily="50" charset="-127"/>
-              </a:rPr>
-              <a:t>)</a:t>
-            </a:r>
-            <a:endParaRPr lang="ko-KR" altLang="en-US" sz="1600" dirty="0">
+            <a:endParaRPr lang="en-US" altLang="ko-KR" sz="1400" dirty="0">
               <a:latin typeface="맑은 고딕 Semilight" panose="020B0502040204020203" pitchFamily="50" charset="-127"/>
               <a:ea typeface="맑은 고딕 Semilight" panose="020B0502040204020203" pitchFamily="50" charset="-127"/>
               <a:cs typeface="맑은 고딕 Semilight" panose="020B0502040204020203" pitchFamily="50" charset="-127"/>
             </a:endParaRPr>
+          </a:p>
+          <a:p>
+            <a:pPr marL="742950" lvl="1" indent="-285750">
+              <a:lnSpc>
+                <a:spcPct val="150000"/>
+              </a:lnSpc>
+              <a:buFont typeface="Wingdings" panose="05000000000000000000" pitchFamily="2" charset="2"/>
+              <a:buChar char="§"/>
+            </a:pPr>
+            <a:r>
+              <a:rPr lang="ko-KR" altLang="en-US" sz="1400" dirty="0">
+                <a:latin typeface="맑은 고딕 Semilight" panose="020B0502040204020203" pitchFamily="50" charset="-127"/>
+                <a:ea typeface="맑은 고딕 Semilight" panose="020B0502040204020203" pitchFamily="50" charset="-127"/>
+                <a:cs typeface="맑은 고딕 Semilight" panose="020B0502040204020203" pitchFamily="50" charset="-127"/>
+              </a:rPr>
+              <a:t>안정적이지만 </a:t>
+            </a:r>
+            <a:r>
+              <a:rPr lang="ko-KR" altLang="en-US" sz="1400" dirty="0" err="1">
+                <a:latin typeface="맑은 고딕 Semilight" panose="020B0502040204020203" pitchFamily="50" charset="-127"/>
+                <a:ea typeface="맑은 고딕 Semilight" panose="020B0502040204020203" pitchFamily="50" charset="-127"/>
+                <a:cs typeface="맑은 고딕 Semilight" panose="020B0502040204020203" pitchFamily="50" charset="-127"/>
+              </a:rPr>
+              <a:t>계산량이</a:t>
+            </a:r>
+            <a:r>
+              <a:rPr lang="ko-KR" altLang="en-US" sz="1400" dirty="0">
+                <a:latin typeface="맑은 고딕 Semilight" panose="020B0502040204020203" pitchFamily="50" charset="-127"/>
+                <a:ea typeface="맑은 고딕 Semilight" panose="020B0502040204020203" pitchFamily="50" charset="-127"/>
+                <a:cs typeface="맑은 고딕 Semilight" panose="020B0502040204020203" pitchFamily="50" charset="-127"/>
+              </a:rPr>
+              <a:t> 많음</a:t>
+            </a:r>
           </a:p>
         </p:txBody>
       </p:sp>
@@ -24292,8 +26077,8 @@
         </p:nvSpPr>
         <p:spPr>
           <a:xfrm>
-            <a:off x="4219575" y="3816064"/>
-            <a:ext cx="7258050" cy="783356"/>
+            <a:off x="5120004" y="3826168"/>
+            <a:ext cx="6503843" cy="1020216"/>
           </a:xfrm>
           <a:prstGeom prst="rect">
             <a:avLst/>
@@ -24314,7 +26099,12 @@
               <a:buChar char="§"/>
             </a:pPr>
             <a:r>
-              <a:rPr lang="en-US" altLang="ko-KR" sz="1600" dirty="0">
+              <a:rPr lang="en-US" altLang="ko-KR" sz="1400" dirty="0">
+                <a:ln>
+                  <a:solidFill>
+                    <a:srgbClr val="002060"/>
+                  </a:solidFill>
+                </a:ln>
                 <a:latin typeface="맑은 고딕 Semilight" panose="020B0502040204020203" pitchFamily="50" charset="-127"/>
                 <a:ea typeface="맑은 고딕 Semilight" panose="020B0502040204020203" pitchFamily="50" charset="-127"/>
                 <a:cs typeface="맑은 고딕 Semilight" panose="020B0502040204020203" pitchFamily="50" charset="-127"/>
@@ -24322,7 +26112,12 @@
               <a:t>Stochastic Gradient Descent </a:t>
             </a:r>
             <a:r>
-              <a:rPr lang="ko-KR" altLang="en-US" sz="1600" dirty="0">
+              <a:rPr lang="ko-KR" altLang="en-US" sz="1400" dirty="0">
+                <a:ln>
+                  <a:solidFill>
+                    <a:srgbClr val="002060"/>
+                  </a:solidFill>
+                </a:ln>
                 <a:latin typeface="맑은 고딕 Semilight" panose="020B0502040204020203" pitchFamily="50" charset="-127"/>
                 <a:ea typeface="맑은 고딕 Semilight" panose="020B0502040204020203" pitchFamily="50" charset="-127"/>
                 <a:cs typeface="맑은 고딕 Semilight" panose="020B0502040204020203" pitchFamily="50" charset="-127"/>
@@ -24330,26 +26125,13 @@
               <a:t>방식 </a:t>
             </a:r>
             <a:r>
-              <a:rPr lang="en-US" altLang="ko-KR" sz="1600" dirty="0">
+              <a:rPr lang="en-US" altLang="ko-KR" sz="1400" dirty="0">
                 <a:latin typeface="맑은 고딕 Semilight" panose="020B0502040204020203" pitchFamily="50" charset="-127"/>
                 <a:ea typeface="맑은 고딕 Semilight" panose="020B0502040204020203" pitchFamily="50" charset="-127"/>
                 <a:cs typeface="맑은 고딕 Semilight" panose="020B0502040204020203" pitchFamily="50" charset="-127"/>
               </a:rPr>
               <a:t>: </a:t>
             </a:r>
-            <a:r>
-              <a:rPr lang="ko-KR" altLang="en-US" sz="1600" dirty="0">
-                <a:latin typeface="맑은 고딕 Semilight" panose="020B0502040204020203" pitchFamily="50" charset="-127"/>
-                <a:ea typeface="맑은 고딕 Semilight" panose="020B0502040204020203" pitchFamily="50" charset="-127"/>
-                <a:cs typeface="맑은 고딕 Semilight" panose="020B0502040204020203" pitchFamily="50" charset="-127"/>
-              </a:rPr>
-              <a:t>미분 계산 횟수</a:t>
-            </a:r>
-            <a:endParaRPr lang="en-US" altLang="ko-KR" sz="1600" dirty="0">
-              <a:latin typeface="맑은 고딕 Semilight" panose="020B0502040204020203" pitchFamily="50" charset="-127"/>
-              <a:ea typeface="맑은 고딕 Semilight" panose="020B0502040204020203" pitchFamily="50" charset="-127"/>
-              <a:cs typeface="맑은 고딕 Semilight" panose="020B0502040204020203" pitchFamily="50" charset="-127"/>
-            </a:endParaRPr>
           </a:p>
           <a:p>
             <a:pPr marL="742950" lvl="1" indent="-285750">
@@ -24360,7 +26142,71 @@
               <a:buChar char="§"/>
             </a:pPr>
             <a:r>
-              <a:rPr lang="ko-KR" altLang="en-US" sz="1600" dirty="0" err="1">
+              <a:rPr lang="en-US" altLang="ko-KR" sz="1400" dirty="0">
+                <a:latin typeface="맑은 고딕 Semilight" panose="020B0502040204020203" pitchFamily="50" charset="-127"/>
+                <a:ea typeface="맑은 고딕 Semilight" panose="020B0502040204020203" pitchFamily="50" charset="-127"/>
+                <a:cs typeface="맑은 고딕 Semilight" panose="020B0502040204020203" pitchFamily="50" charset="-127"/>
+              </a:rPr>
+              <a:t>Forward,</a:t>
+            </a:r>
+            <a:r>
+              <a:rPr lang="ko-KR" altLang="en-US" sz="1400" dirty="0">
+                <a:latin typeface="맑은 고딕 Semilight" panose="020B0502040204020203" pitchFamily="50" charset="-127"/>
+                <a:ea typeface="맑은 고딕 Semilight" panose="020B0502040204020203" pitchFamily="50" charset="-127"/>
+                <a:cs typeface="맑은 고딕 Semilight" panose="020B0502040204020203" pitchFamily="50" charset="-127"/>
+              </a:rPr>
+              <a:t> </a:t>
+            </a:r>
+            <a:r>
+              <a:rPr lang="en-US" altLang="ko-KR" sz="1400" dirty="0">
+                <a:latin typeface="맑은 고딕 Semilight" panose="020B0502040204020203" pitchFamily="50" charset="-127"/>
+                <a:ea typeface="맑은 고딕 Semilight" panose="020B0502040204020203" pitchFamily="50" charset="-127"/>
+                <a:cs typeface="맑은 고딕 Semilight" panose="020B0502040204020203" pitchFamily="50" charset="-127"/>
+              </a:rPr>
+              <a:t>Back</a:t>
+            </a:r>
+            <a:r>
+              <a:rPr lang="ko-KR" altLang="en-US" sz="1400" dirty="0">
+                <a:latin typeface="맑은 고딕 Semilight" panose="020B0502040204020203" pitchFamily="50" charset="-127"/>
+                <a:ea typeface="맑은 고딕 Semilight" panose="020B0502040204020203" pitchFamily="50" charset="-127"/>
+                <a:cs typeface="맑은 고딕 Semilight" panose="020B0502040204020203" pitchFamily="50" charset="-127"/>
+              </a:rPr>
+              <a:t> </a:t>
+            </a:r>
+            <a:r>
+              <a:rPr lang="en-US" altLang="ko-KR" sz="1400" dirty="0">
+                <a:latin typeface="맑은 고딕 Semilight" panose="020B0502040204020203" pitchFamily="50" charset="-127"/>
+                <a:ea typeface="맑은 고딕 Semilight" panose="020B0502040204020203" pitchFamily="50" charset="-127"/>
+                <a:cs typeface="맑은 고딕 Semilight" panose="020B0502040204020203" pitchFamily="50" charset="-127"/>
+              </a:rPr>
+              <a:t>ward</a:t>
+            </a:r>
+            <a:r>
+              <a:rPr lang="ko-KR" altLang="en-US" sz="1400" dirty="0">
+                <a:latin typeface="맑은 고딕 Semilight" panose="020B0502040204020203" pitchFamily="50" charset="-127"/>
+                <a:ea typeface="맑은 고딕 Semilight" panose="020B0502040204020203" pitchFamily="50" charset="-127"/>
+                <a:cs typeface="맑은 고딕 Semilight" panose="020B0502040204020203" pitchFamily="50" charset="-127"/>
+              </a:rPr>
+              <a:t> </a:t>
+            </a:r>
+            <a:r>
+              <a:rPr lang="en-US" altLang="ko-KR" sz="1400" dirty="0">
+                <a:latin typeface="맑은 고딕 Semilight" panose="020B0502040204020203" pitchFamily="50" charset="-127"/>
+                <a:ea typeface="맑은 고딕 Semilight" panose="020B0502040204020203" pitchFamily="50" charset="-127"/>
+                <a:cs typeface="맑은 고딕 Semilight" panose="020B0502040204020203" pitchFamily="50" charset="-127"/>
+              </a:rPr>
+              <a:t>pass</a:t>
+            </a:r>
+            <a:r>
+              <a:rPr lang="ko-KR" altLang="en-US" sz="1400" dirty="0">
+                <a:latin typeface="맑은 고딕 Semilight" panose="020B0502040204020203" pitchFamily="50" charset="-127"/>
+                <a:ea typeface="맑은 고딕 Semilight" panose="020B0502040204020203" pitchFamily="50" charset="-127"/>
+                <a:cs typeface="맑은 고딕 Semilight" panose="020B0502040204020203" pitchFamily="50" charset="-127"/>
+              </a:rPr>
+              <a:t> </a:t>
+            </a:r>
+            <a:r>
+              <a:rPr lang="ko-KR" altLang="en-US" sz="1400" dirty="0" err="1">
                 <a:latin typeface="맑은 고딕 Semilight" panose="020B0502040204020203" pitchFamily="50" charset="-127"/>
                 <a:ea typeface="맑은 고딕 Semilight" panose="020B0502040204020203" pitchFamily="50" charset="-127"/>
                 <a:cs typeface="맑은 고딕 Semilight" panose="020B0502040204020203" pitchFamily="50" charset="-127"/>
@@ -24368,7 +26214,7 @@
               <a:t>에포크당</a:t>
             </a:r>
             <a:r>
-              <a:rPr lang="ko-KR" altLang="en-US" sz="1600" dirty="0">
+              <a:rPr lang="ko-KR" altLang="en-US" sz="1400" dirty="0">
                 <a:latin typeface="맑은 고딕 Semilight" panose="020B0502040204020203" pitchFamily="50" charset="-127"/>
                 <a:ea typeface="맑은 고딕 Semilight" panose="020B0502040204020203" pitchFamily="50" charset="-127"/>
                 <a:cs typeface="맑은 고딕 Semilight" panose="020B0502040204020203" pitchFamily="50" charset="-127"/>
@@ -24376,7 +26222,7 @@
               <a:t> </a:t>
             </a:r>
             <a:r>
-              <a:rPr lang="en-US" altLang="ko-KR" sz="1600" dirty="0">
+              <a:rPr lang="en-US" altLang="ko-KR" sz="1400" dirty="0">
                 <a:latin typeface="맑은 고딕 Semilight" panose="020B0502040204020203" pitchFamily="50" charset="-127"/>
                 <a:ea typeface="맑은 고딕 Semilight" panose="020B0502040204020203" pitchFamily="50" charset="-127"/>
                 <a:cs typeface="맑은 고딕 Semilight" panose="020B0502040204020203" pitchFamily="50" charset="-127"/>
@@ -24384,12 +26230,34 @@
               <a:t>100</a:t>
             </a:r>
             <a:r>
-              <a:rPr lang="ko-KR" altLang="en-US" sz="1600" dirty="0">
-                <a:latin typeface="맑은 고딕 Semilight" panose="020B0502040204020203" pitchFamily="50" charset="-127"/>
-                <a:ea typeface="맑은 고딕 Semilight" panose="020B0502040204020203" pitchFamily="50" charset="-127"/>
-                <a:cs typeface="맑은 고딕 Semilight" panose="020B0502040204020203" pitchFamily="50" charset="-127"/>
-              </a:rPr>
-              <a:t>회</a:t>
+              <a:rPr lang="ko-KR" altLang="en-US" sz="1400" dirty="0">
+                <a:latin typeface="맑은 고딕 Semilight" panose="020B0502040204020203" pitchFamily="50" charset="-127"/>
+                <a:ea typeface="맑은 고딕 Semilight" panose="020B0502040204020203" pitchFamily="50" charset="-127"/>
+                <a:cs typeface="맑은 고딕 Semilight" panose="020B0502040204020203" pitchFamily="50" charset="-127"/>
+              </a:rPr>
+              <a:t>회 </a:t>
+            </a:r>
+            <a:endParaRPr lang="en-US" altLang="ko-KR" sz="1400" dirty="0">
+              <a:latin typeface="맑은 고딕 Semilight" panose="020B0502040204020203" pitchFamily="50" charset="-127"/>
+              <a:ea typeface="맑은 고딕 Semilight" panose="020B0502040204020203" pitchFamily="50" charset="-127"/>
+              <a:cs typeface="맑은 고딕 Semilight" panose="020B0502040204020203" pitchFamily="50" charset="-127"/>
+            </a:endParaRPr>
+          </a:p>
+          <a:p>
+            <a:pPr marL="742950" lvl="1" indent="-285750">
+              <a:lnSpc>
+                <a:spcPct val="150000"/>
+              </a:lnSpc>
+              <a:buFont typeface="Wingdings" panose="05000000000000000000" pitchFamily="2" charset="2"/>
+              <a:buChar char="§"/>
+            </a:pPr>
+            <a:r>
+              <a:rPr lang="ko-KR" altLang="en-US" sz="1400" dirty="0">
+                <a:latin typeface="맑은 고딕 Semilight" panose="020B0502040204020203" pitchFamily="50" charset="-127"/>
+                <a:ea typeface="맑은 고딕 Semilight" panose="020B0502040204020203" pitchFamily="50" charset="-127"/>
+                <a:cs typeface="맑은 고딕 Semilight" panose="020B0502040204020203" pitchFamily="50" charset="-127"/>
+              </a:rPr>
+              <a:t>빠르지만 경로가 매우 불규칙함</a:t>
             </a:r>
           </a:p>
         </p:txBody>
@@ -24408,8 +26276,8 @@
         </p:nvSpPr>
         <p:spPr>
           <a:xfrm>
-            <a:off x="4219575" y="5028894"/>
-            <a:ext cx="7258050" cy="783356"/>
+            <a:off x="5120004" y="5141463"/>
+            <a:ext cx="6503843" cy="1020216"/>
           </a:xfrm>
           <a:prstGeom prst="rect">
             <a:avLst/>
@@ -24430,7 +26298,12 @@
               <a:buChar char="§"/>
             </a:pPr>
             <a:r>
-              <a:rPr lang="en-US" altLang="ko-KR" sz="1600" dirty="0">
+              <a:rPr lang="en-US" altLang="ko-KR" sz="1400" dirty="0">
+                <a:ln>
+                  <a:solidFill>
+                    <a:srgbClr val="002060"/>
+                  </a:solidFill>
+                </a:ln>
                 <a:latin typeface="맑은 고딕 Semilight" panose="020B0502040204020203" pitchFamily="50" charset="-127"/>
                 <a:ea typeface="맑은 고딕 Semilight" panose="020B0502040204020203" pitchFamily="50" charset="-127"/>
                 <a:cs typeface="맑은 고딕 Semilight" panose="020B0502040204020203" pitchFamily="50" charset="-127"/>
@@ -24438,7 +26311,12 @@
               <a:t>Mini-batch SGD </a:t>
             </a:r>
             <a:r>
-              <a:rPr lang="ko-KR" altLang="en-US" sz="1600" dirty="0">
+              <a:rPr lang="ko-KR" altLang="en-US" sz="1400" dirty="0">
+                <a:ln>
+                  <a:solidFill>
+                    <a:srgbClr val="002060"/>
+                  </a:solidFill>
+                </a:ln>
                 <a:latin typeface="맑은 고딕 Semilight" panose="020B0502040204020203" pitchFamily="50" charset="-127"/>
                 <a:ea typeface="맑은 고딕 Semilight" panose="020B0502040204020203" pitchFamily="50" charset="-127"/>
                 <a:cs typeface="맑은 고딕 Semilight" panose="020B0502040204020203" pitchFamily="50" charset="-127"/>
@@ -24446,26 +26324,26 @@
               <a:t>방식</a:t>
             </a:r>
             <a:r>
-              <a:rPr lang="en-US" altLang="ko-KR" sz="1600" dirty="0">
-                <a:latin typeface="맑은 고딕 Semilight" panose="020B0502040204020203" pitchFamily="50" charset="-127"/>
-                <a:ea typeface="맑은 고딕 Semilight" panose="020B0502040204020203" pitchFamily="50" charset="-127"/>
-                <a:cs typeface="맑은 고딕 Semilight" panose="020B0502040204020203" pitchFamily="50" charset="-127"/>
-              </a:rPr>
-              <a:t> : </a:t>
-            </a:r>
-            <a:r>
-              <a:rPr lang="ko-KR" altLang="en-US" sz="1600" dirty="0">
-                <a:latin typeface="맑은 고딕 Semilight" panose="020B0502040204020203" pitchFamily="50" charset="-127"/>
-                <a:ea typeface="맑은 고딕 Semilight" panose="020B0502040204020203" pitchFamily="50" charset="-127"/>
-                <a:cs typeface="맑은 고딕 Semilight" panose="020B0502040204020203" pitchFamily="50" charset="-127"/>
-              </a:rPr>
-              <a:t>미분 계산 횟수</a:t>
-            </a:r>
-            <a:endParaRPr lang="en-US" altLang="ko-KR" sz="1600" dirty="0">
-              <a:latin typeface="맑은 고딕 Semilight" panose="020B0502040204020203" pitchFamily="50" charset="-127"/>
-              <a:ea typeface="맑은 고딕 Semilight" panose="020B0502040204020203" pitchFamily="50" charset="-127"/>
-              <a:cs typeface="맑은 고딕 Semilight" panose="020B0502040204020203" pitchFamily="50" charset="-127"/>
-            </a:endParaRPr>
+              <a:rPr lang="en-US" altLang="ko-KR" sz="1400" dirty="0">
+                <a:ln>
+                  <a:solidFill>
+                    <a:srgbClr val="002060"/>
+                  </a:solidFill>
+                </a:ln>
+                <a:latin typeface="맑은 고딕 Semilight" panose="020B0502040204020203" pitchFamily="50" charset="-127"/>
+                <a:ea typeface="맑은 고딕 Semilight" panose="020B0502040204020203" pitchFamily="50" charset="-127"/>
+                <a:cs typeface="맑은 고딕 Semilight" panose="020B0502040204020203" pitchFamily="50" charset="-127"/>
+              </a:rPr>
+              <a:t> </a:t>
+            </a:r>
+            <a:r>
+              <a:rPr lang="en-US" altLang="ko-KR" sz="1400" dirty="0">
+                <a:latin typeface="맑은 고딕 Semilight" panose="020B0502040204020203" pitchFamily="50" charset="-127"/>
+                <a:ea typeface="맑은 고딕 Semilight" panose="020B0502040204020203" pitchFamily="50" charset="-127"/>
+                <a:cs typeface="맑은 고딕 Semilight" panose="020B0502040204020203" pitchFamily="50" charset="-127"/>
+              </a:rPr>
+              <a:t>: </a:t>
+            </a:r>
           </a:p>
           <a:p>
             <a:pPr marL="742950" lvl="1" indent="-285750">
@@ -24476,7 +26354,71 @@
               <a:buChar char="§"/>
             </a:pPr>
             <a:r>
-              <a:rPr lang="ko-KR" altLang="en-US" sz="1600" dirty="0" err="1">
+              <a:rPr lang="en-US" altLang="ko-KR" sz="1400" dirty="0">
+                <a:latin typeface="맑은 고딕 Semilight" panose="020B0502040204020203" pitchFamily="50" charset="-127"/>
+                <a:ea typeface="맑은 고딕 Semilight" panose="020B0502040204020203" pitchFamily="50" charset="-127"/>
+                <a:cs typeface="맑은 고딕 Semilight" panose="020B0502040204020203" pitchFamily="50" charset="-127"/>
+              </a:rPr>
+              <a:t>Forward,</a:t>
+            </a:r>
+            <a:r>
+              <a:rPr lang="ko-KR" altLang="en-US" sz="1400" dirty="0">
+                <a:latin typeface="맑은 고딕 Semilight" panose="020B0502040204020203" pitchFamily="50" charset="-127"/>
+                <a:ea typeface="맑은 고딕 Semilight" panose="020B0502040204020203" pitchFamily="50" charset="-127"/>
+                <a:cs typeface="맑은 고딕 Semilight" panose="020B0502040204020203" pitchFamily="50" charset="-127"/>
+              </a:rPr>
+              <a:t> </a:t>
+            </a:r>
+            <a:r>
+              <a:rPr lang="en-US" altLang="ko-KR" sz="1400" dirty="0">
+                <a:latin typeface="맑은 고딕 Semilight" panose="020B0502040204020203" pitchFamily="50" charset="-127"/>
+                <a:ea typeface="맑은 고딕 Semilight" panose="020B0502040204020203" pitchFamily="50" charset="-127"/>
+                <a:cs typeface="맑은 고딕 Semilight" panose="020B0502040204020203" pitchFamily="50" charset="-127"/>
+              </a:rPr>
+              <a:t>Back</a:t>
+            </a:r>
+            <a:r>
+              <a:rPr lang="ko-KR" altLang="en-US" sz="1400" dirty="0">
+                <a:latin typeface="맑은 고딕 Semilight" panose="020B0502040204020203" pitchFamily="50" charset="-127"/>
+                <a:ea typeface="맑은 고딕 Semilight" panose="020B0502040204020203" pitchFamily="50" charset="-127"/>
+                <a:cs typeface="맑은 고딕 Semilight" panose="020B0502040204020203" pitchFamily="50" charset="-127"/>
+              </a:rPr>
+              <a:t> </a:t>
+            </a:r>
+            <a:r>
+              <a:rPr lang="en-US" altLang="ko-KR" sz="1400" dirty="0">
+                <a:latin typeface="맑은 고딕 Semilight" panose="020B0502040204020203" pitchFamily="50" charset="-127"/>
+                <a:ea typeface="맑은 고딕 Semilight" panose="020B0502040204020203" pitchFamily="50" charset="-127"/>
+                <a:cs typeface="맑은 고딕 Semilight" panose="020B0502040204020203" pitchFamily="50" charset="-127"/>
+              </a:rPr>
+              <a:t>ward</a:t>
+            </a:r>
+            <a:r>
+              <a:rPr lang="ko-KR" altLang="en-US" sz="1400" dirty="0">
+                <a:latin typeface="맑은 고딕 Semilight" panose="020B0502040204020203" pitchFamily="50" charset="-127"/>
+                <a:ea typeface="맑은 고딕 Semilight" panose="020B0502040204020203" pitchFamily="50" charset="-127"/>
+                <a:cs typeface="맑은 고딕 Semilight" panose="020B0502040204020203" pitchFamily="50" charset="-127"/>
+              </a:rPr>
+              <a:t> </a:t>
+            </a:r>
+            <a:r>
+              <a:rPr lang="en-US" altLang="ko-KR" sz="1400" dirty="0">
+                <a:latin typeface="맑은 고딕 Semilight" panose="020B0502040204020203" pitchFamily="50" charset="-127"/>
+                <a:ea typeface="맑은 고딕 Semilight" panose="020B0502040204020203" pitchFamily="50" charset="-127"/>
+                <a:cs typeface="맑은 고딕 Semilight" panose="020B0502040204020203" pitchFamily="50" charset="-127"/>
+              </a:rPr>
+              <a:t>pass</a:t>
+            </a:r>
+            <a:r>
+              <a:rPr lang="ko-KR" altLang="en-US" sz="1400" dirty="0">
+                <a:latin typeface="맑은 고딕 Semilight" panose="020B0502040204020203" pitchFamily="50" charset="-127"/>
+                <a:ea typeface="맑은 고딕 Semilight" panose="020B0502040204020203" pitchFamily="50" charset="-127"/>
+                <a:cs typeface="맑은 고딕 Semilight" panose="020B0502040204020203" pitchFamily="50" charset="-127"/>
+              </a:rPr>
+              <a:t> </a:t>
+            </a:r>
+            <a:r>
+              <a:rPr lang="ko-KR" altLang="en-US" sz="1400" dirty="0" err="1">
                 <a:latin typeface="맑은 고딕 Semilight" panose="020B0502040204020203" pitchFamily="50" charset="-127"/>
                 <a:ea typeface="맑은 고딕 Semilight" panose="020B0502040204020203" pitchFamily="50" charset="-127"/>
                 <a:cs typeface="맑은 고딕 Semilight" panose="020B0502040204020203" pitchFamily="50" charset="-127"/>
@@ -24484,7 +26426,7 @@
               <a:t>에포크당</a:t>
             </a:r>
             <a:r>
-              <a:rPr lang="ko-KR" altLang="en-US" sz="1600" dirty="0">
+              <a:rPr lang="ko-KR" altLang="en-US" sz="1400" dirty="0">
                 <a:latin typeface="맑은 고딕 Semilight" panose="020B0502040204020203" pitchFamily="50" charset="-127"/>
                 <a:ea typeface="맑은 고딕 Semilight" panose="020B0502040204020203" pitchFamily="50" charset="-127"/>
                 <a:cs typeface="맑은 고딕 Semilight" panose="020B0502040204020203" pitchFamily="50" charset="-127"/>
@@ -24492,7 +26434,7 @@
               <a:t> </a:t>
             </a:r>
             <a:r>
-              <a:rPr lang="en-US" altLang="ko-KR" sz="1600" dirty="0">
+              <a:rPr lang="en-US" altLang="ko-KR" sz="1400" dirty="0">
                 <a:latin typeface="맑은 고딕 Semilight" panose="020B0502040204020203" pitchFamily="50" charset="-127"/>
                 <a:ea typeface="맑은 고딕 Semilight" panose="020B0502040204020203" pitchFamily="50" charset="-127"/>
                 <a:cs typeface="맑은 고딕 Semilight" panose="020B0502040204020203" pitchFamily="50" charset="-127"/>
@@ -24500,74 +26442,67 @@
               <a:t>10</a:t>
             </a:r>
             <a:r>
-              <a:rPr lang="ko-KR" altLang="en-US" sz="1600" dirty="0">
+              <a:rPr lang="ko-KR" altLang="en-US" sz="1400" dirty="0">
                 <a:latin typeface="맑은 고딕 Semilight" panose="020B0502040204020203" pitchFamily="50" charset="-127"/>
                 <a:ea typeface="맑은 고딕 Semilight" panose="020B0502040204020203" pitchFamily="50" charset="-127"/>
                 <a:cs typeface="맑은 고딕 Semilight" panose="020B0502040204020203" pitchFamily="50" charset="-127"/>
               </a:rPr>
               <a:t>회 </a:t>
             </a:r>
-            <a:r>
-              <a:rPr lang="en-US" altLang="ko-KR" sz="1600" dirty="0">
-                <a:latin typeface="맑은 고딕 Semilight" panose="020B0502040204020203" pitchFamily="50" charset="-127"/>
-                <a:ea typeface="맑은 고딕 Semilight" panose="020B0502040204020203" pitchFamily="50" charset="-127"/>
-                <a:cs typeface="맑은 고딕 Semilight" panose="020B0502040204020203" pitchFamily="50" charset="-127"/>
-              </a:rPr>
-              <a:t>(</a:t>
-            </a:r>
-            <a:r>
-              <a:rPr lang="ko-KR" altLang="en-US" sz="1600" dirty="0">
-                <a:latin typeface="맑은 고딕 Semilight" panose="020B0502040204020203" pitchFamily="50" charset="-127"/>
-                <a:ea typeface="맑은 고딕 Semilight" panose="020B0502040204020203" pitchFamily="50" charset="-127"/>
-                <a:cs typeface="맑은 고딕 Semilight" panose="020B0502040204020203" pitchFamily="50" charset="-127"/>
-              </a:rPr>
-              <a:t>데이터 </a:t>
-            </a:r>
-            <a:r>
-              <a:rPr lang="en-US" altLang="ko-KR" sz="1600" dirty="0">
-                <a:latin typeface="맑은 고딕 Semilight" panose="020B0502040204020203" pitchFamily="50" charset="-127"/>
-                <a:ea typeface="맑은 고딕 Semilight" panose="020B0502040204020203" pitchFamily="50" charset="-127"/>
-                <a:cs typeface="맑은 고딕 Semilight" panose="020B0502040204020203" pitchFamily="50" charset="-127"/>
-              </a:rPr>
-              <a:t>100</a:t>
-            </a:r>
-            <a:r>
-              <a:rPr lang="ko-KR" altLang="en-US" sz="1600" dirty="0">
-                <a:latin typeface="맑은 고딕 Semilight" panose="020B0502040204020203" pitchFamily="50" charset="-127"/>
-                <a:ea typeface="맑은 고딕 Semilight" panose="020B0502040204020203" pitchFamily="50" charset="-127"/>
-                <a:cs typeface="맑은 고딕 Semilight" panose="020B0502040204020203" pitchFamily="50" charset="-127"/>
-              </a:rPr>
-              <a:t>개 </a:t>
-            </a:r>
-            <a:r>
-              <a:rPr lang="en-US" altLang="ko-KR" sz="1600" dirty="0">
-                <a:latin typeface="맑은 고딕 Semilight" panose="020B0502040204020203" pitchFamily="50" charset="-127"/>
-                <a:ea typeface="맑은 고딕 Semilight" panose="020B0502040204020203" pitchFamily="50" charset="-127"/>
-                <a:cs typeface="맑은 고딕 Semilight" panose="020B0502040204020203" pitchFamily="50" charset="-127"/>
-              </a:rPr>
-              <a:t>/ </a:t>
-            </a:r>
-            <a:r>
-              <a:rPr lang="ko-KR" altLang="en-US" sz="1600" dirty="0">
-                <a:latin typeface="맑은 고딕 Semilight" panose="020B0502040204020203" pitchFamily="50" charset="-127"/>
-                <a:ea typeface="맑은 고딕 Semilight" panose="020B0502040204020203" pitchFamily="50" charset="-127"/>
-                <a:cs typeface="맑은 고딕 Semilight" panose="020B0502040204020203" pitchFamily="50" charset="-127"/>
-              </a:rPr>
-              <a:t>배치 </a:t>
-            </a:r>
-            <a:r>
-              <a:rPr lang="en-US" altLang="ko-KR" sz="1600" dirty="0">
-                <a:latin typeface="맑은 고딕 Semilight" panose="020B0502040204020203" pitchFamily="50" charset="-127"/>
-                <a:ea typeface="맑은 고딕 Semilight" panose="020B0502040204020203" pitchFamily="50" charset="-127"/>
-                <a:cs typeface="맑은 고딕 Semilight" panose="020B0502040204020203" pitchFamily="50" charset="-127"/>
-              </a:rPr>
-              <a:t>10)</a:t>
-            </a:r>
-            <a:endParaRPr lang="ko-KR" altLang="en-US" sz="1600" dirty="0">
+            <a:endParaRPr lang="en-US" altLang="ko-KR" sz="1400" dirty="0">
               <a:latin typeface="맑은 고딕 Semilight" panose="020B0502040204020203" pitchFamily="50" charset="-127"/>
               <a:ea typeface="맑은 고딕 Semilight" panose="020B0502040204020203" pitchFamily="50" charset="-127"/>
               <a:cs typeface="맑은 고딕 Semilight" panose="020B0502040204020203" pitchFamily="50" charset="-127"/>
             </a:endParaRPr>
+          </a:p>
+          <a:p>
+            <a:pPr marL="742950" lvl="1" indent="-285750">
+              <a:lnSpc>
+                <a:spcPct val="150000"/>
+              </a:lnSpc>
+              <a:buFont typeface="Wingdings" panose="05000000000000000000" pitchFamily="2" charset="2"/>
+              <a:buChar char="§"/>
+            </a:pPr>
+            <a:r>
+              <a:rPr lang="ko-KR" altLang="en-US" sz="1400" dirty="0">
+                <a:latin typeface="맑은 고딕 Semilight" panose="020B0502040204020203" pitchFamily="50" charset="-127"/>
+                <a:ea typeface="맑은 고딕 Semilight" panose="020B0502040204020203" pitchFamily="50" charset="-127"/>
+                <a:cs typeface="맑은 고딕 Semilight" panose="020B0502040204020203" pitchFamily="50" charset="-127"/>
+              </a:rPr>
+              <a:t>배치 사이즈 </a:t>
+            </a:r>
+            <a:r>
+              <a:rPr lang="en-US" altLang="ko-KR" sz="1400" dirty="0">
+                <a:latin typeface="맑은 고딕 Semilight" panose="020B0502040204020203" pitchFamily="50" charset="-127"/>
+                <a:ea typeface="맑은 고딕 Semilight" panose="020B0502040204020203" pitchFamily="50" charset="-127"/>
+                <a:cs typeface="맑은 고딕 Semilight" panose="020B0502040204020203" pitchFamily="50" charset="-127"/>
+              </a:rPr>
+              <a:t>10</a:t>
+            </a:r>
+            <a:r>
+              <a:rPr lang="ko-KR" altLang="en-US" sz="1400" dirty="0">
+                <a:latin typeface="맑은 고딕 Semilight" panose="020B0502040204020203" pitchFamily="50" charset="-127"/>
+                <a:ea typeface="맑은 고딕 Semilight" panose="020B0502040204020203" pitchFamily="50" charset="-127"/>
+                <a:cs typeface="맑은 고딕 Semilight" panose="020B0502040204020203" pitchFamily="50" charset="-127"/>
+              </a:rPr>
+              <a:t>일 때</a:t>
+            </a:r>
+            <a:r>
+              <a:rPr lang="en-US" altLang="ko-KR" sz="1400" dirty="0">
+                <a:latin typeface="맑은 고딕 Semilight" panose="020B0502040204020203" pitchFamily="50" charset="-127"/>
+                <a:ea typeface="맑은 고딕 Semilight" panose="020B0502040204020203" pitchFamily="50" charset="-127"/>
+                <a:cs typeface="맑은 고딕 Semilight" panose="020B0502040204020203" pitchFamily="50" charset="-127"/>
+              </a:rPr>
+              <a:t>, </a:t>
+            </a:r>
+            <a:r>
+              <a:rPr lang="ko-KR" altLang="en-US" sz="1400" dirty="0">
+                <a:latin typeface="맑은 고딕 Semilight" panose="020B0502040204020203" pitchFamily="50" charset="-127"/>
+                <a:ea typeface="맑은 고딕 Semilight" panose="020B0502040204020203" pitchFamily="50" charset="-127"/>
+                <a:cs typeface="맑은 고딕 Semilight" panose="020B0502040204020203" pitchFamily="50" charset="-127"/>
+              </a:rPr>
+              <a:t>효율과 안정성의 균형</a:t>
+            </a:r>
           </a:p>
         </p:txBody>
       </p:sp>
@@ -24601,6 +26536,124 @@
           </a:prstGeom>
         </p:spPr>
       </p:pic>
+      <p:sp>
+        <p:nvSpPr>
+          <p:cNvPr id="3" name="왼쪽 중괄호 2">
+            <a:extLst>
+              <a:ext uri="{FF2B5EF4-FFF2-40B4-BE49-F238E27FC236}">
+                <a16:creationId xmlns:a16="http://schemas.microsoft.com/office/drawing/2014/main" id="{BB8DB900-4FFD-E6C4-2286-8BB8EA883C1F}"/>
+              </a:ext>
+            </a:extLst>
+          </p:cNvPr>
+          <p:cNvSpPr/>
+          <p:nvPr/>
+        </p:nvSpPr>
+        <p:spPr>
+          <a:xfrm>
+            <a:off x="4737477" y="2805328"/>
+            <a:ext cx="294034" cy="2551764"/>
+          </a:xfrm>
+          <a:prstGeom prst="leftBrace">
+            <a:avLst>
+              <a:gd name="adj1" fmla="val 37963"/>
+              <a:gd name="adj2" fmla="val 50000"/>
+            </a:avLst>
+          </a:prstGeom>
+        </p:spPr>
+        <p:style>
+          <a:lnRef idx="1">
+            <a:schemeClr val="dk1"/>
+          </a:lnRef>
+          <a:fillRef idx="0">
+            <a:schemeClr val="dk1"/>
+          </a:fillRef>
+          <a:effectRef idx="0">
+            <a:schemeClr val="dk1"/>
+          </a:effectRef>
+          <a:fontRef idx="minor">
+            <a:schemeClr val="tx1"/>
+          </a:fontRef>
+        </p:style>
+        <p:txBody>
+          <a:bodyPr rtlCol="0" anchor="ctr"/>
+          <a:lstStyle/>
+          <a:p>
+            <a:pPr algn="ctr"/>
+            <a:endParaRPr lang="ko-KR" altLang="en-US"/>
+          </a:p>
+        </p:txBody>
+      </p:sp>
+      <p:sp>
+        <p:nvSpPr>
+          <p:cNvPr id="6" name="TextBox 5">
+            <a:extLst>
+              <a:ext uri="{FF2B5EF4-FFF2-40B4-BE49-F238E27FC236}">
+                <a16:creationId xmlns:a16="http://schemas.microsoft.com/office/drawing/2014/main" id="{076B7183-ED37-2D03-2B43-F497448D7B23}"/>
+              </a:ext>
+            </a:extLst>
+          </p:cNvPr>
+          <p:cNvSpPr txBox="1"/>
+          <p:nvPr/>
+        </p:nvSpPr>
+        <p:spPr>
+          <a:xfrm>
+            <a:off x="3669893" y="3813056"/>
+            <a:ext cx="1293091" cy="523220"/>
+          </a:xfrm>
+          <a:prstGeom prst="rect">
+            <a:avLst/>
+          </a:prstGeom>
+          <a:noFill/>
+        </p:spPr>
+        <p:txBody>
+          <a:bodyPr wrap="square">
+            <a:spAutoFit/>
+          </a:bodyPr>
+          <a:lstStyle/>
+          <a:p>
+            <a:pPr algn="ctr"/>
+            <a:r>
+              <a:rPr lang="ko-KR" altLang="en-US" sz="1400" dirty="0">
+                <a:ln>
+                  <a:solidFill>
+                    <a:srgbClr val="002060"/>
+                  </a:solidFill>
+                </a:ln>
+                <a:latin typeface="맑은 고딕 Semilight" panose="020B0502040204020203" pitchFamily="50" charset="-127"/>
+                <a:ea typeface="맑은 고딕 Semilight" panose="020B0502040204020203" pitchFamily="50" charset="-127"/>
+                <a:cs typeface="맑은 고딕 Semilight" panose="020B0502040204020203" pitchFamily="50" charset="-127"/>
+              </a:rPr>
+              <a:t>미분계산</a:t>
+            </a:r>
+            <a:r>
+              <a:rPr lang="en-US" altLang="ko-KR" sz="1400" dirty="0">
+                <a:ln>
+                  <a:solidFill>
+                    <a:srgbClr val="002060"/>
+                  </a:solidFill>
+                </a:ln>
+                <a:latin typeface="맑은 고딕 Semilight" panose="020B0502040204020203" pitchFamily="50" charset="-127"/>
+                <a:ea typeface="맑은 고딕 Semilight" panose="020B0502040204020203" pitchFamily="50" charset="-127"/>
+                <a:cs typeface="맑은 고딕 Semilight" panose="020B0502040204020203" pitchFamily="50" charset="-127"/>
+              </a:rPr>
+              <a:t> </a:t>
+            </a:r>
+            <a:r>
+              <a:rPr lang="ko-KR" altLang="en-US" sz="1400" dirty="0">
+                <a:ln>
+                  <a:solidFill>
+                    <a:srgbClr val="002060"/>
+                  </a:solidFill>
+                </a:ln>
+                <a:latin typeface="맑은 고딕 Semilight" panose="020B0502040204020203" pitchFamily="50" charset="-127"/>
+                <a:ea typeface="맑은 고딕 Semilight" panose="020B0502040204020203" pitchFamily="50" charset="-127"/>
+                <a:cs typeface="맑은 고딕 Semilight" panose="020B0502040204020203" pitchFamily="50" charset="-127"/>
+              </a:rPr>
+              <a:t>횟수</a:t>
+            </a:r>
+          </a:p>
+        </p:txBody>
+      </p:sp>
     </p:spTree>
     <p:extLst>
       <p:ext uri="{BB962C8B-B14F-4D97-AF65-F5344CB8AC3E}">
